--- a/docs/pmr_daily.pptx
+++ b/docs/pmr_daily.pptx
@@ -3197,7 +3197,7 @@
                 </a:solidFill>
                 <a:latin typeface="Segoe UI"/>
               </a:rPr>
-              <a:t>Friday, 04 Sep 2026 08:49 SGT</a:t>
+              <a:t>Monday, 07 Sep 2026 08:44 SGT</a:t>
             </a:r>
           </a:p>
         </p:txBody>
@@ -3265,7 +3265,7 @@
                 </a:solidFill>
                 <a:latin typeface="Segoe UI"/>
               </a:rPr>
-              <a:t>RAG 10R / 21A / 15G   |   60.9% above 200DMA   |   Portfolio Rs 1,926,452 (+12.3%)</a:t>
+              <a:t>RAG 11R / 18A / 17G   |   58.7% above 200DMA   |   Portfolio Rs 1,913,287 (+11.6%)</a:t>
             </a:r>
           </a:p>
         </p:txBody>
@@ -3587,7 +3587,7 @@
                 </a:solidFill>
                 <a:latin typeface="Segoe UI"/>
               </a:rPr>
-              <a:t>Bitcoin</a:t>
+              <a:t>Nvidia</a:t>
             </a:r>
           </a:p>
         </p:txBody>
@@ -3617,11 +3617,11 @@
             <a:r>
               <a:rPr sz="900" b="0">
                 <a:solidFill>
-                  <a:srgbClr val="F59E0B"/>
-                </a:solidFill>
-                <a:latin typeface="Segoe UI"/>
-              </a:rPr>
-              <a:t>BTC-USD · AMBER</a:t>
+                  <a:srgbClr val="22C55E"/>
+                </a:solidFill>
+                <a:latin typeface="Segoe UI"/>
+              </a:rPr>
+              <a:t>NVDA · GREEN</a:t>
             </a:r>
           </a:p>
         </p:txBody>
@@ -3655,7 +3655,7 @@
                 </a:solidFill>
                 <a:latin typeface="Segoe UI"/>
               </a:rPr>
-              <a:t>+3.3%</a:t>
+              <a:t>+4.3%</a:t>
             </a:r>
           </a:p>
         </p:txBody>
@@ -3713,7 +3713,7 @@
                 </a:solidFill>
                 <a:latin typeface="Segoe UI"/>
               </a:rPr>
-              <a:t>Bharti Airtel</a:t>
+              <a:t>Reliance</a:t>
             </a:r>
           </a:p>
         </p:txBody>
@@ -3747,7 +3747,7 @@
                 </a:solidFill>
                 <a:latin typeface="Segoe UI"/>
               </a:rPr>
-              <a:t>BHARTIARTL.NS · AMBER</a:t>
+              <a:t>RELIANCE.NS · AMBER</a:t>
             </a:r>
           </a:p>
         </p:txBody>
@@ -3781,7 +3781,7 @@
                 </a:solidFill>
                 <a:latin typeface="Segoe UI"/>
               </a:rPr>
-              <a:t>+3.2%</a:t>
+              <a:t>+3.5%</a:t>
             </a:r>
           </a:p>
         </p:txBody>
@@ -3907,7 +3907,7 @@
                 </a:solidFill>
                 <a:latin typeface="Segoe UI"/>
               </a:rPr>
-              <a:t>+2.9%</a:t>
+              <a:t>+3.4%</a:t>
             </a:r>
           </a:p>
         </p:txBody>
@@ -3965,7 +3965,7 @@
                 </a:solidFill>
                 <a:latin typeface="Segoe UI"/>
               </a:rPr>
-              <a:t>Apple</a:t>
+              <a:t>Solana</a:t>
             </a:r>
           </a:p>
         </p:txBody>
@@ -3995,11 +3995,11 @@
             <a:r>
               <a:rPr sz="900" b="0">
                 <a:solidFill>
-                  <a:srgbClr val="22C55E"/>
-                </a:solidFill>
-                <a:latin typeface="Segoe UI"/>
-              </a:rPr>
-              <a:t>AAPL · GREEN</a:t>
+                  <a:srgbClr val="F59E0B"/>
+                </a:solidFill>
+                <a:latin typeface="Segoe UI"/>
+              </a:rPr>
+              <a:t>SOL-USD · AMBER</a:t>
             </a:r>
           </a:p>
         </p:txBody>
@@ -4033,7 +4033,7 @@
                 </a:solidFill>
                 <a:latin typeface="Segoe UI"/>
               </a:rPr>
-              <a:t>+2.6%</a:t>
+              <a:t>+2.9%</a:t>
             </a:r>
           </a:p>
         </p:txBody>
@@ -4193,7 +4193,7 @@
                 </a:solidFill>
                 <a:latin typeface="Segoe UI"/>
               </a:rPr>
-              <a:t>-3.3%</a:t>
+              <a:t>-4.0%</a:t>
             </a:r>
           </a:p>
         </p:txBody>
@@ -4319,7 +4319,7 @@
                 </a:solidFill>
                 <a:latin typeface="Segoe UI"/>
               </a:rPr>
-              <a:t>-3.0%</a:t>
+              <a:t>-3.8%</a:t>
             </a:r>
           </a:p>
         </p:txBody>
@@ -4377,7 +4377,7 @@
                 </a:solidFill>
                 <a:latin typeface="Segoe UI"/>
               </a:rPr>
-              <a:t>Nikkei 225</a:t>
+              <a:t>USD/JPY</a:t>
             </a:r>
           </a:p>
         </p:txBody>
@@ -4411,7 +4411,7 @@
                 </a:solidFill>
                 <a:latin typeface="Segoe UI"/>
               </a:rPr>
-              <a:t>^N225 · AMBER</a:t>
+              <a:t>JPY=X · AMBER</a:t>
             </a:r>
           </a:p>
         </p:txBody>
@@ -4445,7 +4445,7 @@
                 </a:solidFill>
                 <a:latin typeface="Segoe UI"/>
               </a:rPr>
-              <a:t>-2.4%</a:t>
+              <a:t>-2.6%</a:t>
             </a:r>
           </a:p>
         </p:txBody>
@@ -4503,7 +4503,7 @@
                 </a:solidFill>
                 <a:latin typeface="Segoe UI"/>
               </a:rPr>
-              <a:t>Microsoft</a:t>
+              <a:t>ICICI Bank</a:t>
             </a:r>
           </a:p>
         </p:txBody>
@@ -4537,7 +4537,7 @@
                 </a:solidFill>
                 <a:latin typeface="Segoe UI"/>
               </a:rPr>
-              <a:t>MSFT · GREEN</a:t>
+              <a:t>ICICIBANK.NS · GREEN</a:t>
             </a:r>
           </a:p>
         </p:txBody>
@@ -4629,7 +4629,7 @@
                 </a:solidFill>
                 <a:latin typeface="Segoe UI"/>
               </a:rPr>
-              <a:t>Amazon</a:t>
+              <a:t>NIFTY IT</a:t>
             </a:r>
           </a:p>
         </p:txBody>
@@ -4659,11 +4659,11 @@
             <a:r>
               <a:rPr sz="900" b="0">
                 <a:solidFill>
-                  <a:srgbClr val="F59E0B"/>
-                </a:solidFill>
-                <a:latin typeface="Segoe UI"/>
-              </a:rPr>
-              <a:t>AMZN · AMBER</a:t>
+                  <a:srgbClr val="EF4444"/>
+                </a:solidFill>
+                <a:latin typeface="Segoe UI"/>
+              </a:rPr>
+              <a:t>^CNXIT · RED</a:t>
             </a:r>
           </a:p>
         </p:txBody>
@@ -4697,7 +4697,7 @@
                 </a:solidFill>
                 <a:latin typeface="Segoe UI"/>
               </a:rPr>
-              <a:t>-1.8%</a:t>
+              <a:t>-1.6%</a:t>
             </a:r>
           </a:p>
         </p:txBody>
@@ -4967,7 +4967,7 @@
                 </a:solidFill>
                 <a:latin typeface="Segoe UI"/>
               </a:rPr>
-              <a:t>Copper</a:t>
+              <a:t>Nvidia</a:t>
             </a:r>
           </a:p>
         </p:txBody>
@@ -5103,7 +5103,7 @@
                 </a:solidFill>
                 <a:latin typeface="Segoe UI"/>
               </a:rPr>
-              <a:t>Microsoft</a:t>
+              <a:t>Straits Times</a:t>
             </a:r>
           </a:p>
         </p:txBody>
@@ -5171,7 +5171,7 @@
                 </a:solidFill>
                 <a:latin typeface="Segoe UI"/>
               </a:rPr>
-              <a:t>83%</a:t>
+              <a:t>85%</a:t>
             </a:r>
           </a:p>
         </p:txBody>
@@ -5205,7 +5205,7 @@
                 </a:solidFill>
                 <a:latin typeface="Segoe UI"/>
               </a:rPr>
-              <a:t>above 200DMA · golden cross (50&gt;200) · MACD bearish</a:t>
+              <a:t>above 200DMA · golden cross (50&gt;200) · MACD bullish</a:t>
             </a:r>
           </a:p>
         </p:txBody>
@@ -5239,7 +5239,7 @@
                 </a:solidFill>
                 <a:latin typeface="Segoe UI"/>
               </a:rPr>
-              <a:t>Nvidia</a:t>
+              <a:t>Copper</a:t>
             </a:r>
           </a:p>
         </p:txBody>
@@ -5375,7 +5375,7 @@
                 </a:solidFill>
                 <a:latin typeface="Segoe UI"/>
               </a:rPr>
-              <a:t>NIFTY IT</a:t>
+              <a:t>US Energy</a:t>
             </a:r>
           </a:p>
         </p:txBody>
@@ -5443,7 +5443,7 @@
                 </a:solidFill>
                 <a:latin typeface="Segoe UI"/>
               </a:rPr>
-              <a:t>82%</a:t>
+              <a:t>84%</a:t>
             </a:r>
           </a:p>
         </p:txBody>
@@ -5477,7 +5477,7 @@
                 </a:solidFill>
                 <a:latin typeface="Segoe UI"/>
               </a:rPr>
-              <a:t>above 200DMA · golden cross (50&gt;200) · MACD bullish</a:t>
+              <a:t>above 200DMA · golden cross (50&gt;200) · MACD bearish</a:t>
             </a:r>
           </a:p>
         </p:txBody>
@@ -5511,7 +5511,7 @@
                 </a:solidFill>
                 <a:latin typeface="Segoe UI"/>
               </a:rPr>
-              <a:t>ICICI Bank</a:t>
+              <a:t>Microsoft</a:t>
             </a:r>
           </a:p>
         </p:txBody>
@@ -5579,7 +5579,7 @@
                 </a:solidFill>
                 <a:latin typeface="Segoe UI"/>
               </a:rPr>
-              <a:t>93%</a:t>
+              <a:t>84%</a:t>
             </a:r>
           </a:p>
         </p:txBody>
@@ -5613,7 +5613,7 @@
                 </a:solidFill>
                 <a:latin typeface="Segoe UI"/>
               </a:rPr>
-              <a:t>above 200DMA · golden cross (50&gt;200) · MACD bullish</a:t>
+              <a:t>above 200DMA · golden cross (50&gt;200) · MACD bearish</a:t>
             </a:r>
           </a:p>
         </p:txBody>
@@ -5647,7 +5647,7 @@
                 </a:solidFill>
                 <a:latin typeface="Segoe UI"/>
               </a:rPr>
-              <a:t>Apple</a:t>
+              <a:t>US Financials</a:t>
             </a:r>
           </a:p>
         </p:txBody>
@@ -5715,7 +5715,7 @@
                 </a:solidFill>
                 <a:latin typeface="Segoe UI"/>
               </a:rPr>
-              <a:t>92%</a:t>
+              <a:t>81%</a:t>
             </a:r>
           </a:p>
         </p:txBody>
@@ -5749,7 +5749,7 @@
                 </a:solidFill>
                 <a:latin typeface="Segoe UI"/>
               </a:rPr>
-              <a:t>above 200DMA · golden cross (50&gt;200) · MACD bullish</a:t>
+              <a:t>above 200DMA · golden cross (50&gt;200) · MACD bearish</a:t>
             </a:r>
           </a:p>
         </p:txBody>
@@ -5783,7 +5783,7 @@
                 </a:solidFill>
                 <a:latin typeface="Segoe UI"/>
               </a:rPr>
-              <a:t>US Financials</a:t>
+              <a:t>Ethereum</a:t>
             </a:r>
           </a:p>
         </p:txBody>
@@ -5817,7 +5817,7 @@
                 </a:solidFill>
                 <a:latin typeface="Segoe UI"/>
               </a:rPr>
-              <a:t>STRONG BUY</a:t>
+              <a:t>BUY</a:t>
             </a:r>
           </a:p>
         </p:txBody>
@@ -5851,7 +5851,7 @@
                 </a:solidFill>
                 <a:latin typeface="Segoe UI"/>
               </a:rPr>
-              <a:t>80%</a:t>
+              <a:t>78%</a:t>
             </a:r>
           </a:p>
         </p:txBody>
@@ -5919,7 +5919,7 @@
                 </a:solidFill>
                 <a:latin typeface="Segoe UI"/>
               </a:rPr>
-              <a:t>US Energy</a:t>
+              <a:t>Solana</a:t>
             </a:r>
           </a:p>
         </p:txBody>
@@ -5987,7 +5987,7 @@
                 </a:solidFill>
                 <a:latin typeface="Segoe UI"/>
               </a:rPr>
-              <a:t>93%</a:t>
+              <a:t>76%</a:t>
             </a:r>
           </a:p>
         </p:txBody>
@@ -6021,7 +6021,7 @@
                 </a:solidFill>
                 <a:latin typeface="Segoe UI"/>
               </a:rPr>
-              <a:t>above 200DMA · golden cross (50&gt;200) · MACD bullish</a:t>
+              <a:t>above 200DMA · golden cross (50&gt;200) · MACD bearish</a:t>
             </a:r>
           </a:p>
         </p:txBody>
@@ -6055,7 +6055,7 @@
                 </a:solidFill>
                 <a:latin typeface="Segoe UI"/>
               </a:rPr>
-              <a:t>Ethereum</a:t>
+              <a:t>Hang Seng</a:t>
             </a:r>
           </a:p>
         </p:txBody>
@@ -6123,7 +6123,7 @@
                 </a:solidFill>
                 <a:latin typeface="Segoe UI"/>
               </a:rPr>
-              <a:t>78%</a:t>
+              <a:t>74%</a:t>
             </a:r>
           </a:p>
         </p:txBody>
@@ -6191,7 +6191,7 @@
                 </a:solidFill>
                 <a:latin typeface="Segoe UI"/>
               </a:rPr>
-              <a:t>Straits Times</a:t>
+              <a:t>NIFTY IT</a:t>
             </a:r>
           </a:p>
         </p:txBody>
@@ -6259,7 +6259,7 @@
                 </a:solidFill>
                 <a:latin typeface="Segoe UI"/>
               </a:rPr>
-              <a:t>71%</a:t>
+              <a:t>68%</a:t>
             </a:r>
           </a:p>
         </p:txBody>
@@ -6327,7 +6327,7 @@
                 </a:solidFill>
                 <a:latin typeface="Segoe UI"/>
               </a:rPr>
-              <a:t>Solana</a:t>
+              <a:t>Apple</a:t>
             </a:r>
           </a:p>
         </p:txBody>
@@ -6395,7 +6395,7 @@
                 </a:solidFill>
                 <a:latin typeface="Segoe UI"/>
               </a:rPr>
-              <a:t>75%</a:t>
+              <a:t>91%</a:t>
             </a:r>
           </a:p>
         </p:txBody>
@@ -6429,7 +6429,7 @@
                 </a:solidFill>
                 <a:latin typeface="Segoe UI"/>
               </a:rPr>
-              <a:t>above 200DMA · golden cross (50&gt;200) · MACD bearish</a:t>
+              <a:t>above 200DMA · golden cross (50&gt;200) · MACD bullish</a:t>
             </a:r>
           </a:p>
         </p:txBody>
@@ -6463,7 +6463,7 @@
                 </a:solidFill>
                 <a:latin typeface="Segoe UI"/>
               </a:rPr>
-              <a:t>S&amp;P 500</a:t>
+              <a:t>FTSE 100</a:t>
             </a:r>
           </a:p>
         </p:txBody>
@@ -6531,7 +6531,7 @@
                 </a:solidFill>
                 <a:latin typeface="Segoe UI"/>
               </a:rPr>
-              <a:t>68%</a:t>
+              <a:t>67%</a:t>
             </a:r>
           </a:p>
         </p:txBody>
@@ -7067,7 +7067,7 @@
                 </a:solidFill>
                 <a:latin typeface="Segoe UI"/>
               </a:rPr>
-              <a:t>81,145</a:t>
+              <a:t>80,141</a:t>
             </a:r>
           </a:p>
         </p:txBody>
@@ -7101,7 +7101,7 @@
                 </a:solidFill>
                 <a:latin typeface="Segoe UI"/>
               </a:rPr>
-              <a:t>Rs 766,614</a:t>
+              <a:t>Rs 757,136</a:t>
             </a:r>
           </a:p>
         </p:txBody>
@@ -7135,7 +7135,7 @@
                 </a:solidFill>
                 <a:latin typeface="Segoe UI"/>
               </a:rPr>
-              <a:t>Rs 199,764</a:t>
+              <a:t>Rs 190,286</a:t>
             </a:r>
           </a:p>
         </p:txBody>
@@ -7169,7 +7169,7 @@
                 </a:solidFill>
                 <a:latin typeface="Segoe UI"/>
               </a:rPr>
-              <a:t>+35.2%</a:t>
+              <a:t>+33.6%</a:t>
             </a:r>
           </a:p>
         </p:txBody>
@@ -7203,7 +7203,7 @@
                 </a:solidFill>
                 <a:latin typeface="Segoe UI"/>
               </a:rPr>
-              <a:t>+5.0%</a:t>
+              <a:t>+0.4%</a:t>
             </a:r>
           </a:p>
         </p:txBody>
@@ -7339,7 +7339,7 @@
                 </a:solidFill>
                 <a:latin typeface="Segoe UI"/>
               </a:rPr>
-              <a:t>4,523</a:t>
+              <a:t>4,477</a:t>
             </a:r>
           </a:p>
         </p:txBody>
@@ -7373,7 +7373,7 @@
                 </a:solidFill>
                 <a:latin typeface="Segoe UI"/>
               </a:rPr>
-              <a:t>Rs 427,273</a:t>
+              <a:t>Rs 422,927</a:t>
             </a:r>
           </a:p>
         </p:txBody>
@@ -7407,7 +7407,7 @@
                 </a:solidFill>
                 <a:latin typeface="Segoe UI"/>
               </a:rPr>
-              <a:t>Rs 209,980</a:t>
+              <a:t>Rs 205,634</a:t>
             </a:r>
           </a:p>
         </p:txBody>
@@ -7441,7 +7441,7 @@
                 </a:solidFill>
                 <a:latin typeface="Segoe UI"/>
               </a:rPr>
-              <a:t>+96.6%</a:t>
+              <a:t>+94.6%</a:t>
             </a:r>
           </a:p>
         </p:txBody>
@@ -7611,7 +7611,7 @@
                 </a:solidFill>
                 <a:latin typeface="Segoe UI"/>
               </a:rPr>
-              <a:t>325</a:t>
+              <a:t>320</a:t>
             </a:r>
           </a:p>
         </p:txBody>
@@ -7645,7 +7645,7 @@
                 </a:solidFill>
                 <a:latin typeface="Segoe UI"/>
               </a:rPr>
-              <a:t>Rs 307,006</a:t>
+              <a:t>Rs 302,292</a:t>
             </a:r>
           </a:p>
         </p:txBody>
@@ -7679,7 +7679,7 @@
                 </a:solidFill>
                 <a:latin typeface="Segoe UI"/>
               </a:rPr>
-              <a:t>Rs 132,227</a:t>
+              <a:t>Rs 127,513</a:t>
             </a:r>
           </a:p>
         </p:txBody>
@@ -7713,7 +7713,7 @@
                 </a:solidFill>
                 <a:latin typeface="Segoe UI"/>
               </a:rPr>
-              <a:t>+75.7%</a:t>
+              <a:t>+73.0%</a:t>
             </a:r>
           </a:p>
         </p:txBody>
@@ -7883,7 +7883,7 @@
                 </a:solidFill>
                 <a:latin typeface="Segoe UI"/>
               </a:rPr>
-              <a:t>224</a:t>
+              <a:t>230</a:t>
             </a:r>
           </a:p>
         </p:txBody>
@@ -7917,7 +7917,7 @@
                 </a:solidFill>
                 <a:latin typeface="Segoe UI"/>
               </a:rPr>
-              <a:t>Rs 169,609</a:t>
+              <a:t>Rs 174,106</a:t>
             </a:r>
           </a:p>
         </p:txBody>
@@ -7951,7 +7951,7 @@
                 </a:solidFill>
                 <a:latin typeface="Segoe UI"/>
               </a:rPr>
-              <a:t>Rs -170,501</a:t>
+              <a:t>Rs -166,004</a:t>
             </a:r>
           </a:p>
         </p:txBody>
@@ -7985,7 +7985,7 @@
                 </a:solidFill>
                 <a:latin typeface="Segoe UI"/>
               </a:rPr>
-              <a:t>-50.1%</a:t>
+              <a:t>-48.8%</a:t>
             </a:r>
           </a:p>
         </p:txBody>
@@ -8189,7 +8189,7 @@
                 </a:solidFill>
                 <a:latin typeface="Segoe UI"/>
               </a:rPr>
-              <a:t>Rs 90,424</a:t>
+              <a:t>Rs 90,400</a:t>
             </a:r>
           </a:p>
         </p:txBody>
@@ -8223,7 +8223,7 @@
                 </a:solidFill>
                 <a:latin typeface="Segoe UI"/>
               </a:rPr>
-              <a:t>Rs -21,576</a:t>
+              <a:t>Rs -21,600</a:t>
             </a:r>
           </a:p>
         </p:txBody>
@@ -8427,7 +8427,7 @@
                 </a:solidFill>
                 <a:latin typeface="Segoe UI"/>
               </a:rPr>
-              <a:t>1,302</a:t>
+              <a:t>1,322</a:t>
             </a:r>
           </a:p>
         </p:txBody>
@@ -8461,7 +8461,7 @@
                 </a:solidFill>
                 <a:latin typeface="Segoe UI"/>
               </a:rPr>
-              <a:t>Rs 65,125</a:t>
+              <a:t>Rs 66,100</a:t>
             </a:r>
           </a:p>
         </p:txBody>
@@ -8495,7 +8495,7 @@
                 </a:solidFill>
                 <a:latin typeface="Segoe UI"/>
               </a:rPr>
-              <a:t>Rs -57,375</a:t>
+              <a:t>Rs -56,400</a:t>
             </a:r>
           </a:p>
         </p:txBody>
@@ -8529,7 +8529,7 @@
                 </a:solidFill>
                 <a:latin typeface="Segoe UI"/>
               </a:rPr>
-              <a:t>-46.8%</a:t>
+              <a:t>-46.0%</a:t>
             </a:r>
           </a:p>
         </p:txBody>
@@ -8699,7 +8699,7 @@
                 </a:solidFill>
                 <a:latin typeface="Segoe UI"/>
               </a:rPr>
-              <a:t>2,320</a:t>
+              <a:t>2,304</a:t>
             </a:r>
           </a:p>
         </p:txBody>
@@ -8733,7 +8733,7 @@
                 </a:solidFill>
                 <a:latin typeface="Segoe UI"/>
               </a:rPr>
-              <a:t>Rs 58,003</a:t>
+              <a:t>Rs 57,600</a:t>
             </a:r>
           </a:p>
         </p:txBody>
@@ -8767,7 +8767,7 @@
                 </a:solidFill>
                 <a:latin typeface="Segoe UI"/>
               </a:rPr>
-              <a:t>Rs -31,997</a:t>
+              <a:t>Rs -32,400</a:t>
             </a:r>
           </a:p>
         </p:txBody>
@@ -8801,7 +8801,7 @@
                 </a:solidFill>
                 <a:latin typeface="Segoe UI"/>
               </a:rPr>
-              <a:t>-35.5%</a:t>
+              <a:t>-36.0%</a:t>
             </a:r>
           </a:p>
         </p:txBody>
@@ -8971,7 +8971,7 @@
                 </a:solidFill>
                 <a:latin typeface="Segoe UI"/>
               </a:rPr>
-              <a:t>707</a:t>
+              <a:t>712</a:t>
             </a:r>
           </a:p>
         </p:txBody>
@@ -9005,7 +9005,7 @@
                 </a:solidFill>
                 <a:latin typeface="Segoe UI"/>
               </a:rPr>
-              <a:t>Rs 42,399</a:t>
+              <a:t>Rs 42,726</a:t>
             </a:r>
           </a:p>
         </p:txBody>
@@ -9039,7 +9039,7 @@
                 </a:solidFill>
                 <a:latin typeface="Segoe UI"/>
               </a:rPr>
-              <a:t>Rs -48,801</a:t>
+              <a:t>Rs -48,474</a:t>
             </a:r>
           </a:p>
         </p:txBody>
@@ -9073,7 +9073,7 @@
                 </a:solidFill>
                 <a:latin typeface="Segoe UI"/>
               </a:rPr>
-              <a:t>-53.5%</a:t>
+              <a:t>-53.1%</a:t>
             </a:r>
           </a:p>
         </p:txBody>
@@ -9141,7 +9141,7 @@
                 </a:solidFill>
                 <a:latin typeface="Segoe UI"/>
               </a:rPr>
-              <a:t>Total Rs 1,926,452 | P&amp;L Rs 211,721 (+12.3%) | Sharpe 0.12 | Vol 19.57% | VaR95 -1.91%/day</a:t>
+              <a:t>Total Rs 1,913,287 | P&amp;L Rs 198,556 (+11.6%) | Sharpe 0.15 | Vol 19.61% | VaR95 -1.9%/day</a:t>
             </a:r>
           </a:p>
         </p:txBody>

--- a/docs/pmr_daily.pptx
+++ b/docs/pmr_daily.pptx
@@ -3197,7 +3197,7 @@
                 </a:solidFill>
                 <a:latin typeface="Segoe UI"/>
               </a:rPr>
-              <a:t>Monday, 07 Sep 2026 08:44 SGT</a:t>
+              <a:t>Tuesday, 08 Sep 2026 08:57 SGT</a:t>
             </a:r>
           </a:p>
         </p:txBody>
@@ -3265,7 +3265,7 @@
                 </a:solidFill>
                 <a:latin typeface="Segoe UI"/>
               </a:rPr>
-              <a:t>RAG 11R / 18A / 17G   |   58.7% above 200DMA   |   Portfolio Rs 1,913,287 (+11.6%)</a:t>
+              <a:t>RAG 12R / 17A / 17G   |   58.7% above 200DMA   |   Portfolio Rs 1,899,192 (+10.8%)</a:t>
             </a:r>
           </a:p>
         </p:txBody>
@@ -3529,7 +3529,7 @@
                 </a:solidFill>
                 <a:latin typeface="Segoe UI"/>
               </a:rPr>
-              <a:t>+6.7%</a:t>
+              <a:t>+7.7%</a:t>
             </a:r>
           </a:p>
         </p:txBody>
@@ -3713,7 +3713,7 @@
                 </a:solidFill>
                 <a:latin typeface="Segoe UI"/>
               </a:rPr>
-              <a:t>Reliance</a:t>
+              <a:t>ITC</a:t>
             </a:r>
           </a:p>
         </p:txBody>
@@ -3743,11 +3743,11 @@
             <a:r>
               <a:rPr sz="900" b="0">
                 <a:solidFill>
-                  <a:srgbClr val="F59E0B"/>
-                </a:solidFill>
-                <a:latin typeface="Segoe UI"/>
-              </a:rPr>
-              <a:t>RELIANCE.NS · AMBER</a:t>
+                  <a:srgbClr val="EF4444"/>
+                </a:solidFill>
+                <a:latin typeface="Segoe UI"/>
+              </a:rPr>
+              <a:t>ITC.NS · RED</a:t>
             </a:r>
           </a:p>
         </p:txBody>
@@ -3781,7 +3781,7 @@
                 </a:solidFill>
                 <a:latin typeface="Segoe UI"/>
               </a:rPr>
-              <a:t>+3.5%</a:t>
+              <a:t>+3.1%</a:t>
             </a:r>
           </a:p>
         </p:txBody>
@@ -3839,7 +3839,7 @@
                 </a:solidFill>
                 <a:latin typeface="Segoe UI"/>
               </a:rPr>
-              <a:t>ITC</a:t>
+              <a:t>Clean Energy</a:t>
             </a:r>
           </a:p>
         </p:txBody>
@@ -3873,7 +3873,7 @@
                 </a:solidFill>
                 <a:latin typeface="Segoe UI"/>
               </a:rPr>
-              <a:t>ITC.NS · RED</a:t>
+              <a:t>ICLN · RED</a:t>
             </a:r>
           </a:p>
         </p:txBody>
@@ -3907,7 +3907,7 @@
                 </a:solidFill>
                 <a:latin typeface="Segoe UI"/>
               </a:rPr>
-              <a:t>+3.4%</a:t>
+              <a:t>+2.7%</a:t>
             </a:r>
           </a:p>
         </p:txBody>
@@ -3965,7 +3965,7 @@
                 </a:solidFill>
                 <a:latin typeface="Segoe UI"/>
               </a:rPr>
-              <a:t>Solana</a:t>
+              <a:t>Reliance</a:t>
             </a:r>
           </a:p>
         </p:txBody>
@@ -3999,7 +3999,7 @@
                 </a:solidFill>
                 <a:latin typeface="Segoe UI"/>
               </a:rPr>
-              <a:t>SOL-USD · AMBER</a:t>
+              <a:t>RELIANCE.NS · AMBER</a:t>
             </a:r>
           </a:p>
         </p:txBody>
@@ -4033,7 +4033,7 @@
                 </a:solidFill>
                 <a:latin typeface="Segoe UI"/>
               </a:rPr>
-              <a:t>+2.9%</a:t>
+              <a:t>+2.5%</a:t>
             </a:r>
           </a:p>
         </p:txBody>
@@ -4193,7 +4193,7 @@
                 </a:solidFill>
                 <a:latin typeface="Segoe UI"/>
               </a:rPr>
-              <a:t>-4.0%</a:t>
+              <a:t>-5.4%</a:t>
             </a:r>
           </a:p>
         </p:txBody>
@@ -4251,7 +4251,7 @@
                 </a:solidFill>
                 <a:latin typeface="Segoe UI"/>
               </a:rPr>
-              <a:t>Tesla</a:t>
+              <a:t>Infosys</a:t>
             </a:r>
           </a:p>
         </p:txBody>
@@ -4285,7 +4285,7 @@
                 </a:solidFill>
                 <a:latin typeface="Segoe UI"/>
               </a:rPr>
-              <a:t>TSLA · RED</a:t>
+              <a:t>INFY.NS · RED</a:t>
             </a:r>
           </a:p>
         </p:txBody>
@@ -4319,7 +4319,7 @@
                 </a:solidFill>
                 <a:latin typeface="Segoe UI"/>
               </a:rPr>
-              <a:t>-3.8%</a:t>
+              <a:t>-4.1%</a:t>
             </a:r>
           </a:p>
         </p:txBody>
@@ -4407,11 +4407,11 @@
             <a:r>
               <a:rPr sz="900" b="0">
                 <a:solidFill>
-                  <a:srgbClr val="F59E0B"/>
-                </a:solidFill>
-                <a:latin typeface="Segoe UI"/>
-              </a:rPr>
-              <a:t>JPY=X · AMBER</a:t>
+                  <a:srgbClr val="EF4444"/>
+                </a:solidFill>
+                <a:latin typeface="Segoe UI"/>
+              </a:rPr>
+              <a:t>JPY=X · RED</a:t>
             </a:r>
           </a:p>
         </p:txBody>
@@ -4445,7 +4445,7 @@
                 </a:solidFill>
                 <a:latin typeface="Segoe UI"/>
               </a:rPr>
-              <a:t>-2.6%</a:t>
+              <a:t>-4.0%</a:t>
             </a:r>
           </a:p>
         </p:txBody>
@@ -4503,7 +4503,7 @@
                 </a:solidFill>
                 <a:latin typeface="Segoe UI"/>
               </a:rPr>
-              <a:t>ICICI Bank</a:t>
+              <a:t>NIFTY IT</a:t>
             </a:r>
           </a:p>
         </p:txBody>
@@ -4533,11 +4533,11 @@
             <a:r>
               <a:rPr sz="900" b="0">
                 <a:solidFill>
-                  <a:srgbClr val="22C55E"/>
-                </a:solidFill>
-                <a:latin typeface="Segoe UI"/>
-              </a:rPr>
-              <a:t>ICICIBANK.NS · GREEN</a:t>
+                  <a:srgbClr val="EF4444"/>
+                </a:solidFill>
+                <a:latin typeface="Segoe UI"/>
+              </a:rPr>
+              <a:t>^CNXIT · RED</a:t>
             </a:r>
           </a:p>
         </p:txBody>
@@ -4571,7 +4571,7 @@
                 </a:solidFill>
                 <a:latin typeface="Segoe UI"/>
               </a:rPr>
-              <a:t>-2.1%</a:t>
+              <a:t>-3.8%</a:t>
             </a:r>
           </a:p>
         </p:txBody>
@@ -4629,7 +4629,7 @@
                 </a:solidFill>
                 <a:latin typeface="Segoe UI"/>
               </a:rPr>
-              <a:t>NIFTY IT</a:t>
+              <a:t>Tesla</a:t>
             </a:r>
           </a:p>
         </p:txBody>
@@ -4663,7 +4663,7 @@
                 </a:solidFill>
                 <a:latin typeface="Segoe UI"/>
               </a:rPr>
-              <a:t>^CNXIT · RED</a:t>
+              <a:t>TSLA · RED</a:t>
             </a:r>
           </a:p>
         </p:txBody>
@@ -4697,7 +4697,7 @@
                 </a:solidFill>
                 <a:latin typeface="Segoe UI"/>
               </a:rPr>
-              <a:t>-1.6%</a:t>
+              <a:t>-3.8%</a:t>
             </a:r>
           </a:p>
         </p:txBody>
@@ -5103,7 +5103,7 @@
                 </a:solidFill>
                 <a:latin typeface="Segoe UI"/>
               </a:rPr>
-              <a:t>Straits Times</a:t>
+              <a:t>Copper</a:t>
             </a:r>
           </a:p>
         </p:txBody>
@@ -5171,7 +5171,7 @@
                 </a:solidFill>
                 <a:latin typeface="Segoe UI"/>
               </a:rPr>
-              <a:t>85%</a:t>
+              <a:t>95%</a:t>
             </a:r>
           </a:p>
         </p:txBody>
@@ -5239,7 +5239,7 @@
                 </a:solidFill>
                 <a:latin typeface="Segoe UI"/>
               </a:rPr>
-              <a:t>Copper</a:t>
+              <a:t>US Energy</a:t>
             </a:r>
           </a:p>
         </p:txBody>
@@ -5307,7 +5307,7 @@
                 </a:solidFill>
                 <a:latin typeface="Segoe UI"/>
               </a:rPr>
-              <a:t>95%</a:t>
+              <a:t>84%</a:t>
             </a:r>
           </a:p>
         </p:txBody>
@@ -5341,7 +5341,7 @@
                 </a:solidFill>
                 <a:latin typeface="Segoe UI"/>
               </a:rPr>
-              <a:t>above 200DMA · golden cross (50&gt;200) · MACD bullish</a:t>
+              <a:t>above 200DMA · golden cross (50&gt;200) · MACD bearish</a:t>
             </a:r>
           </a:p>
         </p:txBody>
@@ -5375,7 +5375,7 @@
                 </a:solidFill>
                 <a:latin typeface="Segoe UI"/>
               </a:rPr>
-              <a:t>US Energy</a:t>
+              <a:t>Straits Times</a:t>
             </a:r>
           </a:p>
         </p:txBody>
@@ -5477,7 +5477,7 @@
                 </a:solidFill>
                 <a:latin typeface="Segoe UI"/>
               </a:rPr>
-              <a:t>above 200DMA · golden cross (50&gt;200) · MACD bearish</a:t>
+              <a:t>above 200DMA · golden cross (50&gt;200) · MACD bullish</a:t>
             </a:r>
           </a:p>
         </p:txBody>
@@ -5579,7 +5579,7 @@
                 </a:solidFill>
                 <a:latin typeface="Segoe UI"/>
               </a:rPr>
-              <a:t>84%</a:t>
+              <a:t>83%</a:t>
             </a:r>
           </a:p>
         </p:txBody>
@@ -5783,7 +5783,7 @@
                 </a:solidFill>
                 <a:latin typeface="Segoe UI"/>
               </a:rPr>
-              <a:t>Ethereum</a:t>
+              <a:t>US Technology</a:t>
             </a:r>
           </a:p>
         </p:txBody>
@@ -5817,7 +5817,7 @@
                 </a:solidFill>
                 <a:latin typeface="Segoe UI"/>
               </a:rPr>
-              <a:t>BUY</a:t>
+              <a:t>STRONG BUY</a:t>
             </a:r>
           </a:p>
         </p:txBody>
@@ -5851,7 +5851,7 @@
                 </a:solidFill>
                 <a:latin typeface="Segoe UI"/>
               </a:rPr>
-              <a:t>78%</a:t>
+              <a:t>93%</a:t>
             </a:r>
           </a:p>
         </p:txBody>
@@ -5885,7 +5885,7 @@
                 </a:solidFill>
                 <a:latin typeface="Segoe UI"/>
               </a:rPr>
-              <a:t>above 200DMA · golden cross (50&gt;200) · MACD bearish</a:t>
+              <a:t>above 200DMA · golden cross (50&gt;200) · MACD bullish</a:t>
             </a:r>
           </a:p>
         </p:txBody>
@@ -5919,7 +5919,7 @@
                 </a:solidFill>
                 <a:latin typeface="Segoe UI"/>
               </a:rPr>
-              <a:t>Solana</a:t>
+              <a:t>Ethereum</a:t>
             </a:r>
           </a:p>
         </p:txBody>
@@ -5987,7 +5987,7 @@
                 </a:solidFill>
                 <a:latin typeface="Segoe UI"/>
               </a:rPr>
-              <a:t>76%</a:t>
+              <a:t>78%</a:t>
             </a:r>
           </a:p>
         </p:txBody>
@@ -6055,7 +6055,7 @@
                 </a:solidFill>
                 <a:latin typeface="Segoe UI"/>
               </a:rPr>
-              <a:t>Hang Seng</a:t>
+              <a:t>Bitcoin</a:t>
             </a:r>
           </a:p>
         </p:txBody>
@@ -6123,7 +6123,7 @@
                 </a:solidFill>
                 <a:latin typeface="Segoe UI"/>
               </a:rPr>
-              <a:t>74%</a:t>
+              <a:t>76%</a:t>
             </a:r>
           </a:p>
         </p:txBody>
@@ -6191,7 +6191,7 @@
                 </a:solidFill>
                 <a:latin typeface="Segoe UI"/>
               </a:rPr>
-              <a:t>NIFTY IT</a:t>
+              <a:t>Solana</a:t>
             </a:r>
           </a:p>
         </p:txBody>
@@ -6259,7 +6259,7 @@
                 </a:solidFill>
                 <a:latin typeface="Segoe UI"/>
               </a:rPr>
-              <a:t>68%</a:t>
+              <a:t>76%</a:t>
             </a:r>
           </a:p>
         </p:txBody>
@@ -6327,7 +6327,7 @@
                 </a:solidFill>
                 <a:latin typeface="Segoe UI"/>
               </a:rPr>
-              <a:t>Apple</a:t>
+              <a:t>ICICI Bank</a:t>
             </a:r>
           </a:p>
         </p:txBody>
@@ -6395,7 +6395,7 @@
                 </a:solidFill>
                 <a:latin typeface="Segoe UI"/>
               </a:rPr>
-              <a:t>91%</a:t>
+              <a:t>80%</a:t>
             </a:r>
           </a:p>
         </p:txBody>
@@ -6429,7 +6429,7 @@
                 </a:solidFill>
                 <a:latin typeface="Segoe UI"/>
               </a:rPr>
-              <a:t>above 200DMA · golden cross (50&gt;200) · MACD bullish</a:t>
+              <a:t>above 200DMA · golden cross (50&gt;200) · MACD bearish</a:t>
             </a:r>
           </a:p>
         </p:txBody>
@@ -6463,7 +6463,7 @@
                 </a:solidFill>
                 <a:latin typeface="Segoe UI"/>
               </a:rPr>
-              <a:t>FTSE 100</a:t>
+              <a:t>S&amp;P 500</a:t>
             </a:r>
           </a:p>
         </p:txBody>
@@ -7067,7 +7067,7 @@
                 </a:solidFill>
                 <a:latin typeface="Segoe UI"/>
               </a:rPr>
-              <a:t>80,141</a:t>
+              <a:t>79,274</a:t>
             </a:r>
           </a:p>
         </p:txBody>
@@ -7101,7 +7101,7 @@
                 </a:solidFill>
                 <a:latin typeface="Segoe UI"/>
               </a:rPr>
-              <a:t>Rs 757,136</a:t>
+              <a:t>Rs 748,939</a:t>
             </a:r>
           </a:p>
         </p:txBody>
@@ -7135,7 +7135,7 @@
                 </a:solidFill>
                 <a:latin typeface="Segoe UI"/>
               </a:rPr>
-              <a:t>Rs 190,286</a:t>
+              <a:t>Rs 182,089</a:t>
             </a:r>
           </a:p>
         </p:txBody>
@@ -7169,7 +7169,7 @@
                 </a:solidFill>
                 <a:latin typeface="Segoe UI"/>
               </a:rPr>
-              <a:t>+33.6%</a:t>
+              <a:t>+32.1%</a:t>
             </a:r>
           </a:p>
         </p:txBody>
@@ -7199,11 +7199,11 @@
             <a:r>
               <a:rPr sz="1000" b="0">
                 <a:solidFill>
-                  <a:srgbClr val="22C55E"/>
-                </a:solidFill>
-                <a:latin typeface="Segoe UI"/>
-              </a:rPr>
-              <a:t>+0.4%</a:t>
+                  <a:srgbClr val="EF4444"/>
+                </a:solidFill>
+                <a:latin typeface="Segoe UI"/>
+              </a:rPr>
+              <a:t>-1.3%</a:t>
             </a:r>
           </a:p>
         </p:txBody>
@@ -7339,7 +7339,7 @@
                 </a:solidFill>
                 <a:latin typeface="Segoe UI"/>
               </a:rPr>
-              <a:t>4,477</a:t>
+              <a:t>4,467</a:t>
             </a:r>
           </a:p>
         </p:txBody>
@@ -7373,7 +7373,7 @@
                 </a:solidFill>
                 <a:latin typeface="Segoe UI"/>
               </a:rPr>
-              <a:t>Rs 422,927</a:t>
+              <a:t>Rs 422,001</a:t>
             </a:r>
           </a:p>
         </p:txBody>
@@ -7407,7 +7407,7 @@
                 </a:solidFill>
                 <a:latin typeface="Segoe UI"/>
               </a:rPr>
-              <a:t>Rs 205,634</a:t>
+              <a:t>Rs 204,708</a:t>
             </a:r>
           </a:p>
         </p:txBody>
@@ -7441,7 +7441,7 @@
                 </a:solidFill>
                 <a:latin typeface="Segoe UI"/>
               </a:rPr>
-              <a:t>+94.6%</a:t>
+              <a:t>+94.2%</a:t>
             </a:r>
           </a:p>
         </p:txBody>
@@ -8155,7 +8155,7 @@
                 </a:solidFill>
                 <a:latin typeface="Segoe UI"/>
               </a:rPr>
-              <a:t>1,130</a:t>
+              <a:t>1,088</a:t>
             </a:r>
           </a:p>
         </p:txBody>
@@ -8189,7 +8189,7 @@
                 </a:solidFill>
                 <a:latin typeface="Segoe UI"/>
               </a:rPr>
-              <a:t>Rs 90,400</a:t>
+              <a:t>Rs 87,000</a:t>
             </a:r>
           </a:p>
         </p:txBody>
@@ -8223,7 +8223,7 @@
                 </a:solidFill>
                 <a:latin typeface="Segoe UI"/>
               </a:rPr>
-              <a:t>Rs -21,600</a:t>
+              <a:t>Rs -25,000</a:t>
             </a:r>
           </a:p>
         </p:txBody>
@@ -8257,7 +8257,7 @@
                 </a:solidFill>
                 <a:latin typeface="Segoe UI"/>
               </a:rPr>
-              <a:t>-19.3%</a:t>
+              <a:t>-22.3%</a:t>
             </a:r>
           </a:p>
         </p:txBody>
@@ -8427,7 +8427,7 @@
                 </a:solidFill>
                 <a:latin typeface="Segoe UI"/>
               </a:rPr>
-              <a:t>1,322</a:t>
+              <a:t>1,310</a:t>
             </a:r>
           </a:p>
         </p:txBody>
@@ -8461,7 +8461,7 @@
                 </a:solidFill>
                 <a:latin typeface="Segoe UI"/>
               </a:rPr>
-              <a:t>Rs 66,100</a:t>
+              <a:t>Rs 65,475</a:t>
             </a:r>
           </a:p>
         </p:txBody>
@@ -8495,7 +8495,7 @@
                 </a:solidFill>
                 <a:latin typeface="Segoe UI"/>
               </a:rPr>
-              <a:t>Rs -56,400</a:t>
+              <a:t>Rs -57,025</a:t>
             </a:r>
           </a:p>
         </p:txBody>
@@ -8529,7 +8529,7 @@
                 </a:solidFill>
                 <a:latin typeface="Segoe UI"/>
               </a:rPr>
-              <a:t>-46.0%</a:t>
+              <a:t>-46.5%</a:t>
             </a:r>
           </a:p>
         </p:txBody>
@@ -8699,7 +8699,7 @@
                 </a:solidFill>
                 <a:latin typeface="Segoe UI"/>
               </a:rPr>
-              <a:t>2,304</a:t>
+              <a:t>2,270</a:t>
             </a:r>
           </a:p>
         </p:txBody>
@@ -8733,7 +8733,7 @@
                 </a:solidFill>
                 <a:latin typeface="Segoe UI"/>
               </a:rPr>
-              <a:t>Rs 57,600</a:t>
+              <a:t>Rs 56,750</a:t>
             </a:r>
           </a:p>
         </p:txBody>
@@ -8767,7 +8767,7 @@
                 </a:solidFill>
                 <a:latin typeface="Segoe UI"/>
               </a:rPr>
-              <a:t>Rs -32,400</a:t>
+              <a:t>Rs -33,250</a:t>
             </a:r>
           </a:p>
         </p:txBody>
@@ -8801,7 +8801,7 @@
                 </a:solidFill>
                 <a:latin typeface="Segoe UI"/>
               </a:rPr>
-              <a:t>-36.0%</a:t>
+              <a:t>-36.9%</a:t>
             </a:r>
           </a:p>
         </p:txBody>
@@ -8971,7 +8971,7 @@
                 </a:solidFill>
                 <a:latin typeface="Segoe UI"/>
               </a:rPr>
-              <a:t>712</a:t>
+              <a:t>710</a:t>
             </a:r>
           </a:p>
         </p:txBody>
@@ -9005,7 +9005,7 @@
                 </a:solidFill>
                 <a:latin typeface="Segoe UI"/>
               </a:rPr>
-              <a:t>Rs 42,726</a:t>
+              <a:t>Rs 42,630</a:t>
             </a:r>
           </a:p>
         </p:txBody>
@@ -9039,7 +9039,7 @@
                 </a:solidFill>
                 <a:latin typeface="Segoe UI"/>
               </a:rPr>
-              <a:t>Rs -48,474</a:t>
+              <a:t>Rs -48,570</a:t>
             </a:r>
           </a:p>
         </p:txBody>
@@ -9073,7 +9073,7 @@
                 </a:solidFill>
                 <a:latin typeface="Segoe UI"/>
               </a:rPr>
-              <a:t>-53.1%</a:t>
+              <a:t>-53.3%</a:t>
             </a:r>
           </a:p>
         </p:txBody>
@@ -9141,7 +9141,7 @@
                 </a:solidFill>
                 <a:latin typeface="Segoe UI"/>
               </a:rPr>
-              <a:t>Total Rs 1,913,287 | P&amp;L Rs 198,556 (+11.6%) | Sharpe 0.15 | Vol 19.61% | VaR95 -1.9%/day</a:t>
+              <a:t>Total Rs 1,899,192 | P&amp;L Rs 184,461 (+10.8%) | Sharpe 0.08 | Vol 19.59% | VaR95 -1.9%/day</a:t>
             </a:r>
           </a:p>
         </p:txBody>

--- a/docs/pmr_daily.pptx
+++ b/docs/pmr_daily.pptx
@@ -3197,7 +3197,7 @@
                 </a:solidFill>
                 <a:latin typeface="Segoe UI"/>
               </a:rPr>
-              <a:t>Tuesday, 08 Sep 2026 08:57 SGT</a:t>
+              <a:t>Wednesday, 09 Sep 2026 09:04 SGT</a:t>
             </a:r>
           </a:p>
         </p:txBody>
@@ -3265,7 +3265,7 @@
                 </a:solidFill>
                 <a:latin typeface="Segoe UI"/>
               </a:rPr>
-              <a:t>RAG 12R / 17A / 17G   |   58.7% above 200DMA   |   Portfolio Rs 1,899,192 (+10.8%)</a:t>
+              <a:t>RAG 13R / 16A / 17G   |   58.7% above 200DMA   |   Portfolio Rs 1,891,761 (+10.0%)</a:t>
             </a:r>
           </a:p>
         </p:txBody>
@@ -3529,7 +3529,7 @@
                 </a:solidFill>
                 <a:latin typeface="Segoe UI"/>
               </a:rPr>
-              <a:t>+7.7%</a:t>
+              <a:t>+10.3%</a:t>
             </a:r>
           </a:p>
         </p:txBody>
@@ -3839,7 +3839,7 @@
                 </a:solidFill>
                 <a:latin typeface="Segoe UI"/>
               </a:rPr>
-              <a:t>Clean Energy</a:t>
+              <a:t>Copper</a:t>
             </a:r>
           </a:p>
         </p:txBody>
@@ -3869,11 +3869,11 @@
             <a:r>
               <a:rPr sz="900" b="0">
                 <a:solidFill>
-                  <a:srgbClr val="EF4444"/>
-                </a:solidFill>
-                <a:latin typeface="Segoe UI"/>
-              </a:rPr>
-              <a:t>ICLN · RED</a:t>
+                  <a:srgbClr val="22C55E"/>
+                </a:solidFill>
+                <a:latin typeface="Segoe UI"/>
+              </a:rPr>
+              <a:t>HG=F · GREEN</a:t>
             </a:r>
           </a:p>
         </p:txBody>
@@ -3907,7 +3907,7 @@
                 </a:solidFill>
                 <a:latin typeface="Segoe UI"/>
               </a:rPr>
-              <a:t>+2.7%</a:t>
+              <a:t>+3.1%</a:t>
             </a:r>
           </a:p>
         </p:txBody>
@@ -3965,7 +3965,7 @@
                 </a:solidFill>
                 <a:latin typeface="Segoe UI"/>
               </a:rPr>
-              <a:t>Reliance</a:t>
+              <a:t>Clean Energy</a:t>
             </a:r>
           </a:p>
         </p:txBody>
@@ -3995,11 +3995,11 @@
             <a:r>
               <a:rPr sz="900" b="0">
                 <a:solidFill>
-                  <a:srgbClr val="F59E0B"/>
-                </a:solidFill>
-                <a:latin typeface="Segoe UI"/>
-              </a:rPr>
-              <a:t>RELIANCE.NS · AMBER</a:t>
+                  <a:srgbClr val="EF4444"/>
+                </a:solidFill>
+                <a:latin typeface="Segoe UI"/>
+              </a:rPr>
+              <a:t>ICLN · RED</a:t>
             </a:r>
           </a:p>
         </p:txBody>
@@ -4033,7 +4033,7 @@
                 </a:solidFill>
                 <a:latin typeface="Segoe UI"/>
               </a:rPr>
-              <a:t>+2.5%</a:t>
+              <a:t>+2.7%</a:t>
             </a:r>
           </a:p>
         </p:txBody>
@@ -4193,7 +4193,7 @@
                 </a:solidFill>
                 <a:latin typeface="Segoe UI"/>
               </a:rPr>
-              <a:t>-5.4%</a:t>
+              <a:t>-6.0%</a:t>
             </a:r>
           </a:p>
         </p:txBody>
@@ -4319,7 +4319,7 @@
                 </a:solidFill>
                 <a:latin typeface="Segoe UI"/>
               </a:rPr>
-              <a:t>-4.1%</a:t>
+              <a:t>-4.6%</a:t>
             </a:r>
           </a:p>
         </p:txBody>
@@ -4967,7 +4967,7 @@
                 </a:solidFill>
                 <a:latin typeface="Segoe UI"/>
               </a:rPr>
-              <a:t>Nvidia</a:t>
+              <a:t>Microsoft</a:t>
             </a:r>
           </a:p>
         </p:txBody>
@@ -5035,7 +5035,7 @@
                 </a:solidFill>
                 <a:latin typeface="Segoe UI"/>
               </a:rPr>
-              <a:t>95%</a:t>
+              <a:t>84%</a:t>
             </a:r>
           </a:p>
         </p:txBody>
@@ -5069,7 +5069,7 @@
                 </a:solidFill>
                 <a:latin typeface="Segoe UI"/>
               </a:rPr>
-              <a:t>above 200DMA · golden cross (50&gt;200) · MACD bullish</a:t>
+              <a:t>above 200DMA · golden cross (50&gt;200) · MACD bearish</a:t>
             </a:r>
           </a:p>
         </p:txBody>
@@ -5103,7 +5103,7 @@
                 </a:solidFill>
                 <a:latin typeface="Segoe UI"/>
               </a:rPr>
-              <a:t>Copper</a:t>
+              <a:t>US Energy</a:t>
             </a:r>
           </a:p>
         </p:txBody>
@@ -5171,7 +5171,7 @@
                 </a:solidFill>
                 <a:latin typeface="Segoe UI"/>
               </a:rPr>
-              <a:t>95%</a:t>
+              <a:t>84%</a:t>
             </a:r>
           </a:p>
         </p:txBody>
@@ -5205,7 +5205,7 @@
                 </a:solidFill>
                 <a:latin typeface="Segoe UI"/>
               </a:rPr>
-              <a:t>above 200DMA · golden cross (50&gt;200) · MACD bullish</a:t>
+              <a:t>above 200DMA · golden cross (50&gt;200) · MACD bearish</a:t>
             </a:r>
           </a:p>
         </p:txBody>
@@ -5239,7 +5239,7 @@
                 </a:solidFill>
                 <a:latin typeface="Segoe UI"/>
               </a:rPr>
-              <a:t>US Energy</a:t>
+              <a:t>Nvidia</a:t>
             </a:r>
           </a:p>
         </p:txBody>
@@ -5307,7 +5307,7 @@
                 </a:solidFill>
                 <a:latin typeface="Segoe UI"/>
               </a:rPr>
-              <a:t>84%</a:t>
+              <a:t>95%</a:t>
             </a:r>
           </a:p>
         </p:txBody>
@@ -5341,7 +5341,7 @@
                 </a:solidFill>
                 <a:latin typeface="Segoe UI"/>
               </a:rPr>
-              <a:t>above 200DMA · golden cross (50&gt;200) · MACD bearish</a:t>
+              <a:t>above 200DMA · golden cross (50&gt;200) · MACD bullish</a:t>
             </a:r>
           </a:p>
         </p:txBody>
@@ -5511,7 +5511,7 @@
                 </a:solidFill>
                 <a:latin typeface="Segoe UI"/>
               </a:rPr>
-              <a:t>Microsoft</a:t>
+              <a:t>US Financials</a:t>
             </a:r>
           </a:p>
         </p:txBody>
@@ -5647,7 +5647,7 @@
                 </a:solidFill>
                 <a:latin typeface="Segoe UI"/>
               </a:rPr>
-              <a:t>US Financials</a:t>
+              <a:t>US Technology</a:t>
             </a:r>
           </a:p>
         </p:txBody>
@@ -5715,7 +5715,7 @@
                 </a:solidFill>
                 <a:latin typeface="Segoe UI"/>
               </a:rPr>
-              <a:t>81%</a:t>
+              <a:t>92%</a:t>
             </a:r>
           </a:p>
         </p:txBody>
@@ -5749,7 +5749,7 @@
                 </a:solidFill>
                 <a:latin typeface="Segoe UI"/>
               </a:rPr>
-              <a:t>above 200DMA · golden cross (50&gt;200) · MACD bearish</a:t>
+              <a:t>above 200DMA · golden cross (50&gt;200) · MACD bullish</a:t>
             </a:r>
           </a:p>
         </p:txBody>
@@ -5783,7 +5783,7 @@
                 </a:solidFill>
                 <a:latin typeface="Segoe UI"/>
               </a:rPr>
-              <a:t>US Technology</a:t>
+              <a:t>Copper</a:t>
             </a:r>
           </a:p>
         </p:txBody>
@@ -5817,7 +5817,7 @@
                 </a:solidFill>
                 <a:latin typeface="Segoe UI"/>
               </a:rPr>
-              <a:t>STRONG BUY</a:t>
+              <a:t>BUY</a:t>
             </a:r>
           </a:p>
         </p:txBody>
@@ -5851,7 +5851,7 @@
                 </a:solidFill>
                 <a:latin typeface="Segoe UI"/>
               </a:rPr>
-              <a:t>93%</a:t>
+              <a:t>92%</a:t>
             </a:r>
           </a:p>
         </p:txBody>
@@ -6327,7 +6327,7 @@
                 </a:solidFill>
                 <a:latin typeface="Segoe UI"/>
               </a:rPr>
-              <a:t>ICICI Bank</a:t>
+              <a:t>FTSE 100</a:t>
             </a:r>
           </a:p>
         </p:txBody>
@@ -6395,7 +6395,7 @@
                 </a:solidFill>
                 <a:latin typeface="Segoe UI"/>
               </a:rPr>
-              <a:t>80%</a:t>
+              <a:t>68%</a:t>
             </a:r>
           </a:p>
         </p:txBody>
@@ -6463,7 +6463,7 @@
                 </a:solidFill>
                 <a:latin typeface="Segoe UI"/>
               </a:rPr>
-              <a:t>S&amp;P 500</a:t>
+              <a:t>DAX</a:t>
             </a:r>
           </a:p>
         </p:txBody>
@@ -6531,7 +6531,7 @@
                 </a:solidFill>
                 <a:latin typeface="Segoe UI"/>
               </a:rPr>
-              <a:t>67%</a:t>
+              <a:t>80%</a:t>
             </a:r>
           </a:p>
         </p:txBody>
@@ -6659,7 +6659,7 @@
                 </a:solidFill>
                 <a:latin typeface="Segoe UI"/>
               </a:rPr>
-              <a:t>Base currency INR · USD/INR 94.47</a:t>
+              <a:t>Base currency INR · USD/INR 94.8</a:t>
             </a:r>
           </a:p>
         </p:txBody>
@@ -7067,7 +7067,7 @@
                 </a:solidFill>
                 <a:latin typeface="Segoe UI"/>
               </a:rPr>
-              <a:t>79,274</a:t>
+              <a:t>78,729</a:t>
             </a:r>
           </a:p>
         </p:txBody>
@@ -7101,7 +7101,7 @@
                 </a:solidFill>
                 <a:latin typeface="Segoe UI"/>
               </a:rPr>
-              <a:t>Rs 748,939</a:t>
+              <a:t>Rs 746,353</a:t>
             </a:r>
           </a:p>
         </p:txBody>
@@ -7135,7 +7135,7 @@
                 </a:solidFill>
                 <a:latin typeface="Segoe UI"/>
               </a:rPr>
-              <a:t>Rs 182,089</a:t>
+              <a:t>Rs 177,553</a:t>
             </a:r>
           </a:p>
         </p:txBody>
@@ -7169,7 +7169,7 @@
                 </a:solidFill>
                 <a:latin typeface="Segoe UI"/>
               </a:rPr>
-              <a:t>+32.1%</a:t>
+              <a:t>+31.2%</a:t>
             </a:r>
           </a:p>
         </p:txBody>
@@ -7203,7 +7203,7 @@
                 </a:solidFill>
                 <a:latin typeface="Segoe UI"/>
               </a:rPr>
-              <a:t>-1.3%</a:t>
+              <a:t>-0.5%</a:t>
             </a:r>
           </a:p>
         </p:txBody>
@@ -7339,7 +7339,7 @@
                 </a:solidFill>
                 <a:latin typeface="Segoe UI"/>
               </a:rPr>
-              <a:t>4,467</a:t>
+              <a:t>4,404</a:t>
             </a:r>
           </a:p>
         </p:txBody>
@@ -7373,7 +7373,7 @@
                 </a:solidFill>
                 <a:latin typeface="Segoe UI"/>
               </a:rPr>
-              <a:t>Rs 422,001</a:t>
+              <a:t>Rs 417,499</a:t>
             </a:r>
           </a:p>
         </p:txBody>
@@ -7407,7 +7407,7 @@
                 </a:solidFill>
                 <a:latin typeface="Segoe UI"/>
               </a:rPr>
-              <a:t>Rs 204,708</a:t>
+              <a:t>Rs 199,459</a:t>
             </a:r>
           </a:p>
         </p:txBody>
@@ -7441,7 +7441,7 @@
                 </a:solidFill>
                 <a:latin typeface="Segoe UI"/>
               </a:rPr>
-              <a:t>+94.2%</a:t>
+              <a:t>+91.5%</a:t>
             </a:r>
           </a:p>
         </p:txBody>
@@ -7645,7 +7645,7 @@
                 </a:solidFill>
                 <a:latin typeface="Segoe UI"/>
               </a:rPr>
-              <a:t>Rs 302,292</a:t>
+              <a:t>Rs 303,332</a:t>
             </a:r>
           </a:p>
         </p:txBody>
@@ -7679,7 +7679,7 @@
                 </a:solidFill>
                 <a:latin typeface="Segoe UI"/>
               </a:rPr>
-              <a:t>Rs 127,513</a:t>
+              <a:t>Rs 127,952</a:t>
             </a:r>
           </a:p>
         </p:txBody>
@@ -7917,7 +7917,7 @@
                 </a:solidFill>
                 <a:latin typeface="Segoe UI"/>
               </a:rPr>
-              <a:t>Rs 174,106</a:t>
+              <a:t>Rs 174,705</a:t>
             </a:r>
           </a:p>
         </p:txBody>
@@ -7951,7 +7951,7 @@
                 </a:solidFill>
                 <a:latin typeface="Segoe UI"/>
               </a:rPr>
-              <a:t>Rs -166,004</a:t>
+              <a:t>Rs -166,575</a:t>
             </a:r>
           </a:p>
         </p:txBody>
@@ -8155,7 +8155,7 @@
                 </a:solidFill>
                 <a:latin typeface="Segoe UI"/>
               </a:rPr>
-              <a:t>1,088</a:t>
+              <a:t>1,082</a:t>
             </a:r>
           </a:p>
         </p:txBody>
@@ -8189,7 +8189,7 @@
                 </a:solidFill>
                 <a:latin typeface="Segoe UI"/>
               </a:rPr>
-              <a:t>Rs 87,000</a:t>
+              <a:t>Rs 86,560</a:t>
             </a:r>
           </a:p>
         </p:txBody>
@@ -8223,7 +8223,7 @@
                 </a:solidFill>
                 <a:latin typeface="Segoe UI"/>
               </a:rPr>
-              <a:t>Rs -25,000</a:t>
+              <a:t>Rs -25,440</a:t>
             </a:r>
           </a:p>
         </p:txBody>
@@ -8257,7 +8257,7 @@
                 </a:solidFill>
                 <a:latin typeface="Segoe UI"/>
               </a:rPr>
-              <a:t>-22.3%</a:t>
+              <a:t>-22.7%</a:t>
             </a:r>
           </a:p>
         </p:txBody>
@@ -8427,7 +8427,7 @@
                 </a:solidFill>
                 <a:latin typeface="Segoe UI"/>
               </a:rPr>
-              <a:t>1,310</a:t>
+              <a:t>1,295</a:t>
             </a:r>
           </a:p>
         </p:txBody>
@@ -8461,7 +8461,7 @@
                 </a:solidFill>
                 <a:latin typeface="Segoe UI"/>
               </a:rPr>
-              <a:t>Rs 65,475</a:t>
+              <a:t>Rs 64,745</a:t>
             </a:r>
           </a:p>
         </p:txBody>
@@ -8495,7 +8495,7 @@
                 </a:solidFill>
                 <a:latin typeface="Segoe UI"/>
               </a:rPr>
-              <a:t>Rs -57,025</a:t>
+              <a:t>Rs -57,755</a:t>
             </a:r>
           </a:p>
         </p:txBody>
@@ -8529,7 +8529,7 @@
                 </a:solidFill>
                 <a:latin typeface="Segoe UI"/>
               </a:rPr>
-              <a:t>-46.5%</a:t>
+              <a:t>-47.1%</a:t>
             </a:r>
           </a:p>
         </p:txBody>
@@ -8699,7 +8699,7 @@
                 </a:solidFill>
                 <a:latin typeface="Segoe UI"/>
               </a:rPr>
-              <a:t>2,270</a:t>
+              <a:t>2,256</a:t>
             </a:r>
           </a:p>
         </p:txBody>
@@ -8733,7 +8733,7 @@
                 </a:solidFill>
                 <a:latin typeface="Segoe UI"/>
               </a:rPr>
-              <a:t>Rs 56,750</a:t>
+              <a:t>Rs 56,388</a:t>
             </a:r>
           </a:p>
         </p:txBody>
@@ -8767,7 +8767,7 @@
                 </a:solidFill>
                 <a:latin typeface="Segoe UI"/>
               </a:rPr>
-              <a:t>Rs -33,250</a:t>
+              <a:t>Rs -33,612</a:t>
             </a:r>
           </a:p>
         </p:txBody>
@@ -8801,7 +8801,7 @@
                 </a:solidFill>
                 <a:latin typeface="Segoe UI"/>
               </a:rPr>
-              <a:t>-36.9%</a:t>
+              <a:t>-37.4%</a:t>
             </a:r>
           </a:p>
         </p:txBody>
@@ -8971,7 +8971,7 @@
                 </a:solidFill>
                 <a:latin typeface="Segoe UI"/>
               </a:rPr>
-              <a:t>710</a:t>
+              <a:t>703</a:t>
             </a:r>
           </a:p>
         </p:txBody>
@@ -9005,7 +9005,7 @@
                 </a:solidFill>
                 <a:latin typeface="Segoe UI"/>
               </a:rPr>
-              <a:t>Rs 42,630</a:t>
+              <a:t>Rs 42,180</a:t>
             </a:r>
           </a:p>
         </p:txBody>
@@ -9039,7 +9039,7 @@
                 </a:solidFill>
                 <a:latin typeface="Segoe UI"/>
               </a:rPr>
-              <a:t>Rs -48,570</a:t>
+              <a:t>Rs -49,020</a:t>
             </a:r>
           </a:p>
         </p:txBody>
@@ -9073,7 +9073,7 @@
                 </a:solidFill>
                 <a:latin typeface="Segoe UI"/>
               </a:rPr>
-              <a:t>-53.3%</a:t>
+              <a:t>-53.8%</a:t>
             </a:r>
           </a:p>
         </p:txBody>
@@ -9141,7 +9141,7 @@
                 </a:solidFill>
                 <a:latin typeface="Segoe UI"/>
               </a:rPr>
-              <a:t>Total Rs 1,899,192 | P&amp;L Rs 184,461 (+10.8%) | Sharpe 0.08 | Vol 19.59% | VaR95 -1.9%/day</a:t>
+              <a:t>Total Rs 1,891,761 | P&amp;L Rs 172,561 (+10.0%) | Sharpe 0.09 | Vol 19.59% | VaR95 -1.9%/day</a:t>
             </a:r>
           </a:p>
         </p:txBody>

--- a/docs/pmr_daily.pptx
+++ b/docs/pmr_daily.pptx
@@ -3197,7 +3197,7 @@
                 </a:solidFill>
                 <a:latin typeface="Segoe UI"/>
               </a:rPr>
-              <a:t>Wednesday, 09 Sep 2026 09:04 SGT</a:t>
+              <a:t>Thursday, 10 Sep 2026 08:53 SGT</a:t>
             </a:r>
           </a:p>
         </p:txBody>
@@ -3265,7 +3265,7 @@
                 </a:solidFill>
                 <a:latin typeface="Segoe UI"/>
               </a:rPr>
-              <a:t>RAG 13R / 16A / 17G   |   58.7% above 200DMA   |   Portfolio Rs 1,891,761 (+10.0%)</a:t>
+              <a:t>RAG 13R / 16A / 17G   |   58.7% above 200DMA   |   Portfolio Rs 1,876,583 (+9.1%)</a:t>
             </a:r>
           </a:p>
         </p:txBody>
@@ -3491,11 +3491,11 @@
             <a:r>
               <a:rPr sz="900" b="0">
                 <a:solidFill>
-                  <a:srgbClr val="EF4444"/>
-                </a:solidFill>
-                <a:latin typeface="Segoe UI"/>
-              </a:rPr>
-              <a:t>CL=F · RED</a:t>
+                  <a:srgbClr val="F59E0B"/>
+                </a:solidFill>
+                <a:latin typeface="Segoe UI"/>
+              </a:rPr>
+              <a:t>CL=F · AMBER</a:t>
             </a:r>
           </a:p>
         </p:txBody>
@@ -3529,7 +3529,7 @@
                 </a:solidFill>
                 <a:latin typeface="Segoe UI"/>
               </a:rPr>
-              <a:t>+10.3%</a:t>
+              <a:t>+12.6%</a:t>
             </a:r>
           </a:p>
         </p:txBody>
@@ -3587,7 +3587,7 @@
                 </a:solidFill>
                 <a:latin typeface="Segoe UI"/>
               </a:rPr>
-              <a:t>Nvidia</a:t>
+              <a:t>Clean Energy</a:t>
             </a:r>
           </a:p>
         </p:txBody>
@@ -3617,11 +3617,11 @@
             <a:r>
               <a:rPr sz="900" b="0">
                 <a:solidFill>
-                  <a:srgbClr val="22C55E"/>
-                </a:solidFill>
-                <a:latin typeface="Segoe UI"/>
-              </a:rPr>
-              <a:t>NVDA · GREEN</a:t>
+                  <a:srgbClr val="EF4444"/>
+                </a:solidFill>
+                <a:latin typeface="Segoe UI"/>
+              </a:rPr>
+              <a:t>ICLN · RED</a:t>
             </a:r>
           </a:p>
         </p:txBody>
@@ -3655,7 +3655,7 @@
                 </a:solidFill>
                 <a:latin typeface="Segoe UI"/>
               </a:rPr>
-              <a:t>+4.3%</a:t>
+              <a:t>+5.8%</a:t>
             </a:r>
           </a:p>
         </p:txBody>
@@ -3713,7 +3713,7 @@
                 </a:solidFill>
                 <a:latin typeface="Segoe UI"/>
               </a:rPr>
-              <a:t>ITC</a:t>
+              <a:t>Copper</a:t>
             </a:r>
           </a:p>
         </p:txBody>
@@ -3743,11 +3743,11 @@
             <a:r>
               <a:rPr sz="900" b="0">
                 <a:solidFill>
-                  <a:srgbClr val="EF4444"/>
-                </a:solidFill>
-                <a:latin typeface="Segoe UI"/>
-              </a:rPr>
-              <a:t>ITC.NS · RED</a:t>
+                  <a:srgbClr val="22C55E"/>
+                </a:solidFill>
+                <a:latin typeface="Segoe UI"/>
+              </a:rPr>
+              <a:t>HG=F · GREEN</a:t>
             </a:r>
           </a:p>
         </p:txBody>
@@ -3781,7 +3781,7 @@
                 </a:solidFill>
                 <a:latin typeface="Segoe UI"/>
               </a:rPr>
-              <a:t>+3.1%</a:t>
+              <a:t>+4.0%</a:t>
             </a:r>
           </a:p>
         </p:txBody>
@@ -3839,7 +3839,7 @@
                 </a:solidFill>
                 <a:latin typeface="Segoe UI"/>
               </a:rPr>
-              <a:t>Copper</a:t>
+              <a:t>Silver</a:t>
             </a:r>
           </a:p>
         </p:txBody>
@@ -3869,11 +3869,11 @@
             <a:r>
               <a:rPr sz="900" b="0">
                 <a:solidFill>
-                  <a:srgbClr val="22C55E"/>
-                </a:solidFill>
-                <a:latin typeface="Segoe UI"/>
-              </a:rPr>
-              <a:t>HG=F · GREEN</a:t>
+                  <a:srgbClr val="EF4444"/>
+                </a:solidFill>
+                <a:latin typeface="Segoe UI"/>
+              </a:rPr>
+              <a:t>SI=F · RED</a:t>
             </a:r>
           </a:p>
         </p:txBody>
@@ -3907,7 +3907,7 @@
                 </a:solidFill>
                 <a:latin typeface="Segoe UI"/>
               </a:rPr>
-              <a:t>+3.1%</a:t>
+              <a:t>+2.5%</a:t>
             </a:r>
           </a:p>
         </p:txBody>
@@ -3965,7 +3965,7 @@
                 </a:solidFill>
                 <a:latin typeface="Segoe UI"/>
               </a:rPr>
-              <a:t>Clean Energy</a:t>
+              <a:t>Nvidia</a:t>
             </a:r>
           </a:p>
         </p:txBody>
@@ -3995,11 +3995,11 @@
             <a:r>
               <a:rPr sz="900" b="0">
                 <a:solidFill>
-                  <a:srgbClr val="EF4444"/>
-                </a:solidFill>
-                <a:latin typeface="Segoe UI"/>
-              </a:rPr>
-              <a:t>ICLN · RED</a:t>
+                  <a:srgbClr val="22C55E"/>
+                </a:solidFill>
+                <a:latin typeface="Segoe UI"/>
+              </a:rPr>
+              <a:t>NVDA · GREEN</a:t>
             </a:r>
           </a:p>
         </p:txBody>
@@ -4033,7 +4033,7 @@
                 </a:solidFill>
                 <a:latin typeface="Segoe UI"/>
               </a:rPr>
-              <a:t>+2.7%</a:t>
+              <a:t>+2.2%</a:t>
             </a:r>
           </a:p>
         </p:txBody>
@@ -4125,7 +4125,7 @@
                 </a:solidFill>
                 <a:latin typeface="Segoe UI"/>
               </a:rPr>
-              <a:t>TCS</a:t>
+              <a:t>Infosys</a:t>
             </a:r>
           </a:p>
         </p:txBody>
@@ -4159,7 +4159,7 @@
                 </a:solidFill>
                 <a:latin typeface="Segoe UI"/>
               </a:rPr>
-              <a:t>TCS.NS · RED</a:t>
+              <a:t>INFY.NS · RED</a:t>
             </a:r>
           </a:p>
         </p:txBody>
@@ -4193,7 +4193,7 @@
                 </a:solidFill>
                 <a:latin typeface="Segoe UI"/>
               </a:rPr>
-              <a:t>-6.0%</a:t>
+              <a:t>-8.7%</a:t>
             </a:r>
           </a:p>
         </p:txBody>
@@ -4251,7 +4251,7 @@
                 </a:solidFill>
                 <a:latin typeface="Segoe UI"/>
               </a:rPr>
-              <a:t>Infosys</a:t>
+              <a:t>TCS</a:t>
             </a:r>
           </a:p>
         </p:txBody>
@@ -4285,7 +4285,7 @@
                 </a:solidFill>
                 <a:latin typeface="Segoe UI"/>
               </a:rPr>
-              <a:t>INFY.NS · RED</a:t>
+              <a:t>TCS.NS · RED</a:t>
             </a:r>
           </a:p>
         </p:txBody>
@@ -4319,7 +4319,7 @@
                 </a:solidFill>
                 <a:latin typeface="Segoe UI"/>
               </a:rPr>
-              <a:t>-4.6%</a:t>
+              <a:t>-8.0%</a:t>
             </a:r>
           </a:p>
         </p:txBody>
@@ -4377,7 +4377,7 @@
                 </a:solidFill>
                 <a:latin typeface="Segoe UI"/>
               </a:rPr>
-              <a:t>USD/JPY</a:t>
+              <a:t>ICICI Bank</a:t>
             </a:r>
           </a:p>
         </p:txBody>
@@ -4407,11 +4407,11 @@
             <a:r>
               <a:rPr sz="900" b="0">
                 <a:solidFill>
-                  <a:srgbClr val="EF4444"/>
-                </a:solidFill>
-                <a:latin typeface="Segoe UI"/>
-              </a:rPr>
-              <a:t>JPY=X · RED</a:t>
+                  <a:srgbClr val="22C55E"/>
+                </a:solidFill>
+                <a:latin typeface="Segoe UI"/>
+              </a:rPr>
+              <a:t>ICICIBANK.NS · GREEN</a:t>
             </a:r>
           </a:p>
         </p:txBody>
@@ -4445,7 +4445,7 @@
                 </a:solidFill>
                 <a:latin typeface="Segoe UI"/>
               </a:rPr>
-              <a:t>-4.0%</a:t>
+              <a:t>-4.5%</a:t>
             </a:r>
           </a:p>
         </p:txBody>
@@ -4503,7 +4503,7 @@
                 </a:solidFill>
                 <a:latin typeface="Segoe UI"/>
               </a:rPr>
-              <a:t>NIFTY IT</a:t>
+              <a:t>Natural Gas</a:t>
             </a:r>
           </a:p>
         </p:txBody>
@@ -4537,7 +4537,7 @@
                 </a:solidFill>
                 <a:latin typeface="Segoe UI"/>
               </a:rPr>
-              <a:t>^CNXIT · RED</a:t>
+              <a:t>NG=F · RED</a:t>
             </a:r>
           </a:p>
         </p:txBody>
@@ -4571,7 +4571,7 @@
                 </a:solidFill>
                 <a:latin typeface="Segoe UI"/>
               </a:rPr>
-              <a:t>-3.8%</a:t>
+              <a:t>-4.5%</a:t>
             </a:r>
           </a:p>
         </p:txBody>
@@ -4629,7 +4629,7 @@
                 </a:solidFill>
                 <a:latin typeface="Segoe UI"/>
               </a:rPr>
-              <a:t>Tesla</a:t>
+              <a:t>NIFTY IT</a:t>
             </a:r>
           </a:p>
         </p:txBody>
@@ -4663,7 +4663,7 @@
                 </a:solidFill>
                 <a:latin typeface="Segoe UI"/>
               </a:rPr>
-              <a:t>TSLA · RED</a:t>
+              <a:t>^CNXIT · RED</a:t>
             </a:r>
           </a:p>
         </p:txBody>
@@ -4697,7 +4697,7 @@
                 </a:solidFill>
                 <a:latin typeface="Segoe UI"/>
               </a:rPr>
-              <a:t>-3.8%</a:t>
+              <a:t>-4.2%</a:t>
             </a:r>
           </a:p>
         </p:txBody>
@@ -4967,7 +4967,7 @@
                 </a:solidFill>
                 <a:latin typeface="Segoe UI"/>
               </a:rPr>
-              <a:t>Microsoft</a:t>
+              <a:t>US Energy</a:t>
             </a:r>
           </a:p>
         </p:txBody>
@@ -5035,7 +5035,7 @@
                 </a:solidFill>
                 <a:latin typeface="Segoe UI"/>
               </a:rPr>
-              <a:t>84%</a:t>
+              <a:t>86%</a:t>
             </a:r>
           </a:p>
         </p:txBody>
@@ -5103,7 +5103,7 @@
                 </a:solidFill>
                 <a:latin typeface="Segoe UI"/>
               </a:rPr>
-              <a:t>US Energy</a:t>
+              <a:t>Microsoft</a:t>
             </a:r>
           </a:p>
         </p:txBody>
@@ -5375,7 +5375,7 @@
                 </a:solidFill>
                 <a:latin typeface="Segoe UI"/>
               </a:rPr>
-              <a:t>Straits Times</a:t>
+              <a:t>US Technology</a:t>
             </a:r>
           </a:p>
         </p:txBody>
@@ -5443,7 +5443,7 @@
                 </a:solidFill>
                 <a:latin typeface="Segoe UI"/>
               </a:rPr>
-              <a:t>84%</a:t>
+              <a:t>93%</a:t>
             </a:r>
           </a:p>
         </p:txBody>
@@ -5511,7 +5511,7 @@
                 </a:solidFill>
                 <a:latin typeface="Segoe UI"/>
               </a:rPr>
-              <a:t>US Financials</a:t>
+              <a:t>Copper</a:t>
             </a:r>
           </a:p>
         </p:txBody>
@@ -5545,7 +5545,7 @@
                 </a:solidFill>
                 <a:latin typeface="Segoe UI"/>
               </a:rPr>
-              <a:t>STRONG BUY</a:t>
+              <a:t>BUY</a:t>
             </a:r>
           </a:p>
         </p:txBody>
@@ -5579,7 +5579,7 @@
                 </a:solidFill>
                 <a:latin typeface="Segoe UI"/>
               </a:rPr>
-              <a:t>83%</a:t>
+              <a:t>92%</a:t>
             </a:r>
           </a:p>
         </p:txBody>
@@ -5613,7 +5613,7 @@
                 </a:solidFill>
                 <a:latin typeface="Segoe UI"/>
               </a:rPr>
-              <a:t>above 200DMA · golden cross (50&gt;200) · MACD bearish</a:t>
+              <a:t>above 200DMA · golden cross (50&gt;200) · MACD bullish</a:t>
             </a:r>
           </a:p>
         </p:txBody>
@@ -5647,7 +5647,7 @@
                 </a:solidFill>
                 <a:latin typeface="Segoe UI"/>
               </a:rPr>
-              <a:t>US Technology</a:t>
+              <a:t>Crude Oil WTI</a:t>
             </a:r>
           </a:p>
         </p:txBody>
@@ -5681,7 +5681,7 @@
                 </a:solidFill>
                 <a:latin typeface="Segoe UI"/>
               </a:rPr>
-              <a:t>STRONG BUY</a:t>
+              <a:t>BUY</a:t>
             </a:r>
           </a:p>
         </p:txBody>
@@ -5715,7 +5715,7 @@
                 </a:solidFill>
                 <a:latin typeface="Segoe UI"/>
               </a:rPr>
-              <a:t>92%</a:t>
+              <a:t>73%</a:t>
             </a:r>
           </a:p>
         </p:txBody>
@@ -5749,7 +5749,7 @@
                 </a:solidFill>
                 <a:latin typeface="Segoe UI"/>
               </a:rPr>
-              <a:t>above 200DMA · golden cross (50&gt;200) · MACD bullish</a:t>
+              <a:t>above 200DMA · death cross (50&lt;200) · MACD bullish</a:t>
             </a:r>
           </a:p>
         </p:txBody>
@@ -5783,7 +5783,7 @@
                 </a:solidFill>
                 <a:latin typeface="Segoe UI"/>
               </a:rPr>
-              <a:t>Copper</a:t>
+              <a:t>Ethereum</a:t>
             </a:r>
           </a:p>
         </p:txBody>
@@ -5851,7 +5851,7 @@
                 </a:solidFill>
                 <a:latin typeface="Segoe UI"/>
               </a:rPr>
-              <a:t>92%</a:t>
+              <a:t>79%</a:t>
             </a:r>
           </a:p>
         </p:txBody>
@@ -5885,7 +5885,7 @@
                 </a:solidFill>
                 <a:latin typeface="Segoe UI"/>
               </a:rPr>
-              <a:t>above 200DMA · golden cross (50&gt;200) · MACD bullish</a:t>
+              <a:t>above 200DMA · golden cross (50&gt;200) · MACD bearish</a:t>
             </a:r>
           </a:p>
         </p:txBody>
@@ -5919,7 +5919,7 @@
                 </a:solidFill>
                 <a:latin typeface="Segoe UI"/>
               </a:rPr>
-              <a:t>Ethereum</a:t>
+              <a:t>Straits Times</a:t>
             </a:r>
           </a:p>
         </p:txBody>
@@ -5987,7 +5987,7 @@
                 </a:solidFill>
                 <a:latin typeface="Segoe UI"/>
               </a:rPr>
-              <a:t>78%</a:t>
+              <a:t>71%</a:t>
             </a:r>
           </a:p>
         </p:txBody>
@@ -6123,7 +6123,7 @@
                 </a:solidFill>
                 <a:latin typeface="Segoe UI"/>
               </a:rPr>
-              <a:t>76%</a:t>
+              <a:t>77%</a:t>
             </a:r>
           </a:p>
         </p:txBody>
@@ -6259,7 +6259,7 @@
                 </a:solidFill>
                 <a:latin typeface="Segoe UI"/>
               </a:rPr>
-              <a:t>76%</a:t>
+              <a:t>70%</a:t>
             </a:r>
           </a:p>
         </p:txBody>
@@ -6463,7 +6463,7 @@
                 </a:solidFill>
                 <a:latin typeface="Segoe UI"/>
               </a:rPr>
-              <a:t>DAX</a:t>
+              <a:t>US Financials</a:t>
             </a:r>
           </a:p>
         </p:txBody>
@@ -6659,7 +6659,7 @@
                 </a:solidFill>
                 <a:latin typeface="Segoe UI"/>
               </a:rPr>
-              <a:t>Base currency INR · USD/INR 94.8</a:t>
+              <a:t>Base currency INR · USD/INR 94.82</a:t>
             </a:r>
           </a:p>
         </p:txBody>
@@ -7067,7 +7067,7 @@
                 </a:solidFill>
                 <a:latin typeface="Segoe UI"/>
               </a:rPr>
-              <a:t>78,729</a:t>
+              <a:t>78,164</a:t>
             </a:r>
           </a:p>
         </p:txBody>
@@ -7101,7 +7101,7 @@
                 </a:solidFill>
                 <a:latin typeface="Segoe UI"/>
               </a:rPr>
-              <a:t>Rs 746,353</a:t>
+              <a:t>Rs 741,175</a:t>
             </a:r>
           </a:p>
         </p:txBody>
@@ -7135,7 +7135,7 @@
                 </a:solidFill>
                 <a:latin typeface="Segoe UI"/>
               </a:rPr>
-              <a:t>Rs 177,553</a:t>
+              <a:t>Rs 172,237</a:t>
             </a:r>
           </a:p>
         </p:txBody>
@@ -7169,7 +7169,7 @@
                 </a:solidFill>
                 <a:latin typeface="Segoe UI"/>
               </a:rPr>
-              <a:t>+31.2%</a:t>
+              <a:t>+30.3%</a:t>
             </a:r>
           </a:p>
         </p:txBody>
@@ -7203,7 +7203,7 @@
                 </a:solidFill>
                 <a:latin typeface="Segoe UI"/>
               </a:rPr>
-              <a:t>-0.5%</a:t>
+              <a:t>-0.3%</a:t>
             </a:r>
           </a:p>
         </p:txBody>
@@ -7339,7 +7339,7 @@
                 </a:solidFill>
                 <a:latin typeface="Segoe UI"/>
               </a:rPr>
-              <a:t>4,404</a:t>
+              <a:t>4,441</a:t>
             </a:r>
           </a:p>
         </p:txBody>
@@ -7373,7 +7373,7 @@
                 </a:solidFill>
                 <a:latin typeface="Segoe UI"/>
               </a:rPr>
-              <a:t>Rs 417,499</a:t>
+              <a:t>Rs 421,147</a:t>
             </a:r>
           </a:p>
         </p:txBody>
@@ -7407,7 +7407,7 @@
                 </a:solidFill>
                 <a:latin typeface="Segoe UI"/>
               </a:rPr>
-              <a:t>Rs 199,459</a:t>
+              <a:t>Rs 203,054</a:t>
             </a:r>
           </a:p>
         </p:txBody>
@@ -7441,7 +7441,7 @@
                 </a:solidFill>
                 <a:latin typeface="Segoe UI"/>
               </a:rPr>
-              <a:t>+91.5%</a:t>
+              <a:t>+93.1%</a:t>
             </a:r>
           </a:p>
         </p:txBody>
@@ -7611,7 +7611,7 @@
                 </a:solidFill>
                 <a:latin typeface="Segoe UI"/>
               </a:rPr>
-              <a:t>320</a:t>
+              <a:t>316</a:t>
             </a:r>
           </a:p>
         </p:txBody>
@@ -7645,7 +7645,7 @@
                 </a:solidFill>
                 <a:latin typeface="Segoe UI"/>
               </a:rPr>
-              <a:t>Rs 303,332</a:t>
+              <a:t>Rs 299,849</a:t>
             </a:r>
           </a:p>
         </p:txBody>
@@ -7679,7 +7679,7 @@
                 </a:solidFill>
                 <a:latin typeface="Segoe UI"/>
               </a:rPr>
-              <a:t>Rs 127,952</a:t>
+              <a:t>Rs 124,427</a:t>
             </a:r>
           </a:p>
         </p:txBody>
@@ -7713,7 +7713,7 @@
                 </a:solidFill>
                 <a:latin typeface="Segoe UI"/>
               </a:rPr>
-              <a:t>+73.0%</a:t>
+              <a:t>+70.9%</a:t>
             </a:r>
           </a:p>
         </p:txBody>
@@ -7883,7 +7883,7 @@
                 </a:solidFill>
                 <a:latin typeface="Segoe UI"/>
               </a:rPr>
-              <a:t>230</a:t>
+              <a:t>226</a:t>
             </a:r>
           </a:p>
         </p:txBody>
@@ -7917,7 +7917,7 @@
                 </a:solidFill>
                 <a:latin typeface="Segoe UI"/>
               </a:rPr>
-              <a:t>Rs 174,705</a:t>
+              <a:t>Rs 171,235</a:t>
             </a:r>
           </a:p>
         </p:txBody>
@@ -7951,7 +7951,7 @@
                 </a:solidFill>
                 <a:latin typeface="Segoe UI"/>
               </a:rPr>
-              <a:t>Rs -166,575</a:t>
+              <a:t>Rs -170,128</a:t>
             </a:r>
           </a:p>
         </p:txBody>
@@ -7985,7 +7985,7 @@
                 </a:solidFill>
                 <a:latin typeface="Segoe UI"/>
               </a:rPr>
-              <a:t>-48.8%</a:t>
+              <a:t>-49.8%</a:t>
             </a:r>
           </a:p>
         </p:txBody>
@@ -8155,7 +8155,7 @@
                 </a:solidFill>
                 <a:latin typeface="Segoe UI"/>
               </a:rPr>
-              <a:t>1,082</a:t>
+              <a:t>1,035</a:t>
             </a:r>
           </a:p>
         </p:txBody>
@@ -8189,7 +8189,7 @@
                 </a:solidFill>
                 <a:latin typeface="Segoe UI"/>
               </a:rPr>
-              <a:t>Rs 86,560</a:t>
+              <a:t>Rs 82,800</a:t>
             </a:r>
           </a:p>
         </p:txBody>
@@ -8223,7 +8223,7 @@
                 </a:solidFill>
                 <a:latin typeface="Segoe UI"/>
               </a:rPr>
-              <a:t>Rs -25,440</a:t>
+              <a:t>Rs -29,200</a:t>
             </a:r>
           </a:p>
         </p:txBody>
@@ -8257,7 +8257,7 @@
                 </a:solidFill>
                 <a:latin typeface="Segoe UI"/>
               </a:rPr>
-              <a:t>-22.7%</a:t>
+              <a:t>-26.1%</a:t>
             </a:r>
           </a:p>
         </p:txBody>
@@ -8427,7 +8427,7 @@
                 </a:solidFill>
                 <a:latin typeface="Segoe UI"/>
               </a:rPr>
-              <a:t>1,295</a:t>
+              <a:t>1,279</a:t>
             </a:r>
           </a:p>
         </p:txBody>
@@ -8461,7 +8461,7 @@
                 </a:solidFill>
                 <a:latin typeface="Segoe UI"/>
               </a:rPr>
-              <a:t>Rs 64,745</a:t>
+              <a:t>Rs 63,950</a:t>
             </a:r>
           </a:p>
         </p:txBody>
@@ -8495,7 +8495,7 @@
                 </a:solidFill>
                 <a:latin typeface="Segoe UI"/>
               </a:rPr>
-              <a:t>Rs -57,755</a:t>
+              <a:t>Rs -58,550</a:t>
             </a:r>
           </a:p>
         </p:txBody>
@@ -8529,7 +8529,7 @@
                 </a:solidFill>
                 <a:latin typeface="Segoe UI"/>
               </a:rPr>
-              <a:t>-47.1%</a:t>
+              <a:t>-47.8%</a:t>
             </a:r>
           </a:p>
         </p:txBody>
@@ -8699,7 +8699,7 @@
                 </a:solidFill>
                 <a:latin typeface="Segoe UI"/>
               </a:rPr>
-              <a:t>2,256</a:t>
+              <a:t>2,208</a:t>
             </a:r>
           </a:p>
         </p:txBody>
@@ -8733,7 +8733,7 @@
                 </a:solidFill>
                 <a:latin typeface="Segoe UI"/>
               </a:rPr>
-              <a:t>Rs 56,388</a:t>
+              <a:t>Rs 55,200</a:t>
             </a:r>
           </a:p>
         </p:txBody>
@@ -8767,7 +8767,7 @@
                 </a:solidFill>
                 <a:latin typeface="Segoe UI"/>
               </a:rPr>
-              <a:t>Rs -33,612</a:t>
+              <a:t>Rs -34,800</a:t>
             </a:r>
           </a:p>
         </p:txBody>
@@ -8801,7 +8801,7 @@
                 </a:solidFill>
                 <a:latin typeface="Segoe UI"/>
               </a:rPr>
-              <a:t>-37.4%</a:t>
+              <a:t>-38.7%</a:t>
             </a:r>
           </a:p>
         </p:txBody>
@@ -8971,7 +8971,7 @@
                 </a:solidFill>
                 <a:latin typeface="Segoe UI"/>
               </a:rPr>
-              <a:t>703</a:t>
+              <a:t>687</a:t>
             </a:r>
           </a:p>
         </p:txBody>
@@ -9005,7 +9005,7 @@
                 </a:solidFill>
                 <a:latin typeface="Segoe UI"/>
               </a:rPr>
-              <a:t>Rs 42,180</a:t>
+              <a:t>Rs 41,226</a:t>
             </a:r>
           </a:p>
         </p:txBody>
@@ -9039,7 +9039,7 @@
                 </a:solidFill>
                 <a:latin typeface="Segoe UI"/>
               </a:rPr>
-              <a:t>Rs -49,020</a:t>
+              <a:t>Rs -49,974</a:t>
             </a:r>
           </a:p>
         </p:txBody>
@@ -9073,7 +9073,7 @@
                 </a:solidFill>
                 <a:latin typeface="Segoe UI"/>
               </a:rPr>
-              <a:t>-53.8%</a:t>
+              <a:t>-54.8%</a:t>
             </a:r>
           </a:p>
         </p:txBody>
@@ -9141,7 +9141,7 @@
                 </a:solidFill>
                 <a:latin typeface="Segoe UI"/>
               </a:rPr>
-              <a:t>Total Rs 1,891,761 | P&amp;L Rs 172,561 (+10.0%) | Sharpe 0.09 | Vol 19.59% | VaR95 -1.9%/day</a:t>
+              <a:t>Total Rs 1,876,583 | P&amp;L Rs 157,067 (+9.1%) | Sharpe 0.02 | Vol 19.65% | VaR95 -1.9%/day</a:t>
             </a:r>
           </a:p>
         </p:txBody>

--- a/docs/pmr_daily.pptx
+++ b/docs/pmr_daily.pptx
@@ -3197,7 +3197,7 @@
                 </a:solidFill>
                 <a:latin typeface="Segoe UI"/>
               </a:rPr>
-              <a:t>Thursday, 10 Sep 2026 08:53 SGT</a:t>
+              <a:t>Friday, 11 Sep 2026 08:51 SGT</a:t>
             </a:r>
           </a:p>
         </p:txBody>
@@ -3265,7 +3265,7 @@
                 </a:solidFill>
                 <a:latin typeface="Segoe UI"/>
               </a:rPr>
-              <a:t>RAG 13R / 16A / 17G   |   58.7% above 200DMA   |   Portfolio Rs 1,876,583 (+9.1%)</a:t>
+              <a:t>RAG 15R / 16A / 15G   |   54.3% above 200DMA   |   Portfolio Rs 1,858,984 (+7.9%)</a:t>
             </a:r>
           </a:p>
         </p:txBody>
@@ -3529,7 +3529,7 @@
                 </a:solidFill>
                 <a:latin typeface="Segoe UI"/>
               </a:rPr>
-              <a:t>+12.6%</a:t>
+              <a:t>+20.3%</a:t>
             </a:r>
           </a:p>
         </p:txBody>
@@ -3655,7 +3655,7 @@
                 </a:solidFill>
                 <a:latin typeface="Segoe UI"/>
               </a:rPr>
-              <a:t>+5.8%</a:t>
+              <a:t>+4.1%</a:t>
             </a:r>
           </a:p>
         </p:txBody>
@@ -3713,7 +3713,7 @@
                 </a:solidFill>
                 <a:latin typeface="Segoe UI"/>
               </a:rPr>
-              <a:t>Copper</a:t>
+              <a:t>US Energy</a:t>
             </a:r>
           </a:p>
         </p:txBody>
@@ -3747,7 +3747,7 @@
                 </a:solidFill>
                 <a:latin typeface="Segoe UI"/>
               </a:rPr>
-              <a:t>HG=F · GREEN</a:t>
+              <a:t>XLE · GREEN</a:t>
             </a:r>
           </a:p>
         </p:txBody>
@@ -3781,7 +3781,7 @@
                 </a:solidFill>
                 <a:latin typeface="Segoe UI"/>
               </a:rPr>
-              <a:t>+4.0%</a:t>
+              <a:t>+2.1%</a:t>
             </a:r>
           </a:p>
         </p:txBody>
@@ -3839,7 +3839,7 @@
                 </a:solidFill>
                 <a:latin typeface="Segoe UI"/>
               </a:rPr>
-              <a:t>Silver</a:t>
+              <a:t>ITC</a:t>
             </a:r>
           </a:p>
         </p:txBody>
@@ -3873,7 +3873,7 @@
                 </a:solidFill>
                 <a:latin typeface="Segoe UI"/>
               </a:rPr>
-              <a:t>SI=F · RED</a:t>
+              <a:t>ITC.NS · RED</a:t>
             </a:r>
           </a:p>
         </p:txBody>
@@ -3907,7 +3907,7 @@
                 </a:solidFill>
                 <a:latin typeface="Segoe UI"/>
               </a:rPr>
-              <a:t>+2.5%</a:t>
+              <a:t>+1.5%</a:t>
             </a:r>
           </a:p>
         </p:txBody>
@@ -4033,7 +4033,7 @@
                 </a:solidFill>
                 <a:latin typeface="Segoe UI"/>
               </a:rPr>
-              <a:t>+2.2%</a:t>
+              <a:t>+1.3%</a:t>
             </a:r>
           </a:p>
         </p:txBody>
@@ -4193,7 +4193,7 @@
                 </a:solidFill>
                 <a:latin typeface="Segoe UI"/>
               </a:rPr>
-              <a:t>-8.7%</a:t>
+              <a:t>-8.6%</a:t>
             </a:r>
           </a:p>
         </p:txBody>
@@ -4319,7 +4319,7 @@
                 </a:solidFill>
                 <a:latin typeface="Segoe UI"/>
               </a:rPr>
-              <a:t>-8.0%</a:t>
+              <a:t>-8.1%</a:t>
             </a:r>
           </a:p>
         </p:txBody>
@@ -4377,7 +4377,7 @@
                 </a:solidFill>
                 <a:latin typeface="Segoe UI"/>
               </a:rPr>
-              <a:t>ICICI Bank</a:t>
+              <a:t>NIFTY IT</a:t>
             </a:r>
           </a:p>
         </p:txBody>
@@ -4407,11 +4407,11 @@
             <a:r>
               <a:rPr sz="900" b="0">
                 <a:solidFill>
-                  <a:srgbClr val="22C55E"/>
-                </a:solidFill>
-                <a:latin typeface="Segoe UI"/>
-              </a:rPr>
-              <a:t>ICICIBANK.NS · GREEN</a:t>
+                  <a:srgbClr val="EF4444"/>
+                </a:solidFill>
+                <a:latin typeface="Segoe UI"/>
+              </a:rPr>
+              <a:t>^CNXIT · RED</a:t>
             </a:r>
           </a:p>
         </p:txBody>
@@ -4445,7 +4445,7 @@
                 </a:solidFill>
                 <a:latin typeface="Segoe UI"/>
               </a:rPr>
-              <a:t>-4.5%</a:t>
+              <a:t>-7.3%</a:t>
             </a:r>
           </a:p>
         </p:txBody>
@@ -4503,7 +4503,7 @@
                 </a:solidFill>
                 <a:latin typeface="Segoe UI"/>
               </a:rPr>
-              <a:t>Natural Gas</a:t>
+              <a:t>ICICI Bank</a:t>
             </a:r>
           </a:p>
         </p:txBody>
@@ -4533,11 +4533,11 @@
             <a:r>
               <a:rPr sz="900" b="0">
                 <a:solidFill>
-                  <a:srgbClr val="EF4444"/>
-                </a:solidFill>
-                <a:latin typeface="Segoe UI"/>
-              </a:rPr>
-              <a:t>NG=F · RED</a:t>
+                  <a:srgbClr val="22C55E"/>
+                </a:solidFill>
+                <a:latin typeface="Segoe UI"/>
+              </a:rPr>
+              <a:t>ICICIBANK.NS · GREEN</a:t>
             </a:r>
           </a:p>
         </p:txBody>
@@ -4571,7 +4571,7 @@
                 </a:solidFill>
                 <a:latin typeface="Segoe UI"/>
               </a:rPr>
-              <a:t>-4.5%</a:t>
+              <a:t>-4.8%</a:t>
             </a:r>
           </a:p>
         </p:txBody>
@@ -4629,7 +4629,7 @@
                 </a:solidFill>
                 <a:latin typeface="Segoe UI"/>
               </a:rPr>
-              <a:t>NIFTY IT</a:t>
+              <a:t>Nikkei 225</a:t>
             </a:r>
           </a:p>
         </p:txBody>
@@ -4663,7 +4663,7 @@
                 </a:solidFill>
                 <a:latin typeface="Segoe UI"/>
               </a:rPr>
-              <a:t>^CNXIT · RED</a:t>
+              <a:t>^N225 · RED</a:t>
             </a:r>
           </a:p>
         </p:txBody>
@@ -4697,7 +4697,7 @@
                 </a:solidFill>
                 <a:latin typeface="Segoe UI"/>
               </a:rPr>
-              <a:t>-4.2%</a:t>
+              <a:t>-4.4%</a:t>
             </a:r>
           </a:p>
         </p:txBody>
@@ -4967,7 +4967,7 @@
                 </a:solidFill>
                 <a:latin typeface="Segoe UI"/>
               </a:rPr>
-              <a:t>US Energy</a:t>
+              <a:t>Microsoft</a:t>
             </a:r>
           </a:p>
         </p:txBody>
@@ -5035,7 +5035,7 @@
                 </a:solidFill>
                 <a:latin typeface="Segoe UI"/>
               </a:rPr>
-              <a:t>86%</a:t>
+              <a:t>85%</a:t>
             </a:r>
           </a:p>
         </p:txBody>
@@ -5103,7 +5103,7 @@
                 </a:solidFill>
                 <a:latin typeface="Segoe UI"/>
               </a:rPr>
-              <a:t>Microsoft</a:t>
+              <a:t>Nvidia</a:t>
             </a:r>
           </a:p>
         </p:txBody>
@@ -5171,7 +5171,7 @@
                 </a:solidFill>
                 <a:latin typeface="Segoe UI"/>
               </a:rPr>
-              <a:t>84%</a:t>
+              <a:t>82%</a:t>
             </a:r>
           </a:p>
         </p:txBody>
@@ -5239,7 +5239,7 @@
                 </a:solidFill>
                 <a:latin typeface="Segoe UI"/>
               </a:rPr>
-              <a:t>Nvidia</a:t>
+              <a:t>US Technology</a:t>
             </a:r>
           </a:p>
         </p:txBody>
@@ -5307,7 +5307,7 @@
                 </a:solidFill>
                 <a:latin typeface="Segoe UI"/>
               </a:rPr>
-              <a:t>95%</a:t>
+              <a:t>94%</a:t>
             </a:r>
           </a:p>
         </p:txBody>
@@ -5375,7 +5375,7 @@
                 </a:solidFill>
                 <a:latin typeface="Segoe UI"/>
               </a:rPr>
-              <a:t>US Technology</a:t>
+              <a:t>US Financials</a:t>
             </a:r>
           </a:p>
         </p:txBody>
@@ -5443,7 +5443,7 @@
                 </a:solidFill>
                 <a:latin typeface="Segoe UI"/>
               </a:rPr>
-              <a:t>93%</a:t>
+              <a:t>81%</a:t>
             </a:r>
           </a:p>
         </p:txBody>
@@ -5477,7 +5477,7 @@
                 </a:solidFill>
                 <a:latin typeface="Segoe UI"/>
               </a:rPr>
-              <a:t>above 200DMA · golden cross (50&gt;200) · MACD bullish</a:t>
+              <a:t>above 200DMA · golden cross (50&gt;200) · MACD bearish</a:t>
             </a:r>
           </a:p>
         </p:txBody>
@@ -5545,7 +5545,7 @@
                 </a:solidFill>
                 <a:latin typeface="Segoe UI"/>
               </a:rPr>
-              <a:t>BUY</a:t>
+              <a:t>STRONG BUY</a:t>
             </a:r>
           </a:p>
         </p:txBody>
@@ -5579,7 +5579,7 @@
                 </a:solidFill>
                 <a:latin typeface="Segoe UI"/>
               </a:rPr>
-              <a:t>92%</a:t>
+              <a:t>80%</a:t>
             </a:r>
           </a:p>
         </p:txBody>
@@ -5613,7 +5613,7 @@
                 </a:solidFill>
                 <a:latin typeface="Segoe UI"/>
               </a:rPr>
-              <a:t>above 200DMA · golden cross (50&gt;200) · MACD bullish</a:t>
+              <a:t>above 200DMA · golden cross (50&gt;200) · MACD bearish</a:t>
             </a:r>
           </a:p>
         </p:txBody>
@@ -5647,7 +5647,7 @@
                 </a:solidFill>
                 <a:latin typeface="Segoe UI"/>
               </a:rPr>
-              <a:t>Crude Oil WTI</a:t>
+              <a:t>US 1-3Y Treasury</a:t>
             </a:r>
           </a:p>
         </p:txBody>
@@ -5681,7 +5681,7 @@
                 </a:solidFill>
                 <a:latin typeface="Segoe UI"/>
               </a:rPr>
-              <a:t>BUY</a:t>
+              <a:t>STRONG BUY</a:t>
             </a:r>
           </a:p>
         </p:txBody>
@@ -5715,7 +5715,7 @@
                 </a:solidFill>
                 <a:latin typeface="Segoe UI"/>
               </a:rPr>
-              <a:t>73%</a:t>
+              <a:t>80%</a:t>
             </a:r>
           </a:p>
         </p:txBody>
@@ -5749,7 +5749,7 @@
                 </a:solidFill>
                 <a:latin typeface="Segoe UI"/>
               </a:rPr>
-              <a:t>above 200DMA · death cross (50&lt;200) · MACD bullish</a:t>
+              <a:t>above 200DMA · golden cross (50&gt;200) · MACD bearish</a:t>
             </a:r>
           </a:p>
         </p:txBody>
@@ -5783,7 +5783,7 @@
                 </a:solidFill>
                 <a:latin typeface="Segoe UI"/>
               </a:rPr>
-              <a:t>Ethereum</a:t>
+              <a:t>US Energy</a:t>
             </a:r>
           </a:p>
         </p:txBody>
@@ -5851,7 +5851,7 @@
                 </a:solidFill>
                 <a:latin typeface="Segoe UI"/>
               </a:rPr>
-              <a:t>79%</a:t>
+              <a:t>81%</a:t>
             </a:r>
           </a:p>
         </p:txBody>
@@ -5919,7 +5919,7 @@
                 </a:solidFill>
                 <a:latin typeface="Segoe UI"/>
               </a:rPr>
-              <a:t>Straits Times</a:t>
+              <a:t>Crude Oil WTI</a:t>
             </a:r>
           </a:p>
         </p:txBody>
@@ -5987,7 +5987,7 @@
                 </a:solidFill>
                 <a:latin typeface="Segoe UI"/>
               </a:rPr>
-              <a:t>71%</a:t>
+              <a:t>75%</a:t>
             </a:r>
           </a:p>
         </p:txBody>
@@ -6021,7 +6021,7 @@
                 </a:solidFill>
                 <a:latin typeface="Segoe UI"/>
               </a:rPr>
-              <a:t>above 200DMA · golden cross (50&gt;200) · MACD bearish</a:t>
+              <a:t>above 200DMA · death cross (50&lt;200) · MACD bullish</a:t>
             </a:r>
           </a:p>
         </p:txBody>
@@ -6055,7 +6055,7 @@
                 </a:solidFill>
                 <a:latin typeface="Segoe UI"/>
               </a:rPr>
-              <a:t>Bitcoin</a:t>
+              <a:t>Ethereum</a:t>
             </a:r>
           </a:p>
         </p:txBody>
@@ -6123,7 +6123,7 @@
                 </a:solidFill>
                 <a:latin typeface="Segoe UI"/>
               </a:rPr>
-              <a:t>77%</a:t>
+              <a:t>78%</a:t>
             </a:r>
           </a:p>
         </p:txBody>
@@ -6191,7 +6191,7 @@
                 </a:solidFill>
                 <a:latin typeface="Segoe UI"/>
               </a:rPr>
-              <a:t>Solana</a:t>
+              <a:t>Straits Times</a:t>
             </a:r>
           </a:p>
         </p:txBody>
@@ -6259,7 +6259,7 @@
                 </a:solidFill>
                 <a:latin typeface="Segoe UI"/>
               </a:rPr>
-              <a:t>70%</a:t>
+              <a:t>71%</a:t>
             </a:r>
           </a:p>
         </p:txBody>
@@ -6327,7 +6327,7 @@
                 </a:solidFill>
                 <a:latin typeface="Segoe UI"/>
               </a:rPr>
-              <a:t>FTSE 100</a:t>
+              <a:t>Bitcoin</a:t>
             </a:r>
           </a:p>
         </p:txBody>
@@ -6395,7 +6395,7 @@
                 </a:solidFill>
                 <a:latin typeface="Segoe UI"/>
               </a:rPr>
-              <a:t>68%</a:t>
+              <a:t>76%</a:t>
             </a:r>
           </a:p>
         </p:txBody>
@@ -6463,7 +6463,7 @@
                 </a:solidFill>
                 <a:latin typeface="Segoe UI"/>
               </a:rPr>
-              <a:t>US Financials</a:t>
+              <a:t>Solana</a:t>
             </a:r>
           </a:p>
         </p:txBody>
@@ -6531,7 +6531,7 @@
                 </a:solidFill>
                 <a:latin typeface="Segoe UI"/>
               </a:rPr>
-              <a:t>80%</a:t>
+              <a:t>70%</a:t>
             </a:r>
           </a:p>
         </p:txBody>
@@ -6659,7 +6659,7 @@
                 </a:solidFill>
                 <a:latin typeface="Segoe UI"/>
               </a:rPr>
-              <a:t>Base currency INR · USD/INR 94.82</a:t>
+              <a:t>Base currency INR · USD/INR 95.11</a:t>
             </a:r>
           </a:p>
         </p:txBody>
@@ -7067,7 +7067,7 @@
                 </a:solidFill>
                 <a:latin typeface="Segoe UI"/>
               </a:rPr>
-              <a:t>78,164</a:t>
+              <a:t>76,821</a:t>
             </a:r>
           </a:p>
         </p:txBody>
@@ -7101,7 +7101,7 @@
                 </a:solidFill>
                 <a:latin typeface="Segoe UI"/>
               </a:rPr>
-              <a:t>Rs 741,175</a:t>
+              <a:t>Rs 730,660</a:t>
             </a:r>
           </a:p>
         </p:txBody>
@@ -7135,7 +7135,7 @@
                 </a:solidFill>
                 <a:latin typeface="Segoe UI"/>
               </a:rPr>
-              <a:t>Rs 172,237</a:t>
+              <a:t>Rs 159,989</a:t>
             </a:r>
           </a:p>
         </p:txBody>
@@ -7169,7 +7169,7 @@
                 </a:solidFill>
                 <a:latin typeface="Segoe UI"/>
               </a:rPr>
-              <a:t>+30.3%</a:t>
+              <a:t>+28.0%</a:t>
             </a:r>
           </a:p>
         </p:txBody>
@@ -7203,7 +7203,7 @@
                 </a:solidFill>
                 <a:latin typeface="Segoe UI"/>
               </a:rPr>
-              <a:t>-0.3%</a:t>
+              <a:t>-1.8%</a:t>
             </a:r>
           </a:p>
         </p:txBody>
@@ -7339,7 +7339,7 @@
                 </a:solidFill>
                 <a:latin typeface="Segoe UI"/>
               </a:rPr>
-              <a:t>4,441</a:t>
+              <a:t>4,362</a:t>
             </a:r>
           </a:p>
         </p:txBody>
@@ -7373,7 +7373,7 @@
                 </a:solidFill>
                 <a:latin typeface="Segoe UI"/>
               </a:rPr>
-              <a:t>Rs 421,147</a:t>
+              <a:t>Rs 414,859</a:t>
             </a:r>
           </a:p>
         </p:txBody>
@@ -7407,7 +7407,7 @@
                 </a:solidFill>
                 <a:latin typeface="Segoe UI"/>
               </a:rPr>
-              <a:t>Rs 203,054</a:t>
+              <a:t>Rs 196,101</a:t>
             </a:r>
           </a:p>
         </p:txBody>
@@ -7441,7 +7441,7 @@
                 </a:solidFill>
                 <a:latin typeface="Segoe UI"/>
               </a:rPr>
-              <a:t>+93.1%</a:t>
+              <a:t>+89.6%</a:t>
             </a:r>
           </a:p>
         </p:txBody>
@@ -7611,7 +7611,7 @@
                 </a:solidFill>
                 <a:latin typeface="Segoe UI"/>
               </a:rPr>
-              <a:t>316</a:t>
+              <a:t>315</a:t>
             </a:r>
           </a:p>
         </p:txBody>
@@ -7645,7 +7645,7 @@
                 </a:solidFill>
                 <a:latin typeface="Segoe UI"/>
               </a:rPr>
-              <a:t>Rs 299,849</a:t>
+              <a:t>Rs 299,926</a:t>
             </a:r>
           </a:p>
         </p:txBody>
@@ -7679,7 +7679,7 @@
                 </a:solidFill>
                 <a:latin typeface="Segoe UI"/>
               </a:rPr>
-              <a:t>Rs 124,427</a:t>
+              <a:t>Rs 123,969</a:t>
             </a:r>
           </a:p>
         </p:txBody>
@@ -7713,7 +7713,7 @@
                 </a:solidFill>
                 <a:latin typeface="Segoe UI"/>
               </a:rPr>
-              <a:t>+70.9%</a:t>
+              <a:t>+70.5%</a:t>
             </a:r>
           </a:p>
         </p:txBody>
@@ -7883,7 +7883,7 @@
                 </a:solidFill>
                 <a:latin typeface="Segoe UI"/>
               </a:rPr>
-              <a:t>226</a:t>
+              <a:t>224</a:t>
             </a:r>
           </a:p>
         </p:txBody>
@@ -7917,7 +7917,7 @@
                 </a:solidFill>
                 <a:latin typeface="Segoe UI"/>
               </a:rPr>
-              <a:t>Rs 171,235</a:t>
+              <a:t>Rs 170,189</a:t>
             </a:r>
           </a:p>
         </p:txBody>
@@ -7951,7 +7951,7 @@
                 </a:solidFill>
                 <a:latin typeface="Segoe UI"/>
               </a:rPr>
-              <a:t>Rs -170,128</a:t>
+              <a:t>Rs -172,213</a:t>
             </a:r>
           </a:p>
         </p:txBody>
@@ -7985,7 +7985,7 @@
                 </a:solidFill>
                 <a:latin typeface="Segoe UI"/>
               </a:rPr>
-              <a:t>-49.8%</a:t>
+              <a:t>-50.3%</a:t>
             </a:r>
           </a:p>
         </p:txBody>
@@ -8155,7 +8155,7 @@
                 </a:solidFill>
                 <a:latin typeface="Segoe UI"/>
               </a:rPr>
-              <a:t>1,035</a:t>
+              <a:t>1,036</a:t>
             </a:r>
           </a:p>
         </p:txBody>
@@ -8189,7 +8189,7 @@
                 </a:solidFill>
                 <a:latin typeface="Segoe UI"/>
               </a:rPr>
-              <a:t>Rs 82,800</a:t>
+              <a:t>Rs 82,920</a:t>
             </a:r>
           </a:p>
         </p:txBody>
@@ -8223,7 +8223,7 @@
                 </a:solidFill>
                 <a:latin typeface="Segoe UI"/>
               </a:rPr>
-              <a:t>Rs -29,200</a:t>
+              <a:t>Rs -29,080</a:t>
             </a:r>
           </a:p>
         </p:txBody>
@@ -8257,7 +8257,7 @@
                 </a:solidFill>
                 <a:latin typeface="Segoe UI"/>
               </a:rPr>
-              <a:t>-26.1%</a:t>
+              <a:t>-26.0%</a:t>
             </a:r>
           </a:p>
         </p:txBody>
@@ -8427,7 +8427,7 @@
                 </a:solidFill>
                 <a:latin typeface="Segoe UI"/>
               </a:rPr>
-              <a:t>1,279</a:t>
+              <a:t>1,274</a:t>
             </a:r>
           </a:p>
         </p:txBody>
@@ -8461,7 +8461,7 @@
                 </a:solidFill>
                 <a:latin typeface="Segoe UI"/>
               </a:rPr>
-              <a:t>Rs 63,950</a:t>
+              <a:t>Rs 63,700</a:t>
             </a:r>
           </a:p>
         </p:txBody>
@@ -8495,7 +8495,7 @@
                 </a:solidFill>
                 <a:latin typeface="Segoe UI"/>
               </a:rPr>
-              <a:t>Rs -58,550</a:t>
+              <a:t>Rs -58,800</a:t>
             </a:r>
           </a:p>
         </p:txBody>
@@ -8529,7 +8529,7 @@
                 </a:solidFill>
                 <a:latin typeface="Segoe UI"/>
               </a:rPr>
-              <a:t>-47.8%</a:t>
+              <a:t>-48.0%</a:t>
             </a:r>
           </a:p>
         </p:txBody>
@@ -8699,7 +8699,7 @@
                 </a:solidFill>
                 <a:latin typeface="Segoe UI"/>
               </a:rPr>
-              <a:t>2,208</a:t>
+              <a:t>2,204</a:t>
             </a:r>
           </a:p>
         </p:txBody>
@@ -8733,7 +8733,7 @@
                 </a:solidFill>
                 <a:latin typeface="Segoe UI"/>
               </a:rPr>
-              <a:t>Rs 55,200</a:t>
+              <a:t>Rs 55,103</a:t>
             </a:r>
           </a:p>
         </p:txBody>
@@ -8767,7 +8767,7 @@
                 </a:solidFill>
                 <a:latin typeface="Segoe UI"/>
               </a:rPr>
-              <a:t>Rs -34,800</a:t>
+              <a:t>Rs -34,897</a:t>
             </a:r>
           </a:p>
         </p:txBody>
@@ -8801,7 +8801,7 @@
                 </a:solidFill>
                 <a:latin typeface="Segoe UI"/>
               </a:rPr>
-              <a:t>-38.7%</a:t>
+              <a:t>-38.8%</a:t>
             </a:r>
           </a:p>
         </p:txBody>
@@ -8971,7 +8971,7 @@
                 </a:solidFill>
                 <a:latin typeface="Segoe UI"/>
               </a:rPr>
-              <a:t>687</a:t>
+              <a:t>694</a:t>
             </a:r>
           </a:p>
         </p:txBody>
@@ -9005,7 +9005,7 @@
                 </a:solidFill>
                 <a:latin typeface="Segoe UI"/>
               </a:rPr>
-              <a:t>Rs 41,226</a:t>
+              <a:t>Rs 41,628</a:t>
             </a:r>
           </a:p>
         </p:txBody>
@@ -9039,7 +9039,7 @@
                 </a:solidFill>
                 <a:latin typeface="Segoe UI"/>
               </a:rPr>
-              <a:t>Rs -49,974</a:t>
+              <a:t>Rs -49,572</a:t>
             </a:r>
           </a:p>
         </p:txBody>
@@ -9073,7 +9073,7 @@
                 </a:solidFill>
                 <a:latin typeface="Segoe UI"/>
               </a:rPr>
-              <a:t>-54.8%</a:t>
+              <a:t>-54.4%</a:t>
             </a:r>
           </a:p>
         </p:txBody>
@@ -9141,7 +9141,7 @@
                 </a:solidFill>
                 <a:latin typeface="Segoe UI"/>
               </a:rPr>
-              <a:t>Total Rs 1,876,583 | P&amp;L Rs 157,067 (+9.1%) | Sharpe 0.02 | Vol 19.65% | VaR95 -1.9%/day</a:t>
+              <a:t>Total Rs 1,858,984 | P&amp;L Rs 135,497 (+7.9%) | Sharpe -0.08 | Vol 19.59% | VaR95 -1.9%/day</a:t>
             </a:r>
           </a:p>
         </p:txBody>

--- a/docs/pmr_daily.pptx
+++ b/docs/pmr_daily.pptx
@@ -3197,7 +3197,7 @@
                 </a:solidFill>
                 <a:latin typeface="Segoe UI"/>
               </a:rPr>
-              <a:t>Friday, 11 Sep 2026 08:51 SGT</a:t>
+              <a:t>Monday, 14 Sep 2026 08:47 SGT</a:t>
             </a:r>
           </a:p>
         </p:txBody>
@@ -3265,7 +3265,7 @@
                 </a:solidFill>
                 <a:latin typeface="Segoe UI"/>
               </a:rPr>
-              <a:t>RAG 15R / 16A / 15G   |   54.3% above 200DMA   |   Portfolio Rs 1,858,984 (+7.9%)</a:t>
+              <a:t>RAG 15R / 15A / 16G   |   54.3% above 200DMA   |   Portfolio Rs 1,879,469 (+8.7%)</a:t>
             </a:r>
           </a:p>
         </p:txBody>
@@ -3529,7 +3529,7 @@
                 </a:solidFill>
                 <a:latin typeface="Segoe UI"/>
               </a:rPr>
-              <a:t>+20.3%</a:t>
+              <a:t>+20.0%</a:t>
             </a:r>
           </a:p>
         </p:txBody>
@@ -3587,7 +3587,7 @@
                 </a:solidFill>
                 <a:latin typeface="Segoe UI"/>
               </a:rPr>
-              <a:t>Clean Energy</a:t>
+              <a:t>Apple</a:t>
             </a:r>
           </a:p>
         </p:txBody>
@@ -3617,11 +3617,11 @@
             <a:r>
               <a:rPr sz="900" b="0">
                 <a:solidFill>
-                  <a:srgbClr val="EF4444"/>
-                </a:solidFill>
-                <a:latin typeface="Segoe UI"/>
-              </a:rPr>
-              <a:t>ICLN · RED</a:t>
+                  <a:srgbClr val="22C55E"/>
+                </a:solidFill>
+                <a:latin typeface="Segoe UI"/>
+              </a:rPr>
+              <a:t>AAPL · GREEN</a:t>
             </a:r>
           </a:p>
         </p:txBody>
@@ -3655,7 +3655,7 @@
                 </a:solidFill>
                 <a:latin typeface="Segoe UI"/>
               </a:rPr>
-              <a:t>+4.1%</a:t>
+              <a:t>+4.9%</a:t>
             </a:r>
           </a:p>
         </p:txBody>
@@ -3713,7 +3713,7 @@
                 </a:solidFill>
                 <a:latin typeface="Segoe UI"/>
               </a:rPr>
-              <a:t>US Energy</a:t>
+              <a:t>Clean Energy</a:t>
             </a:r>
           </a:p>
         </p:txBody>
@@ -3743,11 +3743,11 @@
             <a:r>
               <a:rPr sz="900" b="0">
                 <a:solidFill>
-                  <a:srgbClr val="22C55E"/>
-                </a:solidFill>
-                <a:latin typeface="Segoe UI"/>
-              </a:rPr>
-              <a:t>XLE · GREEN</a:t>
+                  <a:srgbClr val="EF4444"/>
+                </a:solidFill>
+                <a:latin typeface="Segoe UI"/>
+              </a:rPr>
+              <a:t>ICLN · RED</a:t>
             </a:r>
           </a:p>
         </p:txBody>
@@ -3781,7 +3781,7 @@
                 </a:solidFill>
                 <a:latin typeface="Segoe UI"/>
               </a:rPr>
-              <a:t>+2.1%</a:t>
+              <a:t>+3.6%</a:t>
             </a:r>
           </a:p>
         </p:txBody>
@@ -3839,7 +3839,7 @@
                 </a:solidFill>
                 <a:latin typeface="Segoe UI"/>
               </a:rPr>
-              <a:t>ITC</a:t>
+              <a:t>US Energy</a:t>
             </a:r>
           </a:p>
         </p:txBody>
@@ -3869,11 +3869,11 @@
             <a:r>
               <a:rPr sz="900" b="0">
                 <a:solidFill>
-                  <a:srgbClr val="EF4444"/>
-                </a:solidFill>
-                <a:latin typeface="Segoe UI"/>
-              </a:rPr>
-              <a:t>ITC.NS · RED</a:t>
+                  <a:srgbClr val="22C55E"/>
+                </a:solidFill>
+                <a:latin typeface="Segoe UI"/>
+              </a:rPr>
+              <a:t>XLE · GREEN</a:t>
             </a:r>
           </a:p>
         </p:txBody>
@@ -3907,7 +3907,7 @@
                 </a:solidFill>
                 <a:latin typeface="Segoe UI"/>
               </a:rPr>
-              <a:t>+1.5%</a:t>
+              <a:t>+1.8%</a:t>
             </a:r>
           </a:p>
         </p:txBody>
@@ -3965,7 +3965,7 @@
                 </a:solidFill>
                 <a:latin typeface="Segoe UI"/>
               </a:rPr>
-              <a:t>Nvidia</a:t>
+              <a:t>ITC</a:t>
             </a:r>
           </a:p>
         </p:txBody>
@@ -3995,11 +3995,11 @@
             <a:r>
               <a:rPr sz="900" b="0">
                 <a:solidFill>
-                  <a:srgbClr val="22C55E"/>
-                </a:solidFill>
-                <a:latin typeface="Segoe UI"/>
-              </a:rPr>
-              <a:t>NVDA · GREEN</a:t>
+                  <a:srgbClr val="EF4444"/>
+                </a:solidFill>
+                <a:latin typeface="Segoe UI"/>
+              </a:rPr>
+              <a:t>ITC.NS · RED</a:t>
             </a:r>
           </a:p>
         </p:txBody>
@@ -4033,7 +4033,7 @@
                 </a:solidFill>
                 <a:latin typeface="Segoe UI"/>
               </a:rPr>
-              <a:t>+1.3%</a:t>
+              <a:t>+1.7%</a:t>
             </a:r>
           </a:p>
         </p:txBody>
@@ -4193,7 +4193,7 @@
                 </a:solidFill>
                 <a:latin typeface="Segoe UI"/>
               </a:rPr>
-              <a:t>-8.6%</a:t>
+              <a:t>-8.5%</a:t>
             </a:r>
           </a:p>
         </p:txBody>
@@ -4319,7 +4319,7 @@
                 </a:solidFill>
                 <a:latin typeface="Segoe UI"/>
               </a:rPr>
-              <a:t>-8.1%</a:t>
+              <a:t>-8.3%</a:t>
             </a:r>
           </a:p>
         </p:txBody>
@@ -4571,7 +4571,7 @@
                 </a:solidFill>
                 <a:latin typeface="Segoe UI"/>
               </a:rPr>
-              <a:t>-4.8%</a:t>
+              <a:t>-5.1%</a:t>
             </a:r>
           </a:p>
         </p:txBody>
@@ -4697,7 +4697,7 @@
                 </a:solidFill>
                 <a:latin typeface="Segoe UI"/>
               </a:rPr>
-              <a:t>-4.4%</a:t>
+              <a:t>-5.1%</a:t>
             </a:r>
           </a:p>
         </p:txBody>
@@ -4967,7 +4967,7 @@
                 </a:solidFill>
                 <a:latin typeface="Segoe UI"/>
               </a:rPr>
-              <a:t>Microsoft</a:t>
+              <a:t>US Energy</a:t>
             </a:r>
           </a:p>
         </p:txBody>
@@ -5035,7 +5035,7 @@
                 </a:solidFill>
                 <a:latin typeface="Segoe UI"/>
               </a:rPr>
-              <a:t>85%</a:t>
+              <a:t>87%</a:t>
             </a:r>
           </a:p>
         </p:txBody>
@@ -5103,7 +5103,7 @@
                 </a:solidFill>
                 <a:latin typeface="Segoe UI"/>
               </a:rPr>
-              <a:t>Nvidia</a:t>
+              <a:t>Microsoft</a:t>
             </a:r>
           </a:p>
         </p:txBody>
@@ -5171,7 +5171,7 @@
                 </a:solidFill>
                 <a:latin typeface="Segoe UI"/>
               </a:rPr>
-              <a:t>82%</a:t>
+              <a:t>85%</a:t>
             </a:r>
           </a:p>
         </p:txBody>
@@ -5239,7 +5239,7 @@
                 </a:solidFill>
                 <a:latin typeface="Segoe UI"/>
               </a:rPr>
-              <a:t>US Technology</a:t>
+              <a:t>Apple</a:t>
             </a:r>
           </a:p>
         </p:txBody>
@@ -5307,7 +5307,7 @@
                 </a:solidFill>
                 <a:latin typeface="Segoe UI"/>
               </a:rPr>
-              <a:t>94%</a:t>
+              <a:t>95%</a:t>
             </a:r>
           </a:p>
         </p:txBody>
@@ -5375,7 +5375,7 @@
                 </a:solidFill>
                 <a:latin typeface="Segoe UI"/>
               </a:rPr>
-              <a:t>US Financials</a:t>
+              <a:t>US Technology</a:t>
             </a:r>
           </a:p>
         </p:txBody>
@@ -5443,7 +5443,7 @@
                 </a:solidFill>
                 <a:latin typeface="Segoe UI"/>
               </a:rPr>
-              <a:t>81%</a:t>
+              <a:t>94%</a:t>
             </a:r>
           </a:p>
         </p:txBody>
@@ -5477,7 +5477,7 @@
                 </a:solidFill>
                 <a:latin typeface="Segoe UI"/>
               </a:rPr>
-              <a:t>above 200DMA · golden cross (50&gt;200) · MACD bearish</a:t>
+              <a:t>above 200DMA · golden cross (50&gt;200) · MACD bullish</a:t>
             </a:r>
           </a:p>
         </p:txBody>
@@ -5511,7 +5511,7 @@
                 </a:solidFill>
                 <a:latin typeface="Segoe UI"/>
               </a:rPr>
-              <a:t>Copper</a:t>
+              <a:t>Nvidia</a:t>
             </a:r>
           </a:p>
         </p:txBody>
@@ -5579,7 +5579,7 @@
                 </a:solidFill>
                 <a:latin typeface="Segoe UI"/>
               </a:rPr>
-              <a:t>80%</a:t>
+              <a:t>82%</a:t>
             </a:r>
           </a:p>
         </p:txBody>
@@ -5647,7 +5647,7 @@
                 </a:solidFill>
                 <a:latin typeface="Segoe UI"/>
               </a:rPr>
-              <a:t>US 1-3Y Treasury</a:t>
+              <a:t>Crude Oil WTI</a:t>
             </a:r>
           </a:p>
         </p:txBody>
@@ -5681,7 +5681,7 @@
                 </a:solidFill>
                 <a:latin typeface="Segoe UI"/>
               </a:rPr>
-              <a:t>STRONG BUY</a:t>
+              <a:t>BUY</a:t>
             </a:r>
           </a:p>
         </p:txBody>
@@ -5715,7 +5715,7 @@
                 </a:solidFill>
                 <a:latin typeface="Segoe UI"/>
               </a:rPr>
-              <a:t>80%</a:t>
+              <a:t>74%</a:t>
             </a:r>
           </a:p>
         </p:txBody>
@@ -5749,7 +5749,7 @@
                 </a:solidFill>
                 <a:latin typeface="Segoe UI"/>
               </a:rPr>
-              <a:t>above 200DMA · golden cross (50&gt;200) · MACD bearish</a:t>
+              <a:t>above 200DMA · death cross (50&lt;200) · MACD bullish</a:t>
             </a:r>
           </a:p>
         </p:txBody>
@@ -5783,7 +5783,7 @@
                 </a:solidFill>
                 <a:latin typeface="Segoe UI"/>
               </a:rPr>
-              <a:t>US Energy</a:t>
+              <a:t>Ethereum</a:t>
             </a:r>
           </a:p>
         </p:txBody>
@@ -5851,7 +5851,7 @@
                 </a:solidFill>
                 <a:latin typeface="Segoe UI"/>
               </a:rPr>
-              <a:t>81%</a:t>
+              <a:t>79%</a:t>
             </a:r>
           </a:p>
         </p:txBody>
@@ -5919,7 +5919,7 @@
                 </a:solidFill>
                 <a:latin typeface="Segoe UI"/>
               </a:rPr>
-              <a:t>Crude Oil WTI</a:t>
+              <a:t>Solana</a:t>
             </a:r>
           </a:p>
         </p:txBody>
@@ -5987,7 +5987,7 @@
                 </a:solidFill>
                 <a:latin typeface="Segoe UI"/>
               </a:rPr>
-              <a:t>75%</a:t>
+              <a:t>70%</a:t>
             </a:r>
           </a:p>
         </p:txBody>
@@ -6021,7 +6021,7 @@
                 </a:solidFill>
                 <a:latin typeface="Segoe UI"/>
               </a:rPr>
-              <a:t>above 200DMA · death cross (50&lt;200) · MACD bullish</a:t>
+              <a:t>above 200DMA · golden cross (50&gt;200) · MACD bearish</a:t>
             </a:r>
           </a:p>
         </p:txBody>
@@ -6055,7 +6055,7 @@
                 </a:solidFill>
                 <a:latin typeface="Segoe UI"/>
               </a:rPr>
-              <a:t>Ethereum</a:t>
+              <a:t>Bitcoin</a:t>
             </a:r>
           </a:p>
         </p:txBody>
@@ -6123,7 +6123,7 @@
                 </a:solidFill>
                 <a:latin typeface="Segoe UI"/>
               </a:rPr>
-              <a:t>78%</a:t>
+              <a:t>76%</a:t>
             </a:r>
           </a:p>
         </p:txBody>
@@ -6259,7 +6259,7 @@
                 </a:solidFill>
                 <a:latin typeface="Segoe UI"/>
               </a:rPr>
-              <a:t>71%</a:t>
+              <a:t>69%</a:t>
             </a:r>
           </a:p>
         </p:txBody>
@@ -6327,7 +6327,7 @@
                 </a:solidFill>
                 <a:latin typeface="Segoe UI"/>
               </a:rPr>
-              <a:t>Bitcoin</a:t>
+              <a:t>US Financials</a:t>
             </a:r>
           </a:p>
         </p:txBody>
@@ -6395,7 +6395,7 @@
                 </a:solidFill>
                 <a:latin typeface="Segoe UI"/>
               </a:rPr>
-              <a:t>76%</a:t>
+              <a:t>80%</a:t>
             </a:r>
           </a:p>
         </p:txBody>
@@ -6463,7 +6463,7 @@
                 </a:solidFill>
                 <a:latin typeface="Segoe UI"/>
               </a:rPr>
-              <a:t>Solana</a:t>
+              <a:t>S&amp;P 500</a:t>
             </a:r>
           </a:p>
         </p:txBody>
@@ -6531,7 +6531,7 @@
                 </a:solidFill>
                 <a:latin typeface="Segoe UI"/>
               </a:rPr>
-              <a:t>70%</a:t>
+              <a:t>67%</a:t>
             </a:r>
           </a:p>
         </p:txBody>
@@ -6659,7 +6659,7 @@
                 </a:solidFill>
                 <a:latin typeface="Segoe UI"/>
               </a:rPr>
-              <a:t>Base currency INR · USD/INR 95.11</a:t>
+              <a:t>Base currency INR · USD/INR 95.54</a:t>
             </a:r>
           </a:p>
         </p:txBody>
@@ -7067,7 +7067,7 @@
                 </a:solidFill>
                 <a:latin typeface="Segoe UI"/>
               </a:rPr>
-              <a:t>76,821</a:t>
+              <a:t>76,799</a:t>
             </a:r>
           </a:p>
         </p:txBody>
@@ -7101,7 +7101,7 @@
                 </a:solidFill>
                 <a:latin typeface="Segoe UI"/>
               </a:rPr>
-              <a:t>Rs 730,660</a:t>
+              <a:t>Rs 733,734</a:t>
             </a:r>
           </a:p>
         </p:txBody>
@@ -7135,7 +7135,7 @@
                 </a:solidFill>
                 <a:latin typeface="Segoe UI"/>
               </a:rPr>
-              <a:t>Rs 159,989</a:t>
+              <a:t>Rs 160,494</a:t>
             </a:r>
           </a:p>
         </p:txBody>
@@ -7203,7 +7203,7 @@
                 </a:solidFill>
                 <a:latin typeface="Segoe UI"/>
               </a:rPr>
-              <a:t>-1.8%</a:t>
+              <a:t>-0.6%</a:t>
             </a:r>
           </a:p>
         </p:txBody>
@@ -7339,7 +7339,7 @@
                 </a:solidFill>
                 <a:latin typeface="Segoe UI"/>
               </a:rPr>
-              <a:t>4,362</a:t>
+              <a:t>4,376</a:t>
             </a:r>
           </a:p>
         </p:txBody>
@@ -7373,7 +7373,7 @@
                 </a:solidFill>
                 <a:latin typeface="Segoe UI"/>
               </a:rPr>
-              <a:t>Rs 414,859</a:t>
+              <a:t>Rs 418,035</a:t>
             </a:r>
           </a:p>
         </p:txBody>
@@ -7407,7 +7407,7 @@
                 </a:solidFill>
                 <a:latin typeface="Segoe UI"/>
               </a:rPr>
-              <a:t>Rs 196,101</a:t>
+              <a:t>Rs 198,293</a:t>
             </a:r>
           </a:p>
         </p:txBody>
@@ -7441,7 +7441,7 @@
                 </a:solidFill>
                 <a:latin typeface="Segoe UI"/>
               </a:rPr>
-              <a:t>+89.6%</a:t>
+              <a:t>+90.2%</a:t>
             </a:r>
           </a:p>
         </p:txBody>
@@ -7611,7 +7611,7 @@
                 </a:solidFill>
                 <a:latin typeface="Segoe UI"/>
               </a:rPr>
-              <a:t>315</a:t>
+              <a:t>332</a:t>
             </a:r>
           </a:p>
         </p:txBody>
@@ -7645,7 +7645,7 @@
                 </a:solidFill>
                 <a:latin typeface="Segoe UI"/>
               </a:rPr>
-              <a:t>Rs 299,926</a:t>
+              <a:t>Rs 317,451</a:t>
             </a:r>
           </a:p>
         </p:txBody>
@@ -7679,7 +7679,7 @@
                 </a:solidFill>
                 <a:latin typeface="Segoe UI"/>
               </a:rPr>
-              <a:t>Rs 123,969</a:t>
+              <a:t>Rs 140,702</a:t>
             </a:r>
           </a:p>
         </p:txBody>
@@ -7713,7 +7713,7 @@
                 </a:solidFill>
                 <a:latin typeface="Segoe UI"/>
               </a:rPr>
-              <a:t>+70.5%</a:t>
+              <a:t>+79.6%</a:t>
             </a:r>
           </a:p>
         </p:txBody>
@@ -7883,7 +7883,7 @@
                 </a:solidFill>
                 <a:latin typeface="Segoe UI"/>
               </a:rPr>
-              <a:t>224</a:t>
+              <a:t>218</a:t>
             </a:r>
           </a:p>
         </p:txBody>
@@ -7917,7 +7917,7 @@
                 </a:solidFill>
                 <a:latin typeface="Segoe UI"/>
               </a:rPr>
-              <a:t>Rs 170,189</a:t>
+              <a:t>Rs 166,843</a:t>
             </a:r>
           </a:p>
         </p:txBody>
@@ -7951,7 +7951,7 @@
                 </a:solidFill>
                 <a:latin typeface="Segoe UI"/>
               </a:rPr>
-              <a:t>Rs -172,213</a:t>
+              <a:t>Rs -177,101</a:t>
             </a:r>
           </a:p>
         </p:txBody>
@@ -7985,7 +7985,7 @@
                 </a:solidFill>
                 <a:latin typeface="Segoe UI"/>
               </a:rPr>
-              <a:t>-50.3%</a:t>
+              <a:t>-51.5%</a:t>
             </a:r>
           </a:p>
         </p:txBody>
@@ -8155,7 +8155,7 @@
                 </a:solidFill>
                 <a:latin typeface="Segoe UI"/>
               </a:rPr>
-              <a:t>1,036</a:t>
+              <a:t>1,038</a:t>
             </a:r>
           </a:p>
         </p:txBody>
@@ -8189,7 +8189,7 @@
                 </a:solidFill>
                 <a:latin typeface="Segoe UI"/>
               </a:rPr>
-              <a:t>Rs 82,920</a:t>
+              <a:t>Rs 83,016</a:t>
             </a:r>
           </a:p>
         </p:txBody>
@@ -8223,7 +8223,7 @@
                 </a:solidFill>
                 <a:latin typeface="Segoe UI"/>
               </a:rPr>
-              <a:t>Rs -29,080</a:t>
+              <a:t>Rs -28,984</a:t>
             </a:r>
           </a:p>
         </p:txBody>
@@ -8257,7 +8257,7 @@
                 </a:solidFill>
                 <a:latin typeface="Segoe UI"/>
               </a:rPr>
-              <a:t>-26.0%</a:t>
+              <a:t>-25.9%</a:t>
             </a:r>
           </a:p>
         </p:txBody>
@@ -8427,7 +8427,7 @@
                 </a:solidFill>
                 <a:latin typeface="Segoe UI"/>
               </a:rPr>
-              <a:t>1,274</a:t>
+              <a:t>1,258</a:t>
             </a:r>
           </a:p>
         </p:txBody>
@@ -8461,7 +8461,7 @@
                 </a:solidFill>
                 <a:latin typeface="Segoe UI"/>
               </a:rPr>
-              <a:t>Rs 63,700</a:t>
+              <a:t>Rs 62,875</a:t>
             </a:r>
           </a:p>
         </p:txBody>
@@ -8495,7 +8495,7 @@
                 </a:solidFill>
                 <a:latin typeface="Segoe UI"/>
               </a:rPr>
-              <a:t>Rs -58,800</a:t>
+              <a:t>Rs -59,625</a:t>
             </a:r>
           </a:p>
         </p:txBody>
@@ -8529,7 +8529,7 @@
                 </a:solidFill>
                 <a:latin typeface="Segoe UI"/>
               </a:rPr>
-              <a:t>-48.0%</a:t>
+              <a:t>-48.7%</a:t>
             </a:r>
           </a:p>
         </p:txBody>
@@ -8699,7 +8699,7 @@
                 </a:solidFill>
                 <a:latin typeface="Segoe UI"/>
               </a:rPr>
-              <a:t>2,204</a:t>
+              <a:t>2,201</a:t>
             </a:r>
           </a:p>
         </p:txBody>
@@ -8733,7 +8733,7 @@
                 </a:solidFill>
                 <a:latin typeface="Segoe UI"/>
               </a:rPr>
-              <a:t>Rs 55,103</a:t>
+              <a:t>Rs 55,020</a:t>
             </a:r>
           </a:p>
         </p:txBody>
@@ -8767,7 +8767,7 @@
                 </a:solidFill>
                 <a:latin typeface="Segoe UI"/>
               </a:rPr>
-              <a:t>Rs -34,897</a:t>
+              <a:t>Rs -34,980</a:t>
             </a:r>
           </a:p>
         </p:txBody>
@@ -8801,7 +8801,7 @@
                 </a:solidFill>
                 <a:latin typeface="Segoe UI"/>
               </a:rPr>
-              <a:t>-38.8%</a:t>
+              <a:t>-38.9%</a:t>
             </a:r>
           </a:p>
         </p:txBody>
@@ -8971,7 +8971,7 @@
                 </a:solidFill>
                 <a:latin typeface="Segoe UI"/>
               </a:rPr>
-              <a:t>694</a:t>
+              <a:t>708</a:t>
             </a:r>
           </a:p>
         </p:txBody>
@@ -9005,7 +9005,7 @@
                 </a:solidFill>
                 <a:latin typeface="Segoe UI"/>
               </a:rPr>
-              <a:t>Rs 41,628</a:t>
+              <a:t>Rs 42,495</a:t>
             </a:r>
           </a:p>
         </p:txBody>
@@ -9039,7 +9039,7 @@
                 </a:solidFill>
                 <a:latin typeface="Segoe UI"/>
               </a:rPr>
-              <a:t>Rs -49,572</a:t>
+              <a:t>Rs -48,705</a:t>
             </a:r>
           </a:p>
         </p:txBody>
@@ -9073,7 +9073,7 @@
                 </a:solidFill>
                 <a:latin typeface="Segoe UI"/>
               </a:rPr>
-              <a:t>-54.4%</a:t>
+              <a:t>-53.4%</a:t>
             </a:r>
           </a:p>
         </p:txBody>
@@ -9141,7 +9141,7 @@
                 </a:solidFill>
                 <a:latin typeface="Segoe UI"/>
               </a:rPr>
-              <a:t>Total Rs 1,858,984 | P&amp;L Rs 135,497 (+7.9%) | Sharpe -0.08 | Vol 19.59% | VaR95 -1.9%/day</a:t>
+              <a:t>Total Rs 1,879,469 | P&amp;L Rs 150,094 (+8.7%) | Sharpe -0.13 | Vol 19.47% | VaR95 -1.88%/day</a:t>
             </a:r>
           </a:p>
         </p:txBody>

--- a/docs/pmr_daily.pptx
+++ b/docs/pmr_daily.pptx
@@ -3197,7 +3197,7 @@
                 </a:solidFill>
                 <a:latin typeface="Segoe UI"/>
               </a:rPr>
-              <a:t>Monday, 14 Sep 2026 08:47 SGT</a:t>
+              <a:t>Tuesday, 15 Sep 2026 09:12 SGT</a:t>
             </a:r>
           </a:p>
         </p:txBody>
@@ -3265,7 +3265,7 @@
                 </a:solidFill>
                 <a:latin typeface="Segoe UI"/>
               </a:rPr>
-              <a:t>RAG 15R / 15A / 16G   |   54.3% above 200DMA   |   Portfolio Rs 1,879,469 (+8.7%)</a:t>
+              <a:t>RAG 14R / 18A / 14G   |   52.2% above 200DMA   |   Portfolio Rs 1,876,481 (+8.9%)</a:t>
             </a:r>
           </a:p>
         </p:txBody>
@@ -3529,7 +3529,7 @@
                 </a:solidFill>
                 <a:latin typeface="Segoe UI"/>
               </a:rPr>
-              <a:t>+20.0%</a:t>
+              <a:t>+19.8%</a:t>
             </a:r>
           </a:p>
         </p:txBody>
@@ -3839,7 +3839,7 @@
                 </a:solidFill>
                 <a:latin typeface="Segoe UI"/>
               </a:rPr>
-              <a:t>US Energy</a:t>
+              <a:t>Ethereum</a:t>
             </a:r>
           </a:p>
         </p:txBody>
@@ -3869,11 +3869,11 @@
             <a:r>
               <a:rPr sz="900" b="0">
                 <a:solidFill>
-                  <a:srgbClr val="22C55E"/>
-                </a:solidFill>
-                <a:latin typeface="Segoe UI"/>
-              </a:rPr>
-              <a:t>XLE · GREEN</a:t>
+                  <a:srgbClr val="F59E0B"/>
+                </a:solidFill>
+                <a:latin typeface="Segoe UI"/>
+              </a:rPr>
+              <a:t>ETH-USD · AMBER</a:t>
             </a:r>
           </a:p>
         </p:txBody>
@@ -3907,7 +3907,7 @@
                 </a:solidFill>
                 <a:latin typeface="Segoe UI"/>
               </a:rPr>
-              <a:t>+1.8%</a:t>
+              <a:t>+1.9%</a:t>
             </a:r>
           </a:p>
         </p:txBody>
@@ -3965,7 +3965,7 @@
                 </a:solidFill>
                 <a:latin typeface="Segoe UI"/>
               </a:rPr>
-              <a:t>ITC</a:t>
+              <a:t>US Energy</a:t>
             </a:r>
           </a:p>
         </p:txBody>
@@ -3995,11 +3995,11 @@
             <a:r>
               <a:rPr sz="900" b="0">
                 <a:solidFill>
-                  <a:srgbClr val="EF4444"/>
-                </a:solidFill>
-                <a:latin typeface="Segoe UI"/>
-              </a:rPr>
-              <a:t>ITC.NS · RED</a:t>
+                  <a:srgbClr val="22C55E"/>
+                </a:solidFill>
+                <a:latin typeface="Segoe UI"/>
+              </a:rPr>
+              <a:t>XLE · GREEN</a:t>
             </a:r>
           </a:p>
         </p:txBody>
@@ -4033,7 +4033,7 @@
                 </a:solidFill>
                 <a:latin typeface="Segoe UI"/>
               </a:rPr>
-              <a:t>+1.7%</a:t>
+              <a:t>+1.8%</a:t>
             </a:r>
           </a:p>
         </p:txBody>
@@ -4697,7 +4697,7 @@
                 </a:solidFill>
                 <a:latin typeface="Segoe UI"/>
               </a:rPr>
-              <a:t>-5.1%</a:t>
+              <a:t>-4.0%</a:t>
             </a:r>
           </a:p>
         </p:txBody>
@@ -5171,7 +5171,7 @@
                 </a:solidFill>
                 <a:latin typeface="Segoe UI"/>
               </a:rPr>
-              <a:t>85%</a:t>
+              <a:t>86%</a:t>
             </a:r>
           </a:p>
         </p:txBody>
@@ -5443,7 +5443,7 @@
                 </a:solidFill>
                 <a:latin typeface="Segoe UI"/>
               </a:rPr>
-              <a:t>94%</a:t>
+              <a:t>95%</a:t>
             </a:r>
           </a:p>
         </p:txBody>
@@ -5579,7 +5579,7 @@
                 </a:solidFill>
                 <a:latin typeface="Segoe UI"/>
               </a:rPr>
-              <a:t>82%</a:t>
+              <a:t>81%</a:t>
             </a:r>
           </a:p>
         </p:txBody>
@@ -5647,7 +5647,7 @@
                 </a:solidFill>
                 <a:latin typeface="Segoe UI"/>
               </a:rPr>
-              <a:t>Crude Oil WTI</a:t>
+              <a:t>US Financials</a:t>
             </a:r>
           </a:p>
         </p:txBody>
@@ -5681,7 +5681,7 @@
                 </a:solidFill>
                 <a:latin typeface="Segoe UI"/>
               </a:rPr>
-              <a:t>BUY</a:t>
+              <a:t>STRONG BUY</a:t>
             </a:r>
           </a:p>
         </p:txBody>
@@ -5715,7 +5715,7 @@
                 </a:solidFill>
                 <a:latin typeface="Segoe UI"/>
               </a:rPr>
-              <a:t>74%</a:t>
+              <a:t>80%</a:t>
             </a:r>
           </a:p>
         </p:txBody>
@@ -5749,7 +5749,7 @@
                 </a:solidFill>
                 <a:latin typeface="Segoe UI"/>
               </a:rPr>
-              <a:t>above 200DMA · death cross (50&lt;200) · MACD bullish</a:t>
+              <a:t>above 200DMA · golden cross (50&gt;200) · MACD bearish</a:t>
             </a:r>
           </a:p>
         </p:txBody>
@@ -5783,7 +5783,7 @@
                 </a:solidFill>
                 <a:latin typeface="Segoe UI"/>
               </a:rPr>
-              <a:t>Ethereum</a:t>
+              <a:t>Crude Oil WTI</a:t>
             </a:r>
           </a:p>
         </p:txBody>
@@ -5851,7 +5851,7 @@
                 </a:solidFill>
                 <a:latin typeface="Segoe UI"/>
               </a:rPr>
-              <a:t>79%</a:t>
+              <a:t>74%</a:t>
             </a:r>
           </a:p>
         </p:txBody>
@@ -5885,7 +5885,7 @@
                 </a:solidFill>
                 <a:latin typeface="Segoe UI"/>
               </a:rPr>
-              <a:t>above 200DMA · golden cross (50&gt;200) · MACD bearish</a:t>
+              <a:t>above 200DMA · death cross (50&lt;200) · MACD bullish</a:t>
             </a:r>
           </a:p>
         </p:txBody>
@@ -5919,7 +5919,7 @@
                 </a:solidFill>
                 <a:latin typeface="Segoe UI"/>
               </a:rPr>
-              <a:t>Solana</a:t>
+              <a:t>Ethereum</a:t>
             </a:r>
           </a:p>
         </p:txBody>
@@ -5987,7 +5987,7 @@
                 </a:solidFill>
                 <a:latin typeface="Segoe UI"/>
               </a:rPr>
-              <a:t>70%</a:t>
+              <a:t>79%</a:t>
             </a:r>
           </a:p>
         </p:txBody>
@@ -6055,7 +6055,7 @@
                 </a:solidFill>
                 <a:latin typeface="Segoe UI"/>
               </a:rPr>
-              <a:t>Bitcoin</a:t>
+              <a:t>Solana</a:t>
             </a:r>
           </a:p>
         </p:txBody>
@@ -6123,7 +6123,7 @@
                 </a:solidFill>
                 <a:latin typeface="Segoe UI"/>
               </a:rPr>
-              <a:t>76%</a:t>
+              <a:t>71%</a:t>
             </a:r>
           </a:p>
         </p:txBody>
@@ -6191,7 +6191,7 @@
                 </a:solidFill>
                 <a:latin typeface="Segoe UI"/>
               </a:rPr>
-              <a:t>Straits Times</a:t>
+              <a:t>Bitcoin</a:t>
             </a:r>
           </a:p>
         </p:txBody>
@@ -6259,7 +6259,7 @@
                 </a:solidFill>
                 <a:latin typeface="Segoe UI"/>
               </a:rPr>
-              <a:t>69%</a:t>
+              <a:t>77%</a:t>
             </a:r>
           </a:p>
         </p:txBody>
@@ -6327,7 +6327,7 @@
                 </a:solidFill>
                 <a:latin typeface="Segoe UI"/>
               </a:rPr>
-              <a:t>US Financials</a:t>
+              <a:t>Straits Times</a:t>
             </a:r>
           </a:p>
         </p:txBody>
@@ -6395,7 +6395,7 @@
                 </a:solidFill>
                 <a:latin typeface="Segoe UI"/>
               </a:rPr>
-              <a:t>80%</a:t>
+              <a:t>69%</a:t>
             </a:r>
           </a:p>
         </p:txBody>
@@ -6659,7 +6659,7 @@
                 </a:solidFill>
                 <a:latin typeface="Segoe UI"/>
               </a:rPr>
-              <a:t>Base currency INR · USD/INR 95.54</a:t>
+              <a:t>Base currency INR · USD/INR 95.03</a:t>
             </a:r>
           </a:p>
         </p:txBody>
@@ -7067,7 +7067,7 @@
                 </a:solidFill>
                 <a:latin typeface="Segoe UI"/>
               </a:rPr>
-              <a:t>76,799</a:t>
+              <a:t>77,839</a:t>
             </a:r>
           </a:p>
         </p:txBody>
@@ -7101,7 +7101,7 @@
                 </a:solidFill>
                 <a:latin typeface="Segoe UI"/>
               </a:rPr>
-              <a:t>Rs 733,734</a:t>
+              <a:t>Rs 739,726</a:t>
             </a:r>
           </a:p>
         </p:txBody>
@@ -7135,7 +7135,7 @@
                 </a:solidFill>
                 <a:latin typeface="Segoe UI"/>
               </a:rPr>
-              <a:t>Rs 160,494</a:t>
+              <a:t>Rs 169,530</a:t>
             </a:r>
           </a:p>
         </p:txBody>
@@ -7169,7 +7169,7 @@
                 </a:solidFill>
                 <a:latin typeface="Segoe UI"/>
               </a:rPr>
-              <a:t>+28.0%</a:t>
+              <a:t>+29.7%</a:t>
             </a:r>
           </a:p>
         </p:txBody>
@@ -7199,11 +7199,11 @@
             <a:r>
               <a:rPr sz="1000" b="0">
                 <a:solidFill>
-                  <a:srgbClr val="EF4444"/>
-                </a:solidFill>
-                <a:latin typeface="Segoe UI"/>
-              </a:rPr>
-              <a:t>-0.6%</a:t>
+                  <a:srgbClr val="22C55E"/>
+                </a:solidFill>
+                <a:latin typeface="Segoe UI"/>
+              </a:rPr>
+              <a:t>+1.3%</a:t>
             </a:r>
           </a:p>
         </p:txBody>
@@ -7339,7 +7339,7 @@
                 </a:solidFill>
                 <a:latin typeface="Segoe UI"/>
               </a:rPr>
-              <a:t>4,376</a:t>
+              <a:t>4,331</a:t>
             </a:r>
           </a:p>
         </p:txBody>
@@ -7373,7 +7373,7 @@
                 </a:solidFill>
                 <a:latin typeface="Segoe UI"/>
               </a:rPr>
-              <a:t>Rs 418,035</a:t>
+              <a:t>Rs 411,625</a:t>
             </a:r>
           </a:p>
         </p:txBody>
@@ -7407,7 +7407,7 @@
                 </a:solidFill>
                 <a:latin typeface="Segoe UI"/>
               </a:rPr>
-              <a:t>Rs 198,293</a:t>
+              <a:t>Rs 193,050</a:t>
             </a:r>
           </a:p>
         </p:txBody>
@@ -7441,7 +7441,7 @@
                 </a:solidFill>
                 <a:latin typeface="Segoe UI"/>
               </a:rPr>
-              <a:t>+90.2%</a:t>
+              <a:t>+88.3%</a:t>
             </a:r>
           </a:p>
         </p:txBody>
@@ -7645,7 +7645,7 @@
                 </a:solidFill>
                 <a:latin typeface="Segoe UI"/>
               </a:rPr>
-              <a:t>Rs 317,451</a:t>
+              <a:t>Rs 315,765</a:t>
             </a:r>
           </a:p>
         </p:txBody>
@@ -7679,7 +7679,7 @@
                 </a:solidFill>
                 <a:latin typeface="Segoe UI"/>
               </a:rPr>
-              <a:t>Rs 140,702</a:t>
+              <a:t>Rs 139,955</a:t>
             </a:r>
           </a:p>
         </p:txBody>
@@ -7917,7 +7917,7 @@
                 </a:solidFill>
                 <a:latin typeface="Segoe UI"/>
               </a:rPr>
-              <a:t>Rs 166,843</a:t>
+              <a:t>Rs 165,958</a:t>
             </a:r>
           </a:p>
         </p:txBody>
@@ -7951,7 +7951,7 @@
                 </a:solidFill>
                 <a:latin typeface="Segoe UI"/>
               </a:rPr>
-              <a:t>Rs -177,101</a:t>
+              <a:t>Rs -176,160</a:t>
             </a:r>
           </a:p>
         </p:txBody>
@@ -9141,7 +9141,7 @@
                 </a:solidFill>
                 <a:latin typeface="Segoe UI"/>
               </a:rPr>
-              <a:t>Total Rs 1,879,469 | P&amp;L Rs 150,094 (+8.7%) | Sharpe -0.13 | Vol 19.47% | VaR95 -1.88%/day</a:t>
+              <a:t>Total Rs 1,876,481 | P&amp;L Rs 154,080 (+8.9%) | Sharpe -0.1 | Vol 19.57% | VaR95 -1.89%/day</a:t>
             </a:r>
           </a:p>
         </p:txBody>

--- a/docs/pmr_daily.pptx
+++ b/docs/pmr_daily.pptx
@@ -3197,7 +3197,7 @@
                 </a:solidFill>
                 <a:latin typeface="Segoe UI"/>
               </a:rPr>
-              <a:t>Tuesday, 15 Sep 2026 09:12 SGT</a:t>
+              <a:t>Wednesday, 16 Sep 2026 09:08 SGT</a:t>
             </a:r>
           </a:p>
         </p:txBody>
@@ -3265,7 +3265,7 @@
                 </a:solidFill>
                 <a:latin typeface="Segoe UI"/>
               </a:rPr>
-              <a:t>RAG 14R / 18A / 14G   |   52.2% above 200DMA   |   Portfolio Rs 1,876,481 (+8.9%)</a:t>
+              <a:t>RAG 14R / 18A / 14G   |   56.5% above 200DMA   |   Portfolio Rs 1,867,267 (+7.7%)</a:t>
             </a:r>
           </a:p>
         </p:txBody>
@@ -3529,7 +3529,7 @@
                 </a:solidFill>
                 <a:latin typeface="Segoe UI"/>
               </a:rPr>
-              <a:t>+19.8%</a:t>
+              <a:t>+22.7%</a:t>
             </a:r>
           </a:p>
         </p:txBody>
@@ -3655,7 +3655,7 @@
                 </a:solidFill>
                 <a:latin typeface="Segoe UI"/>
               </a:rPr>
-              <a:t>+4.9%</a:t>
+              <a:t>+5.1%</a:t>
             </a:r>
           </a:p>
         </p:txBody>
@@ -3713,7 +3713,7 @@
                 </a:solidFill>
                 <a:latin typeface="Segoe UI"/>
               </a:rPr>
-              <a:t>Clean Energy</a:t>
+              <a:t>Alphabet</a:t>
             </a:r>
           </a:p>
         </p:txBody>
@@ -3743,11 +3743,11 @@
             <a:r>
               <a:rPr sz="900" b="0">
                 <a:solidFill>
-                  <a:srgbClr val="EF4444"/>
-                </a:solidFill>
-                <a:latin typeface="Segoe UI"/>
-              </a:rPr>
-              <a:t>ICLN · RED</a:t>
+                  <a:srgbClr val="F59E0B"/>
+                </a:solidFill>
+                <a:latin typeface="Segoe UI"/>
+              </a:rPr>
+              <a:t>GOOGL · AMBER</a:t>
             </a:r>
           </a:p>
         </p:txBody>
@@ -3781,7 +3781,7 @@
                 </a:solidFill>
                 <a:latin typeface="Segoe UI"/>
               </a:rPr>
-              <a:t>+3.6%</a:t>
+              <a:t>+3.0%</a:t>
             </a:r>
           </a:p>
         </p:txBody>
@@ -3839,7 +3839,7 @@
                 </a:solidFill>
                 <a:latin typeface="Segoe UI"/>
               </a:rPr>
-              <a:t>Ethereum</a:t>
+              <a:t>Clean Energy</a:t>
             </a:r>
           </a:p>
         </p:txBody>
@@ -3869,11 +3869,11 @@
             <a:r>
               <a:rPr sz="900" b="0">
                 <a:solidFill>
-                  <a:srgbClr val="F59E0B"/>
-                </a:solidFill>
-                <a:latin typeface="Segoe UI"/>
-              </a:rPr>
-              <a:t>ETH-USD · AMBER</a:t>
+                  <a:srgbClr val="EF4444"/>
+                </a:solidFill>
+                <a:latin typeface="Segoe UI"/>
+              </a:rPr>
+              <a:t>ICLN · RED</a:t>
             </a:r>
           </a:p>
         </p:txBody>
@@ -3907,7 +3907,7 @@
                 </a:solidFill>
                 <a:latin typeface="Segoe UI"/>
               </a:rPr>
-              <a:t>+1.9%</a:t>
+              <a:t>+1.5%</a:t>
             </a:r>
           </a:p>
         </p:txBody>
@@ -3965,7 +3965,7 @@
                 </a:solidFill>
                 <a:latin typeface="Segoe UI"/>
               </a:rPr>
-              <a:t>US Energy</a:t>
+              <a:t>HDFC Bank</a:t>
             </a:r>
           </a:p>
         </p:txBody>
@@ -3995,11 +3995,11 @@
             <a:r>
               <a:rPr sz="900" b="0">
                 <a:solidFill>
-                  <a:srgbClr val="22C55E"/>
-                </a:solidFill>
-                <a:latin typeface="Segoe UI"/>
-              </a:rPr>
-              <a:t>XLE · GREEN</a:t>
+                  <a:srgbClr val="EF4444"/>
+                </a:solidFill>
+                <a:latin typeface="Segoe UI"/>
+              </a:rPr>
+              <a:t>HDFCBANK.NS · RED</a:t>
             </a:r>
           </a:p>
         </p:txBody>
@@ -4033,7 +4033,7 @@
                 </a:solidFill>
                 <a:latin typeface="Segoe UI"/>
               </a:rPr>
-              <a:t>+1.8%</a:t>
+              <a:t>+1.1%</a:t>
             </a:r>
           </a:p>
         </p:txBody>
@@ -4125,7 +4125,7 @@
                 </a:solidFill>
                 <a:latin typeface="Segoe UI"/>
               </a:rPr>
-              <a:t>Infosys</a:t>
+              <a:t>NIFTY IT</a:t>
             </a:r>
           </a:p>
         </p:txBody>
@@ -4159,7 +4159,7 @@
                 </a:solidFill>
                 <a:latin typeface="Segoe UI"/>
               </a:rPr>
-              <a:t>INFY.NS · RED</a:t>
+              <a:t>^CNXIT · RED</a:t>
             </a:r>
           </a:p>
         </p:txBody>
@@ -4193,7 +4193,7 @@
                 </a:solidFill>
                 <a:latin typeface="Segoe UI"/>
               </a:rPr>
-              <a:t>-8.5%</a:t>
+              <a:t>-7.3%</a:t>
             </a:r>
           </a:p>
         </p:txBody>
@@ -4251,7 +4251,7 @@
                 </a:solidFill>
                 <a:latin typeface="Segoe UI"/>
               </a:rPr>
-              <a:t>TCS</a:t>
+              <a:t>ICICI Bank</a:t>
             </a:r>
           </a:p>
         </p:txBody>
@@ -4281,11 +4281,11 @@
             <a:r>
               <a:rPr sz="900" b="0">
                 <a:solidFill>
-                  <a:srgbClr val="EF4444"/>
-                </a:solidFill>
-                <a:latin typeface="Segoe UI"/>
-              </a:rPr>
-              <a:t>TCS.NS · RED</a:t>
+                  <a:srgbClr val="22C55E"/>
+                </a:solidFill>
+                <a:latin typeface="Segoe UI"/>
+              </a:rPr>
+              <a:t>ICICIBANK.NS · GREEN</a:t>
             </a:r>
           </a:p>
         </p:txBody>
@@ -4319,7 +4319,7 @@
                 </a:solidFill>
                 <a:latin typeface="Segoe UI"/>
               </a:rPr>
-              <a:t>-8.3%</a:t>
+              <a:t>-7.1%</a:t>
             </a:r>
           </a:p>
         </p:txBody>
@@ -4377,7 +4377,7 @@
                 </a:solidFill>
                 <a:latin typeface="Segoe UI"/>
               </a:rPr>
-              <a:t>NIFTY IT</a:t>
+              <a:t>TCS</a:t>
             </a:r>
           </a:p>
         </p:txBody>
@@ -4411,7 +4411,7 @@
                 </a:solidFill>
                 <a:latin typeface="Segoe UI"/>
               </a:rPr>
-              <a:t>^CNXIT · RED</a:t>
+              <a:t>TCS.NS · RED</a:t>
             </a:r>
           </a:p>
         </p:txBody>
@@ -4445,7 +4445,7 @@
                 </a:solidFill>
                 <a:latin typeface="Segoe UI"/>
               </a:rPr>
-              <a:t>-7.3%</a:t>
+              <a:t>-6.2%</a:t>
             </a:r>
           </a:p>
         </p:txBody>
@@ -4503,7 +4503,7 @@
                 </a:solidFill>
                 <a:latin typeface="Segoe UI"/>
               </a:rPr>
-              <a:t>ICICI Bank</a:t>
+              <a:t>Solana</a:t>
             </a:r>
           </a:p>
         </p:txBody>
@@ -4533,11 +4533,11 @@
             <a:r>
               <a:rPr sz="900" b="0">
                 <a:solidFill>
-                  <a:srgbClr val="22C55E"/>
-                </a:solidFill>
-                <a:latin typeface="Segoe UI"/>
-              </a:rPr>
-              <a:t>ICICIBANK.NS · GREEN</a:t>
+                  <a:srgbClr val="EF4444"/>
+                </a:solidFill>
+                <a:latin typeface="Segoe UI"/>
+              </a:rPr>
+              <a:t>SOL-USD · RED</a:t>
             </a:r>
           </a:p>
         </p:txBody>
@@ -4571,7 +4571,7 @@
                 </a:solidFill>
                 <a:latin typeface="Segoe UI"/>
               </a:rPr>
-              <a:t>-5.1%</a:t>
+              <a:t>-6.0%</a:t>
             </a:r>
           </a:p>
         </p:txBody>
@@ -4629,7 +4629,7 @@
                 </a:solidFill>
                 <a:latin typeface="Segoe UI"/>
               </a:rPr>
-              <a:t>Nikkei 225</a:t>
+              <a:t>Infosys</a:t>
             </a:r>
           </a:p>
         </p:txBody>
@@ -4663,7 +4663,7 @@
                 </a:solidFill>
                 <a:latin typeface="Segoe UI"/>
               </a:rPr>
-              <a:t>^N225 · RED</a:t>
+              <a:t>INFY.NS · RED</a:t>
             </a:r>
           </a:p>
         </p:txBody>
@@ -4697,7 +4697,7 @@
                 </a:solidFill>
                 <a:latin typeface="Segoe UI"/>
               </a:rPr>
-              <a:t>-4.0%</a:t>
+              <a:t>-5.0%</a:t>
             </a:r>
           </a:p>
         </p:txBody>
@@ -4967,7 +4967,7 @@
                 </a:solidFill>
                 <a:latin typeface="Segoe UI"/>
               </a:rPr>
-              <a:t>US Energy</a:t>
+              <a:t>Microsoft</a:t>
             </a:r>
           </a:p>
         </p:txBody>
@@ -5103,7 +5103,7 @@
                 </a:solidFill>
                 <a:latin typeface="Segoe UI"/>
               </a:rPr>
-              <a:t>Microsoft</a:t>
+              <a:t>US Energy</a:t>
             </a:r>
           </a:p>
         </p:txBody>
@@ -5171,7 +5171,7 @@
                 </a:solidFill>
                 <a:latin typeface="Segoe UI"/>
               </a:rPr>
-              <a:t>86%</a:t>
+              <a:t>87%</a:t>
             </a:r>
           </a:p>
         </p:txBody>
@@ -5375,7 +5375,7 @@
                 </a:solidFill>
                 <a:latin typeface="Segoe UI"/>
               </a:rPr>
-              <a:t>US Technology</a:t>
+              <a:t>US Financials</a:t>
             </a:r>
           </a:p>
         </p:txBody>
@@ -5443,7 +5443,7 @@
                 </a:solidFill>
                 <a:latin typeface="Segoe UI"/>
               </a:rPr>
-              <a:t>95%</a:t>
+              <a:t>80%</a:t>
             </a:r>
           </a:p>
         </p:txBody>
@@ -5477,7 +5477,7 @@
                 </a:solidFill>
                 <a:latin typeface="Segoe UI"/>
               </a:rPr>
-              <a:t>above 200DMA · golden cross (50&gt;200) · MACD bullish</a:t>
+              <a:t>above 200DMA · golden cross (50&gt;200) · MACD bearish</a:t>
             </a:r>
           </a:p>
         </p:txBody>
@@ -5511,7 +5511,7 @@
                 </a:solidFill>
                 <a:latin typeface="Segoe UI"/>
               </a:rPr>
-              <a:t>Nvidia</a:t>
+              <a:t>Crude Oil WTI</a:t>
             </a:r>
           </a:p>
         </p:txBody>
@@ -5545,7 +5545,7 @@
                 </a:solidFill>
                 <a:latin typeface="Segoe UI"/>
               </a:rPr>
-              <a:t>STRONG BUY</a:t>
+              <a:t>BUY</a:t>
             </a:r>
           </a:p>
         </p:txBody>
@@ -5579,7 +5579,7 @@
                 </a:solidFill>
                 <a:latin typeface="Segoe UI"/>
               </a:rPr>
-              <a:t>81%</a:t>
+              <a:t>75%</a:t>
             </a:r>
           </a:p>
         </p:txBody>
@@ -5613,7 +5613,7 @@
                 </a:solidFill>
                 <a:latin typeface="Segoe UI"/>
               </a:rPr>
-              <a:t>above 200DMA · golden cross (50&gt;200) · MACD bearish</a:t>
+              <a:t>above 200DMA · death cross (50&lt;200) · MACD bullish</a:t>
             </a:r>
           </a:p>
         </p:txBody>
@@ -5647,7 +5647,7 @@
                 </a:solidFill>
                 <a:latin typeface="Segoe UI"/>
               </a:rPr>
-              <a:t>US Financials</a:t>
+              <a:t>Straits Times</a:t>
             </a:r>
           </a:p>
         </p:txBody>
@@ -5681,7 +5681,7 @@
                 </a:solidFill>
                 <a:latin typeface="Segoe UI"/>
               </a:rPr>
-              <a:t>STRONG BUY</a:t>
+              <a:t>BUY</a:t>
             </a:r>
           </a:p>
         </p:txBody>
@@ -5715,7 +5715,7 @@
                 </a:solidFill>
                 <a:latin typeface="Segoe UI"/>
               </a:rPr>
-              <a:t>80%</a:t>
+              <a:t>71%</a:t>
             </a:r>
           </a:p>
         </p:txBody>
@@ -5783,7 +5783,7 @@
                 </a:solidFill>
                 <a:latin typeface="Segoe UI"/>
               </a:rPr>
-              <a:t>Crude Oil WTI</a:t>
+              <a:t>Ethereum</a:t>
             </a:r>
           </a:p>
         </p:txBody>
@@ -5851,7 +5851,7 @@
                 </a:solidFill>
                 <a:latin typeface="Segoe UI"/>
               </a:rPr>
-              <a:t>74%</a:t>
+              <a:t>77%</a:t>
             </a:r>
           </a:p>
         </p:txBody>
@@ -5885,7 +5885,7 @@
                 </a:solidFill>
                 <a:latin typeface="Segoe UI"/>
               </a:rPr>
-              <a:t>above 200DMA · death cross (50&lt;200) · MACD bullish</a:t>
+              <a:t>above 200DMA · golden cross (50&gt;200) · MACD bearish</a:t>
             </a:r>
           </a:p>
         </p:txBody>
@@ -5919,7 +5919,7 @@
                 </a:solidFill>
                 <a:latin typeface="Segoe UI"/>
               </a:rPr>
-              <a:t>Ethereum</a:t>
+              <a:t>Bitcoin</a:t>
             </a:r>
           </a:p>
         </p:txBody>
@@ -5987,7 +5987,7 @@
                 </a:solidFill>
                 <a:latin typeface="Segoe UI"/>
               </a:rPr>
-              <a:t>79%</a:t>
+              <a:t>76%</a:t>
             </a:r>
           </a:p>
         </p:txBody>
@@ -6123,7 +6123,7 @@
                 </a:solidFill>
                 <a:latin typeface="Segoe UI"/>
               </a:rPr>
-              <a:t>71%</a:t>
+              <a:t>69%</a:t>
             </a:r>
           </a:p>
         </p:txBody>
@@ -6191,7 +6191,7 @@
                 </a:solidFill>
                 <a:latin typeface="Segoe UI"/>
               </a:rPr>
-              <a:t>Bitcoin</a:t>
+              <a:t>USD/INR</a:t>
             </a:r>
           </a:p>
         </p:txBody>
@@ -6259,7 +6259,7 @@
                 </a:solidFill>
                 <a:latin typeface="Segoe UI"/>
               </a:rPr>
-              <a:t>77%</a:t>
+              <a:t>69%</a:t>
             </a:r>
           </a:p>
         </p:txBody>
@@ -6293,7 +6293,7 @@
                 </a:solidFill>
                 <a:latin typeface="Segoe UI"/>
               </a:rPr>
-              <a:t>above 200DMA · golden cross (50&gt;200) · MACD bearish</a:t>
+              <a:t>above 200DMA · golden cross (50&gt;200) · MACD bullish</a:t>
             </a:r>
           </a:p>
         </p:txBody>
@@ -6327,7 +6327,7 @@
                 </a:solidFill>
                 <a:latin typeface="Segoe UI"/>
               </a:rPr>
-              <a:t>Straits Times</a:t>
+              <a:t>FTSE 100</a:t>
             </a:r>
           </a:p>
         </p:txBody>
@@ -6395,7 +6395,7 @@
                 </a:solidFill>
                 <a:latin typeface="Segoe UI"/>
               </a:rPr>
-              <a:t>69%</a:t>
+              <a:t>68%</a:t>
             </a:r>
           </a:p>
         </p:txBody>
@@ -6463,7 +6463,7 @@
                 </a:solidFill>
                 <a:latin typeface="Segoe UI"/>
               </a:rPr>
-              <a:t>S&amp;P 500</a:t>
+              <a:t>US Technology</a:t>
             </a:r>
           </a:p>
         </p:txBody>
@@ -6531,7 +6531,7 @@
                 </a:solidFill>
                 <a:latin typeface="Segoe UI"/>
               </a:rPr>
-              <a:t>67%</a:t>
+              <a:t>73%</a:t>
             </a:r>
           </a:p>
         </p:txBody>
@@ -6659,7 +6659,7 @@
                 </a:solidFill>
                 <a:latin typeface="Segoe UI"/>
               </a:rPr>
-              <a:t>Base currency INR · USD/INR 95.03</a:t>
+              <a:t>Base currency INR · USD/INR 95.84</a:t>
             </a:r>
           </a:p>
         </p:txBody>
@@ -7067,7 +7067,7 @@
                 </a:solidFill>
                 <a:latin typeface="Segoe UI"/>
               </a:rPr>
-              <a:t>77,839</a:t>
+              <a:t>75,700</a:t>
             </a:r>
           </a:p>
         </p:txBody>
@@ -7101,7 +7101,7 @@
                 </a:solidFill>
                 <a:latin typeface="Segoe UI"/>
               </a:rPr>
-              <a:t>Rs 739,726</a:t>
+              <a:t>Rs 725,472</a:t>
             </a:r>
           </a:p>
         </p:txBody>
@@ -7135,7 +7135,7 @@
                 </a:solidFill>
                 <a:latin typeface="Segoe UI"/>
               </a:rPr>
-              <a:t>Rs 169,530</a:t>
+              <a:t>Rs 150,459</a:t>
             </a:r>
           </a:p>
         </p:txBody>
@@ -7169,7 +7169,7 @@
                 </a:solidFill>
                 <a:latin typeface="Segoe UI"/>
               </a:rPr>
-              <a:t>+29.7%</a:t>
+              <a:t>+26.2%</a:t>
             </a:r>
           </a:p>
         </p:txBody>
@@ -7199,11 +7199,11 @@
             <a:r>
               <a:rPr sz="1000" b="0">
                 <a:solidFill>
-                  <a:srgbClr val="22C55E"/>
-                </a:solidFill>
-                <a:latin typeface="Segoe UI"/>
-              </a:rPr>
-              <a:t>+1.3%</a:t>
+                  <a:srgbClr val="EF4444"/>
+                </a:solidFill>
+                <a:latin typeface="Segoe UI"/>
+              </a:rPr>
+              <a:t>-3.1%</a:t>
             </a:r>
           </a:p>
         </p:txBody>
@@ -7339,7 +7339,7 @@
                 </a:solidFill>
                 <a:latin typeface="Segoe UI"/>
               </a:rPr>
-              <a:t>4,331</a:t>
+              <a:t>4,316</a:t>
             </a:r>
           </a:p>
         </p:txBody>
@@ -7373,7 +7373,7 @@
                 </a:solidFill>
                 <a:latin typeface="Segoe UI"/>
               </a:rPr>
-              <a:t>Rs 411,625</a:t>
+              <a:t>Rs 413,654</a:t>
             </a:r>
           </a:p>
         </p:txBody>
@@ -7407,7 +7407,7 @@
                 </a:solidFill>
                 <a:latin typeface="Segoe UI"/>
               </a:rPr>
-              <a:t>Rs 193,050</a:t>
+              <a:t>Rs 193,233</a:t>
             </a:r>
           </a:p>
         </p:txBody>
@@ -7441,7 +7441,7 @@
                 </a:solidFill>
                 <a:latin typeface="Segoe UI"/>
               </a:rPr>
-              <a:t>+88.3%</a:t>
+              <a:t>+87.7%</a:t>
             </a:r>
           </a:p>
         </p:txBody>
@@ -7611,7 +7611,7 @@
                 </a:solidFill>
                 <a:latin typeface="Segoe UI"/>
               </a:rPr>
-              <a:t>332</a:t>
+              <a:t>333</a:t>
             </a:r>
           </a:p>
         </p:txBody>
@@ -7645,7 +7645,7 @@
                 </a:solidFill>
                 <a:latin typeface="Segoe UI"/>
               </a:rPr>
-              <a:t>Rs 315,765</a:t>
+              <a:t>Rs 319,209</a:t>
             </a:r>
           </a:p>
         </p:txBody>
@@ -7679,7 +7679,7 @@
                 </a:solidFill>
                 <a:latin typeface="Segoe UI"/>
               </a:rPr>
-              <a:t>Rs 139,955</a:t>
+              <a:t>Rs 141,913</a:t>
             </a:r>
           </a:p>
         </p:txBody>
@@ -7713,7 +7713,7 @@
                 </a:solidFill>
                 <a:latin typeface="Segoe UI"/>
               </a:rPr>
-              <a:t>+79.6%</a:t>
+              <a:t>+80.0%</a:t>
             </a:r>
           </a:p>
         </p:txBody>
@@ -7883,7 +7883,7 @@
                 </a:solidFill>
                 <a:latin typeface="Segoe UI"/>
               </a:rPr>
-              <a:t>218</a:t>
+              <a:t>211</a:t>
             </a:r>
           </a:p>
         </p:txBody>
@@ -7917,7 +7917,7 @@
                 </a:solidFill>
                 <a:latin typeface="Segoe UI"/>
               </a:rPr>
-              <a:t>Rs 165,958</a:t>
+              <a:t>Rs 161,739</a:t>
             </a:r>
           </a:p>
         </p:txBody>
@@ -7951,7 +7951,7 @@
                 </a:solidFill>
                 <a:latin typeface="Segoe UI"/>
               </a:rPr>
-              <a:t>Rs -176,160</a:t>
+              <a:t>Rs -183,268</a:t>
             </a:r>
           </a:p>
         </p:txBody>
@@ -7985,7 +7985,7 @@
                 </a:solidFill>
                 <a:latin typeface="Segoe UI"/>
               </a:rPr>
-              <a:t>-51.5%</a:t>
+              <a:t>-53.1%</a:t>
             </a:r>
           </a:p>
         </p:txBody>
@@ -8155,7 +8155,7 @@
                 </a:solidFill>
                 <a:latin typeface="Segoe UI"/>
               </a:rPr>
-              <a:t>1,038</a:t>
+              <a:t>1,077</a:t>
             </a:r>
           </a:p>
         </p:txBody>
@@ -8189,7 +8189,7 @@
                 </a:solidFill>
                 <a:latin typeface="Segoe UI"/>
               </a:rPr>
-              <a:t>Rs 83,016</a:t>
+              <a:t>Rs 86,160</a:t>
             </a:r>
           </a:p>
         </p:txBody>
@@ -8223,7 +8223,7 @@
                 </a:solidFill>
                 <a:latin typeface="Segoe UI"/>
               </a:rPr>
-              <a:t>Rs -28,984</a:t>
+              <a:t>Rs -25,840</a:t>
             </a:r>
           </a:p>
         </p:txBody>
@@ -8257,7 +8257,7 @@
                 </a:solidFill>
                 <a:latin typeface="Segoe UI"/>
               </a:rPr>
-              <a:t>-25.9%</a:t>
+              <a:t>-23.1%</a:t>
             </a:r>
           </a:p>
         </p:txBody>
@@ -8427,7 +8427,7 @@
                 </a:solidFill>
                 <a:latin typeface="Segoe UI"/>
               </a:rPr>
-              <a:t>1,258</a:t>
+              <a:t>1,235</a:t>
             </a:r>
           </a:p>
         </p:txBody>
@@ -8461,7 +8461,7 @@
                 </a:solidFill>
                 <a:latin typeface="Segoe UI"/>
               </a:rPr>
-              <a:t>Rs 62,875</a:t>
+              <a:t>Rs 61,765</a:t>
             </a:r>
           </a:p>
         </p:txBody>
@@ -8495,7 +8495,7 @@
                 </a:solidFill>
                 <a:latin typeface="Segoe UI"/>
               </a:rPr>
-              <a:t>Rs -59,625</a:t>
+              <a:t>Rs -60,735</a:t>
             </a:r>
           </a:p>
         </p:txBody>
@@ -8529,7 +8529,7 @@
                 </a:solidFill>
                 <a:latin typeface="Segoe UI"/>
               </a:rPr>
-              <a:t>-48.7%</a:t>
+              <a:t>-49.6%</a:t>
             </a:r>
           </a:p>
         </p:txBody>
@@ -8699,7 +8699,7 @@
                 </a:solidFill>
                 <a:latin typeface="Segoe UI"/>
               </a:rPr>
-              <a:t>2,201</a:t>
+              <a:t>2,251</a:t>
             </a:r>
           </a:p>
         </p:txBody>
@@ -8733,7 +8733,7 @@
                 </a:solidFill>
                 <a:latin typeface="Segoe UI"/>
               </a:rPr>
-              <a:t>Rs 55,020</a:t>
+              <a:t>Rs 56,275</a:t>
             </a:r>
           </a:p>
         </p:txBody>
@@ -8767,7 +8767,7 @@
                 </a:solidFill>
                 <a:latin typeface="Segoe UI"/>
               </a:rPr>
-              <a:t>Rs -34,980</a:t>
+              <a:t>Rs -33,725</a:t>
             </a:r>
           </a:p>
         </p:txBody>
@@ -8801,7 +8801,7 @@
                 </a:solidFill>
                 <a:latin typeface="Segoe UI"/>
               </a:rPr>
-              <a:t>-38.9%</a:t>
+              <a:t>-37.5%</a:t>
             </a:r>
           </a:p>
         </p:txBody>
@@ -8971,7 +8971,7 @@
                 </a:solidFill>
                 <a:latin typeface="Segoe UI"/>
               </a:rPr>
-              <a:t>708</a:t>
+              <a:t>717</a:t>
             </a:r>
           </a:p>
         </p:txBody>
@@ -9005,7 +9005,7 @@
                 </a:solidFill>
                 <a:latin typeface="Segoe UI"/>
               </a:rPr>
-              <a:t>Rs 42,495</a:t>
+              <a:t>Rs 42,993</a:t>
             </a:r>
           </a:p>
         </p:txBody>
@@ -9039,7 +9039,7 @@
                 </a:solidFill>
                 <a:latin typeface="Segoe UI"/>
               </a:rPr>
-              <a:t>Rs -48,705</a:t>
+              <a:t>Rs -48,207</a:t>
             </a:r>
           </a:p>
         </p:txBody>
@@ -9073,7 +9073,7 @@
                 </a:solidFill>
                 <a:latin typeface="Segoe UI"/>
               </a:rPr>
-              <a:t>-53.4%</a:t>
+              <a:t>-52.9%</a:t>
             </a:r>
           </a:p>
         </p:txBody>
@@ -9141,7 +9141,7 @@
                 </a:solidFill>
                 <a:latin typeface="Segoe UI"/>
               </a:rPr>
-              <a:t>Total Rs 1,876,481 | P&amp;L Rs 154,080 (+8.9%) | Sharpe -0.1 | Vol 19.57% | VaR95 -1.89%/day</a:t>
+              <a:t>Total Rs 1,867,267 | P&amp;L Rs 133,830 (+7.7%) | Sharpe -0.1 | Vol 19.34% | VaR95 -1.88%/day</a:t>
             </a:r>
           </a:p>
         </p:txBody>

--- a/docs/pmr_daily.pptx
+++ b/docs/pmr_daily.pptx
@@ -3197,7 +3197,7 @@
                 </a:solidFill>
                 <a:latin typeface="Segoe UI"/>
               </a:rPr>
-              <a:t>Wednesday, 16 Sep 2026 09:08 SGT</a:t>
+              <a:t>Thursday, 17 Sep 2026 09:06 SGT</a:t>
             </a:r>
           </a:p>
         </p:txBody>
@@ -3265,7 +3265,7 @@
                 </a:solidFill>
                 <a:latin typeface="Segoe UI"/>
               </a:rPr>
-              <a:t>RAG 14R / 18A / 14G   |   56.5% above 200DMA   |   Portfolio Rs 1,867,267 (+7.7%)</a:t>
+              <a:t>RAG 13R / 20A / 13G   |   52.2% above 200DMA   |   Portfolio Rs 1,872,069 (+7.9%)</a:t>
             </a:r>
           </a:p>
         </p:txBody>
@@ -3529,7 +3529,7 @@
                 </a:solidFill>
                 <a:latin typeface="Segoe UI"/>
               </a:rPr>
-              <a:t>+22.7%</a:t>
+              <a:t>+18.1%</a:t>
             </a:r>
           </a:p>
         </p:txBody>
@@ -3655,7 +3655,7 @@
                 </a:solidFill>
                 <a:latin typeface="Segoe UI"/>
               </a:rPr>
-              <a:t>+5.1%</a:t>
+              <a:t>+4.6%</a:t>
             </a:r>
           </a:p>
         </p:txBody>
@@ -3713,7 +3713,7 @@
                 </a:solidFill>
                 <a:latin typeface="Segoe UI"/>
               </a:rPr>
-              <a:t>Alphabet</a:t>
+              <a:t>ITC</a:t>
             </a:r>
           </a:p>
         </p:txBody>
@@ -3743,11 +3743,11 @@
             <a:r>
               <a:rPr sz="900" b="0">
                 <a:solidFill>
-                  <a:srgbClr val="F59E0B"/>
-                </a:solidFill>
-                <a:latin typeface="Segoe UI"/>
-              </a:rPr>
-              <a:t>GOOGL · AMBER</a:t>
+                  <a:srgbClr val="EF4444"/>
+                </a:solidFill>
+                <a:latin typeface="Segoe UI"/>
+              </a:rPr>
+              <a:t>ITC.NS · RED</a:t>
             </a:r>
           </a:p>
         </p:txBody>
@@ -3781,7 +3781,7 @@
                 </a:solidFill>
                 <a:latin typeface="Segoe UI"/>
               </a:rPr>
-              <a:t>+3.0%</a:t>
+              <a:t>+3.4%</a:t>
             </a:r>
           </a:p>
         </p:txBody>
@@ -3839,7 +3839,7 @@
                 </a:solidFill>
                 <a:latin typeface="Segoe UI"/>
               </a:rPr>
-              <a:t>Clean Energy</a:t>
+              <a:t>US Energy</a:t>
             </a:r>
           </a:p>
         </p:txBody>
@@ -3869,11 +3869,11 @@
             <a:r>
               <a:rPr sz="900" b="0">
                 <a:solidFill>
-                  <a:srgbClr val="EF4444"/>
-                </a:solidFill>
-                <a:latin typeface="Segoe UI"/>
-              </a:rPr>
-              <a:t>ICLN · RED</a:t>
+                  <a:srgbClr val="22C55E"/>
+                </a:solidFill>
+                <a:latin typeface="Segoe UI"/>
+              </a:rPr>
+              <a:t>XLE · GREEN</a:t>
             </a:r>
           </a:p>
         </p:txBody>
@@ -3907,7 +3907,7 @@
                 </a:solidFill>
                 <a:latin typeface="Segoe UI"/>
               </a:rPr>
-              <a:t>+1.5%</a:t>
+              <a:t>+3.1%</a:t>
             </a:r>
           </a:p>
         </p:txBody>
@@ -4033,7 +4033,7 @@
                 </a:solidFill>
                 <a:latin typeface="Segoe UI"/>
               </a:rPr>
-              <a:t>+1.1%</a:t>
+              <a:t>+1.8%</a:t>
             </a:r>
           </a:p>
         </p:txBody>
@@ -4125,7 +4125,7 @@
                 </a:solidFill>
                 <a:latin typeface="Segoe UI"/>
               </a:rPr>
-              <a:t>NIFTY IT</a:t>
+              <a:t>TCS</a:t>
             </a:r>
           </a:p>
         </p:txBody>
@@ -4159,7 +4159,7 @@
                 </a:solidFill>
                 <a:latin typeface="Segoe UI"/>
               </a:rPr>
-              <a:t>^CNXIT · RED</a:t>
+              <a:t>TCS.NS · RED</a:t>
             </a:r>
           </a:p>
         </p:txBody>
@@ -4193,7 +4193,7 @@
                 </a:solidFill>
                 <a:latin typeface="Segoe UI"/>
               </a:rPr>
-              <a:t>-7.3%</a:t>
+              <a:t>-8.8%</a:t>
             </a:r>
           </a:p>
         </p:txBody>
@@ -4319,7 +4319,7 @@
                 </a:solidFill>
                 <a:latin typeface="Segoe UI"/>
               </a:rPr>
-              <a:t>-7.1%</a:t>
+              <a:t>-6.5%</a:t>
             </a:r>
           </a:p>
         </p:txBody>
@@ -4377,7 +4377,7 @@
                 </a:solidFill>
                 <a:latin typeface="Segoe UI"/>
               </a:rPr>
-              <a:t>TCS</a:t>
+              <a:t>Infosys</a:t>
             </a:r>
           </a:p>
         </p:txBody>
@@ -4411,7 +4411,7 @@
                 </a:solidFill>
                 <a:latin typeface="Segoe UI"/>
               </a:rPr>
-              <a:t>TCS.NS · RED</a:t>
+              <a:t>INFY.NS · RED</a:t>
             </a:r>
           </a:p>
         </p:txBody>
@@ -4445,7 +4445,7 @@
                 </a:solidFill>
                 <a:latin typeface="Segoe UI"/>
               </a:rPr>
-              <a:t>-6.2%</a:t>
+              <a:t>-6.5%</a:t>
             </a:r>
           </a:p>
         </p:txBody>
@@ -4503,7 +4503,7 @@
                 </a:solidFill>
                 <a:latin typeface="Segoe UI"/>
               </a:rPr>
-              <a:t>Solana</a:t>
+              <a:t>NIFTY IT</a:t>
             </a:r>
           </a:p>
         </p:txBody>
@@ -4537,7 +4537,7 @@
                 </a:solidFill>
                 <a:latin typeface="Segoe UI"/>
               </a:rPr>
-              <a:t>SOL-USD · RED</a:t>
+              <a:t>^CNXIT · RED</a:t>
             </a:r>
           </a:p>
         </p:txBody>
@@ -4571,7 +4571,7 @@
                 </a:solidFill>
                 <a:latin typeface="Segoe UI"/>
               </a:rPr>
-              <a:t>-6.0%</a:t>
+              <a:t>-5.2%</a:t>
             </a:r>
           </a:p>
         </p:txBody>
@@ -4629,7 +4629,7 @@
                 </a:solidFill>
                 <a:latin typeface="Segoe UI"/>
               </a:rPr>
-              <a:t>Infosys</a:t>
+              <a:t>Amazon</a:t>
             </a:r>
           </a:p>
         </p:txBody>
@@ -4659,11 +4659,11 @@
             <a:r>
               <a:rPr sz="900" b="0">
                 <a:solidFill>
-                  <a:srgbClr val="EF4444"/>
-                </a:solidFill>
-                <a:latin typeface="Segoe UI"/>
-              </a:rPr>
-              <a:t>INFY.NS · RED</a:t>
+                  <a:srgbClr val="F59E0B"/>
+                </a:solidFill>
+                <a:latin typeface="Segoe UI"/>
+              </a:rPr>
+              <a:t>AMZN · AMBER</a:t>
             </a:r>
           </a:p>
         </p:txBody>
@@ -4697,7 +4697,7 @@
                 </a:solidFill>
                 <a:latin typeface="Segoe UI"/>
               </a:rPr>
-              <a:t>-5.0%</a:t>
+              <a:t>-4.4%</a:t>
             </a:r>
           </a:p>
         </p:txBody>
@@ -4837,7 +4837,7 @@
         <p:spPr>
           <a:xfrm>
             <a:off x="457200" y="1188720"/>
-            <a:ext cx="11247120" cy="5508365"/>
+            <a:ext cx="11247120" cy="5539782"/>
           </a:xfrm>
           <a:prstGeom prst="rect">
             <a:avLst/>
@@ -4967,7 +4967,7 @@
                 </a:solidFill>
                 <a:latin typeface="Segoe UI"/>
               </a:rPr>
-              <a:t>Microsoft</a:t>
+              <a:t>US Energy</a:t>
             </a:r>
           </a:p>
         </p:txBody>
@@ -5103,7 +5103,7 @@
                 </a:solidFill>
                 <a:latin typeface="Segoe UI"/>
               </a:rPr>
-              <a:t>US Energy</a:t>
+              <a:t>Microsoft</a:t>
             </a:r>
           </a:p>
         </p:txBody>
@@ -5171,7 +5171,7 @@
                 </a:solidFill>
                 <a:latin typeface="Segoe UI"/>
               </a:rPr>
-              <a:t>87%</a:t>
+              <a:t>86%</a:t>
             </a:r>
           </a:p>
         </p:txBody>
@@ -5239,7 +5239,7 @@
                 </a:solidFill>
                 <a:latin typeface="Segoe UI"/>
               </a:rPr>
-              <a:t>Apple</a:t>
+              <a:t>Crude Oil WTI</a:t>
             </a:r>
           </a:p>
         </p:txBody>
@@ -5273,7 +5273,7 @@
                 </a:solidFill>
                 <a:latin typeface="Segoe UI"/>
               </a:rPr>
-              <a:t>STRONG BUY</a:t>
+              <a:t>BUY</a:t>
             </a:r>
           </a:p>
         </p:txBody>
@@ -5307,7 +5307,7 @@
                 </a:solidFill>
                 <a:latin typeface="Segoe UI"/>
               </a:rPr>
-              <a:t>95%</a:t>
+              <a:t>79%</a:t>
             </a:r>
           </a:p>
         </p:txBody>
@@ -5341,7 +5341,7 @@
                 </a:solidFill>
                 <a:latin typeface="Segoe UI"/>
               </a:rPr>
-              <a:t>above 200DMA · golden cross (50&gt;200) · MACD bullish</a:t>
+              <a:t>above 200DMA · death cross (50&lt;200) · MACD bullish</a:t>
             </a:r>
           </a:p>
         </p:txBody>
@@ -5375,7 +5375,7 @@
                 </a:solidFill>
                 <a:latin typeface="Segoe UI"/>
               </a:rPr>
-              <a:t>US Financials</a:t>
+              <a:t>Ethereum</a:t>
             </a:r>
           </a:p>
         </p:txBody>
@@ -5409,7 +5409,7 @@
                 </a:solidFill>
                 <a:latin typeface="Segoe UI"/>
               </a:rPr>
-              <a:t>STRONG BUY</a:t>
+              <a:t>BUY</a:t>
             </a:r>
           </a:p>
         </p:txBody>
@@ -5443,7 +5443,7 @@
                 </a:solidFill>
                 <a:latin typeface="Segoe UI"/>
               </a:rPr>
-              <a:t>80%</a:t>
+              <a:t>78%</a:t>
             </a:r>
           </a:p>
         </p:txBody>
@@ -5511,7 +5511,7 @@
                 </a:solidFill>
                 <a:latin typeface="Segoe UI"/>
               </a:rPr>
-              <a:t>Crude Oil WTI</a:t>
+              <a:t>Solana</a:t>
             </a:r>
           </a:p>
         </p:txBody>
@@ -5579,7 +5579,7 @@
                 </a:solidFill>
                 <a:latin typeface="Segoe UI"/>
               </a:rPr>
-              <a:t>75%</a:t>
+              <a:t>70%</a:t>
             </a:r>
           </a:p>
         </p:txBody>
@@ -5613,7 +5613,7 @@
                 </a:solidFill>
                 <a:latin typeface="Segoe UI"/>
               </a:rPr>
-              <a:t>above 200DMA · death cross (50&lt;200) · MACD bullish</a:t>
+              <a:t>above 200DMA · golden cross (50&gt;200) · MACD bearish</a:t>
             </a:r>
           </a:p>
         </p:txBody>
@@ -5647,7 +5647,7 @@
                 </a:solidFill>
                 <a:latin typeface="Segoe UI"/>
               </a:rPr>
-              <a:t>Straits Times</a:t>
+              <a:t>Bitcoin</a:t>
             </a:r>
           </a:p>
         </p:txBody>
@@ -5715,7 +5715,7 @@
                 </a:solidFill>
                 <a:latin typeface="Segoe UI"/>
               </a:rPr>
-              <a:t>71%</a:t>
+              <a:t>76%</a:t>
             </a:r>
           </a:p>
         </p:txBody>
@@ -5783,7 +5783,7 @@
                 </a:solidFill>
                 <a:latin typeface="Segoe UI"/>
               </a:rPr>
-              <a:t>Ethereum</a:t>
+              <a:t>Apple</a:t>
             </a:r>
           </a:p>
         </p:txBody>
@@ -5851,7 +5851,7 @@
                 </a:solidFill>
                 <a:latin typeface="Segoe UI"/>
               </a:rPr>
-              <a:t>77%</a:t>
+              <a:t>69%</a:t>
             </a:r>
           </a:p>
         </p:txBody>
@@ -5885,7 +5885,7 @@
                 </a:solidFill>
                 <a:latin typeface="Segoe UI"/>
               </a:rPr>
-              <a:t>above 200DMA · golden cross (50&gt;200) · MACD bearish</a:t>
+              <a:t>above 200DMA · golden cross (50&gt;200) · MACD bullish</a:t>
             </a:r>
           </a:p>
         </p:txBody>
@@ -5919,7 +5919,7 @@
                 </a:solidFill>
                 <a:latin typeface="Segoe UI"/>
               </a:rPr>
-              <a:t>Bitcoin</a:t>
+              <a:t>Straits Times</a:t>
             </a:r>
           </a:p>
         </p:txBody>
@@ -5987,7 +5987,7 @@
                 </a:solidFill>
                 <a:latin typeface="Segoe UI"/>
               </a:rPr>
-              <a:t>76%</a:t>
+              <a:t>69%</a:t>
             </a:r>
           </a:p>
         </p:txBody>
@@ -6055,7 +6055,7 @@
                 </a:solidFill>
                 <a:latin typeface="Segoe UI"/>
               </a:rPr>
-              <a:t>Solana</a:t>
+              <a:t>US Technology</a:t>
             </a:r>
           </a:p>
         </p:txBody>
@@ -6123,7 +6123,7 @@
                 </a:solidFill>
                 <a:latin typeface="Segoe UI"/>
               </a:rPr>
-              <a:t>69%</a:t>
+              <a:t>74%</a:t>
             </a:r>
           </a:p>
         </p:txBody>
@@ -6259,7 +6259,7 @@
                 </a:solidFill>
                 <a:latin typeface="Segoe UI"/>
               </a:rPr>
-              <a:t>69%</a:t>
+              <a:t>68%</a:t>
             </a:r>
           </a:p>
         </p:txBody>
@@ -6463,7 +6463,7 @@
                 </a:solidFill>
                 <a:latin typeface="Segoe UI"/>
               </a:rPr>
-              <a:t>US Technology</a:t>
+              <a:t>DAX</a:t>
             </a:r>
           </a:p>
         </p:txBody>
@@ -6531,7 +6531,7 @@
                 </a:solidFill>
                 <a:latin typeface="Segoe UI"/>
               </a:rPr>
-              <a:t>73%</a:t>
+              <a:t>79%</a:t>
             </a:r>
           </a:p>
         </p:txBody>
@@ -6659,7 +6659,7 @@
                 </a:solidFill>
                 <a:latin typeface="Segoe UI"/>
               </a:rPr>
-              <a:t>Base currency INR · USD/INR 95.84</a:t>
+              <a:t>Base currency INR · USD/INR 95.99</a:t>
             </a:r>
           </a:p>
         </p:txBody>
@@ -7067,7 +7067,7 @@
                 </a:solidFill>
                 <a:latin typeface="Segoe UI"/>
               </a:rPr>
-              <a:t>75,700</a:t>
+              <a:t>76,226</a:t>
             </a:r>
           </a:p>
         </p:txBody>
@@ -7101,7 +7101,7 @@
                 </a:solidFill>
                 <a:latin typeface="Segoe UI"/>
               </a:rPr>
-              <a:t>Rs 725,472</a:t>
+              <a:t>Rs 731,718</a:t>
             </a:r>
           </a:p>
         </p:txBody>
@@ -7135,7 +7135,7 @@
                 </a:solidFill>
                 <a:latin typeface="Segoe UI"/>
               </a:rPr>
-              <a:t>Rs 150,459</a:t>
+              <a:t>Rs 155,762</a:t>
             </a:r>
           </a:p>
         </p:txBody>
@@ -7169,7 +7169,7 @@
                 </a:solidFill>
                 <a:latin typeface="Segoe UI"/>
               </a:rPr>
-              <a:t>+26.2%</a:t>
+              <a:t>+27.0%</a:t>
             </a:r>
           </a:p>
         </p:txBody>
@@ -7199,11 +7199,11 @@
             <a:r>
               <a:rPr sz="1000" b="0">
                 <a:solidFill>
-                  <a:srgbClr val="EF4444"/>
-                </a:solidFill>
-                <a:latin typeface="Segoe UI"/>
-              </a:rPr>
-              <a:t>-3.1%</a:t>
+                  <a:srgbClr val="22C55E"/>
+                </a:solidFill>
+                <a:latin typeface="Segoe UI"/>
+              </a:rPr>
+              <a:t>+0.8%</a:t>
             </a:r>
           </a:p>
         </p:txBody>
@@ -7339,7 +7339,7 @@
                 </a:solidFill>
                 <a:latin typeface="Segoe UI"/>
               </a:rPr>
-              <a:t>4,316</a:t>
+              <a:t>4,318</a:t>
             </a:r>
           </a:p>
         </p:txBody>
@@ -7373,7 +7373,7 @@
                 </a:solidFill>
                 <a:latin typeface="Segoe UI"/>
               </a:rPr>
-              <a:t>Rs 413,654</a:t>
+              <a:t>Rs 414,544</a:t>
             </a:r>
           </a:p>
         </p:txBody>
@@ -7407,7 +7407,7 @@
                 </a:solidFill>
                 <a:latin typeface="Segoe UI"/>
               </a:rPr>
-              <a:t>Rs 193,233</a:t>
+              <a:t>Rs 193,761</a:t>
             </a:r>
           </a:p>
         </p:txBody>
@@ -7441,7 +7441,7 @@
                 </a:solidFill>
                 <a:latin typeface="Segoe UI"/>
               </a:rPr>
-              <a:t>+87.7%</a:t>
+              <a:t>+87.8%</a:t>
             </a:r>
           </a:p>
         </p:txBody>
@@ -7611,7 +7611,7 @@
                 </a:solidFill>
                 <a:latin typeface="Segoe UI"/>
               </a:rPr>
-              <a:t>333</a:t>
+              <a:t>331</a:t>
             </a:r>
           </a:p>
         </p:txBody>
@@ -7645,7 +7645,7 @@
                 </a:solidFill>
                 <a:latin typeface="Segoe UI"/>
               </a:rPr>
-              <a:t>Rs 319,209</a:t>
+              <a:t>Rs 318,062</a:t>
             </a:r>
           </a:p>
         </p:txBody>
@@ -7679,7 +7679,7 @@
                 </a:solidFill>
                 <a:latin typeface="Segoe UI"/>
               </a:rPr>
-              <a:t>Rs 141,913</a:t>
+              <a:t>Rs 140,476</a:t>
             </a:r>
           </a:p>
         </p:txBody>
@@ -7713,7 +7713,7 @@
                 </a:solidFill>
                 <a:latin typeface="Segoe UI"/>
               </a:rPr>
-              <a:t>+80.0%</a:t>
+              <a:t>+79.1%</a:t>
             </a:r>
           </a:p>
         </p:txBody>
@@ -7883,7 +7883,7 @@
                 </a:solidFill>
                 <a:latin typeface="Segoe UI"/>
               </a:rPr>
-              <a:t>211</a:t>
+              <a:t>212</a:t>
             </a:r>
           </a:p>
         </p:txBody>
@@ -7917,7 +7917,7 @@
                 </a:solidFill>
                 <a:latin typeface="Segoe UI"/>
               </a:rPr>
-              <a:t>Rs 161,739</a:t>
+              <a:t>Rs 162,934</a:t>
             </a:r>
           </a:p>
         </p:txBody>
@@ -7951,7 +7951,7 @@
                 </a:solidFill>
                 <a:latin typeface="Segoe UI"/>
               </a:rPr>
-              <a:t>Rs -183,268</a:t>
+              <a:t>Rs -182,640</a:t>
             </a:r>
           </a:p>
         </p:txBody>
@@ -7985,7 +7985,7 @@
                 </a:solidFill>
                 <a:latin typeface="Segoe UI"/>
               </a:rPr>
-              <a:t>-53.1%</a:t>
+              <a:t>-52.9%</a:t>
             </a:r>
           </a:p>
         </p:txBody>
@@ -8155,7 +8155,7 @@
                 </a:solidFill>
                 <a:latin typeface="Segoe UI"/>
               </a:rPr>
-              <a:t>1,077</a:t>
+              <a:t>1,060</a:t>
             </a:r>
           </a:p>
         </p:txBody>
@@ -8189,7 +8189,7 @@
                 </a:solidFill>
                 <a:latin typeface="Segoe UI"/>
               </a:rPr>
-              <a:t>Rs 86,160</a:t>
+              <a:t>Rs 84,800</a:t>
             </a:r>
           </a:p>
         </p:txBody>
@@ -8223,7 +8223,7 @@
                 </a:solidFill>
                 <a:latin typeface="Segoe UI"/>
               </a:rPr>
-              <a:t>Rs -25,840</a:t>
+              <a:t>Rs -27,200</a:t>
             </a:r>
           </a:p>
         </p:txBody>
@@ -8257,7 +8257,7 @@
                 </a:solidFill>
                 <a:latin typeface="Segoe UI"/>
               </a:rPr>
-              <a:t>-23.1%</a:t>
+              <a:t>-24.3%</a:t>
             </a:r>
           </a:p>
         </p:txBody>
@@ -8427,7 +8427,7 @@
                 </a:solidFill>
                 <a:latin typeface="Segoe UI"/>
               </a:rPr>
-              <a:t>1,235</a:t>
+              <a:t>1,240</a:t>
             </a:r>
           </a:p>
         </p:txBody>
@@ -8461,7 +8461,7 @@
                 </a:solidFill>
                 <a:latin typeface="Segoe UI"/>
               </a:rPr>
-              <a:t>Rs 61,765</a:t>
+              <a:t>Rs 62,000</a:t>
             </a:r>
           </a:p>
         </p:txBody>
@@ -8495,7 +8495,7 @@
                 </a:solidFill>
                 <a:latin typeface="Segoe UI"/>
               </a:rPr>
-              <a:t>Rs -60,735</a:t>
+              <a:t>Rs -60,500</a:t>
             </a:r>
           </a:p>
         </p:txBody>
@@ -8529,7 +8529,7 @@
                 </a:solidFill>
                 <a:latin typeface="Segoe UI"/>
               </a:rPr>
-              <a:t>-49.6%</a:t>
+              <a:t>-49.4%</a:t>
             </a:r>
           </a:p>
         </p:txBody>
@@ -8699,7 +8699,7 @@
                 </a:solidFill>
                 <a:latin typeface="Segoe UI"/>
               </a:rPr>
-              <a:t>2,251</a:t>
+              <a:t>2,189</a:t>
             </a:r>
           </a:p>
         </p:txBody>
@@ -8733,7 +8733,7 @@
                 </a:solidFill>
                 <a:latin typeface="Segoe UI"/>
               </a:rPr>
-              <a:t>Rs 56,275</a:t>
+              <a:t>Rs 54,720</a:t>
             </a:r>
           </a:p>
         </p:txBody>
@@ -8767,7 +8767,7 @@
                 </a:solidFill>
                 <a:latin typeface="Segoe UI"/>
               </a:rPr>
-              <a:t>Rs -33,725</a:t>
+              <a:t>Rs -35,280</a:t>
             </a:r>
           </a:p>
         </p:txBody>
@@ -8801,7 +8801,7 @@
                 </a:solidFill>
                 <a:latin typeface="Segoe UI"/>
               </a:rPr>
-              <a:t>-37.5%</a:t>
+              <a:t>-39.2%</a:t>
             </a:r>
           </a:p>
         </p:txBody>
@@ -8971,7 +8971,7 @@
                 </a:solidFill>
                 <a:latin typeface="Segoe UI"/>
               </a:rPr>
-              <a:t>717</a:t>
+              <a:t>722</a:t>
             </a:r>
           </a:p>
         </p:txBody>
@@ -9005,7 +9005,7 @@
                 </a:solidFill>
                 <a:latin typeface="Segoe UI"/>
               </a:rPr>
-              <a:t>Rs 42,993</a:t>
+              <a:t>Rs 43,290</a:t>
             </a:r>
           </a:p>
         </p:txBody>
@@ -9039,7 +9039,7 @@
                 </a:solidFill>
                 <a:latin typeface="Segoe UI"/>
               </a:rPr>
-              <a:t>Rs -48,207</a:t>
+              <a:t>Rs -47,910</a:t>
             </a:r>
           </a:p>
         </p:txBody>
@@ -9073,7 +9073,7 @@
                 </a:solidFill>
                 <a:latin typeface="Segoe UI"/>
               </a:rPr>
-              <a:t>-52.9%</a:t>
+              <a:t>-52.5%</a:t>
             </a:r>
           </a:p>
         </p:txBody>
@@ -9141,7 +9141,7 @@
                 </a:solidFill>
                 <a:latin typeface="Segoe UI"/>
               </a:rPr>
-              <a:t>Total Rs 1,867,267 | P&amp;L Rs 133,830 (+7.7%) | Sharpe -0.1 | Vol 19.34% | VaR95 -1.88%/day</a:t>
+              <a:t>Total Rs 1,872,069 | P&amp;L Rs 136,469 (+7.9%) | Sharpe -0.06 | Vol 19.41% | VaR95 -1.89%/day</a:t>
             </a:r>
           </a:p>
         </p:txBody>

--- a/docs/pmr_daily.pptx
+++ b/docs/pmr_daily.pptx
@@ -3197,7 +3197,7 @@
                 </a:solidFill>
                 <a:latin typeface="Segoe UI"/>
               </a:rPr>
-              <a:t>Thursday, 17 Sep 2026 09:06 SGT</a:t>
+              <a:t>Friday, 18 Sep 2026 09:04 SGT</a:t>
             </a:r>
           </a:p>
         </p:txBody>
@@ -3265,7 +3265,7 @@
                 </a:solidFill>
                 <a:latin typeface="Segoe UI"/>
               </a:rPr>
-              <a:t>RAG 13R / 20A / 13G   |   52.2% above 200DMA   |   Portfolio Rs 1,872,069 (+7.9%)</a:t>
+              <a:t>RAG 11R / 20A / 15G   |   50.0% above 200DMA   |   Portfolio Rs 1,886,220 (+8.6%)</a:t>
             </a:r>
           </a:p>
         </p:txBody>
@@ -3529,7 +3529,7 @@
                 </a:solidFill>
                 <a:latin typeface="Segoe UI"/>
               </a:rPr>
-              <a:t>+18.1%</a:t>
+              <a:t>+17.8%</a:t>
             </a:r>
           </a:p>
         </p:txBody>
@@ -3655,7 +3655,7 @@
                 </a:solidFill>
                 <a:latin typeface="Segoe UI"/>
               </a:rPr>
-              <a:t>+4.6%</a:t>
+              <a:t>+4.9%</a:t>
             </a:r>
           </a:p>
         </p:txBody>
@@ -3743,11 +3743,11 @@
             <a:r>
               <a:rPr sz="900" b="0">
                 <a:solidFill>
-                  <a:srgbClr val="EF4444"/>
-                </a:solidFill>
-                <a:latin typeface="Segoe UI"/>
-              </a:rPr>
-              <a:t>ITC.NS · RED</a:t>
+                  <a:srgbClr val="F59E0B"/>
+                </a:solidFill>
+                <a:latin typeface="Segoe UI"/>
+              </a:rPr>
+              <a:t>ITC.NS · AMBER</a:t>
             </a:r>
           </a:p>
         </p:txBody>
@@ -3781,7 +3781,7 @@
                 </a:solidFill>
                 <a:latin typeface="Segoe UI"/>
               </a:rPr>
-              <a:t>+3.4%</a:t>
+              <a:t>+4.2%</a:t>
             </a:r>
           </a:p>
         </p:txBody>
@@ -3839,7 +3839,7 @@
                 </a:solidFill>
                 <a:latin typeface="Segoe UI"/>
               </a:rPr>
-              <a:t>US Energy</a:t>
+              <a:t>Bharti Airtel</a:t>
             </a:r>
           </a:p>
         </p:txBody>
@@ -3869,11 +3869,11 @@
             <a:r>
               <a:rPr sz="900" b="0">
                 <a:solidFill>
-                  <a:srgbClr val="22C55E"/>
-                </a:solidFill>
-                <a:latin typeface="Segoe UI"/>
-              </a:rPr>
-              <a:t>XLE · GREEN</a:t>
+                  <a:srgbClr val="F59E0B"/>
+                </a:solidFill>
+                <a:latin typeface="Segoe UI"/>
+              </a:rPr>
+              <a:t>BHARTIARTL.NS · AMBER</a:t>
             </a:r>
           </a:p>
         </p:txBody>
@@ -3907,7 +3907,7 @@
                 </a:solidFill>
                 <a:latin typeface="Segoe UI"/>
               </a:rPr>
-              <a:t>+3.1%</a:t>
+              <a:t>+1.3%</a:t>
             </a:r>
           </a:p>
         </p:txBody>
@@ -3965,7 +3965,7 @@
                 </a:solidFill>
                 <a:latin typeface="Segoe UI"/>
               </a:rPr>
-              <a:t>HDFC Bank</a:t>
+              <a:t>Alphabet</a:t>
             </a:r>
           </a:p>
         </p:txBody>
@@ -3995,11 +3995,11 @@
             <a:r>
               <a:rPr sz="900" b="0">
                 <a:solidFill>
-                  <a:srgbClr val="EF4444"/>
-                </a:solidFill>
-                <a:latin typeface="Segoe UI"/>
-              </a:rPr>
-              <a:t>HDFCBANK.NS · RED</a:t>
+                  <a:srgbClr val="F59E0B"/>
+                </a:solidFill>
+                <a:latin typeface="Segoe UI"/>
+              </a:rPr>
+              <a:t>GOOGL · AMBER</a:t>
             </a:r>
           </a:p>
         </p:txBody>
@@ -4033,7 +4033,7 @@
                 </a:solidFill>
                 <a:latin typeface="Segoe UI"/>
               </a:rPr>
-              <a:t>+1.8%</a:t>
+              <a:t>+1.1%</a:t>
             </a:r>
           </a:p>
         </p:txBody>
@@ -4193,7 +4193,7 @@
                 </a:solidFill>
                 <a:latin typeface="Segoe UI"/>
               </a:rPr>
-              <a:t>-8.8%</a:t>
+              <a:t>-8.7%</a:t>
             </a:r>
           </a:p>
         </p:txBody>
@@ -4319,7 +4319,7 @@
                 </a:solidFill>
                 <a:latin typeface="Segoe UI"/>
               </a:rPr>
-              <a:t>-6.5%</a:t>
+              <a:t>-7.3%</a:t>
             </a:r>
           </a:p>
         </p:txBody>
@@ -4377,7 +4377,7 @@
                 </a:solidFill>
                 <a:latin typeface="Segoe UI"/>
               </a:rPr>
-              <a:t>Infosys</a:t>
+              <a:t>NIFTY IT</a:t>
             </a:r>
           </a:p>
         </p:txBody>
@@ -4411,7 +4411,7 @@
                 </a:solidFill>
                 <a:latin typeface="Segoe UI"/>
               </a:rPr>
-              <a:t>INFY.NS · RED</a:t>
+              <a:t>^CNXIT · RED</a:t>
             </a:r>
           </a:p>
         </p:txBody>
@@ -4445,7 +4445,7 @@
                 </a:solidFill>
                 <a:latin typeface="Segoe UI"/>
               </a:rPr>
-              <a:t>-6.5%</a:t>
+              <a:t>-6.7%</a:t>
             </a:r>
           </a:p>
         </p:txBody>
@@ -4503,7 +4503,7 @@
                 </a:solidFill>
                 <a:latin typeface="Segoe UI"/>
               </a:rPr>
-              <a:t>NIFTY IT</a:t>
+              <a:t>Infosys</a:t>
             </a:r>
           </a:p>
         </p:txBody>
@@ -4537,7 +4537,7 @@
                 </a:solidFill>
                 <a:latin typeface="Segoe UI"/>
               </a:rPr>
-              <a:t>^CNXIT · RED</a:t>
+              <a:t>INFY.NS · RED</a:t>
             </a:r>
           </a:p>
         </p:txBody>
@@ -4571,7 +4571,7 @@
                 </a:solidFill>
                 <a:latin typeface="Segoe UI"/>
               </a:rPr>
-              <a:t>-5.2%</a:t>
+              <a:t>-6.6%</a:t>
             </a:r>
           </a:p>
         </p:txBody>
@@ -4697,7 +4697,7 @@
                 </a:solidFill>
                 <a:latin typeface="Segoe UI"/>
               </a:rPr>
-              <a:t>-4.4%</a:t>
+              <a:t>-5.3%</a:t>
             </a:r>
           </a:p>
         </p:txBody>
@@ -4837,7 +4837,7 @@
         <p:spPr>
           <a:xfrm>
             <a:off x="457200" y="1188720"/>
-            <a:ext cx="11247120" cy="5539782"/>
+            <a:ext cx="11247120" cy="5508365"/>
           </a:xfrm>
           <a:prstGeom prst="rect">
             <a:avLst/>
@@ -5035,7 +5035,7 @@
                 </a:solidFill>
                 <a:latin typeface="Segoe UI"/>
               </a:rPr>
-              <a:t>87%</a:t>
+              <a:t>85%</a:t>
             </a:r>
           </a:p>
         </p:txBody>
@@ -5103,7 +5103,7 @@
                 </a:solidFill>
                 <a:latin typeface="Segoe UI"/>
               </a:rPr>
-              <a:t>Microsoft</a:t>
+              <a:t>Copper</a:t>
             </a:r>
           </a:p>
         </p:txBody>
@@ -5171,7 +5171,7 @@
                 </a:solidFill>
                 <a:latin typeface="Segoe UI"/>
               </a:rPr>
-              <a:t>86%</a:t>
+              <a:t>95%</a:t>
             </a:r>
           </a:p>
         </p:txBody>
@@ -5205,7 +5205,7 @@
                 </a:solidFill>
                 <a:latin typeface="Segoe UI"/>
               </a:rPr>
-              <a:t>above 200DMA · golden cross (50&gt;200) · MACD bearish</a:t>
+              <a:t>above 200DMA · golden cross (50&gt;200) · MACD bullish</a:t>
             </a:r>
           </a:p>
         </p:txBody>
@@ -5239,7 +5239,7 @@
                 </a:solidFill>
                 <a:latin typeface="Segoe UI"/>
               </a:rPr>
-              <a:t>Crude Oil WTI</a:t>
+              <a:t>Microsoft</a:t>
             </a:r>
           </a:p>
         </p:txBody>
@@ -5273,7 +5273,7 @@
                 </a:solidFill>
                 <a:latin typeface="Segoe UI"/>
               </a:rPr>
-              <a:t>BUY</a:t>
+              <a:t>STRONG BUY</a:t>
             </a:r>
           </a:p>
         </p:txBody>
@@ -5307,7 +5307,7 @@
                 </a:solidFill>
                 <a:latin typeface="Segoe UI"/>
               </a:rPr>
-              <a:t>79%</a:t>
+              <a:t>84%</a:t>
             </a:r>
           </a:p>
         </p:txBody>
@@ -5341,7 +5341,7 @@
                 </a:solidFill>
                 <a:latin typeface="Segoe UI"/>
               </a:rPr>
-              <a:t>above 200DMA · death cross (50&lt;200) · MACD bullish</a:t>
+              <a:t>above 200DMA · golden cross (50&gt;200) · MACD bearish</a:t>
             </a:r>
           </a:p>
         </p:txBody>
@@ -5375,7 +5375,7 @@
                 </a:solidFill>
                 <a:latin typeface="Segoe UI"/>
               </a:rPr>
-              <a:t>Ethereum</a:t>
+              <a:t>Nasdaq 100</a:t>
             </a:r>
           </a:p>
         </p:txBody>
@@ -5409,7 +5409,7 @@
                 </a:solidFill>
                 <a:latin typeface="Segoe UI"/>
               </a:rPr>
-              <a:t>BUY</a:t>
+              <a:t>STRONG BUY</a:t>
             </a:r>
           </a:p>
         </p:txBody>
@@ -5443,7 +5443,7 @@
                 </a:solidFill>
                 <a:latin typeface="Segoe UI"/>
               </a:rPr>
-              <a:t>78%</a:t>
+              <a:t>82%</a:t>
             </a:r>
           </a:p>
         </p:txBody>
@@ -5511,7 +5511,7 @@
                 </a:solidFill>
                 <a:latin typeface="Segoe UI"/>
               </a:rPr>
-              <a:t>Solana</a:t>
+              <a:t>Ethereum</a:t>
             </a:r>
           </a:p>
         </p:txBody>
@@ -5579,7 +5579,7 @@
                 </a:solidFill>
                 <a:latin typeface="Segoe UI"/>
               </a:rPr>
-              <a:t>70%</a:t>
+              <a:t>78%</a:t>
             </a:r>
           </a:p>
         </p:txBody>
@@ -5647,7 +5647,7 @@
                 </a:solidFill>
                 <a:latin typeface="Segoe UI"/>
               </a:rPr>
-              <a:t>Bitcoin</a:t>
+              <a:t>Crude Oil WTI</a:t>
             </a:r>
           </a:p>
         </p:txBody>
@@ -5715,7 +5715,7 @@
                 </a:solidFill>
                 <a:latin typeface="Segoe UI"/>
               </a:rPr>
-              <a:t>76%</a:t>
+              <a:t>78%</a:t>
             </a:r>
           </a:p>
         </p:txBody>
@@ -5749,7 +5749,7 @@
                 </a:solidFill>
                 <a:latin typeface="Segoe UI"/>
               </a:rPr>
-              <a:t>above 200DMA · golden cross (50&gt;200) · MACD bearish</a:t>
+              <a:t>above 200DMA · death cross (50&lt;200) · MACD bullish</a:t>
             </a:r>
           </a:p>
         </p:txBody>
@@ -5783,7 +5783,7 @@
                 </a:solidFill>
                 <a:latin typeface="Segoe UI"/>
               </a:rPr>
-              <a:t>Apple</a:t>
+              <a:t>Solana</a:t>
             </a:r>
           </a:p>
         </p:txBody>
@@ -5851,7 +5851,7 @@
                 </a:solidFill>
                 <a:latin typeface="Segoe UI"/>
               </a:rPr>
-              <a:t>69%</a:t>
+              <a:t>71%</a:t>
             </a:r>
           </a:p>
         </p:txBody>
@@ -5885,7 +5885,7 @@
                 </a:solidFill>
                 <a:latin typeface="Segoe UI"/>
               </a:rPr>
-              <a:t>above 200DMA · golden cross (50&gt;200) · MACD bullish</a:t>
+              <a:t>above 200DMA · golden cross (50&gt;200) · MACD bearish</a:t>
             </a:r>
           </a:p>
         </p:txBody>
@@ -5919,7 +5919,7 @@
                 </a:solidFill>
                 <a:latin typeface="Segoe UI"/>
               </a:rPr>
-              <a:t>Straits Times</a:t>
+              <a:t>Bitcoin</a:t>
             </a:r>
           </a:p>
         </p:txBody>
@@ -5987,7 +5987,7 @@
                 </a:solidFill>
                 <a:latin typeface="Segoe UI"/>
               </a:rPr>
-              <a:t>69%</a:t>
+              <a:t>76%</a:t>
             </a:r>
           </a:p>
         </p:txBody>
@@ -6055,7 +6055,7 @@
                 </a:solidFill>
                 <a:latin typeface="Segoe UI"/>
               </a:rPr>
-              <a:t>US Technology</a:t>
+              <a:t>Apple</a:t>
             </a:r>
           </a:p>
         </p:txBody>
@@ -6123,7 +6123,7 @@
                 </a:solidFill>
                 <a:latin typeface="Segoe UI"/>
               </a:rPr>
-              <a:t>74%</a:t>
+              <a:t>69%</a:t>
             </a:r>
           </a:p>
         </p:txBody>
@@ -6157,7 +6157,7 @@
                 </a:solidFill>
                 <a:latin typeface="Segoe UI"/>
               </a:rPr>
-              <a:t>above 200DMA · golden cross (50&gt;200) · MACD bearish</a:t>
+              <a:t>above 200DMA · golden cross (50&gt;200) · MACD bullish</a:t>
             </a:r>
           </a:p>
         </p:txBody>
@@ -6191,7 +6191,7 @@
                 </a:solidFill>
                 <a:latin typeface="Segoe UI"/>
               </a:rPr>
-              <a:t>USD/INR</a:t>
+              <a:t>Straits Times</a:t>
             </a:r>
           </a:p>
         </p:txBody>
@@ -6259,7 +6259,7 @@
                 </a:solidFill>
                 <a:latin typeface="Segoe UI"/>
               </a:rPr>
-              <a:t>68%</a:t>
+              <a:t>69%</a:t>
             </a:r>
           </a:p>
         </p:txBody>
@@ -6293,7 +6293,7 @@
                 </a:solidFill>
                 <a:latin typeface="Segoe UI"/>
               </a:rPr>
-              <a:t>above 200DMA · golden cross (50&gt;200) · MACD bullish</a:t>
+              <a:t>above 200DMA · golden cross (50&gt;200) · MACD bearish</a:t>
             </a:r>
           </a:p>
         </p:txBody>
@@ -6327,7 +6327,7 @@
                 </a:solidFill>
                 <a:latin typeface="Segoe UI"/>
               </a:rPr>
-              <a:t>FTSE 100</a:t>
+              <a:t>S&amp;P 500</a:t>
             </a:r>
           </a:p>
         </p:txBody>
@@ -6463,7 +6463,7 @@
                 </a:solidFill>
                 <a:latin typeface="Segoe UI"/>
               </a:rPr>
-              <a:t>DAX</a:t>
+              <a:t>US Technology</a:t>
             </a:r>
           </a:p>
         </p:txBody>
@@ -6531,7 +6531,7 @@
                 </a:solidFill>
                 <a:latin typeface="Segoe UI"/>
               </a:rPr>
-              <a:t>79%</a:t>
+              <a:t>74%</a:t>
             </a:r>
           </a:p>
         </p:txBody>
@@ -6659,7 +6659,7 @@
                 </a:solidFill>
                 <a:latin typeface="Segoe UI"/>
               </a:rPr>
-              <a:t>Base currency INR · USD/INR 95.99</a:t>
+              <a:t>Base currency INR · USD/INR 96.13</a:t>
             </a:r>
           </a:p>
         </p:txBody>
@@ -7067,7 +7067,7 @@
                 </a:solidFill>
                 <a:latin typeface="Segoe UI"/>
               </a:rPr>
-              <a:t>76,226</a:t>
+              <a:t>76,507</a:t>
             </a:r>
           </a:p>
         </p:txBody>
@@ -7101,7 +7101,7 @@
                 </a:solidFill>
                 <a:latin typeface="Segoe UI"/>
               </a:rPr>
-              <a:t>Rs 731,718</a:t>
+              <a:t>Rs 735,481</a:t>
             </a:r>
           </a:p>
         </p:txBody>
@@ -7135,7 +7135,7 @@
                 </a:solidFill>
                 <a:latin typeface="Segoe UI"/>
               </a:rPr>
-              <a:t>Rs 155,762</a:t>
+              <a:t>Rs 158,688</a:t>
             </a:r>
           </a:p>
         </p:txBody>
@@ -7169,7 +7169,7 @@
                 </a:solidFill>
                 <a:latin typeface="Segoe UI"/>
               </a:rPr>
-              <a:t>+27.0%</a:t>
+              <a:t>+27.5%</a:t>
             </a:r>
           </a:p>
         </p:txBody>
@@ -7203,7 +7203,7 @@
                 </a:solidFill>
                 <a:latin typeface="Segoe UI"/>
               </a:rPr>
-              <a:t>+0.8%</a:t>
+              <a:t>+0.5%</a:t>
             </a:r>
           </a:p>
         </p:txBody>
@@ -7339,7 +7339,7 @@
                 </a:solidFill>
                 <a:latin typeface="Segoe UI"/>
               </a:rPr>
-              <a:t>4,318</a:t>
+              <a:t>4,393</a:t>
             </a:r>
           </a:p>
         </p:txBody>
@@ -7373,7 +7373,7 @@
                 </a:solidFill>
                 <a:latin typeface="Segoe UI"/>
               </a:rPr>
-              <a:t>Rs 414,544</a:t>
+              <a:t>Rs 422,271</a:t>
             </a:r>
           </a:p>
         </p:txBody>
@@ -7407,7 +7407,7 @@
                 </a:solidFill>
                 <a:latin typeface="Segoe UI"/>
               </a:rPr>
-              <a:t>Rs 193,761</a:t>
+              <a:t>Rs 201,166</a:t>
             </a:r>
           </a:p>
         </p:txBody>
@@ -7441,7 +7441,7 @@
                 </a:solidFill>
                 <a:latin typeface="Segoe UI"/>
               </a:rPr>
-              <a:t>+87.8%</a:t>
+              <a:t>+91.0%</a:t>
             </a:r>
           </a:p>
         </p:txBody>
@@ -7611,7 +7611,7 @@
                 </a:solidFill>
                 <a:latin typeface="Segoe UI"/>
               </a:rPr>
-              <a:t>331</a:t>
+              <a:t>332</a:t>
             </a:r>
           </a:p>
         </p:txBody>
@@ -7645,7 +7645,7 @@
                 </a:solidFill>
                 <a:latin typeface="Segoe UI"/>
               </a:rPr>
-              <a:t>Rs 318,062</a:t>
+              <a:t>Rs 319,553</a:t>
             </a:r>
           </a:p>
         </p:txBody>
@@ -7679,7 +7679,7 @@
                 </a:solidFill>
                 <a:latin typeface="Segoe UI"/>
               </a:rPr>
-              <a:t>Rs 140,476</a:t>
+              <a:t>Rs 141,709</a:t>
             </a:r>
           </a:p>
         </p:txBody>
@@ -7713,7 +7713,7 @@
                 </a:solidFill>
                 <a:latin typeface="Segoe UI"/>
               </a:rPr>
-              <a:t>+79.1%</a:t>
+              <a:t>+79.7%</a:t>
             </a:r>
           </a:p>
         </p:txBody>
@@ -7883,7 +7883,7 @@
                 </a:solidFill>
                 <a:latin typeface="Segoe UI"/>
               </a:rPr>
-              <a:t>212</a:t>
+              <a:t>214</a:t>
             </a:r>
           </a:p>
         </p:txBody>
@@ -7917,7 +7917,7 @@
                 </a:solidFill>
                 <a:latin typeface="Segoe UI"/>
               </a:rPr>
-              <a:t>Rs 162,934</a:t>
+              <a:t>Rs 164,502</a:t>
             </a:r>
           </a:p>
         </p:txBody>
@@ -7951,7 +7951,7 @@
                 </a:solidFill>
                 <a:latin typeface="Segoe UI"/>
               </a:rPr>
-              <a:t>Rs -182,640</a:t>
+              <a:t>Rs -181,575</a:t>
             </a:r>
           </a:p>
         </p:txBody>
@@ -7985,7 +7985,7 @@
                 </a:solidFill>
                 <a:latin typeface="Segoe UI"/>
               </a:rPr>
-              <a:t>-52.9%</a:t>
+              <a:t>-52.5%</a:t>
             </a:r>
           </a:p>
         </p:txBody>
@@ -8155,7 +8155,7 @@
                 </a:solidFill>
                 <a:latin typeface="Segoe UI"/>
               </a:rPr>
-              <a:t>1,060</a:t>
+              <a:t>1,059</a:t>
             </a:r>
           </a:p>
         </p:txBody>
@@ -8189,7 +8189,7 @@
                 </a:solidFill>
                 <a:latin typeface="Segoe UI"/>
               </a:rPr>
-              <a:t>Rs 84,800</a:t>
+              <a:t>Rs 84,688</a:t>
             </a:r>
           </a:p>
         </p:txBody>
@@ -8223,7 +8223,7 @@
                 </a:solidFill>
                 <a:latin typeface="Segoe UI"/>
               </a:rPr>
-              <a:t>Rs -27,200</a:t>
+              <a:t>Rs -27,312</a:t>
             </a:r>
           </a:p>
         </p:txBody>
@@ -8257,7 +8257,7 @@
                 </a:solidFill>
                 <a:latin typeface="Segoe UI"/>
               </a:rPr>
-              <a:t>-24.3%</a:t>
+              <a:t>-24.4%</a:t>
             </a:r>
           </a:p>
         </p:txBody>
@@ -8427,7 +8427,7 @@
                 </a:solidFill>
                 <a:latin typeface="Segoe UI"/>
               </a:rPr>
-              <a:t>1,240</a:t>
+              <a:t>1,244</a:t>
             </a:r>
           </a:p>
         </p:txBody>
@@ -8461,7 +8461,7 @@
                 </a:solidFill>
                 <a:latin typeface="Segoe UI"/>
               </a:rPr>
-              <a:t>Rs 62,000</a:t>
+              <a:t>Rs 62,195</a:t>
             </a:r>
           </a:p>
         </p:txBody>
@@ -8495,7 +8495,7 @@
                 </a:solidFill>
                 <a:latin typeface="Segoe UI"/>
               </a:rPr>
-              <a:t>Rs -60,500</a:t>
+              <a:t>Rs -60,305</a:t>
             </a:r>
           </a:p>
         </p:txBody>
@@ -8529,7 +8529,7 @@
                 </a:solidFill>
                 <a:latin typeface="Segoe UI"/>
               </a:rPr>
-              <a:t>-49.4%</a:t>
+              <a:t>-49.2%</a:t>
             </a:r>
           </a:p>
         </p:txBody>
@@ -8699,7 +8699,7 @@
                 </a:solidFill>
                 <a:latin typeface="Segoe UI"/>
               </a:rPr>
-              <a:t>2,189</a:t>
+              <a:t>2,190</a:t>
             </a:r>
           </a:p>
         </p:txBody>
@@ -8733,7 +8733,7 @@
                 </a:solidFill>
                 <a:latin typeface="Segoe UI"/>
               </a:rPr>
-              <a:t>Rs 54,720</a:t>
+              <a:t>Rs 54,750</a:t>
             </a:r>
           </a:p>
         </p:txBody>
@@ -8767,7 +8767,7 @@
                 </a:solidFill>
                 <a:latin typeface="Segoe UI"/>
               </a:rPr>
-              <a:t>Rs -35,280</a:t>
+              <a:t>Rs -35,250</a:t>
             </a:r>
           </a:p>
         </p:txBody>
@@ -8971,7 +8971,7 @@
                 </a:solidFill>
                 <a:latin typeface="Segoe UI"/>
               </a:rPr>
-              <a:t>722</a:t>
+              <a:t>713</a:t>
             </a:r>
           </a:p>
         </p:txBody>
@@ -9005,7 +9005,7 @@
                 </a:solidFill>
                 <a:latin typeface="Segoe UI"/>
               </a:rPr>
-              <a:t>Rs 43,290</a:t>
+              <a:t>Rs 42,780</a:t>
             </a:r>
           </a:p>
         </p:txBody>
@@ -9039,7 +9039,7 @@
                 </a:solidFill>
                 <a:latin typeface="Segoe UI"/>
               </a:rPr>
-              <a:t>Rs -47,910</a:t>
+              <a:t>Rs -48,420</a:t>
             </a:r>
           </a:p>
         </p:txBody>
@@ -9073,7 +9073,7 @@
                 </a:solidFill>
                 <a:latin typeface="Segoe UI"/>
               </a:rPr>
-              <a:t>-52.5%</a:t>
+              <a:t>-53.1%</a:t>
             </a:r>
           </a:p>
         </p:txBody>
@@ -9141,7 +9141,7 @@
                 </a:solidFill>
                 <a:latin typeface="Segoe UI"/>
               </a:rPr>
-              <a:t>Total Rs 1,872,069 | P&amp;L Rs 136,469 (+7.9%) | Sharpe -0.06 | Vol 19.41% | VaR95 -1.89%/day</a:t>
+              <a:t>Total Rs 1,886,220 | P&amp;L Rs 148,701 (+8.6%) | Sharpe -0.03 | Vol 19.41% | VaR95 -1.88%/day</a:t>
             </a:r>
           </a:p>
         </p:txBody>

--- a/docs/pmr_daily.pptx
+++ b/docs/pmr_daily.pptx
@@ -3197,7 +3197,7 @@
                 </a:solidFill>
                 <a:latin typeface="Segoe UI"/>
               </a:rPr>
-              <a:t>Friday, 18 Sep 2026 09:04 SGT</a:t>
+              <a:t>Monday, 21 Sep 2026 08:53 SGT</a:t>
             </a:r>
           </a:p>
         </p:txBody>
@@ -3265,7 +3265,7 @@
                 </a:solidFill>
                 <a:latin typeface="Segoe UI"/>
               </a:rPr>
-              <a:t>RAG 11R / 20A / 15G   |   50.0% above 200DMA   |   Portfolio Rs 1,886,220 (+8.6%)</a:t>
+              <a:t>RAG 12R / 17A / 17G   |   56.5% above 200DMA   |   Portfolio Rs 1,940,136 (+11.9%)</a:t>
             </a:r>
           </a:p>
         </p:txBody>
@@ -3491,11 +3491,11 @@
             <a:r>
               <a:rPr sz="900" b="0">
                 <a:solidFill>
-                  <a:srgbClr val="F59E0B"/>
-                </a:solidFill>
-                <a:latin typeface="Segoe UI"/>
-              </a:rPr>
-              <a:t>CL=F · AMBER</a:t>
+                  <a:srgbClr val="EF4444"/>
+                </a:solidFill>
+                <a:latin typeface="Segoe UI"/>
+              </a:rPr>
+              <a:t>CL=F · RED</a:t>
             </a:r>
           </a:p>
         </p:txBody>
@@ -3529,7 +3529,7 @@
                 </a:solidFill>
                 <a:latin typeface="Segoe UI"/>
               </a:rPr>
-              <a:t>+17.8%</a:t>
+              <a:t>+10.5%</a:t>
             </a:r>
           </a:p>
         </p:txBody>
@@ -3587,7 +3587,7 @@
                 </a:solidFill>
                 <a:latin typeface="Segoe UI"/>
               </a:rPr>
-              <a:t>Apple</a:t>
+              <a:t>Solana</a:t>
             </a:r>
           </a:p>
         </p:txBody>
@@ -3617,11 +3617,11 @@
             <a:r>
               <a:rPr sz="900" b="0">
                 <a:solidFill>
-                  <a:srgbClr val="22C55E"/>
-                </a:solidFill>
-                <a:latin typeface="Segoe UI"/>
-              </a:rPr>
-              <a:t>AAPL · GREEN</a:t>
+                  <a:srgbClr val="F59E0B"/>
+                </a:solidFill>
+                <a:latin typeface="Segoe UI"/>
+              </a:rPr>
+              <a:t>SOL-USD · AMBER</a:t>
             </a:r>
           </a:p>
         </p:txBody>
@@ -3655,7 +3655,7 @@
                 </a:solidFill>
                 <a:latin typeface="Segoe UI"/>
               </a:rPr>
-              <a:t>+4.9%</a:t>
+              <a:t>+9.2%</a:t>
             </a:r>
           </a:p>
         </p:txBody>
@@ -3713,7 +3713,7 @@
                 </a:solidFill>
                 <a:latin typeface="Segoe UI"/>
               </a:rPr>
-              <a:t>ITC</a:t>
+              <a:t>Ethereum</a:t>
             </a:r>
           </a:p>
         </p:txBody>
@@ -3747,7 +3747,7 @@
                 </a:solidFill>
                 <a:latin typeface="Segoe UI"/>
               </a:rPr>
-              <a:t>ITC.NS · AMBER</a:t>
+              <a:t>ETH-USD · AMBER</a:t>
             </a:r>
           </a:p>
         </p:txBody>
@@ -3781,7 +3781,7 @@
                 </a:solidFill>
                 <a:latin typeface="Segoe UI"/>
               </a:rPr>
-              <a:t>+4.2%</a:t>
+              <a:t>+9.1%</a:t>
             </a:r>
           </a:p>
         </p:txBody>
@@ -3839,7 +3839,7 @@
                 </a:solidFill>
                 <a:latin typeface="Segoe UI"/>
               </a:rPr>
-              <a:t>Bharti Airtel</a:t>
+              <a:t>Apple</a:t>
             </a:r>
           </a:p>
         </p:txBody>
@@ -3869,11 +3869,11 @@
             <a:r>
               <a:rPr sz="900" b="0">
                 <a:solidFill>
-                  <a:srgbClr val="F59E0B"/>
-                </a:solidFill>
-                <a:latin typeface="Segoe UI"/>
-              </a:rPr>
-              <a:t>BHARTIARTL.NS · AMBER</a:t>
+                  <a:srgbClr val="22C55E"/>
+                </a:solidFill>
+                <a:latin typeface="Segoe UI"/>
+              </a:rPr>
+              <a:t>AAPL · GREEN</a:t>
             </a:r>
           </a:p>
         </p:txBody>
@@ -3907,7 +3907,7 @@
                 </a:solidFill>
                 <a:latin typeface="Segoe UI"/>
               </a:rPr>
-              <a:t>+1.3%</a:t>
+              <a:t>+6.1%</a:t>
             </a:r>
           </a:p>
         </p:txBody>
@@ -3965,7 +3965,7 @@
                 </a:solidFill>
                 <a:latin typeface="Segoe UI"/>
               </a:rPr>
-              <a:t>Alphabet</a:t>
+              <a:t>Bharti Airtel</a:t>
             </a:r>
           </a:p>
         </p:txBody>
@@ -3995,11 +3995,11 @@
             <a:r>
               <a:rPr sz="900" b="0">
                 <a:solidFill>
-                  <a:srgbClr val="F59E0B"/>
-                </a:solidFill>
-                <a:latin typeface="Segoe UI"/>
-              </a:rPr>
-              <a:t>GOOGL · AMBER</a:t>
+                  <a:srgbClr val="22C55E"/>
+                </a:solidFill>
+                <a:latin typeface="Segoe UI"/>
+              </a:rPr>
+              <a:t>BHARTIARTL.NS · GREEN</a:t>
             </a:r>
           </a:p>
         </p:txBody>
@@ -4033,7 +4033,7 @@
                 </a:solidFill>
                 <a:latin typeface="Segoe UI"/>
               </a:rPr>
-              <a:t>+1.1%</a:t>
+              <a:t>+4.5%</a:t>
             </a:r>
           </a:p>
         </p:txBody>
@@ -4193,7 +4193,7 @@
                 </a:solidFill>
                 <a:latin typeface="Segoe UI"/>
               </a:rPr>
-              <a:t>-8.7%</a:t>
+              <a:t>-12.3%</a:t>
             </a:r>
           </a:p>
         </p:txBody>
@@ -4281,11 +4281,11 @@
             <a:r>
               <a:rPr sz="900" b="0">
                 <a:solidFill>
-                  <a:srgbClr val="22C55E"/>
-                </a:solidFill>
-                <a:latin typeface="Segoe UI"/>
-              </a:rPr>
-              <a:t>ICICIBANK.NS · GREEN</a:t>
+                  <a:srgbClr val="F59E0B"/>
+                </a:solidFill>
+                <a:latin typeface="Segoe UI"/>
+              </a:rPr>
+              <a:t>ICICIBANK.NS · AMBER</a:t>
             </a:r>
           </a:p>
         </p:txBody>
@@ -4319,7 +4319,7 @@
                 </a:solidFill>
                 <a:latin typeface="Segoe UI"/>
               </a:rPr>
-              <a:t>-7.3%</a:t>
+              <a:t>-7.9%</a:t>
             </a:r>
           </a:p>
         </p:txBody>
@@ -4445,7 +4445,7 @@
                 </a:solidFill>
                 <a:latin typeface="Segoe UI"/>
               </a:rPr>
-              <a:t>-6.7%</a:t>
+              <a:t>-7.5%</a:t>
             </a:r>
           </a:p>
         </p:txBody>
@@ -4571,7 +4571,7 @@
                 </a:solidFill>
                 <a:latin typeface="Segoe UI"/>
               </a:rPr>
-              <a:t>-6.6%</a:t>
+              <a:t>-7.3%</a:t>
             </a:r>
           </a:p>
         </p:txBody>
@@ -4629,7 +4629,7 @@
                 </a:solidFill>
                 <a:latin typeface="Segoe UI"/>
               </a:rPr>
-              <a:t>Amazon</a:t>
+              <a:t>Reliance</a:t>
             </a:r>
           </a:p>
         </p:txBody>
@@ -4663,7 +4663,7 @@
                 </a:solidFill>
                 <a:latin typeface="Segoe UI"/>
               </a:rPr>
-              <a:t>AMZN · AMBER</a:t>
+              <a:t>RELIANCE.NS · AMBER</a:t>
             </a:r>
           </a:p>
         </p:txBody>
@@ -4697,7 +4697,7 @@
                 </a:solidFill>
                 <a:latin typeface="Segoe UI"/>
               </a:rPr>
-              <a:t>-5.3%</a:t>
+              <a:t>-4.0%</a:t>
             </a:r>
           </a:p>
         </p:txBody>
@@ -4837,7 +4837,7 @@
         <p:spPr>
           <a:xfrm>
             <a:off x="457200" y="1188720"/>
-            <a:ext cx="11247120" cy="5508365"/>
+            <a:ext cx="11247120" cy="5513499"/>
           </a:xfrm>
           <a:prstGeom prst="rect">
             <a:avLst/>
@@ -4967,7 +4967,7 @@
                 </a:solidFill>
                 <a:latin typeface="Segoe UI"/>
               </a:rPr>
-              <a:t>US Energy</a:t>
+              <a:t>Solana</a:t>
             </a:r>
           </a:p>
         </p:txBody>
@@ -5035,7 +5035,7 @@
                 </a:solidFill>
                 <a:latin typeface="Segoe UI"/>
               </a:rPr>
-              <a:t>85%</a:t>
+              <a:t>92%</a:t>
             </a:r>
           </a:p>
         </p:txBody>
@@ -5069,7 +5069,7 @@
                 </a:solidFill>
                 <a:latin typeface="Segoe UI"/>
               </a:rPr>
-              <a:t>above 200DMA · golden cross (50&gt;200) · MACD bearish</a:t>
+              <a:t>above 200DMA · golden cross (50&gt;200) · MACD bullish</a:t>
             </a:r>
           </a:p>
         </p:txBody>
@@ -5103,7 +5103,7 @@
                 </a:solidFill>
                 <a:latin typeface="Segoe UI"/>
               </a:rPr>
-              <a:t>Copper</a:t>
+              <a:t>Bitcoin</a:t>
             </a:r>
           </a:p>
         </p:txBody>
@@ -5171,7 +5171,7 @@
                 </a:solidFill>
                 <a:latin typeface="Segoe UI"/>
               </a:rPr>
-              <a:t>95%</a:t>
+              <a:t>92%</a:t>
             </a:r>
           </a:p>
         </p:txBody>
@@ -5239,7 +5239,7 @@
                 </a:solidFill>
                 <a:latin typeface="Segoe UI"/>
               </a:rPr>
-              <a:t>Microsoft</a:t>
+              <a:t>Ethereum</a:t>
             </a:r>
           </a:p>
         </p:txBody>
@@ -5307,7 +5307,7 @@
                 </a:solidFill>
                 <a:latin typeface="Segoe UI"/>
               </a:rPr>
-              <a:t>84%</a:t>
+              <a:t>92%</a:t>
             </a:r>
           </a:p>
         </p:txBody>
@@ -5341,7 +5341,7 @@
                 </a:solidFill>
                 <a:latin typeface="Segoe UI"/>
               </a:rPr>
-              <a:t>above 200DMA · golden cross (50&gt;200) · MACD bearish</a:t>
+              <a:t>above 200DMA · golden cross (50&gt;200) · MACD bullish</a:t>
             </a:r>
           </a:p>
         </p:txBody>
@@ -5375,7 +5375,7 @@
                 </a:solidFill>
                 <a:latin typeface="Segoe UI"/>
               </a:rPr>
-              <a:t>Nasdaq 100</a:t>
+              <a:t>US Technology</a:t>
             </a:r>
           </a:p>
         </p:txBody>
@@ -5443,7 +5443,7 @@
                 </a:solidFill>
                 <a:latin typeface="Segoe UI"/>
               </a:rPr>
-              <a:t>82%</a:t>
+              <a:t>95%</a:t>
             </a:r>
           </a:p>
         </p:txBody>
@@ -5477,7 +5477,7 @@
                 </a:solidFill>
                 <a:latin typeface="Segoe UI"/>
               </a:rPr>
-              <a:t>above 200DMA · golden cross (50&gt;200) · MACD bearish</a:t>
+              <a:t>above 200DMA · golden cross (50&gt;200) · MACD bullish</a:t>
             </a:r>
           </a:p>
         </p:txBody>
@@ -5511,7 +5511,7 @@
                 </a:solidFill>
                 <a:latin typeface="Segoe UI"/>
               </a:rPr>
-              <a:t>Ethereum</a:t>
+              <a:t>Copper</a:t>
             </a:r>
           </a:p>
         </p:txBody>
@@ -5545,7 +5545,7 @@
                 </a:solidFill>
                 <a:latin typeface="Segoe UI"/>
               </a:rPr>
-              <a:t>BUY</a:t>
+              <a:t>STRONG BUY</a:t>
             </a:r>
           </a:p>
         </p:txBody>
@@ -5579,7 +5579,7 @@
                 </a:solidFill>
                 <a:latin typeface="Segoe UI"/>
               </a:rPr>
-              <a:t>78%</a:t>
+              <a:t>95%</a:t>
             </a:r>
           </a:p>
         </p:txBody>
@@ -5613,7 +5613,7 @@
                 </a:solidFill>
                 <a:latin typeface="Segoe UI"/>
               </a:rPr>
-              <a:t>above 200DMA · golden cross (50&gt;200) · MACD bearish</a:t>
+              <a:t>above 200DMA · golden cross (50&gt;200) · MACD bullish</a:t>
             </a:r>
           </a:p>
         </p:txBody>
@@ -5647,7 +5647,7 @@
                 </a:solidFill>
                 <a:latin typeface="Segoe UI"/>
               </a:rPr>
-              <a:t>Crude Oil WTI</a:t>
+              <a:t>US Energy</a:t>
             </a:r>
           </a:p>
         </p:txBody>
@@ -5681,7 +5681,7 @@
                 </a:solidFill>
                 <a:latin typeface="Segoe UI"/>
               </a:rPr>
-              <a:t>BUY</a:t>
+              <a:t>STRONG BUY</a:t>
             </a:r>
           </a:p>
         </p:txBody>
@@ -5715,7 +5715,7 @@
                 </a:solidFill>
                 <a:latin typeface="Segoe UI"/>
               </a:rPr>
-              <a:t>78%</a:t>
+              <a:t>84%</a:t>
             </a:r>
           </a:p>
         </p:txBody>
@@ -5749,7 +5749,7 @@
                 </a:solidFill>
                 <a:latin typeface="Segoe UI"/>
               </a:rPr>
-              <a:t>above 200DMA · death cross (50&lt;200) · MACD bullish</a:t>
+              <a:t>above 200DMA · golden cross (50&gt;200) · MACD bearish</a:t>
             </a:r>
           </a:p>
         </p:txBody>
@@ -5783,7 +5783,7 @@
                 </a:solidFill>
                 <a:latin typeface="Segoe UI"/>
               </a:rPr>
-              <a:t>Solana</a:t>
+              <a:t>Apple</a:t>
             </a:r>
           </a:p>
         </p:txBody>
@@ -5817,7 +5817,7 @@
                 </a:solidFill>
                 <a:latin typeface="Segoe UI"/>
               </a:rPr>
-              <a:t>BUY</a:t>
+              <a:t>STRONG BUY</a:t>
             </a:r>
           </a:p>
         </p:txBody>
@@ -5851,7 +5851,7 @@
                 </a:solidFill>
                 <a:latin typeface="Segoe UI"/>
               </a:rPr>
-              <a:t>71%</a:t>
+              <a:t>95%</a:t>
             </a:r>
           </a:p>
         </p:txBody>
@@ -5885,7 +5885,7 @@
                 </a:solidFill>
                 <a:latin typeface="Segoe UI"/>
               </a:rPr>
-              <a:t>above 200DMA · golden cross (50&gt;200) · MACD bearish</a:t>
+              <a:t>above 200DMA · golden cross (50&gt;200) · MACD bullish</a:t>
             </a:r>
           </a:p>
         </p:txBody>
@@ -5919,7 +5919,7 @@
                 </a:solidFill>
                 <a:latin typeface="Segoe UI"/>
               </a:rPr>
-              <a:t>Bitcoin</a:t>
+              <a:t>Microsoft</a:t>
             </a:r>
           </a:p>
         </p:txBody>
@@ -5953,7 +5953,7 @@
                 </a:solidFill>
                 <a:latin typeface="Segoe UI"/>
               </a:rPr>
-              <a:t>BUY</a:t>
+              <a:t>STRONG BUY</a:t>
             </a:r>
           </a:p>
         </p:txBody>
@@ -5987,7 +5987,7 @@
                 </a:solidFill>
                 <a:latin typeface="Segoe UI"/>
               </a:rPr>
-              <a:t>76%</a:t>
+              <a:t>83%</a:t>
             </a:r>
           </a:p>
         </p:txBody>
@@ -6055,7 +6055,7 @@
                 </a:solidFill>
                 <a:latin typeface="Segoe UI"/>
               </a:rPr>
-              <a:t>Apple</a:t>
+              <a:t>Nasdaq 100</a:t>
             </a:r>
           </a:p>
         </p:txBody>
@@ -6089,7 +6089,7 @@
                 </a:solidFill>
                 <a:latin typeface="Segoe UI"/>
               </a:rPr>
-              <a:t>BUY</a:t>
+              <a:t>STRONG BUY</a:t>
             </a:r>
           </a:p>
         </p:txBody>
@@ -6123,7 +6123,7 @@
                 </a:solidFill>
                 <a:latin typeface="Segoe UI"/>
               </a:rPr>
-              <a:t>69%</a:t>
+              <a:t>94%</a:t>
             </a:r>
           </a:p>
         </p:txBody>
@@ -6191,7 +6191,7 @@
                 </a:solidFill>
                 <a:latin typeface="Segoe UI"/>
               </a:rPr>
-              <a:t>Straits Times</a:t>
+              <a:t>Nvidia</a:t>
             </a:r>
           </a:p>
         </p:txBody>
@@ -6225,7 +6225,7 @@
                 </a:solidFill>
                 <a:latin typeface="Segoe UI"/>
               </a:rPr>
-              <a:t>BUY</a:t>
+              <a:t>STRONG BUY</a:t>
             </a:r>
           </a:p>
         </p:txBody>
@@ -6259,7 +6259,7 @@
                 </a:solidFill>
                 <a:latin typeface="Segoe UI"/>
               </a:rPr>
-              <a:t>69%</a:t>
+              <a:t>94%</a:t>
             </a:r>
           </a:p>
         </p:txBody>
@@ -6293,7 +6293,7 @@
                 </a:solidFill>
                 <a:latin typeface="Segoe UI"/>
               </a:rPr>
-              <a:t>above 200DMA · golden cross (50&gt;200) · MACD bearish</a:t>
+              <a:t>above 200DMA · golden cross (50&gt;200) · MACD bullish</a:t>
             </a:r>
           </a:p>
         </p:txBody>
@@ -6361,7 +6361,7 @@
                 </a:solidFill>
                 <a:latin typeface="Segoe UI"/>
               </a:rPr>
-              <a:t>BUY</a:t>
+              <a:t>STRONG BUY</a:t>
             </a:r>
           </a:p>
         </p:txBody>
@@ -6395,7 +6395,7 @@
                 </a:solidFill>
                 <a:latin typeface="Segoe UI"/>
               </a:rPr>
-              <a:t>68%</a:t>
+              <a:t>80%</a:t>
             </a:r>
           </a:p>
         </p:txBody>
@@ -6429,7 +6429,7 @@
                 </a:solidFill>
                 <a:latin typeface="Segoe UI"/>
               </a:rPr>
-              <a:t>above 200DMA · golden cross (50&gt;200) · MACD bearish</a:t>
+              <a:t>above 200DMA · golden cross (50&gt;200) · MACD bullish</a:t>
             </a:r>
           </a:p>
         </p:txBody>
@@ -6463,7 +6463,7 @@
                 </a:solidFill>
                 <a:latin typeface="Segoe UI"/>
               </a:rPr>
-              <a:t>US Technology</a:t>
+              <a:t>Straits Times</a:t>
             </a:r>
           </a:p>
         </p:txBody>
@@ -6531,7 +6531,7 @@
                 </a:solidFill>
                 <a:latin typeface="Segoe UI"/>
               </a:rPr>
-              <a:t>74%</a:t>
+              <a:t>67%</a:t>
             </a:r>
           </a:p>
         </p:txBody>
@@ -6659,7 +6659,7 @@
                 </a:solidFill>
                 <a:latin typeface="Segoe UI"/>
               </a:rPr>
-              <a:t>Base currency INR · USD/INR 96.13</a:t>
+              <a:t>Base currency INR · USD/INR 95.86</a:t>
             </a:r>
           </a:p>
         </p:txBody>
@@ -7067,7 +7067,7 @@
                 </a:solidFill>
                 <a:latin typeface="Segoe UI"/>
               </a:rPr>
-              <a:t>76,507</a:t>
+              <a:t>81,670</a:t>
             </a:r>
           </a:p>
         </p:txBody>
@@ -7101,7 +7101,7 @@
                 </a:solidFill>
                 <a:latin typeface="Segoe UI"/>
               </a:rPr>
-              <a:t>Rs 735,481</a:t>
+              <a:t>Rs 782,914</a:t>
             </a:r>
           </a:p>
         </p:txBody>
@@ -7135,7 +7135,7 @@
                 </a:solidFill>
                 <a:latin typeface="Segoe UI"/>
               </a:rPr>
-              <a:t>Rs 158,688</a:t>
+              <a:t>Rs 207,736</a:t>
             </a:r>
           </a:p>
         </p:txBody>
@@ -7169,7 +7169,7 @@
                 </a:solidFill>
                 <a:latin typeface="Segoe UI"/>
               </a:rPr>
-              <a:t>+27.5%</a:t>
+              <a:t>+36.1%</a:t>
             </a:r>
           </a:p>
         </p:txBody>
@@ -7339,7 +7339,7 @@
                 </a:solidFill>
                 <a:latin typeface="Segoe UI"/>
               </a:rPr>
-              <a:t>4,393</a:t>
+              <a:t>4,409</a:t>
             </a:r>
           </a:p>
         </p:txBody>
@@ -7373,7 +7373,7 @@
                 </a:solidFill>
                 <a:latin typeface="Segoe UI"/>
               </a:rPr>
-              <a:t>Rs 422,271</a:t>
+              <a:t>Rs 422,622</a:t>
             </a:r>
           </a:p>
         </p:txBody>
@@ -7407,7 +7407,7 @@
                 </a:solidFill>
                 <a:latin typeface="Segoe UI"/>
               </a:rPr>
-              <a:t>Rs 201,166</a:t>
+              <a:t>Rs 202,137</a:t>
             </a:r>
           </a:p>
         </p:txBody>
@@ -7441,7 +7441,7 @@
                 </a:solidFill>
                 <a:latin typeface="Segoe UI"/>
               </a:rPr>
-              <a:t>+91.0%</a:t>
+              <a:t>+91.7%</a:t>
             </a:r>
           </a:p>
         </p:txBody>
@@ -7611,7 +7611,7 @@
                 </a:solidFill>
                 <a:latin typeface="Segoe UI"/>
               </a:rPr>
-              <a:t>332</a:t>
+              <a:t>336</a:t>
             </a:r>
           </a:p>
         </p:txBody>
@@ -7645,7 +7645,7 @@
                 </a:solidFill>
                 <a:latin typeface="Segoe UI"/>
               </a:rPr>
-              <a:t>Rs 319,553</a:t>
+              <a:t>Rs 322,224</a:t>
             </a:r>
           </a:p>
         </p:txBody>
@@ -7679,7 +7679,7 @@
                 </a:solidFill>
                 <a:latin typeface="Segoe UI"/>
               </a:rPr>
-              <a:t>Rs 141,709</a:t>
+              <a:t>Rs 144,878</a:t>
             </a:r>
           </a:p>
         </p:txBody>
@@ -7713,7 +7713,7 @@
                 </a:solidFill>
                 <a:latin typeface="Segoe UI"/>
               </a:rPr>
-              <a:t>+79.7%</a:t>
+              <a:t>+81.7%</a:t>
             </a:r>
           </a:p>
         </p:txBody>
@@ -7883,7 +7883,7 @@
                 </a:solidFill>
                 <a:latin typeface="Segoe UI"/>
               </a:rPr>
-              <a:t>214</a:t>
+              <a:t>222</a:t>
             </a:r>
           </a:p>
         </p:txBody>
@@ -7917,7 +7917,7 @@
                 </a:solidFill>
                 <a:latin typeface="Segoe UI"/>
               </a:rPr>
-              <a:t>Rs 164,502</a:t>
+              <a:t>Rs 170,460</a:t>
             </a:r>
           </a:p>
         </p:txBody>
@@ -7951,7 +7951,7 @@
                 </a:solidFill>
                 <a:latin typeface="Segoe UI"/>
               </a:rPr>
-              <a:t>Rs -181,575</a:t>
+              <a:t>Rs -174,647</a:t>
             </a:r>
           </a:p>
         </p:txBody>
@@ -7985,7 +7985,7 @@
                 </a:solidFill>
                 <a:latin typeface="Segoe UI"/>
               </a:rPr>
-              <a:t>-52.5%</a:t>
+              <a:t>-50.6%</a:t>
             </a:r>
           </a:p>
         </p:txBody>
@@ -8155,7 +8155,7 @@
                 </a:solidFill>
                 <a:latin typeface="Segoe UI"/>
               </a:rPr>
-              <a:t>1,059</a:t>
+              <a:t>1,051</a:t>
             </a:r>
           </a:p>
         </p:txBody>
@@ -8189,7 +8189,7 @@
                 </a:solidFill>
                 <a:latin typeface="Segoe UI"/>
               </a:rPr>
-              <a:t>Rs 84,688</a:t>
+              <a:t>Rs 84,112</a:t>
             </a:r>
           </a:p>
         </p:txBody>
@@ -8223,7 +8223,7 @@
                 </a:solidFill>
                 <a:latin typeface="Segoe UI"/>
               </a:rPr>
-              <a:t>Rs -27,312</a:t>
+              <a:t>Rs -27,888</a:t>
             </a:r>
           </a:p>
         </p:txBody>
@@ -8257,7 +8257,7 @@
                 </a:solidFill>
                 <a:latin typeface="Segoe UI"/>
               </a:rPr>
-              <a:t>-24.4%</a:t>
+              <a:t>-24.9%</a:t>
             </a:r>
           </a:p>
         </p:txBody>
@@ -8427,7 +8427,7 @@
                 </a:solidFill>
                 <a:latin typeface="Segoe UI"/>
               </a:rPr>
-              <a:t>1,244</a:t>
+              <a:t>1,226</a:t>
             </a:r>
           </a:p>
         </p:txBody>
@@ -8461,7 +8461,7 @@
                 </a:solidFill>
                 <a:latin typeface="Segoe UI"/>
               </a:rPr>
-              <a:t>Rs 62,195</a:t>
+              <a:t>Rs 61,320</a:t>
             </a:r>
           </a:p>
         </p:txBody>
@@ -8495,7 +8495,7 @@
                 </a:solidFill>
                 <a:latin typeface="Segoe UI"/>
               </a:rPr>
-              <a:t>Rs -60,305</a:t>
+              <a:t>Rs -61,180</a:t>
             </a:r>
           </a:p>
         </p:txBody>
@@ -8529,7 +8529,7 @@
                 </a:solidFill>
                 <a:latin typeface="Segoe UI"/>
               </a:rPr>
-              <a:t>-49.2%</a:t>
+              <a:t>-49.9%</a:t>
             </a:r>
           </a:p>
         </p:txBody>
@@ -8699,7 +8699,7 @@
                 </a:solidFill>
                 <a:latin typeface="Segoe UI"/>
               </a:rPr>
-              <a:t>2,190</a:t>
+              <a:t>2,105</a:t>
             </a:r>
           </a:p>
         </p:txBody>
@@ -8733,7 +8733,7 @@
                 </a:solidFill>
                 <a:latin typeface="Segoe UI"/>
               </a:rPr>
-              <a:t>Rs 54,750</a:t>
+              <a:t>Rs 52,625</a:t>
             </a:r>
           </a:p>
         </p:txBody>
@@ -8767,7 +8767,7 @@
                 </a:solidFill>
                 <a:latin typeface="Segoe UI"/>
               </a:rPr>
-              <a:t>Rs -35,250</a:t>
+              <a:t>Rs -37,375</a:t>
             </a:r>
           </a:p>
         </p:txBody>
@@ -8801,7 +8801,7 @@
                 </a:solidFill>
                 <a:latin typeface="Segoe UI"/>
               </a:rPr>
-              <a:t>-39.2%</a:t>
+              <a:t>-41.5%</a:t>
             </a:r>
           </a:p>
         </p:txBody>
@@ -8971,7 +8971,7 @@
                 </a:solidFill>
                 <a:latin typeface="Segoe UI"/>
               </a:rPr>
-              <a:t>713</a:t>
+              <a:t>731</a:t>
             </a:r>
           </a:p>
         </p:txBody>
@@ -9005,7 +9005,7 @@
                 </a:solidFill>
                 <a:latin typeface="Segoe UI"/>
               </a:rPr>
-              <a:t>Rs 42,780</a:t>
+              <a:t>Rs 43,860</a:t>
             </a:r>
           </a:p>
         </p:txBody>
@@ -9039,7 +9039,7 @@
                 </a:solidFill>
                 <a:latin typeface="Segoe UI"/>
               </a:rPr>
-              <a:t>Rs -48,420</a:t>
+              <a:t>Rs -47,340</a:t>
             </a:r>
           </a:p>
         </p:txBody>
@@ -9073,7 +9073,7 @@
                 </a:solidFill>
                 <a:latin typeface="Segoe UI"/>
               </a:rPr>
-              <a:t>-53.1%</a:t>
+              <a:t>-51.9%</a:t>
             </a:r>
           </a:p>
         </p:txBody>
@@ -9141,7 +9141,7 @@
                 </a:solidFill>
                 <a:latin typeface="Segoe UI"/>
               </a:rPr>
-              <a:t>Total Rs 1,886,220 | P&amp;L Rs 148,701 (+8.6%) | Sharpe -0.03 | Vol 19.41% | VaR95 -1.88%/day</a:t>
+              <a:t>Total Rs 1,940,136 | P&amp;L Rs 206,320 (+11.9%) | Sharpe 0.08 | Vol 19.93% | VaR95 -1.92%/day</a:t>
             </a:r>
           </a:p>
         </p:txBody>

--- a/docs/pmr_daily.pptx
+++ b/docs/pmr_daily.pptx
@@ -3197,7 +3197,7 @@
                 </a:solidFill>
                 <a:latin typeface="Segoe UI"/>
               </a:rPr>
-              <a:t>Monday, 21 Sep 2026 08:53 SGT</a:t>
+              <a:t>Tuesday, 22 Sep 2026 09:28 SGT</a:t>
             </a:r>
           </a:p>
         </p:txBody>
@@ -3265,7 +3265,7 @@
                 </a:solidFill>
                 <a:latin typeface="Segoe UI"/>
               </a:rPr>
-              <a:t>RAG 12R / 17A / 17G   |   56.5% above 200DMA   |   Portfolio Rs 1,940,136 (+11.9%)</a:t>
+              <a:t>RAG 12R / 16A / 18G   |   56.5% above 200DMA   |   Portfolio Rs 1,975,472 (+14.0%)</a:t>
             </a:r>
           </a:p>
         </p:txBody>
@@ -3461,7 +3461,7 @@
                 </a:solidFill>
                 <a:latin typeface="Segoe UI"/>
               </a:rPr>
-              <a:t>Crude Oil WTI</a:t>
+              <a:t>Solana</a:t>
             </a:r>
           </a:p>
         </p:txBody>
@@ -3491,11 +3491,11 @@
             <a:r>
               <a:rPr sz="900" b="0">
                 <a:solidFill>
-                  <a:srgbClr val="EF4444"/>
-                </a:solidFill>
-                <a:latin typeface="Segoe UI"/>
-              </a:rPr>
-              <a:t>CL=F · RED</a:t>
+                  <a:srgbClr val="F59E0B"/>
+                </a:solidFill>
+                <a:latin typeface="Segoe UI"/>
+              </a:rPr>
+              <a:t>SOL-USD · AMBER</a:t>
             </a:r>
           </a:p>
         </p:txBody>
@@ -3529,7 +3529,7 @@
                 </a:solidFill>
                 <a:latin typeface="Segoe UI"/>
               </a:rPr>
-              <a:t>+10.5%</a:t>
+              <a:t>+14.3%</a:t>
             </a:r>
           </a:p>
         </p:txBody>
@@ -3587,7 +3587,7 @@
                 </a:solidFill>
                 <a:latin typeface="Segoe UI"/>
               </a:rPr>
-              <a:t>Solana</a:t>
+              <a:t>Ethereum</a:t>
             </a:r>
           </a:p>
         </p:txBody>
@@ -3621,7 +3621,7 @@
                 </a:solidFill>
                 <a:latin typeface="Segoe UI"/>
               </a:rPr>
-              <a:t>SOL-USD · AMBER</a:t>
+              <a:t>ETH-USD · AMBER</a:t>
             </a:r>
           </a:p>
         </p:txBody>
@@ -3655,7 +3655,7 @@
                 </a:solidFill>
                 <a:latin typeface="Segoe UI"/>
               </a:rPr>
-              <a:t>+9.2%</a:t>
+              <a:t>+11.4%</a:t>
             </a:r>
           </a:p>
         </p:txBody>
@@ -3713,7 +3713,7 @@
                 </a:solidFill>
                 <a:latin typeface="Segoe UI"/>
               </a:rPr>
-              <a:t>Ethereum</a:t>
+              <a:t>Bitcoin</a:t>
             </a:r>
           </a:p>
         </p:txBody>
@@ -3743,11 +3743,11 @@
             <a:r>
               <a:rPr sz="900" b="0">
                 <a:solidFill>
-                  <a:srgbClr val="F59E0B"/>
-                </a:solidFill>
-                <a:latin typeface="Segoe UI"/>
-              </a:rPr>
-              <a:t>ETH-USD · AMBER</a:t>
+                  <a:srgbClr val="22C55E"/>
+                </a:solidFill>
+                <a:latin typeface="Segoe UI"/>
+              </a:rPr>
+              <a:t>BTC-USD · GREEN</a:t>
             </a:r>
           </a:p>
         </p:txBody>
@@ -3839,7 +3839,7 @@
                 </a:solidFill>
                 <a:latin typeface="Segoe UI"/>
               </a:rPr>
-              <a:t>Apple</a:t>
+              <a:t>Crude Oil WTI</a:t>
             </a:r>
           </a:p>
         </p:txBody>
@@ -3869,11 +3869,11 @@
             <a:r>
               <a:rPr sz="900" b="0">
                 <a:solidFill>
-                  <a:srgbClr val="22C55E"/>
-                </a:solidFill>
-                <a:latin typeface="Segoe UI"/>
-              </a:rPr>
-              <a:t>AAPL · GREEN</a:t>
+                  <a:srgbClr val="EF4444"/>
+                </a:solidFill>
+                <a:latin typeface="Segoe UI"/>
+              </a:rPr>
+              <a:t>CL=F · RED</a:t>
             </a:r>
           </a:p>
         </p:txBody>
@@ -3907,7 +3907,7 @@
                 </a:solidFill>
                 <a:latin typeface="Segoe UI"/>
               </a:rPr>
-              <a:t>+6.1%</a:t>
+              <a:t>+8.2%</a:t>
             </a:r>
           </a:p>
         </p:txBody>
@@ -3965,7 +3965,7 @@
                 </a:solidFill>
                 <a:latin typeface="Segoe UI"/>
               </a:rPr>
-              <a:t>Bharti Airtel</a:t>
+              <a:t>Apple</a:t>
             </a:r>
           </a:p>
         </p:txBody>
@@ -3999,7 +3999,7 @@
                 </a:solidFill>
                 <a:latin typeface="Segoe UI"/>
               </a:rPr>
-              <a:t>BHARTIARTL.NS · GREEN</a:t>
+              <a:t>AAPL · GREEN</a:t>
             </a:r>
           </a:p>
         </p:txBody>
@@ -4033,7 +4033,7 @@
                 </a:solidFill>
                 <a:latin typeface="Segoe UI"/>
               </a:rPr>
-              <a:t>+4.5%</a:t>
+              <a:t>+6.1%</a:t>
             </a:r>
           </a:p>
         </p:txBody>
@@ -5103,7 +5103,7 @@
                 </a:solidFill>
                 <a:latin typeface="Segoe UI"/>
               </a:rPr>
-              <a:t>Bitcoin</a:t>
+              <a:t>Copper</a:t>
             </a:r>
           </a:p>
         </p:txBody>
@@ -5171,7 +5171,7 @@
                 </a:solidFill>
                 <a:latin typeface="Segoe UI"/>
               </a:rPr>
-              <a:t>92%</a:t>
+              <a:t>95%</a:t>
             </a:r>
           </a:p>
         </p:txBody>
@@ -5239,7 +5239,7 @@
                 </a:solidFill>
                 <a:latin typeface="Segoe UI"/>
               </a:rPr>
-              <a:t>Ethereum</a:t>
+              <a:t>US Technology</a:t>
             </a:r>
           </a:p>
         </p:txBody>
@@ -5307,7 +5307,7 @@
                 </a:solidFill>
                 <a:latin typeface="Segoe UI"/>
               </a:rPr>
-              <a:t>92%</a:t>
+              <a:t>95%</a:t>
             </a:r>
           </a:p>
         </p:txBody>
@@ -5375,7 +5375,7 @@
                 </a:solidFill>
                 <a:latin typeface="Segoe UI"/>
               </a:rPr>
-              <a:t>US Technology</a:t>
+              <a:t>US Energy</a:t>
             </a:r>
           </a:p>
         </p:txBody>
@@ -5443,7 +5443,7 @@
                 </a:solidFill>
                 <a:latin typeface="Segoe UI"/>
               </a:rPr>
-              <a:t>95%</a:t>
+              <a:t>83%</a:t>
             </a:r>
           </a:p>
         </p:txBody>
@@ -5477,7 +5477,7 @@
                 </a:solidFill>
                 <a:latin typeface="Segoe UI"/>
               </a:rPr>
-              <a:t>above 200DMA · golden cross (50&gt;200) · MACD bullish</a:t>
+              <a:t>above 200DMA · golden cross (50&gt;200) · MACD bearish</a:t>
             </a:r>
           </a:p>
         </p:txBody>
@@ -5511,7 +5511,7 @@
                 </a:solidFill>
                 <a:latin typeface="Segoe UI"/>
               </a:rPr>
-              <a:t>Copper</a:t>
+              <a:t>S&amp;P 500</a:t>
             </a:r>
           </a:p>
         </p:txBody>
@@ -5579,7 +5579,7 @@
                 </a:solidFill>
                 <a:latin typeface="Segoe UI"/>
               </a:rPr>
-              <a:t>95%</a:t>
+              <a:t>83%</a:t>
             </a:r>
           </a:p>
         </p:txBody>
@@ -5647,7 +5647,7 @@
                 </a:solidFill>
                 <a:latin typeface="Segoe UI"/>
               </a:rPr>
-              <a:t>US Energy</a:t>
+              <a:t>Microsoft</a:t>
             </a:r>
           </a:p>
         </p:txBody>
@@ -5715,7 +5715,7 @@
                 </a:solidFill>
                 <a:latin typeface="Segoe UI"/>
               </a:rPr>
-              <a:t>84%</a:t>
+              <a:t>83%</a:t>
             </a:r>
           </a:p>
         </p:txBody>
@@ -5783,7 +5783,7 @@
                 </a:solidFill>
                 <a:latin typeface="Segoe UI"/>
               </a:rPr>
-              <a:t>Apple</a:t>
+              <a:t>Nvidia</a:t>
             </a:r>
           </a:p>
         </p:txBody>
@@ -5851,7 +5851,7 @@
                 </a:solidFill>
                 <a:latin typeface="Segoe UI"/>
               </a:rPr>
-              <a:t>95%</a:t>
+              <a:t>94%</a:t>
             </a:r>
           </a:p>
         </p:txBody>
@@ -5919,7 +5919,7 @@
                 </a:solidFill>
                 <a:latin typeface="Segoe UI"/>
               </a:rPr>
-              <a:t>Microsoft</a:t>
+              <a:t>Apple</a:t>
             </a:r>
           </a:p>
         </p:txBody>
@@ -5987,7 +5987,7 @@
                 </a:solidFill>
                 <a:latin typeface="Segoe UI"/>
               </a:rPr>
-              <a:t>83%</a:t>
+              <a:t>82%</a:t>
             </a:r>
           </a:p>
         </p:txBody>
@@ -6021,7 +6021,7 @@
                 </a:solidFill>
                 <a:latin typeface="Segoe UI"/>
               </a:rPr>
-              <a:t>above 200DMA · golden cross (50&gt;200) · MACD bearish</a:t>
+              <a:t>above 200DMA · golden cross (50&gt;200) · MACD bullish</a:t>
             </a:r>
           </a:p>
         </p:txBody>
@@ -6055,7 +6055,7 @@
                 </a:solidFill>
                 <a:latin typeface="Segoe UI"/>
               </a:rPr>
-              <a:t>Nasdaq 100</a:t>
+              <a:t>Bitcoin</a:t>
             </a:r>
           </a:p>
         </p:txBody>
@@ -6089,7 +6089,7 @@
                 </a:solidFill>
                 <a:latin typeface="Segoe UI"/>
               </a:rPr>
-              <a:t>STRONG BUY</a:t>
+              <a:t>BUY</a:t>
             </a:r>
           </a:p>
         </p:txBody>
@@ -6123,7 +6123,7 @@
                 </a:solidFill>
                 <a:latin typeface="Segoe UI"/>
               </a:rPr>
-              <a:t>94%</a:t>
+              <a:t>92%</a:t>
             </a:r>
           </a:p>
         </p:txBody>
@@ -6191,7 +6191,7 @@
                 </a:solidFill>
                 <a:latin typeface="Segoe UI"/>
               </a:rPr>
-              <a:t>Nvidia</a:t>
+              <a:t>Ethereum</a:t>
             </a:r>
           </a:p>
         </p:txBody>
@@ -6225,7 +6225,7 @@
                 </a:solidFill>
                 <a:latin typeface="Segoe UI"/>
               </a:rPr>
-              <a:t>STRONG BUY</a:t>
+              <a:t>BUY</a:t>
             </a:r>
           </a:p>
         </p:txBody>
@@ -6259,7 +6259,7 @@
                 </a:solidFill>
                 <a:latin typeface="Segoe UI"/>
               </a:rPr>
-              <a:t>94%</a:t>
+              <a:t>86%</a:t>
             </a:r>
           </a:p>
         </p:txBody>
@@ -6327,7 +6327,7 @@
                 </a:solidFill>
                 <a:latin typeface="Segoe UI"/>
               </a:rPr>
-              <a:t>S&amp;P 500</a:t>
+              <a:t>Nasdaq 100</a:t>
             </a:r>
           </a:p>
         </p:txBody>
@@ -6361,7 +6361,7 @@
                 </a:solidFill>
                 <a:latin typeface="Segoe UI"/>
               </a:rPr>
-              <a:t>STRONG BUY</a:t>
+              <a:t>BUY</a:t>
             </a:r>
           </a:p>
         </p:txBody>
@@ -6395,7 +6395,7 @@
                 </a:solidFill>
                 <a:latin typeface="Segoe UI"/>
               </a:rPr>
-              <a:t>80%</a:t>
+              <a:t>90%</a:t>
             </a:r>
           </a:p>
         </p:txBody>
@@ -6531,7 +6531,7 @@
                 </a:solidFill>
                 <a:latin typeface="Segoe UI"/>
               </a:rPr>
-              <a:t>67%</a:t>
+              <a:t>68%</a:t>
             </a:r>
           </a:p>
         </p:txBody>
@@ -6659,7 +6659,7 @@
                 </a:solidFill>
                 <a:latin typeface="Segoe UI"/>
               </a:rPr>
-              <a:t>Base currency INR · USD/INR 95.86</a:t>
+              <a:t>Base currency INR · USD/INR 95.81</a:t>
             </a:r>
           </a:p>
         </p:txBody>
@@ -7067,7 +7067,7 @@
                 </a:solidFill>
                 <a:latin typeface="Segoe UI"/>
               </a:rPr>
-              <a:t>81,670</a:t>
+              <a:t>85,661</a:t>
             </a:r>
           </a:p>
         </p:txBody>
@@ -7101,7 +7101,7 @@
                 </a:solidFill>
                 <a:latin typeface="Segoe UI"/>
               </a:rPr>
-              <a:t>Rs 782,914</a:t>
+              <a:t>Rs 820,671</a:t>
             </a:r>
           </a:p>
         </p:txBody>
@@ -7135,7 +7135,7 @@
                 </a:solidFill>
                 <a:latin typeface="Segoe UI"/>
               </a:rPr>
-              <a:t>Rs 207,736</a:t>
+              <a:t>Rs 245,841</a:t>
             </a:r>
           </a:p>
         </p:txBody>
@@ -7169,7 +7169,7 @@
                 </a:solidFill>
                 <a:latin typeface="Segoe UI"/>
               </a:rPr>
-              <a:t>+36.1%</a:t>
+              <a:t>+42.8%</a:t>
             </a:r>
           </a:p>
         </p:txBody>
@@ -7203,7 +7203,7 @@
                 </a:solidFill>
                 <a:latin typeface="Segoe UI"/>
               </a:rPr>
-              <a:t>+0.5%</a:t>
+              <a:t>+5.6%</a:t>
             </a:r>
           </a:p>
         </p:txBody>
@@ -7339,7 +7339,7 @@
                 </a:solidFill>
                 <a:latin typeface="Segoe UI"/>
               </a:rPr>
-              <a:t>4,409</a:t>
+              <a:t>4,389</a:t>
             </a:r>
           </a:p>
         </p:txBody>
@@ -7373,7 +7373,7 @@
                 </a:solidFill>
                 <a:latin typeface="Segoe UI"/>
               </a:rPr>
-              <a:t>Rs 422,622</a:t>
+              <a:t>Rs 420,498</a:t>
             </a:r>
           </a:p>
         </p:txBody>
@@ -7407,7 +7407,7 @@
                 </a:solidFill>
                 <a:latin typeface="Segoe UI"/>
               </a:rPr>
-              <a:t>Rs 202,137</a:t>
+              <a:t>Rs 200,146</a:t>
             </a:r>
           </a:p>
         </p:txBody>
@@ -7441,7 +7441,7 @@
                 </a:solidFill>
                 <a:latin typeface="Segoe UI"/>
               </a:rPr>
-              <a:t>+91.7%</a:t>
+              <a:t>+90.8%</a:t>
             </a:r>
           </a:p>
         </p:txBody>
@@ -7645,7 +7645,7 @@
                 </a:solidFill>
                 <a:latin typeface="Segoe UI"/>
               </a:rPr>
-              <a:t>Rs 322,224</a:t>
+              <a:t>Rs 322,029</a:t>
             </a:r>
           </a:p>
         </p:txBody>
@@ -7679,7 +7679,7 @@
                 </a:solidFill>
                 <a:latin typeface="Segoe UI"/>
               </a:rPr>
-              <a:t>Rs 144,878</a:t>
+              <a:t>Rs 144,790</a:t>
             </a:r>
           </a:p>
         </p:txBody>
@@ -7917,7 +7917,7 @@
                 </a:solidFill>
                 <a:latin typeface="Segoe UI"/>
               </a:rPr>
-              <a:t>Rs 170,460</a:t>
+              <a:t>Rs 170,357</a:t>
             </a:r>
           </a:p>
         </p:txBody>
@@ -7951,7 +7951,7 @@
                 </a:solidFill>
                 <a:latin typeface="Segoe UI"/>
               </a:rPr>
-              <a:t>Rs -174,647</a:t>
+              <a:t>Rs -174,541</a:t>
             </a:r>
           </a:p>
         </p:txBody>
@@ -9141,7 +9141,7 @@
                 </a:solidFill>
                 <a:latin typeface="Segoe UI"/>
               </a:rPr>
-              <a:t>Total Rs 1,940,136 | P&amp;L Rs 206,320 (+11.9%) | Sharpe 0.08 | Vol 19.93% | VaR95 -1.92%/day</a:t>
+              <a:t>Total Rs 1,975,472 | P&amp;L Rs 242,453 (+14.0%) | Sharpe 0.08 | Vol 20.29% | VaR95 -1.93%/day</a:t>
             </a:r>
           </a:p>
         </p:txBody>

--- a/docs/pmr_daily.pptx
+++ b/docs/pmr_daily.pptx
@@ -3197,7 +3197,7 @@
                 </a:solidFill>
                 <a:latin typeface="Segoe UI"/>
               </a:rPr>
-              <a:t>Tuesday, 22 Sep 2026 09:28 SGT</a:t>
+              <a:t>Wednesday, 23 Sep 2026 09:17 SGT</a:t>
             </a:r>
           </a:p>
         </p:txBody>
@@ -3265,7 +3265,7 @@
                 </a:solidFill>
                 <a:latin typeface="Segoe UI"/>
               </a:rPr>
-              <a:t>RAG 12R / 16A / 18G   |   56.5% above 200DMA   |   Portfolio Rs 1,975,472 (+14.0%)</a:t>
+              <a:t>RAG 9R / 20A / 17G   |   56.5% above 200DMA   |   Portfolio Rs 1,986,445 (+14.8%)</a:t>
             </a:r>
           </a:p>
         </p:txBody>
@@ -3529,7 +3529,7 @@
                 </a:solidFill>
                 <a:latin typeface="Segoe UI"/>
               </a:rPr>
-              <a:t>+14.3%</a:t>
+              <a:t>+15.5%</a:t>
             </a:r>
           </a:p>
         </p:txBody>
@@ -3655,7 +3655,7 @@
                 </a:solidFill>
                 <a:latin typeface="Segoe UI"/>
               </a:rPr>
-              <a:t>+11.4%</a:t>
+              <a:t>+12.2%</a:t>
             </a:r>
           </a:p>
         </p:txBody>
@@ -3781,7 +3781,7 @@
                 </a:solidFill>
                 <a:latin typeface="Segoe UI"/>
               </a:rPr>
-              <a:t>+9.1%</a:t>
+              <a:t>+10.3%</a:t>
             </a:r>
           </a:p>
         </p:txBody>
@@ -3839,7 +3839,7 @@
                 </a:solidFill>
                 <a:latin typeface="Segoe UI"/>
               </a:rPr>
-              <a:t>Crude Oil WTI</a:t>
+              <a:t>Natural Gas</a:t>
             </a:r>
           </a:p>
         </p:txBody>
@@ -3873,7 +3873,7 @@
                 </a:solidFill>
                 <a:latin typeface="Segoe UI"/>
               </a:rPr>
-              <a:t>CL=F · RED</a:t>
+              <a:t>NG=F · RED</a:t>
             </a:r>
           </a:p>
         </p:txBody>
@@ -3907,7 +3907,7 @@
                 </a:solidFill>
                 <a:latin typeface="Segoe UI"/>
               </a:rPr>
-              <a:t>+8.2%</a:t>
+              <a:t>+8.0%</a:t>
             </a:r>
           </a:p>
         </p:txBody>
@@ -4033,7 +4033,7 @@
                 </a:solidFill>
                 <a:latin typeface="Segoe UI"/>
               </a:rPr>
-              <a:t>+6.1%</a:t>
+              <a:t>+7.0%</a:t>
             </a:r>
           </a:p>
         </p:txBody>
@@ -4251,7 +4251,7 @@
                 </a:solidFill>
                 <a:latin typeface="Segoe UI"/>
               </a:rPr>
-              <a:t>ICICI Bank</a:t>
+              <a:t>Infosys</a:t>
             </a:r>
           </a:p>
         </p:txBody>
@@ -4281,11 +4281,11 @@
             <a:r>
               <a:rPr sz="900" b="0">
                 <a:solidFill>
-                  <a:srgbClr val="F59E0B"/>
-                </a:solidFill>
-                <a:latin typeface="Segoe UI"/>
-              </a:rPr>
-              <a:t>ICICIBANK.NS · AMBER</a:t>
+                  <a:srgbClr val="EF4444"/>
+                </a:solidFill>
+                <a:latin typeface="Segoe UI"/>
+              </a:rPr>
+              <a:t>INFY.NS · RED</a:t>
             </a:r>
           </a:p>
         </p:txBody>
@@ -4319,7 +4319,7 @@
                 </a:solidFill>
                 <a:latin typeface="Segoe UI"/>
               </a:rPr>
-              <a:t>-7.9%</a:t>
+              <a:t>-9.2%</a:t>
             </a:r>
           </a:p>
         </p:txBody>
@@ -4377,7 +4377,7 @@
                 </a:solidFill>
                 <a:latin typeface="Segoe UI"/>
               </a:rPr>
-              <a:t>NIFTY IT</a:t>
+              <a:t>ICICI Bank</a:t>
             </a:r>
           </a:p>
         </p:txBody>
@@ -4407,11 +4407,11 @@
             <a:r>
               <a:rPr sz="900" b="0">
                 <a:solidFill>
-                  <a:srgbClr val="EF4444"/>
-                </a:solidFill>
-                <a:latin typeface="Segoe UI"/>
-              </a:rPr>
-              <a:t>^CNXIT · RED</a:t>
+                  <a:srgbClr val="F59E0B"/>
+                </a:solidFill>
+                <a:latin typeface="Segoe UI"/>
+              </a:rPr>
+              <a:t>ICICIBANK.NS · AMBER</a:t>
             </a:r>
           </a:p>
         </p:txBody>
@@ -4445,7 +4445,7 @@
                 </a:solidFill>
                 <a:latin typeface="Segoe UI"/>
               </a:rPr>
-              <a:t>-7.5%</a:t>
+              <a:t>-7.9%</a:t>
             </a:r>
           </a:p>
         </p:txBody>
@@ -4503,7 +4503,7 @@
                 </a:solidFill>
                 <a:latin typeface="Segoe UI"/>
               </a:rPr>
-              <a:t>Infosys</a:t>
+              <a:t>NIFTY IT</a:t>
             </a:r>
           </a:p>
         </p:txBody>
@@ -4537,7 +4537,7 @@
                 </a:solidFill>
                 <a:latin typeface="Segoe UI"/>
               </a:rPr>
-              <a:t>INFY.NS · RED</a:t>
+              <a:t>^CNXIT · RED</a:t>
             </a:r>
           </a:p>
         </p:txBody>
@@ -4571,7 +4571,7 @@
                 </a:solidFill>
                 <a:latin typeface="Segoe UI"/>
               </a:rPr>
-              <a:t>-7.3%</a:t>
+              <a:t>-7.6%</a:t>
             </a:r>
           </a:p>
         </p:txBody>
@@ -4697,7 +4697,7 @@
                 </a:solidFill>
                 <a:latin typeface="Segoe UI"/>
               </a:rPr>
-              <a:t>-4.0%</a:t>
+              <a:t>-2.9%</a:t>
             </a:r>
           </a:p>
         </p:txBody>
@@ -4967,7 +4967,7 @@
                 </a:solidFill>
                 <a:latin typeface="Segoe UI"/>
               </a:rPr>
-              <a:t>Solana</a:t>
+              <a:t>Copper</a:t>
             </a:r>
           </a:p>
         </p:txBody>
@@ -5035,7 +5035,7 @@
                 </a:solidFill>
                 <a:latin typeface="Segoe UI"/>
               </a:rPr>
-              <a:t>92%</a:t>
+              <a:t>95%</a:t>
             </a:r>
           </a:p>
         </p:txBody>
@@ -5103,7 +5103,7 @@
                 </a:solidFill>
                 <a:latin typeface="Segoe UI"/>
               </a:rPr>
-              <a:t>Copper</a:t>
+              <a:t>Microsoft</a:t>
             </a:r>
           </a:p>
         </p:txBody>
@@ -5171,7 +5171,7 @@
                 </a:solidFill>
                 <a:latin typeface="Segoe UI"/>
               </a:rPr>
-              <a:t>95%</a:t>
+              <a:t>84%</a:t>
             </a:r>
           </a:p>
         </p:txBody>
@@ -5205,7 +5205,7 @@
                 </a:solidFill>
                 <a:latin typeface="Segoe UI"/>
               </a:rPr>
-              <a:t>above 200DMA · golden cross (50&gt;200) · MACD bullish</a:t>
+              <a:t>above 200DMA · golden cross (50&gt;200) · MACD bearish</a:t>
             </a:r>
           </a:p>
         </p:txBody>
@@ -5239,7 +5239,7 @@
                 </a:solidFill>
                 <a:latin typeface="Segoe UI"/>
               </a:rPr>
-              <a:t>US Technology</a:t>
+              <a:t>Nvidia</a:t>
             </a:r>
           </a:p>
         </p:txBody>
@@ -5375,7 +5375,7 @@
                 </a:solidFill>
                 <a:latin typeface="Segoe UI"/>
               </a:rPr>
-              <a:t>US Energy</a:t>
+              <a:t>S&amp;P 500</a:t>
             </a:r>
           </a:p>
         </p:txBody>
@@ -5443,7 +5443,7 @@
                 </a:solidFill>
                 <a:latin typeface="Segoe UI"/>
               </a:rPr>
-              <a:t>83%</a:t>
+              <a:t>82%</a:t>
             </a:r>
           </a:p>
         </p:txBody>
@@ -5477,7 +5477,7 @@
                 </a:solidFill>
                 <a:latin typeface="Segoe UI"/>
               </a:rPr>
-              <a:t>above 200DMA · golden cross (50&gt;200) · MACD bearish</a:t>
+              <a:t>above 200DMA · golden cross (50&gt;200) · MACD bullish</a:t>
             </a:r>
           </a:p>
         </p:txBody>
@@ -5511,7 +5511,7 @@
                 </a:solidFill>
                 <a:latin typeface="Segoe UI"/>
               </a:rPr>
-              <a:t>S&amp;P 500</a:t>
+              <a:t>Bitcoin</a:t>
             </a:r>
           </a:p>
         </p:txBody>
@@ -5545,7 +5545,7 @@
                 </a:solidFill>
                 <a:latin typeface="Segoe UI"/>
               </a:rPr>
-              <a:t>STRONG BUY</a:t>
+              <a:t>BUY</a:t>
             </a:r>
           </a:p>
         </p:txBody>
@@ -5579,7 +5579,7 @@
                 </a:solidFill>
                 <a:latin typeface="Segoe UI"/>
               </a:rPr>
-              <a:t>83%</a:t>
+              <a:t>92%</a:t>
             </a:r>
           </a:p>
         </p:txBody>
@@ -5647,7 +5647,7 @@
                 </a:solidFill>
                 <a:latin typeface="Segoe UI"/>
               </a:rPr>
-              <a:t>Microsoft</a:t>
+              <a:t>Solana</a:t>
             </a:r>
           </a:p>
         </p:txBody>
@@ -5681,7 +5681,7 @@
                 </a:solidFill>
                 <a:latin typeface="Segoe UI"/>
               </a:rPr>
-              <a:t>STRONG BUY</a:t>
+              <a:t>BUY</a:t>
             </a:r>
           </a:p>
         </p:txBody>
@@ -5715,7 +5715,7 @@
                 </a:solidFill>
                 <a:latin typeface="Segoe UI"/>
               </a:rPr>
-              <a:t>83%</a:t>
+              <a:t>86%</a:t>
             </a:r>
           </a:p>
         </p:txBody>
@@ -5749,7 +5749,7 @@
                 </a:solidFill>
                 <a:latin typeface="Segoe UI"/>
               </a:rPr>
-              <a:t>above 200DMA · golden cross (50&gt;200) · MACD bearish</a:t>
+              <a:t>above 200DMA · golden cross (50&gt;200) · MACD bullish</a:t>
             </a:r>
           </a:p>
         </p:txBody>
@@ -5783,7 +5783,7 @@
                 </a:solidFill>
                 <a:latin typeface="Segoe UI"/>
               </a:rPr>
-              <a:t>Nvidia</a:t>
+              <a:t>US Technology</a:t>
             </a:r>
           </a:p>
         </p:txBody>
@@ -5817,7 +5817,7 @@
                 </a:solidFill>
                 <a:latin typeface="Segoe UI"/>
               </a:rPr>
-              <a:t>STRONG BUY</a:t>
+              <a:t>BUY</a:t>
             </a:r>
           </a:p>
         </p:txBody>
@@ -5851,7 +5851,7 @@
                 </a:solidFill>
                 <a:latin typeface="Segoe UI"/>
               </a:rPr>
-              <a:t>94%</a:t>
+              <a:t>92%</a:t>
             </a:r>
           </a:p>
         </p:txBody>
@@ -5919,7 +5919,7 @@
                 </a:solidFill>
                 <a:latin typeface="Segoe UI"/>
               </a:rPr>
-              <a:t>Apple</a:t>
+              <a:t>Ethereum</a:t>
             </a:r>
           </a:p>
         </p:txBody>
@@ -5953,7 +5953,7 @@
                 </a:solidFill>
                 <a:latin typeface="Segoe UI"/>
               </a:rPr>
-              <a:t>STRONG BUY</a:t>
+              <a:t>BUY</a:t>
             </a:r>
           </a:p>
         </p:txBody>
@@ -5987,7 +5987,7 @@
                 </a:solidFill>
                 <a:latin typeface="Segoe UI"/>
               </a:rPr>
-              <a:t>82%</a:t>
+              <a:t>85%</a:t>
             </a:r>
           </a:p>
         </p:txBody>
@@ -6055,7 +6055,7 @@
                 </a:solidFill>
                 <a:latin typeface="Segoe UI"/>
               </a:rPr>
-              <a:t>Bitcoin</a:t>
+              <a:t>Nasdaq 100</a:t>
             </a:r>
           </a:p>
         </p:txBody>
@@ -6123,7 +6123,7 @@
                 </a:solidFill>
                 <a:latin typeface="Segoe UI"/>
               </a:rPr>
-              <a:t>92%</a:t>
+              <a:t>91%</a:t>
             </a:r>
           </a:p>
         </p:txBody>
@@ -6191,7 +6191,7 @@
                 </a:solidFill>
                 <a:latin typeface="Segoe UI"/>
               </a:rPr>
-              <a:t>Ethereum</a:t>
+              <a:t>Apple</a:t>
             </a:r>
           </a:p>
         </p:txBody>
@@ -6259,7 +6259,7 @@
                 </a:solidFill>
                 <a:latin typeface="Segoe UI"/>
               </a:rPr>
-              <a:t>86%</a:t>
+              <a:t>89%</a:t>
             </a:r>
           </a:p>
         </p:txBody>
@@ -6327,7 +6327,7 @@
                 </a:solidFill>
                 <a:latin typeface="Segoe UI"/>
               </a:rPr>
-              <a:t>Nasdaq 100</a:t>
+              <a:t>DAX</a:t>
             </a:r>
           </a:p>
         </p:txBody>
@@ -6531,7 +6531,7 @@
                 </a:solidFill>
                 <a:latin typeface="Segoe UI"/>
               </a:rPr>
-              <a:t>68%</a:t>
+              <a:t>66%</a:t>
             </a:r>
           </a:p>
         </p:txBody>
@@ -6659,7 +6659,7 @@
                 </a:solidFill>
                 <a:latin typeface="Segoe UI"/>
               </a:rPr>
-              <a:t>Base currency INR · USD/INR 95.81</a:t>
+              <a:t>Base currency INR · USD/INR 95.58</a:t>
             </a:r>
           </a:p>
         </p:txBody>
@@ -7067,7 +7067,7 @@
                 </a:solidFill>
                 <a:latin typeface="Segoe UI"/>
               </a:rPr>
-              <a:t>85,661</a:t>
+              <a:t>86,612</a:t>
             </a:r>
           </a:p>
         </p:txBody>
@@ -7101,7 +7101,7 @@
                 </a:solidFill>
                 <a:latin typeface="Segoe UI"/>
               </a:rPr>
-              <a:t>Rs 820,671</a:t>
+              <a:t>Rs 827,838</a:t>
             </a:r>
           </a:p>
         </p:txBody>
@@ -7135,7 +7135,7 @@
                 </a:solidFill>
                 <a:latin typeface="Segoe UI"/>
               </a:rPr>
-              <a:t>Rs 245,841</a:t>
+              <a:t>Rs 254,358</a:t>
             </a:r>
           </a:p>
         </p:txBody>
@@ -7169,7 +7169,7 @@
                 </a:solidFill>
                 <a:latin typeface="Segoe UI"/>
               </a:rPr>
-              <a:t>+42.8%</a:t>
+              <a:t>+44.4%</a:t>
             </a:r>
           </a:p>
         </p:txBody>
@@ -7203,7 +7203,7 @@
                 </a:solidFill>
                 <a:latin typeface="Segoe UI"/>
               </a:rPr>
-              <a:t>+5.6%</a:t>
+              <a:t>+0.0%</a:t>
             </a:r>
           </a:p>
         </p:txBody>
@@ -7339,7 +7339,7 @@
                 </a:solidFill>
                 <a:latin typeface="Segoe UI"/>
               </a:rPr>
-              <a:t>4,389</a:t>
+              <a:t>4,388</a:t>
             </a:r>
           </a:p>
         </p:txBody>
@@ -7373,7 +7373,7 @@
                 </a:solidFill>
                 <a:latin typeface="Segoe UI"/>
               </a:rPr>
-              <a:t>Rs 420,498</a:t>
+              <a:t>Rs 419,434</a:t>
             </a:r>
           </a:p>
         </p:txBody>
@@ -7407,7 +7407,7 @@
                 </a:solidFill>
                 <a:latin typeface="Segoe UI"/>
               </a:rPr>
-              <a:t>Rs 200,146</a:t>
+              <a:t>Rs 199,600</a:t>
             </a:r>
           </a:p>
         </p:txBody>
@@ -7611,7 +7611,7 @@
                 </a:solidFill>
                 <a:latin typeface="Segoe UI"/>
               </a:rPr>
-              <a:t>336</a:t>
+              <a:t>339</a:t>
             </a:r>
           </a:p>
         </p:txBody>
@@ -7645,7 +7645,7 @@
                 </a:solidFill>
                 <a:latin typeface="Segoe UI"/>
               </a:rPr>
-              <a:t>Rs 322,029</a:t>
+              <a:t>Rs 323,997</a:t>
             </a:r>
           </a:p>
         </p:txBody>
@@ -7679,7 +7679,7 @@
                 </a:solidFill>
                 <a:latin typeface="Segoe UI"/>
               </a:rPr>
-              <a:t>Rs 144,790</a:t>
+              <a:t>Rs 147,174</a:t>
             </a:r>
           </a:p>
         </p:txBody>
@@ -7713,7 +7713,7 @@
                 </a:solidFill>
                 <a:latin typeface="Segoe UI"/>
               </a:rPr>
-              <a:t>+81.7%</a:t>
+              <a:t>+83.2%</a:t>
             </a:r>
           </a:p>
         </p:txBody>
@@ -7883,7 +7883,7 @@
                 </a:solidFill>
                 <a:latin typeface="Segoe UI"/>
               </a:rPr>
-              <a:t>222</a:t>
+              <a:t>227</a:t>
             </a:r>
           </a:p>
         </p:txBody>
@@ -7917,7 +7917,7 @@
                 </a:solidFill>
                 <a:latin typeface="Segoe UI"/>
               </a:rPr>
-              <a:t>Rs 170,357</a:t>
+              <a:t>Rs 173,864</a:t>
             </a:r>
           </a:p>
         </p:txBody>
@@ -7951,7 +7951,7 @@
                 </a:solidFill>
                 <a:latin typeface="Segoe UI"/>
               </a:rPr>
-              <a:t>Rs -174,541</a:t>
+              <a:t>Rs -170,224</a:t>
             </a:r>
           </a:p>
         </p:txBody>
@@ -7985,7 +7985,7 @@
                 </a:solidFill>
                 <a:latin typeface="Segoe UI"/>
               </a:rPr>
-              <a:t>-50.6%</a:t>
+              <a:t>-49.5%</a:t>
             </a:r>
           </a:p>
         </p:txBody>
@@ -8155,7 +8155,7 @@
                 </a:solidFill>
                 <a:latin typeface="Segoe UI"/>
               </a:rPr>
-              <a:t>1,051</a:t>
+              <a:t>1,029</a:t>
             </a:r>
           </a:p>
         </p:txBody>
@@ -8189,7 +8189,7 @@
                 </a:solidFill>
                 <a:latin typeface="Segoe UI"/>
               </a:rPr>
-              <a:t>Rs 84,112</a:t>
+              <a:t>Rs 82,352</a:t>
             </a:r>
           </a:p>
         </p:txBody>
@@ -8223,7 +8223,7 @@
                 </a:solidFill>
                 <a:latin typeface="Segoe UI"/>
               </a:rPr>
-              <a:t>Rs -27,888</a:t>
+              <a:t>Rs -29,648</a:t>
             </a:r>
           </a:p>
         </p:txBody>
@@ -8257,7 +8257,7 @@
                 </a:solidFill>
                 <a:latin typeface="Segoe UI"/>
               </a:rPr>
-              <a:t>-24.9%</a:t>
+              <a:t>-26.5%</a:t>
             </a:r>
           </a:p>
         </p:txBody>
@@ -8427,7 +8427,7 @@
                 </a:solidFill>
                 <a:latin typeface="Segoe UI"/>
               </a:rPr>
-              <a:t>1,226</a:t>
+              <a:t>1,240</a:t>
             </a:r>
           </a:p>
         </p:txBody>
@@ -8461,7 +8461,7 @@
                 </a:solidFill>
                 <a:latin typeface="Segoe UI"/>
               </a:rPr>
-              <a:t>Rs 61,320</a:t>
+              <a:t>Rs 62,020</a:t>
             </a:r>
           </a:p>
         </p:txBody>
@@ -8495,7 +8495,7 @@
                 </a:solidFill>
                 <a:latin typeface="Segoe UI"/>
               </a:rPr>
-              <a:t>Rs -61,180</a:t>
+              <a:t>Rs -60,480</a:t>
             </a:r>
           </a:p>
         </p:txBody>
@@ -8529,7 +8529,7 @@
                 </a:solidFill>
                 <a:latin typeface="Segoe UI"/>
               </a:rPr>
-              <a:t>-49.9%</a:t>
+              <a:t>-49.4%</a:t>
             </a:r>
           </a:p>
         </p:txBody>
@@ -8971,7 +8971,7 @@
                 </a:solidFill>
                 <a:latin typeface="Segoe UI"/>
               </a:rPr>
-              <a:t>731</a:t>
+              <a:t>739</a:t>
             </a:r>
           </a:p>
         </p:txBody>
@@ -9005,7 +9005,7 @@
                 </a:solidFill>
                 <a:latin typeface="Segoe UI"/>
               </a:rPr>
-              <a:t>Rs 43,860</a:t>
+              <a:t>Rs 44,316</a:t>
             </a:r>
           </a:p>
         </p:txBody>
@@ -9039,7 +9039,7 @@
                 </a:solidFill>
                 <a:latin typeface="Segoe UI"/>
               </a:rPr>
-              <a:t>Rs -47,340</a:t>
+              <a:t>Rs -46,884</a:t>
             </a:r>
           </a:p>
         </p:txBody>
@@ -9073,7 +9073,7 @@
                 </a:solidFill>
                 <a:latin typeface="Segoe UI"/>
               </a:rPr>
-              <a:t>-51.9%</a:t>
+              <a:t>-51.4%</a:t>
             </a:r>
           </a:p>
         </p:txBody>
@@ -9141,7 +9141,7 @@
                 </a:solidFill>
                 <a:latin typeface="Segoe UI"/>
               </a:rPr>
-              <a:t>Total Rs 1,975,472 | P&amp;L Rs 242,453 (+14.0%) | Sharpe 0.08 | Vol 20.29% | VaR95 -1.93%/day</a:t>
+              <a:t>Total Rs 1,986,445 | P&amp;L Rs 256,520 (+14.8%) | Sharpe 0.09 | Vol 20.41% | VaR95 -1.93%/day</a:t>
             </a:r>
           </a:p>
         </p:txBody>

--- a/docs/pmr_daily.pptx
+++ b/docs/pmr_daily.pptx
@@ -3197,7 +3197,7 @@
                 </a:solidFill>
                 <a:latin typeface="Segoe UI"/>
               </a:rPr>
-              <a:t>Wednesday, 23 Sep 2026 09:17 SGT</a:t>
+              <a:t>Thursday, 24 Sep 2026 09:09 SGT</a:t>
             </a:r>
           </a:p>
         </p:txBody>
@@ -3265,7 +3265,7 @@
                 </a:solidFill>
                 <a:latin typeface="Segoe UI"/>
               </a:rPr>
-              <a:t>RAG 9R / 20A / 17G   |   56.5% above 200DMA   |   Portfolio Rs 1,986,445 (+14.8%)</a:t>
+              <a:t>RAG 10R / 21A / 15G   |   56.5% above 200DMA   |   Portfolio Rs 1,962,263 (+13.3%)</a:t>
             </a:r>
           </a:p>
         </p:txBody>
@@ -3529,7 +3529,7 @@
                 </a:solidFill>
                 <a:latin typeface="Segoe UI"/>
               </a:rPr>
-              <a:t>+15.5%</a:t>
+              <a:t>+11.9%</a:t>
             </a:r>
           </a:p>
         </p:txBody>
@@ -3655,7 +3655,7 @@
                 </a:solidFill>
                 <a:latin typeface="Segoe UI"/>
               </a:rPr>
-              <a:t>+12.2%</a:t>
+              <a:t>+8.7%</a:t>
             </a:r>
           </a:p>
         </p:txBody>
@@ -3713,7 +3713,7 @@
                 </a:solidFill>
                 <a:latin typeface="Segoe UI"/>
               </a:rPr>
-              <a:t>Bitcoin</a:t>
+              <a:t>Natural Gas</a:t>
             </a:r>
           </a:p>
         </p:txBody>
@@ -3743,11 +3743,11 @@
             <a:r>
               <a:rPr sz="900" b="0">
                 <a:solidFill>
-                  <a:srgbClr val="22C55E"/>
-                </a:solidFill>
-                <a:latin typeface="Segoe UI"/>
-              </a:rPr>
-              <a:t>BTC-USD · GREEN</a:t>
+                  <a:srgbClr val="EF4444"/>
+                </a:solidFill>
+                <a:latin typeface="Segoe UI"/>
+              </a:rPr>
+              <a:t>NG=F · RED</a:t>
             </a:r>
           </a:p>
         </p:txBody>
@@ -3781,7 +3781,7 @@
                 </a:solidFill>
                 <a:latin typeface="Segoe UI"/>
               </a:rPr>
-              <a:t>+10.3%</a:t>
+              <a:t>+8.5%</a:t>
             </a:r>
           </a:p>
         </p:txBody>
@@ -3839,7 +3839,7 @@
                 </a:solidFill>
                 <a:latin typeface="Segoe UI"/>
               </a:rPr>
-              <a:t>Natural Gas</a:t>
+              <a:t>Bitcoin</a:t>
             </a:r>
           </a:p>
         </p:txBody>
@@ -3869,11 +3869,11 @@
             <a:r>
               <a:rPr sz="900" b="0">
                 <a:solidFill>
-                  <a:srgbClr val="EF4444"/>
-                </a:solidFill>
-                <a:latin typeface="Segoe UI"/>
-              </a:rPr>
-              <a:t>NG=F · RED</a:t>
+                  <a:srgbClr val="22C55E"/>
+                </a:solidFill>
+                <a:latin typeface="Segoe UI"/>
+              </a:rPr>
+              <a:t>BTC-USD · GREEN</a:t>
             </a:r>
           </a:p>
         </p:txBody>
@@ -3907,7 +3907,7 @@
                 </a:solidFill>
                 <a:latin typeface="Segoe UI"/>
               </a:rPr>
-              <a:t>+8.0%</a:t>
+              <a:t>+7.2%</a:t>
             </a:r>
           </a:p>
         </p:txBody>
@@ -4033,7 +4033,7 @@
                 </a:solidFill>
                 <a:latin typeface="Segoe UI"/>
               </a:rPr>
-              <a:t>+7.0%</a:t>
+              <a:t>+7.2%</a:t>
             </a:r>
           </a:p>
         </p:txBody>
@@ -4193,7 +4193,7 @@
                 </a:solidFill>
                 <a:latin typeface="Segoe UI"/>
               </a:rPr>
-              <a:t>-12.3%</a:t>
+              <a:t>-12.9%</a:t>
             </a:r>
           </a:p>
         </p:txBody>
@@ -4319,7 +4319,7 @@
                 </a:solidFill>
                 <a:latin typeface="Segoe UI"/>
               </a:rPr>
-              <a:t>-9.2%</a:t>
+              <a:t>-10.0%</a:t>
             </a:r>
           </a:p>
         </p:txBody>
@@ -4445,7 +4445,7 @@
                 </a:solidFill>
                 <a:latin typeface="Segoe UI"/>
               </a:rPr>
-              <a:t>-7.9%</a:t>
+              <a:t>-7.8%</a:t>
             </a:r>
           </a:p>
         </p:txBody>
@@ -4629,7 +4629,7 @@
                 </a:solidFill>
                 <a:latin typeface="Segoe UI"/>
               </a:rPr>
-              <a:t>Reliance</a:t>
+              <a:t>US Financials</a:t>
             </a:r>
           </a:p>
         </p:txBody>
@@ -4663,7 +4663,7 @@
                 </a:solidFill>
                 <a:latin typeface="Segoe UI"/>
               </a:rPr>
-              <a:t>RELIANCE.NS · AMBER</a:t>
+              <a:t>XLF · AMBER</a:t>
             </a:r>
           </a:p>
         </p:txBody>
@@ -4697,7 +4697,7 @@
                 </a:solidFill>
                 <a:latin typeface="Segoe UI"/>
               </a:rPr>
-              <a:t>-2.9%</a:t>
+              <a:t>-4.7%</a:t>
             </a:r>
           </a:p>
         </p:txBody>
@@ -5103,7 +5103,7 @@
                 </a:solidFill>
                 <a:latin typeface="Segoe UI"/>
               </a:rPr>
-              <a:t>Microsoft</a:t>
+              <a:t>Solana</a:t>
             </a:r>
           </a:p>
         </p:txBody>
@@ -5171,7 +5171,7 @@
                 </a:solidFill>
                 <a:latin typeface="Segoe UI"/>
               </a:rPr>
-              <a:t>84%</a:t>
+              <a:t>91%</a:t>
             </a:r>
           </a:p>
         </p:txBody>
@@ -5205,7 +5205,7 @@
                 </a:solidFill>
                 <a:latin typeface="Segoe UI"/>
               </a:rPr>
-              <a:t>above 200DMA · golden cross (50&gt;200) · MACD bearish</a:t>
+              <a:t>above 200DMA · golden cross (50&gt;200) · MACD bullish</a:t>
             </a:r>
           </a:p>
         </p:txBody>
@@ -5239,7 +5239,7 @@
                 </a:solidFill>
                 <a:latin typeface="Segoe UI"/>
               </a:rPr>
-              <a:t>Nvidia</a:t>
+              <a:t>Bitcoin</a:t>
             </a:r>
           </a:p>
         </p:txBody>
@@ -5375,7 +5375,7 @@
                 </a:solidFill>
                 <a:latin typeface="Segoe UI"/>
               </a:rPr>
-              <a:t>S&amp;P 500</a:t>
+              <a:t>Ethereum</a:t>
             </a:r>
           </a:p>
         </p:txBody>
@@ -5443,7 +5443,7 @@
                 </a:solidFill>
                 <a:latin typeface="Segoe UI"/>
               </a:rPr>
-              <a:t>82%</a:t>
+              <a:t>90%</a:t>
             </a:r>
           </a:p>
         </p:txBody>
@@ -5511,7 +5511,7 @@
                 </a:solidFill>
                 <a:latin typeface="Segoe UI"/>
               </a:rPr>
-              <a:t>Bitcoin</a:t>
+              <a:t>Microsoft</a:t>
             </a:r>
           </a:p>
         </p:txBody>
@@ -5545,7 +5545,7 @@
                 </a:solidFill>
                 <a:latin typeface="Segoe UI"/>
               </a:rPr>
-              <a:t>BUY</a:t>
+              <a:t>STRONG BUY</a:t>
             </a:r>
           </a:p>
         </p:txBody>
@@ -5579,7 +5579,7 @@
                 </a:solidFill>
                 <a:latin typeface="Segoe UI"/>
               </a:rPr>
-              <a:t>92%</a:t>
+              <a:t>84%</a:t>
             </a:r>
           </a:p>
         </p:txBody>
@@ -5613,7 +5613,7 @@
                 </a:solidFill>
                 <a:latin typeface="Segoe UI"/>
               </a:rPr>
-              <a:t>above 200DMA · golden cross (50&gt;200) · MACD bullish</a:t>
+              <a:t>above 200DMA · golden cross (50&gt;200) · MACD bearish</a:t>
             </a:r>
           </a:p>
         </p:txBody>
@@ -5647,7 +5647,7 @@
                 </a:solidFill>
                 <a:latin typeface="Segoe UI"/>
               </a:rPr>
-              <a:t>Solana</a:t>
+              <a:t>Nvidia</a:t>
             </a:r>
           </a:p>
         </p:txBody>
@@ -5681,7 +5681,7 @@
                 </a:solidFill>
                 <a:latin typeface="Segoe UI"/>
               </a:rPr>
-              <a:t>BUY</a:t>
+              <a:t>STRONG BUY</a:t>
             </a:r>
           </a:p>
         </p:txBody>
@@ -5715,7 +5715,7 @@
                 </a:solidFill>
                 <a:latin typeface="Segoe UI"/>
               </a:rPr>
-              <a:t>86%</a:t>
+              <a:t>95%</a:t>
             </a:r>
           </a:p>
         </p:txBody>
@@ -5783,7 +5783,7 @@
                 </a:solidFill>
                 <a:latin typeface="Segoe UI"/>
               </a:rPr>
-              <a:t>US Technology</a:t>
+              <a:t>S&amp;P 500</a:t>
             </a:r>
           </a:p>
         </p:txBody>
@@ -5817,7 +5817,7 @@
                 </a:solidFill>
                 <a:latin typeface="Segoe UI"/>
               </a:rPr>
-              <a:t>BUY</a:t>
+              <a:t>STRONG BUY</a:t>
             </a:r>
           </a:p>
         </p:txBody>
@@ -5851,7 +5851,7 @@
                 </a:solidFill>
                 <a:latin typeface="Segoe UI"/>
               </a:rPr>
-              <a:t>92%</a:t>
+              <a:t>81%</a:t>
             </a:r>
           </a:p>
         </p:txBody>
@@ -5919,7 +5919,7 @@
                 </a:solidFill>
                 <a:latin typeface="Segoe UI"/>
               </a:rPr>
-              <a:t>Ethereum</a:t>
+              <a:t>US Technology</a:t>
             </a:r>
           </a:p>
         </p:txBody>
@@ -5987,7 +5987,7 @@
                 </a:solidFill>
                 <a:latin typeface="Segoe UI"/>
               </a:rPr>
-              <a:t>85%</a:t>
+              <a:t>91%</a:t>
             </a:r>
           </a:p>
         </p:txBody>
@@ -6259,7 +6259,7 @@
                 </a:solidFill>
                 <a:latin typeface="Segoe UI"/>
               </a:rPr>
-              <a:t>89%</a:t>
+              <a:t>90%</a:t>
             </a:r>
           </a:p>
         </p:txBody>
@@ -6327,7 +6327,7 @@
                 </a:solidFill>
                 <a:latin typeface="Segoe UI"/>
               </a:rPr>
-              <a:t>DAX</a:t>
+              <a:t>Tesla</a:t>
             </a:r>
           </a:p>
         </p:txBody>
@@ -6395,7 +6395,7 @@
                 </a:solidFill>
                 <a:latin typeface="Segoe UI"/>
               </a:rPr>
-              <a:t>90%</a:t>
+              <a:t>76%</a:t>
             </a:r>
           </a:p>
         </p:txBody>
@@ -6429,7 +6429,7 @@
                 </a:solidFill>
                 <a:latin typeface="Segoe UI"/>
               </a:rPr>
-              <a:t>above 200DMA · golden cross (50&gt;200) · MACD bullish</a:t>
+              <a:t>above 200DMA · death cross (50&lt;200) · MACD bullish</a:t>
             </a:r>
           </a:p>
         </p:txBody>
@@ -6463,7 +6463,7 @@
                 </a:solidFill>
                 <a:latin typeface="Segoe UI"/>
               </a:rPr>
-              <a:t>Straits Times</a:t>
+              <a:t>Alphabet</a:t>
             </a:r>
           </a:p>
         </p:txBody>
@@ -6531,7 +6531,7 @@
                 </a:solidFill>
                 <a:latin typeface="Segoe UI"/>
               </a:rPr>
-              <a:t>66%</a:t>
+              <a:t>73%</a:t>
             </a:r>
           </a:p>
         </p:txBody>
@@ -6565,7 +6565,7 @@
                 </a:solidFill>
                 <a:latin typeface="Segoe UI"/>
               </a:rPr>
-              <a:t>above 200DMA · golden cross (50&gt;200) · MACD bearish</a:t>
+              <a:t>above 200DMA · death cross (50&lt;200) · MACD bullish</a:t>
             </a:r>
           </a:p>
         </p:txBody>
@@ -6659,7 +6659,7 @@
                 </a:solidFill>
                 <a:latin typeface="Segoe UI"/>
               </a:rPr>
-              <a:t>Base currency INR · USD/INR 95.58</a:t>
+              <a:t>Base currency INR · USD/INR 95.73</a:t>
             </a:r>
           </a:p>
         </p:txBody>
@@ -7067,7 +7067,7 @@
                 </a:solidFill>
                 <a:latin typeface="Segoe UI"/>
               </a:rPr>
-              <a:t>86,612</a:t>
+              <a:t>84,237</a:t>
             </a:r>
           </a:p>
         </p:txBody>
@@ -7101,7 +7101,7 @@
                 </a:solidFill>
                 <a:latin typeface="Segoe UI"/>
               </a:rPr>
-              <a:t>Rs 827,838</a:t>
+              <a:t>Rs 806,401</a:t>
             </a:r>
           </a:p>
         </p:txBody>
@@ -7135,7 +7135,7 @@
                 </a:solidFill>
                 <a:latin typeface="Segoe UI"/>
               </a:rPr>
-              <a:t>Rs 254,358</a:t>
+              <a:t>Rs 232,021</a:t>
             </a:r>
           </a:p>
         </p:txBody>
@@ -7169,7 +7169,7 @@
                 </a:solidFill>
                 <a:latin typeface="Segoe UI"/>
               </a:rPr>
-              <a:t>+44.4%</a:t>
+              <a:t>+40.4%</a:t>
             </a:r>
           </a:p>
         </p:txBody>
@@ -7199,11 +7199,11 @@
             <a:r>
               <a:rPr sz="1000" b="0">
                 <a:solidFill>
-                  <a:srgbClr val="22C55E"/>
-                </a:solidFill>
-                <a:latin typeface="Segoe UI"/>
-              </a:rPr>
-              <a:t>+0.0%</a:t>
+                  <a:srgbClr val="EF4444"/>
+                </a:solidFill>
+                <a:latin typeface="Segoe UI"/>
+              </a:rPr>
+              <a:t>-2.2%</a:t>
             </a:r>
           </a:p>
         </p:txBody>
@@ -7339,7 +7339,7 @@
                 </a:solidFill>
                 <a:latin typeface="Segoe UI"/>
               </a:rPr>
-              <a:t>4,388</a:t>
+              <a:t>4,333</a:t>
             </a:r>
           </a:p>
         </p:txBody>
@@ -7373,7 +7373,7 @@
                 </a:solidFill>
                 <a:latin typeface="Segoe UI"/>
               </a:rPr>
-              <a:t>Rs 419,434</a:t>
+              <a:t>Rs 414,827</a:t>
             </a:r>
           </a:p>
         </p:txBody>
@@ -7407,7 +7407,7 @@
                 </a:solidFill>
                 <a:latin typeface="Segoe UI"/>
               </a:rPr>
-              <a:t>Rs 199,600</a:t>
+              <a:t>Rs 194,648</a:t>
             </a:r>
           </a:p>
         </p:txBody>
@@ -7441,7 +7441,7 @@
                 </a:solidFill>
                 <a:latin typeface="Segoe UI"/>
               </a:rPr>
-              <a:t>+90.8%</a:t>
+              <a:t>+88.4%</a:t>
             </a:r>
           </a:p>
         </p:txBody>
@@ -7611,7 +7611,7 @@
                 </a:solidFill>
                 <a:latin typeface="Segoe UI"/>
               </a:rPr>
-              <a:t>339</a:t>
+              <a:t>340</a:t>
             </a:r>
           </a:p>
         </p:txBody>
@@ -7645,7 +7645,7 @@
                 </a:solidFill>
                 <a:latin typeface="Segoe UI"/>
               </a:rPr>
-              <a:t>Rs 323,997</a:t>
+              <a:t>Rs 325,243</a:t>
             </a:r>
           </a:p>
         </p:txBody>
@@ -7679,7 +7679,7 @@
                 </a:solidFill>
                 <a:latin typeface="Segoe UI"/>
               </a:rPr>
-              <a:t>Rs 147,174</a:t>
+              <a:t>Rs 148,142</a:t>
             </a:r>
           </a:p>
         </p:txBody>
@@ -7713,7 +7713,7 @@
                 </a:solidFill>
                 <a:latin typeface="Segoe UI"/>
               </a:rPr>
-              <a:t>+83.2%</a:t>
+              <a:t>+83.7%</a:t>
             </a:r>
           </a:p>
         </p:txBody>
@@ -7883,7 +7883,7 @@
                 </a:solidFill>
                 <a:latin typeface="Segoe UI"/>
               </a:rPr>
-              <a:t>227</a:t>
+              <a:t>229</a:t>
             </a:r>
           </a:p>
         </p:txBody>
@@ -7917,7 +7917,7 @@
                 </a:solidFill>
                 <a:latin typeface="Segoe UI"/>
               </a:rPr>
-              <a:t>Rs 173,864</a:t>
+              <a:t>Rs 175,278</a:t>
             </a:r>
           </a:p>
         </p:txBody>
@@ -7951,7 +7951,7 @@
                 </a:solidFill>
                 <a:latin typeface="Segoe UI"/>
               </a:rPr>
-              <a:t>Rs -170,224</a:t>
+              <a:t>Rs -169,350</a:t>
             </a:r>
           </a:p>
         </p:txBody>
@@ -7985,7 +7985,7 @@
                 </a:solidFill>
                 <a:latin typeface="Segoe UI"/>
               </a:rPr>
-              <a:t>-49.5%</a:t>
+              <a:t>-49.1%</a:t>
             </a:r>
           </a:p>
         </p:txBody>
@@ -8155,7 +8155,7 @@
                 </a:solidFill>
                 <a:latin typeface="Segoe UI"/>
               </a:rPr>
-              <a:t>1,029</a:t>
+              <a:t>1,020</a:t>
             </a:r>
           </a:p>
         </p:txBody>
@@ -8189,7 +8189,7 @@
                 </a:solidFill>
                 <a:latin typeface="Segoe UI"/>
               </a:rPr>
-              <a:t>Rs 82,352</a:t>
+              <a:t>Rs 81,640</a:t>
             </a:r>
           </a:p>
         </p:txBody>
@@ -8223,7 +8223,7 @@
                 </a:solidFill>
                 <a:latin typeface="Segoe UI"/>
               </a:rPr>
-              <a:t>Rs -29,648</a:t>
+              <a:t>Rs -30,360</a:t>
             </a:r>
           </a:p>
         </p:txBody>
@@ -8257,7 +8257,7 @@
                 </a:solidFill>
                 <a:latin typeface="Segoe UI"/>
               </a:rPr>
-              <a:t>-26.5%</a:t>
+              <a:t>-27.1%</a:t>
             </a:r>
           </a:p>
         </p:txBody>
@@ -8427,7 +8427,7 @@
                 </a:solidFill>
                 <a:latin typeface="Segoe UI"/>
               </a:rPr>
-              <a:t>1,240</a:t>
+              <a:t>1,248</a:t>
             </a:r>
           </a:p>
         </p:txBody>
@@ -8461,7 +8461,7 @@
                 </a:solidFill>
                 <a:latin typeface="Segoe UI"/>
               </a:rPr>
-              <a:t>Rs 62,020</a:t>
+              <a:t>Rs 62,400</a:t>
             </a:r>
           </a:p>
         </p:txBody>
@@ -8495,7 +8495,7 @@
                 </a:solidFill>
                 <a:latin typeface="Segoe UI"/>
               </a:rPr>
-              <a:t>Rs -60,480</a:t>
+              <a:t>Rs -60,100</a:t>
             </a:r>
           </a:p>
         </p:txBody>
@@ -8529,7 +8529,7 @@
                 </a:solidFill>
                 <a:latin typeface="Segoe UI"/>
               </a:rPr>
-              <a:t>-49.4%</a:t>
+              <a:t>-49.1%</a:t>
             </a:r>
           </a:p>
         </p:txBody>
@@ -8699,7 +8699,7 @@
                 </a:solidFill>
                 <a:latin typeface="Segoe UI"/>
               </a:rPr>
-              <a:t>2,105</a:t>
+              <a:t>2,090</a:t>
             </a:r>
           </a:p>
         </p:txBody>
@@ -8733,7 +8733,7 @@
                 </a:solidFill>
                 <a:latin typeface="Segoe UI"/>
               </a:rPr>
-              <a:t>Rs 52,625</a:t>
+              <a:t>Rs 52,240</a:t>
             </a:r>
           </a:p>
         </p:txBody>
@@ -8767,7 +8767,7 @@
                 </a:solidFill>
                 <a:latin typeface="Segoe UI"/>
               </a:rPr>
-              <a:t>Rs -37,375</a:t>
+              <a:t>Rs -37,760</a:t>
             </a:r>
           </a:p>
         </p:txBody>
@@ -8801,7 +8801,7 @@
                 </a:solidFill>
                 <a:latin typeface="Segoe UI"/>
               </a:rPr>
-              <a:t>-41.5%</a:t>
+              <a:t>-42.0%</a:t>
             </a:r>
           </a:p>
         </p:txBody>
@@ -8971,7 +8971,7 @@
                 </a:solidFill>
                 <a:latin typeface="Segoe UI"/>
               </a:rPr>
-              <a:t>739</a:t>
+              <a:t>737</a:t>
             </a:r>
           </a:p>
         </p:txBody>
@@ -9005,7 +9005,7 @@
                 </a:solidFill>
                 <a:latin typeface="Segoe UI"/>
               </a:rPr>
-              <a:t>Rs 44,316</a:t>
+              <a:t>Rs 44,235</a:t>
             </a:r>
           </a:p>
         </p:txBody>
@@ -9039,7 +9039,7 @@
                 </a:solidFill>
                 <a:latin typeface="Segoe UI"/>
               </a:rPr>
-              <a:t>Rs -46,884</a:t>
+              <a:t>Rs -46,965</a:t>
             </a:r>
           </a:p>
         </p:txBody>
@@ -9073,7 +9073,7 @@
                 </a:solidFill>
                 <a:latin typeface="Segoe UI"/>
               </a:rPr>
-              <a:t>-51.4%</a:t>
+              <a:t>-51.5%</a:t>
             </a:r>
           </a:p>
         </p:txBody>
@@ -9141,7 +9141,7 @@
                 </a:solidFill>
                 <a:latin typeface="Segoe UI"/>
               </a:rPr>
-              <a:t>Total Rs 1,986,445 | P&amp;L Rs 256,520 (+14.8%) | Sharpe 0.09 | Vol 20.41% | VaR95 -1.93%/day</a:t>
+              <a:t>Total Rs 1,962,263 | P&amp;L Rs 230,276 (+13.3%) | Sharpe 0.06 | Vol 20.27% | VaR95 -1.93%/day</a:t>
             </a:r>
           </a:p>
         </p:txBody>

--- a/docs/pmr_daily.pptx
+++ b/docs/pmr_daily.pptx
@@ -3197,7 +3197,7 @@
                 </a:solidFill>
                 <a:latin typeface="Segoe UI"/>
               </a:rPr>
-              <a:t>Thursday, 24 Sep 2026 09:09 SGT</a:t>
+              <a:t>Friday, 25 Sep 2026 09:11 SGT</a:t>
             </a:r>
           </a:p>
         </p:txBody>
@@ -3265,7 +3265,7 @@
                 </a:solidFill>
                 <a:latin typeface="Segoe UI"/>
               </a:rPr>
-              <a:t>RAG 10R / 21A / 15G   |   56.5% above 200DMA   |   Portfolio Rs 1,962,263 (+13.3%)</a:t>
+              <a:t>RAG 11R / 20A / 15G   |   54.3% above 200DMA   |   Portfolio Rs 1,961,584 (+13.1%)</a:t>
             </a:r>
           </a:p>
         </p:txBody>
@@ -3529,7 +3529,7 @@
                 </a:solidFill>
                 <a:latin typeface="Segoe UI"/>
               </a:rPr>
-              <a:t>+11.9%</a:t>
+              <a:t>+14.3%</a:t>
             </a:r>
           </a:p>
         </p:txBody>
@@ -3587,7 +3587,7 @@
                 </a:solidFill>
                 <a:latin typeface="Segoe UI"/>
               </a:rPr>
-              <a:t>Ethereum</a:t>
+              <a:t>Natural Gas</a:t>
             </a:r>
           </a:p>
         </p:txBody>
@@ -3617,11 +3617,11 @@
             <a:r>
               <a:rPr sz="900" b="0">
                 <a:solidFill>
-                  <a:srgbClr val="F59E0B"/>
-                </a:solidFill>
-                <a:latin typeface="Segoe UI"/>
-              </a:rPr>
-              <a:t>ETH-USD · AMBER</a:t>
+                  <a:srgbClr val="EF4444"/>
+                </a:solidFill>
+                <a:latin typeface="Segoe UI"/>
+              </a:rPr>
+              <a:t>NG=F · RED</a:t>
             </a:r>
           </a:p>
         </p:txBody>
@@ -3655,7 +3655,7 @@
                 </a:solidFill>
                 <a:latin typeface="Segoe UI"/>
               </a:rPr>
-              <a:t>+8.7%</a:t>
+              <a:t>+11.1%</a:t>
             </a:r>
           </a:p>
         </p:txBody>
@@ -3713,7 +3713,7 @@
                 </a:solidFill>
                 <a:latin typeface="Segoe UI"/>
               </a:rPr>
-              <a:t>Natural Gas</a:t>
+              <a:t>Ethereum</a:t>
             </a:r>
           </a:p>
         </p:txBody>
@@ -3743,11 +3743,11 @@
             <a:r>
               <a:rPr sz="900" b="0">
                 <a:solidFill>
-                  <a:srgbClr val="EF4444"/>
-                </a:solidFill>
-                <a:latin typeface="Segoe UI"/>
-              </a:rPr>
-              <a:t>NG=F · RED</a:t>
+                  <a:srgbClr val="F59E0B"/>
+                </a:solidFill>
+                <a:latin typeface="Segoe UI"/>
+              </a:rPr>
+              <a:t>ETH-USD · AMBER</a:t>
             </a:r>
           </a:p>
         </p:txBody>
@@ -3781,7 +3781,7 @@
                 </a:solidFill>
                 <a:latin typeface="Segoe UI"/>
               </a:rPr>
-              <a:t>+8.5%</a:t>
+              <a:t>+9.3%</a:t>
             </a:r>
           </a:p>
         </p:txBody>
@@ -3839,7 +3839,7 @@
                 </a:solidFill>
                 <a:latin typeface="Segoe UI"/>
               </a:rPr>
-              <a:t>Bitcoin</a:t>
+              <a:t>Crude Oil WTI</a:t>
             </a:r>
           </a:p>
         </p:txBody>
@@ -3869,11 +3869,11 @@
             <a:r>
               <a:rPr sz="900" b="0">
                 <a:solidFill>
-                  <a:srgbClr val="22C55E"/>
-                </a:solidFill>
-                <a:latin typeface="Segoe UI"/>
-              </a:rPr>
-              <a:t>BTC-USD · GREEN</a:t>
+                  <a:srgbClr val="EF4444"/>
+                </a:solidFill>
+                <a:latin typeface="Segoe UI"/>
+              </a:rPr>
+              <a:t>CL=F · RED</a:t>
             </a:r>
           </a:p>
         </p:txBody>
@@ -3907,7 +3907,7 @@
                 </a:solidFill>
                 <a:latin typeface="Segoe UI"/>
               </a:rPr>
-              <a:t>+7.2%</a:t>
+              <a:t>+9.2%</a:t>
             </a:r>
           </a:p>
         </p:txBody>
@@ -3965,7 +3965,7 @@
                 </a:solidFill>
                 <a:latin typeface="Segoe UI"/>
               </a:rPr>
-              <a:t>Apple</a:t>
+              <a:t>Bitcoin</a:t>
             </a:r>
           </a:p>
         </p:txBody>
@@ -3999,7 +3999,7 @@
                 </a:solidFill>
                 <a:latin typeface="Segoe UI"/>
               </a:rPr>
-              <a:t>AAPL · GREEN</a:t>
+              <a:t>BTC-USD · GREEN</a:t>
             </a:r>
           </a:p>
         </p:txBody>
@@ -4033,7 +4033,7 @@
                 </a:solidFill>
                 <a:latin typeface="Segoe UI"/>
               </a:rPr>
-              <a:t>+7.2%</a:t>
+              <a:t>+7.9%</a:t>
             </a:r>
           </a:p>
         </p:txBody>
@@ -4193,7 +4193,7 @@
                 </a:solidFill>
                 <a:latin typeface="Segoe UI"/>
               </a:rPr>
-              <a:t>-12.9%</a:t>
+              <a:t>-13.0%</a:t>
             </a:r>
           </a:p>
         </p:txBody>
@@ -4319,7 +4319,7 @@
                 </a:solidFill>
                 <a:latin typeface="Segoe UI"/>
               </a:rPr>
-              <a:t>-10.0%</a:t>
+              <a:t>-10.5%</a:t>
             </a:r>
           </a:p>
         </p:txBody>
@@ -4377,7 +4377,7 @@
                 </a:solidFill>
                 <a:latin typeface="Segoe UI"/>
               </a:rPr>
-              <a:t>ICICI Bank</a:t>
+              <a:t>NIFTY IT</a:t>
             </a:r>
           </a:p>
         </p:txBody>
@@ -4407,11 +4407,11 @@
             <a:r>
               <a:rPr sz="900" b="0">
                 <a:solidFill>
-                  <a:srgbClr val="F59E0B"/>
-                </a:solidFill>
-                <a:latin typeface="Segoe UI"/>
-              </a:rPr>
-              <a:t>ICICIBANK.NS · AMBER</a:t>
+                  <a:srgbClr val="EF4444"/>
+                </a:solidFill>
+                <a:latin typeface="Segoe UI"/>
+              </a:rPr>
+              <a:t>^CNXIT · RED</a:t>
             </a:r>
           </a:p>
         </p:txBody>
@@ -4445,7 +4445,7 @@
                 </a:solidFill>
                 <a:latin typeface="Segoe UI"/>
               </a:rPr>
-              <a:t>-7.8%</a:t>
+              <a:t>-9.2%</a:t>
             </a:r>
           </a:p>
         </p:txBody>
@@ -4503,7 +4503,7 @@
                 </a:solidFill>
                 <a:latin typeface="Segoe UI"/>
               </a:rPr>
-              <a:t>NIFTY IT</a:t>
+              <a:t>ICICI Bank</a:t>
             </a:r>
           </a:p>
         </p:txBody>
@@ -4533,11 +4533,11 @@
             <a:r>
               <a:rPr sz="900" b="0">
                 <a:solidFill>
-                  <a:srgbClr val="EF4444"/>
-                </a:solidFill>
-                <a:latin typeface="Segoe UI"/>
-              </a:rPr>
-              <a:t>^CNXIT · RED</a:t>
+                  <a:srgbClr val="F59E0B"/>
+                </a:solidFill>
+                <a:latin typeface="Segoe UI"/>
+              </a:rPr>
+              <a:t>ICICIBANK.NS · AMBER</a:t>
             </a:r>
           </a:p>
         </p:txBody>
@@ -4571,7 +4571,7 @@
                 </a:solidFill>
                 <a:latin typeface="Segoe UI"/>
               </a:rPr>
-              <a:t>-7.6%</a:t>
+              <a:t>-8.2%</a:t>
             </a:r>
           </a:p>
         </p:txBody>
@@ -4697,7 +4697,7 @@
                 </a:solidFill>
                 <a:latin typeface="Segoe UI"/>
               </a:rPr>
-              <a:t>-4.7%</a:t>
+              <a:t>-5.2%</a:t>
             </a:r>
           </a:p>
         </p:txBody>
@@ -4967,7 +4967,7 @@
                 </a:solidFill>
                 <a:latin typeface="Segoe UI"/>
               </a:rPr>
-              <a:t>Copper</a:t>
+              <a:t>Solana</a:t>
             </a:r>
           </a:p>
         </p:txBody>
@@ -5035,7 +5035,7 @@
                 </a:solidFill>
                 <a:latin typeface="Segoe UI"/>
               </a:rPr>
-              <a:t>95%</a:t>
+              <a:t>92%</a:t>
             </a:r>
           </a:p>
         </p:txBody>
@@ -5103,7 +5103,7 @@
                 </a:solidFill>
                 <a:latin typeface="Segoe UI"/>
               </a:rPr>
-              <a:t>Solana</a:t>
+              <a:t>Bitcoin</a:t>
             </a:r>
           </a:p>
         </p:txBody>
@@ -5171,7 +5171,7 @@
                 </a:solidFill>
                 <a:latin typeface="Segoe UI"/>
               </a:rPr>
-              <a:t>91%</a:t>
+              <a:t>95%</a:t>
             </a:r>
           </a:p>
         </p:txBody>
@@ -5239,7 +5239,7 @@
                 </a:solidFill>
                 <a:latin typeface="Segoe UI"/>
               </a:rPr>
-              <a:t>Bitcoin</a:t>
+              <a:t>Ethereum</a:t>
             </a:r>
           </a:p>
         </p:txBody>
@@ -5307,7 +5307,7 @@
                 </a:solidFill>
                 <a:latin typeface="Segoe UI"/>
               </a:rPr>
-              <a:t>95%</a:t>
+              <a:t>90%</a:t>
             </a:r>
           </a:p>
         </p:txBody>
@@ -5375,7 +5375,7 @@
                 </a:solidFill>
                 <a:latin typeface="Segoe UI"/>
               </a:rPr>
-              <a:t>Ethereum</a:t>
+              <a:t>Microsoft</a:t>
             </a:r>
           </a:p>
         </p:txBody>
@@ -5443,7 +5443,7 @@
                 </a:solidFill>
                 <a:latin typeface="Segoe UI"/>
               </a:rPr>
-              <a:t>90%</a:t>
+              <a:t>84%</a:t>
             </a:r>
           </a:p>
         </p:txBody>
@@ -5477,7 +5477,7 @@
                 </a:solidFill>
                 <a:latin typeface="Segoe UI"/>
               </a:rPr>
-              <a:t>above 200DMA · golden cross (50&gt;200) · MACD bullish</a:t>
+              <a:t>above 200DMA · golden cross (50&gt;200) · MACD bearish</a:t>
             </a:r>
           </a:p>
         </p:txBody>
@@ -5511,7 +5511,7 @@
                 </a:solidFill>
                 <a:latin typeface="Segoe UI"/>
               </a:rPr>
-              <a:t>Microsoft</a:t>
+              <a:t>Copper</a:t>
             </a:r>
           </a:p>
         </p:txBody>
@@ -5579,7 +5579,7 @@
                 </a:solidFill>
                 <a:latin typeface="Segoe UI"/>
               </a:rPr>
-              <a:t>84%</a:t>
+              <a:t>95%</a:t>
             </a:r>
           </a:p>
         </p:txBody>
@@ -5613,7 +5613,7 @@
                 </a:solidFill>
                 <a:latin typeface="Segoe UI"/>
               </a:rPr>
-              <a:t>above 200DMA · golden cross (50&gt;200) · MACD bearish</a:t>
+              <a:t>above 200DMA · golden cross (50&gt;200) · MACD bullish</a:t>
             </a:r>
           </a:p>
         </p:txBody>
@@ -5851,7 +5851,7 @@
                 </a:solidFill>
                 <a:latin typeface="Segoe UI"/>
               </a:rPr>
-              <a:t>81%</a:t>
+              <a:t>82%</a:t>
             </a:r>
           </a:p>
         </p:txBody>
@@ -5919,7 +5919,7 @@
                 </a:solidFill>
                 <a:latin typeface="Segoe UI"/>
               </a:rPr>
-              <a:t>US Technology</a:t>
+              <a:t>Straits Times</a:t>
             </a:r>
           </a:p>
         </p:txBody>
@@ -5953,7 +5953,7 @@
                 </a:solidFill>
                 <a:latin typeface="Segoe UI"/>
               </a:rPr>
-              <a:t>BUY</a:t>
+              <a:t>STRONG BUY</a:t>
             </a:r>
           </a:p>
         </p:txBody>
@@ -5987,7 +5987,7 @@
                 </a:solidFill>
                 <a:latin typeface="Segoe UI"/>
               </a:rPr>
-              <a:t>91%</a:t>
+              <a:t>80%</a:t>
             </a:r>
           </a:p>
         </p:txBody>
@@ -6055,7 +6055,7 @@
                 </a:solidFill>
                 <a:latin typeface="Segoe UI"/>
               </a:rPr>
-              <a:t>Nasdaq 100</a:t>
+              <a:t>US Technology</a:t>
             </a:r>
           </a:p>
         </p:txBody>
@@ -6123,7 +6123,7 @@
                 </a:solidFill>
                 <a:latin typeface="Segoe UI"/>
               </a:rPr>
-              <a:t>91%</a:t>
+              <a:t>92%</a:t>
             </a:r>
           </a:p>
         </p:txBody>
@@ -6191,7 +6191,7 @@
                 </a:solidFill>
                 <a:latin typeface="Segoe UI"/>
               </a:rPr>
-              <a:t>Apple</a:t>
+              <a:t>Nasdaq 100</a:t>
             </a:r>
           </a:p>
         </p:txBody>
@@ -6259,7 +6259,7 @@
                 </a:solidFill>
                 <a:latin typeface="Segoe UI"/>
               </a:rPr>
-              <a:t>90%</a:t>
+              <a:t>91%</a:t>
             </a:r>
           </a:p>
         </p:txBody>
@@ -6395,7 +6395,7 @@
                 </a:solidFill>
                 <a:latin typeface="Segoe UI"/>
               </a:rPr>
-              <a:t>76%</a:t>
+              <a:t>77%</a:t>
             </a:r>
           </a:p>
         </p:txBody>
@@ -6463,7 +6463,7 @@
                 </a:solidFill>
                 <a:latin typeface="Segoe UI"/>
               </a:rPr>
-              <a:t>Alphabet</a:t>
+              <a:t>Apple</a:t>
             </a:r>
           </a:p>
         </p:txBody>
@@ -6531,7 +6531,7 @@
                 </a:solidFill>
                 <a:latin typeface="Segoe UI"/>
               </a:rPr>
-              <a:t>73%</a:t>
+              <a:t>68%</a:t>
             </a:r>
           </a:p>
         </p:txBody>
@@ -6565,7 +6565,7 @@
                 </a:solidFill>
                 <a:latin typeface="Segoe UI"/>
               </a:rPr>
-              <a:t>above 200DMA · death cross (50&lt;200) · MACD bullish</a:t>
+              <a:t>above 200DMA · golden cross (50&gt;200) · MACD bearish</a:t>
             </a:r>
           </a:p>
         </p:txBody>
@@ -6659,7 +6659,7 @@
                 </a:solidFill>
                 <a:latin typeface="Segoe UI"/>
               </a:rPr>
-              <a:t>Base currency INR · USD/INR 95.73</a:t>
+              <a:t>Base currency INR · USD/INR 95.94</a:t>
             </a:r>
           </a:p>
         </p:txBody>
@@ -7067,7 +7067,7 @@
                 </a:solidFill>
                 <a:latin typeface="Segoe UI"/>
               </a:rPr>
-              <a:t>84,237</a:t>
+              <a:t>84,726</a:t>
             </a:r>
           </a:p>
         </p:txBody>
@@ -7101,7 +7101,7 @@
                 </a:solidFill>
                 <a:latin typeface="Segoe UI"/>
               </a:rPr>
-              <a:t>Rs 806,401</a:t>
+              <a:t>Rs 812,905</a:t>
             </a:r>
           </a:p>
         </p:txBody>
@@ -7135,7 +7135,7 @@
                 </a:solidFill>
                 <a:latin typeface="Segoe UI"/>
               </a:rPr>
-              <a:t>Rs 232,021</a:t>
+              <a:t>Rs 237,235</a:t>
             </a:r>
           </a:p>
         </p:txBody>
@@ -7169,7 +7169,7 @@
                 </a:solidFill>
                 <a:latin typeface="Segoe UI"/>
               </a:rPr>
-              <a:t>+40.4%</a:t>
+              <a:t>+41.2%</a:t>
             </a:r>
           </a:p>
         </p:txBody>
@@ -7199,11 +7199,11 @@
             <a:r>
               <a:rPr sz="1000" b="0">
                 <a:solidFill>
-                  <a:srgbClr val="EF4444"/>
-                </a:solidFill>
-                <a:latin typeface="Segoe UI"/>
-              </a:rPr>
-              <a:t>-2.2%</a:t>
+                  <a:srgbClr val="22C55E"/>
+                </a:solidFill>
+                <a:latin typeface="Segoe UI"/>
+              </a:rPr>
+              <a:t>+0.4%</a:t>
             </a:r>
           </a:p>
         </p:txBody>
@@ -7339,7 +7339,7 @@
                 </a:solidFill>
                 <a:latin typeface="Segoe UI"/>
               </a:rPr>
-              <a:t>4,333</a:t>
+              <a:t>4,317</a:t>
             </a:r>
           </a:p>
         </p:txBody>
@@ -7373,7 +7373,7 @@
                 </a:solidFill>
                 <a:latin typeface="Segoe UI"/>
               </a:rPr>
-              <a:t>Rs 414,827</a:t>
+              <a:t>Rs 414,204</a:t>
             </a:r>
           </a:p>
         </p:txBody>
@@ -7407,7 +7407,7 @@
                 </a:solidFill>
                 <a:latin typeface="Segoe UI"/>
               </a:rPr>
-              <a:t>Rs 194,648</a:t>
+              <a:t>Rs 193,531</a:t>
             </a:r>
           </a:p>
         </p:txBody>
@@ -7441,7 +7441,7 @@
                 </a:solidFill>
                 <a:latin typeface="Segoe UI"/>
               </a:rPr>
-              <a:t>+88.4%</a:t>
+              <a:t>+87.7%</a:t>
             </a:r>
           </a:p>
         </p:txBody>
@@ -7611,7 +7611,7 @@
                 </a:solidFill>
                 <a:latin typeface="Segoe UI"/>
               </a:rPr>
-              <a:t>340</a:t>
+              <a:t>337</a:t>
             </a:r>
           </a:p>
         </p:txBody>
@@ -7645,7 +7645,7 @@
                 </a:solidFill>
                 <a:latin typeface="Segoe UI"/>
               </a:rPr>
-              <a:t>Rs 325,243</a:t>
+              <a:t>Rs 323,354</a:t>
             </a:r>
           </a:p>
         </p:txBody>
@@ -7679,7 +7679,7 @@
                 </a:solidFill>
                 <a:latin typeface="Segoe UI"/>
               </a:rPr>
-              <a:t>Rs 148,142</a:t>
+              <a:t>Rs 145,856</a:t>
             </a:r>
           </a:p>
         </p:txBody>
@@ -7713,7 +7713,7 @@
                 </a:solidFill>
                 <a:latin typeface="Segoe UI"/>
               </a:rPr>
-              <a:t>+83.7%</a:t>
+              <a:t>+82.2%</a:t>
             </a:r>
           </a:p>
         </p:txBody>
@@ -7883,7 +7883,7 @@
                 </a:solidFill>
                 <a:latin typeface="Segoe UI"/>
               </a:rPr>
-              <a:t>229</a:t>
+              <a:t>226</a:t>
             </a:r>
           </a:p>
         </p:txBody>
@@ -7917,7 +7917,7 @@
                 </a:solidFill>
                 <a:latin typeface="Segoe UI"/>
               </a:rPr>
-              <a:t>Rs 175,278</a:t>
+              <a:t>Rs 173,092</a:t>
             </a:r>
           </a:p>
         </p:txBody>
@@ -7951,7 +7951,7 @@
                 </a:solidFill>
                 <a:latin typeface="Segoe UI"/>
               </a:rPr>
-              <a:t>Rs -169,350</a:t>
+              <a:t>Rs -172,310</a:t>
             </a:r>
           </a:p>
         </p:txBody>
@@ -7985,7 +7985,7 @@
                 </a:solidFill>
                 <a:latin typeface="Segoe UI"/>
               </a:rPr>
-              <a:t>-49.1%</a:t>
+              <a:t>-49.9%</a:t>
             </a:r>
           </a:p>
         </p:txBody>
@@ -8155,7 +8155,7 @@
                 </a:solidFill>
                 <a:latin typeface="Segoe UI"/>
               </a:rPr>
-              <a:t>1,020</a:t>
+              <a:t>1,014</a:t>
             </a:r>
           </a:p>
         </p:txBody>
@@ -8189,7 +8189,7 @@
                 </a:solidFill>
                 <a:latin typeface="Segoe UI"/>
               </a:rPr>
-              <a:t>Rs 81,640</a:t>
+              <a:t>Rs 81,160</a:t>
             </a:r>
           </a:p>
         </p:txBody>
@@ -8223,7 +8223,7 @@
                 </a:solidFill>
                 <a:latin typeface="Segoe UI"/>
               </a:rPr>
-              <a:t>Rs -30,360</a:t>
+              <a:t>Rs -30,840</a:t>
             </a:r>
           </a:p>
         </p:txBody>
@@ -8257,7 +8257,7 @@
                 </a:solidFill>
                 <a:latin typeface="Segoe UI"/>
               </a:rPr>
-              <a:t>-27.1%</a:t>
+              <a:t>-27.5%</a:t>
             </a:r>
           </a:p>
         </p:txBody>
@@ -8427,7 +8427,7 @@
                 </a:solidFill>
                 <a:latin typeface="Segoe UI"/>
               </a:rPr>
-              <a:t>1,248</a:t>
+              <a:t>1,219</a:t>
             </a:r>
           </a:p>
         </p:txBody>
@@ -8461,7 +8461,7 @@
                 </a:solidFill>
                 <a:latin typeface="Segoe UI"/>
               </a:rPr>
-              <a:t>Rs 62,400</a:t>
+              <a:t>Rs 60,960</a:t>
             </a:r>
           </a:p>
         </p:txBody>
@@ -8495,7 +8495,7 @@
                 </a:solidFill>
                 <a:latin typeface="Segoe UI"/>
               </a:rPr>
-              <a:t>Rs -60,100</a:t>
+              <a:t>Rs -61,540</a:t>
             </a:r>
           </a:p>
         </p:txBody>
@@ -8529,7 +8529,7 @@
                 </a:solidFill>
                 <a:latin typeface="Segoe UI"/>
               </a:rPr>
-              <a:t>-49.1%</a:t>
+              <a:t>-50.2%</a:t>
             </a:r>
           </a:p>
         </p:txBody>
@@ -8699,7 +8699,7 @@
                 </a:solidFill>
                 <a:latin typeface="Segoe UI"/>
               </a:rPr>
-              <a:t>2,090</a:t>
+              <a:t>2,087</a:t>
             </a:r>
           </a:p>
         </p:txBody>
@@ -8733,7 +8733,7 @@
                 </a:solidFill>
                 <a:latin typeface="Segoe UI"/>
               </a:rPr>
-              <a:t>Rs 52,240</a:t>
+              <a:t>Rs 52,175</a:t>
             </a:r>
           </a:p>
         </p:txBody>
@@ -8767,7 +8767,7 @@
                 </a:solidFill>
                 <a:latin typeface="Segoe UI"/>
               </a:rPr>
-              <a:t>Rs -37,760</a:t>
+              <a:t>Rs -37,825</a:t>
             </a:r>
           </a:p>
         </p:txBody>
@@ -8971,7 +8971,7 @@
                 </a:solidFill>
                 <a:latin typeface="Segoe UI"/>
               </a:rPr>
-              <a:t>737</a:t>
+              <a:t>729</a:t>
             </a:r>
           </a:p>
         </p:txBody>
@@ -9005,7 +9005,7 @@
                 </a:solidFill>
                 <a:latin typeface="Segoe UI"/>
               </a:rPr>
-              <a:t>Rs 44,235</a:t>
+              <a:t>Rs 43,734</a:t>
             </a:r>
           </a:p>
         </p:txBody>
@@ -9039,7 +9039,7 @@
                 </a:solidFill>
                 <a:latin typeface="Segoe UI"/>
               </a:rPr>
-              <a:t>Rs -46,965</a:t>
+              <a:t>Rs -47,466</a:t>
             </a:r>
           </a:p>
         </p:txBody>
@@ -9073,7 +9073,7 @@
                 </a:solidFill>
                 <a:latin typeface="Segoe UI"/>
               </a:rPr>
-              <a:t>-51.5%</a:t>
+              <a:t>-52.0%</a:t>
             </a:r>
           </a:p>
         </p:txBody>
@@ -9141,7 +9141,7 @@
                 </a:solidFill>
                 <a:latin typeface="Segoe UI"/>
               </a:rPr>
-              <a:t>Total Rs 1,962,263 | P&amp;L Rs 230,276 (+13.3%) | Sharpe 0.06 | Vol 20.27% | VaR95 -1.93%/day</a:t>
+              <a:t>Total Rs 1,961,584 | P&amp;L Rs 226,641 (+13.1%) | Sharpe 0.05 | Vol 20.4% | VaR95 -1.93%/day</a:t>
             </a:r>
           </a:p>
         </p:txBody>

--- a/docs/pmr_daily.pptx
+++ b/docs/pmr_daily.pptx
@@ -3197,7 +3197,7 @@
                 </a:solidFill>
                 <a:latin typeface="Segoe UI"/>
               </a:rPr>
-              <a:t>Friday, 25 Sep 2026 09:11 SGT</a:t>
+              <a:t>Monday, 28 Sep 2026 09:26 SGT</a:t>
             </a:r>
           </a:p>
         </p:txBody>
@@ -3265,7 +3265,7 @@
                 </a:solidFill>
                 <a:latin typeface="Segoe UI"/>
               </a:rPr>
-              <a:t>RAG 11R / 20A / 15G   |   54.3% above 200DMA   |   Portfolio Rs 1,961,584 (+13.1%)</a:t>
+              <a:t>RAG 13R / 15A / 18G   |   47.8% above 200DMA   |   Portfolio Rs 1,950,245 (+12.5%)</a:t>
             </a:r>
           </a:p>
         </p:txBody>
@@ -3491,11 +3491,11 @@
             <a:r>
               <a:rPr sz="900" b="0">
                 <a:solidFill>
-                  <a:srgbClr val="F59E0B"/>
-                </a:solidFill>
-                <a:latin typeface="Segoe UI"/>
-              </a:rPr>
-              <a:t>SOL-USD · AMBER</a:t>
+                  <a:srgbClr val="22C55E"/>
+                </a:solidFill>
+                <a:latin typeface="Segoe UI"/>
+              </a:rPr>
+              <a:t>SOL-USD · GREEN</a:t>
             </a:r>
           </a:p>
         </p:txBody>
@@ -3529,7 +3529,7 @@
                 </a:solidFill>
                 <a:latin typeface="Segoe UI"/>
               </a:rPr>
-              <a:t>+14.3%</a:t>
+              <a:t>+18.5%</a:t>
             </a:r>
           </a:p>
         </p:txBody>
@@ -3587,7 +3587,7 @@
                 </a:solidFill>
                 <a:latin typeface="Segoe UI"/>
               </a:rPr>
-              <a:t>Natural Gas</a:t>
+              <a:t>Crude Oil WTI</a:t>
             </a:r>
           </a:p>
         </p:txBody>
@@ -3621,7 +3621,7 @@
                 </a:solidFill>
                 <a:latin typeface="Segoe UI"/>
               </a:rPr>
-              <a:t>NG=F · RED</a:t>
+              <a:t>CL=F · RED</a:t>
             </a:r>
           </a:p>
         </p:txBody>
@@ -3655,7 +3655,7 @@
                 </a:solidFill>
                 <a:latin typeface="Segoe UI"/>
               </a:rPr>
-              <a:t>+11.1%</a:t>
+              <a:t>+8.6%</a:t>
             </a:r>
           </a:p>
         </p:txBody>
@@ -3743,11 +3743,11 @@
             <a:r>
               <a:rPr sz="900" b="0">
                 <a:solidFill>
-                  <a:srgbClr val="F59E0B"/>
-                </a:solidFill>
-                <a:latin typeface="Segoe UI"/>
-              </a:rPr>
-              <a:t>ETH-USD · AMBER</a:t>
+                  <a:srgbClr val="22C55E"/>
+                </a:solidFill>
+                <a:latin typeface="Segoe UI"/>
+              </a:rPr>
+              <a:t>ETH-USD · GREEN</a:t>
             </a:r>
           </a:p>
         </p:txBody>
@@ -3781,7 +3781,7 @@
                 </a:solidFill>
                 <a:latin typeface="Segoe UI"/>
               </a:rPr>
-              <a:t>+9.3%</a:t>
+              <a:t>+8.4%</a:t>
             </a:r>
           </a:p>
         </p:txBody>
@@ -3839,7 +3839,7 @@
                 </a:solidFill>
                 <a:latin typeface="Segoe UI"/>
               </a:rPr>
-              <a:t>Crude Oil WTI</a:t>
+              <a:t>Apple</a:t>
             </a:r>
           </a:p>
         </p:txBody>
@@ -3869,11 +3869,11 @@
             <a:r>
               <a:rPr sz="900" b="0">
                 <a:solidFill>
-                  <a:srgbClr val="EF4444"/>
-                </a:solidFill>
-                <a:latin typeface="Segoe UI"/>
-              </a:rPr>
-              <a:t>CL=F · RED</a:t>
+                  <a:srgbClr val="22C55E"/>
+                </a:solidFill>
+                <a:latin typeface="Segoe UI"/>
+              </a:rPr>
+              <a:t>AAPL · GREEN</a:t>
             </a:r>
           </a:p>
         </p:txBody>
@@ -3907,7 +3907,7 @@
                 </a:solidFill>
                 <a:latin typeface="Segoe UI"/>
               </a:rPr>
-              <a:t>+9.2%</a:t>
+              <a:t>+7.6%</a:t>
             </a:r>
           </a:p>
         </p:txBody>
@@ -4033,7 +4033,7 @@
                 </a:solidFill>
                 <a:latin typeface="Segoe UI"/>
               </a:rPr>
-              <a:t>+7.9%</a:t>
+              <a:t>+7.1%</a:t>
             </a:r>
           </a:p>
         </p:txBody>
@@ -4193,7 +4193,7 @@
                 </a:solidFill>
                 <a:latin typeface="Segoe UI"/>
               </a:rPr>
-              <a:t>-13.0%</a:t>
+              <a:t>-13.2%</a:t>
             </a:r>
           </a:p>
         </p:txBody>
@@ -4319,7 +4319,7 @@
                 </a:solidFill>
                 <a:latin typeface="Segoe UI"/>
               </a:rPr>
-              <a:t>-10.5%</a:t>
+              <a:t>-11.8%</a:t>
             </a:r>
           </a:p>
         </p:txBody>
@@ -4445,7 +4445,7 @@
                 </a:solidFill>
                 <a:latin typeface="Segoe UI"/>
               </a:rPr>
-              <a:t>-9.2%</a:t>
+              <a:t>-9.7%</a:t>
             </a:r>
           </a:p>
         </p:txBody>
@@ -4571,7 +4571,7 @@
                 </a:solidFill>
                 <a:latin typeface="Segoe UI"/>
               </a:rPr>
-              <a:t>-8.2%</a:t>
+              <a:t>-8.7%</a:t>
             </a:r>
           </a:p>
         </p:txBody>
@@ -4629,7 +4629,7 @@
                 </a:solidFill>
                 <a:latin typeface="Segoe UI"/>
               </a:rPr>
-              <a:t>US Financials</a:t>
+              <a:t>Gold</a:t>
             </a:r>
           </a:p>
         </p:txBody>
@@ -4659,11 +4659,11 @@
             <a:r>
               <a:rPr sz="900" b="0">
                 <a:solidFill>
-                  <a:srgbClr val="F59E0B"/>
-                </a:solidFill>
-                <a:latin typeface="Segoe UI"/>
-              </a:rPr>
-              <a:t>XLF · AMBER</a:t>
+                  <a:srgbClr val="EF4444"/>
+                </a:solidFill>
+                <a:latin typeface="Segoe UI"/>
+              </a:rPr>
+              <a:t>GC=F · RED</a:t>
             </a:r>
           </a:p>
         </p:txBody>
@@ -4697,7 +4697,7 @@
                 </a:solidFill>
                 <a:latin typeface="Segoe UI"/>
               </a:rPr>
-              <a:t>-5.2%</a:t>
+              <a:t>-5.0%</a:t>
             </a:r>
           </a:p>
         </p:txBody>
@@ -4967,7 +4967,7 @@
                 </a:solidFill>
                 <a:latin typeface="Segoe UI"/>
               </a:rPr>
-              <a:t>Solana</a:t>
+              <a:t>Microsoft</a:t>
             </a:r>
           </a:p>
         </p:txBody>
@@ -5035,7 +5035,7 @@
                 </a:solidFill>
                 <a:latin typeface="Segoe UI"/>
               </a:rPr>
-              <a:t>92%</a:t>
+              <a:t>95%</a:t>
             </a:r>
           </a:p>
         </p:txBody>
@@ -5103,7 +5103,7 @@
                 </a:solidFill>
                 <a:latin typeface="Segoe UI"/>
               </a:rPr>
-              <a:t>Bitcoin</a:t>
+              <a:t>Solana</a:t>
             </a:r>
           </a:p>
         </p:txBody>
@@ -5239,7 +5239,7 @@
                 </a:solidFill>
                 <a:latin typeface="Segoe UI"/>
               </a:rPr>
-              <a:t>Ethereum</a:t>
+              <a:t>US Technology</a:t>
             </a:r>
           </a:p>
         </p:txBody>
@@ -5307,7 +5307,7 @@
                 </a:solidFill>
                 <a:latin typeface="Segoe UI"/>
               </a:rPr>
-              <a:t>90%</a:t>
+              <a:t>95%</a:t>
             </a:r>
           </a:p>
         </p:txBody>
@@ -5375,7 +5375,7 @@
                 </a:solidFill>
                 <a:latin typeface="Segoe UI"/>
               </a:rPr>
-              <a:t>Microsoft</a:t>
+              <a:t>Bitcoin</a:t>
             </a:r>
           </a:p>
         </p:txBody>
@@ -5443,7 +5443,7 @@
                 </a:solidFill>
                 <a:latin typeface="Segoe UI"/>
               </a:rPr>
-              <a:t>84%</a:t>
+              <a:t>95%</a:t>
             </a:r>
           </a:p>
         </p:txBody>
@@ -5477,7 +5477,7 @@
                 </a:solidFill>
                 <a:latin typeface="Segoe UI"/>
               </a:rPr>
-              <a:t>above 200DMA · golden cross (50&gt;200) · MACD bearish</a:t>
+              <a:t>above 200DMA · golden cross (50&gt;200) · MACD bullish</a:t>
             </a:r>
           </a:p>
         </p:txBody>
@@ -5511,7 +5511,7 @@
                 </a:solidFill>
                 <a:latin typeface="Segoe UI"/>
               </a:rPr>
-              <a:t>Copper</a:t>
+              <a:t>Nasdaq 100</a:t>
             </a:r>
           </a:p>
         </p:txBody>
@@ -5783,7 +5783,7 @@
                 </a:solidFill>
                 <a:latin typeface="Segoe UI"/>
               </a:rPr>
-              <a:t>S&amp;P 500</a:t>
+              <a:t>Ethereum</a:t>
             </a:r>
           </a:p>
         </p:txBody>
@@ -5851,7 +5851,7 @@
                 </a:solidFill>
                 <a:latin typeface="Segoe UI"/>
               </a:rPr>
-              <a:t>82%</a:t>
+              <a:t>83%</a:t>
             </a:r>
           </a:p>
         </p:txBody>
@@ -5885,7 +5885,7 @@
                 </a:solidFill>
                 <a:latin typeface="Segoe UI"/>
               </a:rPr>
-              <a:t>above 200DMA · golden cross (50&gt;200) · MACD bullish</a:t>
+              <a:t>above 200DMA · golden cross (50&gt;200) · MACD bearish</a:t>
             </a:r>
           </a:p>
         </p:txBody>
@@ -5919,7 +5919,7 @@
                 </a:solidFill>
                 <a:latin typeface="Segoe UI"/>
               </a:rPr>
-              <a:t>Straits Times</a:t>
+              <a:t>S&amp;P 500</a:t>
             </a:r>
           </a:p>
         </p:txBody>
@@ -5987,7 +5987,7 @@
                 </a:solidFill>
                 <a:latin typeface="Segoe UI"/>
               </a:rPr>
-              <a:t>80%</a:t>
+              <a:t>82%</a:t>
             </a:r>
           </a:p>
         </p:txBody>
@@ -6055,7 +6055,7 @@
                 </a:solidFill>
                 <a:latin typeface="Segoe UI"/>
               </a:rPr>
-              <a:t>US Technology</a:t>
+              <a:t>Copper</a:t>
             </a:r>
           </a:p>
         </p:txBody>
@@ -6089,7 +6089,7 @@
                 </a:solidFill>
                 <a:latin typeface="Segoe UI"/>
               </a:rPr>
-              <a:t>BUY</a:t>
+              <a:t>STRONG BUY</a:t>
             </a:r>
           </a:p>
         </p:txBody>
@@ -6123,7 +6123,7 @@
                 </a:solidFill>
                 <a:latin typeface="Segoe UI"/>
               </a:rPr>
-              <a:t>92%</a:t>
+              <a:t>94%</a:t>
             </a:r>
           </a:p>
         </p:txBody>
@@ -6191,7 +6191,7 @@
                 </a:solidFill>
                 <a:latin typeface="Segoe UI"/>
               </a:rPr>
-              <a:t>Nasdaq 100</a:t>
+              <a:t>Apple</a:t>
             </a:r>
           </a:p>
         </p:txBody>
@@ -6225,7 +6225,7 @@
                 </a:solidFill>
                 <a:latin typeface="Segoe UI"/>
               </a:rPr>
-              <a:t>BUY</a:t>
+              <a:t>STRONG BUY</a:t>
             </a:r>
           </a:p>
         </p:txBody>
@@ -6259,7 +6259,7 @@
                 </a:solidFill>
                 <a:latin typeface="Segoe UI"/>
               </a:rPr>
-              <a:t>91%</a:t>
+              <a:t>81%</a:t>
             </a:r>
           </a:p>
         </p:txBody>
@@ -6327,7 +6327,7 @@
                 </a:solidFill>
                 <a:latin typeface="Segoe UI"/>
               </a:rPr>
-              <a:t>Tesla</a:t>
+              <a:t>Straits Times</a:t>
             </a:r>
           </a:p>
         </p:txBody>
@@ -6361,7 +6361,7 @@
                 </a:solidFill>
                 <a:latin typeface="Segoe UI"/>
               </a:rPr>
-              <a:t>BUY</a:t>
+              <a:t>STRONG BUY</a:t>
             </a:r>
           </a:p>
         </p:txBody>
@@ -6395,7 +6395,7 @@
                 </a:solidFill>
                 <a:latin typeface="Segoe UI"/>
               </a:rPr>
-              <a:t>77%</a:t>
+              <a:t>81%</a:t>
             </a:r>
           </a:p>
         </p:txBody>
@@ -6429,7 +6429,7 @@
                 </a:solidFill>
                 <a:latin typeface="Segoe UI"/>
               </a:rPr>
-              <a:t>above 200DMA · death cross (50&lt;200) · MACD bullish</a:t>
+              <a:t>above 200DMA · golden cross (50&gt;200) · MACD bullish</a:t>
             </a:r>
           </a:p>
         </p:txBody>
@@ -6463,7 +6463,7 @@
                 </a:solidFill>
                 <a:latin typeface="Segoe UI"/>
               </a:rPr>
-              <a:t>Apple</a:t>
+              <a:t>Natural Gas</a:t>
             </a:r>
           </a:p>
         </p:txBody>
@@ -6565,7 +6565,7 @@
                 </a:solidFill>
                 <a:latin typeface="Segoe UI"/>
               </a:rPr>
-              <a:t>above 200DMA · golden cross (50&gt;200) · MACD bearish</a:t>
+              <a:t>above 200DMA · death cross (50&lt;200) · MACD bullish</a:t>
             </a:r>
           </a:p>
         </p:txBody>
@@ -6659,7 +6659,7 @@
                 </a:solidFill>
                 <a:latin typeface="Segoe UI"/>
               </a:rPr>
-              <a:t>Base currency INR · USD/INR 95.94</a:t>
+              <a:t>Base currency INR · USD/INR 95.8</a:t>
             </a:r>
           </a:p>
         </p:txBody>
@@ -7067,7 +7067,7 @@
                 </a:solidFill>
                 <a:latin typeface="Segoe UI"/>
               </a:rPr>
-              <a:t>84,726</a:t>
+              <a:t>84,100</a:t>
             </a:r>
           </a:p>
         </p:txBody>
@@ -7101,7 +7101,7 @@
                 </a:solidFill>
                 <a:latin typeface="Segoe UI"/>
               </a:rPr>
-              <a:t>Rs 812,905</a:t>
+              <a:t>Rs 805,693</a:t>
             </a:r>
           </a:p>
         </p:txBody>
@@ -7135,7 +7135,7 @@
                 </a:solidFill>
                 <a:latin typeface="Segoe UI"/>
               </a:rPr>
-              <a:t>Rs 237,235</a:t>
+              <a:t>Rs 230,881</a:t>
             </a:r>
           </a:p>
         </p:txBody>
@@ -7169,7 +7169,7 @@
                 </a:solidFill>
                 <a:latin typeface="Segoe UI"/>
               </a:rPr>
-              <a:t>+41.2%</a:t>
+              <a:t>+40.2%</a:t>
             </a:r>
           </a:p>
         </p:txBody>
@@ -7199,11 +7199,11 @@
             <a:r>
               <a:rPr sz="1000" b="0">
                 <a:solidFill>
-                  <a:srgbClr val="22C55E"/>
-                </a:solidFill>
-                <a:latin typeface="Segoe UI"/>
-              </a:rPr>
-              <a:t>+0.4%</a:t>
+                  <a:srgbClr val="EF4444"/>
+                </a:solidFill>
+                <a:latin typeface="Segoe UI"/>
+              </a:rPr>
+              <a:t>-0.4%</a:t>
             </a:r>
           </a:p>
         </p:txBody>
@@ -7339,7 +7339,7 @@
                 </a:solidFill>
                 <a:latin typeface="Segoe UI"/>
               </a:rPr>
-              <a:t>4,317</a:t>
+              <a:t>4,257</a:t>
             </a:r>
           </a:p>
         </p:txBody>
@@ -7373,7 +7373,7 @@
                 </a:solidFill>
                 <a:latin typeface="Segoe UI"/>
               </a:rPr>
-              <a:t>Rs 414,204</a:t>
+              <a:t>Rs 407,800</a:t>
             </a:r>
           </a:p>
         </p:txBody>
@@ -7407,7 +7407,7 @@
                 </a:solidFill>
                 <a:latin typeface="Segoe UI"/>
               </a:rPr>
-              <a:t>Rs 193,531</a:t>
+              <a:t>Rs 187,456</a:t>
             </a:r>
           </a:p>
         </p:txBody>
@@ -7441,7 +7441,7 @@
                 </a:solidFill>
                 <a:latin typeface="Segoe UI"/>
               </a:rPr>
-              <a:t>+87.7%</a:t>
+              <a:t>+85.1%</a:t>
             </a:r>
           </a:p>
         </p:txBody>
@@ -7611,7 +7611,7 @@
                 </a:solidFill>
                 <a:latin typeface="Segoe UI"/>
               </a:rPr>
-              <a:t>337</a:t>
+              <a:t>341</a:t>
             </a:r>
           </a:p>
         </p:txBody>
@@ -7645,7 +7645,7 @@
                 </a:solidFill>
                 <a:latin typeface="Segoe UI"/>
               </a:rPr>
-              <a:t>Rs 323,354</a:t>
+              <a:t>Rs 326,752</a:t>
             </a:r>
           </a:p>
         </p:txBody>
@@ -7679,7 +7679,7 @@
                 </a:solidFill>
                 <a:latin typeface="Segoe UI"/>
               </a:rPr>
-              <a:t>Rs 145,856</a:t>
+              <a:t>Rs 149,518</a:t>
             </a:r>
           </a:p>
         </p:txBody>
@@ -7713,7 +7713,7 @@
                 </a:solidFill>
                 <a:latin typeface="Segoe UI"/>
               </a:rPr>
-              <a:t>+82.2%</a:t>
+              <a:t>+84.4%</a:t>
             </a:r>
           </a:p>
         </p:txBody>
@@ -7883,7 +7883,7 @@
                 </a:solidFill>
                 <a:latin typeface="Segoe UI"/>
               </a:rPr>
-              <a:t>226</a:t>
+              <a:t>225</a:t>
             </a:r>
           </a:p>
         </p:txBody>
@@ -7917,7 +7917,7 @@
                 </a:solidFill>
                 <a:latin typeface="Segoe UI"/>
               </a:rPr>
-              <a:t>Rs 173,092</a:t>
+              <a:t>Rs 172,497</a:t>
             </a:r>
           </a:p>
         </p:txBody>
@@ -7951,7 +7951,7 @@
                 </a:solidFill>
                 <a:latin typeface="Segoe UI"/>
               </a:rPr>
-              <a:t>Rs -172,310</a:t>
+              <a:t>Rs -172,390</a:t>
             </a:r>
           </a:p>
         </p:txBody>
@@ -7985,7 +7985,7 @@
                 </a:solidFill>
                 <a:latin typeface="Segoe UI"/>
               </a:rPr>
-              <a:t>-49.9%</a:t>
+              <a:t>-50.0%</a:t>
             </a:r>
           </a:p>
         </p:txBody>
@@ -8155,7 +8155,7 @@
                 </a:solidFill>
                 <a:latin typeface="Segoe UI"/>
               </a:rPr>
-              <a:t>1,014</a:t>
+              <a:t>1,000</a:t>
             </a:r>
           </a:p>
         </p:txBody>
@@ -8189,7 +8189,7 @@
                 </a:solidFill>
                 <a:latin typeface="Segoe UI"/>
               </a:rPr>
-              <a:t>Rs 81,160</a:t>
+              <a:t>Rs 80,016</a:t>
             </a:r>
           </a:p>
         </p:txBody>
@@ -8223,7 +8223,7 @@
                 </a:solidFill>
                 <a:latin typeface="Segoe UI"/>
               </a:rPr>
-              <a:t>Rs -30,840</a:t>
+              <a:t>Rs -31,984</a:t>
             </a:r>
           </a:p>
         </p:txBody>
@@ -8257,7 +8257,7 @@
                 </a:solidFill>
                 <a:latin typeface="Segoe UI"/>
               </a:rPr>
-              <a:t>-27.5%</a:t>
+              <a:t>-28.6%</a:t>
             </a:r>
           </a:p>
         </p:txBody>
@@ -8427,7 +8427,7 @@
                 </a:solidFill>
                 <a:latin typeface="Segoe UI"/>
               </a:rPr>
-              <a:t>1,219</a:t>
+              <a:t>1,226</a:t>
             </a:r>
           </a:p>
         </p:txBody>
@@ -8461,7 +8461,7 @@
                 </a:solidFill>
                 <a:latin typeface="Segoe UI"/>
               </a:rPr>
-              <a:t>Rs 60,960</a:t>
+              <a:t>Rs 61,300</a:t>
             </a:r>
           </a:p>
         </p:txBody>
@@ -8495,7 +8495,7 @@
                 </a:solidFill>
                 <a:latin typeface="Segoe UI"/>
               </a:rPr>
-              <a:t>Rs -61,540</a:t>
+              <a:t>Rs -61,200</a:t>
             </a:r>
           </a:p>
         </p:txBody>
@@ -8529,7 +8529,7 @@
                 </a:solidFill>
                 <a:latin typeface="Segoe UI"/>
               </a:rPr>
-              <a:t>-50.2%</a:t>
+              <a:t>-50.0%</a:t>
             </a:r>
           </a:p>
         </p:txBody>
@@ -8699,7 +8699,7 @@
                 </a:solidFill>
                 <a:latin typeface="Segoe UI"/>
               </a:rPr>
-              <a:t>2,087</a:t>
+              <a:t>2,082</a:t>
             </a:r>
           </a:p>
         </p:txBody>
@@ -8733,7 +8733,7 @@
                 </a:solidFill>
                 <a:latin typeface="Segoe UI"/>
               </a:rPr>
-              <a:t>Rs 52,175</a:t>
+              <a:t>Rs 52,050</a:t>
             </a:r>
           </a:p>
         </p:txBody>
@@ -8767,7 +8767,7 @@
                 </a:solidFill>
                 <a:latin typeface="Segoe UI"/>
               </a:rPr>
-              <a:t>Rs -37,825</a:t>
+              <a:t>Rs -37,950</a:t>
             </a:r>
           </a:p>
         </p:txBody>
@@ -8801,7 +8801,7 @@
                 </a:solidFill>
                 <a:latin typeface="Segoe UI"/>
               </a:rPr>
-              <a:t>-42.0%</a:t>
+              <a:t>-42.2%</a:t>
             </a:r>
           </a:p>
         </p:txBody>
@@ -8971,7 +8971,7 @@
                 </a:solidFill>
                 <a:latin typeface="Segoe UI"/>
               </a:rPr>
-              <a:t>729</a:t>
+              <a:t>736</a:t>
             </a:r>
           </a:p>
         </p:txBody>
@@ -9005,7 +9005,7 @@
                 </a:solidFill>
                 <a:latin typeface="Segoe UI"/>
               </a:rPr>
-              <a:t>Rs 43,734</a:t>
+              <a:t>Rs 44,136</a:t>
             </a:r>
           </a:p>
         </p:txBody>
@@ -9039,7 +9039,7 @@
                 </a:solidFill>
                 <a:latin typeface="Segoe UI"/>
               </a:rPr>
-              <a:t>Rs -47,466</a:t>
+              <a:t>Rs -47,064</a:t>
             </a:r>
           </a:p>
         </p:txBody>
@@ -9073,7 +9073,7 @@
                 </a:solidFill>
                 <a:latin typeface="Segoe UI"/>
               </a:rPr>
-              <a:t>-52.0%</a:t>
+              <a:t>-51.6%</a:t>
             </a:r>
           </a:p>
         </p:txBody>
@@ -9141,7 +9141,7 @@
                 </a:solidFill>
                 <a:latin typeface="Segoe UI"/>
               </a:rPr>
-              <a:t>Total Rs 1,961,584 | P&amp;L Rs 226,641 (+13.1%) | Sharpe 0.05 | Vol 20.4% | VaR95 -1.93%/day</a:t>
+              <a:t>Total Rs 1,950,245 | P&amp;L Rs 217,267 (+12.5%) | Sharpe 0.1 | Vol 20.34% | VaR95 -1.93%/day</a:t>
             </a:r>
           </a:p>
         </p:txBody>

--- a/docs/pmr_daily.pptx
+++ b/docs/pmr_daily.pptx
@@ -3197,7 +3197,7 @@
                 </a:solidFill>
                 <a:latin typeface="Segoe UI"/>
               </a:rPr>
-              <a:t>Monday, 28 Sep 2026 09:26 SGT</a:t>
+              <a:t>Tuesday, 29 Sep 2026 10:30 SGT</a:t>
             </a:r>
           </a:p>
         </p:txBody>
@@ -3227,11 +3227,11 @@
             <a:r>
               <a:rPr sz="2000" b="1">
                 <a:solidFill>
-                  <a:srgbClr val="F59E0B"/>
-                </a:solidFill>
-                <a:latin typeface="Segoe UI"/>
-              </a:rPr>
-              <a:t>Market tone: MIXED</a:t>
+                  <a:srgbClr val="EF4444"/>
+                </a:solidFill>
+                <a:latin typeface="Segoe UI"/>
+              </a:rPr>
+              <a:t>Market tone: RISK-OFF</a:t>
             </a:r>
           </a:p>
         </p:txBody>
@@ -3265,7 +3265,7 @@
                 </a:solidFill>
                 <a:latin typeface="Segoe UI"/>
               </a:rPr>
-              <a:t>RAG 13R / 15A / 18G   |   47.8% above 200DMA   |   Portfolio Rs 1,950,245 (+12.5%)</a:t>
+              <a:t>RAG 17R / 12A / 17G   |   45.7% above 200DMA   |   Portfolio Rs 1,931,521 (+11.3%)</a:t>
             </a:r>
           </a:p>
         </p:txBody>
@@ -3529,7 +3529,7 @@
                 </a:solidFill>
                 <a:latin typeface="Segoe UI"/>
               </a:rPr>
-              <a:t>+18.5%</a:t>
+              <a:t>+13.3%</a:t>
             </a:r>
           </a:p>
         </p:txBody>
@@ -3655,7 +3655,7 @@
                 </a:solidFill>
                 <a:latin typeface="Segoe UI"/>
               </a:rPr>
-              <a:t>+8.6%</a:t>
+              <a:t>+9.0%</a:t>
             </a:r>
           </a:p>
         </p:txBody>
@@ -3781,7 +3781,7 @@
                 </a:solidFill>
                 <a:latin typeface="Segoe UI"/>
               </a:rPr>
-              <a:t>+8.4%</a:t>
+              <a:t>+7.6%</a:t>
             </a:r>
           </a:p>
         </p:txBody>
@@ -3839,7 +3839,7 @@
                 </a:solidFill>
                 <a:latin typeface="Segoe UI"/>
               </a:rPr>
-              <a:t>Apple</a:t>
+              <a:t>Natural Gas</a:t>
             </a:r>
           </a:p>
         </p:txBody>
@@ -3869,11 +3869,11 @@
             <a:r>
               <a:rPr sz="900" b="0">
                 <a:solidFill>
-                  <a:srgbClr val="22C55E"/>
-                </a:solidFill>
-                <a:latin typeface="Segoe UI"/>
-              </a:rPr>
-              <a:t>AAPL · GREEN</a:t>
+                  <a:srgbClr val="EF4444"/>
+                </a:solidFill>
+                <a:latin typeface="Segoe UI"/>
+              </a:rPr>
+              <a:t>NG=F · RED</a:t>
             </a:r>
           </a:p>
         </p:txBody>
@@ -3907,7 +3907,7 @@
                 </a:solidFill>
                 <a:latin typeface="Segoe UI"/>
               </a:rPr>
-              <a:t>+7.6%</a:t>
+              <a:t>+6.8%</a:t>
             </a:r>
           </a:p>
         </p:txBody>
@@ -3965,7 +3965,7 @@
                 </a:solidFill>
                 <a:latin typeface="Segoe UI"/>
               </a:rPr>
-              <a:t>Bitcoin</a:t>
+              <a:t>Apple</a:t>
             </a:r>
           </a:p>
         </p:txBody>
@@ -3999,7 +3999,7 @@
                 </a:solidFill>
                 <a:latin typeface="Segoe UI"/>
               </a:rPr>
-              <a:t>BTC-USD · GREEN</a:t>
+              <a:t>AAPL · GREEN</a:t>
             </a:r>
           </a:p>
         </p:txBody>
@@ -4033,7 +4033,7 @@
                 </a:solidFill>
                 <a:latin typeface="Segoe UI"/>
               </a:rPr>
-              <a:t>+7.1%</a:t>
+              <a:t>+6.8%</a:t>
             </a:r>
           </a:p>
         </p:txBody>
@@ -4193,7 +4193,7 @@
                 </a:solidFill>
                 <a:latin typeface="Segoe UI"/>
               </a:rPr>
-              <a:t>-13.2%</a:t>
+              <a:t>-13.7%</a:t>
             </a:r>
           </a:p>
         </p:txBody>
@@ -4319,7 +4319,7 @@
                 </a:solidFill>
                 <a:latin typeface="Segoe UI"/>
               </a:rPr>
-              <a:t>-11.8%</a:t>
+              <a:t>-11.5%</a:t>
             </a:r>
           </a:p>
         </p:txBody>
@@ -4377,7 +4377,7 @@
                 </a:solidFill>
                 <a:latin typeface="Segoe UI"/>
               </a:rPr>
-              <a:t>NIFTY IT</a:t>
+              <a:t>ICICI Bank</a:t>
             </a:r>
           </a:p>
         </p:txBody>
@@ -4407,11 +4407,11 @@
             <a:r>
               <a:rPr sz="900" b="0">
                 <a:solidFill>
-                  <a:srgbClr val="EF4444"/>
-                </a:solidFill>
-                <a:latin typeface="Segoe UI"/>
-              </a:rPr>
-              <a:t>^CNXIT · RED</a:t>
+                  <a:srgbClr val="F59E0B"/>
+                </a:solidFill>
+                <a:latin typeface="Segoe UI"/>
+              </a:rPr>
+              <a:t>ICICIBANK.NS · AMBER</a:t>
             </a:r>
           </a:p>
         </p:txBody>
@@ -4445,7 +4445,7 @@
                 </a:solidFill>
                 <a:latin typeface="Segoe UI"/>
               </a:rPr>
-              <a:t>-9.7%</a:t>
+              <a:t>-10.5%</a:t>
             </a:r>
           </a:p>
         </p:txBody>
@@ -4503,7 +4503,7 @@
                 </a:solidFill>
                 <a:latin typeface="Segoe UI"/>
               </a:rPr>
-              <a:t>ICICI Bank</a:t>
+              <a:t>NIFTY IT</a:t>
             </a:r>
           </a:p>
         </p:txBody>
@@ -4533,11 +4533,11 @@
             <a:r>
               <a:rPr sz="900" b="0">
                 <a:solidFill>
-                  <a:srgbClr val="F59E0B"/>
-                </a:solidFill>
-                <a:latin typeface="Segoe UI"/>
-              </a:rPr>
-              <a:t>ICICIBANK.NS · AMBER</a:t>
+                  <a:srgbClr val="EF4444"/>
+                </a:solidFill>
+                <a:latin typeface="Segoe UI"/>
+              </a:rPr>
+              <a:t>^CNXIT · RED</a:t>
             </a:r>
           </a:p>
         </p:txBody>
@@ -4571,7 +4571,7 @@
                 </a:solidFill>
                 <a:latin typeface="Segoe UI"/>
               </a:rPr>
-              <a:t>-8.7%</a:t>
+              <a:t>-10.0%</a:t>
             </a:r>
           </a:p>
         </p:txBody>
@@ -4629,7 +4629,7 @@
                 </a:solidFill>
                 <a:latin typeface="Segoe UI"/>
               </a:rPr>
-              <a:t>Gold</a:t>
+              <a:t>Silver</a:t>
             </a:r>
           </a:p>
         </p:txBody>
@@ -4663,7 +4663,7 @@
                 </a:solidFill>
                 <a:latin typeface="Segoe UI"/>
               </a:rPr>
-              <a:t>GC=F · RED</a:t>
+              <a:t>SI=F · RED</a:t>
             </a:r>
           </a:p>
         </p:txBody>
@@ -4697,7 +4697,7 @@
                 </a:solidFill>
                 <a:latin typeface="Segoe UI"/>
               </a:rPr>
-              <a:t>-5.0%</a:t>
+              <a:t>-7.6%</a:t>
             </a:r>
           </a:p>
         </p:txBody>
@@ -5375,7 +5375,7 @@
                 </a:solidFill>
                 <a:latin typeface="Segoe UI"/>
               </a:rPr>
-              <a:t>Bitcoin</a:t>
+              <a:t>Nvidia</a:t>
             </a:r>
           </a:p>
         </p:txBody>
@@ -5647,7 +5647,7 @@
                 </a:solidFill>
                 <a:latin typeface="Segoe UI"/>
               </a:rPr>
-              <a:t>Nvidia</a:t>
+              <a:t>Bitcoin</a:t>
             </a:r>
           </a:p>
         </p:txBody>
@@ -5715,7 +5715,7 @@
                 </a:solidFill>
                 <a:latin typeface="Segoe UI"/>
               </a:rPr>
-              <a:t>95%</a:t>
+              <a:t>84%</a:t>
             </a:r>
           </a:p>
         </p:txBody>
@@ -5749,7 +5749,7 @@
                 </a:solidFill>
                 <a:latin typeface="Segoe UI"/>
               </a:rPr>
-              <a:t>above 200DMA · golden cross (50&gt;200) · MACD bullish</a:t>
+              <a:t>above 200DMA · golden cross (50&gt;200) · MACD bearish</a:t>
             </a:r>
           </a:p>
         </p:txBody>
@@ -5851,7 +5851,7 @@
                 </a:solidFill>
                 <a:latin typeface="Segoe UI"/>
               </a:rPr>
-              <a:t>83%</a:t>
+              <a:t>84%</a:t>
             </a:r>
           </a:p>
         </p:txBody>
@@ -5919,7 +5919,7 @@
                 </a:solidFill>
                 <a:latin typeface="Segoe UI"/>
               </a:rPr>
-              <a:t>S&amp;P 500</a:t>
+              <a:t>Straits Times</a:t>
             </a:r>
           </a:p>
         </p:txBody>
@@ -6191,7 +6191,7 @@
                 </a:solidFill>
                 <a:latin typeface="Segoe UI"/>
               </a:rPr>
-              <a:t>Apple</a:t>
+              <a:t>S&amp;P 500</a:t>
             </a:r>
           </a:p>
         </p:txBody>
@@ -6327,7 +6327,7 @@
                 </a:solidFill>
                 <a:latin typeface="Segoe UI"/>
               </a:rPr>
-              <a:t>Straits Times</a:t>
+              <a:t>US Energy</a:t>
             </a:r>
           </a:p>
         </p:txBody>
@@ -6395,7 +6395,7 @@
                 </a:solidFill>
                 <a:latin typeface="Segoe UI"/>
               </a:rPr>
-              <a:t>81%</a:t>
+              <a:t>80%</a:t>
             </a:r>
           </a:p>
         </p:txBody>
@@ -6429,7 +6429,7 @@
                 </a:solidFill>
                 <a:latin typeface="Segoe UI"/>
               </a:rPr>
-              <a:t>above 200DMA · golden cross (50&gt;200) · MACD bullish</a:t>
+              <a:t>above 200DMA · golden cross (50&gt;200) · MACD bearish</a:t>
             </a:r>
           </a:p>
         </p:txBody>
@@ -6531,7 +6531,7 @@
                 </a:solidFill>
                 <a:latin typeface="Segoe UI"/>
               </a:rPr>
-              <a:t>68%</a:t>
+              <a:t>69%</a:t>
             </a:r>
           </a:p>
         </p:txBody>
@@ -6659,7 +6659,7 @@
                 </a:solidFill>
                 <a:latin typeface="Segoe UI"/>
               </a:rPr>
-              <a:t>Base currency INR · USD/INR 95.8</a:t>
+              <a:t>Base currency INR · USD/INR 95.97</a:t>
             </a:r>
           </a:p>
         </p:txBody>
@@ -7067,7 +7067,7 @@
                 </a:solidFill>
                 <a:latin typeface="Segoe UI"/>
               </a:rPr>
-              <a:t>84,100</a:t>
+              <a:t>82,963</a:t>
             </a:r>
           </a:p>
         </p:txBody>
@@ -7101,7 +7101,7 @@
                 </a:solidFill>
                 <a:latin typeface="Segoe UI"/>
               </a:rPr>
-              <a:t>Rs 805,693</a:t>
+              <a:t>Rs 796,220</a:t>
             </a:r>
           </a:p>
         </p:txBody>
@@ -7135,7 +7135,7 @@
                 </a:solidFill>
                 <a:latin typeface="Segoe UI"/>
               </a:rPr>
-              <a:t>Rs 230,881</a:t>
+              <a:t>Rs 220,382</a:t>
             </a:r>
           </a:p>
         </p:txBody>
@@ -7169,7 +7169,7 @@
                 </a:solidFill>
                 <a:latin typeface="Segoe UI"/>
               </a:rPr>
-              <a:t>+40.2%</a:t>
+              <a:t>+38.3%</a:t>
             </a:r>
           </a:p>
         </p:txBody>
@@ -7203,7 +7203,7 @@
                 </a:solidFill>
                 <a:latin typeface="Segoe UI"/>
               </a:rPr>
-              <a:t>-0.4%</a:t>
+              <a:t>-1.8%</a:t>
             </a:r>
           </a:p>
         </p:txBody>
@@ -7339,7 +7339,7 @@
                 </a:solidFill>
                 <a:latin typeface="Segoe UI"/>
               </a:rPr>
-              <a:t>4,257</a:t>
+              <a:t>4,165</a:t>
             </a:r>
           </a:p>
         </p:txBody>
@@ -7373,7 +7373,7 @@
                 </a:solidFill>
                 <a:latin typeface="Segoe UI"/>
               </a:rPr>
-              <a:t>Rs 407,800</a:t>
+              <a:t>Rs 399,766</a:t>
             </a:r>
           </a:p>
         </p:txBody>
@@ -7407,7 +7407,7 @@
                 </a:solidFill>
                 <a:latin typeface="Segoe UI"/>
               </a:rPr>
-              <a:t>Rs 187,456</a:t>
+              <a:t>Rs 179,028</a:t>
             </a:r>
           </a:p>
         </p:txBody>
@@ -7441,7 +7441,7 @@
                 </a:solidFill>
                 <a:latin typeface="Segoe UI"/>
               </a:rPr>
-              <a:t>+85.1%</a:t>
+              <a:t>+81.1%</a:t>
             </a:r>
           </a:p>
         </p:txBody>
@@ -7611,7 +7611,7 @@
                 </a:solidFill>
                 <a:latin typeface="Segoe UI"/>
               </a:rPr>
-              <a:t>341</a:t>
+              <a:t>338</a:t>
             </a:r>
           </a:p>
         </p:txBody>
@@ -7645,7 +7645,7 @@
                 </a:solidFill>
                 <a:latin typeface="Segoe UI"/>
               </a:rPr>
-              <a:t>Rs 326,752</a:t>
+              <a:t>Rs 324,773</a:t>
             </a:r>
           </a:p>
         </p:txBody>
@@ -7679,7 +7679,7 @@
                 </a:solidFill>
                 <a:latin typeface="Segoe UI"/>
               </a:rPr>
-              <a:t>Rs 149,518</a:t>
+              <a:t>Rs 147,223</a:t>
             </a:r>
           </a:p>
         </p:txBody>
@@ -7713,7 +7713,7 @@
                 </a:solidFill>
                 <a:latin typeface="Segoe UI"/>
               </a:rPr>
-              <a:t>+84.4%</a:t>
+              <a:t>+82.9%</a:t>
             </a:r>
           </a:p>
         </p:txBody>
@@ -7883,7 +7883,7 @@
                 </a:solidFill>
                 <a:latin typeface="Segoe UI"/>
               </a:rPr>
-              <a:t>225</a:t>
+              <a:t>229</a:t>
             </a:r>
           </a:p>
         </p:txBody>
@@ -7917,7 +7917,7 @@
                 </a:solidFill>
                 <a:latin typeface="Segoe UI"/>
               </a:rPr>
-              <a:t>Rs 172,497</a:t>
+              <a:t>Rs 175,715</a:t>
             </a:r>
           </a:p>
         </p:txBody>
@@ -7951,7 +7951,7 @@
                 </a:solidFill>
                 <a:latin typeface="Segoe UI"/>
               </a:rPr>
-              <a:t>Rs -172,390</a:t>
+              <a:t>Rs -169,788</a:t>
             </a:r>
           </a:p>
         </p:txBody>
@@ -7985,7 +7985,7 @@
                 </a:solidFill>
                 <a:latin typeface="Segoe UI"/>
               </a:rPr>
-              <a:t>-50.0%</a:t>
+              <a:t>-49.1%</a:t>
             </a:r>
           </a:p>
         </p:txBody>
@@ -8155,7 +8155,7 @@
                 </a:solidFill>
                 <a:latin typeface="Segoe UI"/>
               </a:rPr>
-              <a:t>1,000</a:t>
+              <a:t>1,003</a:t>
             </a:r>
           </a:p>
         </p:txBody>
@@ -8189,7 +8189,7 @@
                 </a:solidFill>
                 <a:latin typeface="Segoe UI"/>
               </a:rPr>
-              <a:t>Rs 80,016</a:t>
+              <a:t>Rs 80,256</a:t>
             </a:r>
           </a:p>
         </p:txBody>
@@ -8223,7 +8223,7 @@
                 </a:solidFill>
                 <a:latin typeface="Segoe UI"/>
               </a:rPr>
-              <a:t>Rs -31,984</a:t>
+              <a:t>Rs -31,744</a:t>
             </a:r>
           </a:p>
         </p:txBody>
@@ -8257,7 +8257,7 @@
                 </a:solidFill>
                 <a:latin typeface="Segoe UI"/>
               </a:rPr>
-              <a:t>-28.6%</a:t>
+              <a:t>-28.3%</a:t>
             </a:r>
           </a:p>
         </p:txBody>
@@ -8427,7 +8427,7 @@
                 </a:solidFill>
                 <a:latin typeface="Segoe UI"/>
               </a:rPr>
-              <a:t>1,226</a:t>
+              <a:t>1,198</a:t>
             </a:r>
           </a:p>
         </p:txBody>
@@ -8461,7 +8461,7 @@
                 </a:solidFill>
                 <a:latin typeface="Segoe UI"/>
               </a:rPr>
-              <a:t>Rs 61,300</a:t>
+              <a:t>Rs 59,880</a:t>
             </a:r>
           </a:p>
         </p:txBody>
@@ -8495,7 +8495,7 @@
                 </a:solidFill>
                 <a:latin typeface="Segoe UI"/>
               </a:rPr>
-              <a:t>Rs -61,200</a:t>
+              <a:t>Rs -62,620</a:t>
             </a:r>
           </a:p>
         </p:txBody>
@@ -8529,7 +8529,7 @@
                 </a:solidFill>
                 <a:latin typeface="Segoe UI"/>
               </a:rPr>
-              <a:t>-50.0%</a:t>
+              <a:t>-51.1%</a:t>
             </a:r>
           </a:p>
         </p:txBody>
@@ -8699,7 +8699,7 @@
                 </a:solidFill>
                 <a:latin typeface="Segoe UI"/>
               </a:rPr>
-              <a:t>2,082</a:t>
+              <a:t>2,071</a:t>
             </a:r>
           </a:p>
         </p:txBody>
@@ -8733,7 +8733,7 @@
                 </a:solidFill>
                 <a:latin typeface="Segoe UI"/>
               </a:rPr>
-              <a:t>Rs 52,050</a:t>
+              <a:t>Rs 51,767</a:t>
             </a:r>
           </a:p>
         </p:txBody>
@@ -8767,7 +8767,7 @@
                 </a:solidFill>
                 <a:latin typeface="Segoe UI"/>
               </a:rPr>
-              <a:t>Rs -37,950</a:t>
+              <a:t>Rs -38,233</a:t>
             </a:r>
           </a:p>
         </p:txBody>
@@ -8801,7 +8801,7 @@
                 </a:solidFill>
                 <a:latin typeface="Segoe UI"/>
               </a:rPr>
-              <a:t>-42.2%</a:t>
+              <a:t>-42.5%</a:t>
             </a:r>
           </a:p>
         </p:txBody>
@@ -8971,7 +8971,7 @@
                 </a:solidFill>
                 <a:latin typeface="Segoe UI"/>
               </a:rPr>
-              <a:t>736</a:t>
+              <a:t>719</a:t>
             </a:r>
           </a:p>
         </p:txBody>
@@ -9005,7 +9005,7 @@
                 </a:solidFill>
                 <a:latin typeface="Segoe UI"/>
               </a:rPr>
-              <a:t>Rs 44,136</a:t>
+              <a:t>Rs 43,143</a:t>
             </a:r>
           </a:p>
         </p:txBody>
@@ -9039,7 +9039,7 @@
                 </a:solidFill>
                 <a:latin typeface="Segoe UI"/>
               </a:rPr>
-              <a:t>Rs -47,064</a:t>
+              <a:t>Rs -48,057</a:t>
             </a:r>
           </a:p>
         </p:txBody>
@@ -9073,7 +9073,7 @@
                 </a:solidFill>
                 <a:latin typeface="Segoe UI"/>
               </a:rPr>
-              <a:t>-51.6%</a:t>
+              <a:t>-52.7%</a:t>
             </a:r>
           </a:p>
         </p:txBody>
@@ -9141,7 +9141,7 @@
                 </a:solidFill>
                 <a:latin typeface="Segoe UI"/>
               </a:rPr>
-              <a:t>Total Rs 1,950,245 | P&amp;L Rs 217,267 (+12.5%) | Sharpe 0.1 | Vol 20.34% | VaR95 -1.93%/day</a:t>
+              <a:t>Total Rs 1,931,521 | P&amp;L Rs 196,192 (+11.3%) | Sharpe 0.16 | Vol 20.22% | VaR95 -1.91%/day</a:t>
             </a:r>
           </a:p>
         </p:txBody>

--- a/docs/pmr_daily.pptx
+++ b/docs/pmr_daily.pptx
@@ -3197,7 +3197,7 @@
                 </a:solidFill>
                 <a:latin typeface="Segoe UI"/>
               </a:rPr>
-              <a:t>Tuesday, 29 Sep 2026 10:30 SGT</a:t>
+              <a:t>Wednesday, 30 Sep 2026 09:52 SGT</a:t>
             </a:r>
           </a:p>
         </p:txBody>
@@ -3265,7 +3265,7 @@
                 </a:solidFill>
                 <a:latin typeface="Segoe UI"/>
               </a:rPr>
-              <a:t>RAG 17R / 12A / 17G   |   45.7% above 200DMA   |   Portfolio Rs 1,931,521 (+11.3%)</a:t>
+              <a:t>RAG 17R / 13A / 16G   |   43.5% above 200DMA   |   Portfolio Rs 1,929,107 (+11.2%)</a:t>
             </a:r>
           </a:p>
         </p:txBody>
@@ -3529,7 +3529,7 @@
                 </a:solidFill>
                 <a:latin typeface="Segoe UI"/>
               </a:rPr>
-              <a:t>+13.3%</a:t>
+              <a:t>+16.1%</a:t>
             </a:r>
           </a:p>
         </p:txBody>
@@ -3587,7 +3587,7 @@
                 </a:solidFill>
                 <a:latin typeface="Segoe UI"/>
               </a:rPr>
-              <a:t>Crude Oil WTI</a:t>
+              <a:t>Ethereum</a:t>
             </a:r>
           </a:p>
         </p:txBody>
@@ -3617,11 +3617,11 @@
             <a:r>
               <a:rPr sz="900" b="0">
                 <a:solidFill>
-                  <a:srgbClr val="EF4444"/>
-                </a:solidFill>
-                <a:latin typeface="Segoe UI"/>
-              </a:rPr>
-              <a:t>CL=F · RED</a:t>
+                  <a:srgbClr val="22C55E"/>
+                </a:solidFill>
+                <a:latin typeface="Segoe UI"/>
+              </a:rPr>
+              <a:t>ETH-USD · GREEN</a:t>
             </a:r>
           </a:p>
         </p:txBody>
@@ -3655,7 +3655,7 @@
                 </a:solidFill>
                 <a:latin typeface="Segoe UI"/>
               </a:rPr>
-              <a:t>+9.0%</a:t>
+              <a:t>+8.4%</a:t>
             </a:r>
           </a:p>
         </p:txBody>
@@ -3713,7 +3713,7 @@
                 </a:solidFill>
                 <a:latin typeface="Segoe UI"/>
               </a:rPr>
-              <a:t>Ethereum</a:t>
+              <a:t>Bitcoin</a:t>
             </a:r>
           </a:p>
         </p:txBody>
@@ -3747,7 +3747,7 @@
                 </a:solidFill>
                 <a:latin typeface="Segoe UI"/>
               </a:rPr>
-              <a:t>ETH-USD · GREEN</a:t>
+              <a:t>BTC-USD · GREEN</a:t>
             </a:r>
           </a:p>
         </p:txBody>
@@ -3781,7 +3781,7 @@
                 </a:solidFill>
                 <a:latin typeface="Segoe UI"/>
               </a:rPr>
-              <a:t>+7.6%</a:t>
+              <a:t>+6.2%</a:t>
             </a:r>
           </a:p>
         </p:txBody>
@@ -3839,7 +3839,7 @@
                 </a:solidFill>
                 <a:latin typeface="Segoe UI"/>
               </a:rPr>
-              <a:t>Natural Gas</a:t>
+              <a:t>US Technology</a:t>
             </a:r>
           </a:p>
         </p:txBody>
@@ -3869,11 +3869,11 @@
             <a:r>
               <a:rPr sz="900" b="0">
                 <a:solidFill>
-                  <a:srgbClr val="EF4444"/>
-                </a:solidFill>
-                <a:latin typeface="Segoe UI"/>
-              </a:rPr>
-              <a:t>NG=F · RED</a:t>
+                  <a:srgbClr val="22C55E"/>
+                </a:solidFill>
+                <a:latin typeface="Segoe UI"/>
+              </a:rPr>
+              <a:t>XLK · GREEN</a:t>
             </a:r>
           </a:p>
         </p:txBody>
@@ -3907,7 +3907,7 @@
                 </a:solidFill>
                 <a:latin typeface="Segoe UI"/>
               </a:rPr>
-              <a:t>+6.8%</a:t>
+              <a:t>+4.4%</a:t>
             </a:r>
           </a:p>
         </p:txBody>
@@ -3965,7 +3965,7 @@
                 </a:solidFill>
                 <a:latin typeface="Segoe UI"/>
               </a:rPr>
-              <a:t>Apple</a:t>
+              <a:t>Crude Oil WTI</a:t>
             </a:r>
           </a:p>
         </p:txBody>
@@ -3995,11 +3995,11 @@
             <a:r>
               <a:rPr sz="900" b="0">
                 <a:solidFill>
-                  <a:srgbClr val="22C55E"/>
-                </a:solidFill>
-                <a:latin typeface="Segoe UI"/>
-              </a:rPr>
-              <a:t>AAPL · GREEN</a:t>
+                  <a:srgbClr val="EF4444"/>
+                </a:solidFill>
+                <a:latin typeface="Segoe UI"/>
+              </a:rPr>
+              <a:t>CL=F · RED</a:t>
             </a:r>
           </a:p>
         </p:txBody>
@@ -4033,7 +4033,7 @@
                 </a:solidFill>
                 <a:latin typeface="Segoe UI"/>
               </a:rPr>
-              <a:t>+6.8%</a:t>
+              <a:t>+4.4%</a:t>
             </a:r>
           </a:p>
         </p:txBody>
@@ -4193,7 +4193,7 @@
                 </a:solidFill>
                 <a:latin typeface="Segoe UI"/>
               </a:rPr>
-              <a:t>-13.7%</a:t>
+              <a:t>-15.3%</a:t>
             </a:r>
           </a:p>
         </p:txBody>
@@ -4251,7 +4251,7 @@
                 </a:solidFill>
                 <a:latin typeface="Segoe UI"/>
               </a:rPr>
-              <a:t>Infosys</a:t>
+              <a:t>NIFTY IT</a:t>
             </a:r>
           </a:p>
         </p:txBody>
@@ -4285,7 +4285,7 @@
                 </a:solidFill>
                 <a:latin typeface="Segoe UI"/>
               </a:rPr>
-              <a:t>INFY.NS · RED</a:t>
+              <a:t>^CNXIT · RED</a:t>
             </a:r>
           </a:p>
         </p:txBody>
@@ -4319,7 +4319,7 @@
                 </a:solidFill>
                 <a:latin typeface="Segoe UI"/>
               </a:rPr>
-              <a:t>-11.5%</a:t>
+              <a:t>-11.3%</a:t>
             </a:r>
           </a:p>
         </p:txBody>
@@ -4445,7 +4445,7 @@
                 </a:solidFill>
                 <a:latin typeface="Segoe UI"/>
               </a:rPr>
-              <a:t>-10.5%</a:t>
+              <a:t>-11.1%</a:t>
             </a:r>
           </a:p>
         </p:txBody>
@@ -4503,7 +4503,7 @@
                 </a:solidFill>
                 <a:latin typeface="Segoe UI"/>
               </a:rPr>
-              <a:t>NIFTY IT</a:t>
+              <a:t>Infosys</a:t>
             </a:r>
           </a:p>
         </p:txBody>
@@ -4537,7 +4537,7 @@
                 </a:solidFill>
                 <a:latin typeface="Segoe UI"/>
               </a:rPr>
-              <a:t>^CNXIT · RED</a:t>
+              <a:t>INFY.NS · RED</a:t>
             </a:r>
           </a:p>
         </p:txBody>
@@ -4571,7 +4571,7 @@
                 </a:solidFill>
                 <a:latin typeface="Segoe UI"/>
               </a:rPr>
-              <a:t>-10.0%</a:t>
+              <a:t>-10.4%</a:t>
             </a:r>
           </a:p>
         </p:txBody>
@@ -4629,7 +4629,7 @@
                 </a:solidFill>
                 <a:latin typeface="Segoe UI"/>
               </a:rPr>
-              <a:t>Silver</a:t>
+              <a:t>Reliance</a:t>
             </a:r>
           </a:p>
         </p:txBody>
@@ -4663,7 +4663,7 @@
                 </a:solidFill>
                 <a:latin typeface="Segoe UI"/>
               </a:rPr>
-              <a:t>SI=F · RED</a:t>
+              <a:t>RELIANCE.NS · RED</a:t>
             </a:r>
           </a:p>
         </p:txBody>
@@ -4697,7 +4697,7 @@
                 </a:solidFill>
                 <a:latin typeface="Segoe UI"/>
               </a:rPr>
-              <a:t>-7.6%</a:t>
+              <a:t>-7.4%</a:t>
             </a:r>
           </a:p>
         </p:txBody>
@@ -5919,7 +5919,7 @@
                 </a:solidFill>
                 <a:latin typeface="Segoe UI"/>
               </a:rPr>
-              <a:t>Straits Times</a:t>
+              <a:t>Copper</a:t>
             </a:r>
           </a:p>
         </p:txBody>
@@ -5987,7 +5987,7 @@
                 </a:solidFill>
                 <a:latin typeface="Segoe UI"/>
               </a:rPr>
-              <a:t>82%</a:t>
+              <a:t>81%</a:t>
             </a:r>
           </a:p>
         </p:txBody>
@@ -6021,7 +6021,7 @@
                 </a:solidFill>
                 <a:latin typeface="Segoe UI"/>
               </a:rPr>
-              <a:t>above 200DMA · golden cross (50&gt;200) · MACD bullish</a:t>
+              <a:t>above 200DMA · golden cross (50&gt;200) · MACD bearish</a:t>
             </a:r>
           </a:p>
         </p:txBody>
@@ -6055,7 +6055,7 @@
                 </a:solidFill>
                 <a:latin typeface="Segoe UI"/>
               </a:rPr>
-              <a:t>Copper</a:t>
+              <a:t>USD/INR</a:t>
             </a:r>
           </a:p>
         </p:txBody>
@@ -6123,7 +6123,7 @@
                 </a:solidFill>
                 <a:latin typeface="Segoe UI"/>
               </a:rPr>
-              <a:t>94%</a:t>
+              <a:t>80%</a:t>
             </a:r>
           </a:p>
         </p:txBody>
@@ -6191,7 +6191,7 @@
                 </a:solidFill>
                 <a:latin typeface="Segoe UI"/>
               </a:rPr>
-              <a:t>S&amp;P 500</a:t>
+              <a:t>Nikkei 225</a:t>
             </a:r>
           </a:p>
         </p:txBody>
@@ -6225,7 +6225,7 @@
                 </a:solidFill>
                 <a:latin typeface="Segoe UI"/>
               </a:rPr>
-              <a:t>STRONG BUY</a:t>
+              <a:t>BUY</a:t>
             </a:r>
           </a:p>
         </p:txBody>
@@ -6259,7 +6259,7 @@
                 </a:solidFill>
                 <a:latin typeface="Segoe UI"/>
               </a:rPr>
-              <a:t>81%</a:t>
+              <a:t>75%</a:t>
             </a:r>
           </a:p>
         </p:txBody>
@@ -6327,7 +6327,7 @@
                 </a:solidFill>
                 <a:latin typeface="Segoe UI"/>
               </a:rPr>
-              <a:t>US Energy</a:t>
+              <a:t>S&amp;P 500</a:t>
             </a:r>
           </a:p>
         </p:txBody>
@@ -6361,7 +6361,7 @@
                 </a:solidFill>
                 <a:latin typeface="Segoe UI"/>
               </a:rPr>
-              <a:t>STRONG BUY</a:t>
+              <a:t>BUY</a:t>
             </a:r>
           </a:p>
         </p:txBody>
@@ -6395,7 +6395,7 @@
                 </a:solidFill>
                 <a:latin typeface="Segoe UI"/>
               </a:rPr>
-              <a:t>80%</a:t>
+              <a:t>69%</a:t>
             </a:r>
           </a:p>
         </p:txBody>
@@ -6463,7 +6463,7 @@
                 </a:solidFill>
                 <a:latin typeface="Segoe UI"/>
               </a:rPr>
-              <a:t>Natural Gas</a:t>
+              <a:t>Straits Times</a:t>
             </a:r>
           </a:p>
         </p:txBody>
@@ -6531,7 +6531,7 @@
                 </a:solidFill>
                 <a:latin typeface="Segoe UI"/>
               </a:rPr>
-              <a:t>69%</a:t>
+              <a:t>68%</a:t>
             </a:r>
           </a:p>
         </p:txBody>
@@ -6565,7 +6565,7 @@
                 </a:solidFill>
                 <a:latin typeface="Segoe UI"/>
               </a:rPr>
-              <a:t>above 200DMA · death cross (50&lt;200) · MACD bullish</a:t>
+              <a:t>above 200DMA · golden cross (50&gt;200) · MACD bullish</a:t>
             </a:r>
           </a:p>
         </p:txBody>
@@ -7067,7 +7067,7 @@
                 </a:solidFill>
                 <a:latin typeface="Segoe UI"/>
               </a:rPr>
-              <a:t>82,963</a:t>
+              <a:t>83,444</a:t>
             </a:r>
           </a:p>
         </p:txBody>
@@ -7101,7 +7101,7 @@
                 </a:solidFill>
                 <a:latin typeface="Segoe UI"/>
               </a:rPr>
-              <a:t>Rs 796,220</a:t>
+              <a:t>Rs 800,807</a:t>
             </a:r>
           </a:p>
         </p:txBody>
@@ -7135,7 +7135,7 @@
                 </a:solidFill>
                 <a:latin typeface="Segoe UI"/>
               </a:rPr>
-              <a:t>Rs 220,382</a:t>
+              <a:t>Rs 224,987</a:t>
             </a:r>
           </a:p>
         </p:txBody>
@@ -7169,7 +7169,7 @@
                 </a:solidFill>
                 <a:latin typeface="Segoe UI"/>
               </a:rPr>
-              <a:t>+38.3%</a:t>
+              <a:t>+39.1%</a:t>
             </a:r>
           </a:p>
         </p:txBody>
@@ -7203,7 +7203,7 @@
                 </a:solidFill>
                 <a:latin typeface="Segoe UI"/>
               </a:rPr>
-              <a:t>-1.8%</a:t>
+              <a:t>-0.1%</a:t>
             </a:r>
           </a:p>
         </p:txBody>
@@ -7339,7 +7339,7 @@
                 </a:solidFill>
                 <a:latin typeface="Segoe UI"/>
               </a:rPr>
-              <a:t>4,165</a:t>
+              <a:t>4,202</a:t>
             </a:r>
           </a:p>
         </p:txBody>
@@ -7373,7 +7373,7 @@
                 </a:solidFill>
                 <a:latin typeface="Segoe UI"/>
               </a:rPr>
-              <a:t>Rs 399,766</a:t>
+              <a:t>Rs 403,228</a:t>
             </a:r>
           </a:p>
         </p:txBody>
@@ -7407,7 +7407,7 @@
                 </a:solidFill>
                 <a:latin typeface="Segoe UI"/>
               </a:rPr>
-              <a:t>Rs 179,028</a:t>
+              <a:t>Rs 182,497</a:t>
             </a:r>
           </a:p>
         </p:txBody>
@@ -7441,7 +7441,7 @@
                 </a:solidFill>
                 <a:latin typeface="Segoe UI"/>
               </a:rPr>
-              <a:t>+81.1%</a:t>
+              <a:t>+82.7%</a:t>
             </a:r>
           </a:p>
         </p:txBody>
@@ -7611,7 +7611,7 @@
                 </a:solidFill>
                 <a:latin typeface="Segoe UI"/>
               </a:rPr>
-              <a:t>338</a:t>
+              <a:t>329</a:t>
             </a:r>
           </a:p>
         </p:txBody>
@@ -7645,7 +7645,7 @@
                 </a:solidFill>
                 <a:latin typeface="Segoe UI"/>
               </a:rPr>
-              <a:t>Rs 324,773</a:t>
+              <a:t>Rs 316,125</a:t>
             </a:r>
           </a:p>
         </p:txBody>
@@ -7679,7 +7679,7 @@
                 </a:solidFill>
                 <a:latin typeface="Segoe UI"/>
               </a:rPr>
-              <a:t>Rs 147,223</a:t>
+              <a:t>Rs 138,581</a:t>
             </a:r>
           </a:p>
         </p:txBody>
@@ -7713,7 +7713,7 @@
                 </a:solidFill>
                 <a:latin typeface="Segoe UI"/>
               </a:rPr>
-              <a:t>+82.9%</a:t>
+              <a:t>+78.0%</a:t>
             </a:r>
           </a:p>
         </p:txBody>
@@ -7883,7 +7883,7 @@
                 </a:solidFill>
                 <a:latin typeface="Segoe UI"/>
               </a:rPr>
-              <a:t>229</a:t>
+              <a:t>227</a:t>
             </a:r>
           </a:p>
         </p:txBody>
@@ -7917,7 +7917,7 @@
                 </a:solidFill>
                 <a:latin typeface="Segoe UI"/>
               </a:rPr>
-              <a:t>Rs 175,715</a:t>
+              <a:t>Rs 174,443</a:t>
             </a:r>
           </a:p>
         </p:txBody>
@@ -7951,7 +7951,7 @@
                 </a:solidFill>
                 <a:latin typeface="Segoe UI"/>
               </a:rPr>
-              <a:t>Rs -169,788</a:t>
+              <a:t>Rs -171,049</a:t>
             </a:r>
           </a:p>
         </p:txBody>
@@ -7985,7 +7985,7 @@
                 </a:solidFill>
                 <a:latin typeface="Segoe UI"/>
               </a:rPr>
-              <a:t>-49.1%</a:t>
+              <a:t>-49.5%</a:t>
             </a:r>
           </a:p>
         </p:txBody>
@@ -8155,7 +8155,7 @@
                 </a:solidFill>
                 <a:latin typeface="Segoe UI"/>
               </a:rPr>
-              <a:t>1,003</a:t>
+              <a:t>1,015</a:t>
             </a:r>
           </a:p>
         </p:txBody>
@@ -8189,7 +8189,7 @@
                 </a:solidFill>
                 <a:latin typeface="Segoe UI"/>
               </a:rPr>
-              <a:t>Rs 80,256</a:t>
+              <a:t>Rs 81,232</a:t>
             </a:r>
           </a:p>
         </p:txBody>
@@ -8223,7 +8223,7 @@
                 </a:solidFill>
                 <a:latin typeface="Segoe UI"/>
               </a:rPr>
-              <a:t>Rs -31,744</a:t>
+              <a:t>Rs -30,768</a:t>
             </a:r>
           </a:p>
         </p:txBody>
@@ -8257,7 +8257,7 @@
                 </a:solidFill>
                 <a:latin typeface="Segoe UI"/>
               </a:rPr>
-              <a:t>-28.3%</a:t>
+              <a:t>-27.5%</a:t>
             </a:r>
           </a:p>
         </p:txBody>
@@ -8427,7 +8427,7 @@
                 </a:solidFill>
                 <a:latin typeface="Segoe UI"/>
               </a:rPr>
-              <a:t>1,198</a:t>
+              <a:t>1,182</a:t>
             </a:r>
           </a:p>
         </p:txBody>
@@ -8461,7 +8461,7 @@
                 </a:solidFill>
                 <a:latin typeface="Segoe UI"/>
               </a:rPr>
-              <a:t>Rs 59,880</a:t>
+              <a:t>Rs 59,100</a:t>
             </a:r>
           </a:p>
         </p:txBody>
@@ -8495,7 +8495,7 @@
                 </a:solidFill>
                 <a:latin typeface="Segoe UI"/>
               </a:rPr>
-              <a:t>Rs -62,620</a:t>
+              <a:t>Rs -63,400</a:t>
             </a:r>
           </a:p>
         </p:txBody>
@@ -8529,7 +8529,7 @@
                 </a:solidFill>
                 <a:latin typeface="Segoe UI"/>
               </a:rPr>
-              <a:t>-51.1%</a:t>
+              <a:t>-51.8%</a:t>
             </a:r>
           </a:p>
         </p:txBody>
@@ -8699,7 +8699,7 @@
                 </a:solidFill>
                 <a:latin typeface="Segoe UI"/>
               </a:rPr>
-              <a:t>2,071</a:t>
+              <a:t>2,032</a:t>
             </a:r>
           </a:p>
         </p:txBody>
@@ -8733,7 +8733,7 @@
                 </a:solidFill>
                 <a:latin typeface="Segoe UI"/>
               </a:rPr>
-              <a:t>Rs 51,767</a:t>
+              <a:t>Rs 50,810</a:t>
             </a:r>
           </a:p>
         </p:txBody>
@@ -8767,7 +8767,7 @@
                 </a:solidFill>
                 <a:latin typeface="Segoe UI"/>
               </a:rPr>
-              <a:t>Rs -38,233</a:t>
+              <a:t>Rs -39,190</a:t>
             </a:r>
           </a:p>
         </p:txBody>
@@ -8801,7 +8801,7 @@
                 </a:solidFill>
                 <a:latin typeface="Segoe UI"/>
               </a:rPr>
-              <a:t>-42.5%</a:t>
+              <a:t>-43.5%</a:t>
             </a:r>
           </a:p>
         </p:txBody>
@@ -8971,7 +8971,7 @@
                 </a:solidFill>
                 <a:latin typeface="Segoe UI"/>
               </a:rPr>
-              <a:t>719</a:t>
+              <a:t>723</a:t>
             </a:r>
           </a:p>
         </p:txBody>
@@ -9005,7 +9005,7 @@
                 </a:solidFill>
                 <a:latin typeface="Segoe UI"/>
               </a:rPr>
-              <a:t>Rs 43,143</a:t>
+              <a:t>Rs 43,362</a:t>
             </a:r>
           </a:p>
         </p:txBody>
@@ -9039,7 +9039,7 @@
                 </a:solidFill>
                 <a:latin typeface="Segoe UI"/>
               </a:rPr>
-              <a:t>Rs -48,057</a:t>
+              <a:t>Rs -47,838</a:t>
             </a:r>
           </a:p>
         </p:txBody>
@@ -9073,7 +9073,7 @@
                 </a:solidFill>
                 <a:latin typeface="Segoe UI"/>
               </a:rPr>
-              <a:t>-52.7%</a:t>
+              <a:t>-52.5%</a:t>
             </a:r>
           </a:p>
         </p:txBody>
@@ -9141,7 +9141,7 @@
                 </a:solidFill>
                 <a:latin typeface="Segoe UI"/>
               </a:rPr>
-              <a:t>Total Rs 1,931,521 | P&amp;L Rs 196,192 (+11.3%) | Sharpe 0.16 | Vol 20.22% | VaR95 -1.91%/day</a:t>
+              <a:t>Total Rs 1,929,107 | P&amp;L Rs 193,819 (+11.2%) | Sharpe 0.09 | Vol 20.3% | VaR95 -1.9%/day</a:t>
             </a:r>
           </a:p>
         </p:txBody>

--- a/docs/pmr_daily.pptx
+++ b/docs/pmr_daily.pptx
@@ -3197,7 +3197,7 @@
                 </a:solidFill>
                 <a:latin typeface="Segoe UI"/>
               </a:rPr>
-              <a:t>Wednesday, 30 Sep 2026 09:52 SGT</a:t>
+              <a:t>Thursday, 01 Oct 2026 09:49 SGT</a:t>
             </a:r>
           </a:p>
         </p:txBody>
@@ -3227,11 +3227,11 @@
             <a:r>
               <a:rPr sz="2000" b="1">
                 <a:solidFill>
-                  <a:srgbClr val="EF4444"/>
-                </a:solidFill>
-                <a:latin typeface="Segoe UI"/>
-              </a:rPr>
-              <a:t>Market tone: RISK-OFF</a:t>
+                  <a:srgbClr val="F59E0B"/>
+                </a:solidFill>
+                <a:latin typeface="Segoe UI"/>
+              </a:rPr>
+              <a:t>Market tone: MIXED</a:t>
             </a:r>
           </a:p>
         </p:txBody>
@@ -3265,7 +3265,7 @@
                 </a:solidFill>
                 <a:latin typeface="Segoe UI"/>
               </a:rPr>
-              <a:t>RAG 17R / 13A / 16G   |   43.5% above 200DMA   |   Portfolio Rs 1,929,107 (+11.2%)</a:t>
+              <a:t>RAG 16R / 15A / 15G   |   45.7% above 200DMA   |   Portfolio Rs 1,932,551 (+11.3%)</a:t>
             </a:r>
           </a:p>
         </p:txBody>
@@ -3461,7 +3461,7 @@
                 </a:solidFill>
                 <a:latin typeface="Segoe UI"/>
               </a:rPr>
-              <a:t>Solana</a:t>
+              <a:t>Nikkei 225</a:t>
             </a:r>
           </a:p>
         </p:txBody>
@@ -3491,11 +3491,11 @@
             <a:r>
               <a:rPr sz="900" b="0">
                 <a:solidFill>
-                  <a:srgbClr val="22C55E"/>
-                </a:solidFill>
-                <a:latin typeface="Segoe UI"/>
-              </a:rPr>
-              <a:t>SOL-USD · GREEN</a:t>
+                  <a:srgbClr val="F59E0B"/>
+                </a:solidFill>
+                <a:latin typeface="Segoe UI"/>
+              </a:rPr>
+              <a:t>^N225 · AMBER</a:t>
             </a:r>
           </a:p>
         </p:txBody>
@@ -3529,7 +3529,7 @@
                 </a:solidFill>
                 <a:latin typeface="Segoe UI"/>
               </a:rPr>
-              <a:t>+16.1%</a:t>
+              <a:t>+2.0%</a:t>
             </a:r>
           </a:p>
         </p:txBody>
@@ -3587,7 +3587,7 @@
                 </a:solidFill>
                 <a:latin typeface="Segoe UI"/>
               </a:rPr>
-              <a:t>Ethereum</a:t>
+              <a:t>USD/JPY</a:t>
             </a:r>
           </a:p>
         </p:txBody>
@@ -3617,11 +3617,11 @@
             <a:r>
               <a:rPr sz="900" b="0">
                 <a:solidFill>
-                  <a:srgbClr val="22C55E"/>
-                </a:solidFill>
-                <a:latin typeface="Segoe UI"/>
-              </a:rPr>
-              <a:t>ETH-USD · GREEN</a:t>
+                  <a:srgbClr val="F59E0B"/>
+                </a:solidFill>
+                <a:latin typeface="Segoe UI"/>
+              </a:rPr>
+              <a:t>JPY=X · AMBER</a:t>
             </a:r>
           </a:p>
         </p:txBody>
@@ -3655,7 +3655,7 @@
                 </a:solidFill>
                 <a:latin typeface="Segoe UI"/>
               </a:rPr>
-              <a:t>+8.4%</a:t>
+              <a:t>+0.5%</a:t>
             </a:r>
           </a:p>
         </p:txBody>
@@ -3713,7 +3713,7 @@
                 </a:solidFill>
                 <a:latin typeface="Segoe UI"/>
               </a:rPr>
-              <a:t>Bitcoin</a:t>
+              <a:t>Ethereum</a:t>
             </a:r>
           </a:p>
         </p:txBody>
@@ -3747,7 +3747,7 @@
                 </a:solidFill>
                 <a:latin typeface="Segoe UI"/>
               </a:rPr>
-              <a:t>BTC-USD · GREEN</a:t>
+              <a:t>ETH-USD · GREEN</a:t>
             </a:r>
           </a:p>
         </p:txBody>
@@ -3781,7 +3781,7 @@
                 </a:solidFill>
                 <a:latin typeface="Segoe UI"/>
               </a:rPr>
-              <a:t>+6.2%</a:t>
+              <a:t>+0.4%</a:t>
             </a:r>
           </a:p>
         </p:txBody>
@@ -3839,7 +3839,7 @@
                 </a:solidFill>
                 <a:latin typeface="Segoe UI"/>
               </a:rPr>
-              <a:t>US Technology</a:t>
+              <a:t>Clean Energy</a:t>
             </a:r>
           </a:p>
         </p:txBody>
@@ -3869,11 +3869,11 @@
             <a:r>
               <a:rPr sz="900" b="0">
                 <a:solidFill>
-                  <a:srgbClr val="22C55E"/>
-                </a:solidFill>
-                <a:latin typeface="Segoe UI"/>
-              </a:rPr>
-              <a:t>XLK · GREEN</a:t>
+                  <a:srgbClr val="EF4444"/>
+                </a:solidFill>
+                <a:latin typeface="Segoe UI"/>
+              </a:rPr>
+              <a:t>ICLN · RED</a:t>
             </a:r>
           </a:p>
         </p:txBody>
@@ -3907,7 +3907,7 @@
                 </a:solidFill>
                 <a:latin typeface="Segoe UI"/>
               </a:rPr>
-              <a:t>+4.4%</a:t>
+              <a:t>+0.0%</a:t>
             </a:r>
           </a:p>
         </p:txBody>
@@ -3965,7 +3965,7 @@
                 </a:solidFill>
                 <a:latin typeface="Segoe UI"/>
               </a:rPr>
-              <a:t>Crude Oil WTI</a:t>
+              <a:t>US Financials</a:t>
             </a:r>
           </a:p>
         </p:txBody>
@@ -3995,11 +3995,11 @@
             <a:r>
               <a:rPr sz="900" b="0">
                 <a:solidFill>
-                  <a:srgbClr val="EF4444"/>
-                </a:solidFill>
-                <a:latin typeface="Segoe UI"/>
-              </a:rPr>
-              <a:t>CL=F · RED</a:t>
+                  <a:srgbClr val="F59E0B"/>
+                </a:solidFill>
+                <a:latin typeface="Segoe UI"/>
+              </a:rPr>
+              <a:t>XLF · AMBER</a:t>
             </a:r>
           </a:p>
         </p:txBody>
@@ -4033,7 +4033,7 @@
                 </a:solidFill>
                 <a:latin typeface="Segoe UI"/>
               </a:rPr>
-              <a:t>+4.4%</a:t>
+              <a:t>+0.0%</a:t>
             </a:r>
           </a:p>
         </p:txBody>
@@ -4125,7 +4125,7 @@
                 </a:solidFill>
                 <a:latin typeface="Segoe UI"/>
               </a:rPr>
-              <a:t>TCS</a:t>
+              <a:t>Solana</a:t>
             </a:r>
           </a:p>
         </p:txBody>
@@ -4155,11 +4155,11 @@
             <a:r>
               <a:rPr sz="900" b="0">
                 <a:solidFill>
-                  <a:srgbClr val="EF4444"/>
-                </a:solidFill>
-                <a:latin typeface="Segoe UI"/>
-              </a:rPr>
-              <a:t>TCS.NS · RED</a:t>
+                  <a:srgbClr val="22C55E"/>
+                </a:solidFill>
+                <a:latin typeface="Segoe UI"/>
+              </a:rPr>
+              <a:t>SOL-USD · GREEN</a:t>
             </a:r>
           </a:p>
         </p:txBody>
@@ -4193,7 +4193,7 @@
                 </a:solidFill>
                 <a:latin typeface="Segoe UI"/>
               </a:rPr>
-              <a:t>-15.3%</a:t>
+              <a:t>-0.8%</a:t>
             </a:r>
           </a:p>
         </p:txBody>
@@ -4251,7 +4251,7 @@
                 </a:solidFill>
                 <a:latin typeface="Segoe UI"/>
               </a:rPr>
-              <a:t>NIFTY IT</a:t>
+              <a:t>Bitcoin</a:t>
             </a:r>
           </a:p>
         </p:txBody>
@@ -4281,11 +4281,11 @@
             <a:r>
               <a:rPr sz="900" b="0">
                 <a:solidFill>
-                  <a:srgbClr val="EF4444"/>
-                </a:solidFill>
-                <a:latin typeface="Segoe UI"/>
-              </a:rPr>
-              <a:t>^CNXIT · RED</a:t>
+                  <a:srgbClr val="22C55E"/>
+                </a:solidFill>
+                <a:latin typeface="Segoe UI"/>
+              </a:rPr>
+              <a:t>BTC-USD · GREEN</a:t>
             </a:r>
           </a:p>
         </p:txBody>
@@ -4319,7 +4319,7 @@
                 </a:solidFill>
                 <a:latin typeface="Segoe UI"/>
               </a:rPr>
-              <a:t>-11.3%</a:t>
+              <a:t>-0.2%</a:t>
             </a:r>
           </a:p>
         </p:txBody>
@@ -4377,7 +4377,7 @@
                 </a:solidFill>
                 <a:latin typeface="Segoe UI"/>
               </a:rPr>
-              <a:t>ICICI Bank</a:t>
+              <a:t>Straits Times</a:t>
             </a:r>
           </a:p>
         </p:txBody>
@@ -4407,11 +4407,11 @@
             <a:r>
               <a:rPr sz="900" b="0">
                 <a:solidFill>
-                  <a:srgbClr val="F59E0B"/>
-                </a:solidFill>
-                <a:latin typeface="Segoe UI"/>
-              </a:rPr>
-              <a:t>ICICIBANK.NS · AMBER</a:t>
+                  <a:srgbClr val="22C55E"/>
+                </a:solidFill>
+                <a:latin typeface="Segoe UI"/>
+              </a:rPr>
+              <a:t>^STI · GREEN</a:t>
             </a:r>
           </a:p>
         </p:txBody>
@@ -4445,7 +4445,7 @@
                 </a:solidFill>
                 <a:latin typeface="Segoe UI"/>
               </a:rPr>
-              <a:t>-11.1%</a:t>
+              <a:t>-0.1%</a:t>
             </a:r>
           </a:p>
         </p:txBody>
@@ -4503,7 +4503,7 @@
                 </a:solidFill>
                 <a:latin typeface="Segoe UI"/>
               </a:rPr>
-              <a:t>Infosys</a:t>
+              <a:t>EUR/USD</a:t>
             </a:r>
           </a:p>
         </p:txBody>
@@ -4537,7 +4537,7 @@
                 </a:solidFill>
                 <a:latin typeface="Segoe UI"/>
               </a:rPr>
-              <a:t>INFY.NS · RED</a:t>
+              <a:t>EURUSD=X · RED</a:t>
             </a:r>
           </a:p>
         </p:txBody>
@@ -4571,7 +4571,7 @@
                 </a:solidFill>
                 <a:latin typeface="Segoe UI"/>
               </a:rPr>
-              <a:t>-10.4%</a:t>
+              <a:t>-0.1%</a:t>
             </a:r>
           </a:p>
         </p:txBody>
@@ -4629,7 +4629,7 @@
                 </a:solidFill>
                 <a:latin typeface="Segoe UI"/>
               </a:rPr>
-              <a:t>Reliance</a:t>
+              <a:t>NIFTY 50</a:t>
             </a:r>
           </a:p>
         </p:txBody>
@@ -4663,7 +4663,7 @@
                 </a:solidFill>
                 <a:latin typeface="Segoe UI"/>
               </a:rPr>
-              <a:t>RELIANCE.NS · RED</a:t>
+              <a:t>^NSEI · RED</a:t>
             </a:r>
           </a:p>
         </p:txBody>
@@ -4693,11 +4693,11 @@
             <a:r>
               <a:rPr sz="1000">
                 <a:solidFill>
-                  <a:srgbClr val="EF4444"/>
-                </a:solidFill>
-                <a:latin typeface="Segoe UI"/>
-              </a:rPr>
-              <a:t>-7.4%</a:t>
+                  <a:srgbClr val="22C55E"/>
+                </a:solidFill>
+                <a:latin typeface="Segoe UI"/>
+              </a:rPr>
+              <a:t>+0.0%</a:t>
             </a:r>
           </a:p>
         </p:txBody>
@@ -5103,7 +5103,7 @@
                 </a:solidFill>
                 <a:latin typeface="Segoe UI"/>
               </a:rPr>
-              <a:t>Solana</a:t>
+              <a:t>US Technology</a:t>
             </a:r>
           </a:p>
         </p:txBody>
@@ -5239,7 +5239,7 @@
                 </a:solidFill>
                 <a:latin typeface="Segoe UI"/>
               </a:rPr>
-              <a:t>US Technology</a:t>
+              <a:t>Nvidia</a:t>
             </a:r>
           </a:p>
         </p:txBody>
@@ -5375,7 +5375,7 @@
                 </a:solidFill>
                 <a:latin typeface="Segoe UI"/>
               </a:rPr>
-              <a:t>Nvidia</a:t>
+              <a:t>Solana</a:t>
             </a:r>
           </a:p>
         </p:txBody>
@@ -5443,7 +5443,7 @@
                 </a:solidFill>
                 <a:latin typeface="Segoe UI"/>
               </a:rPr>
-              <a:t>95%</a:t>
+              <a:t>85%</a:t>
             </a:r>
           </a:p>
         </p:txBody>
@@ -5477,7 +5477,7 @@
                 </a:solidFill>
                 <a:latin typeface="Segoe UI"/>
               </a:rPr>
-              <a:t>above 200DMA · golden cross (50&gt;200) · MACD bullish</a:t>
+              <a:t>above 200DMA · golden cross (50&gt;200) · MACD bearish</a:t>
             </a:r>
           </a:p>
         </p:txBody>
@@ -5647,7 +5647,7 @@
                 </a:solidFill>
                 <a:latin typeface="Segoe UI"/>
               </a:rPr>
-              <a:t>Bitcoin</a:t>
+              <a:t>Ethereum</a:t>
             </a:r>
           </a:p>
         </p:txBody>
@@ -5715,7 +5715,7 @@
                 </a:solidFill>
                 <a:latin typeface="Segoe UI"/>
               </a:rPr>
-              <a:t>84%</a:t>
+              <a:t>85%</a:t>
             </a:r>
           </a:p>
         </p:txBody>
@@ -5783,7 +5783,7 @@
                 </a:solidFill>
                 <a:latin typeface="Segoe UI"/>
               </a:rPr>
-              <a:t>Ethereum</a:t>
+              <a:t>Bitcoin</a:t>
             </a:r>
           </a:p>
         </p:txBody>
@@ -5851,7 +5851,7 @@
                 </a:solidFill>
                 <a:latin typeface="Segoe UI"/>
               </a:rPr>
-              <a:t>84%</a:t>
+              <a:t>85%</a:t>
             </a:r>
           </a:p>
         </p:txBody>
@@ -5919,7 +5919,7 @@
                 </a:solidFill>
                 <a:latin typeface="Segoe UI"/>
               </a:rPr>
-              <a:t>Copper</a:t>
+              <a:t>USD/INR</a:t>
             </a:r>
           </a:p>
         </p:txBody>
@@ -5987,7 +5987,7 @@
                 </a:solidFill>
                 <a:latin typeface="Segoe UI"/>
               </a:rPr>
-              <a:t>81%</a:t>
+              <a:t>80%</a:t>
             </a:r>
           </a:p>
         </p:txBody>
@@ -6021,7 +6021,7 @@
                 </a:solidFill>
                 <a:latin typeface="Segoe UI"/>
               </a:rPr>
-              <a:t>above 200DMA · golden cross (50&gt;200) · MACD bearish</a:t>
+              <a:t>above 200DMA · golden cross (50&gt;200) · MACD bullish</a:t>
             </a:r>
           </a:p>
         </p:txBody>
@@ -6055,7 +6055,7 @@
                 </a:solidFill>
                 <a:latin typeface="Segoe UI"/>
               </a:rPr>
-              <a:t>USD/INR</a:t>
+              <a:t>Nikkei 225</a:t>
             </a:r>
           </a:p>
         </p:txBody>
@@ -6089,7 +6089,7 @@
                 </a:solidFill>
                 <a:latin typeface="Segoe UI"/>
               </a:rPr>
-              <a:t>STRONG BUY</a:t>
+              <a:t>BUY</a:t>
             </a:r>
           </a:p>
         </p:txBody>
@@ -6123,7 +6123,7 @@
                 </a:solidFill>
                 <a:latin typeface="Segoe UI"/>
               </a:rPr>
-              <a:t>80%</a:t>
+              <a:t>71%</a:t>
             </a:r>
           </a:p>
         </p:txBody>
@@ -6191,7 +6191,7 @@
                 </a:solidFill>
                 <a:latin typeface="Segoe UI"/>
               </a:rPr>
-              <a:t>Nikkei 225</a:t>
+              <a:t>Dollar Index</a:t>
             </a:r>
           </a:p>
         </p:txBody>
@@ -6259,7 +6259,7 @@
                 </a:solidFill>
                 <a:latin typeface="Segoe UI"/>
               </a:rPr>
-              <a:t>75%</a:t>
+              <a:t>76%</a:t>
             </a:r>
           </a:p>
         </p:txBody>
@@ -6327,7 +6327,7 @@
                 </a:solidFill>
                 <a:latin typeface="Segoe UI"/>
               </a:rPr>
-              <a:t>S&amp;P 500</a:t>
+              <a:t>Copper</a:t>
             </a:r>
           </a:p>
         </p:txBody>
@@ -6395,7 +6395,7 @@
                 </a:solidFill>
                 <a:latin typeface="Segoe UI"/>
               </a:rPr>
-              <a:t>69%</a:t>
+              <a:t>68%</a:t>
             </a:r>
           </a:p>
         </p:txBody>
@@ -6463,7 +6463,7 @@
                 </a:solidFill>
                 <a:latin typeface="Segoe UI"/>
               </a:rPr>
-              <a:t>Straits Times</a:t>
+              <a:t>S&amp;P 500</a:t>
             </a:r>
           </a:p>
         </p:txBody>
@@ -6565,7 +6565,7 @@
                 </a:solidFill>
                 <a:latin typeface="Segoe UI"/>
               </a:rPr>
-              <a:t>above 200DMA · golden cross (50&gt;200) · MACD bullish</a:t>
+              <a:t>above 200DMA · golden cross (50&gt;200) · MACD bearish</a:t>
             </a:r>
           </a:p>
         </p:txBody>
@@ -6659,7 +6659,7 @@
                 </a:solidFill>
                 <a:latin typeface="Segoe UI"/>
               </a:rPr>
-              <a:t>Base currency INR · USD/INR 95.97</a:t>
+              <a:t>Base currency INR · USD/INR 96.05</a:t>
             </a:r>
           </a:p>
         </p:txBody>
@@ -7067,7 +7067,7 @@
                 </a:solidFill>
                 <a:latin typeface="Segoe UI"/>
               </a:rPr>
-              <a:t>83,444</a:t>
+              <a:t>83,493</a:t>
             </a:r>
           </a:p>
         </p:txBody>
@@ -7101,7 +7101,7 @@
                 </a:solidFill>
                 <a:latin typeface="Segoe UI"/>
               </a:rPr>
-              <a:t>Rs 800,807</a:t>
+              <a:t>Rs 801,952</a:t>
             </a:r>
           </a:p>
         </p:txBody>
@@ -7135,7 +7135,7 @@
                 </a:solidFill>
                 <a:latin typeface="Segoe UI"/>
               </a:rPr>
-              <a:t>Rs 224,987</a:t>
+              <a:t>Rs 225,648</a:t>
             </a:r>
           </a:p>
         </p:txBody>
@@ -7203,7 +7203,7 @@
                 </a:solidFill>
                 <a:latin typeface="Segoe UI"/>
               </a:rPr>
-              <a:t>-0.1%</a:t>
+              <a:t>-0.2%</a:t>
             </a:r>
           </a:p>
         </p:txBody>
@@ -7339,7 +7339,7 @@
                 </a:solidFill>
                 <a:latin typeface="Segoe UI"/>
               </a:rPr>
-              <a:t>4,202</a:t>
+              <a:t>4,191</a:t>
             </a:r>
           </a:p>
         </p:txBody>
@@ -7373,7 +7373,7 @@
                 </a:solidFill>
                 <a:latin typeface="Segoe UI"/>
               </a:rPr>
-              <a:t>Rs 403,228</a:t>
+              <a:t>Rs 402,577</a:t>
             </a:r>
           </a:p>
         </p:txBody>
@@ -7407,7 +7407,7 @@
                 </a:solidFill>
                 <a:latin typeface="Segoe UI"/>
               </a:rPr>
-              <a:t>Rs 182,497</a:t>
+              <a:t>Rs 181,661</a:t>
             </a:r>
           </a:p>
         </p:txBody>
@@ -7441,7 +7441,7 @@
                 </a:solidFill>
                 <a:latin typeface="Segoe UI"/>
               </a:rPr>
-              <a:t>+82.7%</a:t>
+              <a:t>+82.2%</a:t>
             </a:r>
           </a:p>
         </p:txBody>
@@ -7611,7 +7611,7 @@
                 </a:solidFill>
                 <a:latin typeface="Segoe UI"/>
               </a:rPr>
-              <a:t>329</a:t>
+              <a:t>333</a:t>
             </a:r>
           </a:p>
         </p:txBody>
@@ -7645,7 +7645,7 @@
                 </a:solidFill>
                 <a:latin typeface="Segoe UI"/>
               </a:rPr>
-              <a:t>Rs 316,125</a:t>
+              <a:t>Rs 319,868</a:t>
             </a:r>
           </a:p>
         </p:txBody>
@@ -7679,7 +7679,7 @@
                 </a:solidFill>
                 <a:latin typeface="Segoe UI"/>
               </a:rPr>
-              <a:t>Rs 138,581</a:t>
+              <a:t>Rs 142,174</a:t>
             </a:r>
           </a:p>
         </p:txBody>
@@ -7713,7 +7713,7 @@
                 </a:solidFill>
                 <a:latin typeface="Segoe UI"/>
               </a:rPr>
-              <a:t>+78.0%</a:t>
+              <a:t>+80.0%</a:t>
             </a:r>
           </a:p>
         </p:txBody>
@@ -7883,7 +7883,7 @@
                 </a:solidFill>
                 <a:latin typeface="Segoe UI"/>
               </a:rPr>
-              <a:t>227</a:t>
+              <a:t>228</a:t>
             </a:r>
           </a:p>
         </p:txBody>
@@ -7917,7 +7917,7 @@
                 </a:solidFill>
                 <a:latin typeface="Segoe UI"/>
               </a:rPr>
-              <a:t>Rs 174,443</a:t>
+              <a:t>Rs 175,488</a:t>
             </a:r>
           </a:p>
         </p:txBody>
@@ -7951,7 +7951,7 @@
                 </a:solidFill>
                 <a:latin typeface="Segoe UI"/>
               </a:rPr>
-              <a:t>Rs -171,049</a:t>
+              <a:t>Rs -170,294</a:t>
             </a:r>
           </a:p>
         </p:txBody>
@@ -7985,7 +7985,7 @@
                 </a:solidFill>
                 <a:latin typeface="Segoe UI"/>
               </a:rPr>
-              <a:t>-49.5%</a:t>
+              <a:t>-49.2%</a:t>
             </a:r>
           </a:p>
         </p:txBody>
@@ -8155,7 +8155,7 @@
                 </a:solidFill>
                 <a:latin typeface="Segoe UI"/>
               </a:rPr>
-              <a:t>1,015</a:t>
+              <a:t>994</a:t>
             </a:r>
           </a:p>
         </p:txBody>
@@ -8189,7 +8189,7 @@
                 </a:solidFill>
                 <a:latin typeface="Segoe UI"/>
               </a:rPr>
-              <a:t>Rs 81,232</a:t>
+              <a:t>Rs 79,528</a:t>
             </a:r>
           </a:p>
         </p:txBody>
@@ -8223,7 +8223,7 @@
                 </a:solidFill>
                 <a:latin typeface="Segoe UI"/>
               </a:rPr>
-              <a:t>Rs -30,768</a:t>
+              <a:t>Rs -32,472</a:t>
             </a:r>
           </a:p>
         </p:txBody>
@@ -8257,7 +8257,7 @@
                 </a:solidFill>
                 <a:latin typeface="Segoe UI"/>
               </a:rPr>
-              <a:t>-27.5%</a:t>
+              <a:t>-29.0%</a:t>
             </a:r>
           </a:p>
         </p:txBody>
@@ -8427,7 +8427,7 @@
                 </a:solidFill>
                 <a:latin typeface="Segoe UI"/>
               </a:rPr>
-              <a:t>1,182</a:t>
+              <a:t>1,187</a:t>
             </a:r>
           </a:p>
         </p:txBody>
@@ -8461,7 +8461,7 @@
                 </a:solidFill>
                 <a:latin typeface="Segoe UI"/>
               </a:rPr>
-              <a:t>Rs 59,100</a:t>
+              <a:t>Rs 59,350</a:t>
             </a:r>
           </a:p>
         </p:txBody>
@@ -8495,7 +8495,7 @@
                 </a:solidFill>
                 <a:latin typeface="Segoe UI"/>
               </a:rPr>
-              <a:t>Rs -63,400</a:t>
+              <a:t>Rs -63,150</a:t>
             </a:r>
           </a:p>
         </p:txBody>
@@ -8529,7 +8529,7 @@
                 </a:solidFill>
                 <a:latin typeface="Segoe UI"/>
               </a:rPr>
-              <a:t>-51.8%</a:t>
+              <a:t>-51.5%</a:t>
             </a:r>
           </a:p>
         </p:txBody>
@@ -8699,7 +8699,7 @@
                 </a:solidFill>
                 <a:latin typeface="Segoe UI"/>
               </a:rPr>
-              <a:t>2,032</a:t>
+              <a:t>2,051</a:t>
             </a:r>
           </a:p>
         </p:txBody>
@@ -8733,7 +8733,7 @@
                 </a:solidFill>
                 <a:latin typeface="Segoe UI"/>
               </a:rPr>
-              <a:t>Rs 50,810</a:t>
+              <a:t>Rs 51,265</a:t>
             </a:r>
           </a:p>
         </p:txBody>
@@ -8767,7 +8767,7 @@
                 </a:solidFill>
                 <a:latin typeface="Segoe UI"/>
               </a:rPr>
-              <a:t>Rs -39,190</a:t>
+              <a:t>Rs -38,735</a:t>
             </a:r>
           </a:p>
         </p:txBody>
@@ -8801,7 +8801,7 @@
                 </a:solidFill>
                 <a:latin typeface="Segoe UI"/>
               </a:rPr>
-              <a:t>-43.5%</a:t>
+              <a:t>-43.0%</a:t>
             </a:r>
           </a:p>
         </p:txBody>
@@ -8971,7 +8971,7 @@
                 </a:solidFill>
                 <a:latin typeface="Segoe UI"/>
               </a:rPr>
-              <a:t>723</a:t>
+              <a:t>709</a:t>
             </a:r>
           </a:p>
         </p:txBody>
@@ -9005,7 +9005,7 @@
                 </a:solidFill>
                 <a:latin typeface="Segoe UI"/>
               </a:rPr>
-              <a:t>Rs 43,362</a:t>
+              <a:t>Rs 42,522</a:t>
             </a:r>
           </a:p>
         </p:txBody>
@@ -9039,7 +9039,7 @@
                 </a:solidFill>
                 <a:latin typeface="Segoe UI"/>
               </a:rPr>
-              <a:t>Rs -47,838</a:t>
+              <a:t>Rs -48,678</a:t>
             </a:r>
           </a:p>
         </p:txBody>
@@ -9073,7 +9073,7 @@
                 </a:solidFill>
                 <a:latin typeface="Segoe UI"/>
               </a:rPr>
-              <a:t>-52.5%</a:t>
+              <a:t>-53.4%</a:t>
             </a:r>
           </a:p>
         </p:txBody>
@@ -9141,7 +9141,7 @@
                 </a:solidFill>
                 <a:latin typeface="Segoe UI"/>
               </a:rPr>
-              <a:t>Total Rs 1,929,107 | P&amp;L Rs 193,819 (+11.2%) | Sharpe 0.09 | Vol 20.3% | VaR95 -1.9%/day</a:t>
+              <a:t>Total Rs 1,932,551 | P&amp;L Rs 196,154 (+11.3%) | Sharpe 0.08 | Vol 20.29% | VaR95 -1.9%/day</a:t>
             </a:r>
           </a:p>
         </p:txBody>

--- a/docs/pmr_daily.pptx
+++ b/docs/pmr_daily.pptx
@@ -3197,7 +3197,7 @@
                 </a:solidFill>
                 <a:latin typeface="Segoe UI"/>
               </a:rPr>
-              <a:t>Thursday, 01 Oct 2026 09:49 SGT</a:t>
+              <a:t>Friday, 02 Oct 2026 10:02 SGT</a:t>
             </a:r>
           </a:p>
         </p:txBody>
@@ -3227,11 +3227,11 @@
             <a:r>
               <a:rPr sz="2000" b="1">
                 <a:solidFill>
-                  <a:srgbClr val="F59E0B"/>
-                </a:solidFill>
-                <a:latin typeface="Segoe UI"/>
-              </a:rPr>
-              <a:t>Market tone: MIXED</a:t>
+                  <a:srgbClr val="EF4444"/>
+                </a:solidFill>
+                <a:latin typeface="Segoe UI"/>
+              </a:rPr>
+              <a:t>Market tone: RISK-OFF</a:t>
             </a:r>
           </a:p>
         </p:txBody>
@@ -3265,7 +3265,7 @@
                 </a:solidFill>
                 <a:latin typeface="Segoe UI"/>
               </a:rPr>
-              <a:t>RAG 16R / 15A / 15G   |   45.7% above 200DMA   |   Portfolio Rs 1,932,551 (+11.3%)</a:t>
+              <a:t>RAG 17R / 13A / 16G   |   41.3% above 200DMA   |   Portfolio Rs 1,945,824 (+12.2%)</a:t>
             </a:r>
           </a:p>
         </p:txBody>
@@ -3461,7 +3461,7 @@
                 </a:solidFill>
                 <a:latin typeface="Segoe UI"/>
               </a:rPr>
-              <a:t>Nikkei 225</a:t>
+              <a:t>Infosys</a:t>
             </a:r>
           </a:p>
         </p:txBody>
@@ -3491,11 +3491,11 @@
             <a:r>
               <a:rPr sz="900" b="0">
                 <a:solidFill>
-                  <a:srgbClr val="F59E0B"/>
-                </a:solidFill>
-                <a:latin typeface="Segoe UI"/>
-              </a:rPr>
-              <a:t>^N225 · AMBER</a:t>
+                  <a:srgbClr val="EF4444"/>
+                </a:solidFill>
+                <a:latin typeface="Segoe UI"/>
+              </a:rPr>
+              <a:t>INFY.NS · RED</a:t>
             </a:r>
           </a:p>
         </p:txBody>
@@ -3529,7 +3529,7 @@
                 </a:solidFill>
                 <a:latin typeface="Segoe UI"/>
               </a:rPr>
-              <a:t>+2.0%</a:t>
+              <a:t>+4.1%</a:t>
             </a:r>
           </a:p>
         </p:txBody>
@@ -3587,7 +3587,7 @@
                 </a:solidFill>
                 <a:latin typeface="Segoe UI"/>
               </a:rPr>
-              <a:t>USD/JPY</a:t>
+              <a:t>Crude Oil WTI</a:t>
             </a:r>
           </a:p>
         </p:txBody>
@@ -3617,11 +3617,11 @@
             <a:r>
               <a:rPr sz="900" b="0">
                 <a:solidFill>
-                  <a:srgbClr val="F59E0B"/>
-                </a:solidFill>
-                <a:latin typeface="Segoe UI"/>
-              </a:rPr>
-              <a:t>JPY=X · AMBER</a:t>
+                  <a:srgbClr val="EF4444"/>
+                </a:solidFill>
+                <a:latin typeface="Segoe UI"/>
+              </a:rPr>
+              <a:t>CL=F · RED</a:t>
             </a:r>
           </a:p>
         </p:txBody>
@@ -3655,7 +3655,7 @@
                 </a:solidFill>
                 <a:latin typeface="Segoe UI"/>
               </a:rPr>
-              <a:t>+0.5%</a:t>
+              <a:t>+2.8%</a:t>
             </a:r>
           </a:p>
         </p:txBody>
@@ -3713,7 +3713,7 @@
                 </a:solidFill>
                 <a:latin typeface="Segoe UI"/>
               </a:rPr>
-              <a:t>Ethereum</a:t>
+              <a:t>NIFTY IT</a:t>
             </a:r>
           </a:p>
         </p:txBody>
@@ -3743,11 +3743,11 @@
             <a:r>
               <a:rPr sz="900" b="0">
                 <a:solidFill>
-                  <a:srgbClr val="22C55E"/>
-                </a:solidFill>
-                <a:latin typeface="Segoe UI"/>
-              </a:rPr>
-              <a:t>ETH-USD · GREEN</a:t>
+                  <a:srgbClr val="EF4444"/>
+                </a:solidFill>
+                <a:latin typeface="Segoe UI"/>
+              </a:rPr>
+              <a:t>^CNXIT · RED</a:t>
             </a:r>
           </a:p>
         </p:txBody>
@@ -3781,7 +3781,7 @@
                 </a:solidFill>
                 <a:latin typeface="Segoe UI"/>
               </a:rPr>
-              <a:t>+0.4%</a:t>
+              <a:t>+2.2%</a:t>
             </a:r>
           </a:p>
         </p:txBody>
@@ -3839,7 +3839,7 @@
                 </a:solidFill>
                 <a:latin typeface="Segoe UI"/>
               </a:rPr>
-              <a:t>Clean Energy</a:t>
+              <a:t>Nikkei 225</a:t>
             </a:r>
           </a:p>
         </p:txBody>
@@ -3869,11 +3869,11 @@
             <a:r>
               <a:rPr sz="900" b="0">
                 <a:solidFill>
-                  <a:srgbClr val="EF4444"/>
-                </a:solidFill>
-                <a:latin typeface="Segoe UI"/>
-              </a:rPr>
-              <a:t>ICLN · RED</a:t>
+                  <a:srgbClr val="F59E0B"/>
+                </a:solidFill>
+                <a:latin typeface="Segoe UI"/>
+              </a:rPr>
+              <a:t>^N225 · AMBER</a:t>
             </a:r>
           </a:p>
         </p:txBody>
@@ -3907,7 +3907,7 @@
                 </a:solidFill>
                 <a:latin typeface="Segoe UI"/>
               </a:rPr>
-              <a:t>+0.0%</a:t>
+              <a:t>+2.1%</a:t>
             </a:r>
           </a:p>
         </p:txBody>
@@ -3965,7 +3965,7 @@
                 </a:solidFill>
                 <a:latin typeface="Segoe UI"/>
               </a:rPr>
-              <a:t>US Financials</a:t>
+              <a:t>US Energy</a:t>
             </a:r>
           </a:p>
         </p:txBody>
@@ -3995,11 +3995,11 @@
             <a:r>
               <a:rPr sz="900" b="0">
                 <a:solidFill>
-                  <a:srgbClr val="F59E0B"/>
-                </a:solidFill>
-                <a:latin typeface="Segoe UI"/>
-              </a:rPr>
-              <a:t>XLF · AMBER</a:t>
+                  <a:srgbClr val="22C55E"/>
+                </a:solidFill>
+                <a:latin typeface="Segoe UI"/>
+              </a:rPr>
+              <a:t>XLE · GREEN</a:t>
             </a:r>
           </a:p>
         </p:txBody>
@@ -4033,7 +4033,7 @@
                 </a:solidFill>
                 <a:latin typeface="Segoe UI"/>
               </a:rPr>
-              <a:t>+0.0%</a:t>
+              <a:t>+2.0%</a:t>
             </a:r>
           </a:p>
         </p:txBody>
@@ -4125,7 +4125,7 @@
                 </a:solidFill>
                 <a:latin typeface="Segoe UI"/>
               </a:rPr>
-              <a:t>Solana</a:t>
+              <a:t>Natural Gas</a:t>
             </a:r>
           </a:p>
         </p:txBody>
@@ -4155,11 +4155,11 @@
             <a:r>
               <a:rPr sz="900" b="0">
                 <a:solidFill>
-                  <a:srgbClr val="22C55E"/>
-                </a:solidFill>
-                <a:latin typeface="Segoe UI"/>
-              </a:rPr>
-              <a:t>SOL-USD · GREEN</a:t>
+                  <a:srgbClr val="EF4444"/>
+                </a:solidFill>
+                <a:latin typeface="Segoe UI"/>
+              </a:rPr>
+              <a:t>NG=F · RED</a:t>
             </a:r>
           </a:p>
         </p:txBody>
@@ -4193,7 +4193,7 @@
                 </a:solidFill>
                 <a:latin typeface="Segoe UI"/>
               </a:rPr>
-              <a:t>-0.8%</a:t>
+              <a:t>-3.0%</a:t>
             </a:r>
           </a:p>
         </p:txBody>
@@ -4251,7 +4251,7 @@
                 </a:solidFill>
                 <a:latin typeface="Segoe UI"/>
               </a:rPr>
-              <a:t>Bitcoin</a:t>
+              <a:t>Hang Seng</a:t>
             </a:r>
           </a:p>
         </p:txBody>
@@ -4281,11 +4281,11 @@
             <a:r>
               <a:rPr sz="900" b="0">
                 <a:solidFill>
-                  <a:srgbClr val="22C55E"/>
-                </a:solidFill>
-                <a:latin typeface="Segoe UI"/>
-              </a:rPr>
-              <a:t>BTC-USD · GREEN</a:t>
+                  <a:srgbClr val="EF4444"/>
+                </a:solidFill>
+                <a:latin typeface="Segoe UI"/>
+              </a:rPr>
+              <a:t>^HSI · RED</a:t>
             </a:r>
           </a:p>
         </p:txBody>
@@ -4319,7 +4319,7 @@
                 </a:solidFill>
                 <a:latin typeface="Segoe UI"/>
               </a:rPr>
-              <a:t>-0.2%</a:t>
+              <a:t>-2.6%</a:t>
             </a:r>
           </a:p>
         </p:txBody>
@@ -4377,7 +4377,7 @@
                 </a:solidFill>
                 <a:latin typeface="Segoe UI"/>
               </a:rPr>
-              <a:t>Straits Times</a:t>
+              <a:t>ITC</a:t>
             </a:r>
           </a:p>
         </p:txBody>
@@ -4407,11 +4407,11 @@
             <a:r>
               <a:rPr sz="900" b="0">
                 <a:solidFill>
-                  <a:srgbClr val="22C55E"/>
-                </a:solidFill>
-                <a:latin typeface="Segoe UI"/>
-              </a:rPr>
-              <a:t>^STI · GREEN</a:t>
+                  <a:srgbClr val="EF4444"/>
+                </a:solidFill>
+                <a:latin typeface="Segoe UI"/>
+              </a:rPr>
+              <a:t>ITC.NS · RED</a:t>
             </a:r>
           </a:p>
         </p:txBody>
@@ -4445,7 +4445,7 @@
                 </a:solidFill>
                 <a:latin typeface="Segoe UI"/>
               </a:rPr>
-              <a:t>-0.1%</a:t>
+              <a:t>-2.6%</a:t>
             </a:r>
           </a:p>
         </p:txBody>
@@ -4503,7 +4503,7 @@
                 </a:solidFill>
                 <a:latin typeface="Segoe UI"/>
               </a:rPr>
-              <a:t>EUR/USD</a:t>
+              <a:t>Alphabet</a:t>
             </a:r>
           </a:p>
         </p:txBody>
@@ -4533,11 +4533,11 @@
             <a:r>
               <a:rPr sz="900" b="0">
                 <a:solidFill>
-                  <a:srgbClr val="EF4444"/>
-                </a:solidFill>
-                <a:latin typeface="Segoe UI"/>
-              </a:rPr>
-              <a:t>EURUSD=X · RED</a:t>
+                  <a:srgbClr val="F59E0B"/>
+                </a:solidFill>
+                <a:latin typeface="Segoe UI"/>
+              </a:rPr>
+              <a:t>GOOGL · AMBER</a:t>
             </a:r>
           </a:p>
         </p:txBody>
@@ -4571,7 +4571,7 @@
                 </a:solidFill>
                 <a:latin typeface="Segoe UI"/>
               </a:rPr>
-              <a:t>-0.1%</a:t>
+              <a:t>-1.7%</a:t>
             </a:r>
           </a:p>
         </p:txBody>
@@ -4629,7 +4629,7 @@
                 </a:solidFill>
                 <a:latin typeface="Segoe UI"/>
               </a:rPr>
-              <a:t>NIFTY 50</a:t>
+              <a:t>FTSE 100</a:t>
             </a:r>
           </a:p>
         </p:txBody>
@@ -4659,11 +4659,11 @@
             <a:r>
               <a:rPr sz="900" b="0">
                 <a:solidFill>
-                  <a:srgbClr val="EF4444"/>
-                </a:solidFill>
-                <a:latin typeface="Segoe UI"/>
-              </a:rPr>
-              <a:t>^NSEI · RED</a:t>
+                  <a:srgbClr val="22C55E"/>
+                </a:solidFill>
+                <a:latin typeface="Segoe UI"/>
+              </a:rPr>
+              <a:t>^FTSE · GREEN</a:t>
             </a:r>
           </a:p>
         </p:txBody>
@@ -4693,11 +4693,11 @@
             <a:r>
               <a:rPr sz="1000">
                 <a:solidFill>
-                  <a:srgbClr val="22C55E"/>
-                </a:solidFill>
-                <a:latin typeface="Segoe UI"/>
-              </a:rPr>
-              <a:t>+0.0%</a:t>
+                  <a:srgbClr val="EF4444"/>
+                </a:solidFill>
+                <a:latin typeface="Segoe UI"/>
+              </a:rPr>
+              <a:t>-1.7%</a:t>
             </a:r>
           </a:p>
         </p:txBody>
@@ -4967,7 +4967,7 @@
                 </a:solidFill>
                 <a:latin typeface="Segoe UI"/>
               </a:rPr>
-              <a:t>Microsoft</a:t>
+              <a:t>US Technology</a:t>
             </a:r>
           </a:p>
         </p:txBody>
@@ -5103,7 +5103,7 @@
                 </a:solidFill>
                 <a:latin typeface="Segoe UI"/>
               </a:rPr>
-              <a:t>US Technology</a:t>
+              <a:t>Nvidia</a:t>
             </a:r>
           </a:p>
         </p:txBody>
@@ -5239,7 +5239,7 @@
                 </a:solidFill>
                 <a:latin typeface="Segoe UI"/>
               </a:rPr>
-              <a:t>Nvidia</a:t>
+              <a:t>Microsoft</a:t>
             </a:r>
           </a:p>
         </p:txBody>
@@ -5443,7 +5443,7 @@
                 </a:solidFill>
                 <a:latin typeface="Segoe UI"/>
               </a:rPr>
-              <a:t>85%</a:t>
+              <a:t>86%</a:t>
             </a:r>
           </a:p>
         </p:txBody>
@@ -5511,7 +5511,7 @@
                 </a:solidFill>
                 <a:latin typeface="Segoe UI"/>
               </a:rPr>
-              <a:t>Nasdaq 100</a:t>
+              <a:t>Bitcoin</a:t>
             </a:r>
           </a:p>
         </p:txBody>
@@ -5579,7 +5579,7 @@
                 </a:solidFill>
                 <a:latin typeface="Segoe UI"/>
               </a:rPr>
-              <a:t>95%</a:t>
+              <a:t>86%</a:t>
             </a:r>
           </a:p>
         </p:txBody>
@@ -5613,7 +5613,7 @@
                 </a:solidFill>
                 <a:latin typeface="Segoe UI"/>
               </a:rPr>
-              <a:t>above 200DMA · golden cross (50&gt;200) · MACD bullish</a:t>
+              <a:t>above 200DMA · golden cross (50&gt;200) · MACD bearish</a:t>
             </a:r>
           </a:p>
         </p:txBody>
@@ -5647,7 +5647,7 @@
                 </a:solidFill>
                 <a:latin typeface="Segoe UI"/>
               </a:rPr>
-              <a:t>Ethereum</a:t>
+              <a:t>Nasdaq 100</a:t>
             </a:r>
           </a:p>
         </p:txBody>
@@ -5715,7 +5715,7 @@
                 </a:solidFill>
                 <a:latin typeface="Segoe UI"/>
               </a:rPr>
-              <a:t>85%</a:t>
+              <a:t>95%</a:t>
             </a:r>
           </a:p>
         </p:txBody>
@@ -5749,7 +5749,7 @@
                 </a:solidFill>
                 <a:latin typeface="Segoe UI"/>
               </a:rPr>
-              <a:t>above 200DMA · golden cross (50&gt;200) · MACD bearish</a:t>
+              <a:t>above 200DMA · golden cross (50&gt;200) · MACD bullish</a:t>
             </a:r>
           </a:p>
         </p:txBody>
@@ -5783,7 +5783,7 @@
                 </a:solidFill>
                 <a:latin typeface="Segoe UI"/>
               </a:rPr>
-              <a:t>Bitcoin</a:t>
+              <a:t>Ethereum</a:t>
             </a:r>
           </a:p>
         </p:txBody>
@@ -5919,7 +5919,7 @@
                 </a:solidFill>
                 <a:latin typeface="Segoe UI"/>
               </a:rPr>
-              <a:t>USD/INR</a:t>
+              <a:t>Apple</a:t>
             </a:r>
           </a:p>
         </p:txBody>
@@ -5987,7 +5987,7 @@
                 </a:solidFill>
                 <a:latin typeface="Segoe UI"/>
               </a:rPr>
-              <a:t>80%</a:t>
+              <a:t>83%</a:t>
             </a:r>
           </a:p>
         </p:txBody>
@@ -6021,7 +6021,7 @@
                 </a:solidFill>
                 <a:latin typeface="Segoe UI"/>
               </a:rPr>
-              <a:t>above 200DMA · golden cross (50&gt;200) · MACD bullish</a:t>
+              <a:t>above 200DMA · golden cross (50&gt;200) · MACD bearish</a:t>
             </a:r>
           </a:p>
         </p:txBody>
@@ -6055,7 +6055,7 @@
                 </a:solidFill>
                 <a:latin typeface="Segoe UI"/>
               </a:rPr>
-              <a:t>Nikkei 225</a:t>
+              <a:t>US Energy</a:t>
             </a:r>
           </a:p>
         </p:txBody>
@@ -6089,7 +6089,7 @@
                 </a:solidFill>
                 <a:latin typeface="Segoe UI"/>
               </a:rPr>
-              <a:t>BUY</a:t>
+              <a:t>STRONG BUY</a:t>
             </a:r>
           </a:p>
         </p:txBody>
@@ -6123,7 +6123,7 @@
                 </a:solidFill>
                 <a:latin typeface="Segoe UI"/>
               </a:rPr>
-              <a:t>71%</a:t>
+              <a:t>81%</a:t>
             </a:r>
           </a:p>
         </p:txBody>
@@ -6157,7 +6157,7 @@
                 </a:solidFill>
                 <a:latin typeface="Segoe UI"/>
               </a:rPr>
-              <a:t>above 200DMA · golden cross (50&gt;200) · MACD bullish</a:t>
+              <a:t>above 200DMA · golden cross (50&gt;200) · MACD bearish</a:t>
             </a:r>
           </a:p>
         </p:txBody>
@@ -6259,7 +6259,7 @@
                 </a:solidFill>
                 <a:latin typeface="Segoe UI"/>
               </a:rPr>
-              <a:t>76%</a:t>
+              <a:t>78%</a:t>
             </a:r>
           </a:p>
         </p:txBody>
@@ -6327,7 +6327,7 @@
                 </a:solidFill>
                 <a:latin typeface="Segoe UI"/>
               </a:rPr>
-              <a:t>Copper</a:t>
+              <a:t>Nikkei 225</a:t>
             </a:r>
           </a:p>
         </p:txBody>
@@ -6395,7 +6395,7 @@
                 </a:solidFill>
                 <a:latin typeface="Segoe UI"/>
               </a:rPr>
-              <a:t>68%</a:t>
+              <a:t>76%</a:t>
             </a:r>
           </a:p>
         </p:txBody>
@@ -6429,7 +6429,7 @@
                 </a:solidFill>
                 <a:latin typeface="Segoe UI"/>
               </a:rPr>
-              <a:t>above 200DMA · golden cross (50&gt;200) · MACD bearish</a:t>
+              <a:t>above 200DMA · golden cross (50&gt;200) · MACD bullish</a:t>
             </a:r>
           </a:p>
         </p:txBody>
@@ -6659,7 +6659,7 @@
                 </a:solidFill>
                 <a:latin typeface="Segoe UI"/>
               </a:rPr>
-              <a:t>Base currency INR · USD/INR 96.05</a:t>
+              <a:t>Base currency INR · USD/INR 95.93</a:t>
             </a:r>
           </a:p>
         </p:txBody>
@@ -7067,7 +7067,7 @@
                 </a:solidFill>
                 <a:latin typeface="Segoe UI"/>
               </a:rPr>
-              <a:t>83,493</a:t>
+              <a:t>84,926</a:t>
             </a:r>
           </a:p>
         </p:txBody>
@@ -7101,7 +7101,7 @@
                 </a:solidFill>
                 <a:latin typeface="Segoe UI"/>
               </a:rPr>
-              <a:t>Rs 801,952</a:t>
+              <a:t>Rs 814,667</a:t>
             </a:r>
           </a:p>
         </p:txBody>
@@ -7135,7 +7135,7 @@
                 </a:solidFill>
                 <a:latin typeface="Segoe UI"/>
               </a:rPr>
-              <a:t>Rs 225,648</a:t>
+              <a:t>Rs 239,104</a:t>
             </a:r>
           </a:p>
         </p:txBody>
@@ -7169,7 +7169,7 @@
                 </a:solidFill>
                 <a:latin typeface="Segoe UI"/>
               </a:rPr>
-              <a:t>+39.1%</a:t>
+              <a:t>+41.5%</a:t>
             </a:r>
           </a:p>
         </p:txBody>
@@ -7199,11 +7199,11 @@
             <a:r>
               <a:rPr sz="1000" b="0">
                 <a:solidFill>
-                  <a:srgbClr val="EF4444"/>
-                </a:solidFill>
-                <a:latin typeface="Segoe UI"/>
-              </a:rPr>
-              <a:t>-0.2%</a:t>
+                  <a:srgbClr val="22C55E"/>
+                </a:solidFill>
+                <a:latin typeface="Segoe UI"/>
+              </a:rPr>
+              <a:t>+1.6%</a:t>
             </a:r>
           </a:p>
         </p:txBody>
@@ -7339,7 +7339,7 @@
                 </a:solidFill>
                 <a:latin typeface="Segoe UI"/>
               </a:rPr>
-              <a:t>4,191</a:t>
+              <a:t>4,178</a:t>
             </a:r>
           </a:p>
         </p:txBody>
@@ -7373,7 +7373,7 @@
                 </a:solidFill>
                 <a:latin typeface="Segoe UI"/>
               </a:rPr>
-              <a:t>Rs 402,577</a:t>
+              <a:t>Rs 400,793</a:t>
             </a:r>
           </a:p>
         </p:txBody>
@@ -7407,7 +7407,7 @@
                 </a:solidFill>
                 <a:latin typeface="Segoe UI"/>
               </a:rPr>
-              <a:t>Rs 181,661</a:t>
+              <a:t>Rs 180,161</a:t>
             </a:r>
           </a:p>
         </p:txBody>
@@ -7441,7 +7441,7 @@
                 </a:solidFill>
                 <a:latin typeface="Segoe UI"/>
               </a:rPr>
-              <a:t>+82.2%</a:t>
+              <a:t>+81.7%</a:t>
             </a:r>
           </a:p>
         </p:txBody>
@@ -7611,7 +7611,7 @@
                 </a:solidFill>
                 <a:latin typeface="Segoe UI"/>
               </a:rPr>
-              <a:t>333</a:t>
+              <a:t>330</a:t>
             </a:r>
           </a:p>
         </p:txBody>
@@ -7645,7 +7645,7 @@
                 </a:solidFill>
                 <a:latin typeface="Segoe UI"/>
               </a:rPr>
-              <a:t>Rs 319,868</a:t>
+              <a:t>Rs 316,866</a:t>
             </a:r>
           </a:p>
         </p:txBody>
@@ -7679,7 +7679,7 @@
                 </a:solidFill>
                 <a:latin typeface="Segoe UI"/>
               </a:rPr>
-              <a:t>Rs 142,174</a:t>
+              <a:t>Rs 139,401</a:t>
             </a:r>
           </a:p>
         </p:txBody>
@@ -7713,7 +7713,7 @@
                 </a:solidFill>
                 <a:latin typeface="Segoe UI"/>
               </a:rPr>
-              <a:t>+80.0%</a:t>
+              <a:t>+78.5%</a:t>
             </a:r>
           </a:p>
         </p:txBody>
@@ -7883,7 +7883,7 @@
                 </a:solidFill>
                 <a:latin typeface="Segoe UI"/>
               </a:rPr>
-              <a:t>228</a:t>
+              <a:t>231</a:t>
             </a:r>
           </a:p>
         </p:txBody>
@@ -7917,7 +7917,7 @@
                 </a:solidFill>
                 <a:latin typeface="Segoe UI"/>
               </a:rPr>
-              <a:t>Rs 175,488</a:t>
+              <a:t>Rs 177,166</a:t>
             </a:r>
           </a:p>
         </p:txBody>
@@ -7951,7 +7951,7 @@
                 </a:solidFill>
                 <a:latin typeface="Segoe UI"/>
               </a:rPr>
-              <a:t>Rs -170,294</a:t>
+              <a:t>Rs -168,172</a:t>
             </a:r>
           </a:p>
         </p:txBody>
@@ -7985,7 +7985,7 @@
                 </a:solidFill>
                 <a:latin typeface="Segoe UI"/>
               </a:rPr>
-              <a:t>-49.2%</a:t>
+              <a:t>-48.7%</a:t>
             </a:r>
           </a:p>
         </p:txBody>
@@ -8155,7 +8155,7 @@
                 </a:solidFill>
                 <a:latin typeface="Segoe UI"/>
               </a:rPr>
-              <a:t>994</a:t>
+              <a:t>1,035</a:t>
             </a:r>
           </a:p>
         </p:txBody>
@@ -8189,7 +8189,7 @@
                 </a:solidFill>
                 <a:latin typeface="Segoe UI"/>
               </a:rPr>
-              <a:t>Rs 79,528</a:t>
+              <a:t>Rs 82,800</a:t>
             </a:r>
           </a:p>
         </p:txBody>
@@ -8223,7 +8223,7 @@
                 </a:solidFill>
                 <a:latin typeface="Segoe UI"/>
               </a:rPr>
-              <a:t>Rs -32,472</a:t>
+              <a:t>Rs -29,200</a:t>
             </a:r>
           </a:p>
         </p:txBody>
@@ -8257,7 +8257,7 @@
                 </a:solidFill>
                 <a:latin typeface="Segoe UI"/>
               </a:rPr>
-              <a:t>-29.0%</a:t>
+              <a:t>-26.1%</a:t>
             </a:r>
           </a:p>
         </p:txBody>
@@ -8427,7 +8427,7 @@
                 </a:solidFill>
                 <a:latin typeface="Segoe UI"/>
               </a:rPr>
-              <a:t>1,187</a:t>
+              <a:t>1,168</a:t>
             </a:r>
           </a:p>
         </p:txBody>
@@ -8461,7 +8461,7 @@
                 </a:solidFill>
                 <a:latin typeface="Segoe UI"/>
               </a:rPr>
-              <a:t>Rs 59,350</a:t>
+              <a:t>Rs 58,385</a:t>
             </a:r>
           </a:p>
         </p:txBody>
@@ -8495,7 +8495,7 @@
                 </a:solidFill>
                 <a:latin typeface="Segoe UI"/>
               </a:rPr>
-              <a:t>Rs -63,150</a:t>
+              <a:t>Rs -64,115</a:t>
             </a:r>
           </a:p>
         </p:txBody>
@@ -8529,7 +8529,7 @@
                 </a:solidFill>
                 <a:latin typeface="Segoe UI"/>
               </a:rPr>
-              <a:t>-51.5%</a:t>
+              <a:t>-52.3%</a:t>
             </a:r>
           </a:p>
         </p:txBody>
@@ -8699,7 +8699,7 @@
                 </a:solidFill>
                 <a:latin typeface="Segoe UI"/>
               </a:rPr>
-              <a:t>2,051</a:t>
+              <a:t>2,075</a:t>
             </a:r>
           </a:p>
         </p:txBody>
@@ -8733,7 +8733,7 @@
                 </a:solidFill>
                 <a:latin typeface="Segoe UI"/>
               </a:rPr>
-              <a:t>Rs 51,265</a:t>
+              <a:t>Rs 51,875</a:t>
             </a:r>
           </a:p>
         </p:txBody>
@@ -8767,7 +8767,7 @@
                 </a:solidFill>
                 <a:latin typeface="Segoe UI"/>
               </a:rPr>
-              <a:t>Rs -38,735</a:t>
+              <a:t>Rs -38,125</a:t>
             </a:r>
           </a:p>
         </p:txBody>
@@ -8801,7 +8801,7 @@
                 </a:solidFill>
                 <a:latin typeface="Segoe UI"/>
               </a:rPr>
-              <a:t>-43.0%</a:t>
+              <a:t>-42.4%</a:t>
             </a:r>
           </a:p>
         </p:txBody>
@@ -8971,7 +8971,7 @@
                 </a:solidFill>
                 <a:latin typeface="Segoe UI"/>
               </a:rPr>
-              <a:t>709</a:t>
+              <a:t>721</a:t>
             </a:r>
           </a:p>
         </p:txBody>
@@ -9005,7 +9005,7 @@
                 </a:solidFill>
                 <a:latin typeface="Segoe UI"/>
               </a:rPr>
-              <a:t>Rs 42,522</a:t>
+              <a:t>Rs 43,272</a:t>
             </a:r>
           </a:p>
         </p:txBody>
@@ -9039,7 +9039,7 @@
                 </a:solidFill>
                 <a:latin typeface="Segoe UI"/>
               </a:rPr>
-              <a:t>Rs -48,678</a:t>
+              <a:t>Rs -47,928</a:t>
             </a:r>
           </a:p>
         </p:txBody>
@@ -9073,7 +9073,7 @@
                 </a:solidFill>
                 <a:latin typeface="Segoe UI"/>
               </a:rPr>
-              <a:t>-53.4%</a:t>
+              <a:t>-52.5%</a:t>
             </a:r>
           </a:p>
         </p:txBody>
@@ -9141,7 +9141,7 @@
                 </a:solidFill>
                 <a:latin typeface="Segoe UI"/>
               </a:rPr>
-              <a:t>Total Rs 1,932,551 | P&amp;L Rs 196,154 (+11.3%) | Sharpe 0.08 | Vol 20.29% | VaR95 -1.9%/day</a:t>
+              <a:t>Total Rs 1,945,824 | P&amp;L Rs 211,126 (+12.2%) | Sharpe 0.09 | Vol 20.39% | VaR95 -1.9%/day</a:t>
             </a:r>
           </a:p>
         </p:txBody>

--- a/docs/pmr_daily.pptx
+++ b/docs/pmr_daily.pptx
@@ -3197,7 +3197,7 @@
                 </a:solidFill>
                 <a:latin typeface="Segoe UI"/>
               </a:rPr>
-              <a:t>Friday, 02 Oct 2026 10:02 SGT</a:t>
+              <a:t>Monday, 05 Oct 2026 09:40 SGT</a:t>
             </a:r>
           </a:p>
         </p:txBody>
@@ -3227,11 +3227,11 @@
             <a:r>
               <a:rPr sz="2000" b="1">
                 <a:solidFill>
-                  <a:srgbClr val="EF4444"/>
-                </a:solidFill>
-                <a:latin typeface="Segoe UI"/>
-              </a:rPr>
-              <a:t>Market tone: RISK-OFF</a:t>
+                  <a:srgbClr val="F59E0B"/>
+                </a:solidFill>
+                <a:latin typeface="Segoe UI"/>
+              </a:rPr>
+              <a:t>Market tone: MIXED</a:t>
             </a:r>
           </a:p>
         </p:txBody>
@@ -3265,7 +3265,7 @@
                 </a:solidFill>
                 <a:latin typeface="Segoe UI"/>
               </a:rPr>
-              <a:t>RAG 17R / 13A / 16G   |   41.3% above 200DMA   |   Portfolio Rs 1,945,824 (+12.2%)</a:t>
+              <a:t>RAG 16R / 13A / 17G   |   43.5% above 200DMA   |   Portfolio Rs 1,976,151 (+13.6%)</a:t>
             </a:r>
           </a:p>
         </p:txBody>
@@ -3461,7 +3461,7 @@
                 </a:solidFill>
                 <a:latin typeface="Segoe UI"/>
               </a:rPr>
-              <a:t>Infosys</a:t>
+              <a:t>Nikkei 225</a:t>
             </a:r>
           </a:p>
         </p:txBody>
@@ -3491,11 +3491,11 @@
             <a:r>
               <a:rPr sz="900" b="0">
                 <a:solidFill>
-                  <a:srgbClr val="EF4444"/>
-                </a:solidFill>
-                <a:latin typeface="Segoe UI"/>
-              </a:rPr>
-              <a:t>INFY.NS · RED</a:t>
+                  <a:srgbClr val="22C55E"/>
+                </a:solidFill>
+                <a:latin typeface="Segoe UI"/>
+              </a:rPr>
+              <a:t>^N225 · GREEN</a:t>
             </a:r>
           </a:p>
         </p:txBody>
@@ -3529,7 +3529,7 @@
                 </a:solidFill>
                 <a:latin typeface="Segoe UI"/>
               </a:rPr>
-              <a:t>+4.1%</a:t>
+              <a:t>+4.8%</a:t>
             </a:r>
           </a:p>
         </p:txBody>
@@ -3587,7 +3587,7 @@
                 </a:solidFill>
                 <a:latin typeface="Segoe UI"/>
               </a:rPr>
-              <a:t>Crude Oil WTI</a:t>
+              <a:t>Tesla</a:t>
             </a:r>
           </a:p>
         </p:txBody>
@@ -3617,11 +3617,11 @@
             <a:r>
               <a:rPr sz="900" b="0">
                 <a:solidFill>
-                  <a:srgbClr val="EF4444"/>
-                </a:solidFill>
-                <a:latin typeface="Segoe UI"/>
-              </a:rPr>
-              <a:t>CL=F · RED</a:t>
+                  <a:srgbClr val="F59E0B"/>
+                </a:solidFill>
+                <a:latin typeface="Segoe UI"/>
+              </a:rPr>
+              <a:t>TSLA · AMBER</a:t>
             </a:r>
           </a:p>
         </p:txBody>
@@ -3655,7 +3655,7 @@
                 </a:solidFill>
                 <a:latin typeface="Segoe UI"/>
               </a:rPr>
-              <a:t>+2.8%</a:t>
+              <a:t>+4.4%</a:t>
             </a:r>
           </a:p>
         </p:txBody>
@@ -3713,7 +3713,7 @@
                 </a:solidFill>
                 <a:latin typeface="Segoe UI"/>
               </a:rPr>
-              <a:t>NIFTY IT</a:t>
+              <a:t>Infosys</a:t>
             </a:r>
           </a:p>
         </p:txBody>
@@ -3747,7 +3747,7 @@
                 </a:solidFill>
                 <a:latin typeface="Segoe UI"/>
               </a:rPr>
-              <a:t>^CNXIT · RED</a:t>
+              <a:t>INFY.NS · RED</a:t>
             </a:r>
           </a:p>
         </p:txBody>
@@ -3781,7 +3781,7 @@
                 </a:solidFill>
                 <a:latin typeface="Segoe UI"/>
               </a:rPr>
-              <a:t>+2.2%</a:t>
+              <a:t>+4.1%</a:t>
             </a:r>
           </a:p>
         </p:txBody>
@@ -3839,7 +3839,7 @@
                 </a:solidFill>
                 <a:latin typeface="Segoe UI"/>
               </a:rPr>
-              <a:t>Nikkei 225</a:t>
+              <a:t>Bitcoin</a:t>
             </a:r>
           </a:p>
         </p:txBody>
@@ -3869,11 +3869,11 @@
             <a:r>
               <a:rPr sz="900" b="0">
                 <a:solidFill>
-                  <a:srgbClr val="F59E0B"/>
-                </a:solidFill>
-                <a:latin typeface="Segoe UI"/>
-              </a:rPr>
-              <a:t>^N225 · AMBER</a:t>
+                  <a:srgbClr val="22C55E"/>
+                </a:solidFill>
+                <a:latin typeface="Segoe UI"/>
+              </a:rPr>
+              <a:t>BTC-USD · GREEN</a:t>
             </a:r>
           </a:p>
         </p:txBody>
@@ -3907,7 +3907,7 @@
                 </a:solidFill>
                 <a:latin typeface="Segoe UI"/>
               </a:rPr>
-              <a:t>+2.1%</a:t>
+              <a:t>+3.8%</a:t>
             </a:r>
           </a:p>
         </p:txBody>
@@ -3965,7 +3965,7 @@
                 </a:solidFill>
                 <a:latin typeface="Segoe UI"/>
               </a:rPr>
-              <a:t>US Energy</a:t>
+              <a:t>Silver</a:t>
             </a:r>
           </a:p>
         </p:txBody>
@@ -3995,11 +3995,11 @@
             <a:r>
               <a:rPr sz="900" b="0">
                 <a:solidFill>
-                  <a:srgbClr val="22C55E"/>
-                </a:solidFill>
-                <a:latin typeface="Segoe UI"/>
-              </a:rPr>
-              <a:t>XLE · GREEN</a:t>
+                  <a:srgbClr val="EF4444"/>
+                </a:solidFill>
+                <a:latin typeface="Segoe UI"/>
+              </a:rPr>
+              <a:t>SI=F · RED</a:t>
             </a:r>
           </a:p>
         </p:txBody>
@@ -4033,7 +4033,7 @@
                 </a:solidFill>
                 <a:latin typeface="Segoe UI"/>
               </a:rPr>
-              <a:t>+2.0%</a:t>
+              <a:t>+2.7%</a:t>
             </a:r>
           </a:p>
         </p:txBody>
@@ -4125,7 +4125,7 @@
                 </a:solidFill>
                 <a:latin typeface="Segoe UI"/>
               </a:rPr>
-              <a:t>Natural Gas</a:t>
+              <a:t>ITC</a:t>
             </a:r>
           </a:p>
         </p:txBody>
@@ -4159,7 +4159,7 @@
                 </a:solidFill>
                 <a:latin typeface="Segoe UI"/>
               </a:rPr>
-              <a:t>NG=F · RED</a:t>
+              <a:t>ITC.NS · RED</a:t>
             </a:r>
           </a:p>
         </p:txBody>
@@ -4193,7 +4193,7 @@
                 </a:solidFill>
                 <a:latin typeface="Segoe UI"/>
               </a:rPr>
-              <a:t>-3.0%</a:t>
+              <a:t>-2.6%</a:t>
             </a:r>
           </a:p>
         </p:txBody>
@@ -4377,7 +4377,7 @@
                 </a:solidFill>
                 <a:latin typeface="Segoe UI"/>
               </a:rPr>
-              <a:t>ITC</a:t>
+              <a:t>Reliance</a:t>
             </a:r>
           </a:p>
         </p:txBody>
@@ -4411,7 +4411,7 @@
                 </a:solidFill>
                 <a:latin typeface="Segoe UI"/>
               </a:rPr>
-              <a:t>ITC.NS · RED</a:t>
+              <a:t>RELIANCE.NS · RED</a:t>
             </a:r>
           </a:p>
         </p:txBody>
@@ -4445,7 +4445,7 @@
                 </a:solidFill>
                 <a:latin typeface="Segoe UI"/>
               </a:rPr>
-              <a:t>-2.6%</a:t>
+              <a:t>-1.6%</a:t>
             </a:r>
           </a:p>
         </p:txBody>
@@ -4503,7 +4503,7 @@
                 </a:solidFill>
                 <a:latin typeface="Segoe UI"/>
               </a:rPr>
-              <a:t>Alphabet</a:t>
+              <a:t>FTSE 100</a:t>
             </a:r>
           </a:p>
         </p:txBody>
@@ -4533,11 +4533,11 @@
             <a:r>
               <a:rPr sz="900" b="0">
                 <a:solidFill>
-                  <a:srgbClr val="F59E0B"/>
-                </a:solidFill>
-                <a:latin typeface="Segoe UI"/>
-              </a:rPr>
-              <a:t>GOOGL · AMBER</a:t>
+                  <a:srgbClr val="22C55E"/>
+                </a:solidFill>
+                <a:latin typeface="Segoe UI"/>
+              </a:rPr>
+              <a:t>^FTSE · GREEN</a:t>
             </a:r>
           </a:p>
         </p:txBody>
@@ -4571,7 +4571,7 @@
                 </a:solidFill>
                 <a:latin typeface="Segoe UI"/>
               </a:rPr>
-              <a:t>-1.7%</a:t>
+              <a:t>-1.4%</a:t>
             </a:r>
           </a:p>
         </p:txBody>
@@ -4629,7 +4629,7 @@
                 </a:solidFill>
                 <a:latin typeface="Segoe UI"/>
               </a:rPr>
-              <a:t>FTSE 100</a:t>
+              <a:t>EUR/USD</a:t>
             </a:r>
           </a:p>
         </p:txBody>
@@ -4659,11 +4659,11 @@
             <a:r>
               <a:rPr sz="900" b="0">
                 <a:solidFill>
-                  <a:srgbClr val="22C55E"/>
-                </a:solidFill>
-                <a:latin typeface="Segoe UI"/>
-              </a:rPr>
-              <a:t>^FTSE · GREEN</a:t>
+                  <a:srgbClr val="EF4444"/>
+                </a:solidFill>
+                <a:latin typeface="Segoe UI"/>
+              </a:rPr>
+              <a:t>EURUSD=X · RED</a:t>
             </a:r>
           </a:p>
         </p:txBody>
@@ -4697,7 +4697,7 @@
                 </a:solidFill>
                 <a:latin typeface="Segoe UI"/>
               </a:rPr>
-              <a:t>-1.7%</a:t>
+              <a:t>-0.9%</a:t>
             </a:r>
           </a:p>
         </p:txBody>
@@ -4967,7 +4967,7 @@
                 </a:solidFill>
                 <a:latin typeface="Segoe UI"/>
               </a:rPr>
-              <a:t>US Technology</a:t>
+              <a:t>Nvidia</a:t>
             </a:r>
           </a:p>
         </p:txBody>
@@ -5103,7 +5103,7 @@
                 </a:solidFill>
                 <a:latin typeface="Segoe UI"/>
               </a:rPr>
-              <a:t>Nvidia</a:t>
+              <a:t>Bitcoin</a:t>
             </a:r>
           </a:p>
         </p:txBody>
@@ -5171,7 +5171,7 @@
                 </a:solidFill>
                 <a:latin typeface="Segoe UI"/>
               </a:rPr>
-              <a:t>95%</a:t>
+              <a:t>86%</a:t>
             </a:r>
           </a:p>
         </p:txBody>
@@ -5205,7 +5205,7 @@
                 </a:solidFill>
                 <a:latin typeface="Segoe UI"/>
               </a:rPr>
-              <a:t>above 200DMA · golden cross (50&gt;200) · MACD bullish</a:t>
+              <a:t>above 200DMA · golden cross (50&gt;200) · MACD bearish</a:t>
             </a:r>
           </a:p>
         </p:txBody>
@@ -5239,7 +5239,7 @@
                 </a:solidFill>
                 <a:latin typeface="Segoe UI"/>
               </a:rPr>
-              <a:t>Microsoft</a:t>
+              <a:t>Solana</a:t>
             </a:r>
           </a:p>
         </p:txBody>
@@ -5307,7 +5307,7 @@
                 </a:solidFill>
                 <a:latin typeface="Segoe UI"/>
               </a:rPr>
-              <a:t>95%</a:t>
+              <a:t>86%</a:t>
             </a:r>
           </a:p>
         </p:txBody>
@@ -5341,7 +5341,7 @@
                 </a:solidFill>
                 <a:latin typeface="Segoe UI"/>
               </a:rPr>
-              <a:t>above 200DMA · golden cross (50&gt;200) · MACD bullish</a:t>
+              <a:t>above 200DMA · golden cross (50&gt;200) · MACD bearish</a:t>
             </a:r>
           </a:p>
         </p:txBody>
@@ -5375,7 +5375,7 @@
                 </a:solidFill>
                 <a:latin typeface="Segoe UI"/>
               </a:rPr>
-              <a:t>Solana</a:t>
+              <a:t>Nasdaq 100</a:t>
             </a:r>
           </a:p>
         </p:txBody>
@@ -5443,7 +5443,7 @@
                 </a:solidFill>
                 <a:latin typeface="Segoe UI"/>
               </a:rPr>
-              <a:t>86%</a:t>
+              <a:t>95%</a:t>
             </a:r>
           </a:p>
         </p:txBody>
@@ -5477,7 +5477,7 @@
                 </a:solidFill>
                 <a:latin typeface="Segoe UI"/>
               </a:rPr>
-              <a:t>above 200DMA · golden cross (50&gt;200) · MACD bearish</a:t>
+              <a:t>above 200DMA · golden cross (50&gt;200) · MACD bullish</a:t>
             </a:r>
           </a:p>
         </p:txBody>
@@ -5511,7 +5511,7 @@
                 </a:solidFill>
                 <a:latin typeface="Segoe UI"/>
               </a:rPr>
-              <a:t>Bitcoin</a:t>
+              <a:t>Ethereum</a:t>
             </a:r>
           </a:p>
         </p:txBody>
@@ -5579,7 +5579,7 @@
                 </a:solidFill>
                 <a:latin typeface="Segoe UI"/>
               </a:rPr>
-              <a:t>86%</a:t>
+              <a:t>85%</a:t>
             </a:r>
           </a:p>
         </p:txBody>
@@ -5647,7 +5647,7 @@
                 </a:solidFill>
                 <a:latin typeface="Segoe UI"/>
               </a:rPr>
-              <a:t>Nasdaq 100</a:t>
+              <a:t>Microsoft</a:t>
             </a:r>
           </a:p>
         </p:txBody>
@@ -5783,7 +5783,7 @@
                 </a:solidFill>
                 <a:latin typeface="Segoe UI"/>
               </a:rPr>
-              <a:t>Ethereum</a:t>
+              <a:t>Apple</a:t>
             </a:r>
           </a:p>
         </p:txBody>
@@ -5851,7 +5851,7 @@
                 </a:solidFill>
                 <a:latin typeface="Segoe UI"/>
               </a:rPr>
-              <a:t>85%</a:t>
+              <a:t>83%</a:t>
             </a:r>
           </a:p>
         </p:txBody>
@@ -5919,7 +5919,7 @@
                 </a:solidFill>
                 <a:latin typeface="Segoe UI"/>
               </a:rPr>
-              <a:t>Apple</a:t>
+              <a:t>US Energy</a:t>
             </a:r>
           </a:p>
         </p:txBody>
@@ -5987,7 +5987,7 @@
                 </a:solidFill>
                 <a:latin typeface="Segoe UI"/>
               </a:rPr>
-              <a:t>83%</a:t>
+              <a:t>93%</a:t>
             </a:r>
           </a:p>
         </p:txBody>
@@ -6021,7 +6021,7 @@
                 </a:solidFill>
                 <a:latin typeface="Segoe UI"/>
               </a:rPr>
-              <a:t>above 200DMA · golden cross (50&gt;200) · MACD bearish</a:t>
+              <a:t>above 200DMA · golden cross (50&gt;200) · MACD bullish</a:t>
             </a:r>
           </a:p>
         </p:txBody>
@@ -6055,7 +6055,7 @@
                 </a:solidFill>
                 <a:latin typeface="Segoe UI"/>
               </a:rPr>
-              <a:t>US Energy</a:t>
+              <a:t>S&amp;P 500</a:t>
             </a:r>
           </a:p>
         </p:txBody>
@@ -6157,7 +6157,7 @@
                 </a:solidFill>
                 <a:latin typeface="Segoe UI"/>
               </a:rPr>
-              <a:t>above 200DMA · golden cross (50&gt;200) · MACD bearish</a:t>
+              <a:t>above 200DMA · golden cross (50&gt;200) · MACD bullish</a:t>
             </a:r>
           </a:p>
         </p:txBody>
@@ -6191,7 +6191,7 @@
                 </a:solidFill>
                 <a:latin typeface="Segoe UI"/>
               </a:rPr>
-              <a:t>Dollar Index</a:t>
+              <a:t>USD/INR</a:t>
             </a:r>
           </a:p>
         </p:txBody>
@@ -6225,7 +6225,7 @@
                 </a:solidFill>
                 <a:latin typeface="Segoe UI"/>
               </a:rPr>
-              <a:t>BUY</a:t>
+              <a:t>STRONG BUY</a:t>
             </a:r>
           </a:p>
         </p:txBody>
@@ -6259,7 +6259,7 @@
                 </a:solidFill>
                 <a:latin typeface="Segoe UI"/>
               </a:rPr>
-              <a:t>78%</a:t>
+              <a:t>81%</a:t>
             </a:r>
           </a:p>
         </p:txBody>
@@ -6327,7 +6327,7 @@
                 </a:solidFill>
                 <a:latin typeface="Segoe UI"/>
               </a:rPr>
-              <a:t>Nikkei 225</a:t>
+              <a:t>US Technology</a:t>
             </a:r>
           </a:p>
         </p:txBody>
@@ -6395,7 +6395,7 @@
                 </a:solidFill>
                 <a:latin typeface="Segoe UI"/>
               </a:rPr>
-              <a:t>76%</a:t>
+              <a:t>93%</a:t>
             </a:r>
           </a:p>
         </p:txBody>
@@ -6463,7 +6463,7 @@
                 </a:solidFill>
                 <a:latin typeface="Segoe UI"/>
               </a:rPr>
-              <a:t>S&amp;P 500</a:t>
+              <a:t>Nikkei 225</a:t>
             </a:r>
           </a:p>
         </p:txBody>
@@ -6531,7 +6531,7 @@
                 </a:solidFill>
                 <a:latin typeface="Segoe UI"/>
               </a:rPr>
-              <a:t>68%</a:t>
+              <a:t>77%</a:t>
             </a:r>
           </a:p>
         </p:txBody>
@@ -6565,7 +6565,7 @@
                 </a:solidFill>
                 <a:latin typeface="Segoe UI"/>
               </a:rPr>
-              <a:t>above 200DMA · golden cross (50&gt;200) · MACD bearish</a:t>
+              <a:t>above 200DMA · golden cross (50&gt;200) · MACD bullish</a:t>
             </a:r>
           </a:p>
         </p:txBody>
@@ -6659,7 +6659,7 @@
                 </a:solidFill>
                 <a:latin typeface="Segoe UI"/>
               </a:rPr>
-              <a:t>Base currency INR · USD/INR 95.93</a:t>
+              <a:t>Base currency INR · USD/INR 96.3</a:t>
             </a:r>
           </a:p>
         </p:txBody>
@@ -7067,7 +7067,7 @@
                 </a:solidFill>
                 <a:latin typeface="Segoe UI"/>
               </a:rPr>
-              <a:t>84,926</a:t>
+              <a:t>86,743</a:t>
             </a:r>
           </a:p>
         </p:txBody>
@@ -7101,7 +7101,7 @@
                 </a:solidFill>
                 <a:latin typeface="Segoe UI"/>
               </a:rPr>
-              <a:t>Rs 814,667</a:t>
+              <a:t>Rs 835,331</a:t>
             </a:r>
           </a:p>
         </p:txBody>
@@ -7135,7 +7135,7 @@
                 </a:solidFill>
                 <a:latin typeface="Segoe UI"/>
               </a:rPr>
-              <a:t>Rs 239,104</a:t>
+              <a:t>Rs 257,531</a:t>
             </a:r>
           </a:p>
         </p:txBody>
@@ -7169,7 +7169,7 @@
                 </a:solidFill>
                 <a:latin typeface="Segoe UI"/>
               </a:rPr>
-              <a:t>+41.5%</a:t>
+              <a:t>+44.6%</a:t>
             </a:r>
           </a:p>
         </p:txBody>
@@ -7203,7 +7203,7 @@
                 </a:solidFill>
                 <a:latin typeface="Segoe UI"/>
               </a:rPr>
-              <a:t>+1.6%</a:t>
+              <a:t>+2.3%</a:t>
             </a:r>
           </a:p>
         </p:txBody>
@@ -7339,7 +7339,7 @@
                 </a:solidFill>
                 <a:latin typeface="Segoe UI"/>
               </a:rPr>
-              <a:t>4,178</a:t>
+              <a:t>4,184</a:t>
             </a:r>
           </a:p>
         </p:txBody>
@@ -7373,7 +7373,7 @@
                 </a:solidFill>
                 <a:latin typeface="Segoe UI"/>
               </a:rPr>
-              <a:t>Rs 400,793</a:t>
+              <a:t>Rs 402,910</a:t>
             </a:r>
           </a:p>
         </p:txBody>
@@ -7407,7 +7407,7 @@
                 </a:solidFill>
                 <a:latin typeface="Segoe UI"/>
               </a:rPr>
-              <a:t>Rs 180,161</a:t>
+              <a:t>Rs 181,420</a:t>
             </a:r>
           </a:p>
         </p:txBody>
@@ -7441,7 +7441,7 @@
                 </a:solidFill>
                 <a:latin typeface="Segoe UI"/>
               </a:rPr>
-              <a:t>+81.7%</a:t>
+              <a:t>+81.9%</a:t>
             </a:r>
           </a:p>
         </p:txBody>
@@ -7611,7 +7611,7 @@
                 </a:solidFill>
                 <a:latin typeface="Segoe UI"/>
               </a:rPr>
-              <a:t>330</a:t>
+              <a:t>334</a:t>
             </a:r>
           </a:p>
         </p:txBody>
@@ -7645,7 +7645,7 @@
                 </a:solidFill>
                 <a:latin typeface="Segoe UI"/>
               </a:rPr>
-              <a:t>Rs 316,866</a:t>
+              <a:t>Rs 321,343</a:t>
             </a:r>
           </a:p>
         </p:txBody>
@@ -7679,7 +7679,7 @@
                 </a:solidFill>
                 <a:latin typeface="Segoe UI"/>
               </a:rPr>
-              <a:t>Rs 139,401</a:t>
+              <a:t>Rs 143,188</a:t>
             </a:r>
           </a:p>
         </p:txBody>
@@ -7713,7 +7713,7 @@
                 </a:solidFill>
                 <a:latin typeface="Segoe UI"/>
               </a:rPr>
-              <a:t>+78.5%</a:t>
+              <a:t>+80.4%</a:t>
             </a:r>
           </a:p>
         </p:txBody>
@@ -7883,7 +7883,7 @@
                 </a:solidFill>
                 <a:latin typeface="Segoe UI"/>
               </a:rPr>
-              <a:t>231</a:t>
+              <a:t>234</a:t>
             </a:r>
           </a:p>
         </p:txBody>
@@ -7917,7 +7917,7 @@
                 </a:solidFill>
                 <a:latin typeface="Segoe UI"/>
               </a:rPr>
-              <a:t>Rs 177,166</a:t>
+              <a:t>Rs 180,235</a:t>
             </a:r>
           </a:p>
         </p:txBody>
@@ -7951,7 +7951,7 @@
                 </a:solidFill>
                 <a:latin typeface="Segoe UI"/>
               </a:rPr>
-              <a:t>Rs -168,172</a:t>
+              <a:t>Rs -166,445</a:t>
             </a:r>
           </a:p>
         </p:txBody>
@@ -7985,7 +7985,7 @@
                 </a:solidFill>
                 <a:latin typeface="Segoe UI"/>
               </a:rPr>
-              <a:t>-48.7%</a:t>
+              <a:t>-48.0%</a:t>
             </a:r>
           </a:p>
         </p:txBody>
@@ -9141,7 +9141,7 @@
                 </a:solidFill>
                 <a:latin typeface="Segoe UI"/>
               </a:rPr>
-              <a:t>Total Rs 1,945,824 | P&amp;L Rs 211,126 (+12.2%) | Sharpe 0.09 | Vol 20.39% | VaR95 -1.9%/day</a:t>
+              <a:t>Total Rs 1,976,151 | P&amp;L Rs 236,326 (+13.6%) | Sharpe 0.14 | Vol 20.44% | VaR95 -1.91%/day</a:t>
             </a:r>
           </a:p>
         </p:txBody>

--- a/docs/pmr_daily.pptx
+++ b/docs/pmr_daily.pptx
@@ -3197,7 +3197,7 @@
                 </a:solidFill>
                 <a:latin typeface="Segoe UI"/>
               </a:rPr>
-              <a:t>Monday, 05 Oct 2026 09:40 SGT</a:t>
+              <a:t>Tuesday, 06 Oct 2026 10:43 SGT</a:t>
             </a:r>
           </a:p>
         </p:txBody>
@@ -3265,7 +3265,7 @@
                 </a:solidFill>
                 <a:latin typeface="Segoe UI"/>
               </a:rPr>
-              <a:t>RAG 16R / 13A / 17G   |   43.5% above 200DMA   |   Portfolio Rs 1,976,151 (+13.6%)</a:t>
+              <a:t>RAG 15R / 13A / 18G   |   47.8% above 200DMA   |   Portfolio Rs 1,965,371 (+13.0%)</a:t>
             </a:r>
           </a:p>
         </p:txBody>
@@ -3461,7 +3461,7 @@
                 </a:solidFill>
                 <a:latin typeface="Segoe UI"/>
               </a:rPr>
-              <a:t>Nikkei 225</a:t>
+              <a:t>Tesla</a:t>
             </a:r>
           </a:p>
         </p:txBody>
@@ -3491,11 +3491,11 @@
             <a:r>
               <a:rPr sz="900" b="0">
                 <a:solidFill>
-                  <a:srgbClr val="22C55E"/>
-                </a:solidFill>
-                <a:latin typeface="Segoe UI"/>
-              </a:rPr>
-              <a:t>^N225 · GREEN</a:t>
+                  <a:srgbClr val="F59E0B"/>
+                </a:solidFill>
+                <a:latin typeface="Segoe UI"/>
+              </a:rPr>
+              <a:t>TSLA · AMBER</a:t>
             </a:r>
           </a:p>
         </p:txBody>
@@ -3529,7 +3529,7 @@
                 </a:solidFill>
                 <a:latin typeface="Segoe UI"/>
               </a:rPr>
-              <a:t>+4.8%</a:t>
+              <a:t>+6.7%</a:t>
             </a:r>
           </a:p>
         </p:txBody>
@@ -3587,7 +3587,7 @@
                 </a:solidFill>
                 <a:latin typeface="Segoe UI"/>
               </a:rPr>
-              <a:t>Tesla</a:t>
+              <a:t>Nikkei 225</a:t>
             </a:r>
           </a:p>
         </p:txBody>
@@ -3617,11 +3617,11 @@
             <a:r>
               <a:rPr sz="900" b="0">
                 <a:solidFill>
-                  <a:srgbClr val="F59E0B"/>
-                </a:solidFill>
-                <a:latin typeface="Segoe UI"/>
-              </a:rPr>
-              <a:t>TSLA · AMBER</a:t>
+                  <a:srgbClr val="22C55E"/>
+                </a:solidFill>
+                <a:latin typeface="Segoe UI"/>
+              </a:rPr>
+              <a:t>^N225 · GREEN</a:t>
             </a:r>
           </a:p>
         </p:txBody>
@@ -3655,7 +3655,7 @@
                 </a:solidFill>
                 <a:latin typeface="Segoe UI"/>
               </a:rPr>
-              <a:t>+4.4%</a:t>
+              <a:t>+5.0%</a:t>
             </a:r>
           </a:p>
         </p:txBody>
@@ -3713,7 +3713,7 @@
                 </a:solidFill>
                 <a:latin typeface="Segoe UI"/>
               </a:rPr>
-              <a:t>Infosys</a:t>
+              <a:t>Nvidia</a:t>
             </a:r>
           </a:p>
         </p:txBody>
@@ -3743,11 +3743,11 @@
             <a:r>
               <a:rPr sz="900" b="0">
                 <a:solidFill>
-                  <a:srgbClr val="EF4444"/>
-                </a:solidFill>
-                <a:latin typeface="Segoe UI"/>
-              </a:rPr>
-              <a:t>INFY.NS · RED</a:t>
+                  <a:srgbClr val="22C55E"/>
+                </a:solidFill>
+                <a:latin typeface="Segoe UI"/>
+              </a:rPr>
+              <a:t>NVDA · GREEN</a:t>
             </a:r>
           </a:p>
         </p:txBody>
@@ -3781,7 +3781,7 @@
                 </a:solidFill>
                 <a:latin typeface="Segoe UI"/>
               </a:rPr>
-              <a:t>+4.1%</a:t>
+              <a:t>+4.6%</a:t>
             </a:r>
           </a:p>
         </p:txBody>
@@ -3839,7 +3839,7 @@
                 </a:solidFill>
                 <a:latin typeface="Segoe UI"/>
               </a:rPr>
-              <a:t>Bitcoin</a:t>
+              <a:t>US Energy</a:t>
             </a:r>
           </a:p>
         </p:txBody>
@@ -3873,7 +3873,7 @@
                 </a:solidFill>
                 <a:latin typeface="Segoe UI"/>
               </a:rPr>
-              <a:t>BTC-USD · GREEN</a:t>
+              <a:t>XLE · GREEN</a:t>
             </a:r>
           </a:p>
         </p:txBody>
@@ -3907,7 +3907,7 @@
                 </a:solidFill>
                 <a:latin typeface="Segoe UI"/>
               </a:rPr>
-              <a:t>+3.8%</a:t>
+              <a:t>+3.2%</a:t>
             </a:r>
           </a:p>
         </p:txBody>
@@ -3965,7 +3965,7 @@
                 </a:solidFill>
                 <a:latin typeface="Segoe UI"/>
               </a:rPr>
-              <a:t>Silver</a:t>
+              <a:t>TCS</a:t>
             </a:r>
           </a:p>
         </p:txBody>
@@ -3999,7 +3999,7 @@
                 </a:solidFill>
                 <a:latin typeface="Segoe UI"/>
               </a:rPr>
-              <a:t>SI=F · RED</a:t>
+              <a:t>TCS.NS · RED</a:t>
             </a:r>
           </a:p>
         </p:txBody>
@@ -4033,7 +4033,7 @@
                 </a:solidFill>
                 <a:latin typeface="Segoe UI"/>
               </a:rPr>
-              <a:t>+2.7%</a:t>
+              <a:t>+3.1%</a:t>
             </a:r>
           </a:p>
         </p:txBody>
@@ -4125,7 +4125,7 @@
                 </a:solidFill>
                 <a:latin typeface="Segoe UI"/>
               </a:rPr>
-              <a:t>ITC</a:t>
+              <a:t>Hang Seng</a:t>
             </a:r>
           </a:p>
         </p:txBody>
@@ -4159,7 +4159,7 @@
                 </a:solidFill>
                 <a:latin typeface="Segoe UI"/>
               </a:rPr>
-              <a:t>ITC.NS · RED</a:t>
+              <a:t>^HSI · RED</a:t>
             </a:r>
           </a:p>
         </p:txBody>
@@ -4193,7 +4193,7 @@
                 </a:solidFill>
                 <a:latin typeface="Segoe UI"/>
               </a:rPr>
-              <a:t>-2.6%</a:t>
+              <a:t>-1.5%</a:t>
             </a:r>
           </a:p>
         </p:txBody>
@@ -4251,7 +4251,7 @@
                 </a:solidFill>
                 <a:latin typeface="Segoe UI"/>
               </a:rPr>
-              <a:t>Hang Seng</a:t>
+              <a:t>EUR/USD</a:t>
             </a:r>
           </a:p>
         </p:txBody>
@@ -4285,7 +4285,7 @@
                 </a:solidFill>
                 <a:latin typeface="Segoe UI"/>
               </a:rPr>
-              <a:t>^HSI · RED</a:t>
+              <a:t>EURUSD=X · RED</a:t>
             </a:r>
           </a:p>
         </p:txBody>
@@ -4319,7 +4319,7 @@
                 </a:solidFill>
                 <a:latin typeface="Segoe UI"/>
               </a:rPr>
-              <a:t>-2.6%</a:t>
+              <a:t>-1.1%</a:t>
             </a:r>
           </a:p>
         </p:txBody>
@@ -4377,7 +4377,7 @@
                 </a:solidFill>
                 <a:latin typeface="Segoe UI"/>
               </a:rPr>
-              <a:t>Reliance</a:t>
+              <a:t>FTSE 100</a:t>
             </a:r>
           </a:p>
         </p:txBody>
@@ -4407,11 +4407,11 @@
             <a:r>
               <a:rPr sz="900" b="0">
                 <a:solidFill>
-                  <a:srgbClr val="EF4444"/>
-                </a:solidFill>
-                <a:latin typeface="Segoe UI"/>
-              </a:rPr>
-              <a:t>RELIANCE.NS · RED</a:t>
+                  <a:srgbClr val="22C55E"/>
+                </a:solidFill>
+                <a:latin typeface="Segoe UI"/>
+              </a:rPr>
+              <a:t>^FTSE · GREEN</a:t>
             </a:r>
           </a:p>
         </p:txBody>
@@ -4445,7 +4445,7 @@
                 </a:solidFill>
                 <a:latin typeface="Segoe UI"/>
               </a:rPr>
-              <a:t>-1.6%</a:t>
+              <a:t>-1.0%</a:t>
             </a:r>
           </a:p>
         </p:txBody>
@@ -4503,7 +4503,7 @@
                 </a:solidFill>
                 <a:latin typeface="Segoe UI"/>
               </a:rPr>
-              <a:t>FTSE 100</a:t>
+              <a:t>Gold</a:t>
             </a:r>
           </a:p>
         </p:txBody>
@@ -4533,11 +4533,11 @@
             <a:r>
               <a:rPr sz="900" b="0">
                 <a:solidFill>
-                  <a:srgbClr val="22C55E"/>
-                </a:solidFill>
-                <a:latin typeface="Segoe UI"/>
-              </a:rPr>
-              <a:t>^FTSE · GREEN</a:t>
+                  <a:srgbClr val="EF4444"/>
+                </a:solidFill>
+                <a:latin typeface="Segoe UI"/>
+              </a:rPr>
+              <a:t>GC=F · RED</a:t>
             </a:r>
           </a:p>
         </p:txBody>
@@ -4571,7 +4571,7 @@
                 </a:solidFill>
                 <a:latin typeface="Segoe UI"/>
               </a:rPr>
-              <a:t>-1.4%</a:t>
+              <a:t>-0.8%</a:t>
             </a:r>
           </a:p>
         </p:txBody>
@@ -4629,7 +4629,7 @@
                 </a:solidFill>
                 <a:latin typeface="Segoe UI"/>
               </a:rPr>
-              <a:t>EUR/USD</a:t>
+              <a:t>Crude Oil WTI</a:t>
             </a:r>
           </a:p>
         </p:txBody>
@@ -4663,7 +4663,7 @@
                 </a:solidFill>
                 <a:latin typeface="Segoe UI"/>
               </a:rPr>
-              <a:t>EURUSD=X · RED</a:t>
+              <a:t>CL=F · RED</a:t>
             </a:r>
           </a:p>
         </p:txBody>
@@ -4697,7 +4697,7 @@
                 </a:solidFill>
                 <a:latin typeface="Segoe UI"/>
               </a:rPr>
-              <a:t>-0.9%</a:t>
+              <a:t>-0.7%</a:t>
             </a:r>
           </a:p>
         </p:txBody>
@@ -4967,7 +4967,7 @@
                 </a:solidFill>
                 <a:latin typeface="Segoe UI"/>
               </a:rPr>
-              <a:t>Nvidia</a:t>
+              <a:t>Solana</a:t>
             </a:r>
           </a:p>
         </p:txBody>
@@ -5035,7 +5035,7 @@
                 </a:solidFill>
                 <a:latin typeface="Segoe UI"/>
               </a:rPr>
-              <a:t>95%</a:t>
+              <a:t>86%</a:t>
             </a:r>
           </a:p>
         </p:txBody>
@@ -5069,7 +5069,7 @@
                 </a:solidFill>
                 <a:latin typeface="Segoe UI"/>
               </a:rPr>
-              <a:t>above 200DMA · golden cross (50&gt;200) · MACD bullish</a:t>
+              <a:t>above 200DMA · golden cross (50&gt;200) · MACD bearish</a:t>
             </a:r>
           </a:p>
         </p:txBody>
@@ -5103,7 +5103,7 @@
                 </a:solidFill>
                 <a:latin typeface="Segoe UI"/>
               </a:rPr>
-              <a:t>Bitcoin</a:t>
+              <a:t>Microsoft</a:t>
             </a:r>
           </a:p>
         </p:txBody>
@@ -5171,7 +5171,7 @@
                 </a:solidFill>
                 <a:latin typeface="Segoe UI"/>
               </a:rPr>
-              <a:t>86%</a:t>
+              <a:t>95%</a:t>
             </a:r>
           </a:p>
         </p:txBody>
@@ -5205,7 +5205,7 @@
                 </a:solidFill>
                 <a:latin typeface="Segoe UI"/>
               </a:rPr>
-              <a:t>above 200DMA · golden cross (50&gt;200) · MACD bearish</a:t>
+              <a:t>above 200DMA · golden cross (50&gt;200) · MACD bullish</a:t>
             </a:r>
           </a:p>
         </p:txBody>
@@ -5239,7 +5239,7 @@
                 </a:solidFill>
                 <a:latin typeface="Segoe UI"/>
               </a:rPr>
-              <a:t>Solana</a:t>
+              <a:t>Bitcoin</a:t>
             </a:r>
           </a:p>
         </p:txBody>
@@ -5307,7 +5307,7 @@
                 </a:solidFill>
                 <a:latin typeface="Segoe UI"/>
               </a:rPr>
-              <a:t>86%</a:t>
+              <a:t>85%</a:t>
             </a:r>
           </a:p>
         </p:txBody>
@@ -5375,7 +5375,7 @@
                 </a:solidFill>
                 <a:latin typeface="Segoe UI"/>
               </a:rPr>
-              <a:t>Nasdaq 100</a:t>
+              <a:t>Ethereum</a:t>
             </a:r>
           </a:p>
         </p:txBody>
@@ -5443,7 +5443,7 @@
                 </a:solidFill>
                 <a:latin typeface="Segoe UI"/>
               </a:rPr>
-              <a:t>95%</a:t>
+              <a:t>84%</a:t>
             </a:r>
           </a:p>
         </p:txBody>
@@ -5477,7 +5477,7 @@
                 </a:solidFill>
                 <a:latin typeface="Segoe UI"/>
               </a:rPr>
-              <a:t>above 200DMA · golden cross (50&gt;200) · MACD bullish</a:t>
+              <a:t>above 200DMA · golden cross (50&gt;200) · MACD bearish</a:t>
             </a:r>
           </a:p>
         </p:txBody>
@@ -5511,7 +5511,7 @@
                 </a:solidFill>
                 <a:latin typeface="Segoe UI"/>
               </a:rPr>
-              <a:t>Ethereum</a:t>
+              <a:t>US Energy</a:t>
             </a:r>
           </a:p>
         </p:txBody>
@@ -5579,7 +5579,7 @@
                 </a:solidFill>
                 <a:latin typeface="Segoe UI"/>
               </a:rPr>
-              <a:t>85%</a:t>
+              <a:t>95%</a:t>
             </a:r>
           </a:p>
         </p:txBody>
@@ -5613,7 +5613,7 @@
                 </a:solidFill>
                 <a:latin typeface="Segoe UI"/>
               </a:rPr>
-              <a:t>above 200DMA · golden cross (50&gt;200) · MACD bearish</a:t>
+              <a:t>above 200DMA · golden cross (50&gt;200) · MACD bullish</a:t>
             </a:r>
           </a:p>
         </p:txBody>
@@ -5647,7 +5647,7 @@
                 </a:solidFill>
                 <a:latin typeface="Segoe UI"/>
               </a:rPr>
-              <a:t>Microsoft</a:t>
+              <a:t>Apple</a:t>
             </a:r>
           </a:p>
         </p:txBody>
@@ -5715,7 +5715,7 @@
                 </a:solidFill>
                 <a:latin typeface="Segoe UI"/>
               </a:rPr>
-              <a:t>95%</a:t>
+              <a:t>82%</a:t>
             </a:r>
           </a:p>
         </p:txBody>
@@ -5749,7 +5749,7 @@
                 </a:solidFill>
                 <a:latin typeface="Segoe UI"/>
               </a:rPr>
-              <a:t>above 200DMA · golden cross (50&gt;200) · MACD bullish</a:t>
+              <a:t>above 200DMA · golden cross (50&gt;200) · MACD bearish</a:t>
             </a:r>
           </a:p>
         </p:txBody>
@@ -5783,7 +5783,7 @@
                 </a:solidFill>
                 <a:latin typeface="Segoe UI"/>
               </a:rPr>
-              <a:t>Apple</a:t>
+              <a:t>USD/INR</a:t>
             </a:r>
           </a:p>
         </p:txBody>
@@ -5851,7 +5851,7 @@
                 </a:solidFill>
                 <a:latin typeface="Segoe UI"/>
               </a:rPr>
-              <a:t>83%</a:t>
+              <a:t>93%</a:t>
             </a:r>
           </a:p>
         </p:txBody>
@@ -5885,7 +5885,7 @@
                 </a:solidFill>
                 <a:latin typeface="Segoe UI"/>
               </a:rPr>
-              <a:t>above 200DMA · golden cross (50&gt;200) · MACD bearish</a:t>
+              <a:t>above 200DMA · golden cross (50&gt;200) · MACD bullish</a:t>
             </a:r>
           </a:p>
         </p:txBody>
@@ -5919,7 +5919,7 @@
                 </a:solidFill>
                 <a:latin typeface="Segoe UI"/>
               </a:rPr>
-              <a:t>US Energy</a:t>
+              <a:t>S&amp;P 500</a:t>
             </a:r>
           </a:p>
         </p:txBody>
@@ -5987,7 +5987,7 @@
                 </a:solidFill>
                 <a:latin typeface="Segoe UI"/>
               </a:rPr>
-              <a:t>93%</a:t>
+              <a:t>81%</a:t>
             </a:r>
           </a:p>
         </p:txBody>
@@ -6055,7 +6055,7 @@
                 </a:solidFill>
                 <a:latin typeface="Segoe UI"/>
               </a:rPr>
-              <a:t>S&amp;P 500</a:t>
+              <a:t>Nvidia</a:t>
             </a:r>
           </a:p>
         </p:txBody>
@@ -6089,7 +6089,7 @@
                 </a:solidFill>
                 <a:latin typeface="Segoe UI"/>
               </a:rPr>
-              <a:t>STRONG BUY</a:t>
+              <a:t>BUY</a:t>
             </a:r>
           </a:p>
         </p:txBody>
@@ -6123,7 +6123,7 @@
                 </a:solidFill>
                 <a:latin typeface="Segoe UI"/>
               </a:rPr>
-              <a:t>81%</a:t>
+              <a:t>92%</a:t>
             </a:r>
           </a:p>
         </p:txBody>
@@ -6191,7 +6191,7 @@
                 </a:solidFill>
                 <a:latin typeface="Segoe UI"/>
               </a:rPr>
-              <a:t>USD/INR</a:t>
+              <a:t>US Technology</a:t>
             </a:r>
           </a:p>
         </p:txBody>
@@ -6225,7 +6225,7 @@
                 </a:solidFill>
                 <a:latin typeface="Segoe UI"/>
               </a:rPr>
-              <a:t>STRONG BUY</a:t>
+              <a:t>BUY</a:t>
             </a:r>
           </a:p>
         </p:txBody>
@@ -6259,7 +6259,7 @@
                 </a:solidFill>
                 <a:latin typeface="Segoe UI"/>
               </a:rPr>
-              <a:t>81%</a:t>
+              <a:t>91%</a:t>
             </a:r>
           </a:p>
         </p:txBody>
@@ -6327,7 +6327,7 @@
                 </a:solidFill>
                 <a:latin typeface="Segoe UI"/>
               </a:rPr>
-              <a:t>US Technology</a:t>
+              <a:t>Nasdaq 100</a:t>
             </a:r>
           </a:p>
         </p:txBody>
@@ -6395,7 +6395,7 @@
                 </a:solidFill>
                 <a:latin typeface="Segoe UI"/>
               </a:rPr>
-              <a:t>93%</a:t>
+              <a:t>90%</a:t>
             </a:r>
           </a:p>
         </p:txBody>
@@ -6463,7 +6463,7 @@
                 </a:solidFill>
                 <a:latin typeface="Segoe UI"/>
               </a:rPr>
-              <a:t>Nikkei 225</a:t>
+              <a:t>Dollar Index</a:t>
             </a:r>
           </a:p>
         </p:txBody>
@@ -6531,7 +6531,7 @@
                 </a:solidFill>
                 <a:latin typeface="Segoe UI"/>
               </a:rPr>
-              <a:t>77%</a:t>
+              <a:t>90%</a:t>
             </a:r>
           </a:p>
         </p:txBody>
@@ -7067,7 +7067,7 @@
                 </a:solidFill>
                 <a:latin typeface="Segoe UI"/>
               </a:rPr>
-              <a:t>86,743</a:t>
+              <a:t>85,631</a:t>
             </a:r>
           </a:p>
         </p:txBody>
@@ -7101,7 +7101,7 @@
                 </a:solidFill>
                 <a:latin typeface="Segoe UI"/>
               </a:rPr>
-              <a:t>Rs 835,331</a:t>
+              <a:t>Rs 824,631</a:t>
             </a:r>
           </a:p>
         </p:txBody>
@@ -7135,7 +7135,7 @@
                 </a:solidFill>
                 <a:latin typeface="Segoe UI"/>
               </a:rPr>
-              <a:t>Rs 257,531</a:t>
+              <a:t>Rs 246,831</a:t>
             </a:r>
           </a:p>
         </p:txBody>
@@ -7169,7 +7169,7 @@
                 </a:solidFill>
                 <a:latin typeface="Segoe UI"/>
               </a:rPr>
-              <a:t>+44.6%</a:t>
+              <a:t>+42.7%</a:t>
             </a:r>
           </a:p>
         </p:txBody>
@@ -7199,11 +7199,11 @@
             <a:r>
               <a:rPr sz="1000" b="0">
                 <a:solidFill>
-                  <a:srgbClr val="22C55E"/>
-                </a:solidFill>
-                <a:latin typeface="Segoe UI"/>
-              </a:rPr>
-              <a:t>+2.3%</a:t>
+                  <a:srgbClr val="EF4444"/>
+                </a:solidFill>
+                <a:latin typeface="Segoe UI"/>
+              </a:rPr>
+              <a:t>-1.0%</a:t>
             </a:r>
           </a:p>
         </p:txBody>
@@ -7339,7 +7339,7 @@
                 </a:solidFill>
                 <a:latin typeface="Segoe UI"/>
               </a:rPr>
-              <a:t>4,184</a:t>
+              <a:t>4,154</a:t>
             </a:r>
           </a:p>
         </p:txBody>
@@ -7373,7 +7373,7 @@
                 </a:solidFill>
                 <a:latin typeface="Segoe UI"/>
               </a:rPr>
-              <a:t>Rs 402,910</a:t>
+              <a:t>Rs 400,011</a:t>
             </a:r>
           </a:p>
         </p:txBody>
@@ -7407,7 +7407,7 @@
                 </a:solidFill>
                 <a:latin typeface="Segoe UI"/>
               </a:rPr>
-              <a:t>Rs 181,420</a:t>
+              <a:t>Rs 178,521</a:t>
             </a:r>
           </a:p>
         </p:txBody>
@@ -7441,7 +7441,7 @@
                 </a:solidFill>
                 <a:latin typeface="Segoe UI"/>
               </a:rPr>
-              <a:t>+81.9%</a:t>
+              <a:t>+80.6%</a:t>
             </a:r>
           </a:p>
         </p:txBody>
@@ -7611,7 +7611,7 @@
                 </a:solidFill>
                 <a:latin typeface="Segoe UI"/>
               </a:rPr>
-              <a:t>334</a:t>
+              <a:t>333</a:t>
             </a:r>
           </a:p>
         </p:txBody>
@@ -7645,7 +7645,7 @@
                 </a:solidFill>
                 <a:latin typeface="Segoe UI"/>
               </a:rPr>
-              <a:t>Rs 321,343</a:t>
+              <a:t>Rs 320,573</a:t>
             </a:r>
           </a:p>
         </p:txBody>
@@ -7679,7 +7679,7 @@
                 </a:solidFill>
                 <a:latin typeface="Segoe UI"/>
               </a:rPr>
-              <a:t>Rs 143,188</a:t>
+              <a:t>Rs 142,418</a:t>
             </a:r>
           </a:p>
         </p:txBody>
@@ -7713,7 +7713,7 @@
                 </a:solidFill>
                 <a:latin typeface="Segoe UI"/>
               </a:rPr>
-              <a:t>+80.4%</a:t>
+              <a:t>+79.9%</a:t>
             </a:r>
           </a:p>
         </p:txBody>
@@ -7883,7 +7883,7 @@
                 </a:solidFill>
                 <a:latin typeface="Segoe UI"/>
               </a:rPr>
-              <a:t>234</a:t>
+              <a:t>239</a:t>
             </a:r>
           </a:p>
         </p:txBody>
@@ -7917,7 +7917,7 @@
                 </a:solidFill>
                 <a:latin typeface="Segoe UI"/>
               </a:rPr>
-              <a:t>Rs 180,235</a:t>
+              <a:t>Rs 184,049</a:t>
             </a:r>
           </a:p>
         </p:txBody>
@@ -7951,7 +7951,7 @@
                 </a:solidFill>
                 <a:latin typeface="Segoe UI"/>
               </a:rPr>
-              <a:t>Rs -166,445</a:t>
+              <a:t>Rs -162,631</a:t>
             </a:r>
           </a:p>
         </p:txBody>
@@ -7985,7 +7985,7 @@
                 </a:solidFill>
                 <a:latin typeface="Segoe UI"/>
               </a:rPr>
-              <a:t>-48.0%</a:t>
+              <a:t>-46.9%</a:t>
             </a:r>
           </a:p>
         </p:txBody>
@@ -8155,7 +8155,7 @@
                 </a:solidFill>
                 <a:latin typeface="Segoe UI"/>
               </a:rPr>
-              <a:t>1,035</a:t>
+              <a:t>1,020</a:t>
             </a:r>
           </a:p>
         </p:txBody>
@@ -8189,7 +8189,7 @@
                 </a:solidFill>
                 <a:latin typeface="Segoe UI"/>
               </a:rPr>
-              <a:t>Rs 82,800</a:t>
+              <a:t>Rs 81,640</a:t>
             </a:r>
           </a:p>
         </p:txBody>
@@ -8223,7 +8223,7 @@
                 </a:solidFill>
                 <a:latin typeface="Segoe UI"/>
               </a:rPr>
-              <a:t>Rs -29,200</a:t>
+              <a:t>Rs -30,360</a:t>
             </a:r>
           </a:p>
         </p:txBody>
@@ -8257,7 +8257,7 @@
                 </a:solidFill>
                 <a:latin typeface="Segoe UI"/>
               </a:rPr>
-              <a:t>-26.1%</a:t>
+              <a:t>-27.1%</a:t>
             </a:r>
           </a:p>
         </p:txBody>
@@ -8427,7 +8427,7 @@
                 </a:solidFill>
                 <a:latin typeface="Segoe UI"/>
               </a:rPr>
-              <a:t>1,168</a:t>
+              <a:t>1,186</a:t>
             </a:r>
           </a:p>
         </p:txBody>
@@ -8461,7 +8461,7 @@
                 </a:solidFill>
                 <a:latin typeface="Segoe UI"/>
               </a:rPr>
-              <a:t>Rs 58,385</a:t>
+              <a:t>Rs 59,320</a:t>
             </a:r>
           </a:p>
         </p:txBody>
@@ -8495,7 +8495,7 @@
                 </a:solidFill>
                 <a:latin typeface="Segoe UI"/>
               </a:rPr>
-              <a:t>Rs -64,115</a:t>
+              <a:t>Rs -63,180</a:t>
             </a:r>
           </a:p>
         </p:txBody>
@@ -8529,7 +8529,7 @@
                 </a:solidFill>
                 <a:latin typeface="Segoe UI"/>
               </a:rPr>
-              <a:t>-52.3%</a:t>
+              <a:t>-51.6%</a:t>
             </a:r>
           </a:p>
         </p:txBody>
@@ -8699,7 +8699,7 @@
                 </a:solidFill>
                 <a:latin typeface="Segoe UI"/>
               </a:rPr>
-              <a:t>2,075</a:t>
+              <a:t>2,114</a:t>
             </a:r>
           </a:p>
         </p:txBody>
@@ -8733,7 +8733,7 @@
                 </a:solidFill>
                 <a:latin typeface="Segoe UI"/>
               </a:rPr>
-              <a:t>Rs 51,875</a:t>
+              <a:t>Rs 52,860</a:t>
             </a:r>
           </a:p>
         </p:txBody>
@@ -8767,7 +8767,7 @@
                 </a:solidFill>
                 <a:latin typeface="Segoe UI"/>
               </a:rPr>
-              <a:t>Rs -38,125</a:t>
+              <a:t>Rs -37,140</a:t>
             </a:r>
           </a:p>
         </p:txBody>
@@ -8801,7 +8801,7 @@
                 </a:solidFill>
                 <a:latin typeface="Segoe UI"/>
               </a:rPr>
-              <a:t>-42.4%</a:t>
+              <a:t>-41.3%</a:t>
             </a:r>
           </a:p>
         </p:txBody>
@@ -8971,7 +8971,7 @@
                 </a:solidFill>
                 <a:latin typeface="Segoe UI"/>
               </a:rPr>
-              <a:t>721</a:t>
+              <a:t>705</a:t>
             </a:r>
           </a:p>
         </p:txBody>
@@ -9005,7 +9005,7 @@
                 </a:solidFill>
                 <a:latin typeface="Segoe UI"/>
               </a:rPr>
-              <a:t>Rs 43,272</a:t>
+              <a:t>Rs 42,288</a:t>
             </a:r>
           </a:p>
         </p:txBody>
@@ -9039,7 +9039,7 @@
                 </a:solidFill>
                 <a:latin typeface="Segoe UI"/>
               </a:rPr>
-              <a:t>Rs -47,928</a:t>
+              <a:t>Rs -48,912</a:t>
             </a:r>
           </a:p>
         </p:txBody>
@@ -9073,7 +9073,7 @@
                 </a:solidFill>
                 <a:latin typeface="Segoe UI"/>
               </a:rPr>
-              <a:t>-52.5%</a:t>
+              <a:t>-53.6%</a:t>
             </a:r>
           </a:p>
         </p:txBody>
@@ -9141,7 +9141,7 @@
                 </a:solidFill>
                 <a:latin typeface="Segoe UI"/>
               </a:rPr>
-              <a:t>Total Rs 1,976,151 | P&amp;L Rs 236,326 (+13.6%) | Sharpe 0.14 | Vol 20.44% | VaR95 -1.91%/day</a:t>
+              <a:t>Total Rs 1,965,371 | P&amp;L Rs 225,546 (+13.0%) | Sharpe 0.08 | Vol 20.35% | VaR95 -1.91%/day</a:t>
             </a:r>
           </a:p>
         </p:txBody>

--- a/docs/pmr_daily.pptx
+++ b/docs/pmr_daily.pptx
@@ -3197,7 +3197,7 @@
                 </a:solidFill>
                 <a:latin typeface="Segoe UI"/>
               </a:rPr>
-              <a:t>Tuesday, 06 Oct 2026 10:43 SGT</a:t>
+              <a:t>Wednesday, 07 Oct 2026 10:09 SGT</a:t>
             </a:r>
           </a:p>
         </p:txBody>
@@ -3265,7 +3265,7 @@
                 </a:solidFill>
                 <a:latin typeface="Segoe UI"/>
               </a:rPr>
-              <a:t>RAG 15R / 13A / 18G   |   47.8% above 200DMA   |   Portfolio Rs 1,965,371 (+13.0%)</a:t>
+              <a:t>RAG 14R / 14A / 18G   |   54.3% above 200DMA   |   Portfolio Rs 1,954,459 (+12.3%)</a:t>
             </a:r>
           </a:p>
         </p:txBody>
@@ -3529,7 +3529,7 @@
                 </a:solidFill>
                 <a:latin typeface="Segoe UI"/>
               </a:rPr>
-              <a:t>+6.7%</a:t>
+              <a:t>+7.3%</a:t>
             </a:r>
           </a:p>
         </p:txBody>
@@ -3655,7 +3655,7 @@
                 </a:solidFill>
                 <a:latin typeface="Segoe UI"/>
               </a:rPr>
-              <a:t>+5.0%</a:t>
+              <a:t>+5.5%</a:t>
             </a:r>
           </a:p>
         </p:txBody>
@@ -3781,7 +3781,7 @@
                 </a:solidFill>
                 <a:latin typeface="Segoe UI"/>
               </a:rPr>
-              <a:t>+4.6%</a:t>
+              <a:t>+4.8%</a:t>
             </a:r>
           </a:p>
         </p:txBody>
@@ -3907,7 +3907,7 @@
                 </a:solidFill>
                 <a:latin typeface="Segoe UI"/>
               </a:rPr>
-              <a:t>+3.2%</a:t>
+              <a:t>+3.7%</a:t>
             </a:r>
           </a:p>
         </p:txBody>
@@ -3965,7 +3965,7 @@
                 </a:solidFill>
                 <a:latin typeface="Segoe UI"/>
               </a:rPr>
-              <a:t>TCS</a:t>
+              <a:t>Natural Gas</a:t>
             </a:r>
           </a:p>
         </p:txBody>
@@ -3999,7 +3999,7 @@
                 </a:solidFill>
                 <a:latin typeface="Segoe UI"/>
               </a:rPr>
-              <a:t>TCS.NS · RED</a:t>
+              <a:t>NG=F · RED</a:t>
             </a:r>
           </a:p>
         </p:txBody>
@@ -4033,7 +4033,7 @@
                 </a:solidFill>
                 <a:latin typeface="Segoe UI"/>
               </a:rPr>
-              <a:t>+3.1%</a:t>
+              <a:t>+3.6%</a:t>
             </a:r>
           </a:p>
         </p:txBody>
@@ -4125,7 +4125,7 @@
                 </a:solidFill>
                 <a:latin typeface="Segoe UI"/>
               </a:rPr>
-              <a:t>Hang Seng</a:t>
+              <a:t>Ethereum</a:t>
             </a:r>
           </a:p>
         </p:txBody>
@@ -4155,11 +4155,11 @@
             <a:r>
               <a:rPr sz="900" b="0">
                 <a:solidFill>
-                  <a:srgbClr val="EF4444"/>
-                </a:solidFill>
-                <a:latin typeface="Segoe UI"/>
-              </a:rPr>
-              <a:t>^HSI · RED</a:t>
+                  <a:srgbClr val="22C55E"/>
+                </a:solidFill>
+                <a:latin typeface="Segoe UI"/>
+              </a:rPr>
+              <a:t>ETH-USD · GREEN</a:t>
             </a:r>
           </a:p>
         </p:txBody>
@@ -4193,7 +4193,7 @@
                 </a:solidFill>
                 <a:latin typeface="Segoe UI"/>
               </a:rPr>
-              <a:t>-1.5%</a:t>
+              <a:t>-2.6%</a:t>
             </a:r>
           </a:p>
         </p:txBody>
@@ -4251,7 +4251,7 @@
                 </a:solidFill>
                 <a:latin typeface="Segoe UI"/>
               </a:rPr>
-              <a:t>EUR/USD</a:t>
+              <a:t>Hang Seng</a:t>
             </a:r>
           </a:p>
         </p:txBody>
@@ -4285,7 +4285,7 @@
                 </a:solidFill>
                 <a:latin typeface="Segoe UI"/>
               </a:rPr>
-              <a:t>EURUSD=X · RED</a:t>
+              <a:t>^HSI · RED</a:t>
             </a:r>
           </a:p>
         </p:txBody>
@@ -4319,7 +4319,7 @@
                 </a:solidFill>
                 <a:latin typeface="Segoe UI"/>
               </a:rPr>
-              <a:t>-1.1%</a:t>
+              <a:t>-2.0%</a:t>
             </a:r>
           </a:p>
         </p:txBody>
@@ -4377,7 +4377,7 @@
                 </a:solidFill>
                 <a:latin typeface="Segoe UI"/>
               </a:rPr>
-              <a:t>FTSE 100</a:t>
+              <a:t>EUR/USD</a:t>
             </a:r>
           </a:p>
         </p:txBody>
@@ -4407,11 +4407,11 @@
             <a:r>
               <a:rPr sz="900" b="0">
                 <a:solidFill>
-                  <a:srgbClr val="22C55E"/>
-                </a:solidFill>
-                <a:latin typeface="Segoe UI"/>
-              </a:rPr>
-              <a:t>^FTSE · GREEN</a:t>
+                  <a:srgbClr val="EF4444"/>
+                </a:solidFill>
+                <a:latin typeface="Segoe UI"/>
+              </a:rPr>
+              <a:t>EURUSD=X · RED</a:t>
             </a:r>
           </a:p>
         </p:txBody>
@@ -4445,7 +4445,7 @@
                 </a:solidFill>
                 <a:latin typeface="Segoe UI"/>
               </a:rPr>
-              <a:t>-1.0%</a:t>
+              <a:t>-0.9%</a:t>
             </a:r>
           </a:p>
         </p:txBody>
@@ -4503,7 +4503,7 @@
                 </a:solidFill>
                 <a:latin typeface="Segoe UI"/>
               </a:rPr>
-              <a:t>Gold</a:t>
+              <a:t>FTSE 100</a:t>
             </a:r>
           </a:p>
         </p:txBody>
@@ -4533,11 +4533,11 @@
             <a:r>
               <a:rPr sz="900" b="0">
                 <a:solidFill>
-                  <a:srgbClr val="EF4444"/>
-                </a:solidFill>
-                <a:latin typeface="Segoe UI"/>
-              </a:rPr>
-              <a:t>GC=F · RED</a:t>
+                  <a:srgbClr val="22C55E"/>
+                </a:solidFill>
+                <a:latin typeface="Segoe UI"/>
+              </a:rPr>
+              <a:t>^FTSE · GREEN</a:t>
             </a:r>
           </a:p>
         </p:txBody>
@@ -4571,7 +4571,7 @@
                 </a:solidFill>
                 <a:latin typeface="Segoe UI"/>
               </a:rPr>
-              <a:t>-0.8%</a:t>
+              <a:t>-0.6%</a:t>
             </a:r>
           </a:p>
         </p:txBody>
@@ -4629,7 +4629,7 @@
                 </a:solidFill>
                 <a:latin typeface="Segoe UI"/>
               </a:rPr>
-              <a:t>Crude Oil WTI</a:t>
+              <a:t>Straits Times</a:t>
             </a:r>
           </a:p>
         </p:txBody>
@@ -4659,11 +4659,11 @@
             <a:r>
               <a:rPr sz="900" b="0">
                 <a:solidFill>
-                  <a:srgbClr val="EF4444"/>
-                </a:solidFill>
-                <a:latin typeface="Segoe UI"/>
-              </a:rPr>
-              <a:t>CL=F · RED</a:t>
+                  <a:srgbClr val="22C55E"/>
+                </a:solidFill>
+                <a:latin typeface="Segoe UI"/>
+              </a:rPr>
+              <a:t>^STI · GREEN</a:t>
             </a:r>
           </a:p>
         </p:txBody>
@@ -4697,7 +4697,7 @@
                 </a:solidFill>
                 <a:latin typeface="Segoe UI"/>
               </a:rPr>
-              <a:t>-0.7%</a:t>
+              <a:t>-0.4%</a:t>
             </a:r>
           </a:p>
         </p:txBody>
@@ -5035,7 +5035,7 @@
                 </a:solidFill>
                 <a:latin typeface="Segoe UI"/>
               </a:rPr>
-              <a:t>86%</a:t>
+              <a:t>85%</a:t>
             </a:r>
           </a:p>
         </p:txBody>
@@ -5103,7 +5103,7 @@
                 </a:solidFill>
                 <a:latin typeface="Segoe UI"/>
               </a:rPr>
-              <a:t>Microsoft</a:t>
+              <a:t>Bitcoin</a:t>
             </a:r>
           </a:p>
         </p:txBody>
@@ -5171,7 +5171,7 @@
                 </a:solidFill>
                 <a:latin typeface="Segoe UI"/>
               </a:rPr>
-              <a:t>95%</a:t>
+              <a:t>84%</a:t>
             </a:r>
           </a:p>
         </p:txBody>
@@ -5205,7 +5205,7 @@
                 </a:solidFill>
                 <a:latin typeface="Segoe UI"/>
               </a:rPr>
-              <a:t>above 200DMA · golden cross (50&gt;200) · MACD bullish</a:t>
+              <a:t>above 200DMA · golden cross (50&gt;200) · MACD bearish</a:t>
             </a:r>
           </a:p>
         </p:txBody>
@@ -5239,7 +5239,7 @@
                 </a:solidFill>
                 <a:latin typeface="Segoe UI"/>
               </a:rPr>
-              <a:t>Bitcoin</a:t>
+              <a:t>US Energy</a:t>
             </a:r>
           </a:p>
         </p:txBody>
@@ -5307,7 +5307,7 @@
                 </a:solidFill>
                 <a:latin typeface="Segoe UI"/>
               </a:rPr>
-              <a:t>85%</a:t>
+              <a:t>95%</a:t>
             </a:r>
           </a:p>
         </p:txBody>
@@ -5341,7 +5341,7 @@
                 </a:solidFill>
                 <a:latin typeface="Segoe UI"/>
               </a:rPr>
-              <a:t>above 200DMA · golden cross (50&gt;200) · MACD bearish</a:t>
+              <a:t>above 200DMA · golden cross (50&gt;200) · MACD bullish</a:t>
             </a:r>
           </a:p>
         </p:txBody>
@@ -5443,7 +5443,7 @@
                 </a:solidFill>
                 <a:latin typeface="Segoe UI"/>
               </a:rPr>
-              <a:t>84%</a:t>
+              <a:t>83%</a:t>
             </a:r>
           </a:p>
         </p:txBody>
@@ -5511,7 +5511,7 @@
                 </a:solidFill>
                 <a:latin typeface="Segoe UI"/>
               </a:rPr>
-              <a:t>US Energy</a:t>
+              <a:t>S&amp;P 500</a:t>
             </a:r>
           </a:p>
         </p:txBody>
@@ -5579,7 +5579,7 @@
                 </a:solidFill>
                 <a:latin typeface="Segoe UI"/>
               </a:rPr>
-              <a:t>95%</a:t>
+              <a:t>82%</a:t>
             </a:r>
           </a:p>
         </p:txBody>
@@ -5647,7 +5647,7 @@
                 </a:solidFill>
                 <a:latin typeface="Segoe UI"/>
               </a:rPr>
-              <a:t>Apple</a:t>
+              <a:t>Natural Gas</a:t>
             </a:r>
           </a:p>
         </p:txBody>
@@ -5749,7 +5749,7 @@
                 </a:solidFill>
                 <a:latin typeface="Segoe UI"/>
               </a:rPr>
-              <a:t>above 200DMA · golden cross (50&gt;200) · MACD bearish</a:t>
+              <a:t>above 200DMA · golden cross (50&gt;200) · MACD bullish</a:t>
             </a:r>
           </a:p>
         </p:txBody>
@@ -5783,7 +5783,7 @@
                 </a:solidFill>
                 <a:latin typeface="Segoe UI"/>
               </a:rPr>
-              <a:t>USD/INR</a:t>
+              <a:t>Apple</a:t>
             </a:r>
           </a:p>
         </p:txBody>
@@ -5851,7 +5851,7 @@
                 </a:solidFill>
                 <a:latin typeface="Segoe UI"/>
               </a:rPr>
-              <a:t>93%</a:t>
+              <a:t>81%</a:t>
             </a:r>
           </a:p>
         </p:txBody>
@@ -5885,7 +5885,7 @@
                 </a:solidFill>
                 <a:latin typeface="Segoe UI"/>
               </a:rPr>
-              <a:t>above 200DMA · golden cross (50&gt;200) · MACD bullish</a:t>
+              <a:t>above 200DMA · golden cross (50&gt;200) · MACD bearish</a:t>
             </a:r>
           </a:p>
         </p:txBody>
@@ -5919,7 +5919,7 @@
                 </a:solidFill>
                 <a:latin typeface="Segoe UI"/>
               </a:rPr>
-              <a:t>S&amp;P 500</a:t>
+              <a:t>USD/INR</a:t>
             </a:r>
           </a:p>
         </p:txBody>
@@ -5987,7 +5987,7 @@
                 </a:solidFill>
                 <a:latin typeface="Segoe UI"/>
               </a:rPr>
-              <a:t>81%</a:t>
+              <a:t>93%</a:t>
             </a:r>
           </a:p>
         </p:txBody>
@@ -6055,7 +6055,7 @@
                 </a:solidFill>
                 <a:latin typeface="Segoe UI"/>
               </a:rPr>
-              <a:t>Nvidia</a:t>
+              <a:t>Microsoft</a:t>
             </a:r>
           </a:p>
         </p:txBody>
@@ -6123,7 +6123,7 @@
                 </a:solidFill>
                 <a:latin typeface="Segoe UI"/>
               </a:rPr>
-              <a:t>92%</a:t>
+              <a:t>91%</a:t>
             </a:r>
           </a:p>
         </p:txBody>
@@ -6327,7 +6327,7 @@
                 </a:solidFill>
                 <a:latin typeface="Segoe UI"/>
               </a:rPr>
-              <a:t>Nasdaq 100</a:t>
+              <a:t>Nvidia</a:t>
             </a:r>
           </a:p>
         </p:txBody>
@@ -6395,7 +6395,7 @@
                 </a:solidFill>
                 <a:latin typeface="Segoe UI"/>
               </a:rPr>
-              <a:t>90%</a:t>
+              <a:t>91%</a:t>
             </a:r>
           </a:p>
         </p:txBody>
@@ -6463,7 +6463,7 @@
                 </a:solidFill>
                 <a:latin typeface="Segoe UI"/>
               </a:rPr>
-              <a:t>Dollar Index</a:t>
+              <a:t>Nasdaq 100</a:t>
             </a:r>
           </a:p>
         </p:txBody>
@@ -6659,7 +6659,7 @@
                 </a:solidFill>
                 <a:latin typeface="Segoe UI"/>
               </a:rPr>
-              <a:t>Base currency INR · USD/INR 96.3</a:t>
+              <a:t>Base currency INR · USD/INR 96.36</a:t>
             </a:r>
           </a:p>
         </p:txBody>
@@ -7067,7 +7067,7 @@
                 </a:solidFill>
                 <a:latin typeface="Segoe UI"/>
               </a:rPr>
-              <a:t>85,631</a:t>
+              <a:t>83,968</a:t>
             </a:r>
           </a:p>
         </p:txBody>
@@ -7101,7 +7101,7 @@
                 </a:solidFill>
                 <a:latin typeface="Segoe UI"/>
               </a:rPr>
-              <a:t>Rs 824,631</a:t>
+              <a:t>Rs 809,117</a:t>
             </a:r>
           </a:p>
         </p:txBody>
@@ -7135,7 +7135,7 @@
                 </a:solidFill>
                 <a:latin typeface="Segoe UI"/>
               </a:rPr>
-              <a:t>Rs 246,831</a:t>
+              <a:t>Rs 230,957</a:t>
             </a:r>
           </a:p>
         </p:txBody>
@@ -7169,7 +7169,7 @@
                 </a:solidFill>
                 <a:latin typeface="Segoe UI"/>
               </a:rPr>
-              <a:t>+42.7%</a:t>
+              <a:t>+40.0%</a:t>
             </a:r>
           </a:p>
         </p:txBody>
@@ -7203,7 +7203,7 @@
                 </a:solidFill>
                 <a:latin typeface="Segoe UI"/>
               </a:rPr>
-              <a:t>-1.0%</a:t>
+              <a:t>-2.1%</a:t>
             </a:r>
           </a:p>
         </p:txBody>
@@ -7339,7 +7339,7 @@
                 </a:solidFill>
                 <a:latin typeface="Segoe UI"/>
               </a:rPr>
-              <a:t>4,154</a:t>
+              <a:t>4,174</a:t>
             </a:r>
           </a:p>
         </p:txBody>
@@ -7373,7 +7373,7 @@
                 </a:solidFill>
                 <a:latin typeface="Segoe UI"/>
               </a:rPr>
-              <a:t>Rs 400,011</a:t>
+              <a:t>Rs 402,236</a:t>
             </a:r>
           </a:p>
         </p:txBody>
@@ -7407,7 +7407,7 @@
                 </a:solidFill>
                 <a:latin typeface="Segoe UI"/>
               </a:rPr>
-              <a:t>Rs 178,521</a:t>
+              <a:t>Rs 180,608</a:t>
             </a:r>
           </a:p>
         </p:txBody>
@@ -7441,7 +7441,7 @@
                 </a:solidFill>
                 <a:latin typeface="Segoe UI"/>
               </a:rPr>
-              <a:t>+80.6%</a:t>
+              <a:t>+81.5%</a:t>
             </a:r>
           </a:p>
         </p:txBody>
@@ -7611,7 +7611,7 @@
                 </a:solidFill>
                 <a:latin typeface="Segoe UI"/>
               </a:rPr>
-              <a:t>333</a:t>
+              <a:t>334</a:t>
             </a:r>
           </a:p>
         </p:txBody>
@@ -7645,7 +7645,7 @@
                 </a:solidFill>
                 <a:latin typeface="Segoe UI"/>
               </a:rPr>
-              <a:t>Rs 320,573</a:t>
+              <a:t>Rs 321,486</a:t>
             </a:r>
           </a:p>
         </p:txBody>
@@ -7679,7 +7679,7 @@
                 </a:solidFill>
                 <a:latin typeface="Segoe UI"/>
               </a:rPr>
-              <a:t>Rs 142,418</a:t>
+              <a:t>Rs 143,220</a:t>
             </a:r>
           </a:p>
         </p:txBody>
@@ -7713,7 +7713,7 @@
                 </a:solidFill>
                 <a:latin typeface="Segoe UI"/>
               </a:rPr>
-              <a:t>+79.9%</a:t>
+              <a:t>+80.3%</a:t>
             </a:r>
           </a:p>
         </p:txBody>
@@ -7917,7 +7917,7 @@
                 </a:solidFill>
                 <a:latin typeface="Segoe UI"/>
               </a:rPr>
-              <a:t>Rs 184,049</a:t>
+              <a:t>Rs 184,425</a:t>
             </a:r>
           </a:p>
         </p:txBody>
@@ -7951,7 +7951,7 @@
                 </a:solidFill>
                 <a:latin typeface="Segoe UI"/>
               </a:rPr>
-              <a:t>Rs -162,631</a:t>
+              <a:t>Rs -162,471</a:t>
             </a:r>
           </a:p>
         </p:txBody>
@@ -7985,7 +7985,7 @@
                 </a:solidFill>
                 <a:latin typeface="Segoe UI"/>
               </a:rPr>
-              <a:t>-46.9%</a:t>
+              <a:t>-46.8%</a:t>
             </a:r>
           </a:p>
         </p:txBody>
@@ -8155,7 +8155,7 @@
                 </a:solidFill>
                 <a:latin typeface="Segoe UI"/>
               </a:rPr>
-              <a:t>1,020</a:t>
+              <a:t>1,014</a:t>
             </a:r>
           </a:p>
         </p:txBody>
@@ -8189,7 +8189,7 @@
                 </a:solidFill>
                 <a:latin typeface="Segoe UI"/>
               </a:rPr>
-              <a:t>Rs 81,640</a:t>
+              <a:t>Rs 81,108</a:t>
             </a:r>
           </a:p>
         </p:txBody>
@@ -8223,7 +8223,7 @@
                 </a:solidFill>
                 <a:latin typeface="Segoe UI"/>
               </a:rPr>
-              <a:t>Rs -30,360</a:t>
+              <a:t>Rs -30,892</a:t>
             </a:r>
           </a:p>
         </p:txBody>
@@ -8257,7 +8257,7 @@
                 </a:solidFill>
                 <a:latin typeface="Segoe UI"/>
               </a:rPr>
-              <a:t>-27.1%</a:t>
+              <a:t>-27.6%</a:t>
             </a:r>
           </a:p>
         </p:txBody>
@@ -8427,7 +8427,7 @@
                 </a:solidFill>
                 <a:latin typeface="Segoe UI"/>
               </a:rPr>
-              <a:t>1,186</a:t>
+              <a:t>1,218</a:t>
             </a:r>
           </a:p>
         </p:txBody>
@@ -8461,7 +8461,7 @@
                 </a:solidFill>
                 <a:latin typeface="Segoe UI"/>
               </a:rPr>
-              <a:t>Rs 59,320</a:t>
+              <a:t>Rs 60,900</a:t>
             </a:r>
           </a:p>
         </p:txBody>
@@ -8495,7 +8495,7 @@
                 </a:solidFill>
                 <a:latin typeface="Segoe UI"/>
               </a:rPr>
-              <a:t>Rs -63,180</a:t>
+              <a:t>Rs -61,600</a:t>
             </a:r>
           </a:p>
         </p:txBody>
@@ -8529,7 +8529,7 @@
                 </a:solidFill>
                 <a:latin typeface="Segoe UI"/>
               </a:rPr>
-              <a:t>-51.6%</a:t>
+              <a:t>-50.3%</a:t>
             </a:r>
           </a:p>
         </p:txBody>
@@ -8699,7 +8699,7 @@
                 </a:solidFill>
                 <a:latin typeface="Segoe UI"/>
               </a:rPr>
-              <a:t>2,114</a:t>
+              <a:t>2,100</a:t>
             </a:r>
           </a:p>
         </p:txBody>
@@ -8733,7 +8733,7 @@
                 </a:solidFill>
                 <a:latin typeface="Segoe UI"/>
               </a:rPr>
-              <a:t>Rs 52,860</a:t>
+              <a:t>Rs 52,500</a:t>
             </a:r>
           </a:p>
         </p:txBody>
@@ -8767,7 +8767,7 @@
                 </a:solidFill>
                 <a:latin typeface="Segoe UI"/>
               </a:rPr>
-              <a:t>Rs -37,140</a:t>
+              <a:t>Rs -37,500</a:t>
             </a:r>
           </a:p>
         </p:txBody>
@@ -8801,7 +8801,7 @@
                 </a:solidFill>
                 <a:latin typeface="Segoe UI"/>
               </a:rPr>
-              <a:t>-41.3%</a:t>
+              <a:t>-41.7%</a:t>
             </a:r>
           </a:p>
         </p:txBody>
@@ -8971,7 +8971,7 @@
                 </a:solidFill>
                 <a:latin typeface="Segoe UI"/>
               </a:rPr>
-              <a:t>705</a:t>
+              <a:t>711</a:t>
             </a:r>
           </a:p>
         </p:txBody>
@@ -9005,7 +9005,7 @@
                 </a:solidFill>
                 <a:latin typeface="Segoe UI"/>
               </a:rPr>
-              <a:t>Rs 42,288</a:t>
+              <a:t>Rs 42,687</a:t>
             </a:r>
           </a:p>
         </p:txBody>
@@ -9039,7 +9039,7 @@
                 </a:solidFill>
                 <a:latin typeface="Segoe UI"/>
               </a:rPr>
-              <a:t>Rs -48,912</a:t>
+              <a:t>Rs -48,513</a:t>
             </a:r>
           </a:p>
         </p:txBody>
@@ -9073,7 +9073,7 @@
                 </a:solidFill>
                 <a:latin typeface="Segoe UI"/>
               </a:rPr>
-              <a:t>-53.6%</a:t>
+              <a:t>-53.2%</a:t>
             </a:r>
           </a:p>
         </p:txBody>
@@ -9141,7 +9141,7 @@
                 </a:solidFill>
                 <a:latin typeface="Segoe UI"/>
               </a:rPr>
-              <a:t>Total Rs 1,965,371 | P&amp;L Rs 225,546 (+13.0%) | Sharpe 0.08 | Vol 20.35% | VaR95 -1.91%/day</a:t>
+              <a:t>Total Rs 1,954,459 | P&amp;L Rs 213,809 (+12.3%) | Sharpe 0.0 | Vol 20.19% | VaR95 -1.91%/day</a:t>
             </a:r>
           </a:p>
         </p:txBody>

--- a/docs/pmr_daily.pptx
+++ b/docs/pmr_daily.pptx
@@ -3197,7 +3197,7 @@
                 </a:solidFill>
                 <a:latin typeface="Segoe UI"/>
               </a:rPr>
-              <a:t>Wednesday, 07 Oct 2026 10:09 SGT</a:t>
+              <a:t>Thursday, 08 Oct 2026 10:34 SGT</a:t>
             </a:r>
           </a:p>
         </p:txBody>
@@ -3265,7 +3265,7 @@
                 </a:solidFill>
                 <a:latin typeface="Segoe UI"/>
               </a:rPr>
-              <a:t>RAG 14R / 14A / 18G   |   54.3% above 200DMA   |   Portfolio Rs 1,954,459 (+12.3%)</a:t>
+              <a:t>RAG 14R / 15A / 17G   |   52.2% above 200DMA   |   Portfolio Rs 1,950,151 (+11.7%)</a:t>
             </a:r>
           </a:p>
         </p:txBody>
@@ -3461,7 +3461,7 @@
                 </a:solidFill>
                 <a:latin typeface="Segoe UI"/>
               </a:rPr>
-              <a:t>Tesla</a:t>
+              <a:t>Natural Gas</a:t>
             </a:r>
           </a:p>
         </p:txBody>
@@ -3491,11 +3491,11 @@
             <a:r>
               <a:rPr sz="900" b="0">
                 <a:solidFill>
-                  <a:srgbClr val="F59E0B"/>
-                </a:solidFill>
-                <a:latin typeface="Segoe UI"/>
-              </a:rPr>
-              <a:t>TSLA · AMBER</a:t>
+                  <a:srgbClr val="EF4444"/>
+                </a:solidFill>
+                <a:latin typeface="Segoe UI"/>
+              </a:rPr>
+              <a:t>NG=F · RED</a:t>
             </a:r>
           </a:p>
         </p:txBody>
@@ -3529,7 +3529,7 @@
                 </a:solidFill>
                 <a:latin typeface="Segoe UI"/>
               </a:rPr>
-              <a:t>+7.3%</a:t>
+              <a:t>+8.4%</a:t>
             </a:r>
           </a:p>
         </p:txBody>
@@ -3587,7 +3587,7 @@
                 </a:solidFill>
                 <a:latin typeface="Segoe UI"/>
               </a:rPr>
-              <a:t>Nikkei 225</a:t>
+              <a:t>Tesla</a:t>
             </a:r>
           </a:p>
         </p:txBody>
@@ -3617,11 +3617,11 @@
             <a:r>
               <a:rPr sz="900" b="0">
                 <a:solidFill>
-                  <a:srgbClr val="22C55E"/>
-                </a:solidFill>
-                <a:latin typeface="Segoe UI"/>
-              </a:rPr>
-              <a:t>^N225 · GREEN</a:t>
+                  <a:srgbClr val="F59E0B"/>
+                </a:solidFill>
+                <a:latin typeface="Segoe UI"/>
+              </a:rPr>
+              <a:t>TSLA · AMBER</a:t>
             </a:r>
           </a:p>
         </p:txBody>
@@ -3655,7 +3655,7 @@
                 </a:solidFill>
                 <a:latin typeface="Segoe UI"/>
               </a:rPr>
-              <a:t>+5.5%</a:t>
+              <a:t>+6.5%</a:t>
             </a:r>
           </a:p>
         </p:txBody>
@@ -3713,7 +3713,7 @@
                 </a:solidFill>
                 <a:latin typeface="Segoe UI"/>
               </a:rPr>
-              <a:t>Nvidia</a:t>
+              <a:t>Bharti Airtel</a:t>
             </a:r>
           </a:p>
         </p:txBody>
@@ -3743,11 +3743,11 @@
             <a:r>
               <a:rPr sz="900" b="0">
                 <a:solidFill>
-                  <a:srgbClr val="22C55E"/>
-                </a:solidFill>
-                <a:latin typeface="Segoe UI"/>
-              </a:rPr>
-              <a:t>NVDA · GREEN</a:t>
+                  <a:srgbClr val="F59E0B"/>
+                </a:solidFill>
+                <a:latin typeface="Segoe UI"/>
+              </a:rPr>
+              <a:t>BHARTIARTL.NS · AMBER</a:t>
             </a:r>
           </a:p>
         </p:txBody>
@@ -3781,7 +3781,7 @@
                 </a:solidFill>
                 <a:latin typeface="Segoe UI"/>
               </a:rPr>
-              <a:t>+4.8%</a:t>
+              <a:t>+4.4%</a:t>
             </a:r>
           </a:p>
         </p:txBody>
@@ -3839,7 +3839,7 @@
                 </a:solidFill>
                 <a:latin typeface="Segoe UI"/>
               </a:rPr>
-              <a:t>US Energy</a:t>
+              <a:t>Amazon</a:t>
             </a:r>
           </a:p>
         </p:txBody>
@@ -3869,11 +3869,11 @@
             <a:r>
               <a:rPr sz="900" b="0">
                 <a:solidFill>
-                  <a:srgbClr val="22C55E"/>
-                </a:solidFill>
-                <a:latin typeface="Segoe UI"/>
-              </a:rPr>
-              <a:t>XLE · GREEN</a:t>
+                  <a:srgbClr val="F59E0B"/>
+                </a:solidFill>
+                <a:latin typeface="Segoe UI"/>
+              </a:rPr>
+              <a:t>AMZN · AMBER</a:t>
             </a:r>
           </a:p>
         </p:txBody>
@@ -3907,7 +3907,7 @@
                 </a:solidFill>
                 <a:latin typeface="Segoe UI"/>
               </a:rPr>
-              <a:t>+3.7%</a:t>
+              <a:t>+4.3%</a:t>
             </a:r>
           </a:p>
         </p:txBody>
@@ -3965,7 +3965,7 @@
                 </a:solidFill>
                 <a:latin typeface="Segoe UI"/>
               </a:rPr>
-              <a:t>Natural Gas</a:t>
+              <a:t>Nvidia</a:t>
             </a:r>
           </a:p>
         </p:txBody>
@@ -3995,11 +3995,11 @@
             <a:r>
               <a:rPr sz="900" b="0">
                 <a:solidFill>
-                  <a:srgbClr val="EF4444"/>
-                </a:solidFill>
-                <a:latin typeface="Segoe UI"/>
-              </a:rPr>
-              <a:t>NG=F · RED</a:t>
+                  <a:srgbClr val="22C55E"/>
+                </a:solidFill>
+                <a:latin typeface="Segoe UI"/>
+              </a:rPr>
+              <a:t>NVDA · GREEN</a:t>
             </a:r>
           </a:p>
         </p:txBody>
@@ -4033,7 +4033,7 @@
                 </a:solidFill>
                 <a:latin typeface="Segoe UI"/>
               </a:rPr>
-              <a:t>+3.6%</a:t>
+              <a:t>+4.0%</a:t>
             </a:r>
           </a:p>
         </p:txBody>
@@ -4193,7 +4193,7 @@
                 </a:solidFill>
                 <a:latin typeface="Segoe UI"/>
               </a:rPr>
-              <a:t>-2.6%</a:t>
+              <a:t>-3.9%</a:t>
             </a:r>
           </a:p>
         </p:txBody>
@@ -4251,7 +4251,7 @@
                 </a:solidFill>
                 <a:latin typeface="Segoe UI"/>
               </a:rPr>
-              <a:t>Hang Seng</a:t>
+              <a:t>Straits Times</a:t>
             </a:r>
           </a:p>
         </p:txBody>
@@ -4281,11 +4281,11 @@
             <a:r>
               <a:rPr sz="900" b="0">
                 <a:solidFill>
-                  <a:srgbClr val="EF4444"/>
-                </a:solidFill>
-                <a:latin typeface="Segoe UI"/>
-              </a:rPr>
-              <a:t>^HSI · RED</a:t>
+                  <a:srgbClr val="F59E0B"/>
+                </a:solidFill>
+                <a:latin typeface="Segoe UI"/>
+              </a:rPr>
+              <a:t>^STI · AMBER</a:t>
             </a:r>
           </a:p>
         </p:txBody>
@@ -4319,7 +4319,7 @@
                 </a:solidFill>
                 <a:latin typeface="Segoe UI"/>
               </a:rPr>
-              <a:t>-2.0%</a:t>
+              <a:t>-3.7%</a:t>
             </a:r>
           </a:p>
         </p:txBody>
@@ -4377,7 +4377,7 @@
                 </a:solidFill>
                 <a:latin typeface="Segoe UI"/>
               </a:rPr>
-              <a:t>EUR/USD</a:t>
+              <a:t>Hang Seng</a:t>
             </a:r>
           </a:p>
         </p:txBody>
@@ -4411,7 +4411,7 @@
                 </a:solidFill>
                 <a:latin typeface="Segoe UI"/>
               </a:rPr>
-              <a:t>EURUSD=X · RED</a:t>
+              <a:t>^HSI · RED</a:t>
             </a:r>
           </a:p>
         </p:txBody>
@@ -4445,7 +4445,7 @@
                 </a:solidFill>
                 <a:latin typeface="Segoe UI"/>
               </a:rPr>
-              <a:t>-0.9%</a:t>
+              <a:t>-2.1%</a:t>
             </a:r>
           </a:p>
         </p:txBody>
@@ -4571,7 +4571,7 @@
                 </a:solidFill>
                 <a:latin typeface="Segoe UI"/>
               </a:rPr>
-              <a:t>-0.6%</a:t>
+              <a:t>-1.4%</a:t>
             </a:r>
           </a:p>
         </p:txBody>
@@ -4629,7 +4629,7 @@
                 </a:solidFill>
                 <a:latin typeface="Segoe UI"/>
               </a:rPr>
-              <a:t>Straits Times</a:t>
+              <a:t>Solana</a:t>
             </a:r>
           </a:p>
         </p:txBody>
@@ -4663,7 +4663,7 @@
                 </a:solidFill>
                 <a:latin typeface="Segoe UI"/>
               </a:rPr>
-              <a:t>^STI · GREEN</a:t>
+              <a:t>SOL-USD · GREEN</a:t>
             </a:r>
           </a:p>
         </p:txBody>
@@ -4697,7 +4697,7 @@
                 </a:solidFill>
                 <a:latin typeface="Segoe UI"/>
               </a:rPr>
-              <a:t>-0.4%</a:t>
+              <a:t>-1.3%</a:t>
             </a:r>
           </a:p>
         </p:txBody>
@@ -5035,7 +5035,7 @@
                 </a:solidFill>
                 <a:latin typeface="Segoe UI"/>
               </a:rPr>
-              <a:t>85%</a:t>
+              <a:t>84%</a:t>
             </a:r>
           </a:p>
         </p:txBody>
@@ -5239,7 +5239,7 @@
                 </a:solidFill>
                 <a:latin typeface="Segoe UI"/>
               </a:rPr>
-              <a:t>US Energy</a:t>
+              <a:t>Nvidia</a:t>
             </a:r>
           </a:p>
         </p:txBody>
@@ -5375,7 +5375,7 @@
                 </a:solidFill>
                 <a:latin typeface="Segoe UI"/>
               </a:rPr>
-              <a:t>Ethereum</a:t>
+              <a:t>Natural Gas</a:t>
             </a:r>
           </a:p>
         </p:txBody>
@@ -5443,7 +5443,7 @@
                 </a:solidFill>
                 <a:latin typeface="Segoe UI"/>
               </a:rPr>
-              <a:t>83%</a:t>
+              <a:t>84%</a:t>
             </a:r>
           </a:p>
         </p:txBody>
@@ -5477,7 +5477,7 @@
                 </a:solidFill>
                 <a:latin typeface="Segoe UI"/>
               </a:rPr>
-              <a:t>above 200DMA · golden cross (50&gt;200) · MACD bearish</a:t>
+              <a:t>above 200DMA · golden cross (50&gt;200) · MACD bullish</a:t>
             </a:r>
           </a:p>
         </p:txBody>
@@ -5511,7 +5511,7 @@
                 </a:solidFill>
                 <a:latin typeface="Segoe UI"/>
               </a:rPr>
-              <a:t>S&amp;P 500</a:t>
+              <a:t>US Energy</a:t>
             </a:r>
           </a:p>
         </p:txBody>
@@ -5579,7 +5579,7 @@
                 </a:solidFill>
                 <a:latin typeface="Segoe UI"/>
               </a:rPr>
-              <a:t>82%</a:t>
+              <a:t>95%</a:t>
             </a:r>
           </a:p>
         </p:txBody>
@@ -5647,7 +5647,7 @@
                 </a:solidFill>
                 <a:latin typeface="Segoe UI"/>
               </a:rPr>
-              <a:t>Natural Gas</a:t>
+              <a:t>Ethereum</a:t>
             </a:r>
           </a:p>
         </p:txBody>
@@ -5715,7 +5715,7 @@
                 </a:solidFill>
                 <a:latin typeface="Segoe UI"/>
               </a:rPr>
-              <a:t>82%</a:t>
+              <a:t>83%</a:t>
             </a:r>
           </a:p>
         </p:txBody>
@@ -5749,7 +5749,7 @@
                 </a:solidFill>
                 <a:latin typeface="Segoe UI"/>
               </a:rPr>
-              <a:t>above 200DMA · golden cross (50&gt;200) · MACD bullish</a:t>
+              <a:t>above 200DMA · golden cross (50&gt;200) · MACD bearish</a:t>
             </a:r>
           </a:p>
         </p:txBody>
@@ -5783,7 +5783,7 @@
                 </a:solidFill>
                 <a:latin typeface="Segoe UI"/>
               </a:rPr>
-              <a:t>Apple</a:t>
+              <a:t>USD/INR</a:t>
             </a:r>
           </a:p>
         </p:txBody>
@@ -5851,7 +5851,7 @@
                 </a:solidFill>
                 <a:latin typeface="Segoe UI"/>
               </a:rPr>
-              <a:t>81%</a:t>
+              <a:t>94%</a:t>
             </a:r>
           </a:p>
         </p:txBody>
@@ -5885,7 +5885,7 @@
                 </a:solidFill>
                 <a:latin typeface="Segoe UI"/>
               </a:rPr>
-              <a:t>above 200DMA · golden cross (50&gt;200) · MACD bearish</a:t>
+              <a:t>above 200DMA · golden cross (50&gt;200) · MACD bullish</a:t>
             </a:r>
           </a:p>
         </p:txBody>
@@ -5919,7 +5919,7 @@
                 </a:solidFill>
                 <a:latin typeface="Segoe UI"/>
               </a:rPr>
-              <a:t>USD/INR</a:t>
+              <a:t>Apple</a:t>
             </a:r>
           </a:p>
         </p:txBody>
@@ -5987,7 +5987,7 @@
                 </a:solidFill>
                 <a:latin typeface="Segoe UI"/>
               </a:rPr>
-              <a:t>93%</a:t>
+              <a:t>82%</a:t>
             </a:r>
           </a:p>
         </p:txBody>
@@ -6021,7 +6021,7 @@
                 </a:solidFill>
                 <a:latin typeface="Segoe UI"/>
               </a:rPr>
-              <a:t>above 200DMA · golden cross (50&gt;200) · MACD bullish</a:t>
+              <a:t>above 200DMA · golden cross (50&gt;200) · MACD bearish</a:t>
             </a:r>
           </a:p>
         </p:txBody>
@@ -6055,7 +6055,7 @@
                 </a:solidFill>
                 <a:latin typeface="Segoe UI"/>
               </a:rPr>
-              <a:t>Microsoft</a:t>
+              <a:t>Nikkei 225</a:t>
             </a:r>
           </a:p>
         </p:txBody>
@@ -6089,7 +6089,7 @@
                 </a:solidFill>
                 <a:latin typeface="Segoe UI"/>
               </a:rPr>
-              <a:t>BUY</a:t>
+              <a:t>STRONG BUY</a:t>
             </a:r>
           </a:p>
         </p:txBody>
@@ -6123,7 +6123,7 @@
                 </a:solidFill>
                 <a:latin typeface="Segoe UI"/>
               </a:rPr>
-              <a:t>91%</a:t>
+              <a:t>81%</a:t>
             </a:r>
           </a:p>
         </p:txBody>
@@ -6191,7 +6191,7 @@
                 </a:solidFill>
                 <a:latin typeface="Segoe UI"/>
               </a:rPr>
-              <a:t>US Technology</a:t>
+              <a:t>S&amp;P 500</a:t>
             </a:r>
           </a:p>
         </p:txBody>
@@ -6225,7 +6225,7 @@
                 </a:solidFill>
                 <a:latin typeface="Segoe UI"/>
               </a:rPr>
-              <a:t>BUY</a:t>
+              <a:t>STRONG BUY</a:t>
             </a:r>
           </a:p>
         </p:txBody>
@@ -6259,7 +6259,7 @@
                 </a:solidFill>
                 <a:latin typeface="Segoe UI"/>
               </a:rPr>
-              <a:t>91%</a:t>
+              <a:t>81%</a:t>
             </a:r>
           </a:p>
         </p:txBody>
@@ -6327,7 +6327,7 @@
                 </a:solidFill>
                 <a:latin typeface="Segoe UI"/>
               </a:rPr>
-              <a:t>Nvidia</a:t>
+              <a:t>Copper</a:t>
             </a:r>
           </a:p>
         </p:txBody>
@@ -6361,7 +6361,7 @@
                 </a:solidFill>
                 <a:latin typeface="Segoe UI"/>
               </a:rPr>
-              <a:t>BUY</a:t>
+              <a:t>STRONG BUY</a:t>
             </a:r>
           </a:p>
         </p:txBody>
@@ -6395,7 +6395,7 @@
                 </a:solidFill>
                 <a:latin typeface="Segoe UI"/>
               </a:rPr>
-              <a:t>91%</a:t>
+              <a:t>80%</a:t>
             </a:r>
           </a:p>
         </p:txBody>
@@ -6463,7 +6463,7 @@
                 </a:solidFill>
                 <a:latin typeface="Segoe UI"/>
               </a:rPr>
-              <a:t>Nasdaq 100</a:t>
+              <a:t>US Technology</a:t>
             </a:r>
           </a:p>
         </p:txBody>
@@ -6531,7 +6531,7 @@
                 </a:solidFill>
                 <a:latin typeface="Segoe UI"/>
               </a:rPr>
-              <a:t>90%</a:t>
+              <a:t>91%</a:t>
             </a:r>
           </a:p>
         </p:txBody>
@@ -6659,7 +6659,7 @@
                 </a:solidFill>
                 <a:latin typeface="Segoe UI"/>
               </a:rPr>
-              <a:t>Base currency INR · USD/INR 96.36</a:t>
+              <a:t>Base currency INR · USD/INR 96.75</a:t>
             </a:r>
           </a:p>
         </p:txBody>
@@ -7067,7 +7067,7 @@
                 </a:solidFill>
                 <a:latin typeface="Segoe UI"/>
               </a:rPr>
-              <a:t>83,968</a:t>
+              <a:t>83,119</a:t>
             </a:r>
           </a:p>
         </p:txBody>
@@ -7101,7 +7101,7 @@
                 </a:solidFill>
                 <a:latin typeface="Segoe UI"/>
               </a:rPr>
-              <a:t>Rs 809,117</a:t>
+              <a:t>Rs 804,175</a:t>
             </a:r>
           </a:p>
         </p:txBody>
@@ -7135,7 +7135,7 @@
                 </a:solidFill>
                 <a:latin typeface="Segoe UI"/>
               </a:rPr>
-              <a:t>Rs 230,957</a:t>
+              <a:t>Rs 223,675</a:t>
             </a:r>
           </a:p>
         </p:txBody>
@@ -7169,7 +7169,7 @@
                 </a:solidFill>
                 <a:latin typeface="Segoe UI"/>
               </a:rPr>
-              <a:t>+40.0%</a:t>
+              <a:t>+38.5%</a:t>
             </a:r>
           </a:p>
         </p:txBody>
@@ -7203,7 +7203,7 @@
                 </a:solidFill>
                 <a:latin typeface="Segoe UI"/>
               </a:rPr>
-              <a:t>-2.1%</a:t>
+              <a:t>-2.9%</a:t>
             </a:r>
           </a:p>
         </p:txBody>
@@ -7339,7 +7339,7 @@
                 </a:solidFill>
                 <a:latin typeface="Segoe UI"/>
               </a:rPr>
-              <a:t>4,174</a:t>
+              <a:t>4,160</a:t>
             </a:r>
           </a:p>
         </p:txBody>
@@ -7373,7 +7373,7 @@
                 </a:solidFill>
                 <a:latin typeface="Segoe UI"/>
               </a:rPr>
-              <a:t>Rs 402,236</a:t>
+              <a:t>Rs 402,528</a:t>
             </a:r>
           </a:p>
         </p:txBody>
@@ -7407,7 +7407,7 @@
                 </a:solidFill>
                 <a:latin typeface="Segoe UI"/>
               </a:rPr>
-              <a:t>Rs 180,608</a:t>
+              <a:t>Rs 180,003</a:t>
             </a:r>
           </a:p>
         </p:txBody>
@@ -7441,7 +7441,7 @@
                 </a:solidFill>
                 <a:latin typeface="Segoe UI"/>
               </a:rPr>
-              <a:t>+81.5%</a:t>
+              <a:t>+80.9%</a:t>
             </a:r>
           </a:p>
         </p:txBody>
@@ -7611,7 +7611,7 @@
                 </a:solidFill>
                 <a:latin typeface="Segoe UI"/>
               </a:rPr>
-              <a:t>334</a:t>
+              <a:t>337</a:t>
             </a:r>
           </a:p>
         </p:txBody>
@@ -7645,7 +7645,7 @@
                 </a:solidFill>
                 <a:latin typeface="Segoe UI"/>
               </a:rPr>
-              <a:t>Rs 321,486</a:t>
+              <a:t>Rs 325,728</a:t>
             </a:r>
           </a:p>
         </p:txBody>
@@ -7679,7 +7679,7 @@
                 </a:solidFill>
                 <a:latin typeface="Segoe UI"/>
               </a:rPr>
-              <a:t>Rs 143,220</a:t>
+              <a:t>Rs 146,741</a:t>
             </a:r>
           </a:p>
         </p:txBody>
@@ -7713,7 +7713,7 @@
                 </a:solidFill>
                 <a:latin typeface="Segoe UI"/>
               </a:rPr>
-              <a:t>+80.3%</a:t>
+              <a:t>+82.0%</a:t>
             </a:r>
           </a:p>
         </p:txBody>
@@ -7883,7 +7883,7 @@
                 </a:solidFill>
                 <a:latin typeface="Segoe UI"/>
               </a:rPr>
-              <a:t>239</a:t>
+              <a:t>237</a:t>
             </a:r>
           </a:p>
         </p:txBody>
@@ -7917,7 +7917,7 @@
                 </a:solidFill>
                 <a:latin typeface="Segoe UI"/>
               </a:rPr>
-              <a:t>Rs 184,425</a:t>
+              <a:t>Rs 183,802</a:t>
             </a:r>
           </a:p>
         </p:txBody>
@@ -7951,7 +7951,7 @@
                 </a:solidFill>
                 <a:latin typeface="Segoe UI"/>
               </a:rPr>
-              <a:t>Rs -162,471</a:t>
+              <a:t>Rs -164,498</a:t>
             </a:r>
           </a:p>
         </p:txBody>
@@ -7985,7 +7985,7 @@
                 </a:solidFill>
                 <a:latin typeface="Segoe UI"/>
               </a:rPr>
-              <a:t>-46.8%</a:t>
+              <a:t>-47.2%</a:t>
             </a:r>
           </a:p>
         </p:txBody>
@@ -8155,7 +8155,7 @@
                 </a:solidFill>
                 <a:latin typeface="Segoe UI"/>
               </a:rPr>
-              <a:t>1,014</a:t>
+              <a:t>992</a:t>
             </a:r>
           </a:p>
         </p:txBody>
@@ -8189,7 +8189,7 @@
                 </a:solidFill>
                 <a:latin typeface="Segoe UI"/>
               </a:rPr>
-              <a:t>Rs 81,108</a:t>
+              <a:t>Rs 79,360</a:t>
             </a:r>
           </a:p>
         </p:txBody>
@@ -8223,7 +8223,7 @@
                 </a:solidFill>
                 <a:latin typeface="Segoe UI"/>
               </a:rPr>
-              <a:t>Rs -30,892</a:t>
+              <a:t>Rs -32,640</a:t>
             </a:r>
           </a:p>
         </p:txBody>
@@ -8257,7 +8257,7 @@
                 </a:solidFill>
                 <a:latin typeface="Segoe UI"/>
               </a:rPr>
-              <a:t>-27.6%</a:t>
+              <a:t>-29.1%</a:t>
             </a:r>
           </a:p>
         </p:txBody>
@@ -8427,7 +8427,7 @@
                 </a:solidFill>
                 <a:latin typeface="Segoe UI"/>
               </a:rPr>
-              <a:t>1,218</a:t>
+              <a:t>1,208</a:t>
             </a:r>
           </a:p>
         </p:txBody>
@@ -8461,7 +8461,7 @@
                 </a:solidFill>
                 <a:latin typeface="Segoe UI"/>
               </a:rPr>
-              <a:t>Rs 60,900</a:t>
+              <a:t>Rs 60,385</a:t>
             </a:r>
           </a:p>
         </p:txBody>
@@ -8495,7 +8495,7 @@
                 </a:solidFill>
                 <a:latin typeface="Segoe UI"/>
               </a:rPr>
-              <a:t>Rs -61,600</a:t>
+              <a:t>Rs -62,115</a:t>
             </a:r>
           </a:p>
         </p:txBody>
@@ -8529,7 +8529,7 @@
                 </a:solidFill>
                 <a:latin typeface="Segoe UI"/>
               </a:rPr>
-              <a:t>-50.3%</a:t>
+              <a:t>-50.7%</a:t>
             </a:r>
           </a:p>
         </p:txBody>
@@ -8699,7 +8699,7 @@
                 </a:solidFill>
                 <a:latin typeface="Segoe UI"/>
               </a:rPr>
-              <a:t>2,100</a:t>
+              <a:t>2,080</a:t>
             </a:r>
           </a:p>
         </p:txBody>
@@ -8733,7 +8733,7 @@
                 </a:solidFill>
                 <a:latin typeface="Segoe UI"/>
               </a:rPr>
-              <a:t>Rs 52,500</a:t>
+              <a:t>Rs 52,008</a:t>
             </a:r>
           </a:p>
         </p:txBody>
@@ -8767,7 +8767,7 @@
                 </a:solidFill>
                 <a:latin typeface="Segoe UI"/>
               </a:rPr>
-              <a:t>Rs -37,500</a:t>
+              <a:t>Rs -37,992</a:t>
             </a:r>
           </a:p>
         </p:txBody>
@@ -8801,7 +8801,7 @@
                 </a:solidFill>
                 <a:latin typeface="Segoe UI"/>
               </a:rPr>
-              <a:t>-41.7%</a:t>
+              <a:t>-42.2%</a:t>
             </a:r>
           </a:p>
         </p:txBody>
@@ -8971,7 +8971,7 @@
                 </a:solidFill>
                 <a:latin typeface="Segoe UI"/>
               </a:rPr>
-              <a:t>711</a:t>
+              <a:t>703</a:t>
             </a:r>
           </a:p>
         </p:txBody>
@@ -9005,7 +9005,7 @@
                 </a:solidFill>
                 <a:latin typeface="Segoe UI"/>
               </a:rPr>
-              <a:t>Rs 42,687</a:t>
+              <a:t>Rs 42,165</a:t>
             </a:r>
           </a:p>
         </p:txBody>
@@ -9039,7 +9039,7 @@
                 </a:solidFill>
                 <a:latin typeface="Segoe UI"/>
               </a:rPr>
-              <a:t>Rs -48,513</a:t>
+              <a:t>Rs -49,035</a:t>
             </a:r>
           </a:p>
         </p:txBody>
@@ -9073,7 +9073,7 @@
                 </a:solidFill>
                 <a:latin typeface="Segoe UI"/>
               </a:rPr>
-              <a:t>-53.2%</a:t>
+              <a:t>-53.8%</a:t>
             </a:r>
           </a:p>
         </p:txBody>
@@ -9141,7 +9141,7 @@
                 </a:solidFill>
                 <a:latin typeface="Segoe UI"/>
               </a:rPr>
-              <a:t>Total Rs 1,954,459 | P&amp;L Rs 213,809 (+12.3%) | Sharpe 0.0 | Vol 20.19% | VaR95 -1.91%/day</a:t>
+              <a:t>Total Rs 1,950,151 | P&amp;L Rs 204,139 (+11.7%) | Sharpe 0.08 | Vol 20.07% | VaR95 -1.85%/day</a:t>
             </a:r>
           </a:p>
         </p:txBody>

--- a/docs/pmr_daily.pptx
+++ b/docs/pmr_daily.pptx
@@ -3197,7 +3197,7 @@
                 </a:solidFill>
                 <a:latin typeface="Segoe UI"/>
               </a:rPr>
-              <a:t>Thursday, 08 Oct 2026 10:34 SGT</a:t>
+              <a:t>Friday, 09 Oct 2026 10:48 SGT</a:t>
             </a:r>
           </a:p>
         </p:txBody>
@@ -3265,7 +3265,7 @@
                 </a:solidFill>
                 <a:latin typeface="Segoe UI"/>
               </a:rPr>
-              <a:t>RAG 14R / 15A / 17G   |   52.2% above 200DMA   |   Portfolio Rs 1,950,151 (+11.7%)</a:t>
+              <a:t>RAG 16R / 14A / 16G   |   47.8% above 200DMA   |   Portfolio Rs 1,940,717 (+11.1%)</a:t>
             </a:r>
           </a:p>
         </p:txBody>
@@ -3461,7 +3461,7 @@
                 </a:solidFill>
                 <a:latin typeface="Segoe UI"/>
               </a:rPr>
-              <a:t>Natural Gas</a:t>
+              <a:t>US Energy</a:t>
             </a:r>
           </a:p>
         </p:txBody>
@@ -3491,11 +3491,11 @@
             <a:r>
               <a:rPr sz="900" b="0">
                 <a:solidFill>
-                  <a:srgbClr val="EF4444"/>
-                </a:solidFill>
-                <a:latin typeface="Segoe UI"/>
-              </a:rPr>
-              <a:t>NG=F · RED</a:t>
+                  <a:srgbClr val="22C55E"/>
+                </a:solidFill>
+                <a:latin typeface="Segoe UI"/>
+              </a:rPr>
+              <a:t>XLE · GREEN</a:t>
             </a:r>
           </a:p>
         </p:txBody>
@@ -3529,7 +3529,7 @@
                 </a:solidFill>
                 <a:latin typeface="Segoe UI"/>
               </a:rPr>
-              <a:t>+8.4%</a:t>
+              <a:t>+6.1%</a:t>
             </a:r>
           </a:p>
         </p:txBody>
@@ -3655,7 +3655,7 @@
                 </a:solidFill>
                 <a:latin typeface="Segoe UI"/>
               </a:rPr>
-              <a:t>+6.5%</a:t>
+              <a:t>+5.7%</a:t>
             </a:r>
           </a:p>
         </p:txBody>
@@ -3713,7 +3713,7 @@
                 </a:solidFill>
                 <a:latin typeface="Segoe UI"/>
               </a:rPr>
-              <a:t>Bharti Airtel</a:t>
+              <a:t>Natural Gas</a:t>
             </a:r>
           </a:p>
         </p:txBody>
@@ -3743,11 +3743,11 @@
             <a:r>
               <a:rPr sz="900" b="0">
                 <a:solidFill>
-                  <a:srgbClr val="F59E0B"/>
-                </a:solidFill>
-                <a:latin typeface="Segoe UI"/>
-              </a:rPr>
-              <a:t>BHARTIARTL.NS · AMBER</a:t>
+                  <a:srgbClr val="EF4444"/>
+                </a:solidFill>
+                <a:latin typeface="Segoe UI"/>
+              </a:rPr>
+              <a:t>NG=F · RED</a:t>
             </a:r>
           </a:p>
         </p:txBody>
@@ -3781,7 +3781,7 @@
                 </a:solidFill>
                 <a:latin typeface="Segoe UI"/>
               </a:rPr>
-              <a:t>+4.4%</a:t>
+              <a:t>+3.5%</a:t>
             </a:r>
           </a:p>
         </p:txBody>
@@ -3839,7 +3839,7 @@
                 </a:solidFill>
                 <a:latin typeface="Segoe UI"/>
               </a:rPr>
-              <a:t>Amazon</a:t>
+              <a:t>Bharti Airtel</a:t>
             </a:r>
           </a:p>
         </p:txBody>
@@ -3873,7 +3873,7 @@
                 </a:solidFill>
                 <a:latin typeface="Segoe UI"/>
               </a:rPr>
-              <a:t>AMZN · AMBER</a:t>
+              <a:t>BHARTIARTL.NS · AMBER</a:t>
             </a:r>
           </a:p>
         </p:txBody>
@@ -3907,7 +3907,7 @@
                 </a:solidFill>
                 <a:latin typeface="Segoe UI"/>
               </a:rPr>
-              <a:t>+4.3%</a:t>
+              <a:t>+2.7%</a:t>
             </a:r>
           </a:p>
         </p:txBody>
@@ -3965,7 +3965,7 @@
                 </a:solidFill>
                 <a:latin typeface="Segoe UI"/>
               </a:rPr>
-              <a:t>Nvidia</a:t>
+              <a:t>Nikkei 225</a:t>
             </a:r>
           </a:p>
         </p:txBody>
@@ -3995,11 +3995,11 @@
             <a:r>
               <a:rPr sz="900" b="0">
                 <a:solidFill>
-                  <a:srgbClr val="22C55E"/>
-                </a:solidFill>
-                <a:latin typeface="Segoe UI"/>
-              </a:rPr>
-              <a:t>NVDA · GREEN</a:t>
+                  <a:srgbClr val="F59E0B"/>
+                </a:solidFill>
+                <a:latin typeface="Segoe UI"/>
+              </a:rPr>
+              <a:t>^N225 · AMBER</a:t>
             </a:r>
           </a:p>
         </p:txBody>
@@ -4033,7 +4033,7 @@
                 </a:solidFill>
                 <a:latin typeface="Segoe UI"/>
               </a:rPr>
-              <a:t>+4.0%</a:t>
+              <a:t>+2.6%</a:t>
             </a:r>
           </a:p>
         </p:txBody>
@@ -4193,7 +4193,7 @@
                 </a:solidFill>
                 <a:latin typeface="Segoe UI"/>
               </a:rPr>
-              <a:t>-3.9%</a:t>
+              <a:t>-7.3%</a:t>
             </a:r>
           </a:p>
         </p:txBody>
@@ -4251,7 +4251,7 @@
                 </a:solidFill>
                 <a:latin typeface="Segoe UI"/>
               </a:rPr>
-              <a:t>Straits Times</a:t>
+              <a:t>Solana</a:t>
             </a:r>
           </a:p>
         </p:txBody>
@@ -4281,11 +4281,11 @@
             <a:r>
               <a:rPr sz="900" b="0">
                 <a:solidFill>
-                  <a:srgbClr val="F59E0B"/>
-                </a:solidFill>
-                <a:latin typeface="Segoe UI"/>
-              </a:rPr>
-              <a:t>^STI · AMBER</a:t>
+                  <a:srgbClr val="22C55E"/>
+                </a:solidFill>
+                <a:latin typeface="Segoe UI"/>
+              </a:rPr>
+              <a:t>SOL-USD · GREEN</a:t>
             </a:r>
           </a:p>
         </p:txBody>
@@ -4319,7 +4319,7 @@
                 </a:solidFill>
                 <a:latin typeface="Segoe UI"/>
               </a:rPr>
-              <a:t>-3.7%</a:t>
+              <a:t>-6.6%</a:t>
             </a:r>
           </a:p>
         </p:txBody>
@@ -4377,7 +4377,7 @@
                 </a:solidFill>
                 <a:latin typeface="Segoe UI"/>
               </a:rPr>
-              <a:t>Hang Seng</a:t>
+              <a:t>Straits Times</a:t>
             </a:r>
           </a:p>
         </p:txBody>
@@ -4407,11 +4407,11 @@
             <a:r>
               <a:rPr sz="900" b="0">
                 <a:solidFill>
-                  <a:srgbClr val="EF4444"/>
-                </a:solidFill>
-                <a:latin typeface="Segoe UI"/>
-              </a:rPr>
-              <a:t>^HSI · RED</a:t>
+                  <a:srgbClr val="F59E0B"/>
+                </a:solidFill>
+                <a:latin typeface="Segoe UI"/>
+              </a:rPr>
+              <a:t>^STI · AMBER</a:t>
             </a:r>
           </a:p>
         </p:txBody>
@@ -4445,7 +4445,7 @@
                 </a:solidFill>
                 <a:latin typeface="Segoe UI"/>
               </a:rPr>
-              <a:t>-2.1%</a:t>
+              <a:t>-5.2%</a:t>
             </a:r>
           </a:p>
         </p:txBody>
@@ -4503,7 +4503,7 @@
                 </a:solidFill>
                 <a:latin typeface="Segoe UI"/>
               </a:rPr>
-              <a:t>FTSE 100</a:t>
+              <a:t>ITC</a:t>
             </a:r>
           </a:p>
         </p:txBody>
@@ -4533,11 +4533,11 @@
             <a:r>
               <a:rPr sz="900" b="0">
                 <a:solidFill>
-                  <a:srgbClr val="22C55E"/>
-                </a:solidFill>
-                <a:latin typeface="Segoe UI"/>
-              </a:rPr>
-              <a:t>^FTSE · GREEN</a:t>
+                  <a:srgbClr val="EF4444"/>
+                </a:solidFill>
+                <a:latin typeface="Segoe UI"/>
+              </a:rPr>
+              <a:t>ITC.NS · RED</a:t>
             </a:r>
           </a:p>
         </p:txBody>
@@ -4571,7 +4571,7 @@
                 </a:solidFill>
                 <a:latin typeface="Segoe UI"/>
               </a:rPr>
-              <a:t>-1.4%</a:t>
+              <a:t>-2.9%</a:t>
             </a:r>
           </a:p>
         </p:txBody>
@@ -4629,7 +4629,7 @@
                 </a:solidFill>
                 <a:latin typeface="Segoe UI"/>
               </a:rPr>
-              <a:t>Solana</a:t>
+              <a:t>HDFC Bank</a:t>
             </a:r>
           </a:p>
         </p:txBody>
@@ -4659,11 +4659,11 @@
             <a:r>
               <a:rPr sz="900" b="0">
                 <a:solidFill>
-                  <a:srgbClr val="22C55E"/>
-                </a:solidFill>
-                <a:latin typeface="Segoe UI"/>
-              </a:rPr>
-              <a:t>SOL-USD · GREEN</a:t>
+                  <a:srgbClr val="EF4444"/>
+                </a:solidFill>
+                <a:latin typeface="Segoe UI"/>
+              </a:rPr>
+              <a:t>HDFCBANK.NS · RED</a:t>
             </a:r>
           </a:p>
         </p:txBody>
@@ -4697,7 +4697,7 @@
                 </a:solidFill>
                 <a:latin typeface="Segoe UI"/>
               </a:rPr>
-              <a:t>-1.3%</a:t>
+              <a:t>-2.3%</a:t>
             </a:r>
           </a:p>
         </p:txBody>
@@ -4967,7 +4967,7 @@
                 </a:solidFill>
                 <a:latin typeface="Segoe UI"/>
               </a:rPr>
-              <a:t>Solana</a:t>
+              <a:t>US Energy</a:t>
             </a:r>
           </a:p>
         </p:txBody>
@@ -5035,7 +5035,7 @@
                 </a:solidFill>
                 <a:latin typeface="Segoe UI"/>
               </a:rPr>
-              <a:t>84%</a:t>
+              <a:t>95%</a:t>
             </a:r>
           </a:p>
         </p:txBody>
@@ -5069,7 +5069,7 @@
                 </a:solidFill>
                 <a:latin typeface="Segoe UI"/>
               </a:rPr>
-              <a:t>above 200DMA · golden cross (50&gt;200) · MACD bearish</a:t>
+              <a:t>above 200DMA · golden cross (50&gt;200) · MACD bullish</a:t>
             </a:r>
           </a:p>
         </p:txBody>
@@ -5103,7 +5103,7 @@
                 </a:solidFill>
                 <a:latin typeface="Segoe UI"/>
               </a:rPr>
-              <a:t>Bitcoin</a:t>
+              <a:t>Microsoft</a:t>
             </a:r>
           </a:p>
         </p:txBody>
@@ -5171,7 +5171,7 @@
                 </a:solidFill>
                 <a:latin typeface="Segoe UI"/>
               </a:rPr>
-              <a:t>84%</a:t>
+              <a:t>95%</a:t>
             </a:r>
           </a:p>
         </p:txBody>
@@ -5205,7 +5205,7 @@
                 </a:solidFill>
                 <a:latin typeface="Segoe UI"/>
               </a:rPr>
-              <a:t>above 200DMA · golden cross (50&gt;200) · MACD bearish</a:t>
+              <a:t>above 200DMA · golden cross (50&gt;200) · MACD bullish</a:t>
             </a:r>
           </a:p>
         </p:txBody>
@@ -5239,7 +5239,7 @@
                 </a:solidFill>
                 <a:latin typeface="Segoe UI"/>
               </a:rPr>
-              <a:t>Nvidia</a:t>
+              <a:t>Apple</a:t>
             </a:r>
           </a:p>
         </p:txBody>
@@ -5307,7 +5307,7 @@
                 </a:solidFill>
                 <a:latin typeface="Segoe UI"/>
               </a:rPr>
-              <a:t>95%</a:t>
+              <a:t>85%</a:t>
             </a:r>
           </a:p>
         </p:txBody>
@@ -5341,7 +5341,7 @@
                 </a:solidFill>
                 <a:latin typeface="Segoe UI"/>
               </a:rPr>
-              <a:t>above 200DMA · golden cross (50&gt;200) · MACD bullish</a:t>
+              <a:t>above 200DMA · golden cross (50&gt;200) · MACD bearish</a:t>
             </a:r>
           </a:p>
         </p:txBody>
@@ -5375,7 +5375,7 @@
                 </a:solidFill>
                 <a:latin typeface="Segoe UI"/>
               </a:rPr>
-              <a:t>Natural Gas</a:t>
+              <a:t>Bitcoin</a:t>
             </a:r>
           </a:p>
         </p:txBody>
@@ -5477,7 +5477,7 @@
                 </a:solidFill>
                 <a:latin typeface="Segoe UI"/>
               </a:rPr>
-              <a:t>above 200DMA · golden cross (50&gt;200) · MACD bullish</a:t>
+              <a:t>above 200DMA · golden cross (50&gt;200) · MACD bearish</a:t>
             </a:r>
           </a:p>
         </p:txBody>
@@ -5511,7 +5511,7 @@
                 </a:solidFill>
                 <a:latin typeface="Segoe UI"/>
               </a:rPr>
-              <a:t>US Energy</a:t>
+              <a:t>Dollar Index</a:t>
             </a:r>
           </a:p>
         </p:txBody>
@@ -5647,7 +5647,7 @@
                 </a:solidFill>
                 <a:latin typeface="Segoe UI"/>
               </a:rPr>
-              <a:t>Ethereum</a:t>
+              <a:t>Solana</a:t>
             </a:r>
           </a:p>
         </p:txBody>
@@ -5783,7 +5783,7 @@
                 </a:solidFill>
                 <a:latin typeface="Segoe UI"/>
               </a:rPr>
-              <a:t>USD/INR</a:t>
+              <a:t>US Technology</a:t>
             </a:r>
           </a:p>
         </p:txBody>
@@ -5851,7 +5851,7 @@
                 </a:solidFill>
                 <a:latin typeface="Segoe UI"/>
               </a:rPr>
-              <a:t>94%</a:t>
+              <a:t>83%</a:t>
             </a:r>
           </a:p>
         </p:txBody>
@@ -5885,7 +5885,7 @@
                 </a:solidFill>
                 <a:latin typeface="Segoe UI"/>
               </a:rPr>
-              <a:t>above 200DMA · golden cross (50&gt;200) · MACD bullish</a:t>
+              <a:t>above 200DMA · golden cross (50&gt;200) · MACD bearish</a:t>
             </a:r>
           </a:p>
         </p:txBody>
@@ -5919,7 +5919,7 @@
                 </a:solidFill>
                 <a:latin typeface="Segoe UI"/>
               </a:rPr>
-              <a:t>Apple</a:t>
+              <a:t>Natural Gas</a:t>
             </a:r>
           </a:p>
         </p:txBody>
@@ -5987,7 +5987,7 @@
                 </a:solidFill>
                 <a:latin typeface="Segoe UI"/>
               </a:rPr>
-              <a:t>82%</a:t>
+              <a:t>83%</a:t>
             </a:r>
           </a:p>
         </p:txBody>
@@ -6021,7 +6021,7 @@
                 </a:solidFill>
                 <a:latin typeface="Segoe UI"/>
               </a:rPr>
-              <a:t>above 200DMA · golden cross (50&gt;200) · MACD bearish</a:t>
+              <a:t>above 200DMA · golden cross (50&gt;200) · MACD bullish</a:t>
             </a:r>
           </a:p>
         </p:txBody>
@@ -6055,7 +6055,7 @@
                 </a:solidFill>
                 <a:latin typeface="Segoe UI"/>
               </a:rPr>
-              <a:t>Nikkei 225</a:t>
+              <a:t>USD/INR</a:t>
             </a:r>
           </a:p>
         </p:txBody>
@@ -6123,7 +6123,7 @@
                 </a:solidFill>
                 <a:latin typeface="Segoe UI"/>
               </a:rPr>
-              <a:t>81%</a:t>
+              <a:t>95%</a:t>
             </a:r>
           </a:p>
         </p:txBody>
@@ -6191,7 +6191,7 @@
                 </a:solidFill>
                 <a:latin typeface="Segoe UI"/>
               </a:rPr>
-              <a:t>S&amp;P 500</a:t>
+              <a:t>Nasdaq 100</a:t>
             </a:r>
           </a:p>
         </p:txBody>
@@ -6259,7 +6259,7 @@
                 </a:solidFill>
                 <a:latin typeface="Segoe UI"/>
               </a:rPr>
-              <a:t>81%</a:t>
+              <a:t>82%</a:t>
             </a:r>
           </a:p>
         </p:txBody>
@@ -6293,7 +6293,7 @@
                 </a:solidFill>
                 <a:latin typeface="Segoe UI"/>
               </a:rPr>
-              <a:t>above 200DMA · golden cross (50&gt;200) · MACD bullish</a:t>
+              <a:t>above 200DMA · golden cross (50&gt;200) · MACD bearish</a:t>
             </a:r>
           </a:p>
         </p:txBody>
@@ -6327,7 +6327,7 @@
                 </a:solidFill>
                 <a:latin typeface="Segoe UI"/>
               </a:rPr>
-              <a:t>Copper</a:t>
+              <a:t>S&amp;P 500</a:t>
             </a:r>
           </a:p>
         </p:txBody>
@@ -6395,7 +6395,7 @@
                 </a:solidFill>
                 <a:latin typeface="Segoe UI"/>
               </a:rPr>
-              <a:t>80%</a:t>
+              <a:t>81%</a:t>
             </a:r>
           </a:p>
         </p:txBody>
@@ -6463,7 +6463,7 @@
                 </a:solidFill>
                 <a:latin typeface="Segoe UI"/>
               </a:rPr>
-              <a:t>US Technology</a:t>
+              <a:t>Ethereum</a:t>
             </a:r>
           </a:p>
         </p:txBody>
@@ -6497,7 +6497,7 @@
                 </a:solidFill>
                 <a:latin typeface="Segoe UI"/>
               </a:rPr>
-              <a:t>BUY</a:t>
+              <a:t>STRONG BUY</a:t>
             </a:r>
           </a:p>
         </p:txBody>
@@ -6531,7 +6531,7 @@
                 </a:solidFill>
                 <a:latin typeface="Segoe UI"/>
               </a:rPr>
-              <a:t>91%</a:t>
+              <a:t>81%</a:t>
             </a:r>
           </a:p>
         </p:txBody>
@@ -6565,7 +6565,7 @@
                 </a:solidFill>
                 <a:latin typeface="Segoe UI"/>
               </a:rPr>
-              <a:t>above 200DMA · golden cross (50&gt;200) · MACD bullish</a:t>
+              <a:t>above 200DMA · golden cross (50&gt;200) · MACD bearish</a:t>
             </a:r>
           </a:p>
         </p:txBody>
@@ -6659,7 +6659,7 @@
                 </a:solidFill>
                 <a:latin typeface="Segoe UI"/>
               </a:rPr>
-              <a:t>Base currency INR · USD/INR 96.75</a:t>
+              <a:t>Base currency INR · USD/INR 96.78</a:t>
             </a:r>
           </a:p>
         </p:txBody>
@@ -7067,7 +7067,7 @@
                 </a:solidFill>
                 <a:latin typeface="Segoe UI"/>
               </a:rPr>
-              <a:t>83,119</a:t>
+              <a:t>82,049</a:t>
             </a:r>
           </a:p>
         </p:txBody>
@@ -7101,7 +7101,7 @@
                 </a:solidFill>
                 <a:latin typeface="Segoe UI"/>
               </a:rPr>
-              <a:t>Rs 804,175</a:t>
+              <a:t>Rs 794,066</a:t>
             </a:r>
           </a:p>
         </p:txBody>
@@ -7135,7 +7135,7 @@
                 </a:solidFill>
                 <a:latin typeface="Segoe UI"/>
               </a:rPr>
-              <a:t>Rs 223,675</a:t>
+              <a:t>Rs 213,386</a:t>
             </a:r>
           </a:p>
         </p:txBody>
@@ -7169,7 +7169,7 @@
                 </a:solidFill>
                 <a:latin typeface="Segoe UI"/>
               </a:rPr>
-              <a:t>+38.5%</a:t>
+              <a:t>+36.8%</a:t>
             </a:r>
           </a:p>
         </p:txBody>
@@ -7203,7 +7203,7 @@
                 </a:solidFill>
                 <a:latin typeface="Segoe UI"/>
               </a:rPr>
-              <a:t>-2.9%</a:t>
+              <a:t>-1.5%</a:t>
             </a:r>
           </a:p>
         </p:txBody>
@@ -7339,7 +7339,7 @@
                 </a:solidFill>
                 <a:latin typeface="Segoe UI"/>
               </a:rPr>
-              <a:t>4,160</a:t>
+              <a:t>4,202</a:t>
             </a:r>
           </a:p>
         </p:txBody>
@@ -7373,7 +7373,7 @@
                 </a:solidFill>
                 <a:latin typeface="Segoe UI"/>
               </a:rPr>
-              <a:t>Rs 402,528</a:t>
+              <a:t>Rs 406,650</a:t>
             </a:r>
           </a:p>
         </p:txBody>
@@ -7407,7 +7407,7 @@
                 </a:solidFill>
                 <a:latin typeface="Segoe UI"/>
               </a:rPr>
-              <a:t>Rs 180,003</a:t>
+              <a:t>Rs 184,056</a:t>
             </a:r>
           </a:p>
         </p:txBody>
@@ -7441,7 +7441,7 @@
                 </a:solidFill>
                 <a:latin typeface="Segoe UI"/>
               </a:rPr>
-              <a:t>+80.9%</a:t>
+              <a:t>+82.7%</a:t>
             </a:r>
           </a:p>
         </p:txBody>
@@ -7611,7 +7611,7 @@
                 </a:solidFill>
                 <a:latin typeface="Segoe UI"/>
               </a:rPr>
-              <a:t>337</a:t>
+              <a:t>340</a:t>
             </a:r>
           </a:p>
         </p:txBody>
@@ -7645,7 +7645,7 @@
                 </a:solidFill>
                 <a:latin typeface="Segoe UI"/>
               </a:rPr>
-              <a:t>Rs 325,728</a:t>
+              <a:t>Rs 329,458</a:t>
             </a:r>
           </a:p>
         </p:txBody>
@@ -7679,7 +7679,7 @@
                 </a:solidFill>
                 <a:latin typeface="Segoe UI"/>
               </a:rPr>
-              <a:t>Rs 146,741</a:t>
+              <a:t>Rs 150,415</a:t>
             </a:r>
           </a:p>
         </p:txBody>
@@ -7713,7 +7713,7 @@
                 </a:solidFill>
                 <a:latin typeface="Segoe UI"/>
               </a:rPr>
-              <a:t>+82.0%</a:t>
+              <a:t>+84.0%</a:t>
             </a:r>
           </a:p>
         </p:txBody>
@@ -7883,7 +7883,7 @@
                 </a:solidFill>
                 <a:latin typeface="Segoe UI"/>
               </a:rPr>
-              <a:t>237</a:t>
+              <a:t>230</a:t>
             </a:r>
           </a:p>
         </p:txBody>
@@ -7917,7 +7917,7 @@
                 </a:solidFill>
                 <a:latin typeface="Segoe UI"/>
               </a:rPr>
-              <a:t>Rs 183,802</a:t>
+              <a:t>Rs 178,447</a:t>
             </a:r>
           </a:p>
         </p:txBody>
@@ -7951,7 +7951,7 @@
                 </a:solidFill>
                 <a:latin typeface="Segoe UI"/>
               </a:rPr>
-              <a:t>Rs -164,498</a:t>
+              <a:t>Rs -169,961</a:t>
             </a:r>
           </a:p>
         </p:txBody>
@@ -7985,7 +7985,7 @@
                 </a:solidFill>
                 <a:latin typeface="Segoe UI"/>
               </a:rPr>
-              <a:t>-47.2%</a:t>
+              <a:t>-48.8%</a:t>
             </a:r>
           </a:p>
         </p:txBody>
@@ -8155,7 +8155,7 @@
                 </a:solidFill>
                 <a:latin typeface="Segoe UI"/>
               </a:rPr>
-              <a:t>992</a:t>
+              <a:t>997</a:t>
             </a:r>
           </a:p>
         </p:txBody>
@@ -8189,7 +8189,7 @@
                 </a:solidFill>
                 <a:latin typeface="Segoe UI"/>
               </a:rPr>
-              <a:t>Rs 79,360</a:t>
+              <a:t>Rs 79,760</a:t>
             </a:r>
           </a:p>
         </p:txBody>
@@ -8223,7 +8223,7 @@
                 </a:solidFill>
                 <a:latin typeface="Segoe UI"/>
               </a:rPr>
-              <a:t>Rs -32,640</a:t>
+              <a:t>Rs -32,240</a:t>
             </a:r>
           </a:p>
         </p:txBody>
@@ -8257,7 +8257,7 @@
                 </a:solidFill>
                 <a:latin typeface="Segoe UI"/>
               </a:rPr>
-              <a:t>-29.1%</a:t>
+              <a:t>-28.8%</a:t>
             </a:r>
           </a:p>
         </p:txBody>
@@ -8427,7 +8427,7 @@
                 </a:solidFill>
                 <a:latin typeface="Segoe UI"/>
               </a:rPr>
-              <a:t>1,208</a:t>
+              <a:t>1,178</a:t>
             </a:r>
           </a:p>
         </p:txBody>
@@ -8461,7 +8461,7 @@
                 </a:solidFill>
                 <a:latin typeface="Segoe UI"/>
               </a:rPr>
-              <a:t>Rs 60,385</a:t>
+              <a:t>Rs 58,900</a:t>
             </a:r>
           </a:p>
         </p:txBody>
@@ -8495,7 +8495,7 @@
                 </a:solidFill>
                 <a:latin typeface="Segoe UI"/>
               </a:rPr>
-              <a:t>Rs -62,115</a:t>
+              <a:t>Rs -63,600</a:t>
             </a:r>
           </a:p>
         </p:txBody>
@@ -8529,7 +8529,7 @@
                 </a:solidFill>
                 <a:latin typeface="Segoe UI"/>
               </a:rPr>
-              <a:t>-50.7%</a:t>
+              <a:t>-51.9%</a:t>
             </a:r>
           </a:p>
         </p:txBody>
@@ -8699,7 +8699,7 @@
                 </a:solidFill>
                 <a:latin typeface="Segoe UI"/>
               </a:rPr>
-              <a:t>2,080</a:t>
+              <a:t>2,076</a:t>
             </a:r>
           </a:p>
         </p:txBody>
@@ -8733,7 +8733,7 @@
                 </a:solidFill>
                 <a:latin typeface="Segoe UI"/>
               </a:rPr>
-              <a:t>Rs 52,008</a:t>
+              <a:t>Rs 51,900</a:t>
             </a:r>
           </a:p>
         </p:txBody>
@@ -8767,7 +8767,7 @@
                 </a:solidFill>
                 <a:latin typeface="Segoe UI"/>
               </a:rPr>
-              <a:t>Rs -37,992</a:t>
+              <a:t>Rs -38,100</a:t>
             </a:r>
           </a:p>
         </p:txBody>
@@ -8801,7 +8801,7 @@
                 </a:solidFill>
                 <a:latin typeface="Segoe UI"/>
               </a:rPr>
-              <a:t>-42.2%</a:t>
+              <a:t>-42.3%</a:t>
             </a:r>
           </a:p>
         </p:txBody>
@@ -8971,7 +8971,7 @@
                 </a:solidFill>
                 <a:latin typeface="Segoe UI"/>
               </a:rPr>
-              <a:t>703</a:t>
+              <a:t>692</a:t>
             </a:r>
           </a:p>
         </p:txBody>
@@ -9005,7 +9005,7 @@
                 </a:solidFill>
                 <a:latin typeface="Segoe UI"/>
               </a:rPr>
-              <a:t>Rs 42,165</a:t>
+              <a:t>Rs 41,535</a:t>
             </a:r>
           </a:p>
         </p:txBody>
@@ -9039,7 +9039,7 @@
                 </a:solidFill>
                 <a:latin typeface="Segoe UI"/>
               </a:rPr>
-              <a:t>Rs -49,035</a:t>
+              <a:t>Rs -49,665</a:t>
             </a:r>
           </a:p>
         </p:txBody>
@@ -9073,7 +9073,7 @@
                 </a:solidFill>
                 <a:latin typeface="Segoe UI"/>
               </a:rPr>
-              <a:t>-53.8%</a:t>
+              <a:t>-54.5%</a:t>
             </a:r>
           </a:p>
         </p:txBody>
@@ -9141,7 +9141,7 @@
                 </a:solidFill>
                 <a:latin typeface="Segoe UI"/>
               </a:rPr>
-              <a:t>Total Rs 1,950,151 | P&amp;L Rs 204,139 (+11.7%) | Sharpe 0.08 | Vol 20.07% | VaR95 -1.85%/day</a:t>
+              <a:t>Total Rs 1,940,717 | P&amp;L Rs 194,292 (+11.1%) | Sharpe 0.18 | Vol 19.84% | VaR95 -1.77%/day</a:t>
             </a:r>
           </a:p>
         </p:txBody>

--- a/docs/pmr_daily.pptx
+++ b/docs/pmr_daily.pptx
@@ -3197,7 +3197,7 @@
                 </a:solidFill>
                 <a:latin typeface="Segoe UI"/>
               </a:rPr>
-              <a:t>Friday, 09 Oct 2026 10:48 SGT</a:t>
+              <a:t>Monday, 12 Oct 2026 10:07 SGT</a:t>
             </a:r>
           </a:p>
         </p:txBody>
@@ -3265,7 +3265,7 @@
                 </a:solidFill>
                 <a:latin typeface="Segoe UI"/>
               </a:rPr>
-              <a:t>RAG 16R / 14A / 16G   |   47.8% above 200DMA   |   Portfolio Rs 1,940,717 (+11.1%)</a:t>
+              <a:t>RAG 13R / 14A / 19G   |   54.3% above 200DMA   |   Portfolio Rs 1,958,908 (+12.2%)</a:t>
             </a:r>
           </a:p>
         </p:txBody>
@@ -3461,7 +3461,7 @@
                 </a:solidFill>
                 <a:latin typeface="Segoe UI"/>
               </a:rPr>
-              <a:t>US Energy</a:t>
+              <a:t>Tesla</a:t>
             </a:r>
           </a:p>
         </p:txBody>
@@ -3491,11 +3491,11 @@
             <a:r>
               <a:rPr sz="900" b="0">
                 <a:solidFill>
-                  <a:srgbClr val="22C55E"/>
-                </a:solidFill>
-                <a:latin typeface="Segoe UI"/>
-              </a:rPr>
-              <a:t>XLE · GREEN</a:t>
+                  <a:srgbClr val="F59E0B"/>
+                </a:solidFill>
+                <a:latin typeface="Segoe UI"/>
+              </a:rPr>
+              <a:t>TSLA · AMBER</a:t>
             </a:r>
           </a:p>
         </p:txBody>
@@ -3529,7 +3529,7 @@
                 </a:solidFill>
                 <a:latin typeface="Segoe UI"/>
               </a:rPr>
-              <a:t>+6.1%</a:t>
+              <a:t>+7.9%</a:t>
             </a:r>
           </a:p>
         </p:txBody>
@@ -3587,7 +3587,7 @@
                 </a:solidFill>
                 <a:latin typeface="Segoe UI"/>
               </a:rPr>
-              <a:t>Tesla</a:t>
+              <a:t>US Energy</a:t>
             </a:r>
           </a:p>
         </p:txBody>
@@ -3617,11 +3617,11 @@
             <a:r>
               <a:rPr sz="900" b="0">
                 <a:solidFill>
-                  <a:srgbClr val="F59E0B"/>
-                </a:solidFill>
-                <a:latin typeface="Segoe UI"/>
-              </a:rPr>
-              <a:t>TSLA · AMBER</a:t>
+                  <a:srgbClr val="22C55E"/>
+                </a:solidFill>
+                <a:latin typeface="Segoe UI"/>
+              </a:rPr>
+              <a:t>XLE · GREEN</a:t>
             </a:r>
           </a:p>
         </p:txBody>
@@ -3655,7 +3655,7 @@
                 </a:solidFill>
                 <a:latin typeface="Segoe UI"/>
               </a:rPr>
-              <a:t>+5.7%</a:t>
+              <a:t>+5.8%</a:t>
             </a:r>
           </a:p>
         </p:txBody>
@@ -3713,7 +3713,7 @@
                 </a:solidFill>
                 <a:latin typeface="Segoe UI"/>
               </a:rPr>
-              <a:t>Natural Gas</a:t>
+              <a:t>Amazon</a:t>
             </a:r>
           </a:p>
         </p:txBody>
@@ -3743,11 +3743,11 @@
             <a:r>
               <a:rPr sz="900" b="0">
                 <a:solidFill>
-                  <a:srgbClr val="EF4444"/>
-                </a:solidFill>
-                <a:latin typeface="Segoe UI"/>
-              </a:rPr>
-              <a:t>NG=F · RED</a:t>
+                  <a:srgbClr val="22C55E"/>
+                </a:solidFill>
+                <a:latin typeface="Segoe UI"/>
+              </a:rPr>
+              <a:t>AMZN · GREEN</a:t>
             </a:r>
           </a:p>
         </p:txBody>
@@ -3781,7 +3781,7 @@
                 </a:solidFill>
                 <a:latin typeface="Segoe UI"/>
               </a:rPr>
-              <a:t>+3.5%</a:t>
+              <a:t>+5.3%</a:t>
             </a:r>
           </a:p>
         </p:txBody>
@@ -3839,7 +3839,7 @@
                 </a:solidFill>
                 <a:latin typeface="Segoe UI"/>
               </a:rPr>
-              <a:t>Bharti Airtel</a:t>
+              <a:t>TCS</a:t>
             </a:r>
           </a:p>
         </p:txBody>
@@ -3869,11 +3869,11 @@
             <a:r>
               <a:rPr sz="900" b="0">
                 <a:solidFill>
-                  <a:srgbClr val="F59E0B"/>
-                </a:solidFill>
-                <a:latin typeface="Segoe UI"/>
-              </a:rPr>
-              <a:t>BHARTIARTL.NS · AMBER</a:t>
+                  <a:srgbClr val="EF4444"/>
+                </a:solidFill>
+                <a:latin typeface="Segoe UI"/>
+              </a:rPr>
+              <a:t>TCS.NS · RED</a:t>
             </a:r>
           </a:p>
         </p:txBody>
@@ -3907,7 +3907,7 @@
                 </a:solidFill>
                 <a:latin typeface="Segoe UI"/>
               </a:rPr>
-              <a:t>+2.7%</a:t>
+              <a:t>+5.1%</a:t>
             </a:r>
           </a:p>
         </p:txBody>
@@ -3965,7 +3965,7 @@
                 </a:solidFill>
                 <a:latin typeface="Segoe UI"/>
               </a:rPr>
-              <a:t>Nikkei 225</a:t>
+              <a:t>Natural Gas</a:t>
             </a:r>
           </a:p>
         </p:txBody>
@@ -3999,7 +3999,7 @@
                 </a:solidFill>
                 <a:latin typeface="Segoe UI"/>
               </a:rPr>
-              <a:t>^N225 · AMBER</a:t>
+              <a:t>NG=F · AMBER</a:t>
             </a:r>
           </a:p>
         </p:txBody>
@@ -4033,7 +4033,7 @@
                 </a:solidFill>
                 <a:latin typeface="Segoe UI"/>
               </a:rPr>
-              <a:t>+2.6%</a:t>
+              <a:t>+4.4%</a:t>
             </a:r>
           </a:p>
         </p:txBody>
@@ -4125,7 +4125,7 @@
                 </a:solidFill>
                 <a:latin typeface="Segoe UI"/>
               </a:rPr>
-              <a:t>Ethereum</a:t>
+              <a:t>Solana</a:t>
             </a:r>
           </a:p>
         </p:txBody>
@@ -4159,7 +4159,7 @@
                 </a:solidFill>
                 <a:latin typeface="Segoe UI"/>
               </a:rPr>
-              <a:t>ETH-USD · GREEN</a:t>
+              <a:t>SOL-USD · GREEN</a:t>
             </a:r>
           </a:p>
         </p:txBody>
@@ -4193,7 +4193,7 @@
                 </a:solidFill>
                 <a:latin typeface="Segoe UI"/>
               </a:rPr>
-              <a:t>-7.3%</a:t>
+              <a:t>-5.5%</a:t>
             </a:r>
           </a:p>
         </p:txBody>
@@ -4251,7 +4251,7 @@
                 </a:solidFill>
                 <a:latin typeface="Segoe UI"/>
               </a:rPr>
-              <a:t>Solana</a:t>
+              <a:t>Ethereum</a:t>
             </a:r>
           </a:p>
         </p:txBody>
@@ -4285,7 +4285,7 @@
                 </a:solidFill>
                 <a:latin typeface="Segoe UI"/>
               </a:rPr>
-              <a:t>SOL-USD · GREEN</a:t>
+              <a:t>ETH-USD · GREEN</a:t>
             </a:r>
           </a:p>
         </p:txBody>
@@ -4319,7 +4319,7 @@
                 </a:solidFill>
                 <a:latin typeface="Segoe UI"/>
               </a:rPr>
-              <a:t>-6.6%</a:t>
+              <a:t>-5.3%</a:t>
             </a:r>
           </a:p>
         </p:txBody>
@@ -4445,7 +4445,7 @@
                 </a:solidFill>
                 <a:latin typeface="Segoe UI"/>
               </a:rPr>
-              <a:t>-5.2%</a:t>
+              <a:t>-4.3%</a:t>
             </a:r>
           </a:p>
         </p:txBody>
@@ -4503,7 +4503,7 @@
                 </a:solidFill>
                 <a:latin typeface="Segoe UI"/>
               </a:rPr>
-              <a:t>ITC</a:t>
+              <a:t>Reliance</a:t>
             </a:r>
           </a:p>
         </p:txBody>
@@ -4537,7 +4537,7 @@
                 </a:solidFill>
                 <a:latin typeface="Segoe UI"/>
               </a:rPr>
-              <a:t>ITC.NS · RED</a:t>
+              <a:t>RELIANCE.NS · RED</a:t>
             </a:r>
           </a:p>
         </p:txBody>
@@ -4571,7 +4571,7 @@
                 </a:solidFill>
                 <a:latin typeface="Segoe UI"/>
               </a:rPr>
-              <a:t>-2.9%</a:t>
+              <a:t>-1.4%</a:t>
             </a:r>
           </a:p>
         </p:txBody>
@@ -4629,7 +4629,7 @@
                 </a:solidFill>
                 <a:latin typeface="Segoe UI"/>
               </a:rPr>
-              <a:t>HDFC Bank</a:t>
+              <a:t>EUR/USD</a:t>
             </a:r>
           </a:p>
         </p:txBody>
@@ -4663,7 +4663,7 @@
                 </a:solidFill>
                 <a:latin typeface="Segoe UI"/>
               </a:rPr>
-              <a:t>HDFCBANK.NS · RED</a:t>
+              <a:t>EURUSD=X · RED</a:t>
             </a:r>
           </a:p>
         </p:txBody>
@@ -4697,7 +4697,7 @@
                 </a:solidFill>
                 <a:latin typeface="Segoe UI"/>
               </a:rPr>
-              <a:t>-2.3%</a:t>
+              <a:t>-1.1%</a:t>
             </a:r>
           </a:p>
         </p:txBody>
@@ -4967,7 +4967,7 @@
                 </a:solidFill>
                 <a:latin typeface="Segoe UI"/>
               </a:rPr>
-              <a:t>US Energy</a:t>
+              <a:t>Microsoft</a:t>
             </a:r>
           </a:p>
         </p:txBody>
@@ -5103,7 +5103,7 @@
                 </a:solidFill>
                 <a:latin typeface="Segoe UI"/>
               </a:rPr>
-              <a:t>Microsoft</a:t>
+              <a:t>US Energy</a:t>
             </a:r>
           </a:p>
         </p:txBody>
@@ -5239,7 +5239,7 @@
                 </a:solidFill>
                 <a:latin typeface="Segoe UI"/>
               </a:rPr>
-              <a:t>Apple</a:t>
+              <a:t>Bitcoin</a:t>
             </a:r>
           </a:p>
         </p:txBody>
@@ -5375,7 +5375,7 @@
                 </a:solidFill>
                 <a:latin typeface="Segoe UI"/>
               </a:rPr>
-              <a:t>Bitcoin</a:t>
+              <a:t>Apple</a:t>
             </a:r>
           </a:p>
         </p:txBody>
@@ -5443,7 +5443,7 @@
                 </a:solidFill>
                 <a:latin typeface="Segoe UI"/>
               </a:rPr>
-              <a:t>84%</a:t>
+              <a:t>83%</a:t>
             </a:r>
           </a:p>
         </p:txBody>
@@ -5511,7 +5511,7 @@
                 </a:solidFill>
                 <a:latin typeface="Segoe UI"/>
               </a:rPr>
-              <a:t>Dollar Index</a:t>
+              <a:t>Natural Gas</a:t>
             </a:r>
           </a:p>
         </p:txBody>
@@ -5579,7 +5579,7 @@
                 </a:solidFill>
                 <a:latin typeface="Segoe UI"/>
               </a:rPr>
-              <a:t>95%</a:t>
+              <a:t>89%</a:t>
             </a:r>
           </a:p>
         </p:txBody>
@@ -5919,7 +5919,7 @@
                 </a:solidFill>
                 <a:latin typeface="Segoe UI"/>
               </a:rPr>
-              <a:t>Natural Gas</a:t>
+              <a:t>USD/INR</a:t>
             </a:r>
           </a:p>
         </p:txBody>
@@ -5987,7 +5987,7 @@
                 </a:solidFill>
                 <a:latin typeface="Segoe UI"/>
               </a:rPr>
-              <a:t>83%</a:t>
+              <a:t>94%</a:t>
             </a:r>
           </a:p>
         </p:txBody>
@@ -6055,7 +6055,7 @@
                 </a:solidFill>
                 <a:latin typeface="Segoe UI"/>
               </a:rPr>
-              <a:t>USD/INR</a:t>
+              <a:t>Dollar Index</a:t>
             </a:r>
           </a:p>
         </p:txBody>
@@ -6123,7 +6123,7 @@
                 </a:solidFill>
                 <a:latin typeface="Segoe UI"/>
               </a:rPr>
-              <a:t>95%</a:t>
+              <a:t>82%</a:t>
             </a:r>
           </a:p>
         </p:txBody>
@@ -6157,7 +6157,7 @@
                 </a:solidFill>
                 <a:latin typeface="Segoe UI"/>
               </a:rPr>
-              <a:t>above 200DMA · golden cross (50&gt;200) · MACD bullish</a:t>
+              <a:t>above 200DMA · golden cross (50&gt;200) · MACD bearish</a:t>
             </a:r>
           </a:p>
         </p:txBody>
@@ -6191,7 +6191,7 @@
                 </a:solidFill>
                 <a:latin typeface="Segoe UI"/>
               </a:rPr>
-              <a:t>Nasdaq 100</a:t>
+              <a:t>Copper</a:t>
             </a:r>
           </a:p>
         </p:txBody>
@@ -6259,7 +6259,7 @@
                 </a:solidFill>
                 <a:latin typeface="Segoe UI"/>
               </a:rPr>
-              <a:t>82%</a:t>
+              <a:t>94%</a:t>
             </a:r>
           </a:p>
         </p:txBody>
@@ -6293,7 +6293,7 @@
                 </a:solidFill>
                 <a:latin typeface="Segoe UI"/>
               </a:rPr>
-              <a:t>above 200DMA · golden cross (50&gt;200) · MACD bearish</a:t>
+              <a:t>above 200DMA · golden cross (50&gt;200) · MACD bullish</a:t>
             </a:r>
           </a:p>
         </p:txBody>
@@ -6327,7 +6327,7 @@
                 </a:solidFill>
                 <a:latin typeface="Segoe UI"/>
               </a:rPr>
-              <a:t>S&amp;P 500</a:t>
+              <a:t>Nasdaq 100</a:t>
             </a:r>
           </a:p>
         </p:txBody>
@@ -6395,7 +6395,7 @@
                 </a:solidFill>
                 <a:latin typeface="Segoe UI"/>
               </a:rPr>
-              <a:t>81%</a:t>
+              <a:t>82%</a:t>
             </a:r>
           </a:p>
         </p:txBody>
@@ -6429,7 +6429,7 @@
                 </a:solidFill>
                 <a:latin typeface="Segoe UI"/>
               </a:rPr>
-              <a:t>above 200DMA · golden cross (50&gt;200) · MACD bullish</a:t>
+              <a:t>above 200DMA · golden cross (50&gt;200) · MACD bearish</a:t>
             </a:r>
           </a:p>
         </p:txBody>
@@ -6463,7 +6463,7 @@
                 </a:solidFill>
                 <a:latin typeface="Segoe UI"/>
               </a:rPr>
-              <a:t>Ethereum</a:t>
+              <a:t>S&amp;P 500</a:t>
             </a:r>
           </a:p>
         </p:txBody>
@@ -6565,7 +6565,7 @@
                 </a:solidFill>
                 <a:latin typeface="Segoe UI"/>
               </a:rPr>
-              <a:t>above 200DMA · golden cross (50&gt;200) · MACD bearish</a:t>
+              <a:t>above 200DMA · golden cross (50&gt;200) · MACD bullish</a:t>
             </a:r>
           </a:p>
         </p:txBody>
@@ -7067,7 +7067,7 @@
                 </a:solidFill>
                 <a:latin typeface="Segoe UI"/>
               </a:rPr>
-              <a:t>82,049</a:t>
+              <a:t>83,600</a:t>
             </a:r>
           </a:p>
         </p:txBody>
@@ -7101,7 +7101,7 @@
                 </a:solidFill>
                 <a:latin typeface="Segoe UI"/>
               </a:rPr>
-              <a:t>Rs 794,066</a:t>
+              <a:t>Rs 809,083</a:t>
             </a:r>
           </a:p>
         </p:txBody>
@@ -7135,7 +7135,7 @@
                 </a:solidFill>
                 <a:latin typeface="Segoe UI"/>
               </a:rPr>
-              <a:t>Rs 213,386</a:t>
+              <a:t>Rs 228,403</a:t>
             </a:r>
           </a:p>
         </p:txBody>
@@ -7169,7 +7169,7 @@
                 </a:solidFill>
                 <a:latin typeface="Segoe UI"/>
               </a:rPr>
-              <a:t>+36.8%</a:t>
+              <a:t>+39.3%</a:t>
             </a:r>
           </a:p>
         </p:txBody>
@@ -7199,11 +7199,11 @@
             <a:r>
               <a:rPr sz="1000" b="0">
                 <a:solidFill>
-                  <a:srgbClr val="EF4444"/>
-                </a:solidFill>
-                <a:latin typeface="Segoe UI"/>
-              </a:rPr>
-              <a:t>-1.5%</a:t>
+                  <a:srgbClr val="22C55E"/>
+                </a:solidFill>
+                <a:latin typeface="Segoe UI"/>
+              </a:rPr>
+              <a:t>+0.8%</a:t>
             </a:r>
           </a:p>
         </p:txBody>
@@ -7339,7 +7339,7 @@
                 </a:solidFill>
                 <a:latin typeface="Segoe UI"/>
               </a:rPr>
-              <a:t>4,202</a:t>
+              <a:t>4,234</a:t>
             </a:r>
           </a:p>
         </p:txBody>
@@ -7373,7 +7373,7 @@
                 </a:solidFill>
                 <a:latin typeface="Segoe UI"/>
               </a:rPr>
-              <a:t>Rs 406,650</a:t>
+              <a:t>Rs 409,786</a:t>
             </a:r>
           </a:p>
         </p:txBody>
@@ -7407,7 +7407,7 @@
                 </a:solidFill>
                 <a:latin typeface="Segoe UI"/>
               </a:rPr>
-              <a:t>Rs 184,056</a:t>
+              <a:t>Rs 187,192</a:t>
             </a:r>
           </a:p>
         </p:txBody>
@@ -7441,7 +7441,7 @@
                 </a:solidFill>
                 <a:latin typeface="Segoe UI"/>
               </a:rPr>
-              <a:t>+82.7%</a:t>
+              <a:t>+84.1%</a:t>
             </a:r>
           </a:p>
         </p:txBody>
@@ -7611,7 +7611,7 @@
                 </a:solidFill>
                 <a:latin typeface="Segoe UI"/>
               </a:rPr>
-              <a:t>340</a:t>
+              <a:t>337</a:t>
             </a:r>
           </a:p>
         </p:txBody>
@@ -7645,7 +7645,7 @@
                 </a:solidFill>
                 <a:latin typeface="Segoe UI"/>
               </a:rPr>
-              <a:t>Rs 329,458</a:t>
+              <a:t>Rs 325,800</a:t>
             </a:r>
           </a:p>
         </p:txBody>
@@ -7679,7 +7679,7 @@
                 </a:solidFill>
                 <a:latin typeface="Segoe UI"/>
               </a:rPr>
-              <a:t>Rs 150,415</a:t>
+              <a:t>Rs 146,757</a:t>
             </a:r>
           </a:p>
         </p:txBody>
@@ -7713,7 +7713,7 @@
                 </a:solidFill>
                 <a:latin typeface="Segoe UI"/>
               </a:rPr>
-              <a:t>+84.0%</a:t>
+              <a:t>+82.0%</a:t>
             </a:r>
           </a:p>
         </p:txBody>
@@ -7883,7 +7883,7 @@
                 </a:solidFill>
                 <a:latin typeface="Segoe UI"/>
               </a:rPr>
-              <a:t>230</a:t>
+              <a:t>229</a:t>
             </a:r>
           </a:p>
         </p:txBody>
@@ -7917,7 +7917,7 @@
                 </a:solidFill>
                 <a:latin typeface="Segoe UI"/>
               </a:rPr>
-              <a:t>Rs 178,447</a:t>
+              <a:t>Rs 177,518</a:t>
             </a:r>
           </a:p>
         </p:txBody>
@@ -7951,7 +7951,7 @@
                 </a:solidFill>
                 <a:latin typeface="Segoe UI"/>
               </a:rPr>
-              <a:t>Rs -169,961</a:t>
+              <a:t>Rs -170,890</a:t>
             </a:r>
           </a:p>
         </p:txBody>
@@ -7985,7 +7985,7 @@
                 </a:solidFill>
                 <a:latin typeface="Segoe UI"/>
               </a:rPr>
-              <a:t>-48.8%</a:t>
+              <a:t>-49.0%</a:t>
             </a:r>
           </a:p>
         </p:txBody>
@@ -8155,7 +8155,7 @@
                 </a:solidFill>
                 <a:latin typeface="Segoe UI"/>
               </a:rPr>
-              <a:t>997</a:t>
+              <a:t>1,023</a:t>
             </a:r>
           </a:p>
         </p:txBody>
@@ -8189,7 +8189,7 @@
                 </a:solidFill>
                 <a:latin typeface="Segoe UI"/>
               </a:rPr>
-              <a:t>Rs 79,760</a:t>
+              <a:t>Rs 81,872</a:t>
             </a:r>
           </a:p>
         </p:txBody>
@@ -8223,7 +8223,7 @@
                 </a:solidFill>
                 <a:latin typeface="Segoe UI"/>
               </a:rPr>
-              <a:t>Rs -32,240</a:t>
+              <a:t>Rs -30,128</a:t>
             </a:r>
           </a:p>
         </p:txBody>
@@ -8257,7 +8257,7 @@
                 </a:solidFill>
                 <a:latin typeface="Segoe UI"/>
               </a:rPr>
-              <a:t>-28.8%</a:t>
+              <a:t>-26.9%</a:t>
             </a:r>
           </a:p>
         </p:txBody>
@@ -8427,7 +8427,7 @@
                 </a:solidFill>
                 <a:latin typeface="Segoe UI"/>
               </a:rPr>
-              <a:t>1,178</a:t>
+              <a:t>1,170</a:t>
             </a:r>
           </a:p>
         </p:txBody>
@@ -8461,7 +8461,7 @@
                 </a:solidFill>
                 <a:latin typeface="Segoe UI"/>
               </a:rPr>
-              <a:t>Rs 58,900</a:t>
+              <a:t>Rs 58,515</a:t>
             </a:r>
           </a:p>
         </p:txBody>
@@ -8495,7 +8495,7 @@
                 </a:solidFill>
                 <a:latin typeface="Segoe UI"/>
               </a:rPr>
-              <a:t>Rs -63,600</a:t>
+              <a:t>Rs -63,985</a:t>
             </a:r>
           </a:p>
         </p:txBody>
@@ -8529,7 +8529,7 @@
                 </a:solidFill>
                 <a:latin typeface="Segoe UI"/>
               </a:rPr>
-              <a:t>-51.9%</a:t>
+              <a:t>-52.2%</a:t>
             </a:r>
           </a:p>
         </p:txBody>
@@ -8699,7 +8699,7 @@
                 </a:solidFill>
                 <a:latin typeface="Segoe UI"/>
               </a:rPr>
-              <a:t>2,076</a:t>
+              <a:t>2,156</a:t>
             </a:r>
           </a:p>
         </p:txBody>
@@ -8733,7 +8733,7 @@
                 </a:solidFill>
                 <a:latin typeface="Segoe UI"/>
               </a:rPr>
-              <a:t>Rs 51,900</a:t>
+              <a:t>Rs 53,900</a:t>
             </a:r>
           </a:p>
         </p:txBody>
@@ -8767,7 +8767,7 @@
                 </a:solidFill>
                 <a:latin typeface="Segoe UI"/>
               </a:rPr>
-              <a:t>Rs -38,100</a:t>
+              <a:t>Rs -36,100</a:t>
             </a:r>
           </a:p>
         </p:txBody>
@@ -8801,7 +8801,7 @@
                 </a:solidFill>
                 <a:latin typeface="Segoe UI"/>
               </a:rPr>
-              <a:t>-42.3%</a:t>
+              <a:t>-40.1%</a:t>
             </a:r>
           </a:p>
         </p:txBody>
@@ -8971,7 +8971,7 @@
                 </a:solidFill>
                 <a:latin typeface="Segoe UI"/>
               </a:rPr>
-              <a:t>692</a:t>
+              <a:t>707</a:t>
             </a:r>
           </a:p>
         </p:txBody>
@@ -9005,7 +9005,7 @@
                 </a:solidFill>
                 <a:latin typeface="Segoe UI"/>
               </a:rPr>
-              <a:t>Rs 41,535</a:t>
+              <a:t>Rs 42,435</a:t>
             </a:r>
           </a:p>
         </p:txBody>
@@ -9039,7 +9039,7 @@
                 </a:solidFill>
                 <a:latin typeface="Segoe UI"/>
               </a:rPr>
-              <a:t>Rs -49,665</a:t>
+              <a:t>Rs -48,765</a:t>
             </a:r>
           </a:p>
         </p:txBody>
@@ -9073,7 +9073,7 @@
                 </a:solidFill>
                 <a:latin typeface="Segoe UI"/>
               </a:rPr>
-              <a:t>-54.5%</a:t>
+              <a:t>-53.5%</a:t>
             </a:r>
           </a:p>
         </p:txBody>
@@ -9141,7 +9141,7 @@
                 </a:solidFill>
                 <a:latin typeface="Segoe UI"/>
               </a:rPr>
-              <a:t>Total Rs 1,940,717 | P&amp;L Rs 194,292 (+11.1%) | Sharpe 0.18 | Vol 19.84% | VaR95 -1.77%/day</a:t>
+              <a:t>Total Rs 1,958,908 | P&amp;L Rs 212,483 (+12.2%) | Sharpe 0.36 | Vol 19.73% | VaR95 -1.75%/day</a:t>
             </a:r>
           </a:p>
         </p:txBody>

--- a/docs/pmr_daily.pptx
+++ b/docs/pmr_daily.pptx
@@ -3197,7 +3197,7 @@
                 </a:solidFill>
                 <a:latin typeface="Segoe UI"/>
               </a:rPr>
-              <a:t>Monday, 12 Oct 2026 10:07 SGT</a:t>
+              <a:t>Tuesday, 13 Oct 2026 11:22 SGT</a:t>
             </a:r>
           </a:p>
         </p:txBody>
@@ -3265,7 +3265,7 @@
                 </a:solidFill>
                 <a:latin typeface="Segoe UI"/>
               </a:rPr>
-              <a:t>RAG 13R / 14A / 19G   |   54.3% above 200DMA   |   Portfolio Rs 1,958,908 (+12.2%)</a:t>
+              <a:t>RAG 13R / 14A / 19G   |   56.5% above 200DMA   |   Portfolio Rs 1,931,602 (+11.5%)</a:t>
             </a:r>
           </a:p>
         </p:txBody>
@@ -3461,7 +3461,7 @@
                 </a:solidFill>
                 <a:latin typeface="Segoe UI"/>
               </a:rPr>
-              <a:t>Tesla</a:t>
+              <a:t>US Energy</a:t>
             </a:r>
           </a:p>
         </p:txBody>
@@ -3491,11 +3491,11 @@
             <a:r>
               <a:rPr sz="900" b="0">
                 <a:solidFill>
-                  <a:srgbClr val="F59E0B"/>
-                </a:solidFill>
-                <a:latin typeface="Segoe UI"/>
-              </a:rPr>
-              <a:t>TSLA · AMBER</a:t>
+                  <a:srgbClr val="22C55E"/>
+                </a:solidFill>
+                <a:latin typeface="Segoe UI"/>
+              </a:rPr>
+              <a:t>XLE · GREEN</a:t>
             </a:r>
           </a:p>
         </p:txBody>
@@ -3529,7 +3529,7 @@
                 </a:solidFill>
                 <a:latin typeface="Segoe UI"/>
               </a:rPr>
-              <a:t>+7.9%</a:t>
+              <a:t>+7.3%</a:t>
             </a:r>
           </a:p>
         </p:txBody>
@@ -3587,7 +3587,7 @@
                 </a:solidFill>
                 <a:latin typeface="Segoe UI"/>
               </a:rPr>
-              <a:t>US Energy</a:t>
+              <a:t>Tesla</a:t>
             </a:r>
           </a:p>
         </p:txBody>
@@ -3617,11 +3617,11 @@
             <a:r>
               <a:rPr sz="900" b="0">
                 <a:solidFill>
-                  <a:srgbClr val="22C55E"/>
-                </a:solidFill>
-                <a:latin typeface="Segoe UI"/>
-              </a:rPr>
-              <a:t>XLE · GREEN</a:t>
+                  <a:srgbClr val="F59E0B"/>
+                </a:solidFill>
+                <a:latin typeface="Segoe UI"/>
+              </a:rPr>
+              <a:t>TSLA · AMBER</a:t>
             </a:r>
           </a:p>
         </p:txBody>
@@ -3655,7 +3655,7 @@
                 </a:solidFill>
                 <a:latin typeface="Segoe UI"/>
               </a:rPr>
-              <a:t>+5.8%</a:t>
+              <a:t>+6.5%</a:t>
             </a:r>
           </a:p>
         </p:txBody>
@@ -3713,7 +3713,7 @@
                 </a:solidFill>
                 <a:latin typeface="Segoe UI"/>
               </a:rPr>
-              <a:t>Amazon</a:t>
+              <a:t>Microsoft</a:t>
             </a:r>
           </a:p>
         </p:txBody>
@@ -3747,7 +3747,7 @@
                 </a:solidFill>
                 <a:latin typeface="Segoe UI"/>
               </a:rPr>
-              <a:t>AMZN · GREEN</a:t>
+              <a:t>MSFT · GREEN</a:t>
             </a:r>
           </a:p>
         </p:txBody>
@@ -3781,7 +3781,7 @@
                 </a:solidFill>
                 <a:latin typeface="Segoe UI"/>
               </a:rPr>
-              <a:t>+5.3%</a:t>
+              <a:t>+5.5%</a:t>
             </a:r>
           </a:p>
         </p:txBody>
@@ -4193,7 +4193,7 @@
                 </a:solidFill>
                 <a:latin typeface="Segoe UI"/>
               </a:rPr>
-              <a:t>-5.5%</a:t>
+              <a:t>-9.7%</a:t>
             </a:r>
           </a:p>
         </p:txBody>
@@ -4319,7 +4319,7 @@
                 </a:solidFill>
                 <a:latin typeface="Segoe UI"/>
               </a:rPr>
-              <a:t>-5.3%</a:t>
+              <a:t>-7.3%</a:t>
             </a:r>
           </a:p>
         </p:txBody>
@@ -4503,7 +4503,7 @@
                 </a:solidFill>
                 <a:latin typeface="Segoe UI"/>
               </a:rPr>
-              <a:t>Reliance</a:t>
+              <a:t>Hang Seng</a:t>
             </a:r>
           </a:p>
         </p:txBody>
@@ -4533,11 +4533,11 @@
             <a:r>
               <a:rPr sz="900" b="0">
                 <a:solidFill>
-                  <a:srgbClr val="EF4444"/>
-                </a:solidFill>
-                <a:latin typeface="Segoe UI"/>
-              </a:rPr>
-              <a:t>RELIANCE.NS · RED</a:t>
+                  <a:srgbClr val="F59E0B"/>
+                </a:solidFill>
+                <a:latin typeface="Segoe UI"/>
+              </a:rPr>
+              <a:t>^HSI · AMBER</a:t>
             </a:r>
           </a:p>
         </p:txBody>
@@ -4571,7 +4571,7 @@
                 </a:solidFill>
                 <a:latin typeface="Segoe UI"/>
               </a:rPr>
-              <a:t>-1.4%</a:t>
+              <a:t>-2.4%</a:t>
             </a:r>
           </a:p>
         </p:txBody>
@@ -4697,7 +4697,7 @@
                 </a:solidFill>
                 <a:latin typeface="Segoe UI"/>
               </a:rPr>
-              <a:t>-1.1%</a:t>
+              <a:t>-1.4%</a:t>
             </a:r>
           </a:p>
         </p:txBody>
@@ -4967,7 +4967,7 @@
                 </a:solidFill>
                 <a:latin typeface="Segoe UI"/>
               </a:rPr>
-              <a:t>Microsoft</a:t>
+              <a:t>Apple</a:t>
             </a:r>
           </a:p>
         </p:txBody>
@@ -5103,7 +5103,7 @@
                 </a:solidFill>
                 <a:latin typeface="Segoe UI"/>
               </a:rPr>
-              <a:t>US Energy</a:t>
+              <a:t>Bitcoin</a:t>
             </a:r>
           </a:p>
         </p:txBody>
@@ -5171,7 +5171,7 @@
                 </a:solidFill>
                 <a:latin typeface="Segoe UI"/>
               </a:rPr>
-              <a:t>95%</a:t>
+              <a:t>84%</a:t>
             </a:r>
           </a:p>
         </p:txBody>
@@ -5205,7 +5205,7 @@
                 </a:solidFill>
                 <a:latin typeface="Segoe UI"/>
               </a:rPr>
-              <a:t>above 200DMA · golden cross (50&gt;200) · MACD bullish</a:t>
+              <a:t>above 200DMA · golden cross (50&gt;200) · MACD bearish</a:t>
             </a:r>
           </a:p>
         </p:txBody>
@@ -5239,7 +5239,7 @@
                 </a:solidFill>
                 <a:latin typeface="Segoe UI"/>
               </a:rPr>
-              <a:t>Bitcoin</a:t>
+              <a:t>Natural Gas</a:t>
             </a:r>
           </a:p>
         </p:txBody>
@@ -5307,7 +5307,7 @@
                 </a:solidFill>
                 <a:latin typeface="Segoe UI"/>
               </a:rPr>
-              <a:t>85%</a:t>
+              <a:t>90%</a:t>
             </a:r>
           </a:p>
         </p:txBody>
@@ -5341,7 +5341,7 @@
                 </a:solidFill>
                 <a:latin typeface="Segoe UI"/>
               </a:rPr>
-              <a:t>above 200DMA · golden cross (50&gt;200) · MACD bearish</a:t>
+              <a:t>above 200DMA · golden cross (50&gt;200) · MACD bullish</a:t>
             </a:r>
           </a:p>
         </p:txBody>
@@ -5375,7 +5375,7 @@
                 </a:solidFill>
                 <a:latin typeface="Segoe UI"/>
               </a:rPr>
-              <a:t>Apple</a:t>
+              <a:t>US Technology</a:t>
             </a:r>
           </a:p>
         </p:txBody>
@@ -5443,7 +5443,7 @@
                 </a:solidFill>
                 <a:latin typeface="Segoe UI"/>
               </a:rPr>
-              <a:t>83%</a:t>
+              <a:t>82%</a:t>
             </a:r>
           </a:p>
         </p:txBody>
@@ -5511,7 +5511,7 @@
                 </a:solidFill>
                 <a:latin typeface="Segoe UI"/>
               </a:rPr>
-              <a:t>Natural Gas</a:t>
+              <a:t>S&amp;P 500</a:t>
             </a:r>
           </a:p>
         </p:txBody>
@@ -5579,7 +5579,7 @@
                 </a:solidFill>
                 <a:latin typeface="Segoe UI"/>
               </a:rPr>
-              <a:t>89%</a:t>
+              <a:t>81%</a:t>
             </a:r>
           </a:p>
         </p:txBody>
@@ -5647,7 +5647,7 @@
                 </a:solidFill>
                 <a:latin typeface="Segoe UI"/>
               </a:rPr>
-              <a:t>Solana</a:t>
+              <a:t>Copper</a:t>
             </a:r>
           </a:p>
         </p:txBody>
@@ -5715,7 +5715,7 @@
                 </a:solidFill>
                 <a:latin typeface="Segoe UI"/>
               </a:rPr>
-              <a:t>83%</a:t>
+              <a:t>93%</a:t>
             </a:r>
           </a:p>
         </p:txBody>
@@ -5749,7 +5749,7 @@
                 </a:solidFill>
                 <a:latin typeface="Segoe UI"/>
               </a:rPr>
-              <a:t>above 200DMA · golden cross (50&gt;200) · MACD bearish</a:t>
+              <a:t>above 200DMA · golden cross (50&gt;200) · MACD bullish</a:t>
             </a:r>
           </a:p>
         </p:txBody>
@@ -5783,7 +5783,7 @@
                 </a:solidFill>
                 <a:latin typeface="Segoe UI"/>
               </a:rPr>
-              <a:t>US Technology</a:t>
+              <a:t>Ethereum</a:t>
             </a:r>
           </a:p>
         </p:txBody>
@@ -5851,7 +5851,7 @@
                 </a:solidFill>
                 <a:latin typeface="Segoe UI"/>
               </a:rPr>
-              <a:t>83%</a:t>
+              <a:t>81%</a:t>
             </a:r>
           </a:p>
         </p:txBody>
@@ -5919,7 +5919,7 @@
                 </a:solidFill>
                 <a:latin typeface="Segoe UI"/>
               </a:rPr>
-              <a:t>USD/INR</a:t>
+              <a:t>Solana</a:t>
             </a:r>
           </a:p>
         </p:txBody>
@@ -5987,7 +5987,7 @@
                 </a:solidFill>
                 <a:latin typeface="Segoe UI"/>
               </a:rPr>
-              <a:t>94%</a:t>
+              <a:t>81%</a:t>
             </a:r>
           </a:p>
         </p:txBody>
@@ -6021,7 +6021,7 @@
                 </a:solidFill>
                 <a:latin typeface="Segoe UI"/>
               </a:rPr>
-              <a:t>above 200DMA · golden cross (50&gt;200) · MACD bullish</a:t>
+              <a:t>above 200DMA · golden cross (50&gt;200) · MACD bearish</a:t>
             </a:r>
           </a:p>
         </p:txBody>
@@ -6055,7 +6055,7 @@
                 </a:solidFill>
                 <a:latin typeface="Segoe UI"/>
               </a:rPr>
-              <a:t>Dollar Index</a:t>
+              <a:t>Nasdaq 100</a:t>
             </a:r>
           </a:p>
         </p:txBody>
@@ -6123,7 +6123,7 @@
                 </a:solidFill>
                 <a:latin typeface="Segoe UI"/>
               </a:rPr>
-              <a:t>82%</a:t>
+              <a:t>81%</a:t>
             </a:r>
           </a:p>
         </p:txBody>
@@ -6191,7 +6191,7 @@
                 </a:solidFill>
                 <a:latin typeface="Segoe UI"/>
               </a:rPr>
-              <a:t>Copper</a:t>
+              <a:t>US Energy</a:t>
             </a:r>
           </a:p>
         </p:txBody>
@@ -6225,7 +6225,7 @@
                 </a:solidFill>
                 <a:latin typeface="Segoe UI"/>
               </a:rPr>
-              <a:t>STRONG BUY</a:t>
+              <a:t>BUY</a:t>
             </a:r>
           </a:p>
         </p:txBody>
@@ -6259,7 +6259,7 @@
                 </a:solidFill>
                 <a:latin typeface="Segoe UI"/>
               </a:rPr>
-              <a:t>94%</a:t>
+              <a:t>92%</a:t>
             </a:r>
           </a:p>
         </p:txBody>
@@ -6327,7 +6327,7 @@
                 </a:solidFill>
                 <a:latin typeface="Segoe UI"/>
               </a:rPr>
-              <a:t>Nasdaq 100</a:t>
+              <a:t>Microsoft</a:t>
             </a:r>
           </a:p>
         </p:txBody>
@@ -6361,7 +6361,7 @@
                 </a:solidFill>
                 <a:latin typeface="Segoe UI"/>
               </a:rPr>
-              <a:t>STRONG BUY</a:t>
+              <a:t>BUY</a:t>
             </a:r>
           </a:p>
         </p:txBody>
@@ -6395,7 +6395,7 @@
                 </a:solidFill>
                 <a:latin typeface="Segoe UI"/>
               </a:rPr>
-              <a:t>82%</a:t>
+              <a:t>92%</a:t>
             </a:r>
           </a:p>
         </p:txBody>
@@ -6429,7 +6429,7 @@
                 </a:solidFill>
                 <a:latin typeface="Segoe UI"/>
               </a:rPr>
-              <a:t>above 200DMA · golden cross (50&gt;200) · MACD bearish</a:t>
+              <a:t>above 200DMA · golden cross (50&gt;200) · MACD bullish</a:t>
             </a:r>
           </a:p>
         </p:txBody>
@@ -6463,7 +6463,7 @@
                 </a:solidFill>
                 <a:latin typeface="Segoe UI"/>
               </a:rPr>
-              <a:t>S&amp;P 500</a:t>
+              <a:t>Dollar Index</a:t>
             </a:r>
           </a:p>
         </p:txBody>
@@ -6497,7 +6497,7 @@
                 </a:solidFill>
                 <a:latin typeface="Segoe UI"/>
               </a:rPr>
-              <a:t>STRONG BUY</a:t>
+              <a:t>BUY</a:t>
             </a:r>
           </a:p>
         </p:txBody>
@@ -6531,7 +6531,7 @@
                 </a:solidFill>
                 <a:latin typeface="Segoe UI"/>
               </a:rPr>
-              <a:t>81%</a:t>
+              <a:t>76%</a:t>
             </a:r>
           </a:p>
         </p:txBody>
@@ -6565,7 +6565,7 @@
                 </a:solidFill>
                 <a:latin typeface="Segoe UI"/>
               </a:rPr>
-              <a:t>above 200DMA · golden cross (50&gt;200) · MACD bullish</a:t>
+              <a:t>above 200DMA · golden cross (50&gt;200) · MACD bearish</a:t>
             </a:r>
           </a:p>
         </p:txBody>
@@ -6659,7 +6659,7 @@
                 </a:solidFill>
                 <a:latin typeface="Segoe UI"/>
               </a:rPr>
-              <a:t>Base currency INR · USD/INR 96.78</a:t>
+              <a:t>Base currency INR · USD/INR 95.76</a:t>
             </a:r>
           </a:p>
         </p:txBody>
@@ -7067,7 +7067,7 @@
                 </a:solidFill>
                 <a:latin typeface="Segoe UI"/>
               </a:rPr>
-              <a:t>83,600</a:t>
+              <a:t>82,761</a:t>
             </a:r>
           </a:p>
         </p:txBody>
@@ -7101,7 +7101,7 @@
                 </a:solidFill>
                 <a:latin typeface="Segoe UI"/>
               </a:rPr>
-              <a:t>Rs 809,083</a:t>
+              <a:t>Rs 792,518</a:t>
             </a:r>
           </a:p>
         </p:txBody>
@@ -7135,7 +7135,7 @@
                 </a:solidFill>
                 <a:latin typeface="Segoe UI"/>
               </a:rPr>
-              <a:t>Rs 228,403</a:t>
+              <a:t>Rs 217,958</a:t>
             </a:r>
           </a:p>
         </p:txBody>
@@ -7169,7 +7169,7 @@
                 </a:solidFill>
                 <a:latin typeface="Segoe UI"/>
               </a:rPr>
-              <a:t>+39.3%</a:t>
+              <a:t>+37.9%</a:t>
             </a:r>
           </a:p>
         </p:txBody>
@@ -7199,11 +7199,11 @@
             <a:r>
               <a:rPr sz="1000" b="0">
                 <a:solidFill>
-                  <a:srgbClr val="22C55E"/>
-                </a:solidFill>
-                <a:latin typeface="Segoe UI"/>
-              </a:rPr>
-              <a:t>+0.8%</a:t>
+                  <a:srgbClr val="EF4444"/>
+                </a:solidFill>
+                <a:latin typeface="Segoe UI"/>
+              </a:rPr>
+              <a:t>-1.1%</a:t>
             </a:r>
           </a:p>
         </p:txBody>
@@ -7339,7 +7339,7 @@
                 </a:solidFill>
                 <a:latin typeface="Segoe UI"/>
               </a:rPr>
-              <a:t>4,234</a:t>
+              <a:t>4,203</a:t>
             </a:r>
           </a:p>
         </p:txBody>
@@ -7373,7 +7373,7 @@
                 </a:solidFill>
                 <a:latin typeface="Segoe UI"/>
               </a:rPr>
-              <a:t>Rs 409,786</a:t>
+              <a:t>Rs 402,470</a:t>
             </a:r>
           </a:p>
         </p:txBody>
@@ -7407,7 +7407,7 @@
                 </a:solidFill>
                 <a:latin typeface="Segoe UI"/>
               </a:rPr>
-              <a:t>Rs 187,192</a:t>
+              <a:t>Rs 182,222</a:t>
             </a:r>
           </a:p>
         </p:txBody>
@@ -7441,7 +7441,7 @@
                 </a:solidFill>
                 <a:latin typeface="Segoe UI"/>
               </a:rPr>
-              <a:t>+84.1%</a:t>
+              <a:t>+82.7%</a:t>
             </a:r>
           </a:p>
         </p:txBody>
@@ -7611,7 +7611,7 @@
                 </a:solidFill>
                 <a:latin typeface="Segoe UI"/>
               </a:rPr>
-              <a:t>337</a:t>
+              <a:t>341</a:t>
             </a:r>
           </a:p>
         </p:txBody>
@@ -7645,7 +7645,7 @@
                 </a:solidFill>
                 <a:latin typeface="Segoe UI"/>
               </a:rPr>
-              <a:t>Rs 325,800</a:t>
+              <a:t>Rs 326,513</a:t>
             </a:r>
           </a:p>
         </p:txBody>
@@ -7679,7 +7679,7 @@
                 </a:solidFill>
                 <a:latin typeface="Segoe UI"/>
               </a:rPr>
-              <a:t>Rs 146,757</a:t>
+              <a:t>Rs 149,357</a:t>
             </a:r>
           </a:p>
         </p:txBody>
@@ -7713,7 +7713,7 @@
                 </a:solidFill>
                 <a:latin typeface="Segoe UI"/>
               </a:rPr>
-              <a:t>+82.0%</a:t>
+              <a:t>+84.3%</a:t>
             </a:r>
           </a:p>
         </p:txBody>
@@ -7883,7 +7883,7 @@
                 </a:solidFill>
                 <a:latin typeface="Segoe UI"/>
               </a:rPr>
-              <a:t>229</a:t>
+              <a:t>226</a:t>
             </a:r>
           </a:p>
         </p:txBody>
@@ -7917,7 +7917,7 @@
                 </a:solidFill>
                 <a:latin typeface="Segoe UI"/>
               </a:rPr>
-              <a:t>Rs 177,518</a:t>
+              <a:t>Rs 173,379</a:t>
             </a:r>
           </a:p>
         </p:txBody>
@@ -7951,7 +7951,7 @@
                 </a:solidFill>
                 <a:latin typeface="Segoe UI"/>
               </a:rPr>
-              <a:t>Rs -170,890</a:t>
+              <a:t>Rs -171,357</a:t>
             </a:r>
           </a:p>
         </p:txBody>
@@ -7985,7 +7985,7 @@
                 </a:solidFill>
                 <a:latin typeface="Segoe UI"/>
               </a:rPr>
-              <a:t>-49.0%</a:t>
+              <a:t>-49.7%</a:t>
             </a:r>
           </a:p>
         </p:txBody>
@@ -9141,7 +9141,7 @@
                 </a:solidFill>
                 <a:latin typeface="Segoe UI"/>
               </a:rPr>
-              <a:t>Total Rs 1,958,908 | P&amp;L Rs 212,483 (+12.2%) | Sharpe 0.36 | Vol 19.73% | VaR95 -1.75%/day</a:t>
+              <a:t>Total Rs 1,931,602 | P&amp;L Rs 199,202 (+11.5%) | Sharpe 0.35 | Vol 19.64% | VaR95 -1.73%/day</a:t>
             </a:r>
           </a:p>
         </p:txBody>

--- a/docs/pmr_daily.pptx
+++ b/docs/pmr_daily.pptx
@@ -3197,7 +3197,7 @@
                 </a:solidFill>
                 <a:latin typeface="Segoe UI"/>
               </a:rPr>
-              <a:t>Tuesday, 13 Oct 2026 11:22 SGT</a:t>
+              <a:t>Wednesday, 14 Oct 2026 09:38 SGT</a:t>
             </a:r>
           </a:p>
         </p:txBody>
@@ -3265,7 +3265,7 @@
                 </a:solidFill>
                 <a:latin typeface="Segoe UI"/>
               </a:rPr>
-              <a:t>RAG 13R / 14A / 19G   |   56.5% above 200DMA   |   Portfolio Rs 1,931,602 (+11.5%)</a:t>
+              <a:t>RAG 14R / 13A / 19G   |   58.7% above 200DMA   |   Portfolio Rs 1,941,837 (+12.1%)</a:t>
             </a:r>
           </a:p>
         </p:txBody>
@@ -3461,7 +3461,7 @@
                 </a:solidFill>
                 <a:latin typeface="Segoe UI"/>
               </a:rPr>
-              <a:t>US Energy</a:t>
+              <a:t>TCS</a:t>
             </a:r>
           </a:p>
         </p:txBody>
@@ -3491,11 +3491,11 @@
             <a:r>
               <a:rPr sz="900" b="0">
                 <a:solidFill>
-                  <a:srgbClr val="22C55E"/>
-                </a:solidFill>
-                <a:latin typeface="Segoe UI"/>
-              </a:rPr>
-              <a:t>XLE · GREEN</a:t>
+                  <a:srgbClr val="EF4444"/>
+                </a:solidFill>
+                <a:latin typeface="Segoe UI"/>
+              </a:rPr>
+              <a:t>TCS.NS · RED</a:t>
             </a:r>
           </a:p>
         </p:txBody>
@@ -3529,7 +3529,7 @@
                 </a:solidFill>
                 <a:latin typeface="Segoe UI"/>
               </a:rPr>
-              <a:t>+7.3%</a:t>
+              <a:t>+10.7%</a:t>
             </a:r>
           </a:p>
         </p:txBody>
@@ -3587,7 +3587,7 @@
                 </a:solidFill>
                 <a:latin typeface="Segoe UI"/>
               </a:rPr>
-              <a:t>Tesla</a:t>
+              <a:t>Natural Gas</a:t>
             </a:r>
           </a:p>
         </p:txBody>
@@ -3617,11 +3617,11 @@
             <a:r>
               <a:rPr sz="900" b="0">
                 <a:solidFill>
-                  <a:srgbClr val="F59E0B"/>
-                </a:solidFill>
-                <a:latin typeface="Segoe UI"/>
-              </a:rPr>
-              <a:t>TSLA · AMBER</a:t>
+                  <a:srgbClr val="22C55E"/>
+                </a:solidFill>
+                <a:latin typeface="Segoe UI"/>
+              </a:rPr>
+              <a:t>NG=F · GREEN</a:t>
             </a:r>
           </a:p>
         </p:txBody>
@@ -3655,7 +3655,7 @@
                 </a:solidFill>
                 <a:latin typeface="Segoe UI"/>
               </a:rPr>
-              <a:t>+6.5%</a:t>
+              <a:t>+9.9%</a:t>
             </a:r>
           </a:p>
         </p:txBody>
@@ -3713,7 +3713,7 @@
                 </a:solidFill>
                 <a:latin typeface="Segoe UI"/>
               </a:rPr>
-              <a:t>Microsoft</a:t>
+              <a:t>US Energy</a:t>
             </a:r>
           </a:p>
         </p:txBody>
@@ -3747,7 +3747,7 @@
                 </a:solidFill>
                 <a:latin typeface="Segoe UI"/>
               </a:rPr>
-              <a:t>MSFT · GREEN</a:t>
+              <a:t>XLE · GREEN</a:t>
             </a:r>
           </a:p>
         </p:txBody>
@@ -3781,7 +3781,7 @@
                 </a:solidFill>
                 <a:latin typeface="Segoe UI"/>
               </a:rPr>
-              <a:t>+5.5%</a:t>
+              <a:t>+9.3%</a:t>
             </a:r>
           </a:p>
         </p:txBody>
@@ -3839,7 +3839,7 @@
                 </a:solidFill>
                 <a:latin typeface="Segoe UI"/>
               </a:rPr>
-              <a:t>TCS</a:t>
+              <a:t>NIFTY IT</a:t>
             </a:r>
           </a:p>
         </p:txBody>
@@ -3873,7 +3873,7 @@
                 </a:solidFill>
                 <a:latin typeface="Segoe UI"/>
               </a:rPr>
-              <a:t>TCS.NS · RED</a:t>
+              <a:t>^CNXIT · RED</a:t>
             </a:r>
           </a:p>
         </p:txBody>
@@ -3907,7 +3907,7 @@
                 </a:solidFill>
                 <a:latin typeface="Segoe UI"/>
               </a:rPr>
-              <a:t>+5.1%</a:t>
+              <a:t>+7.7%</a:t>
             </a:r>
           </a:p>
         </p:txBody>
@@ -3965,7 +3965,7 @@
                 </a:solidFill>
                 <a:latin typeface="Segoe UI"/>
               </a:rPr>
-              <a:t>Natural Gas</a:t>
+              <a:t>Infosys</a:t>
             </a:r>
           </a:p>
         </p:txBody>
@@ -3995,11 +3995,11 @@
             <a:r>
               <a:rPr sz="900" b="0">
                 <a:solidFill>
-                  <a:srgbClr val="F59E0B"/>
-                </a:solidFill>
-                <a:latin typeface="Segoe UI"/>
-              </a:rPr>
-              <a:t>NG=F · AMBER</a:t>
+                  <a:srgbClr val="EF4444"/>
+                </a:solidFill>
+                <a:latin typeface="Segoe UI"/>
+              </a:rPr>
+              <a:t>INFY.NS · RED</a:t>
             </a:r>
           </a:p>
         </p:txBody>
@@ -4033,7 +4033,7 @@
                 </a:solidFill>
                 <a:latin typeface="Segoe UI"/>
               </a:rPr>
-              <a:t>+4.4%</a:t>
+              <a:t>+6.8%</a:t>
             </a:r>
           </a:p>
         </p:txBody>
@@ -4193,7 +4193,7 @@
                 </a:solidFill>
                 <a:latin typeface="Segoe UI"/>
               </a:rPr>
-              <a:t>-9.7%</a:t>
+              <a:t>-9.3%</a:t>
             </a:r>
           </a:p>
         </p:txBody>
@@ -4319,7 +4319,7 @@
                 </a:solidFill>
                 <a:latin typeface="Segoe UI"/>
               </a:rPr>
-              <a:t>-7.3%</a:t>
+              <a:t>-6.9%</a:t>
             </a:r>
           </a:p>
         </p:txBody>
@@ -4503,7 +4503,7 @@
                 </a:solidFill>
                 <a:latin typeface="Segoe UI"/>
               </a:rPr>
-              <a:t>Hang Seng</a:t>
+              <a:t>Reliance</a:t>
             </a:r>
           </a:p>
         </p:txBody>
@@ -4533,11 +4533,11 @@
             <a:r>
               <a:rPr sz="900" b="0">
                 <a:solidFill>
-                  <a:srgbClr val="F59E0B"/>
-                </a:solidFill>
-                <a:latin typeface="Segoe UI"/>
-              </a:rPr>
-              <a:t>^HSI · AMBER</a:t>
+                  <a:srgbClr val="EF4444"/>
+                </a:solidFill>
+                <a:latin typeface="Segoe UI"/>
+              </a:rPr>
+              <a:t>RELIANCE.NS · RED</a:t>
             </a:r>
           </a:p>
         </p:txBody>
@@ -4571,7 +4571,7 @@
                 </a:solidFill>
                 <a:latin typeface="Segoe UI"/>
               </a:rPr>
-              <a:t>-2.4%</a:t>
+              <a:t>-1.7%</a:t>
             </a:r>
           </a:p>
         </p:txBody>
@@ -4629,7 +4629,7 @@
                 </a:solidFill>
                 <a:latin typeface="Segoe UI"/>
               </a:rPr>
-              <a:t>EUR/USD</a:t>
+              <a:t>Silver</a:t>
             </a:r>
           </a:p>
         </p:txBody>
@@ -4663,7 +4663,7 @@
                 </a:solidFill>
                 <a:latin typeface="Segoe UI"/>
               </a:rPr>
-              <a:t>EURUSD=X · RED</a:t>
+              <a:t>SI=F · RED</a:t>
             </a:r>
           </a:p>
         </p:txBody>
@@ -4697,7 +4697,7 @@
                 </a:solidFill>
                 <a:latin typeface="Segoe UI"/>
               </a:rPr>
-              <a:t>-1.4%</a:t>
+              <a:t>-1.2%</a:t>
             </a:r>
           </a:p>
         </p:txBody>
@@ -4837,7 +4837,7 @@
         <p:spPr>
           <a:xfrm>
             <a:off x="457200" y="1188720"/>
-            <a:ext cx="11247120" cy="5513499"/>
+            <a:ext cx="11247120" cy="5576390"/>
           </a:xfrm>
           <a:prstGeom prst="rect">
             <a:avLst/>
@@ -5103,7 +5103,7 @@
                 </a:solidFill>
                 <a:latin typeface="Segoe UI"/>
               </a:rPr>
-              <a:t>Bitcoin</a:t>
+              <a:t>Natural Gas</a:t>
             </a:r>
           </a:p>
         </p:txBody>
@@ -5171,7 +5171,7 @@
                 </a:solidFill>
                 <a:latin typeface="Segoe UI"/>
               </a:rPr>
-              <a:t>84%</a:t>
+              <a:t>95%</a:t>
             </a:r>
           </a:p>
         </p:txBody>
@@ -5205,7 +5205,7 @@
                 </a:solidFill>
                 <a:latin typeface="Segoe UI"/>
               </a:rPr>
-              <a:t>above 200DMA · golden cross (50&gt;200) · MACD bearish</a:t>
+              <a:t>above 200DMA · golden cross (50&gt;200) · MACD bullish</a:t>
             </a:r>
           </a:p>
         </p:txBody>
@@ -5239,7 +5239,7 @@
                 </a:solidFill>
                 <a:latin typeface="Segoe UI"/>
               </a:rPr>
-              <a:t>Natural Gas</a:t>
+              <a:t>Bitcoin</a:t>
             </a:r>
           </a:p>
         </p:txBody>
@@ -5307,7 +5307,7 @@
                 </a:solidFill>
                 <a:latin typeface="Segoe UI"/>
               </a:rPr>
-              <a:t>90%</a:t>
+              <a:t>84%</a:t>
             </a:r>
           </a:p>
         </p:txBody>
@@ -5341,7 +5341,7 @@
                 </a:solidFill>
                 <a:latin typeface="Segoe UI"/>
               </a:rPr>
-              <a:t>above 200DMA · golden cross (50&gt;200) · MACD bullish</a:t>
+              <a:t>above 200DMA · golden cross (50&gt;200) · MACD bearish</a:t>
             </a:r>
           </a:p>
         </p:txBody>
@@ -5443,7 +5443,7 @@
                 </a:solidFill>
                 <a:latin typeface="Segoe UI"/>
               </a:rPr>
-              <a:t>82%</a:t>
+              <a:t>81%</a:t>
             </a:r>
           </a:p>
         </p:txBody>
@@ -5511,7 +5511,7 @@
                 </a:solidFill>
                 <a:latin typeface="Segoe UI"/>
               </a:rPr>
-              <a:t>S&amp;P 500</a:t>
+              <a:t>Copper</a:t>
             </a:r>
           </a:p>
         </p:txBody>
@@ -5579,7 +5579,7 @@
                 </a:solidFill>
                 <a:latin typeface="Segoe UI"/>
               </a:rPr>
-              <a:t>81%</a:t>
+              <a:t>93%</a:t>
             </a:r>
           </a:p>
         </p:txBody>
@@ -5647,7 +5647,7 @@
                 </a:solidFill>
                 <a:latin typeface="Segoe UI"/>
               </a:rPr>
-              <a:t>Copper</a:t>
+              <a:t>Crude Oil WTI</a:t>
             </a:r>
           </a:p>
         </p:txBody>
@@ -5715,7 +5715,7 @@
                 </a:solidFill>
                 <a:latin typeface="Segoe UI"/>
               </a:rPr>
-              <a:t>93%</a:t>
+              <a:t>81%</a:t>
             </a:r>
           </a:p>
         </p:txBody>
@@ -5783,7 +5783,7 @@
                 </a:solidFill>
                 <a:latin typeface="Segoe UI"/>
               </a:rPr>
-              <a:t>Ethereum</a:t>
+              <a:t>S&amp;P 500</a:t>
             </a:r>
           </a:p>
         </p:txBody>
@@ -5885,7 +5885,7 @@
                 </a:solidFill>
                 <a:latin typeface="Segoe UI"/>
               </a:rPr>
-              <a:t>above 200DMA · golden cross (50&gt;200) · MACD bearish</a:t>
+              <a:t>above 200DMA · golden cross (50&gt;200) · MACD bullish</a:t>
             </a:r>
           </a:p>
         </p:txBody>
@@ -5919,7 +5919,7 @@
                 </a:solidFill>
                 <a:latin typeface="Segoe UI"/>
               </a:rPr>
-              <a:t>Solana</a:t>
+              <a:t>Ethereum</a:t>
             </a:r>
           </a:p>
         </p:txBody>
@@ -5987,7 +5987,7 @@
                 </a:solidFill>
                 <a:latin typeface="Segoe UI"/>
               </a:rPr>
-              <a:t>81%</a:t>
+              <a:t>80%</a:t>
             </a:r>
           </a:p>
         </p:txBody>
@@ -6055,7 +6055,7 @@
                 </a:solidFill>
                 <a:latin typeface="Segoe UI"/>
               </a:rPr>
-              <a:t>Nasdaq 100</a:t>
+              <a:t>Solana</a:t>
             </a:r>
           </a:p>
         </p:txBody>
@@ -6123,7 +6123,7 @@
                 </a:solidFill>
                 <a:latin typeface="Segoe UI"/>
               </a:rPr>
-              <a:t>81%</a:t>
+              <a:t>80%</a:t>
             </a:r>
           </a:p>
         </p:txBody>
@@ -6191,7 +6191,7 @@
                 </a:solidFill>
                 <a:latin typeface="Segoe UI"/>
               </a:rPr>
-              <a:t>US Energy</a:t>
+              <a:t>Dollar Index</a:t>
             </a:r>
           </a:p>
         </p:txBody>
@@ -6225,7 +6225,7 @@
                 </a:solidFill>
                 <a:latin typeface="Segoe UI"/>
               </a:rPr>
-              <a:t>BUY</a:t>
+              <a:t>STRONG BUY</a:t>
             </a:r>
           </a:p>
         </p:txBody>
@@ -6259,7 +6259,7 @@
                 </a:solidFill>
                 <a:latin typeface="Segoe UI"/>
               </a:rPr>
-              <a:t>92%</a:t>
+              <a:t>80%</a:t>
             </a:r>
           </a:p>
         </p:txBody>
@@ -6293,7 +6293,7 @@
                 </a:solidFill>
                 <a:latin typeface="Segoe UI"/>
               </a:rPr>
-              <a:t>above 200DMA · golden cross (50&gt;200) · MACD bullish</a:t>
+              <a:t>above 200DMA · golden cross (50&gt;200) · MACD bearish</a:t>
             </a:r>
           </a:p>
         </p:txBody>
@@ -6463,7 +6463,7 @@
                 </a:solidFill>
                 <a:latin typeface="Segoe UI"/>
               </a:rPr>
-              <a:t>Dollar Index</a:t>
+              <a:t>US Energy</a:t>
             </a:r>
           </a:p>
         </p:txBody>
@@ -6531,7 +6531,7 @@
                 </a:solidFill>
                 <a:latin typeface="Segoe UI"/>
               </a:rPr>
-              <a:t>76%</a:t>
+              <a:t>92%</a:t>
             </a:r>
           </a:p>
         </p:txBody>
@@ -6565,7 +6565,7 @@
                 </a:solidFill>
                 <a:latin typeface="Segoe UI"/>
               </a:rPr>
-              <a:t>above 200DMA · golden cross (50&gt;200) · MACD bearish</a:t>
+              <a:t>above 200DMA · golden cross (50&gt;200) · MACD bullish</a:t>
             </a:r>
           </a:p>
         </p:txBody>
@@ -6659,7 +6659,7 @@
                 </a:solidFill>
                 <a:latin typeface="Segoe UI"/>
               </a:rPr>
-              <a:t>Base currency INR · USD/INR 95.76</a:t>
+              <a:t>Base currency INR · USD/INR 95.78</a:t>
             </a:r>
           </a:p>
         </p:txBody>
@@ -7067,7 +7067,7 @@
                 </a:solidFill>
                 <a:latin typeface="Segoe UI"/>
               </a:rPr>
-              <a:t>82,761</a:t>
+              <a:t>83,153</a:t>
             </a:r>
           </a:p>
         </p:txBody>
@@ -7101,7 +7101,7 @@
                 </a:solidFill>
                 <a:latin typeface="Segoe UI"/>
               </a:rPr>
-              <a:t>Rs 792,518</a:t>
+              <a:t>Rs 796,405</a:t>
             </a:r>
           </a:p>
         </p:txBody>
@@ -7135,7 +7135,7 @@
                 </a:solidFill>
                 <a:latin typeface="Segoe UI"/>
               </a:rPr>
-              <a:t>Rs 217,958</a:t>
+              <a:t>Rs 221,749</a:t>
             </a:r>
           </a:p>
         </p:txBody>
@@ -7169,7 +7169,7 @@
                 </a:solidFill>
                 <a:latin typeface="Segoe UI"/>
               </a:rPr>
-              <a:t>+37.9%</a:t>
+              <a:t>+38.6%</a:t>
             </a:r>
           </a:p>
         </p:txBody>
@@ -7199,11 +7199,11 @@
             <a:r>
               <a:rPr sz="1000" b="0">
                 <a:solidFill>
-                  <a:srgbClr val="EF4444"/>
-                </a:solidFill>
-                <a:latin typeface="Segoe UI"/>
-              </a:rPr>
-              <a:t>-1.1%</a:t>
+                  <a:srgbClr val="22C55E"/>
+                </a:solidFill>
+                <a:latin typeface="Segoe UI"/>
+              </a:rPr>
+              <a:t>+1.7%</a:t>
             </a:r>
           </a:p>
         </p:txBody>
@@ -7339,7 +7339,7 @@
                 </a:solidFill>
                 <a:latin typeface="Segoe UI"/>
               </a:rPr>
-              <a:t>4,203</a:t>
+              <a:t>4,186</a:t>
             </a:r>
           </a:p>
         </p:txBody>
@@ -7373,7 +7373,7 @@
                 </a:solidFill>
                 <a:latin typeface="Segoe UI"/>
               </a:rPr>
-              <a:t>Rs 402,470</a:t>
+              <a:t>Rs 400,908</a:t>
             </a:r>
           </a:p>
         </p:txBody>
@@ -7407,7 +7407,7 @@
                 </a:solidFill>
                 <a:latin typeface="Segoe UI"/>
               </a:rPr>
-              <a:t>Rs 182,222</a:t>
+              <a:t>Rs 180,624</a:t>
             </a:r>
           </a:p>
         </p:txBody>
@@ -7441,7 +7441,7 @@
                 </a:solidFill>
                 <a:latin typeface="Segoe UI"/>
               </a:rPr>
-              <a:t>+82.7%</a:t>
+              <a:t>+82.0%</a:t>
             </a:r>
           </a:p>
         </p:txBody>
@@ -7645,7 +7645,7 @@
                 </a:solidFill>
                 <a:latin typeface="Segoe UI"/>
               </a:rPr>
-              <a:t>Rs 326,513</a:t>
+              <a:t>Rs 326,854</a:t>
             </a:r>
           </a:p>
         </p:txBody>
@@ -7679,7 +7679,7 @@
                 </a:solidFill>
                 <a:latin typeface="Segoe UI"/>
               </a:rPr>
-              <a:t>Rs 149,357</a:t>
+              <a:t>Rs 149,669</a:t>
             </a:r>
           </a:p>
         </p:txBody>
@@ -7713,7 +7713,7 @@
                 </a:solidFill>
                 <a:latin typeface="Segoe UI"/>
               </a:rPr>
-              <a:t>+84.3%</a:t>
+              <a:t>+84.5%</a:t>
             </a:r>
           </a:p>
         </p:txBody>
@@ -7883,7 +7883,7 @@
                 </a:solidFill>
                 <a:latin typeface="Segoe UI"/>
               </a:rPr>
-              <a:t>226</a:t>
+              <a:t>229</a:t>
             </a:r>
           </a:p>
         </p:txBody>
@@ -7917,7 +7917,7 @@
                 </a:solidFill>
                 <a:latin typeface="Segoe UI"/>
               </a:rPr>
-              <a:t>Rs 173,379</a:t>
+              <a:t>Rs 175,094</a:t>
             </a:r>
           </a:p>
         </p:txBody>
@@ -7951,7 +7951,7 @@
                 </a:solidFill>
                 <a:latin typeface="Segoe UI"/>
               </a:rPr>
-              <a:t>Rs -171,357</a:t>
+              <a:t>Rs -169,700</a:t>
             </a:r>
           </a:p>
         </p:txBody>
@@ -7985,7 +7985,7 @@
                 </a:solidFill>
                 <a:latin typeface="Segoe UI"/>
               </a:rPr>
-              <a:t>-49.7%</a:t>
+              <a:t>-49.2%</a:t>
             </a:r>
           </a:p>
         </p:txBody>
@@ -8155,7 +8155,7 @@
                 </a:solidFill>
                 <a:latin typeface="Segoe UI"/>
               </a:rPr>
-              <a:t>1,023</a:t>
+              <a:t>1,062</a:t>
             </a:r>
           </a:p>
         </p:txBody>
@@ -8189,7 +8189,7 @@
                 </a:solidFill>
                 <a:latin typeface="Segoe UI"/>
               </a:rPr>
-              <a:t>Rs 81,872</a:t>
+              <a:t>Rs 84,968</a:t>
             </a:r>
           </a:p>
         </p:txBody>
@@ -8223,7 +8223,7 @@
                 </a:solidFill>
                 <a:latin typeface="Segoe UI"/>
               </a:rPr>
-              <a:t>Rs -30,128</a:t>
+              <a:t>Rs -27,032</a:t>
             </a:r>
           </a:p>
         </p:txBody>
@@ -8257,7 +8257,7 @@
                 </a:solidFill>
                 <a:latin typeface="Segoe UI"/>
               </a:rPr>
-              <a:t>-26.9%</a:t>
+              <a:t>-24.1%</a:t>
             </a:r>
           </a:p>
         </p:txBody>
@@ -8427,7 +8427,7 @@
                 </a:solidFill>
                 <a:latin typeface="Segoe UI"/>
               </a:rPr>
-              <a:t>1,170</a:t>
+              <a:t>1,167</a:t>
             </a:r>
           </a:p>
         </p:txBody>
@@ -8461,7 +8461,7 @@
                 </a:solidFill>
                 <a:latin typeface="Segoe UI"/>
               </a:rPr>
-              <a:t>Rs 58,515</a:t>
+              <a:t>Rs 58,335</a:t>
             </a:r>
           </a:p>
         </p:txBody>
@@ -8495,7 +8495,7 @@
                 </a:solidFill>
                 <a:latin typeface="Segoe UI"/>
               </a:rPr>
-              <a:t>Rs -63,985</a:t>
+              <a:t>Rs -64,165</a:t>
             </a:r>
           </a:p>
         </p:txBody>
@@ -8529,7 +8529,7 @@
                 </a:solidFill>
                 <a:latin typeface="Segoe UI"/>
               </a:rPr>
-              <a:t>-52.2%</a:t>
+              <a:t>-52.4%</a:t>
             </a:r>
           </a:p>
         </p:txBody>
@@ -8699,7 +8699,7 @@
                 </a:solidFill>
                 <a:latin typeface="Segoe UI"/>
               </a:rPr>
-              <a:t>2,156</a:t>
+              <a:t>2,257</a:t>
             </a:r>
           </a:p>
         </p:txBody>
@@ -8733,7 +8733,7 @@
                 </a:solidFill>
                 <a:latin typeface="Segoe UI"/>
               </a:rPr>
-              <a:t>Rs 53,900</a:t>
+              <a:t>Rs 56,433</a:t>
             </a:r>
           </a:p>
         </p:txBody>
@@ -8767,7 +8767,7 @@
                 </a:solidFill>
                 <a:latin typeface="Segoe UI"/>
               </a:rPr>
-              <a:t>Rs -36,100</a:t>
+              <a:t>Rs -33,567</a:t>
             </a:r>
           </a:p>
         </p:txBody>
@@ -8801,7 +8801,7 @@
                 </a:solidFill>
                 <a:latin typeface="Segoe UI"/>
               </a:rPr>
-              <a:t>-40.1%</a:t>
+              <a:t>-37.3%</a:t>
             </a:r>
           </a:p>
         </p:txBody>
@@ -8971,7 +8971,7 @@
                 </a:solidFill>
                 <a:latin typeface="Segoe UI"/>
               </a:rPr>
-              <a:t>707</a:t>
+              <a:t>714</a:t>
             </a:r>
           </a:p>
         </p:txBody>
@@ -9005,7 +9005,7 @@
                 </a:solidFill>
                 <a:latin typeface="Segoe UI"/>
               </a:rPr>
-              <a:t>Rs 42,435</a:t>
+              <a:t>Rs 42,840</a:t>
             </a:r>
           </a:p>
         </p:txBody>
@@ -9039,7 +9039,7 @@
                 </a:solidFill>
                 <a:latin typeface="Segoe UI"/>
               </a:rPr>
-              <a:t>Rs -48,765</a:t>
+              <a:t>Rs -48,360</a:t>
             </a:r>
           </a:p>
         </p:txBody>
@@ -9073,7 +9073,7 @@
                 </a:solidFill>
                 <a:latin typeface="Segoe UI"/>
               </a:rPr>
-              <a:t>-53.5%</a:t>
+              <a:t>-53.0%</a:t>
             </a:r>
           </a:p>
         </p:txBody>
@@ -9141,7 +9141,7 @@
                 </a:solidFill>
                 <a:latin typeface="Segoe UI"/>
               </a:rPr>
-              <a:t>Total Rs 1,931,602 | P&amp;L Rs 199,202 (+11.5%) | Sharpe 0.35 | Vol 19.64% | VaR95 -1.73%/day</a:t>
+              <a:t>Total Rs 1,941,837 | P&amp;L Rs 209,218 (+12.1%) | Sharpe 0.46 | Vol 19.58% | VaR95 -1.73%/day</a:t>
             </a:r>
           </a:p>
         </p:txBody>

--- a/docs/pmr_daily.pptx
+++ b/docs/pmr_daily.pptx
@@ -3197,7 +3197,7 @@
                 </a:solidFill>
                 <a:latin typeface="Segoe UI"/>
               </a:rPr>
-              <a:t>Wednesday, 14 Oct 2026 09:38 SGT</a:t>
+              <a:t>Thursday, 15 Oct 2026 09:15 SGT</a:t>
             </a:r>
           </a:p>
         </p:txBody>
@@ -3265,7 +3265,7 @@
                 </a:solidFill>
                 <a:latin typeface="Segoe UI"/>
               </a:rPr>
-              <a:t>RAG 14R / 13A / 19G   |   58.7% above 200DMA   |   Portfolio Rs 1,941,837 (+12.1%)</a:t>
+              <a:t>RAG 14R / 15A / 17G   |   54.3% above 200DMA   |   Portfolio Rs 1,916,132 (+11.0%)</a:t>
             </a:r>
           </a:p>
         </p:txBody>
@@ -3529,7 +3529,7 @@
                 </a:solidFill>
                 <a:latin typeface="Segoe UI"/>
               </a:rPr>
-              <a:t>+10.7%</a:t>
+              <a:t>+13.0%</a:t>
             </a:r>
           </a:p>
         </p:txBody>
@@ -3587,7 +3587,7 @@
                 </a:solidFill>
                 <a:latin typeface="Segoe UI"/>
               </a:rPr>
-              <a:t>Natural Gas</a:t>
+              <a:t>US Energy</a:t>
             </a:r>
           </a:p>
         </p:txBody>
@@ -3621,7 +3621,7 @@
                 </a:solidFill>
                 <a:latin typeface="Segoe UI"/>
               </a:rPr>
-              <a:t>NG=F · GREEN</a:t>
+              <a:t>XLE · GREEN</a:t>
             </a:r>
           </a:p>
         </p:txBody>
@@ -3655,7 +3655,7 @@
                 </a:solidFill>
                 <a:latin typeface="Segoe UI"/>
               </a:rPr>
-              <a:t>+9.9%</a:t>
+              <a:t>+10.0%</a:t>
             </a:r>
           </a:p>
         </p:txBody>
@@ -3713,7 +3713,7 @@
                 </a:solidFill>
                 <a:latin typeface="Segoe UI"/>
               </a:rPr>
-              <a:t>US Energy</a:t>
+              <a:t>Infosys</a:t>
             </a:r>
           </a:p>
         </p:txBody>
@@ -3743,11 +3743,11 @@
             <a:r>
               <a:rPr sz="900" b="0">
                 <a:solidFill>
-                  <a:srgbClr val="22C55E"/>
-                </a:solidFill>
-                <a:latin typeface="Segoe UI"/>
-              </a:rPr>
-              <a:t>XLE · GREEN</a:t>
+                  <a:srgbClr val="EF4444"/>
+                </a:solidFill>
+                <a:latin typeface="Segoe UI"/>
+              </a:rPr>
+              <a:t>INFY.NS · RED</a:t>
             </a:r>
           </a:p>
         </p:txBody>
@@ -3781,7 +3781,7 @@
                 </a:solidFill>
                 <a:latin typeface="Segoe UI"/>
               </a:rPr>
-              <a:t>+9.3%</a:t>
+              <a:t>+9.4%</a:t>
             </a:r>
           </a:p>
         </p:txBody>
@@ -3907,7 +3907,7 @@
                 </a:solidFill>
                 <a:latin typeface="Segoe UI"/>
               </a:rPr>
-              <a:t>+7.7%</a:t>
+              <a:t>+8.9%</a:t>
             </a:r>
           </a:p>
         </p:txBody>
@@ -3965,7 +3965,7 @@
                 </a:solidFill>
                 <a:latin typeface="Segoe UI"/>
               </a:rPr>
-              <a:t>Infosys</a:t>
+              <a:t>Natural Gas</a:t>
             </a:r>
           </a:p>
         </p:txBody>
@@ -3995,11 +3995,11 @@
             <a:r>
               <a:rPr sz="900" b="0">
                 <a:solidFill>
-                  <a:srgbClr val="EF4444"/>
-                </a:solidFill>
-                <a:latin typeface="Segoe UI"/>
-              </a:rPr>
-              <a:t>INFY.NS · RED</a:t>
+                  <a:srgbClr val="22C55E"/>
+                </a:solidFill>
+                <a:latin typeface="Segoe UI"/>
+              </a:rPr>
+              <a:t>NG=F · GREEN</a:t>
             </a:r>
           </a:p>
         </p:txBody>
@@ -4033,7 +4033,7 @@
                 </a:solidFill>
                 <a:latin typeface="Segoe UI"/>
               </a:rPr>
-              <a:t>+6.8%</a:t>
+              <a:t>+8.0%</a:t>
             </a:r>
           </a:p>
         </p:txBody>
@@ -4193,7 +4193,7 @@
                 </a:solidFill>
                 <a:latin typeface="Segoe UI"/>
               </a:rPr>
-              <a:t>-9.3%</a:t>
+              <a:t>-11.7%</a:t>
             </a:r>
           </a:p>
         </p:txBody>
@@ -4319,7 +4319,7 @@
                 </a:solidFill>
                 <a:latin typeface="Segoe UI"/>
               </a:rPr>
-              <a:t>-6.9%</a:t>
+              <a:t>-10.1%</a:t>
             </a:r>
           </a:p>
         </p:txBody>
@@ -4377,7 +4377,7 @@
                 </a:solidFill>
                 <a:latin typeface="Segoe UI"/>
               </a:rPr>
-              <a:t>Straits Times</a:t>
+              <a:t>Silver</a:t>
             </a:r>
           </a:p>
         </p:txBody>
@@ -4407,11 +4407,11 @@
             <a:r>
               <a:rPr sz="900" b="0">
                 <a:solidFill>
-                  <a:srgbClr val="F59E0B"/>
-                </a:solidFill>
-                <a:latin typeface="Segoe UI"/>
-              </a:rPr>
-              <a:t>^STI · AMBER</a:t>
+                  <a:srgbClr val="EF4444"/>
+                </a:solidFill>
+                <a:latin typeface="Segoe UI"/>
+              </a:rPr>
+              <a:t>SI=F · RED</a:t>
             </a:r>
           </a:p>
         </p:txBody>
@@ -4445,7 +4445,7 @@
                 </a:solidFill>
                 <a:latin typeface="Segoe UI"/>
               </a:rPr>
-              <a:t>-4.3%</a:t>
+              <a:t>-6.2%</a:t>
             </a:r>
           </a:p>
         </p:txBody>
@@ -4503,7 +4503,7 @@
                 </a:solidFill>
                 <a:latin typeface="Segoe UI"/>
               </a:rPr>
-              <a:t>Reliance</a:t>
+              <a:t>Straits Times</a:t>
             </a:r>
           </a:p>
         </p:txBody>
@@ -4533,11 +4533,11 @@
             <a:r>
               <a:rPr sz="900" b="0">
                 <a:solidFill>
-                  <a:srgbClr val="EF4444"/>
-                </a:solidFill>
-                <a:latin typeface="Segoe UI"/>
-              </a:rPr>
-              <a:t>RELIANCE.NS · RED</a:t>
+                  <a:srgbClr val="F59E0B"/>
+                </a:solidFill>
+                <a:latin typeface="Segoe UI"/>
+              </a:rPr>
+              <a:t>^STI · AMBER</a:t>
             </a:r>
           </a:p>
         </p:txBody>
@@ -4571,7 +4571,7 @@
                 </a:solidFill>
                 <a:latin typeface="Segoe UI"/>
               </a:rPr>
-              <a:t>-1.7%</a:t>
+              <a:t>-4.8%</a:t>
             </a:r>
           </a:p>
         </p:txBody>
@@ -4629,7 +4629,7 @@
                 </a:solidFill>
                 <a:latin typeface="Segoe UI"/>
               </a:rPr>
-              <a:t>Silver</a:t>
+              <a:t>Nvidia</a:t>
             </a:r>
           </a:p>
         </p:txBody>
@@ -4659,11 +4659,11 @@
             <a:r>
               <a:rPr sz="900" b="0">
                 <a:solidFill>
-                  <a:srgbClr val="EF4444"/>
-                </a:solidFill>
-                <a:latin typeface="Segoe UI"/>
-              </a:rPr>
-              <a:t>SI=F · RED</a:t>
+                  <a:srgbClr val="22C55E"/>
+                </a:solidFill>
+                <a:latin typeface="Segoe UI"/>
+              </a:rPr>
+              <a:t>NVDA · GREEN</a:t>
             </a:r>
           </a:p>
         </p:txBody>
@@ -4697,7 +4697,7 @@
                 </a:solidFill>
                 <a:latin typeface="Segoe UI"/>
               </a:rPr>
-              <a:t>-1.2%</a:t>
+              <a:t>-3.1%</a:t>
             </a:r>
           </a:p>
         </p:txBody>
@@ -4837,7 +4837,7 @@
         <p:spPr>
           <a:xfrm>
             <a:off x="457200" y="1188720"/>
-            <a:ext cx="11247120" cy="5576390"/>
+            <a:ext cx="11247120" cy="5513499"/>
           </a:xfrm>
           <a:prstGeom prst="rect">
             <a:avLst/>
@@ -5239,7 +5239,7 @@
                 </a:solidFill>
                 <a:latin typeface="Segoe UI"/>
               </a:rPr>
-              <a:t>Bitcoin</a:t>
+              <a:t>Microsoft</a:t>
             </a:r>
           </a:p>
         </p:txBody>
@@ -5307,7 +5307,7 @@
                 </a:solidFill>
                 <a:latin typeface="Segoe UI"/>
               </a:rPr>
-              <a:t>84%</a:t>
+              <a:t>95%</a:t>
             </a:r>
           </a:p>
         </p:txBody>
@@ -5341,7 +5341,7 @@
                 </a:solidFill>
                 <a:latin typeface="Segoe UI"/>
               </a:rPr>
-              <a:t>above 200DMA · golden cross (50&gt;200) · MACD bearish</a:t>
+              <a:t>above 200DMA · golden cross (50&gt;200) · MACD bullish</a:t>
             </a:r>
           </a:p>
         </p:txBody>
@@ -5375,7 +5375,7 @@
                 </a:solidFill>
                 <a:latin typeface="Segoe UI"/>
               </a:rPr>
-              <a:t>US Technology</a:t>
+              <a:t>Bitcoin</a:t>
             </a:r>
           </a:p>
         </p:txBody>
@@ -5443,7 +5443,7 @@
                 </a:solidFill>
                 <a:latin typeface="Segoe UI"/>
               </a:rPr>
-              <a:t>81%</a:t>
+              <a:t>84%</a:t>
             </a:r>
           </a:p>
         </p:txBody>
@@ -5511,7 +5511,7 @@
                 </a:solidFill>
                 <a:latin typeface="Segoe UI"/>
               </a:rPr>
-              <a:t>Copper</a:t>
+              <a:t>Dollar Index</a:t>
             </a:r>
           </a:p>
         </p:txBody>
@@ -5579,7 +5579,7 @@
                 </a:solidFill>
                 <a:latin typeface="Segoe UI"/>
               </a:rPr>
-              <a:t>93%</a:t>
+              <a:t>83%</a:t>
             </a:r>
           </a:p>
         </p:txBody>
@@ -5613,7 +5613,7 @@
                 </a:solidFill>
                 <a:latin typeface="Segoe UI"/>
               </a:rPr>
-              <a:t>above 200DMA · golden cross (50&gt;200) · MACD bullish</a:t>
+              <a:t>above 200DMA · golden cross (50&gt;200) · MACD bearish</a:t>
             </a:r>
           </a:p>
         </p:txBody>
@@ -5647,7 +5647,7 @@
                 </a:solidFill>
                 <a:latin typeface="Segoe UI"/>
               </a:rPr>
-              <a:t>Crude Oil WTI</a:t>
+              <a:t>Copper</a:t>
             </a:r>
           </a:p>
         </p:txBody>
@@ -5715,7 +5715,7 @@
                 </a:solidFill>
                 <a:latin typeface="Segoe UI"/>
               </a:rPr>
-              <a:t>81%</a:t>
+              <a:t>94%</a:t>
             </a:r>
           </a:p>
         </p:txBody>
@@ -5783,7 +5783,7 @@
                 </a:solidFill>
                 <a:latin typeface="Segoe UI"/>
               </a:rPr>
-              <a:t>S&amp;P 500</a:t>
+              <a:t>Crude Oil WTI</a:t>
             </a:r>
           </a:p>
         </p:txBody>
@@ -5919,7 +5919,7 @@
                 </a:solidFill>
                 <a:latin typeface="Segoe UI"/>
               </a:rPr>
-              <a:t>Ethereum</a:t>
+              <a:t>Solana</a:t>
             </a:r>
           </a:p>
         </p:txBody>
@@ -5987,7 +5987,7 @@
                 </a:solidFill>
                 <a:latin typeface="Segoe UI"/>
               </a:rPr>
-              <a:t>80%</a:t>
+              <a:t>81%</a:t>
             </a:r>
           </a:p>
         </p:txBody>
@@ -6055,7 +6055,7 @@
                 </a:solidFill>
                 <a:latin typeface="Segoe UI"/>
               </a:rPr>
-              <a:t>Solana</a:t>
+              <a:t>Ethereum</a:t>
             </a:r>
           </a:p>
         </p:txBody>
@@ -6191,7 +6191,7 @@
                 </a:solidFill>
                 <a:latin typeface="Segoe UI"/>
               </a:rPr>
-              <a:t>Dollar Index</a:t>
+              <a:t>US Energy</a:t>
             </a:r>
           </a:p>
         </p:txBody>
@@ -6225,7 +6225,7 @@
                 </a:solidFill>
                 <a:latin typeface="Segoe UI"/>
               </a:rPr>
-              <a:t>STRONG BUY</a:t>
+              <a:t>BUY</a:t>
             </a:r>
           </a:p>
         </p:txBody>
@@ -6259,7 +6259,7 @@
                 </a:solidFill>
                 <a:latin typeface="Segoe UI"/>
               </a:rPr>
-              <a:t>80%</a:t>
+              <a:t>93%</a:t>
             </a:r>
           </a:p>
         </p:txBody>
@@ -6293,7 +6293,7 @@
                 </a:solidFill>
                 <a:latin typeface="Segoe UI"/>
               </a:rPr>
-              <a:t>above 200DMA · golden cross (50&gt;200) · MACD bearish</a:t>
+              <a:t>above 200DMA · golden cross (50&gt;200) · MACD bullish</a:t>
             </a:r>
           </a:p>
         </p:txBody>
@@ -6327,7 +6327,7 @@
                 </a:solidFill>
                 <a:latin typeface="Segoe UI"/>
               </a:rPr>
-              <a:t>Microsoft</a:t>
+              <a:t>FTSE 100</a:t>
             </a:r>
           </a:p>
         </p:txBody>
@@ -6395,7 +6395,7 @@
                 </a:solidFill>
                 <a:latin typeface="Segoe UI"/>
               </a:rPr>
-              <a:t>92%</a:t>
+              <a:t>69%</a:t>
             </a:r>
           </a:p>
         </p:txBody>
@@ -6463,7 +6463,7 @@
                 </a:solidFill>
                 <a:latin typeface="Segoe UI"/>
               </a:rPr>
-              <a:t>US Energy</a:t>
+              <a:t>US 1-3Y Treasury</a:t>
             </a:r>
           </a:p>
         </p:txBody>
@@ -6531,7 +6531,7 @@
                 </a:solidFill>
                 <a:latin typeface="Segoe UI"/>
               </a:rPr>
-              <a:t>92%</a:t>
+              <a:t>79%</a:t>
             </a:r>
           </a:p>
         </p:txBody>
@@ -6659,7 +6659,7 @@
                 </a:solidFill>
                 <a:latin typeface="Segoe UI"/>
               </a:rPr>
-              <a:t>Base currency INR · USD/INR 95.78</a:t>
+              <a:t>Base currency INR · USD/INR 95.29</a:t>
             </a:r>
           </a:p>
         </p:txBody>
@@ -7067,7 +7067,7 @@
                 </a:solidFill>
                 <a:latin typeface="Segoe UI"/>
               </a:rPr>
-              <a:t>83,153</a:t>
+              <a:t>81,574</a:t>
             </a:r>
           </a:p>
         </p:txBody>
@@ -7101,7 +7101,7 @@
                 </a:solidFill>
                 <a:latin typeface="Segoe UI"/>
               </a:rPr>
-              <a:t>Rs 796,405</a:t>
+              <a:t>Rs 777,295</a:t>
             </a:r>
           </a:p>
         </p:txBody>
@@ -7135,7 +7135,7 @@
                 </a:solidFill>
                 <a:latin typeface="Segoe UI"/>
               </a:rPr>
-              <a:t>Rs 221,749</a:t>
+              <a:t>Rs 205,572</a:t>
             </a:r>
           </a:p>
         </p:txBody>
@@ -7169,7 +7169,7 @@
                 </a:solidFill>
                 <a:latin typeface="Segoe UI"/>
               </a:rPr>
-              <a:t>+38.6%</a:t>
+              <a:t>+36.0%</a:t>
             </a:r>
           </a:p>
         </p:txBody>
@@ -7199,11 +7199,11 @@
             <a:r>
               <a:rPr sz="1000" b="0">
                 <a:solidFill>
-                  <a:srgbClr val="22C55E"/>
-                </a:solidFill>
-                <a:latin typeface="Segoe UI"/>
-              </a:rPr>
-              <a:t>+1.7%</a:t>
+                  <a:srgbClr val="EF4444"/>
+                </a:solidFill>
+                <a:latin typeface="Segoe UI"/>
+              </a:rPr>
+              <a:t>-1.8%</a:t>
             </a:r>
           </a:p>
         </p:txBody>
@@ -7339,7 +7339,7 @@
                 </a:solidFill>
                 <a:latin typeface="Segoe UI"/>
               </a:rPr>
-              <a:t>4,186</a:t>
+              <a:t>4,170</a:t>
             </a:r>
           </a:p>
         </p:txBody>
@@ -7373,7 +7373,7 @@
                 </a:solidFill>
                 <a:latin typeface="Segoe UI"/>
               </a:rPr>
-              <a:t>Rs 400,908</a:t>
+              <a:t>Rs 397,310</a:t>
             </a:r>
           </a:p>
         </p:txBody>
@@ -7407,7 +7407,7 @@
                 </a:solidFill>
                 <a:latin typeface="Segoe UI"/>
               </a:rPr>
-              <a:t>Rs 180,624</a:t>
+              <a:t>Rs 178,149</a:t>
             </a:r>
           </a:p>
         </p:txBody>
@@ -7441,7 +7441,7 @@
                 </a:solidFill>
                 <a:latin typeface="Segoe UI"/>
               </a:rPr>
-              <a:t>+82.0%</a:t>
+              <a:t>+81.3%</a:t>
             </a:r>
           </a:p>
         </p:txBody>
@@ -7611,7 +7611,7 @@
                 </a:solidFill>
                 <a:latin typeface="Segoe UI"/>
               </a:rPr>
-              <a:t>341</a:t>
+              <a:t>343</a:t>
             </a:r>
           </a:p>
         </p:txBody>
@@ -7645,7 +7645,7 @@
                 </a:solidFill>
                 <a:latin typeface="Segoe UI"/>
               </a:rPr>
-              <a:t>Rs 326,854</a:t>
+              <a:t>Rs 326,797</a:t>
             </a:r>
           </a:p>
         </p:txBody>
@@ -7679,7 +7679,7 @@
                 </a:solidFill>
                 <a:latin typeface="Segoe UI"/>
               </a:rPr>
-              <a:t>Rs 149,669</a:t>
+              <a:t>Rs 150,516</a:t>
             </a:r>
           </a:p>
         </p:txBody>
@@ -7713,7 +7713,7 @@
                 </a:solidFill>
                 <a:latin typeface="Segoe UI"/>
               </a:rPr>
-              <a:t>+84.5%</a:t>
+              <a:t>+85.4%</a:t>
             </a:r>
           </a:p>
         </p:txBody>
@@ -7883,7 +7883,7 @@
                 </a:solidFill>
                 <a:latin typeface="Segoe UI"/>
               </a:rPr>
-              <a:t>229</a:t>
+              <a:t>221</a:t>
             </a:r>
           </a:p>
         </p:txBody>
@@ -7917,7 +7917,7 @@
                 </a:solidFill>
                 <a:latin typeface="Segoe UI"/>
               </a:rPr>
-              <a:t>Rs 175,094</a:t>
+              <a:t>Rs 168,696</a:t>
             </a:r>
           </a:p>
         </p:txBody>
@@ -7951,7 +7951,7 @@
                 </a:solidFill>
                 <a:latin typeface="Segoe UI"/>
               </a:rPr>
-              <a:t>Rs -169,700</a:t>
+              <a:t>Rs -174,337</a:t>
             </a:r>
           </a:p>
         </p:txBody>
@@ -7985,7 +7985,7 @@
                 </a:solidFill>
                 <a:latin typeface="Segoe UI"/>
               </a:rPr>
-              <a:t>-49.2%</a:t>
+              <a:t>-50.8%</a:t>
             </a:r>
           </a:p>
         </p:txBody>
@@ -8155,7 +8155,7 @@
                 </a:solidFill>
                 <a:latin typeface="Segoe UI"/>
               </a:rPr>
-              <a:t>1,062</a:t>
+              <a:t>1,088</a:t>
             </a:r>
           </a:p>
         </p:txBody>
@@ -8189,7 +8189,7 @@
                 </a:solidFill>
                 <a:latin typeface="Segoe UI"/>
               </a:rPr>
-              <a:t>Rs 84,968</a:t>
+              <a:t>Rs 87,040</a:t>
             </a:r>
           </a:p>
         </p:txBody>
@@ -8223,7 +8223,7 @@
                 </a:solidFill>
                 <a:latin typeface="Segoe UI"/>
               </a:rPr>
-              <a:t>Rs -27,032</a:t>
+              <a:t>Rs -24,960</a:t>
             </a:r>
           </a:p>
         </p:txBody>
@@ -8257,7 +8257,7 @@
                 </a:solidFill>
                 <a:latin typeface="Segoe UI"/>
               </a:rPr>
-              <a:t>-24.1%</a:t>
+              <a:t>-22.3%</a:t>
             </a:r>
           </a:p>
         </p:txBody>
@@ -8427,7 +8427,7 @@
                 </a:solidFill>
                 <a:latin typeface="Segoe UI"/>
               </a:rPr>
-              <a:t>1,167</a:t>
+              <a:t>1,175</a:t>
             </a:r>
           </a:p>
         </p:txBody>
@@ -8461,7 +8461,7 @@
                 </a:solidFill>
                 <a:latin typeface="Segoe UI"/>
               </a:rPr>
-              <a:t>Rs 58,335</a:t>
+              <a:t>Rs 58,730</a:t>
             </a:r>
           </a:p>
         </p:txBody>
@@ -8495,7 +8495,7 @@
                 </a:solidFill>
                 <a:latin typeface="Segoe UI"/>
               </a:rPr>
-              <a:t>Rs -64,165</a:t>
+              <a:t>Rs -63,770</a:t>
             </a:r>
           </a:p>
         </p:txBody>
@@ -8529,7 +8529,7 @@
                 </a:solidFill>
                 <a:latin typeface="Segoe UI"/>
               </a:rPr>
-              <a:t>-52.4%</a:t>
+              <a:t>-52.1%</a:t>
             </a:r>
           </a:p>
         </p:txBody>
@@ -8699,7 +8699,7 @@
                 </a:solidFill>
                 <a:latin typeface="Segoe UI"/>
               </a:rPr>
-              <a:t>2,257</a:t>
+              <a:t>2,305</a:t>
             </a:r>
           </a:p>
         </p:txBody>
@@ -8733,7 +8733,7 @@
                 </a:solidFill>
                 <a:latin typeface="Segoe UI"/>
               </a:rPr>
-              <a:t>Rs 56,433</a:t>
+              <a:t>Rs 57,622</a:t>
             </a:r>
           </a:p>
         </p:txBody>
@@ -8767,7 +8767,7 @@
                 </a:solidFill>
                 <a:latin typeface="Segoe UI"/>
               </a:rPr>
-              <a:t>Rs -33,567</a:t>
+              <a:t>Rs -32,378</a:t>
             </a:r>
           </a:p>
         </p:txBody>
@@ -8801,7 +8801,7 @@
                 </a:solidFill>
                 <a:latin typeface="Segoe UI"/>
               </a:rPr>
-              <a:t>-37.3%</a:t>
+              <a:t>-36.0%</a:t>
             </a:r>
           </a:p>
         </p:txBody>
@@ -8971,7 +8971,7 @@
                 </a:solidFill>
                 <a:latin typeface="Segoe UI"/>
               </a:rPr>
-              <a:t>714</a:t>
+              <a:t>711</a:t>
             </a:r>
           </a:p>
         </p:txBody>
@@ -9005,7 +9005,7 @@
                 </a:solidFill>
                 <a:latin typeface="Segoe UI"/>
               </a:rPr>
-              <a:t>Rs 42,840</a:t>
+              <a:t>Rs 42,642</a:t>
             </a:r>
           </a:p>
         </p:txBody>
@@ -9039,7 +9039,7 @@
                 </a:solidFill>
                 <a:latin typeface="Segoe UI"/>
               </a:rPr>
-              <a:t>Rs -48,360</a:t>
+              <a:t>Rs -48,558</a:t>
             </a:r>
           </a:p>
         </p:txBody>
@@ -9073,7 +9073,7 @@
                 </a:solidFill>
                 <a:latin typeface="Segoe UI"/>
               </a:rPr>
-              <a:t>-53.0%</a:t>
+              <a:t>-53.2%</a:t>
             </a:r>
           </a:p>
         </p:txBody>
@@ -9141,7 +9141,7 @@
                 </a:solidFill>
                 <a:latin typeface="Segoe UI"/>
               </a:rPr>
-              <a:t>Total Rs 1,941,837 | P&amp;L Rs 209,218 (+12.1%) | Sharpe 0.46 | Vol 19.58% | VaR95 -1.73%/day</a:t>
+              <a:t>Total Rs 1,916,132 | P&amp;L Rs 190,233 (+11.0%) | Sharpe 0.77 | Vol 18.41% | VaR95 -1.67%/day</a:t>
             </a:r>
           </a:p>
         </p:txBody>

--- a/docs/pmr_daily.pptx
+++ b/docs/pmr_daily.pptx
@@ -3197,7 +3197,7 @@
                 </a:solidFill>
                 <a:latin typeface="Segoe UI"/>
               </a:rPr>
-              <a:t>Thursday, 15 Oct 2026 09:15 SGT</a:t>
+              <a:t>Friday, 16 Oct 2026 09:01 SGT</a:t>
             </a:r>
           </a:p>
         </p:txBody>
@@ -3265,7 +3265,7 @@
                 </a:solidFill>
                 <a:latin typeface="Segoe UI"/>
               </a:rPr>
-              <a:t>RAG 14R / 15A / 17G   |   54.3% above 200DMA   |   Portfolio Rs 1,916,132 (+11.0%)</a:t>
+              <a:t>RAG 11R / 17A / 18G   |   56.5% above 200DMA   |   Portfolio Rs 1,922,805 (+11.5%)</a:t>
             </a:r>
           </a:p>
         </p:txBody>
@@ -3529,7 +3529,7 @@
                 </a:solidFill>
                 <a:latin typeface="Segoe UI"/>
               </a:rPr>
-              <a:t>+13.0%</a:t>
+              <a:t>+15.2%</a:t>
             </a:r>
           </a:p>
         </p:txBody>
@@ -3587,7 +3587,7 @@
                 </a:solidFill>
                 <a:latin typeface="Segoe UI"/>
               </a:rPr>
-              <a:t>US Energy</a:t>
+              <a:t>Infosys</a:t>
             </a:r>
           </a:p>
         </p:txBody>
@@ -3617,11 +3617,11 @@
             <a:r>
               <a:rPr sz="900" b="0">
                 <a:solidFill>
-                  <a:srgbClr val="22C55E"/>
-                </a:solidFill>
-                <a:latin typeface="Segoe UI"/>
-              </a:rPr>
-              <a:t>XLE · GREEN</a:t>
+                  <a:srgbClr val="EF4444"/>
+                </a:solidFill>
+                <a:latin typeface="Segoe UI"/>
+              </a:rPr>
+              <a:t>INFY.NS · RED</a:t>
             </a:r>
           </a:p>
         </p:txBody>
@@ -3655,7 +3655,7 @@
                 </a:solidFill>
                 <a:latin typeface="Segoe UI"/>
               </a:rPr>
-              <a:t>+10.0%</a:t>
+              <a:t>+11.7%</a:t>
             </a:r>
           </a:p>
         </p:txBody>
@@ -3713,7 +3713,7 @@
                 </a:solidFill>
                 <a:latin typeface="Segoe UI"/>
               </a:rPr>
-              <a:t>Infosys</a:t>
+              <a:t>NIFTY IT</a:t>
             </a:r>
           </a:p>
         </p:txBody>
@@ -3747,7 +3747,7 @@
                 </a:solidFill>
                 <a:latin typeface="Segoe UI"/>
               </a:rPr>
-              <a:t>INFY.NS · RED</a:t>
+              <a:t>^CNXIT · RED</a:t>
             </a:r>
           </a:p>
         </p:txBody>
@@ -3781,7 +3781,7 @@
                 </a:solidFill>
                 <a:latin typeface="Segoe UI"/>
               </a:rPr>
-              <a:t>+9.4%</a:t>
+              <a:t>+10.9%</a:t>
             </a:r>
           </a:p>
         </p:txBody>
@@ -3839,7 +3839,7 @@
                 </a:solidFill>
                 <a:latin typeface="Segoe UI"/>
               </a:rPr>
-              <a:t>NIFTY IT</a:t>
+              <a:t>US Energy</a:t>
             </a:r>
           </a:p>
         </p:txBody>
@@ -3869,11 +3869,11 @@
             <a:r>
               <a:rPr sz="900" b="0">
                 <a:solidFill>
-                  <a:srgbClr val="EF4444"/>
-                </a:solidFill>
-                <a:latin typeface="Segoe UI"/>
-              </a:rPr>
-              <a:t>^CNXIT · RED</a:t>
+                  <a:srgbClr val="22C55E"/>
+                </a:solidFill>
+                <a:latin typeface="Segoe UI"/>
+              </a:rPr>
+              <a:t>XLE · GREEN</a:t>
             </a:r>
           </a:p>
         </p:txBody>
@@ -3907,7 +3907,7 @@
                 </a:solidFill>
                 <a:latin typeface="Segoe UI"/>
               </a:rPr>
-              <a:t>+8.9%</a:t>
+              <a:t>+8.2%</a:t>
             </a:r>
           </a:p>
         </p:txBody>
@@ -3965,7 +3965,7 @@
                 </a:solidFill>
                 <a:latin typeface="Segoe UI"/>
               </a:rPr>
-              <a:t>Natural Gas</a:t>
+              <a:t>Crude Oil WTI</a:t>
             </a:r>
           </a:p>
         </p:txBody>
@@ -3995,11 +3995,11 @@
             <a:r>
               <a:rPr sz="900" b="0">
                 <a:solidFill>
-                  <a:srgbClr val="22C55E"/>
-                </a:solidFill>
-                <a:latin typeface="Segoe UI"/>
-              </a:rPr>
-              <a:t>NG=F · GREEN</a:t>
+                  <a:srgbClr val="F59E0B"/>
+                </a:solidFill>
+                <a:latin typeface="Segoe UI"/>
+              </a:rPr>
+              <a:t>CL=F · AMBER</a:t>
             </a:r>
           </a:p>
         </p:txBody>
@@ -4033,7 +4033,7 @@
                 </a:solidFill>
                 <a:latin typeface="Segoe UI"/>
               </a:rPr>
-              <a:t>+8.0%</a:t>
+              <a:t>+6.2%</a:t>
             </a:r>
           </a:p>
         </p:txBody>
@@ -4193,7 +4193,7 @@
                 </a:solidFill>
                 <a:latin typeface="Segoe UI"/>
               </a:rPr>
-              <a:t>-11.7%</a:t>
+              <a:t>-10.6%</a:t>
             </a:r>
           </a:p>
         </p:txBody>
@@ -4319,7 +4319,7 @@
                 </a:solidFill>
                 <a:latin typeface="Segoe UI"/>
               </a:rPr>
-              <a:t>-10.1%</a:t>
+              <a:t>-9.1%</a:t>
             </a:r>
           </a:p>
         </p:txBody>
@@ -4377,7 +4377,7 @@
                 </a:solidFill>
                 <a:latin typeface="Segoe UI"/>
               </a:rPr>
-              <a:t>Silver</a:t>
+              <a:t>Nvidia</a:t>
             </a:r>
           </a:p>
         </p:txBody>
@@ -4407,11 +4407,11 @@
             <a:r>
               <a:rPr sz="900" b="0">
                 <a:solidFill>
-                  <a:srgbClr val="EF4444"/>
-                </a:solidFill>
-                <a:latin typeface="Segoe UI"/>
-              </a:rPr>
-              <a:t>SI=F · RED</a:t>
+                  <a:srgbClr val="F59E0B"/>
+                </a:solidFill>
+                <a:latin typeface="Segoe UI"/>
+              </a:rPr>
+              <a:t>NVDA · AMBER</a:t>
             </a:r>
           </a:p>
         </p:txBody>
@@ -4445,7 +4445,7 @@
                 </a:solidFill>
                 <a:latin typeface="Segoe UI"/>
               </a:rPr>
-              <a:t>-6.2%</a:t>
+              <a:t>-4.9%</a:t>
             </a:r>
           </a:p>
         </p:txBody>
@@ -4629,7 +4629,7 @@
                 </a:solidFill>
                 <a:latin typeface="Segoe UI"/>
               </a:rPr>
-              <a:t>Nvidia</a:t>
+              <a:t>Silver</a:t>
             </a:r>
           </a:p>
         </p:txBody>
@@ -4659,11 +4659,11 @@
             <a:r>
               <a:rPr sz="900" b="0">
                 <a:solidFill>
-                  <a:srgbClr val="22C55E"/>
-                </a:solidFill>
-                <a:latin typeface="Segoe UI"/>
-              </a:rPr>
-              <a:t>NVDA · GREEN</a:t>
+                  <a:srgbClr val="EF4444"/>
+                </a:solidFill>
+                <a:latin typeface="Segoe UI"/>
+              </a:rPr>
+              <a:t>SI=F · RED</a:t>
             </a:r>
           </a:p>
         </p:txBody>
@@ -4697,7 +4697,7 @@
                 </a:solidFill>
                 <a:latin typeface="Segoe UI"/>
               </a:rPr>
-              <a:t>-3.1%</a:t>
+              <a:t>-4.6%</a:t>
             </a:r>
           </a:p>
         </p:txBody>
@@ -5103,7 +5103,7 @@
                 </a:solidFill>
                 <a:latin typeface="Segoe UI"/>
               </a:rPr>
-              <a:t>Natural Gas</a:t>
+              <a:t>Microsoft</a:t>
             </a:r>
           </a:p>
         </p:txBody>
@@ -5239,7 +5239,7 @@
                 </a:solidFill>
                 <a:latin typeface="Segoe UI"/>
               </a:rPr>
-              <a:t>Microsoft</a:t>
+              <a:t>US Energy</a:t>
             </a:r>
           </a:p>
         </p:txBody>
@@ -5511,7 +5511,7 @@
                 </a:solidFill>
                 <a:latin typeface="Segoe UI"/>
               </a:rPr>
-              <a:t>Dollar Index</a:t>
+              <a:t>Natural Gas</a:t>
             </a:r>
           </a:p>
         </p:txBody>
@@ -5579,7 +5579,7 @@
                 </a:solidFill>
                 <a:latin typeface="Segoe UI"/>
               </a:rPr>
-              <a:t>83%</a:t>
+              <a:t>90%</a:t>
             </a:r>
           </a:p>
         </p:txBody>
@@ -5613,7 +5613,7 @@
                 </a:solidFill>
                 <a:latin typeface="Segoe UI"/>
               </a:rPr>
-              <a:t>above 200DMA · golden cross (50&gt;200) · MACD bearish</a:t>
+              <a:t>above 200DMA · golden cross (50&gt;200) · MACD bullish</a:t>
             </a:r>
           </a:p>
         </p:txBody>
@@ -5647,7 +5647,7 @@
                 </a:solidFill>
                 <a:latin typeface="Segoe UI"/>
               </a:rPr>
-              <a:t>Copper</a:t>
+              <a:t>Dollar Index</a:t>
             </a:r>
           </a:p>
         </p:txBody>
@@ -5715,7 +5715,7 @@
                 </a:solidFill>
                 <a:latin typeface="Segoe UI"/>
               </a:rPr>
-              <a:t>94%</a:t>
+              <a:t>83%</a:t>
             </a:r>
           </a:p>
         </p:txBody>
@@ -5749,7 +5749,7 @@
                 </a:solidFill>
                 <a:latin typeface="Segoe UI"/>
               </a:rPr>
-              <a:t>above 200DMA · golden cross (50&gt;200) · MACD bullish</a:t>
+              <a:t>above 200DMA · golden cross (50&gt;200) · MACD bearish</a:t>
             </a:r>
           </a:p>
         </p:txBody>
@@ -5851,7 +5851,7 @@
                 </a:solidFill>
                 <a:latin typeface="Segoe UI"/>
               </a:rPr>
-              <a:t>81%</a:t>
+              <a:t>88%</a:t>
             </a:r>
           </a:p>
         </p:txBody>
@@ -5919,7 +5919,7 @@
                 </a:solidFill>
                 <a:latin typeface="Segoe UI"/>
               </a:rPr>
-              <a:t>Solana</a:t>
+              <a:t>FTSE 100</a:t>
             </a:r>
           </a:p>
         </p:txBody>
@@ -5987,7 +5987,7 @@
                 </a:solidFill>
                 <a:latin typeface="Segoe UI"/>
               </a:rPr>
-              <a:t>81%</a:t>
+              <a:t>82%</a:t>
             </a:r>
           </a:p>
         </p:txBody>
@@ -6021,7 +6021,7 @@
                 </a:solidFill>
                 <a:latin typeface="Segoe UI"/>
               </a:rPr>
-              <a:t>above 200DMA · golden cross (50&gt;200) · MACD bearish</a:t>
+              <a:t>above 200DMA · golden cross (50&gt;200) · MACD bullish</a:t>
             </a:r>
           </a:p>
         </p:txBody>
@@ -6055,7 +6055,7 @@
                 </a:solidFill>
                 <a:latin typeface="Segoe UI"/>
               </a:rPr>
-              <a:t>Ethereum</a:t>
+              <a:t>ICICI Bank</a:t>
             </a:r>
           </a:p>
         </p:txBody>
@@ -6123,7 +6123,7 @@
                 </a:solidFill>
                 <a:latin typeface="Segoe UI"/>
               </a:rPr>
-              <a:t>80%</a:t>
+              <a:t>81%</a:t>
             </a:r>
           </a:p>
         </p:txBody>
@@ -6157,7 +6157,7 @@
                 </a:solidFill>
                 <a:latin typeface="Segoe UI"/>
               </a:rPr>
-              <a:t>above 200DMA · golden cross (50&gt;200) · MACD bearish</a:t>
+              <a:t>above 200DMA · golden cross (50&gt;200) · MACD bullish</a:t>
             </a:r>
           </a:p>
         </p:txBody>
@@ -6191,7 +6191,7 @@
                 </a:solidFill>
                 <a:latin typeface="Segoe UI"/>
               </a:rPr>
-              <a:t>US Energy</a:t>
+              <a:t>Solana</a:t>
             </a:r>
           </a:p>
         </p:txBody>
@@ -6225,7 +6225,7 @@
                 </a:solidFill>
                 <a:latin typeface="Segoe UI"/>
               </a:rPr>
-              <a:t>BUY</a:t>
+              <a:t>STRONG BUY</a:t>
             </a:r>
           </a:p>
         </p:txBody>
@@ -6259,7 +6259,7 @@
                 </a:solidFill>
                 <a:latin typeface="Segoe UI"/>
               </a:rPr>
-              <a:t>93%</a:t>
+              <a:t>81%</a:t>
             </a:r>
           </a:p>
         </p:txBody>
@@ -6293,7 +6293,7 @@
                 </a:solidFill>
                 <a:latin typeface="Segoe UI"/>
               </a:rPr>
-              <a:t>above 200DMA · golden cross (50&gt;200) · MACD bullish</a:t>
+              <a:t>above 200DMA · golden cross (50&gt;200) · MACD bearish</a:t>
             </a:r>
           </a:p>
         </p:txBody>
@@ -6327,7 +6327,7 @@
                 </a:solidFill>
                 <a:latin typeface="Segoe UI"/>
               </a:rPr>
-              <a:t>FTSE 100</a:t>
+              <a:t>US 1-3Y Treasury</a:t>
             </a:r>
           </a:p>
         </p:txBody>
@@ -6361,7 +6361,7 @@
                 </a:solidFill>
                 <a:latin typeface="Segoe UI"/>
               </a:rPr>
-              <a:t>BUY</a:t>
+              <a:t>STRONG BUY</a:t>
             </a:r>
           </a:p>
         </p:txBody>
@@ -6395,7 +6395,7 @@
                 </a:solidFill>
                 <a:latin typeface="Segoe UI"/>
               </a:rPr>
-              <a:t>69%</a:t>
+              <a:t>80%</a:t>
             </a:r>
           </a:p>
         </p:txBody>
@@ -6463,7 +6463,7 @@
                 </a:solidFill>
                 <a:latin typeface="Segoe UI"/>
               </a:rPr>
-              <a:t>US 1-3Y Treasury</a:t>
+              <a:t>Ethereum</a:t>
             </a:r>
           </a:p>
         </p:txBody>
@@ -6497,7 +6497,7 @@
                 </a:solidFill>
                 <a:latin typeface="Segoe UI"/>
               </a:rPr>
-              <a:t>BUY</a:t>
+              <a:t>STRONG BUY</a:t>
             </a:r>
           </a:p>
         </p:txBody>
@@ -6531,7 +6531,7 @@
                 </a:solidFill>
                 <a:latin typeface="Segoe UI"/>
               </a:rPr>
-              <a:t>79%</a:t>
+              <a:t>80%</a:t>
             </a:r>
           </a:p>
         </p:txBody>
@@ -6565,7 +6565,7 @@
                 </a:solidFill>
                 <a:latin typeface="Segoe UI"/>
               </a:rPr>
-              <a:t>above 200DMA · golden cross (50&gt;200) · MACD bullish</a:t>
+              <a:t>above 200DMA · golden cross (50&gt;200) · MACD bearish</a:t>
             </a:r>
           </a:p>
         </p:txBody>
@@ -6659,7 +6659,7 @@
                 </a:solidFill>
                 <a:latin typeface="Segoe UI"/>
               </a:rPr>
-              <a:t>Base currency INR · USD/INR 95.29</a:t>
+              <a:t>Base currency INR · USD/INR 95.15</a:t>
             </a:r>
           </a:p>
         </p:txBody>
@@ -7067,7 +7067,7 @@
                 </a:solidFill>
                 <a:latin typeface="Segoe UI"/>
               </a:rPr>
-              <a:t>81,574</a:t>
+              <a:t>82,265</a:t>
             </a:r>
           </a:p>
         </p:txBody>
@@ -7101,7 +7101,7 @@
                 </a:solidFill>
                 <a:latin typeface="Segoe UI"/>
               </a:rPr>
-              <a:t>Rs 777,295</a:t>
+              <a:t>Rs 782,757</a:t>
             </a:r>
           </a:p>
         </p:txBody>
@@ -7135,7 +7135,7 @@
                 </a:solidFill>
                 <a:latin typeface="Segoe UI"/>
               </a:rPr>
-              <a:t>Rs 205,572</a:t>
+              <a:t>Rs 211,850</a:t>
             </a:r>
           </a:p>
         </p:txBody>
@@ -7169,7 +7169,7 @@
                 </a:solidFill>
                 <a:latin typeface="Segoe UI"/>
               </a:rPr>
-              <a:t>+36.0%</a:t>
+              <a:t>+37.1%</a:t>
             </a:r>
           </a:p>
         </p:txBody>
@@ -7199,11 +7199,11 @@
             <a:r>
               <a:rPr sz="1000" b="0">
                 <a:solidFill>
-                  <a:srgbClr val="EF4444"/>
-                </a:solidFill>
-                <a:latin typeface="Segoe UI"/>
-              </a:rPr>
-              <a:t>-1.8%</a:t>
+                  <a:srgbClr val="22C55E"/>
+                </a:solidFill>
+                <a:latin typeface="Segoe UI"/>
+              </a:rPr>
+              <a:t>+0.9%</a:t>
             </a:r>
           </a:p>
         </p:txBody>
@@ -7339,7 +7339,7 @@
                 </a:solidFill>
                 <a:latin typeface="Segoe UI"/>
               </a:rPr>
-              <a:t>4,170</a:t>
+              <a:t>4,176</a:t>
             </a:r>
           </a:p>
         </p:txBody>
@@ -7373,7 +7373,7 @@
                 </a:solidFill>
                 <a:latin typeface="Segoe UI"/>
               </a:rPr>
-              <a:t>Rs 397,310</a:t>
+              <a:t>Rs 397,361</a:t>
             </a:r>
           </a:p>
         </p:txBody>
@@ -7407,7 +7407,7 @@
                 </a:solidFill>
                 <a:latin typeface="Segoe UI"/>
               </a:rPr>
-              <a:t>Rs 178,149</a:t>
+              <a:t>Rs 178,513</a:t>
             </a:r>
           </a:p>
         </p:txBody>
@@ -7441,7 +7441,7 @@
                 </a:solidFill>
                 <a:latin typeface="Segoe UI"/>
               </a:rPr>
-              <a:t>+81.3%</a:t>
+              <a:t>+81.6%</a:t>
             </a:r>
           </a:p>
         </p:txBody>
@@ -7611,7 +7611,7 @@
                 </a:solidFill>
                 <a:latin typeface="Segoe UI"/>
               </a:rPr>
-              <a:t>343</a:t>
+              <a:t>342</a:t>
             </a:r>
           </a:p>
         </p:txBody>
@@ -7645,7 +7645,7 @@
                 </a:solidFill>
                 <a:latin typeface="Segoe UI"/>
               </a:rPr>
-              <a:t>Rs 326,797</a:t>
+              <a:t>Rs 325,417</a:t>
             </a:r>
           </a:p>
         </p:txBody>
@@ -7679,7 +7679,7 @@
                 </a:solidFill>
                 <a:latin typeface="Segoe UI"/>
               </a:rPr>
-              <a:t>Rs 150,516</a:t>
+              <a:t>Rs 149,388</a:t>
             </a:r>
           </a:p>
         </p:txBody>
@@ -7713,7 +7713,7 @@
                 </a:solidFill>
                 <a:latin typeface="Segoe UI"/>
               </a:rPr>
-              <a:t>+85.4%</a:t>
+              <a:t>+84.9%</a:t>
             </a:r>
           </a:p>
         </p:txBody>
@@ -7883,7 +7883,7 @@
                 </a:solidFill>
                 <a:latin typeface="Segoe UI"/>
               </a:rPr>
-              <a:t>221</a:t>
+              <a:t>217</a:t>
             </a:r>
           </a:p>
         </p:txBody>
@@ -7917,7 +7917,7 @@
                 </a:solidFill>
                 <a:latin typeface="Segoe UI"/>
               </a:rPr>
-              <a:t>Rs 168,696</a:t>
+              <a:t>Rs 165,358</a:t>
             </a:r>
           </a:p>
         </p:txBody>
@@ -7951,7 +7951,7 @@
                 </a:solidFill>
                 <a:latin typeface="Segoe UI"/>
               </a:rPr>
-              <a:t>Rs -174,337</a:t>
+              <a:t>Rs -177,187</a:t>
             </a:r>
           </a:p>
         </p:txBody>
@@ -7985,7 +7985,7 @@
                 </a:solidFill>
                 <a:latin typeface="Segoe UI"/>
               </a:rPr>
-              <a:t>-50.8%</a:t>
+              <a:t>-51.7%</a:t>
             </a:r>
           </a:p>
         </p:txBody>
@@ -8155,7 +8155,7 @@
                 </a:solidFill>
                 <a:latin typeface="Segoe UI"/>
               </a:rPr>
-              <a:t>1,088</a:t>
+              <a:t>1,110</a:t>
             </a:r>
           </a:p>
         </p:txBody>
@@ -8189,7 +8189,7 @@
                 </a:solidFill>
                 <a:latin typeface="Segoe UI"/>
               </a:rPr>
-              <a:t>Rs 87,040</a:t>
+              <a:t>Rs 88,800</a:t>
             </a:r>
           </a:p>
         </p:txBody>
@@ -8223,7 +8223,7 @@
                 </a:solidFill>
                 <a:latin typeface="Segoe UI"/>
               </a:rPr>
-              <a:t>Rs -24,960</a:t>
+              <a:t>Rs -23,200</a:t>
             </a:r>
           </a:p>
         </p:txBody>
@@ -8257,7 +8257,7 @@
                 </a:solidFill>
                 <a:latin typeface="Segoe UI"/>
               </a:rPr>
-              <a:t>-22.3%</a:t>
+              <a:t>-20.7%</a:t>
             </a:r>
           </a:p>
         </p:txBody>
@@ -8427,7 +8427,7 @@
                 </a:solidFill>
                 <a:latin typeface="Segoe UI"/>
               </a:rPr>
-              <a:t>1,175</a:t>
+              <a:t>1,215</a:t>
             </a:r>
           </a:p>
         </p:txBody>
@@ -8461,7 +8461,7 @@
                 </a:solidFill>
                 <a:latin typeface="Segoe UI"/>
               </a:rPr>
-              <a:t>Rs 58,730</a:t>
+              <a:t>Rs 60,750</a:t>
             </a:r>
           </a:p>
         </p:txBody>
@@ -8495,7 +8495,7 @@
                 </a:solidFill>
                 <a:latin typeface="Segoe UI"/>
               </a:rPr>
-              <a:t>Rs -63,770</a:t>
+              <a:t>Rs -61,750</a:t>
             </a:r>
           </a:p>
         </p:txBody>
@@ -8529,7 +8529,7 @@
                 </a:solidFill>
                 <a:latin typeface="Segoe UI"/>
               </a:rPr>
-              <a:t>-52.1%</a:t>
+              <a:t>-50.4%</a:t>
             </a:r>
           </a:p>
         </p:txBody>
@@ -8699,7 +8699,7 @@
                 </a:solidFill>
                 <a:latin typeface="Segoe UI"/>
               </a:rPr>
-              <a:t>2,305</a:t>
+              <a:t>2,350</a:t>
             </a:r>
           </a:p>
         </p:txBody>
@@ -8733,7 +8733,7 @@
                 </a:solidFill>
                 <a:latin typeface="Segoe UI"/>
               </a:rPr>
-              <a:t>Rs 57,622</a:t>
+              <a:t>Rs 58,750</a:t>
             </a:r>
           </a:p>
         </p:txBody>
@@ -8767,7 +8767,7 @@
                 </a:solidFill>
                 <a:latin typeface="Segoe UI"/>
               </a:rPr>
-              <a:t>Rs -32,378</a:t>
+              <a:t>Rs -31,250</a:t>
             </a:r>
           </a:p>
         </p:txBody>
@@ -8801,7 +8801,7 @@
                 </a:solidFill>
                 <a:latin typeface="Segoe UI"/>
               </a:rPr>
-              <a:t>-36.0%</a:t>
+              <a:t>-34.7%</a:t>
             </a:r>
           </a:p>
         </p:txBody>
@@ -8971,7 +8971,7 @@
                 </a:solidFill>
                 <a:latin typeface="Segoe UI"/>
               </a:rPr>
-              <a:t>711</a:t>
+              <a:t>727</a:t>
             </a:r>
           </a:p>
         </p:txBody>
@@ -9005,7 +9005,7 @@
                 </a:solidFill>
                 <a:latin typeface="Segoe UI"/>
               </a:rPr>
-              <a:t>Rs 42,642</a:t>
+              <a:t>Rs 43,611</a:t>
             </a:r>
           </a:p>
         </p:txBody>
@@ -9039,7 +9039,7 @@
                 </a:solidFill>
                 <a:latin typeface="Segoe UI"/>
               </a:rPr>
-              <a:t>Rs -48,558</a:t>
+              <a:t>Rs -47,589</a:t>
             </a:r>
           </a:p>
         </p:txBody>
@@ -9073,7 +9073,7 @@
                 </a:solidFill>
                 <a:latin typeface="Segoe UI"/>
               </a:rPr>
-              <a:t>-53.2%</a:t>
+              <a:t>-52.2%</a:t>
             </a:r>
           </a:p>
         </p:txBody>
@@ -9141,7 +9141,7 @@
                 </a:solidFill>
                 <a:latin typeface="Segoe UI"/>
               </a:rPr>
-              <a:t>Total Rs 1,916,132 | P&amp;L Rs 190,233 (+11.0%) | Sharpe 0.77 | Vol 18.41% | VaR95 -1.67%/day</a:t>
+              <a:t>Total Rs 1,922,805 | P&amp;L Rs 198,775 (+11.5%) | Sharpe 0.48 | Vol 17.38% | VaR95 -1.67%/day</a:t>
             </a:r>
           </a:p>
         </p:txBody>

--- a/docs/pmr_daily.pptx
+++ b/docs/pmr_daily.pptx
@@ -3197,7 +3197,7 @@
                 </a:solidFill>
                 <a:latin typeface="Segoe UI"/>
               </a:rPr>
-              <a:t>Friday, 16 Oct 2026 09:01 SGT</a:t>
+              <a:t>Monday, 19 Oct 2026 08:52 SGT</a:t>
             </a:r>
           </a:p>
         </p:txBody>
@@ -3265,7 +3265,7 @@
                 </a:solidFill>
                 <a:latin typeface="Segoe UI"/>
               </a:rPr>
-              <a:t>RAG 11R / 17A / 18G   |   56.5% above 200DMA   |   Portfolio Rs 1,922,805 (+11.5%)</a:t>
+              <a:t>RAG 9R / 20A / 17G   |   54.3% above 200DMA   |   Portfolio Rs 1,927,538 (+12.0%)</a:t>
             </a:r>
           </a:p>
         </p:txBody>
@@ -3491,11 +3491,11 @@
             <a:r>
               <a:rPr sz="900" b="0">
                 <a:solidFill>
-                  <a:srgbClr val="EF4444"/>
-                </a:solidFill>
-                <a:latin typeface="Segoe UI"/>
-              </a:rPr>
-              <a:t>TCS.NS · RED</a:t>
+                  <a:srgbClr val="F59E0B"/>
+                </a:solidFill>
+                <a:latin typeface="Segoe UI"/>
+              </a:rPr>
+              <a:t>TCS.NS · AMBER</a:t>
             </a:r>
           </a:p>
         </p:txBody>
@@ -3529,7 +3529,7 @@
                 </a:solidFill>
                 <a:latin typeface="Segoe UI"/>
               </a:rPr>
-              <a:t>+15.2%</a:t>
+              <a:t>+20.8%</a:t>
             </a:r>
           </a:p>
         </p:txBody>
@@ -3655,7 +3655,7 @@
                 </a:solidFill>
                 <a:latin typeface="Segoe UI"/>
               </a:rPr>
-              <a:t>+11.7%</a:t>
+              <a:t>+16.8%</a:t>
             </a:r>
           </a:p>
         </p:txBody>
@@ -3743,11 +3743,11 @@
             <a:r>
               <a:rPr sz="900" b="0">
                 <a:solidFill>
-                  <a:srgbClr val="EF4444"/>
-                </a:solidFill>
-                <a:latin typeface="Segoe UI"/>
-              </a:rPr>
-              <a:t>^CNXIT · RED</a:t>
+                  <a:srgbClr val="F59E0B"/>
+                </a:solidFill>
+                <a:latin typeface="Segoe UI"/>
+              </a:rPr>
+              <a:t>^CNXIT · AMBER</a:t>
             </a:r>
           </a:p>
         </p:txBody>
@@ -3781,7 +3781,7 @@
                 </a:solidFill>
                 <a:latin typeface="Segoe UI"/>
               </a:rPr>
-              <a:t>+10.9%</a:t>
+              <a:t>+15.2%</a:t>
             </a:r>
           </a:p>
         </p:txBody>
@@ -3907,7 +3907,7 @@
                 </a:solidFill>
                 <a:latin typeface="Segoe UI"/>
               </a:rPr>
-              <a:t>+8.2%</a:t>
+              <a:t>+11.0%</a:t>
             </a:r>
           </a:p>
         </p:txBody>
@@ -3965,7 +3965,7 @@
                 </a:solidFill>
                 <a:latin typeface="Segoe UI"/>
               </a:rPr>
-              <a:t>Crude Oil WTI</a:t>
+              <a:t>Bharti Airtel</a:t>
             </a:r>
           </a:p>
         </p:txBody>
@@ -3995,11 +3995,11 @@
             <a:r>
               <a:rPr sz="900" b="0">
                 <a:solidFill>
-                  <a:srgbClr val="F59E0B"/>
-                </a:solidFill>
-                <a:latin typeface="Segoe UI"/>
-              </a:rPr>
-              <a:t>CL=F · AMBER</a:t>
+                  <a:srgbClr val="22C55E"/>
+                </a:solidFill>
+                <a:latin typeface="Segoe UI"/>
+              </a:rPr>
+              <a:t>BHARTIARTL.NS · GREEN</a:t>
             </a:r>
           </a:p>
         </p:txBody>
@@ -4033,7 +4033,7 @@
                 </a:solidFill>
                 <a:latin typeface="Segoe UI"/>
               </a:rPr>
-              <a:t>+6.2%</a:t>
+              <a:t>+8.4%</a:t>
             </a:r>
           </a:p>
         </p:txBody>
@@ -4193,7 +4193,7 @@
                 </a:solidFill>
                 <a:latin typeface="Segoe UI"/>
               </a:rPr>
-              <a:t>-10.6%</a:t>
+              <a:t>-11.5%</a:t>
             </a:r>
           </a:p>
         </p:txBody>
@@ -4319,7 +4319,7 @@
                 </a:solidFill>
                 <a:latin typeface="Segoe UI"/>
               </a:rPr>
-              <a:t>-9.1%</a:t>
+              <a:t>-10.0%</a:t>
             </a:r>
           </a:p>
         </p:txBody>
@@ -4377,7 +4377,7 @@
                 </a:solidFill>
                 <a:latin typeface="Segoe UI"/>
               </a:rPr>
-              <a:t>Nvidia</a:t>
+              <a:t>US Technology</a:t>
             </a:r>
           </a:p>
         </p:txBody>
@@ -4411,7 +4411,7 @@
                 </a:solidFill>
                 <a:latin typeface="Segoe UI"/>
               </a:rPr>
-              <a:t>NVDA · AMBER</a:t>
+              <a:t>XLK · AMBER</a:t>
             </a:r>
           </a:p>
         </p:txBody>
@@ -4445,7 +4445,7 @@
                 </a:solidFill>
                 <a:latin typeface="Segoe UI"/>
               </a:rPr>
-              <a:t>-4.9%</a:t>
+              <a:t>-6.3%</a:t>
             </a:r>
           </a:p>
         </p:txBody>
@@ -4503,7 +4503,7 @@
                 </a:solidFill>
                 <a:latin typeface="Segoe UI"/>
               </a:rPr>
-              <a:t>Straits Times</a:t>
+              <a:t>Nvidia</a:t>
             </a:r>
           </a:p>
         </p:txBody>
@@ -4537,7 +4537,7 @@
                 </a:solidFill>
                 <a:latin typeface="Segoe UI"/>
               </a:rPr>
-              <a:t>^STI · AMBER</a:t>
+              <a:t>NVDA · AMBER</a:t>
             </a:r>
           </a:p>
         </p:txBody>
@@ -4571,7 +4571,7 @@
                 </a:solidFill>
                 <a:latin typeface="Segoe UI"/>
               </a:rPr>
-              <a:t>-4.8%</a:t>
+              <a:t>-6.2%</a:t>
             </a:r>
           </a:p>
         </p:txBody>
@@ -4629,7 +4629,7 @@
                 </a:solidFill>
                 <a:latin typeface="Segoe UI"/>
               </a:rPr>
-              <a:t>Silver</a:t>
+              <a:t>Straits Times</a:t>
             </a:r>
           </a:p>
         </p:txBody>
@@ -4659,11 +4659,11 @@
             <a:r>
               <a:rPr sz="900" b="0">
                 <a:solidFill>
-                  <a:srgbClr val="EF4444"/>
-                </a:solidFill>
-                <a:latin typeface="Segoe UI"/>
-              </a:rPr>
-              <a:t>SI=F · RED</a:t>
+                  <a:srgbClr val="F59E0B"/>
+                </a:solidFill>
+                <a:latin typeface="Segoe UI"/>
+              </a:rPr>
+              <a:t>^STI · AMBER</a:t>
             </a:r>
           </a:p>
         </p:txBody>
@@ -5171,7 +5171,7 @@
                 </a:solidFill>
                 <a:latin typeface="Segoe UI"/>
               </a:rPr>
-              <a:t>95%</a:t>
+              <a:t>84%</a:t>
             </a:r>
           </a:p>
         </p:txBody>
@@ -5205,7 +5205,7 @@
                 </a:solidFill>
                 <a:latin typeface="Segoe UI"/>
               </a:rPr>
-              <a:t>above 200DMA · golden cross (50&gt;200) · MACD bullish</a:t>
+              <a:t>above 200DMA · golden cross (50&gt;200) · MACD bearish</a:t>
             </a:r>
           </a:p>
         </p:txBody>
@@ -5239,7 +5239,7 @@
                 </a:solidFill>
                 <a:latin typeface="Segoe UI"/>
               </a:rPr>
-              <a:t>US Energy</a:t>
+              <a:t>Bitcoin</a:t>
             </a:r>
           </a:p>
         </p:txBody>
@@ -5307,7 +5307,7 @@
                 </a:solidFill>
                 <a:latin typeface="Segoe UI"/>
               </a:rPr>
-              <a:t>95%</a:t>
+              <a:t>84%</a:t>
             </a:r>
           </a:p>
         </p:txBody>
@@ -5341,7 +5341,7 @@
                 </a:solidFill>
                 <a:latin typeface="Segoe UI"/>
               </a:rPr>
-              <a:t>above 200DMA · golden cross (50&gt;200) · MACD bullish</a:t>
+              <a:t>above 200DMA · golden cross (50&gt;200) · MACD bearish</a:t>
             </a:r>
           </a:p>
         </p:txBody>
@@ -5375,7 +5375,7 @@
                 </a:solidFill>
                 <a:latin typeface="Segoe UI"/>
               </a:rPr>
-              <a:t>Bitcoin</a:t>
+              <a:t>Crude Oil WTI</a:t>
             </a:r>
           </a:p>
         </p:txBody>
@@ -5443,7 +5443,7 @@
                 </a:solidFill>
                 <a:latin typeface="Segoe UI"/>
               </a:rPr>
-              <a:t>84%</a:t>
+              <a:t>88%</a:t>
             </a:r>
           </a:p>
         </p:txBody>
@@ -5477,7 +5477,7 @@
                 </a:solidFill>
                 <a:latin typeface="Segoe UI"/>
               </a:rPr>
-              <a:t>above 200DMA · golden cross (50&gt;200) · MACD bearish</a:t>
+              <a:t>above 200DMA · golden cross (50&gt;200) · MACD bullish</a:t>
             </a:r>
           </a:p>
         </p:txBody>
@@ -5511,7 +5511,7 @@
                 </a:solidFill>
                 <a:latin typeface="Segoe UI"/>
               </a:rPr>
-              <a:t>Natural Gas</a:t>
+              <a:t>Dollar Index</a:t>
             </a:r>
           </a:p>
         </p:txBody>
@@ -5579,7 +5579,7 @@
                 </a:solidFill>
                 <a:latin typeface="Segoe UI"/>
               </a:rPr>
-              <a:t>90%</a:t>
+              <a:t>82%</a:t>
             </a:r>
           </a:p>
         </p:txBody>
@@ -5613,7 +5613,7 @@
                 </a:solidFill>
                 <a:latin typeface="Segoe UI"/>
               </a:rPr>
-              <a:t>above 200DMA · golden cross (50&gt;200) · MACD bullish</a:t>
+              <a:t>above 200DMA · golden cross (50&gt;200) · MACD bearish</a:t>
             </a:r>
           </a:p>
         </p:txBody>
@@ -5647,7 +5647,7 @@
                 </a:solidFill>
                 <a:latin typeface="Segoe UI"/>
               </a:rPr>
-              <a:t>Dollar Index</a:t>
+              <a:t>FTSE 100</a:t>
             </a:r>
           </a:p>
         </p:txBody>
@@ -5715,7 +5715,7 @@
                 </a:solidFill>
                 <a:latin typeface="Segoe UI"/>
               </a:rPr>
-              <a:t>83%</a:t>
+              <a:t>81%</a:t>
             </a:r>
           </a:p>
         </p:txBody>
@@ -5749,7 +5749,7 @@
                 </a:solidFill>
                 <a:latin typeface="Segoe UI"/>
               </a:rPr>
-              <a:t>above 200DMA · golden cross (50&gt;200) · MACD bearish</a:t>
+              <a:t>above 200DMA · golden cross (50&gt;200) · MACD bullish</a:t>
             </a:r>
           </a:p>
         </p:txBody>
@@ -5783,7 +5783,7 @@
                 </a:solidFill>
                 <a:latin typeface="Segoe UI"/>
               </a:rPr>
-              <a:t>Crude Oil WTI</a:t>
+              <a:t>ICICI Bank</a:t>
             </a:r>
           </a:p>
         </p:txBody>
@@ -5851,7 +5851,7 @@
                 </a:solidFill>
                 <a:latin typeface="Segoe UI"/>
               </a:rPr>
-              <a:t>88%</a:t>
+              <a:t>81%</a:t>
             </a:r>
           </a:p>
         </p:txBody>
@@ -5919,7 +5919,7 @@
                 </a:solidFill>
                 <a:latin typeface="Segoe UI"/>
               </a:rPr>
-              <a:t>FTSE 100</a:t>
+              <a:t>US 1-3Y Treasury</a:t>
             </a:r>
           </a:p>
         </p:txBody>
@@ -5987,7 +5987,7 @@
                 </a:solidFill>
                 <a:latin typeface="Segoe UI"/>
               </a:rPr>
-              <a:t>82%</a:t>
+              <a:t>80%</a:t>
             </a:r>
           </a:p>
         </p:txBody>
@@ -6055,7 +6055,7 @@
                 </a:solidFill>
                 <a:latin typeface="Segoe UI"/>
               </a:rPr>
-              <a:t>ICICI Bank</a:t>
+              <a:t>Solana</a:t>
             </a:r>
           </a:p>
         </p:txBody>
@@ -6123,7 +6123,7 @@
                 </a:solidFill>
                 <a:latin typeface="Segoe UI"/>
               </a:rPr>
-              <a:t>81%</a:t>
+              <a:t>80%</a:t>
             </a:r>
           </a:p>
         </p:txBody>
@@ -6157,7 +6157,7 @@
                 </a:solidFill>
                 <a:latin typeface="Segoe UI"/>
               </a:rPr>
-              <a:t>above 200DMA · golden cross (50&gt;200) · MACD bullish</a:t>
+              <a:t>above 200DMA · golden cross (50&gt;200) · MACD bearish</a:t>
             </a:r>
           </a:p>
         </p:txBody>
@@ -6191,7 +6191,7 @@
                 </a:solidFill>
                 <a:latin typeface="Segoe UI"/>
               </a:rPr>
-              <a:t>Solana</a:t>
+              <a:t>US Energy</a:t>
             </a:r>
           </a:p>
         </p:txBody>
@@ -6225,7 +6225,7 @@
                 </a:solidFill>
                 <a:latin typeface="Segoe UI"/>
               </a:rPr>
-              <a:t>STRONG BUY</a:t>
+              <a:t>BUY</a:t>
             </a:r>
           </a:p>
         </p:txBody>
@@ -6259,7 +6259,7 @@
                 </a:solidFill>
                 <a:latin typeface="Segoe UI"/>
               </a:rPr>
-              <a:t>81%</a:t>
+              <a:t>93%</a:t>
             </a:r>
           </a:p>
         </p:txBody>
@@ -6293,7 +6293,7 @@
                 </a:solidFill>
                 <a:latin typeface="Segoe UI"/>
               </a:rPr>
-              <a:t>above 200DMA · golden cross (50&gt;200) · MACD bearish</a:t>
+              <a:t>above 200DMA · golden cross (50&gt;200) · MACD bullish</a:t>
             </a:r>
           </a:p>
         </p:txBody>
@@ -6327,7 +6327,7 @@
                 </a:solidFill>
                 <a:latin typeface="Segoe UI"/>
               </a:rPr>
-              <a:t>US 1-3Y Treasury</a:t>
+              <a:t>TCS</a:t>
             </a:r>
           </a:p>
         </p:txBody>
@@ -6361,7 +6361,7 @@
                 </a:solidFill>
                 <a:latin typeface="Segoe UI"/>
               </a:rPr>
-              <a:t>STRONG BUY</a:t>
+              <a:t>BUY</a:t>
             </a:r>
           </a:p>
         </p:txBody>
@@ -6395,7 +6395,7 @@
                 </a:solidFill>
                 <a:latin typeface="Segoe UI"/>
               </a:rPr>
-              <a:t>80%</a:t>
+              <a:t>71%</a:t>
             </a:r>
           </a:p>
         </p:txBody>
@@ -6429,7 +6429,7 @@
                 </a:solidFill>
                 <a:latin typeface="Segoe UI"/>
               </a:rPr>
-              <a:t>above 200DMA · golden cross (50&gt;200) · MACD bullish</a:t>
+              <a:t>above 200DMA · death cross (50&lt;200) · MACD bullish</a:t>
             </a:r>
           </a:p>
         </p:txBody>
@@ -6463,7 +6463,7 @@
                 </a:solidFill>
                 <a:latin typeface="Segoe UI"/>
               </a:rPr>
-              <a:t>Ethereum</a:t>
+              <a:t>NIFTY IT</a:t>
             </a:r>
           </a:p>
         </p:txBody>
@@ -6497,7 +6497,7 @@
                 </a:solidFill>
                 <a:latin typeface="Segoe UI"/>
               </a:rPr>
-              <a:t>STRONG BUY</a:t>
+              <a:t>BUY</a:t>
             </a:r>
           </a:p>
         </p:txBody>
@@ -6531,7 +6531,7 @@
                 </a:solidFill>
                 <a:latin typeface="Segoe UI"/>
               </a:rPr>
-              <a:t>80%</a:t>
+              <a:t>70%</a:t>
             </a:r>
           </a:p>
         </p:txBody>
@@ -6565,7 +6565,7 @@
                 </a:solidFill>
                 <a:latin typeface="Segoe UI"/>
               </a:rPr>
-              <a:t>above 200DMA · golden cross (50&gt;200) · MACD bearish</a:t>
+              <a:t>above 200DMA · death cross (50&lt;200) · MACD bullish</a:t>
             </a:r>
           </a:p>
         </p:txBody>
@@ -6659,7 +6659,7 @@
                 </a:solidFill>
                 <a:latin typeface="Segoe UI"/>
               </a:rPr>
-              <a:t>Base currency INR · USD/INR 95.15</a:t>
+              <a:t>Base currency INR · USD/INR 94.95</a:t>
             </a:r>
           </a:p>
         </p:txBody>
@@ -7067,7 +7067,7 @@
                 </a:solidFill>
                 <a:latin typeface="Segoe UI"/>
               </a:rPr>
-              <a:t>82,265</a:t>
+              <a:t>82,318</a:t>
             </a:r>
           </a:p>
         </p:txBody>
@@ -7101,7 +7101,7 @@
                 </a:solidFill>
                 <a:latin typeface="Segoe UI"/>
               </a:rPr>
-              <a:t>Rs 782,757</a:t>
+              <a:t>Rs 781,614</a:t>
             </a:r>
           </a:p>
         </p:txBody>
@@ -7135,7 +7135,7 @@
                 </a:solidFill>
                 <a:latin typeface="Segoe UI"/>
               </a:rPr>
-              <a:t>Rs 211,850</a:t>
+              <a:t>Rs 211,914</a:t>
             </a:r>
           </a:p>
         </p:txBody>
@@ -7169,7 +7169,7 @@
                 </a:solidFill>
                 <a:latin typeface="Segoe UI"/>
               </a:rPr>
-              <a:t>+37.1%</a:t>
+              <a:t>+37.2%</a:t>
             </a:r>
           </a:p>
         </p:txBody>
@@ -7203,7 +7203,7 @@
                 </a:solidFill>
                 <a:latin typeface="Segoe UI"/>
               </a:rPr>
-              <a:t>+0.9%</a:t>
+              <a:t>+1.1%</a:t>
             </a:r>
           </a:p>
         </p:txBody>
@@ -7339,7 +7339,7 @@
                 </a:solidFill>
                 <a:latin typeface="Segoe UI"/>
               </a:rPr>
-              <a:t>4,176</a:t>
+              <a:t>4,195</a:t>
             </a:r>
           </a:p>
         </p:txBody>
@@ -7373,7 +7373,7 @@
                 </a:solidFill>
                 <a:latin typeface="Segoe UI"/>
               </a:rPr>
-              <a:t>Rs 397,361</a:t>
+              <a:t>Rs 398,344</a:t>
             </a:r>
           </a:p>
         </p:txBody>
@@ -7407,7 +7407,7 @@
                 </a:solidFill>
                 <a:latin typeface="Segoe UI"/>
               </a:rPr>
-              <a:t>Rs 178,513</a:t>
+              <a:t>Rs 179,959</a:t>
             </a:r>
           </a:p>
         </p:txBody>
@@ -7441,7 +7441,7 @@
                 </a:solidFill>
                 <a:latin typeface="Segoe UI"/>
               </a:rPr>
-              <a:t>+81.6%</a:t>
+              <a:t>+82.4%</a:t>
             </a:r>
           </a:p>
         </p:txBody>
@@ -7611,7 +7611,7 @@
                 </a:solidFill>
                 <a:latin typeface="Segoe UI"/>
               </a:rPr>
-              <a:t>342</a:t>
+              <a:t>343</a:t>
             </a:r>
           </a:p>
         </p:txBody>
@@ -7645,7 +7645,7 @@
                 </a:solidFill>
                 <a:latin typeface="Segoe UI"/>
               </a:rPr>
-              <a:t>Rs 325,417</a:t>
+              <a:t>Rs 326,115</a:t>
             </a:r>
           </a:p>
         </p:txBody>
@@ -7679,7 +7679,7 @@
                 </a:solidFill>
                 <a:latin typeface="Segoe UI"/>
               </a:rPr>
-              <a:t>Rs 149,388</a:t>
+              <a:t>Rs 150,458</a:t>
             </a:r>
           </a:p>
         </p:txBody>
@@ -7713,7 +7713,7 @@
                 </a:solidFill>
                 <a:latin typeface="Segoe UI"/>
               </a:rPr>
-              <a:t>+84.9%</a:t>
+              <a:t>+85.7%</a:t>
             </a:r>
           </a:p>
         </p:txBody>
@@ -7883,7 +7883,7 @@
                 </a:solidFill>
                 <a:latin typeface="Segoe UI"/>
               </a:rPr>
-              <a:t>217</a:t>
+              <a:t>214</a:t>
             </a:r>
           </a:p>
         </p:txBody>
@@ -7917,7 +7917,7 @@
                 </a:solidFill>
                 <a:latin typeface="Segoe UI"/>
               </a:rPr>
-              <a:t>Rs 165,358</a:t>
+              <a:t>Rs 162,653</a:t>
             </a:r>
           </a:p>
         </p:txBody>
@@ -7951,7 +7951,7 @@
                 </a:solidFill>
                 <a:latin typeface="Segoe UI"/>
               </a:rPr>
-              <a:t>Rs -177,187</a:t>
+              <a:t>Rs -179,167</a:t>
             </a:r>
           </a:p>
         </p:txBody>
@@ -7985,7 +7985,7 @@
                 </a:solidFill>
                 <a:latin typeface="Segoe UI"/>
               </a:rPr>
-              <a:t>-51.7%</a:t>
+              <a:t>-52.4%</a:t>
             </a:r>
           </a:p>
         </p:txBody>
@@ -8155,7 +8155,7 @@
                 </a:solidFill>
                 <a:latin typeface="Segoe UI"/>
               </a:rPr>
-              <a:t>1,110</a:t>
+              <a:t>1,161</a:t>
             </a:r>
           </a:p>
         </p:txBody>
@@ -8189,7 +8189,7 @@
                 </a:solidFill>
                 <a:latin typeface="Segoe UI"/>
               </a:rPr>
-              <a:t>Rs 88,800</a:t>
+              <a:t>Rs 92,896</a:t>
             </a:r>
           </a:p>
         </p:txBody>
@@ -8223,7 +8223,7 @@
                 </a:solidFill>
                 <a:latin typeface="Segoe UI"/>
               </a:rPr>
-              <a:t>Rs -23,200</a:t>
+              <a:t>Rs -19,104</a:t>
             </a:r>
           </a:p>
         </p:txBody>
@@ -8257,7 +8257,7 @@
                 </a:solidFill>
                 <a:latin typeface="Segoe UI"/>
               </a:rPr>
-              <a:t>-20.7%</a:t>
+              <a:t>-17.1%</a:t>
             </a:r>
           </a:p>
         </p:txBody>
@@ -8325,7 +8325,7 @@
                 </a:solidFill>
                 <a:latin typeface="Segoe UI"/>
               </a:rPr>
-              <a:t>RELIANCE.NS</a:t>
+              <a:t>TCS.NS</a:t>
             </a:r>
           </a:p>
         </p:txBody>
@@ -8359,7 +8359,7 @@
                 </a:solidFill>
                 <a:latin typeface="Segoe UI"/>
               </a:rPr>
-              <a:t>50</a:t>
+              <a:t>25</a:t>
             </a:r>
           </a:p>
         </p:txBody>
@@ -8393,7 +8393,7 @@
                 </a:solidFill>
                 <a:latin typeface="Segoe UI"/>
               </a:rPr>
-              <a:t>2,450</a:t>
+              <a:t>3,600</a:t>
             </a:r>
           </a:p>
         </p:txBody>
@@ -8427,7 +8427,7 @@
                 </a:solidFill>
                 <a:latin typeface="Segoe UI"/>
               </a:rPr>
-              <a:t>1,215</a:t>
+              <a:t>2,465</a:t>
             </a:r>
           </a:p>
         </p:txBody>
@@ -8461,7 +8461,7 @@
                 </a:solidFill>
                 <a:latin typeface="Segoe UI"/>
               </a:rPr>
-              <a:t>Rs 60,750</a:t>
+              <a:t>Rs 61,625</a:t>
             </a:r>
           </a:p>
         </p:txBody>
@@ -8495,7 +8495,7 @@
                 </a:solidFill>
                 <a:latin typeface="Segoe UI"/>
               </a:rPr>
-              <a:t>Rs -61,750</a:t>
+              <a:t>Rs -28,375</a:t>
             </a:r>
           </a:p>
         </p:txBody>
@@ -8529,7 +8529,7 @@
                 </a:solidFill>
                 <a:latin typeface="Segoe UI"/>
               </a:rPr>
-              <a:t>-50.4%</a:t>
+              <a:t>-31.5%</a:t>
             </a:r>
           </a:p>
         </p:txBody>
@@ -8597,7 +8597,7 @@
                 </a:solidFill>
                 <a:latin typeface="Segoe UI"/>
               </a:rPr>
-              <a:t>TCS.NS</a:t>
+              <a:t>RELIANCE.NS</a:t>
             </a:r>
           </a:p>
         </p:txBody>
@@ -8631,7 +8631,7 @@
                 </a:solidFill>
                 <a:latin typeface="Segoe UI"/>
               </a:rPr>
-              <a:t>25</a:t>
+              <a:t>50</a:t>
             </a:r>
           </a:p>
         </p:txBody>
@@ -8665,7 +8665,7 @@
                 </a:solidFill>
                 <a:latin typeface="Segoe UI"/>
               </a:rPr>
-              <a:t>3,600</a:t>
+              <a:t>2,450</a:t>
             </a:r>
           </a:p>
         </p:txBody>
@@ -8699,7 +8699,7 @@
                 </a:solidFill>
                 <a:latin typeface="Segoe UI"/>
               </a:rPr>
-              <a:t>2,350</a:t>
+              <a:t>1,211</a:t>
             </a:r>
           </a:p>
         </p:txBody>
@@ -8733,7 +8733,7 @@
                 </a:solidFill>
                 <a:latin typeface="Segoe UI"/>
               </a:rPr>
-              <a:t>Rs 58,750</a:t>
+              <a:t>Rs 60,560</a:t>
             </a:r>
           </a:p>
         </p:txBody>
@@ -8767,7 +8767,7 @@
                 </a:solidFill>
                 <a:latin typeface="Segoe UI"/>
               </a:rPr>
-              <a:t>Rs -31,250</a:t>
+              <a:t>Rs -61,940</a:t>
             </a:r>
           </a:p>
         </p:txBody>
@@ -8801,7 +8801,7 @@
                 </a:solidFill>
                 <a:latin typeface="Segoe UI"/>
               </a:rPr>
-              <a:t>-34.7%</a:t>
+              <a:t>-50.6%</a:t>
             </a:r>
           </a:p>
         </p:txBody>
@@ -8971,7 +8971,7 @@
                 </a:solidFill>
                 <a:latin typeface="Segoe UI"/>
               </a:rPr>
-              <a:t>727</a:t>
+              <a:t>729</a:t>
             </a:r>
           </a:p>
         </p:txBody>
@@ -9005,7 +9005,7 @@
                 </a:solidFill>
                 <a:latin typeface="Segoe UI"/>
               </a:rPr>
-              <a:t>Rs 43,611</a:t>
+              <a:t>Rs 43,731</a:t>
             </a:r>
           </a:p>
         </p:txBody>
@@ -9039,7 +9039,7 @@
                 </a:solidFill>
                 <a:latin typeface="Segoe UI"/>
               </a:rPr>
-              <a:t>Rs -47,589</a:t>
+              <a:t>Rs -47,469</a:t>
             </a:r>
           </a:p>
         </p:txBody>
@@ -9073,7 +9073,7 @@
                 </a:solidFill>
                 <a:latin typeface="Segoe UI"/>
               </a:rPr>
-              <a:t>-52.2%</a:t>
+              <a:t>-52.0%</a:t>
             </a:r>
           </a:p>
         </p:txBody>
@@ -9141,7 +9141,7 @@
                 </a:solidFill>
                 <a:latin typeface="Segoe UI"/>
               </a:rPr>
-              <a:t>Total Rs 1,922,805 | P&amp;L Rs 198,775 (+11.5%) | Sharpe 0.48 | Vol 17.38% | VaR95 -1.67%/day</a:t>
+              <a:t>Total Rs 1,927,538 | P&amp;L Rs 206,275 (+12.0%) | Sharpe 0.49 | Vol 17.3% | VaR95 -1.65%/day</a:t>
             </a:r>
           </a:p>
         </p:txBody>

--- a/docs/pmr_daily.pptx
+++ b/docs/pmr_daily.pptx
@@ -3197,7 +3197,7 @@
                 </a:solidFill>
                 <a:latin typeface="Segoe UI"/>
               </a:rPr>
-              <a:t>Monday, 19 Oct 2026 08:52 SGT</a:t>
+              <a:t>Tuesday, 20 Oct 2026 09:37 SGT</a:t>
             </a:r>
           </a:p>
         </p:txBody>
@@ -3265,7 +3265,7 @@
                 </a:solidFill>
                 <a:latin typeface="Segoe UI"/>
               </a:rPr>
-              <a:t>RAG 9R / 20A / 17G   |   54.3% above 200DMA   |   Portfolio Rs 1,927,538 (+12.0%)</a:t>
+              <a:t>RAG 9R / 20A / 17G   |   56.5% above 200DMA   |   Portfolio Rs 1,914,639 (+11.3%)</a:t>
             </a:r>
           </a:p>
         </p:txBody>
@@ -3781,7 +3781,7 @@
                 </a:solidFill>
                 <a:latin typeface="Segoe UI"/>
               </a:rPr>
-              <a:t>+15.2%</a:t>
+              <a:t>+13.8%</a:t>
             </a:r>
           </a:p>
         </p:txBody>
@@ -3907,7 +3907,7 @@
                 </a:solidFill>
                 <a:latin typeface="Segoe UI"/>
               </a:rPr>
-              <a:t>+11.0%</a:t>
+              <a:t>+10.2%</a:t>
             </a:r>
           </a:p>
         </p:txBody>
@@ -3965,7 +3965,7 @@
                 </a:solidFill>
                 <a:latin typeface="Segoe UI"/>
               </a:rPr>
-              <a:t>Bharti Airtel</a:t>
+              <a:t>Crude Oil WTI</a:t>
             </a:r>
           </a:p>
         </p:txBody>
@@ -3995,11 +3995,11 @@
             <a:r>
               <a:rPr sz="900" b="0">
                 <a:solidFill>
-                  <a:srgbClr val="22C55E"/>
-                </a:solidFill>
-                <a:latin typeface="Segoe UI"/>
-              </a:rPr>
-              <a:t>BHARTIARTL.NS · GREEN</a:t>
+                  <a:srgbClr val="F59E0B"/>
+                </a:solidFill>
+                <a:latin typeface="Segoe UI"/>
+              </a:rPr>
+              <a:t>CL=F · AMBER</a:t>
             </a:r>
           </a:p>
         </p:txBody>
@@ -4033,7 +4033,7 @@
                 </a:solidFill>
                 <a:latin typeface="Segoe UI"/>
               </a:rPr>
-              <a:t>+8.4%</a:t>
+              <a:t>+9.4%</a:t>
             </a:r>
           </a:p>
         </p:txBody>
@@ -4193,7 +4193,7 @@
                 </a:solidFill>
                 <a:latin typeface="Segoe UI"/>
               </a:rPr>
-              <a:t>-11.5%</a:t>
+              <a:t>-11.7%</a:t>
             </a:r>
           </a:p>
         </p:txBody>
@@ -4319,7 +4319,7 @@
                 </a:solidFill>
                 <a:latin typeface="Segoe UI"/>
               </a:rPr>
-              <a:t>-10.0%</a:t>
+              <a:t>-11.0%</a:t>
             </a:r>
           </a:p>
         </p:txBody>
@@ -4377,7 +4377,7 @@
                 </a:solidFill>
                 <a:latin typeface="Segoe UI"/>
               </a:rPr>
-              <a:t>US Technology</a:t>
+              <a:t>Silver</a:t>
             </a:r>
           </a:p>
         </p:txBody>
@@ -4407,11 +4407,11 @@
             <a:r>
               <a:rPr sz="900" b="0">
                 <a:solidFill>
-                  <a:srgbClr val="F59E0B"/>
-                </a:solidFill>
-                <a:latin typeface="Segoe UI"/>
-              </a:rPr>
-              <a:t>XLK · AMBER</a:t>
+                  <a:srgbClr val="EF4444"/>
+                </a:solidFill>
+                <a:latin typeface="Segoe UI"/>
+              </a:rPr>
+              <a:t>SI=F · RED</a:t>
             </a:r>
           </a:p>
         </p:txBody>
@@ -4445,7 +4445,7 @@
                 </a:solidFill>
                 <a:latin typeface="Segoe UI"/>
               </a:rPr>
-              <a:t>-6.3%</a:t>
+              <a:t>-5.8%</a:t>
             </a:r>
           </a:p>
         </p:txBody>
@@ -4503,7 +4503,7 @@
                 </a:solidFill>
                 <a:latin typeface="Segoe UI"/>
               </a:rPr>
-              <a:t>Nvidia</a:t>
+              <a:t>US Technology</a:t>
             </a:r>
           </a:p>
         </p:txBody>
@@ -4537,7 +4537,7 @@
                 </a:solidFill>
                 <a:latin typeface="Segoe UI"/>
               </a:rPr>
-              <a:t>NVDA · AMBER</a:t>
+              <a:t>XLK · AMBER</a:t>
             </a:r>
           </a:p>
         </p:txBody>
@@ -4571,7 +4571,7 @@
                 </a:solidFill>
                 <a:latin typeface="Segoe UI"/>
               </a:rPr>
-              <a:t>-6.2%</a:t>
+              <a:t>-5.0%</a:t>
             </a:r>
           </a:p>
         </p:txBody>
@@ -4629,7 +4629,7 @@
                 </a:solidFill>
                 <a:latin typeface="Segoe UI"/>
               </a:rPr>
-              <a:t>Straits Times</a:t>
+              <a:t>Nvidia</a:t>
             </a:r>
           </a:p>
         </p:txBody>
@@ -4663,7 +4663,7 @@
                 </a:solidFill>
                 <a:latin typeface="Segoe UI"/>
               </a:rPr>
-              <a:t>^STI · AMBER</a:t>
+              <a:t>NVDA · AMBER</a:t>
             </a:r>
           </a:p>
         </p:txBody>
@@ -4697,7 +4697,7 @@
                 </a:solidFill>
                 <a:latin typeface="Segoe UI"/>
               </a:rPr>
-              <a:t>-4.6%</a:t>
+              <a:t>-4.9%</a:t>
             </a:r>
           </a:p>
         </p:txBody>
@@ -5103,7 +5103,7 @@
                 </a:solidFill>
                 <a:latin typeface="Segoe UI"/>
               </a:rPr>
-              <a:t>Microsoft</a:t>
+              <a:t>US Energy</a:t>
             </a:r>
           </a:p>
         </p:txBody>
@@ -5171,7 +5171,7 @@
                 </a:solidFill>
                 <a:latin typeface="Segoe UI"/>
               </a:rPr>
-              <a:t>84%</a:t>
+              <a:t>95%</a:t>
             </a:r>
           </a:p>
         </p:txBody>
@@ -5205,7 +5205,7 @@
                 </a:solidFill>
                 <a:latin typeface="Segoe UI"/>
               </a:rPr>
-              <a:t>above 200DMA · golden cross (50&gt;200) · MACD bearish</a:t>
+              <a:t>above 200DMA · golden cross (50&gt;200) · MACD bullish</a:t>
             </a:r>
           </a:p>
         </p:txBody>
@@ -5239,7 +5239,7 @@
                 </a:solidFill>
                 <a:latin typeface="Segoe UI"/>
               </a:rPr>
-              <a:t>Bitcoin</a:t>
+              <a:t>Microsoft</a:t>
             </a:r>
           </a:p>
         </p:txBody>
@@ -5307,7 +5307,7 @@
                 </a:solidFill>
                 <a:latin typeface="Segoe UI"/>
               </a:rPr>
-              <a:t>84%</a:t>
+              <a:t>85%</a:t>
             </a:r>
           </a:p>
         </p:txBody>
@@ -5443,7 +5443,7 @@
                 </a:solidFill>
                 <a:latin typeface="Segoe UI"/>
               </a:rPr>
-              <a:t>88%</a:t>
+              <a:t>89%</a:t>
             </a:r>
           </a:p>
         </p:txBody>
@@ -5647,7 +5647,7 @@
                 </a:solidFill>
                 <a:latin typeface="Segoe UI"/>
               </a:rPr>
-              <a:t>FTSE 100</a:t>
+              <a:t>Bitcoin</a:t>
             </a:r>
           </a:p>
         </p:txBody>
@@ -5715,7 +5715,7 @@
                 </a:solidFill>
                 <a:latin typeface="Segoe UI"/>
               </a:rPr>
-              <a:t>81%</a:t>
+              <a:t>82%</a:t>
             </a:r>
           </a:p>
         </p:txBody>
@@ -5749,7 +5749,7 @@
                 </a:solidFill>
                 <a:latin typeface="Segoe UI"/>
               </a:rPr>
-              <a:t>above 200DMA · golden cross (50&gt;200) · MACD bullish</a:t>
+              <a:t>above 200DMA · golden cross (50&gt;200) · MACD bearish</a:t>
             </a:r>
           </a:p>
         </p:txBody>
@@ -5783,7 +5783,7 @@
                 </a:solidFill>
                 <a:latin typeface="Segoe UI"/>
               </a:rPr>
-              <a:t>ICICI Bank</a:t>
+              <a:t>Amazon</a:t>
             </a:r>
           </a:p>
         </p:txBody>
@@ -5851,7 +5851,7 @@
                 </a:solidFill>
                 <a:latin typeface="Segoe UI"/>
               </a:rPr>
-              <a:t>81%</a:t>
+              <a:t>93%</a:t>
             </a:r>
           </a:p>
         </p:txBody>
@@ -5919,7 +5919,7 @@
                 </a:solidFill>
                 <a:latin typeface="Segoe UI"/>
               </a:rPr>
-              <a:t>US 1-3Y Treasury</a:t>
+              <a:t>ICICI Bank</a:t>
             </a:r>
           </a:p>
         </p:txBody>
@@ -5987,7 +5987,7 @@
                 </a:solidFill>
                 <a:latin typeface="Segoe UI"/>
               </a:rPr>
-              <a:t>80%</a:t>
+              <a:t>81%</a:t>
             </a:r>
           </a:p>
         </p:txBody>
@@ -6055,7 +6055,7 @@
                 </a:solidFill>
                 <a:latin typeface="Segoe UI"/>
               </a:rPr>
-              <a:t>Solana</a:t>
+              <a:t>FTSE 100</a:t>
             </a:r>
           </a:p>
         </p:txBody>
@@ -6157,7 +6157,7 @@
                 </a:solidFill>
                 <a:latin typeface="Segoe UI"/>
               </a:rPr>
-              <a:t>above 200DMA · golden cross (50&gt;200) · MACD bearish</a:t>
+              <a:t>above 200DMA · golden cross (50&gt;200) · MACD bullish</a:t>
             </a:r>
           </a:p>
         </p:txBody>
@@ -6191,7 +6191,7 @@
                 </a:solidFill>
                 <a:latin typeface="Segoe UI"/>
               </a:rPr>
-              <a:t>US Energy</a:t>
+              <a:t>Solana</a:t>
             </a:r>
           </a:p>
         </p:txBody>
@@ -6225,7 +6225,7 @@
                 </a:solidFill>
                 <a:latin typeface="Segoe UI"/>
               </a:rPr>
-              <a:t>BUY</a:t>
+              <a:t>STRONG BUY</a:t>
             </a:r>
           </a:p>
         </p:txBody>
@@ -6259,7 +6259,7 @@
                 </a:solidFill>
                 <a:latin typeface="Segoe UI"/>
               </a:rPr>
-              <a:t>93%</a:t>
+              <a:t>80%</a:t>
             </a:r>
           </a:p>
         </p:txBody>
@@ -6293,7 +6293,7 @@
                 </a:solidFill>
                 <a:latin typeface="Segoe UI"/>
               </a:rPr>
-              <a:t>above 200DMA · golden cross (50&gt;200) · MACD bullish</a:t>
+              <a:t>above 200DMA · golden cross (50&gt;200) · MACD bearish</a:t>
             </a:r>
           </a:p>
         </p:txBody>
@@ -6395,7 +6395,7 @@
                 </a:solidFill>
                 <a:latin typeface="Segoe UI"/>
               </a:rPr>
-              <a:t>71%</a:t>
+              <a:t>72%</a:t>
             </a:r>
           </a:p>
         </p:txBody>
@@ -6659,7 +6659,7 @@
                 </a:solidFill>
                 <a:latin typeface="Segoe UI"/>
               </a:rPr>
-              <a:t>Base currency INR · USD/INR 94.95</a:t>
+              <a:t>Base currency INR · USD/INR 94.92</a:t>
             </a:r>
           </a:p>
         </p:txBody>
@@ -7067,7 +7067,7 @@
                 </a:solidFill>
                 <a:latin typeface="Segoe UI"/>
               </a:rPr>
-              <a:t>82,318</a:t>
+              <a:t>81,436</a:t>
             </a:r>
           </a:p>
         </p:txBody>
@@ -7101,7 +7101,7 @@
                 </a:solidFill>
                 <a:latin typeface="Segoe UI"/>
               </a:rPr>
-              <a:t>Rs 781,614</a:t>
+              <a:t>Rs 772,954</a:t>
             </a:r>
           </a:p>
         </p:txBody>
@@ -7135,7 +7135,7 @@
                 </a:solidFill>
                 <a:latin typeface="Segoe UI"/>
               </a:rPr>
-              <a:t>Rs 211,914</a:t>
+              <a:t>Rs 203,464</a:t>
             </a:r>
           </a:p>
         </p:txBody>
@@ -7169,7 +7169,7 @@
                 </a:solidFill>
                 <a:latin typeface="Segoe UI"/>
               </a:rPr>
-              <a:t>+37.2%</a:t>
+              <a:t>+35.7%</a:t>
             </a:r>
           </a:p>
         </p:txBody>
@@ -7199,11 +7199,11 @@
             <a:r>
               <a:rPr sz="1000" b="0">
                 <a:solidFill>
-                  <a:srgbClr val="22C55E"/>
-                </a:solidFill>
-                <a:latin typeface="Segoe UI"/>
-              </a:rPr>
-              <a:t>+1.1%</a:t>
+                  <a:srgbClr val="EF4444"/>
+                </a:solidFill>
+                <a:latin typeface="Segoe UI"/>
+              </a:rPr>
+              <a:t>-0.7%</a:t>
             </a:r>
           </a:p>
         </p:txBody>
@@ -7339,7 +7339,7 @@
                 </a:solidFill>
                 <a:latin typeface="Segoe UI"/>
               </a:rPr>
-              <a:t>4,195</a:t>
+              <a:t>4,136</a:t>
             </a:r>
           </a:p>
         </p:txBody>
@@ -7373,7 +7373,7 @@
                 </a:solidFill>
                 <a:latin typeface="Segoe UI"/>
               </a:rPr>
-              <a:t>Rs 398,344</a:t>
+              <a:t>Rs 392,530</a:t>
             </a:r>
           </a:p>
         </p:txBody>
@@ -7407,7 +7407,7 @@
                 </a:solidFill>
                 <a:latin typeface="Segoe UI"/>
               </a:rPr>
-              <a:t>Rs 179,959</a:t>
+              <a:t>Rs 174,226</a:t>
             </a:r>
           </a:p>
         </p:txBody>
@@ -7441,7 +7441,7 @@
                 </a:solidFill>
                 <a:latin typeface="Segoe UI"/>
               </a:rPr>
-              <a:t>+82.4%</a:t>
+              <a:t>+79.8%</a:t>
             </a:r>
           </a:p>
         </p:txBody>
@@ -7645,7 +7645,7 @@
                 </a:solidFill>
                 <a:latin typeface="Segoe UI"/>
               </a:rPr>
-              <a:t>Rs 326,115</a:t>
+              <a:t>Rs 325,502</a:t>
             </a:r>
           </a:p>
         </p:txBody>
@@ -7679,7 +7679,7 @@
                 </a:solidFill>
                 <a:latin typeface="Segoe UI"/>
               </a:rPr>
-              <a:t>Rs 150,458</a:t>
+              <a:t>Rs 149,909</a:t>
             </a:r>
           </a:p>
         </p:txBody>
@@ -7713,7 +7713,7 @@
                 </a:solidFill>
                 <a:latin typeface="Segoe UI"/>
               </a:rPr>
-              <a:t>+85.7%</a:t>
+              <a:t>+85.4%</a:t>
             </a:r>
           </a:p>
         </p:txBody>
@@ -7883,7 +7883,7 @@
                 </a:solidFill>
                 <a:latin typeface="Segoe UI"/>
               </a:rPr>
-              <a:t>214</a:t>
+              <a:t>217</a:t>
             </a:r>
           </a:p>
         </p:txBody>
@@ -7917,7 +7917,7 @@
                 </a:solidFill>
                 <a:latin typeface="Segoe UI"/>
               </a:rPr>
-              <a:t>Rs 162,653</a:t>
+              <a:t>Rs 164,841</a:t>
             </a:r>
           </a:p>
         </p:txBody>
@@ -7951,7 +7951,7 @@
                 </a:solidFill>
                 <a:latin typeface="Segoe UI"/>
               </a:rPr>
-              <a:t>Rs -179,167</a:t>
+              <a:t>Rs -176,853</a:t>
             </a:r>
           </a:p>
         </p:txBody>
@@ -7985,7 +7985,7 @@
                 </a:solidFill>
                 <a:latin typeface="Segoe UI"/>
               </a:rPr>
-              <a:t>-52.4%</a:t>
+              <a:t>-51.8%</a:t>
             </a:r>
           </a:p>
         </p:txBody>
@@ -9141,7 +9141,7 @@
                 </a:solidFill>
                 <a:latin typeface="Segoe UI"/>
               </a:rPr>
-              <a:t>Total Rs 1,927,538 | P&amp;L Rs 206,275 (+12.0%) | Sharpe 0.49 | Vol 17.3% | VaR95 -1.65%/day</a:t>
+              <a:t>Total Rs 1,914,639 | P&amp;L Rs 193,857 (+11.3%) | Sharpe 0.52 | Vol 17.22% | VaR95 -1.64%/day</a:t>
             </a:r>
           </a:p>
         </p:txBody>

--- a/docs/pmr_daily.pptx
+++ b/docs/pmr_daily.pptx
@@ -3197,7 +3197,7 @@
                 </a:solidFill>
                 <a:latin typeface="Segoe UI"/>
               </a:rPr>
-              <a:t>Tuesday, 20 Oct 2026 09:37 SGT</a:t>
+              <a:t>Wednesday, 21 Oct 2026 09:21 SGT</a:t>
             </a:r>
           </a:p>
         </p:txBody>
@@ -3265,7 +3265,7 @@
                 </a:solidFill>
                 <a:latin typeface="Segoe UI"/>
               </a:rPr>
-              <a:t>RAG 9R / 20A / 17G   |   56.5% above 200DMA   |   Portfolio Rs 1,914,639 (+11.3%)</a:t>
+              <a:t>RAG 7R / 21A / 18G   |   56.5% above 200DMA   |   Portfolio Rs 1,919,445 (+11.7%)</a:t>
             </a:r>
           </a:p>
         </p:txBody>
@@ -3529,7 +3529,7 @@
                 </a:solidFill>
                 <a:latin typeface="Segoe UI"/>
               </a:rPr>
-              <a:t>+20.8%</a:t>
+              <a:t>+20.6%</a:t>
             </a:r>
           </a:p>
         </p:txBody>
@@ -3587,7 +3587,7 @@
                 </a:solidFill>
                 <a:latin typeface="Segoe UI"/>
               </a:rPr>
-              <a:t>Infosys</a:t>
+              <a:t>NIFTY IT</a:t>
             </a:r>
           </a:p>
         </p:txBody>
@@ -3617,11 +3617,11 @@
             <a:r>
               <a:rPr sz="900" b="0">
                 <a:solidFill>
-                  <a:srgbClr val="EF4444"/>
-                </a:solidFill>
-                <a:latin typeface="Segoe UI"/>
-              </a:rPr>
-              <a:t>INFY.NS · RED</a:t>
+                  <a:srgbClr val="22C55E"/>
+                </a:solidFill>
+                <a:latin typeface="Segoe UI"/>
+              </a:rPr>
+              <a:t>^CNXIT · GREEN</a:t>
             </a:r>
           </a:p>
         </p:txBody>
@@ -3655,7 +3655,7 @@
                 </a:solidFill>
                 <a:latin typeface="Segoe UI"/>
               </a:rPr>
-              <a:t>+16.8%</a:t>
+              <a:t>+13.8%</a:t>
             </a:r>
           </a:p>
         </p:txBody>
@@ -3713,7 +3713,7 @@
                 </a:solidFill>
                 <a:latin typeface="Segoe UI"/>
               </a:rPr>
-              <a:t>NIFTY IT</a:t>
+              <a:t>Infosys</a:t>
             </a:r>
           </a:p>
         </p:txBody>
@@ -3747,7 +3747,7 @@
                 </a:solidFill>
                 <a:latin typeface="Segoe UI"/>
               </a:rPr>
-              <a:t>^CNXIT · AMBER</a:t>
+              <a:t>INFY.NS · AMBER</a:t>
             </a:r>
           </a:p>
         </p:txBody>
@@ -3781,7 +3781,7 @@
                 </a:solidFill>
                 <a:latin typeface="Segoe UI"/>
               </a:rPr>
-              <a:t>+13.8%</a:t>
+              <a:t>+13.7%</a:t>
             </a:r>
           </a:p>
         </p:txBody>
@@ -4033,7 +4033,7 @@
                 </a:solidFill>
                 <a:latin typeface="Segoe UI"/>
               </a:rPr>
-              <a:t>+9.4%</a:t>
+              <a:t>+9.3%</a:t>
             </a:r>
           </a:p>
         </p:txBody>
@@ -4193,7 +4193,7 @@
                 </a:solidFill>
                 <a:latin typeface="Segoe UI"/>
               </a:rPr>
-              <a:t>-11.7%</a:t>
+              <a:t>-9.9%</a:t>
             </a:r>
           </a:p>
         </p:txBody>
@@ -4319,7 +4319,7 @@
                 </a:solidFill>
                 <a:latin typeface="Segoe UI"/>
               </a:rPr>
-              <a:t>-11.0%</a:t>
+              <a:t>-9.0%</a:t>
             </a:r>
           </a:p>
         </p:txBody>
@@ -4377,7 +4377,7 @@
                 </a:solidFill>
                 <a:latin typeface="Segoe UI"/>
               </a:rPr>
-              <a:t>Silver</a:t>
+              <a:t>US Technology</a:t>
             </a:r>
           </a:p>
         </p:txBody>
@@ -4407,11 +4407,11 @@
             <a:r>
               <a:rPr sz="900" b="0">
                 <a:solidFill>
-                  <a:srgbClr val="EF4444"/>
-                </a:solidFill>
-                <a:latin typeface="Segoe UI"/>
-              </a:rPr>
-              <a:t>SI=F · RED</a:t>
+                  <a:srgbClr val="F59E0B"/>
+                </a:solidFill>
+                <a:latin typeface="Segoe UI"/>
+              </a:rPr>
+              <a:t>XLK · AMBER</a:t>
             </a:r>
           </a:p>
         </p:txBody>
@@ -4445,7 +4445,7 @@
                 </a:solidFill>
                 <a:latin typeface="Segoe UI"/>
               </a:rPr>
-              <a:t>-5.8%</a:t>
+              <a:t>-5.0%</a:t>
             </a:r>
           </a:p>
         </p:txBody>
@@ -4503,7 +4503,7 @@
                 </a:solidFill>
                 <a:latin typeface="Segoe UI"/>
               </a:rPr>
-              <a:t>US Technology</a:t>
+              <a:t>Nvidia</a:t>
             </a:r>
           </a:p>
         </p:txBody>
@@ -4537,7 +4537,7 @@
                 </a:solidFill>
                 <a:latin typeface="Segoe UI"/>
               </a:rPr>
-              <a:t>XLK · AMBER</a:t>
+              <a:t>NVDA · AMBER</a:t>
             </a:r>
           </a:p>
         </p:txBody>
@@ -4571,7 +4571,7 @@
                 </a:solidFill>
                 <a:latin typeface="Segoe UI"/>
               </a:rPr>
-              <a:t>-5.0%</a:t>
+              <a:t>-4.9%</a:t>
             </a:r>
           </a:p>
         </p:txBody>
@@ -4629,7 +4629,7 @@
                 </a:solidFill>
                 <a:latin typeface="Segoe UI"/>
               </a:rPr>
-              <a:t>Nvidia</a:t>
+              <a:t>Clean Energy</a:t>
             </a:r>
           </a:p>
         </p:txBody>
@@ -4659,11 +4659,11 @@
             <a:r>
               <a:rPr sz="900" b="0">
                 <a:solidFill>
-                  <a:srgbClr val="F59E0B"/>
-                </a:solidFill>
-                <a:latin typeface="Segoe UI"/>
-              </a:rPr>
-              <a:t>NVDA · AMBER</a:t>
+                  <a:srgbClr val="EF4444"/>
+                </a:solidFill>
+                <a:latin typeface="Segoe UI"/>
+              </a:rPr>
+              <a:t>ICLN · RED</a:t>
             </a:r>
           </a:p>
         </p:txBody>
@@ -4697,7 +4697,7 @@
                 </a:solidFill>
                 <a:latin typeface="Segoe UI"/>
               </a:rPr>
-              <a:t>-4.9%</a:t>
+              <a:t>-4.4%</a:t>
             </a:r>
           </a:p>
         </p:txBody>
@@ -5375,7 +5375,7 @@
                 </a:solidFill>
                 <a:latin typeface="Segoe UI"/>
               </a:rPr>
-              <a:t>Crude Oil WTI</a:t>
+              <a:t>Bitcoin</a:t>
             </a:r>
           </a:p>
         </p:txBody>
@@ -5443,7 +5443,7 @@
                 </a:solidFill>
                 <a:latin typeface="Segoe UI"/>
               </a:rPr>
-              <a:t>89%</a:t>
+              <a:t>84%</a:t>
             </a:r>
           </a:p>
         </p:txBody>
@@ -5477,7 +5477,7 @@
                 </a:solidFill>
                 <a:latin typeface="Segoe UI"/>
               </a:rPr>
-              <a:t>above 200DMA · golden cross (50&gt;200) · MACD bullish</a:t>
+              <a:t>above 200DMA · golden cross (50&gt;200) · MACD bearish</a:t>
             </a:r>
           </a:p>
         </p:txBody>
@@ -5511,7 +5511,7 @@
                 </a:solidFill>
                 <a:latin typeface="Segoe UI"/>
               </a:rPr>
-              <a:t>Dollar Index</a:t>
+              <a:t>Crude Oil WTI</a:t>
             </a:r>
           </a:p>
         </p:txBody>
@@ -5579,7 +5579,7 @@
                 </a:solidFill>
                 <a:latin typeface="Segoe UI"/>
               </a:rPr>
-              <a:t>82%</a:t>
+              <a:t>89%</a:t>
             </a:r>
           </a:p>
         </p:txBody>
@@ -5613,7 +5613,7 @@
                 </a:solidFill>
                 <a:latin typeface="Segoe UI"/>
               </a:rPr>
-              <a:t>above 200DMA · golden cross (50&gt;200) · MACD bearish</a:t>
+              <a:t>above 200DMA · golden cross (50&gt;200) · MACD bullish</a:t>
             </a:r>
           </a:p>
         </p:txBody>
@@ -5647,7 +5647,7 @@
                 </a:solidFill>
                 <a:latin typeface="Segoe UI"/>
               </a:rPr>
-              <a:t>Bitcoin</a:t>
+              <a:t>Dollar Index</a:t>
             </a:r>
           </a:p>
         </p:txBody>
@@ -5715,7 +5715,7 @@
                 </a:solidFill>
                 <a:latin typeface="Segoe UI"/>
               </a:rPr>
-              <a:t>82%</a:t>
+              <a:t>83%</a:t>
             </a:r>
           </a:p>
         </p:txBody>
@@ -5783,7 +5783,7 @@
                 </a:solidFill>
                 <a:latin typeface="Segoe UI"/>
               </a:rPr>
-              <a:t>Amazon</a:t>
+              <a:t>FTSE 100</a:t>
             </a:r>
           </a:p>
         </p:txBody>
@@ -5851,7 +5851,7 @@
                 </a:solidFill>
                 <a:latin typeface="Segoe UI"/>
               </a:rPr>
-              <a:t>93%</a:t>
+              <a:t>81%</a:t>
             </a:r>
           </a:p>
         </p:txBody>
@@ -5919,7 +5919,7 @@
                 </a:solidFill>
                 <a:latin typeface="Segoe UI"/>
               </a:rPr>
-              <a:t>ICICI Bank</a:t>
+              <a:t>TCS</a:t>
             </a:r>
           </a:p>
         </p:txBody>
@@ -5953,7 +5953,7 @@
                 </a:solidFill>
                 <a:latin typeface="Segoe UI"/>
               </a:rPr>
-              <a:t>STRONG BUY</a:t>
+              <a:t>BUY</a:t>
             </a:r>
           </a:p>
         </p:txBody>
@@ -5987,7 +5987,7 @@
                 </a:solidFill>
                 <a:latin typeface="Segoe UI"/>
               </a:rPr>
-              <a:t>81%</a:t>
+              <a:t>73%</a:t>
             </a:r>
           </a:p>
         </p:txBody>
@@ -6021,7 +6021,7 @@
                 </a:solidFill>
                 <a:latin typeface="Segoe UI"/>
               </a:rPr>
-              <a:t>above 200DMA · golden cross (50&gt;200) · MACD bullish</a:t>
+              <a:t>above 200DMA · death cross (50&lt;200) · MACD bullish</a:t>
             </a:r>
           </a:p>
         </p:txBody>
@@ -6055,7 +6055,7 @@
                 </a:solidFill>
                 <a:latin typeface="Segoe UI"/>
               </a:rPr>
-              <a:t>FTSE 100</a:t>
+              <a:t>NIFTY IT</a:t>
             </a:r>
           </a:p>
         </p:txBody>
@@ -6089,7 +6089,7 @@
                 </a:solidFill>
                 <a:latin typeface="Segoe UI"/>
               </a:rPr>
-              <a:t>STRONG BUY</a:t>
+              <a:t>BUY</a:t>
             </a:r>
           </a:p>
         </p:txBody>
@@ -6123,7 +6123,7 @@
                 </a:solidFill>
                 <a:latin typeface="Segoe UI"/>
               </a:rPr>
-              <a:t>80%</a:t>
+              <a:t>77%</a:t>
             </a:r>
           </a:p>
         </p:txBody>
@@ -6157,7 +6157,7 @@
                 </a:solidFill>
                 <a:latin typeface="Segoe UI"/>
               </a:rPr>
-              <a:t>above 200DMA · golden cross (50&gt;200) · MACD bullish</a:t>
+              <a:t>above 200DMA · death cross (50&lt;200) · MACD bullish</a:t>
             </a:r>
           </a:p>
         </p:txBody>
@@ -6191,7 +6191,7 @@
                 </a:solidFill>
                 <a:latin typeface="Segoe UI"/>
               </a:rPr>
-              <a:t>Solana</a:t>
+              <a:t>Infosys</a:t>
             </a:r>
           </a:p>
         </p:txBody>
@@ -6225,7 +6225,7 @@
                 </a:solidFill>
                 <a:latin typeface="Segoe UI"/>
               </a:rPr>
-              <a:t>STRONG BUY</a:t>
+              <a:t>BUY</a:t>
             </a:r>
           </a:p>
         </p:txBody>
@@ -6259,7 +6259,7 @@
                 </a:solidFill>
                 <a:latin typeface="Segoe UI"/>
               </a:rPr>
-              <a:t>80%</a:t>
+              <a:t>74%</a:t>
             </a:r>
           </a:p>
         </p:txBody>
@@ -6293,7 +6293,7 @@
                 </a:solidFill>
                 <a:latin typeface="Segoe UI"/>
               </a:rPr>
-              <a:t>above 200DMA · golden cross (50&gt;200) · MACD bearish</a:t>
+              <a:t>above 200DMA · death cross (50&lt;200) · MACD bullish</a:t>
             </a:r>
           </a:p>
         </p:txBody>
@@ -6327,7 +6327,7 @@
                 </a:solidFill>
                 <a:latin typeface="Segoe UI"/>
               </a:rPr>
-              <a:t>TCS</a:t>
+              <a:t>ICICI Bank</a:t>
             </a:r>
           </a:p>
         </p:txBody>
@@ -6395,7 +6395,7 @@
                 </a:solidFill>
                 <a:latin typeface="Segoe UI"/>
               </a:rPr>
-              <a:t>72%</a:t>
+              <a:t>80%</a:t>
             </a:r>
           </a:p>
         </p:txBody>
@@ -6429,7 +6429,7 @@
                 </a:solidFill>
                 <a:latin typeface="Segoe UI"/>
               </a:rPr>
-              <a:t>above 200DMA · death cross (50&lt;200) · MACD bullish</a:t>
+              <a:t>above 200DMA · golden cross (50&gt;200) · MACD bullish</a:t>
             </a:r>
           </a:p>
         </p:txBody>
@@ -6463,7 +6463,7 @@
                 </a:solidFill>
                 <a:latin typeface="Segoe UI"/>
               </a:rPr>
-              <a:t>NIFTY IT</a:t>
+              <a:t>Solana</a:t>
             </a:r>
           </a:p>
         </p:txBody>
@@ -6531,7 +6531,7 @@
                 </a:solidFill>
                 <a:latin typeface="Segoe UI"/>
               </a:rPr>
-              <a:t>70%</a:t>
+              <a:t>80%</a:t>
             </a:r>
           </a:p>
         </p:txBody>
@@ -6565,7 +6565,7 @@
                 </a:solidFill>
                 <a:latin typeface="Segoe UI"/>
               </a:rPr>
-              <a:t>above 200DMA · death cross (50&lt;200) · MACD bullish</a:t>
+              <a:t>above 200DMA · golden cross (50&gt;200) · MACD bearish</a:t>
             </a:r>
           </a:p>
         </p:txBody>
@@ -6659,7 +6659,7 @@
                 </a:solidFill>
                 <a:latin typeface="Segoe UI"/>
               </a:rPr>
-              <a:t>Base currency INR · USD/INR 94.92</a:t>
+              <a:t>Base currency INR · USD/INR 94.77</a:t>
             </a:r>
           </a:p>
         </p:txBody>
@@ -7067,7 +7067,7 @@
                 </a:solidFill>
                 <a:latin typeface="Segoe UI"/>
               </a:rPr>
-              <a:t>81,436</a:t>
+              <a:t>82,731</a:t>
             </a:r>
           </a:p>
         </p:txBody>
@@ -7101,7 +7101,7 @@
                 </a:solidFill>
                 <a:latin typeface="Segoe UI"/>
               </a:rPr>
-              <a:t>Rs 772,954</a:t>
+              <a:t>Rs 784,042</a:t>
             </a:r>
           </a:p>
         </p:txBody>
@@ -7135,7 +7135,7 @@
                 </a:solidFill>
                 <a:latin typeface="Segoe UI"/>
               </a:rPr>
-              <a:t>Rs 203,464</a:t>
+              <a:t>Rs 215,422</a:t>
             </a:r>
           </a:p>
         </p:txBody>
@@ -7169,7 +7169,7 @@
                 </a:solidFill>
                 <a:latin typeface="Segoe UI"/>
               </a:rPr>
-              <a:t>+35.7%</a:t>
+              <a:t>+37.9%</a:t>
             </a:r>
           </a:p>
         </p:txBody>
@@ -7199,11 +7199,11 @@
             <a:r>
               <a:rPr sz="1000" b="0">
                 <a:solidFill>
-                  <a:srgbClr val="EF4444"/>
-                </a:solidFill>
-                <a:latin typeface="Segoe UI"/>
-              </a:rPr>
-              <a:t>-0.7%</a:t>
+                  <a:srgbClr val="22C55E"/>
+                </a:solidFill>
+                <a:latin typeface="Segoe UI"/>
+              </a:rPr>
+              <a:t>+1.1%</a:t>
             </a:r>
           </a:p>
         </p:txBody>
@@ -7339,7 +7339,7 @@
                 </a:solidFill>
                 <a:latin typeface="Segoe UI"/>
               </a:rPr>
-              <a:t>4,136</a:t>
+              <a:t>4,126</a:t>
             </a:r>
           </a:p>
         </p:txBody>
@@ -7373,7 +7373,7 @@
                 </a:solidFill>
                 <a:latin typeface="Segoe UI"/>
               </a:rPr>
-              <a:t>Rs 392,530</a:t>
+              <a:t>Rs 391,012</a:t>
             </a:r>
           </a:p>
         </p:txBody>
@@ -7407,7 +7407,7 @@
                 </a:solidFill>
                 <a:latin typeface="Segoe UI"/>
               </a:rPr>
-              <a:t>Rs 174,226</a:t>
+              <a:t>Rs 173,041</a:t>
             </a:r>
           </a:p>
         </p:txBody>
@@ -7441,7 +7441,7 @@
                 </a:solidFill>
                 <a:latin typeface="Segoe UI"/>
               </a:rPr>
-              <a:t>+79.8%</a:t>
+              <a:t>+79.4%</a:t>
             </a:r>
           </a:p>
         </p:txBody>
@@ -7645,7 +7645,7 @@
                 </a:solidFill>
                 <a:latin typeface="Segoe UI"/>
               </a:rPr>
-              <a:t>Rs 325,502</a:t>
+              <a:t>Rs 325,004</a:t>
             </a:r>
           </a:p>
         </p:txBody>
@@ -7679,7 +7679,7 @@
                 </a:solidFill>
                 <a:latin typeface="Segoe UI"/>
               </a:rPr>
-              <a:t>Rs 149,909</a:t>
+              <a:t>Rs 149,680</a:t>
             </a:r>
           </a:p>
         </p:txBody>
@@ -7917,7 +7917,7 @@
                 </a:solidFill>
                 <a:latin typeface="Segoe UI"/>
               </a:rPr>
-              <a:t>Rs 164,841</a:t>
+              <a:t>Rs 164,589</a:t>
             </a:r>
           </a:p>
         </p:txBody>
@@ -7951,7 +7951,7 @@
                 </a:solidFill>
                 <a:latin typeface="Segoe UI"/>
               </a:rPr>
-              <a:t>Rs -176,853</a:t>
+              <a:t>Rs -176,583</a:t>
             </a:r>
           </a:p>
         </p:txBody>
@@ -8155,7 +8155,7 @@
                 </a:solidFill>
                 <a:latin typeface="Segoe UI"/>
               </a:rPr>
-              <a:t>1,161</a:t>
+              <a:t>1,131</a:t>
             </a:r>
           </a:p>
         </p:txBody>
@@ -8189,7 +8189,7 @@
                 </a:solidFill>
                 <a:latin typeface="Segoe UI"/>
               </a:rPr>
-              <a:t>Rs 92,896</a:t>
+              <a:t>Rs 90,456</a:t>
             </a:r>
           </a:p>
         </p:txBody>
@@ -8223,7 +8223,7 @@
                 </a:solidFill>
                 <a:latin typeface="Segoe UI"/>
               </a:rPr>
-              <a:t>Rs -19,104</a:t>
+              <a:t>Rs -21,544</a:t>
             </a:r>
           </a:p>
         </p:txBody>
@@ -8257,7 +8257,7 @@
                 </a:solidFill>
                 <a:latin typeface="Segoe UI"/>
               </a:rPr>
-              <a:t>-17.1%</a:t>
+              <a:t>-19.2%</a:t>
             </a:r>
           </a:p>
         </p:txBody>
@@ -8427,7 +8427,7 @@
                 </a:solidFill>
                 <a:latin typeface="Segoe UI"/>
               </a:rPr>
-              <a:t>2,465</a:t>
+              <a:t>2,461</a:t>
             </a:r>
           </a:p>
         </p:txBody>
@@ -8461,7 +8461,7 @@
                 </a:solidFill>
                 <a:latin typeface="Segoe UI"/>
               </a:rPr>
-              <a:t>Rs 61,625</a:t>
+              <a:t>Rs 61,522</a:t>
             </a:r>
           </a:p>
         </p:txBody>
@@ -8495,7 +8495,7 @@
                 </a:solidFill>
                 <a:latin typeface="Segoe UI"/>
               </a:rPr>
-              <a:t>Rs -28,375</a:t>
+              <a:t>Rs -28,478</a:t>
             </a:r>
           </a:p>
         </p:txBody>
@@ -8529,7 +8529,7 @@
                 </a:solidFill>
                 <a:latin typeface="Segoe UI"/>
               </a:rPr>
-              <a:t>-31.5%</a:t>
+              <a:t>-31.6%</a:t>
             </a:r>
           </a:p>
         </p:txBody>
@@ -8699,7 +8699,7 @@
                 </a:solidFill>
                 <a:latin typeface="Segoe UI"/>
               </a:rPr>
-              <a:t>1,211</a:t>
+              <a:t>1,202</a:t>
             </a:r>
           </a:p>
         </p:txBody>
@@ -8733,7 +8733,7 @@
                 </a:solidFill>
                 <a:latin typeface="Segoe UI"/>
               </a:rPr>
-              <a:t>Rs 60,560</a:t>
+              <a:t>Rs 60,100</a:t>
             </a:r>
           </a:p>
         </p:txBody>
@@ -8767,7 +8767,7 @@
                 </a:solidFill>
                 <a:latin typeface="Segoe UI"/>
               </a:rPr>
-              <a:t>Rs -61,940</a:t>
+              <a:t>Rs -62,400</a:t>
             </a:r>
           </a:p>
         </p:txBody>
@@ -8801,7 +8801,7 @@
                 </a:solidFill>
                 <a:latin typeface="Segoe UI"/>
               </a:rPr>
-              <a:t>-50.6%</a:t>
+              <a:t>-50.9%</a:t>
             </a:r>
           </a:p>
         </p:txBody>
@@ -8971,7 +8971,7 @@
                 </a:solidFill>
                 <a:latin typeface="Segoe UI"/>
               </a:rPr>
-              <a:t>729</a:t>
+              <a:t>712</a:t>
             </a:r>
           </a:p>
         </p:txBody>
@@ -9005,7 +9005,7 @@
                 </a:solidFill>
                 <a:latin typeface="Segoe UI"/>
               </a:rPr>
-              <a:t>Rs 43,731</a:t>
+              <a:t>Rs 42,720</a:t>
             </a:r>
           </a:p>
         </p:txBody>
@@ -9039,7 +9039,7 @@
                 </a:solidFill>
                 <a:latin typeface="Segoe UI"/>
               </a:rPr>
-              <a:t>Rs -47,469</a:t>
+              <a:t>Rs -48,480</a:t>
             </a:r>
           </a:p>
         </p:txBody>
@@ -9073,7 +9073,7 @@
                 </a:solidFill>
                 <a:latin typeface="Segoe UI"/>
               </a:rPr>
-              <a:t>-52.0%</a:t>
+              <a:t>-53.2%</a:t>
             </a:r>
           </a:p>
         </p:txBody>
@@ -9141,7 +9141,7 @@
                 </a:solidFill>
                 <a:latin typeface="Segoe UI"/>
               </a:rPr>
-              <a:t>Total Rs 1,914,639 | P&amp;L Rs 193,857 (+11.3%) | Sharpe 0.52 | Vol 17.22% | VaR95 -1.64%/day</a:t>
+              <a:t>Total Rs 1,919,445 | P&amp;L Rs 200,658 (+11.7%) | Sharpe 0.59 | Vol 17.32% | VaR95 -1.67%/day</a:t>
             </a:r>
           </a:p>
         </p:txBody>

--- a/docs/pmr_daily.pptx
+++ b/docs/pmr_daily.pptx
@@ -3197,7 +3197,7 @@
                 </a:solidFill>
                 <a:latin typeface="Segoe UI"/>
               </a:rPr>
-              <a:t>Wednesday, 21 Oct 2026 09:21 SGT</a:t>
+              <a:t>Thursday, 22 Oct 2026 09:17 SGT</a:t>
             </a:r>
           </a:p>
         </p:txBody>
@@ -3265,7 +3265,7 @@
                 </a:solidFill>
                 <a:latin typeface="Segoe UI"/>
               </a:rPr>
-              <a:t>RAG 7R / 21A / 18G   |   56.5% above 200DMA   |   Portfolio Rs 1,919,445 (+11.7%)</a:t>
+              <a:t>RAG 8R / 18A / 20G   |   54.3% above 200DMA   |   Portfolio Rs 1,929,823 (+12.6%)</a:t>
             </a:r>
           </a:p>
         </p:txBody>
@@ -3491,11 +3491,11 @@
             <a:r>
               <a:rPr sz="900" b="0">
                 <a:solidFill>
-                  <a:srgbClr val="F59E0B"/>
-                </a:solidFill>
-                <a:latin typeface="Segoe UI"/>
-              </a:rPr>
-              <a:t>TCS.NS · AMBER</a:t>
+                  <a:srgbClr val="22C55E"/>
+                </a:solidFill>
+                <a:latin typeface="Segoe UI"/>
+              </a:rPr>
+              <a:t>TCS.NS · GREEN</a:t>
             </a:r>
           </a:p>
         </p:txBody>
@@ -3529,7 +3529,7 @@
                 </a:solidFill>
                 <a:latin typeface="Segoe UI"/>
               </a:rPr>
-              <a:t>+20.6%</a:t>
+              <a:t>+24.0%</a:t>
             </a:r>
           </a:p>
         </p:txBody>
@@ -3587,7 +3587,7 @@
                 </a:solidFill>
                 <a:latin typeface="Segoe UI"/>
               </a:rPr>
-              <a:t>NIFTY IT</a:t>
+              <a:t>Infosys</a:t>
             </a:r>
           </a:p>
         </p:txBody>
@@ -3617,11 +3617,11 @@
             <a:r>
               <a:rPr sz="900" b="0">
                 <a:solidFill>
-                  <a:srgbClr val="22C55E"/>
-                </a:solidFill>
-                <a:latin typeface="Segoe UI"/>
-              </a:rPr>
-              <a:t>^CNXIT · GREEN</a:t>
+                  <a:srgbClr val="F59E0B"/>
+                </a:solidFill>
+                <a:latin typeface="Segoe UI"/>
+              </a:rPr>
+              <a:t>INFY.NS · AMBER</a:t>
             </a:r>
           </a:p>
         </p:txBody>
@@ -3655,7 +3655,7 @@
                 </a:solidFill>
                 <a:latin typeface="Segoe UI"/>
               </a:rPr>
-              <a:t>+13.8%</a:t>
+              <a:t>+17.5%</a:t>
             </a:r>
           </a:p>
         </p:txBody>
@@ -3713,7 +3713,7 @@
                 </a:solidFill>
                 <a:latin typeface="Segoe UI"/>
               </a:rPr>
-              <a:t>Infosys</a:t>
+              <a:t>NIFTY IT</a:t>
             </a:r>
           </a:p>
         </p:txBody>
@@ -3743,11 +3743,11 @@
             <a:r>
               <a:rPr sz="900" b="0">
                 <a:solidFill>
-                  <a:srgbClr val="F59E0B"/>
-                </a:solidFill>
-                <a:latin typeface="Segoe UI"/>
-              </a:rPr>
-              <a:t>INFY.NS · AMBER</a:t>
+                  <a:srgbClr val="22C55E"/>
+                </a:solidFill>
+                <a:latin typeface="Segoe UI"/>
+              </a:rPr>
+              <a:t>^CNXIT · GREEN</a:t>
             </a:r>
           </a:p>
         </p:txBody>
@@ -3781,7 +3781,7 @@
                 </a:solidFill>
                 <a:latin typeface="Segoe UI"/>
               </a:rPr>
-              <a:t>+13.7%</a:t>
+              <a:t>+13.8%</a:t>
             </a:r>
           </a:p>
         </p:txBody>
@@ -3907,7 +3907,7 @@
                 </a:solidFill>
                 <a:latin typeface="Segoe UI"/>
               </a:rPr>
-              <a:t>+10.2%</a:t>
+              <a:t>+10.5%</a:t>
             </a:r>
           </a:p>
         </p:txBody>
@@ -4033,7 +4033,7 @@
                 </a:solidFill>
                 <a:latin typeface="Segoe UI"/>
               </a:rPr>
-              <a:t>+9.3%</a:t>
+              <a:t>+8.4%</a:t>
             </a:r>
           </a:p>
         </p:txBody>
@@ -4193,7 +4193,7 @@
                 </a:solidFill>
                 <a:latin typeface="Segoe UI"/>
               </a:rPr>
-              <a:t>-9.9%</a:t>
+              <a:t>-9.0%</a:t>
             </a:r>
           </a:p>
         </p:txBody>
@@ -4251,7 +4251,7 @@
                 </a:solidFill>
                 <a:latin typeface="Segoe UI"/>
               </a:rPr>
-              <a:t>Ethereum</a:t>
+              <a:t>Natural Gas</a:t>
             </a:r>
           </a:p>
         </p:txBody>
@@ -4281,11 +4281,11 @@
             <a:r>
               <a:rPr sz="900" b="0">
                 <a:solidFill>
-                  <a:srgbClr val="22C55E"/>
-                </a:solidFill>
-                <a:latin typeface="Segoe UI"/>
-              </a:rPr>
-              <a:t>ETH-USD · GREEN</a:t>
+                  <a:srgbClr val="EF4444"/>
+                </a:solidFill>
+                <a:latin typeface="Segoe UI"/>
+              </a:rPr>
+              <a:t>NG=F · RED</a:t>
             </a:r>
           </a:p>
         </p:txBody>
@@ -4319,7 +4319,7 @@
                 </a:solidFill>
                 <a:latin typeface="Segoe UI"/>
               </a:rPr>
-              <a:t>-9.0%</a:t>
+              <a:t>-8.3%</a:t>
             </a:r>
           </a:p>
         </p:txBody>
@@ -4377,7 +4377,7 @@
                 </a:solidFill>
                 <a:latin typeface="Segoe UI"/>
               </a:rPr>
-              <a:t>US Technology</a:t>
+              <a:t>Ethereum</a:t>
             </a:r>
           </a:p>
         </p:txBody>
@@ -4407,11 +4407,11 @@
             <a:r>
               <a:rPr sz="900" b="0">
                 <a:solidFill>
-                  <a:srgbClr val="F59E0B"/>
-                </a:solidFill>
-                <a:latin typeface="Segoe UI"/>
-              </a:rPr>
-              <a:t>XLK · AMBER</a:t>
+                  <a:srgbClr val="22C55E"/>
+                </a:solidFill>
+                <a:latin typeface="Segoe UI"/>
+              </a:rPr>
+              <a:t>ETH-USD · GREEN</a:t>
             </a:r>
           </a:p>
         </p:txBody>
@@ -4445,7 +4445,7 @@
                 </a:solidFill>
                 <a:latin typeface="Segoe UI"/>
               </a:rPr>
-              <a:t>-5.0%</a:t>
+              <a:t>-7.8%</a:t>
             </a:r>
           </a:p>
         </p:txBody>
@@ -4503,7 +4503,7 @@
                 </a:solidFill>
                 <a:latin typeface="Segoe UI"/>
               </a:rPr>
-              <a:t>Nvidia</a:t>
+              <a:t>US Technology</a:t>
             </a:r>
           </a:p>
         </p:txBody>
@@ -4537,7 +4537,7 @@
                 </a:solidFill>
                 <a:latin typeface="Segoe UI"/>
               </a:rPr>
-              <a:t>NVDA · AMBER</a:t>
+              <a:t>XLK · AMBER</a:t>
             </a:r>
           </a:p>
         </p:txBody>
@@ -4571,7 +4571,7 @@
                 </a:solidFill>
                 <a:latin typeface="Segoe UI"/>
               </a:rPr>
-              <a:t>-4.9%</a:t>
+              <a:t>-5.3%</a:t>
             </a:r>
           </a:p>
         </p:txBody>
@@ -4629,7 +4629,7 @@
                 </a:solidFill>
                 <a:latin typeface="Segoe UI"/>
               </a:rPr>
-              <a:t>Clean Energy</a:t>
+              <a:t>Nvidia</a:t>
             </a:r>
           </a:p>
         </p:txBody>
@@ -4659,11 +4659,11 @@
             <a:r>
               <a:rPr sz="900" b="0">
                 <a:solidFill>
-                  <a:srgbClr val="EF4444"/>
-                </a:solidFill>
-                <a:latin typeface="Segoe UI"/>
-              </a:rPr>
-              <a:t>ICLN · RED</a:t>
+                  <a:srgbClr val="F59E0B"/>
+                </a:solidFill>
+                <a:latin typeface="Segoe UI"/>
+              </a:rPr>
+              <a:t>NVDA · AMBER</a:t>
             </a:r>
           </a:p>
         </p:txBody>
@@ -4697,7 +4697,7 @@
                 </a:solidFill>
                 <a:latin typeface="Segoe UI"/>
               </a:rPr>
-              <a:t>-4.4%</a:t>
+              <a:t>-5.2%</a:t>
             </a:r>
           </a:p>
         </p:txBody>
@@ -4837,7 +4837,7 @@
         <p:spPr>
           <a:xfrm>
             <a:off x="457200" y="1188720"/>
-            <a:ext cx="11247120" cy="5513499"/>
+            <a:ext cx="11247120" cy="5576390"/>
           </a:xfrm>
           <a:prstGeom prst="rect">
             <a:avLst/>
@@ -4967,7 +4967,7 @@
                 </a:solidFill>
                 <a:latin typeface="Segoe UI"/>
               </a:rPr>
-              <a:t>Apple</a:t>
+              <a:t>US Energy</a:t>
             </a:r>
           </a:p>
         </p:txBody>
@@ -5103,7 +5103,7 @@
                 </a:solidFill>
                 <a:latin typeface="Segoe UI"/>
               </a:rPr>
-              <a:t>US Energy</a:t>
+              <a:t>Microsoft</a:t>
             </a:r>
           </a:p>
         </p:txBody>
@@ -5171,7 +5171,7 @@
                 </a:solidFill>
                 <a:latin typeface="Segoe UI"/>
               </a:rPr>
-              <a:t>95%</a:t>
+              <a:t>85%</a:t>
             </a:r>
           </a:p>
         </p:txBody>
@@ -5205,7 +5205,7 @@
                 </a:solidFill>
                 <a:latin typeface="Segoe UI"/>
               </a:rPr>
-              <a:t>above 200DMA · golden cross (50&gt;200) · MACD bullish</a:t>
+              <a:t>above 200DMA · golden cross (50&gt;200) · MACD bearish</a:t>
             </a:r>
           </a:p>
         </p:txBody>
@@ -5239,7 +5239,7 @@
                 </a:solidFill>
                 <a:latin typeface="Segoe UI"/>
               </a:rPr>
-              <a:t>Microsoft</a:t>
+              <a:t>Bitcoin</a:t>
             </a:r>
           </a:p>
         </p:txBody>
@@ -5307,7 +5307,7 @@
                 </a:solidFill>
                 <a:latin typeface="Segoe UI"/>
               </a:rPr>
-              <a:t>85%</a:t>
+              <a:t>84%</a:t>
             </a:r>
           </a:p>
         </p:txBody>
@@ -5375,7 +5375,7 @@
                 </a:solidFill>
                 <a:latin typeface="Segoe UI"/>
               </a:rPr>
-              <a:t>Bitcoin</a:t>
+              <a:t>Apple</a:t>
             </a:r>
           </a:p>
         </p:txBody>
@@ -5579,7 +5579,7 @@
                 </a:solidFill>
                 <a:latin typeface="Segoe UI"/>
               </a:rPr>
-              <a:t>89%</a:t>
+              <a:t>88%</a:t>
             </a:r>
           </a:p>
         </p:txBody>
@@ -5715,7 +5715,7 @@
                 </a:solidFill>
                 <a:latin typeface="Segoe UI"/>
               </a:rPr>
-              <a:t>83%</a:t>
+              <a:t>82%</a:t>
             </a:r>
           </a:p>
         </p:txBody>
@@ -5783,7 +5783,7 @@
                 </a:solidFill>
                 <a:latin typeface="Segoe UI"/>
               </a:rPr>
-              <a:t>FTSE 100</a:t>
+              <a:t>Solana</a:t>
             </a:r>
           </a:p>
         </p:txBody>
@@ -5851,7 +5851,7 @@
                 </a:solidFill>
                 <a:latin typeface="Segoe UI"/>
               </a:rPr>
-              <a:t>81%</a:t>
+              <a:t>80%</a:t>
             </a:r>
           </a:p>
         </p:txBody>
@@ -5885,7 +5885,7 @@
                 </a:solidFill>
                 <a:latin typeface="Segoe UI"/>
               </a:rPr>
-              <a:t>above 200DMA · golden cross (50&gt;200) · MACD bullish</a:t>
+              <a:t>above 200DMA · golden cross (50&gt;200) · MACD bearish</a:t>
             </a:r>
           </a:p>
         </p:txBody>
@@ -5987,7 +5987,7 @@
                 </a:solidFill>
                 <a:latin typeface="Segoe UI"/>
               </a:rPr>
-              <a:t>73%</a:t>
+              <a:t>80%</a:t>
             </a:r>
           </a:p>
         </p:txBody>
@@ -6259,7 +6259,7 @@
                 </a:solidFill>
                 <a:latin typeface="Segoe UI"/>
               </a:rPr>
-              <a:t>74%</a:t>
+              <a:t>70%</a:t>
             </a:r>
           </a:p>
         </p:txBody>
@@ -6327,7 +6327,7 @@
                 </a:solidFill>
                 <a:latin typeface="Segoe UI"/>
               </a:rPr>
-              <a:t>ICICI Bank</a:t>
+              <a:t>S&amp;P 500</a:t>
             </a:r>
           </a:p>
         </p:txBody>
@@ -6395,7 +6395,7 @@
                 </a:solidFill>
                 <a:latin typeface="Segoe UI"/>
               </a:rPr>
-              <a:t>80%</a:t>
+              <a:t>68%</a:t>
             </a:r>
           </a:p>
         </p:txBody>
@@ -6429,7 +6429,7 @@
                 </a:solidFill>
                 <a:latin typeface="Segoe UI"/>
               </a:rPr>
-              <a:t>above 200DMA · golden cross (50&gt;200) · MACD bullish</a:t>
+              <a:t>above 200DMA · golden cross (50&gt;200) · MACD bearish</a:t>
             </a:r>
           </a:p>
         </p:txBody>
@@ -6463,7 +6463,7 @@
                 </a:solidFill>
                 <a:latin typeface="Segoe UI"/>
               </a:rPr>
-              <a:t>Solana</a:t>
+              <a:t>FTSE 100</a:t>
             </a:r>
           </a:p>
         </p:txBody>
@@ -6531,7 +6531,7 @@
                 </a:solidFill>
                 <a:latin typeface="Segoe UI"/>
               </a:rPr>
-              <a:t>80%</a:t>
+              <a:t>68%</a:t>
             </a:r>
           </a:p>
         </p:txBody>
@@ -6565,7 +6565,7 @@
                 </a:solidFill>
                 <a:latin typeface="Segoe UI"/>
               </a:rPr>
-              <a:t>above 200DMA · golden cross (50&gt;200) · MACD bearish</a:t>
+              <a:t>above 200DMA · golden cross (50&gt;200) · MACD bullish</a:t>
             </a:r>
           </a:p>
         </p:txBody>
@@ -6659,7 +6659,7 @@
                 </a:solidFill>
                 <a:latin typeface="Segoe UI"/>
               </a:rPr>
-              <a:t>Base currency INR · USD/INR 94.77</a:t>
+              <a:t>Base currency INR · USD/INR 94.45</a:t>
             </a:r>
           </a:p>
         </p:txBody>
@@ -7067,7 +7067,7 @@
                 </a:solidFill>
                 <a:latin typeface="Segoe UI"/>
               </a:rPr>
-              <a:t>82,731</a:t>
+              <a:t>84,248</a:t>
             </a:r>
           </a:p>
         </p:txBody>
@@ -7101,7 +7101,7 @@
                 </a:solidFill>
                 <a:latin typeface="Segoe UI"/>
               </a:rPr>
-              <a:t>Rs 784,042</a:t>
+              <a:t>Rs 795,726</a:t>
             </a:r>
           </a:p>
         </p:txBody>
@@ -7135,7 +7135,7 @@
                 </a:solidFill>
                 <a:latin typeface="Segoe UI"/>
               </a:rPr>
-              <a:t>Rs 215,422</a:t>
+              <a:t>Rs 229,026</a:t>
             </a:r>
           </a:p>
         </p:txBody>
@@ -7169,7 +7169,7 @@
                 </a:solidFill>
                 <a:latin typeface="Segoe UI"/>
               </a:rPr>
-              <a:t>+37.9%</a:t>
+              <a:t>+40.4%</a:t>
             </a:r>
           </a:p>
         </p:txBody>
@@ -7203,7 +7203,7 @@
                 </a:solidFill>
                 <a:latin typeface="Segoe UI"/>
               </a:rPr>
-              <a:t>+1.1%</a:t>
+              <a:t>+1.6%</a:t>
             </a:r>
           </a:p>
         </p:txBody>
@@ -7339,7 +7339,7 @@
                 </a:solidFill>
                 <a:latin typeface="Segoe UI"/>
               </a:rPr>
-              <a:t>4,126</a:t>
+              <a:t>4,133</a:t>
             </a:r>
           </a:p>
         </p:txBody>
@@ -7373,7 +7373,7 @@
                 </a:solidFill>
                 <a:latin typeface="Segoe UI"/>
               </a:rPr>
-              <a:t>Rs 391,012</a:t>
+              <a:t>Rs 390,343</a:t>
             </a:r>
           </a:p>
         </p:txBody>
@@ -7407,7 +7407,7 @@
                 </a:solidFill>
                 <a:latin typeface="Segoe UI"/>
               </a:rPr>
-              <a:t>Rs 173,041</a:t>
+              <a:t>Rs 173,108</a:t>
             </a:r>
           </a:p>
         </p:txBody>
@@ -7441,7 +7441,7 @@
                 </a:solidFill>
                 <a:latin typeface="Segoe UI"/>
               </a:rPr>
-              <a:t>+79.4%</a:t>
+              <a:t>+79.7%</a:t>
             </a:r>
           </a:p>
         </p:txBody>
@@ -7611,7 +7611,7 @@
                 </a:solidFill>
                 <a:latin typeface="Segoe UI"/>
               </a:rPr>
-              <a:t>343</a:t>
+              <a:t>340</a:t>
             </a:r>
           </a:p>
         </p:txBody>
@@ -7645,7 +7645,7 @@
                 </a:solidFill>
                 <a:latin typeface="Segoe UI"/>
               </a:rPr>
-              <a:t>Rs 325,004</a:t>
+              <a:t>Rs 320,658</a:t>
             </a:r>
           </a:p>
         </p:txBody>
@@ -7679,7 +7679,7 @@
                 </a:solidFill>
                 <a:latin typeface="Segoe UI"/>
               </a:rPr>
-              <a:t>Rs 149,680</a:t>
+              <a:t>Rs 145,925</a:t>
             </a:r>
           </a:p>
         </p:txBody>
@@ -7713,7 +7713,7 @@
                 </a:solidFill>
                 <a:latin typeface="Segoe UI"/>
               </a:rPr>
-              <a:t>+85.4%</a:t>
+              <a:t>+83.5%</a:t>
             </a:r>
           </a:p>
         </p:txBody>
@@ -7883,7 +7883,7 @@
                 </a:solidFill>
                 <a:latin typeface="Segoe UI"/>
               </a:rPr>
-              <a:t>217</a:t>
+              <a:t>216</a:t>
             </a:r>
           </a:p>
         </p:txBody>
@@ -7917,7 +7917,7 @@
                 </a:solidFill>
                 <a:latin typeface="Segoe UI"/>
               </a:rPr>
-              <a:t>Rs 164,589</a:t>
+              <a:t>Rs 163,565</a:t>
             </a:r>
           </a:p>
         </p:txBody>
@@ -7951,7 +7951,7 @@
                 </a:solidFill>
                 <a:latin typeface="Segoe UI"/>
               </a:rPr>
-              <a:t>Rs -176,583</a:t>
+              <a:t>Rs -176,455</a:t>
             </a:r>
           </a:p>
         </p:txBody>
@@ -7985,7 +7985,7 @@
                 </a:solidFill>
                 <a:latin typeface="Segoe UI"/>
               </a:rPr>
-              <a:t>-51.8%</a:t>
+              <a:t>-51.9%</a:t>
             </a:r>
           </a:p>
         </p:txBody>
@@ -8155,7 +8155,7 @@
                 </a:solidFill>
                 <a:latin typeface="Segoe UI"/>
               </a:rPr>
-              <a:t>1,131</a:t>
+              <a:t>1,168</a:t>
             </a:r>
           </a:p>
         </p:txBody>
@@ -8189,7 +8189,7 @@
                 </a:solidFill>
                 <a:latin typeface="Segoe UI"/>
               </a:rPr>
-              <a:t>Rs 90,456</a:t>
+              <a:t>Rs 93,440</a:t>
             </a:r>
           </a:p>
         </p:txBody>
@@ -8223,7 +8223,7 @@
                 </a:solidFill>
                 <a:latin typeface="Segoe UI"/>
               </a:rPr>
-              <a:t>Rs -21,544</a:t>
+              <a:t>Rs -18,560</a:t>
             </a:r>
           </a:p>
         </p:txBody>
@@ -8257,7 +8257,7 @@
                 </a:solidFill>
                 <a:latin typeface="Segoe UI"/>
               </a:rPr>
-              <a:t>-19.2%</a:t>
+              <a:t>-16.6%</a:t>
             </a:r>
           </a:p>
         </p:txBody>
@@ -8427,7 +8427,7 @@
                 </a:solidFill>
                 <a:latin typeface="Segoe UI"/>
               </a:rPr>
-              <a:t>2,461</a:t>
+              <a:t>2,529</a:t>
             </a:r>
           </a:p>
         </p:txBody>
@@ -8461,7 +8461,7 @@
                 </a:solidFill>
                 <a:latin typeface="Segoe UI"/>
               </a:rPr>
-              <a:t>Rs 61,522</a:t>
+              <a:t>Rs 63,225</a:t>
             </a:r>
           </a:p>
         </p:txBody>
@@ -8495,7 +8495,7 @@
                 </a:solidFill>
                 <a:latin typeface="Segoe UI"/>
               </a:rPr>
-              <a:t>Rs -28,478</a:t>
+              <a:t>Rs -26,775</a:t>
             </a:r>
           </a:p>
         </p:txBody>
@@ -8529,7 +8529,7 @@
                 </a:solidFill>
                 <a:latin typeface="Segoe UI"/>
               </a:rPr>
-              <a:t>-31.6%</a:t>
+              <a:t>-29.8%</a:t>
             </a:r>
           </a:p>
         </p:txBody>
@@ -8699,7 +8699,7 @@
                 </a:solidFill>
                 <a:latin typeface="Segoe UI"/>
               </a:rPr>
-              <a:t>1,202</a:t>
+              <a:t>1,209</a:t>
             </a:r>
           </a:p>
         </p:txBody>
@@ -8733,7 +8733,7 @@
                 </a:solidFill>
                 <a:latin typeface="Segoe UI"/>
               </a:rPr>
-              <a:t>Rs 60,100</a:t>
+              <a:t>Rs 60,450</a:t>
             </a:r>
           </a:p>
         </p:txBody>
@@ -8767,7 +8767,7 @@
                 </a:solidFill>
                 <a:latin typeface="Segoe UI"/>
               </a:rPr>
-              <a:t>Rs -62,400</a:t>
+              <a:t>Rs -62,050</a:t>
             </a:r>
           </a:p>
         </p:txBody>
@@ -8801,7 +8801,7 @@
                 </a:solidFill>
                 <a:latin typeface="Segoe UI"/>
               </a:rPr>
-              <a:t>-50.9%</a:t>
+              <a:t>-50.6%</a:t>
             </a:r>
           </a:p>
         </p:txBody>
@@ -8971,7 +8971,7 @@
                 </a:solidFill>
                 <a:latin typeface="Segoe UI"/>
               </a:rPr>
-              <a:t>712</a:t>
+              <a:t>707</a:t>
             </a:r>
           </a:p>
         </p:txBody>
@@ -9005,7 +9005,7 @@
                 </a:solidFill>
                 <a:latin typeface="Segoe UI"/>
               </a:rPr>
-              <a:t>Rs 42,720</a:t>
+              <a:t>Rs 42,417</a:t>
             </a:r>
           </a:p>
         </p:txBody>
@@ -9039,7 +9039,7 @@
                 </a:solidFill>
                 <a:latin typeface="Segoe UI"/>
               </a:rPr>
-              <a:t>Rs -48,480</a:t>
+              <a:t>Rs -48,783</a:t>
             </a:r>
           </a:p>
         </p:txBody>
@@ -9073,7 +9073,7 @@
                 </a:solidFill>
                 <a:latin typeface="Segoe UI"/>
               </a:rPr>
-              <a:t>-53.2%</a:t>
+              <a:t>-53.5%</a:t>
             </a:r>
           </a:p>
         </p:txBody>
@@ -9141,7 +9141,7 @@
                 </a:solidFill>
                 <a:latin typeface="Segoe UI"/>
               </a:rPr>
-              <a:t>Total Rs 1,919,445 | P&amp;L Rs 200,658 (+11.7%) | Sharpe 0.59 | Vol 17.32% | VaR95 -1.67%/day</a:t>
+              <a:t>Total Rs 1,929,823 | P&amp;L Rs 215,436 (+12.6%) | Sharpe 0.8 | Vol 17.19% | VaR95 -1.65%/day</a:t>
             </a:r>
           </a:p>
         </p:txBody>

--- a/docs/pmr_daily.pptx
+++ b/docs/pmr_daily.pptx
@@ -3197,7 +3197,7 @@
                 </a:solidFill>
                 <a:latin typeface="Segoe UI"/>
               </a:rPr>
-              <a:t>Thursday, 22 Oct 2026 09:17 SGT</a:t>
+              <a:t>Friday, 23 Oct 2026 09:17 SGT</a:t>
             </a:r>
           </a:p>
         </p:txBody>
@@ -3265,7 +3265,7 @@
                 </a:solidFill>
                 <a:latin typeface="Segoe UI"/>
               </a:rPr>
-              <a:t>RAG 8R / 18A / 20G   |   54.3% above 200DMA   |   Portfolio Rs 1,929,823 (+12.6%)</a:t>
+              <a:t>RAG 11R / 17A / 18G   |   54.3% above 200DMA   |   Portfolio Rs 1,902,710 (+10.7%)</a:t>
             </a:r>
           </a:p>
         </p:txBody>
@@ -3587,7 +3587,7 @@
                 </a:solidFill>
                 <a:latin typeface="Segoe UI"/>
               </a:rPr>
-              <a:t>Infosys</a:t>
+              <a:t>NIFTY IT</a:t>
             </a:r>
           </a:p>
         </p:txBody>
@@ -3617,11 +3617,11 @@
             <a:r>
               <a:rPr sz="900" b="0">
                 <a:solidFill>
-                  <a:srgbClr val="F59E0B"/>
-                </a:solidFill>
-                <a:latin typeface="Segoe UI"/>
-              </a:rPr>
-              <a:t>INFY.NS · AMBER</a:t>
+                  <a:srgbClr val="22C55E"/>
+                </a:solidFill>
+                <a:latin typeface="Segoe UI"/>
+              </a:rPr>
+              <a:t>^CNXIT · GREEN</a:t>
             </a:r>
           </a:p>
         </p:txBody>
@@ -3655,7 +3655,7 @@
                 </a:solidFill>
                 <a:latin typeface="Segoe UI"/>
               </a:rPr>
-              <a:t>+17.5%</a:t>
+              <a:t>+17.0%</a:t>
             </a:r>
           </a:p>
         </p:txBody>
@@ -3713,7 +3713,7 @@
                 </a:solidFill>
                 <a:latin typeface="Segoe UI"/>
               </a:rPr>
-              <a:t>NIFTY IT</a:t>
+              <a:t>Infosys</a:t>
             </a:r>
           </a:p>
         </p:txBody>
@@ -3743,11 +3743,11 @@
             <a:r>
               <a:rPr sz="900" b="0">
                 <a:solidFill>
-                  <a:srgbClr val="22C55E"/>
-                </a:solidFill>
-                <a:latin typeface="Segoe UI"/>
-              </a:rPr>
-              <a:t>^CNXIT · GREEN</a:t>
+                  <a:srgbClr val="F59E0B"/>
+                </a:solidFill>
+                <a:latin typeface="Segoe UI"/>
+              </a:rPr>
+              <a:t>INFY.NS · AMBER</a:t>
             </a:r>
           </a:p>
         </p:txBody>
@@ -3781,7 +3781,7 @@
                 </a:solidFill>
                 <a:latin typeface="Segoe UI"/>
               </a:rPr>
-              <a:t>+13.8%</a:t>
+              <a:t>+16.0%</a:t>
             </a:r>
           </a:p>
         </p:txBody>
@@ -3907,7 +3907,7 @@
                 </a:solidFill>
                 <a:latin typeface="Segoe UI"/>
               </a:rPr>
-              <a:t>+10.5%</a:t>
+              <a:t>+10.8%</a:t>
             </a:r>
           </a:p>
         </p:txBody>
@@ -4033,7 +4033,7 @@
                 </a:solidFill>
                 <a:latin typeface="Segoe UI"/>
               </a:rPr>
-              <a:t>+8.4%</a:t>
+              <a:t>+10.5%</a:t>
             </a:r>
           </a:p>
         </p:txBody>
@@ -4155,11 +4155,11 @@
             <a:r>
               <a:rPr sz="900" b="0">
                 <a:solidFill>
-                  <a:srgbClr val="22C55E"/>
-                </a:solidFill>
-                <a:latin typeface="Segoe UI"/>
-              </a:rPr>
-              <a:t>SOL-USD · GREEN</a:t>
+                  <a:srgbClr val="F59E0B"/>
+                </a:solidFill>
+                <a:latin typeface="Segoe UI"/>
+              </a:rPr>
+              <a:t>SOL-USD · AMBER</a:t>
             </a:r>
           </a:p>
         </p:txBody>
@@ -4193,7 +4193,7 @@
                 </a:solidFill>
                 <a:latin typeface="Segoe UI"/>
               </a:rPr>
-              <a:t>-9.0%</a:t>
+              <a:t>-12.2%</a:t>
             </a:r>
           </a:p>
         </p:txBody>
@@ -4251,7 +4251,7 @@
                 </a:solidFill>
                 <a:latin typeface="Segoe UI"/>
               </a:rPr>
-              <a:t>Natural Gas</a:t>
+              <a:t>Ethereum</a:t>
             </a:r>
           </a:p>
         </p:txBody>
@@ -4281,11 +4281,11 @@
             <a:r>
               <a:rPr sz="900" b="0">
                 <a:solidFill>
-                  <a:srgbClr val="EF4444"/>
-                </a:solidFill>
-                <a:latin typeface="Segoe UI"/>
-              </a:rPr>
-              <a:t>NG=F · RED</a:t>
+                  <a:srgbClr val="22C55E"/>
+                </a:solidFill>
+                <a:latin typeface="Segoe UI"/>
+              </a:rPr>
+              <a:t>ETH-USD · GREEN</a:t>
             </a:r>
           </a:p>
         </p:txBody>
@@ -4319,7 +4319,7 @@
                 </a:solidFill>
                 <a:latin typeface="Segoe UI"/>
               </a:rPr>
-              <a:t>-8.3%</a:t>
+              <a:t>-11.3%</a:t>
             </a:r>
           </a:p>
         </p:txBody>
@@ -4377,7 +4377,7 @@
                 </a:solidFill>
                 <a:latin typeface="Segoe UI"/>
               </a:rPr>
-              <a:t>Ethereum</a:t>
+              <a:t>Silver</a:t>
             </a:r>
           </a:p>
         </p:txBody>
@@ -4407,11 +4407,11 @@
             <a:r>
               <a:rPr sz="900" b="0">
                 <a:solidFill>
-                  <a:srgbClr val="22C55E"/>
-                </a:solidFill>
-                <a:latin typeface="Segoe UI"/>
-              </a:rPr>
-              <a:t>ETH-USD · GREEN</a:t>
+                  <a:srgbClr val="EF4444"/>
+                </a:solidFill>
+                <a:latin typeface="Segoe UI"/>
+              </a:rPr>
+              <a:t>SI=F · RED</a:t>
             </a:r>
           </a:p>
         </p:txBody>
@@ -4445,7 +4445,7 @@
                 </a:solidFill>
                 <a:latin typeface="Segoe UI"/>
               </a:rPr>
-              <a:t>-7.8%</a:t>
+              <a:t>-9.8%</a:t>
             </a:r>
           </a:p>
         </p:txBody>
@@ -4503,7 +4503,7 @@
                 </a:solidFill>
                 <a:latin typeface="Segoe UI"/>
               </a:rPr>
-              <a:t>US Technology</a:t>
+              <a:t>Natural Gas</a:t>
             </a:r>
           </a:p>
         </p:txBody>
@@ -4533,11 +4533,11 @@
             <a:r>
               <a:rPr sz="900" b="0">
                 <a:solidFill>
-                  <a:srgbClr val="F59E0B"/>
-                </a:solidFill>
-                <a:latin typeface="Segoe UI"/>
-              </a:rPr>
-              <a:t>XLK · AMBER</a:t>
+                  <a:srgbClr val="EF4444"/>
+                </a:solidFill>
+                <a:latin typeface="Segoe UI"/>
+              </a:rPr>
+              <a:t>NG=F · RED</a:t>
             </a:r>
           </a:p>
         </p:txBody>
@@ -4571,7 +4571,7 @@
                 </a:solidFill>
                 <a:latin typeface="Segoe UI"/>
               </a:rPr>
-              <a:t>-5.3%</a:t>
+              <a:t>-8.6%</a:t>
             </a:r>
           </a:p>
         </p:txBody>
@@ -4629,7 +4629,7 @@
                 </a:solidFill>
                 <a:latin typeface="Segoe UI"/>
               </a:rPr>
-              <a:t>Nvidia</a:t>
+              <a:t>Nikkei 225</a:t>
             </a:r>
           </a:p>
         </p:txBody>
@@ -4659,11 +4659,11 @@
             <a:r>
               <a:rPr sz="900" b="0">
                 <a:solidFill>
-                  <a:srgbClr val="F59E0B"/>
-                </a:solidFill>
-                <a:latin typeface="Segoe UI"/>
-              </a:rPr>
-              <a:t>NVDA · AMBER</a:t>
+                  <a:srgbClr val="EF4444"/>
+                </a:solidFill>
+                <a:latin typeface="Segoe UI"/>
+              </a:rPr>
+              <a:t>^N225 · RED</a:t>
             </a:r>
           </a:p>
         </p:txBody>
@@ -4697,7 +4697,7 @@
                 </a:solidFill>
                 <a:latin typeface="Segoe UI"/>
               </a:rPr>
-              <a:t>-5.2%</a:t>
+              <a:t>-6.8%</a:t>
             </a:r>
           </a:p>
         </p:txBody>
@@ -4837,7 +4837,7 @@
         <p:spPr>
           <a:xfrm>
             <a:off x="457200" y="1188720"/>
-            <a:ext cx="11247120" cy="5576390"/>
+            <a:ext cx="11247120" cy="5513499"/>
           </a:xfrm>
           <a:prstGeom prst="rect">
             <a:avLst/>
@@ -4967,7 +4967,7 @@
                 </a:solidFill>
                 <a:latin typeface="Segoe UI"/>
               </a:rPr>
-              <a:t>US Energy</a:t>
+              <a:t>Apple</a:t>
             </a:r>
           </a:p>
         </p:txBody>
@@ -5103,7 +5103,7 @@
                 </a:solidFill>
                 <a:latin typeface="Segoe UI"/>
               </a:rPr>
-              <a:t>Microsoft</a:t>
+              <a:t>US Energy</a:t>
             </a:r>
           </a:p>
         </p:txBody>
@@ -5171,7 +5171,7 @@
                 </a:solidFill>
                 <a:latin typeface="Segoe UI"/>
               </a:rPr>
-              <a:t>85%</a:t>
+              <a:t>95%</a:t>
             </a:r>
           </a:p>
         </p:txBody>
@@ -5205,7 +5205,7 @@
                 </a:solidFill>
                 <a:latin typeface="Segoe UI"/>
               </a:rPr>
-              <a:t>above 200DMA · golden cross (50&gt;200) · MACD bearish</a:t>
+              <a:t>above 200DMA · golden cross (50&gt;200) · MACD bullish</a:t>
             </a:r>
           </a:p>
         </p:txBody>
@@ -5239,7 +5239,7 @@
                 </a:solidFill>
                 <a:latin typeface="Segoe UI"/>
               </a:rPr>
-              <a:t>Bitcoin</a:t>
+              <a:t>Microsoft</a:t>
             </a:r>
           </a:p>
         </p:txBody>
@@ -5307,7 +5307,7 @@
                 </a:solidFill>
                 <a:latin typeface="Segoe UI"/>
               </a:rPr>
-              <a:t>84%</a:t>
+              <a:t>85%</a:t>
             </a:r>
           </a:p>
         </p:txBody>
@@ -5375,7 +5375,7 @@
                 </a:solidFill>
                 <a:latin typeface="Segoe UI"/>
               </a:rPr>
-              <a:t>Apple</a:t>
+              <a:t>Crude Oil WTI</a:t>
             </a:r>
           </a:p>
         </p:txBody>
@@ -5443,7 +5443,7 @@
                 </a:solidFill>
                 <a:latin typeface="Segoe UI"/>
               </a:rPr>
-              <a:t>84%</a:t>
+              <a:t>90%</a:t>
             </a:r>
           </a:p>
         </p:txBody>
@@ -5477,7 +5477,7 @@
                 </a:solidFill>
                 <a:latin typeface="Segoe UI"/>
               </a:rPr>
-              <a:t>above 200DMA · golden cross (50&gt;200) · MACD bearish</a:t>
+              <a:t>above 200DMA · golden cross (50&gt;200) · MACD bullish</a:t>
             </a:r>
           </a:p>
         </p:txBody>
@@ -5511,7 +5511,7 @@
                 </a:solidFill>
                 <a:latin typeface="Segoe UI"/>
               </a:rPr>
-              <a:t>Crude Oil WTI</a:t>
+              <a:t>Dollar Index</a:t>
             </a:r>
           </a:p>
         </p:txBody>
@@ -5579,7 +5579,7 @@
                 </a:solidFill>
                 <a:latin typeface="Segoe UI"/>
               </a:rPr>
-              <a:t>88%</a:t>
+              <a:t>82%</a:t>
             </a:r>
           </a:p>
         </p:txBody>
@@ -5613,7 +5613,7 @@
                 </a:solidFill>
                 <a:latin typeface="Segoe UI"/>
               </a:rPr>
-              <a:t>above 200DMA · golden cross (50&gt;200) · MACD bullish</a:t>
+              <a:t>above 200DMA · golden cross (50&gt;200) · MACD bearish</a:t>
             </a:r>
           </a:p>
         </p:txBody>
@@ -5647,7 +5647,7 @@
                 </a:solidFill>
                 <a:latin typeface="Segoe UI"/>
               </a:rPr>
-              <a:t>Dollar Index</a:t>
+              <a:t>ICICI Bank</a:t>
             </a:r>
           </a:p>
         </p:txBody>
@@ -5749,7 +5749,7 @@
                 </a:solidFill>
                 <a:latin typeface="Segoe UI"/>
               </a:rPr>
-              <a:t>above 200DMA · golden cross (50&gt;200) · MACD bearish</a:t>
+              <a:t>above 200DMA · golden cross (50&gt;200) · MACD bullish</a:t>
             </a:r>
           </a:p>
         </p:txBody>
@@ -5783,7 +5783,7 @@
                 </a:solidFill>
                 <a:latin typeface="Segoe UI"/>
               </a:rPr>
-              <a:t>Solana</a:t>
+              <a:t>Amazon</a:t>
             </a:r>
           </a:p>
         </p:txBody>
@@ -5851,7 +5851,7 @@
                 </a:solidFill>
                 <a:latin typeface="Segoe UI"/>
               </a:rPr>
-              <a:t>80%</a:t>
+              <a:t>93%</a:t>
             </a:r>
           </a:p>
         </p:txBody>
@@ -5885,7 +5885,7 @@
                 </a:solidFill>
                 <a:latin typeface="Segoe UI"/>
               </a:rPr>
-              <a:t>above 200DMA · golden cross (50&gt;200) · MACD bearish</a:t>
+              <a:t>above 200DMA · golden cross (50&gt;200) · MACD bullish</a:t>
             </a:r>
           </a:p>
         </p:txBody>
@@ -6123,7 +6123,7 @@
                 </a:solidFill>
                 <a:latin typeface="Segoe UI"/>
               </a:rPr>
-              <a:t>77%</a:t>
+              <a:t>80%</a:t>
             </a:r>
           </a:p>
         </p:txBody>
@@ -6259,7 +6259,7 @@
                 </a:solidFill>
                 <a:latin typeface="Segoe UI"/>
               </a:rPr>
-              <a:t>70%</a:t>
+              <a:t>76%</a:t>
             </a:r>
           </a:p>
         </p:txBody>
@@ -6327,7 +6327,7 @@
                 </a:solidFill>
                 <a:latin typeface="Segoe UI"/>
               </a:rPr>
-              <a:t>S&amp;P 500</a:t>
+              <a:t>Tesla</a:t>
             </a:r>
           </a:p>
         </p:txBody>
@@ -6395,7 +6395,7 @@
                 </a:solidFill>
                 <a:latin typeface="Segoe UI"/>
               </a:rPr>
-              <a:t>68%</a:t>
+              <a:t>75%</a:t>
             </a:r>
           </a:p>
         </p:txBody>
@@ -6429,7 +6429,7 @@
                 </a:solidFill>
                 <a:latin typeface="Segoe UI"/>
               </a:rPr>
-              <a:t>above 200DMA · golden cross (50&gt;200) · MACD bearish</a:t>
+              <a:t>above 200DMA · death cross (50&lt;200) · MACD bullish</a:t>
             </a:r>
           </a:p>
         </p:txBody>
@@ -6531,7 +6531,7 @@
                 </a:solidFill>
                 <a:latin typeface="Segoe UI"/>
               </a:rPr>
-              <a:t>68%</a:t>
+              <a:t>69%</a:t>
             </a:r>
           </a:p>
         </p:txBody>
@@ -6659,7 +6659,7 @@
                 </a:solidFill>
                 <a:latin typeface="Segoe UI"/>
               </a:rPr>
-              <a:t>Base currency INR · USD/INR 94.45</a:t>
+              <a:t>Base currency INR · USD/INR 94.81</a:t>
             </a:r>
           </a:p>
         </p:txBody>
@@ -7067,7 +7067,7 @@
                 </a:solidFill>
                 <a:latin typeface="Segoe UI"/>
               </a:rPr>
-              <a:t>84,248</a:t>
+              <a:t>81,192</a:t>
             </a:r>
           </a:p>
         </p:txBody>
@@ -7101,7 +7101,7 @@
                 </a:solidFill>
                 <a:latin typeface="Segoe UI"/>
               </a:rPr>
-              <a:t>Rs 795,726</a:t>
+              <a:t>Rs 769,767</a:t>
             </a:r>
           </a:p>
         </p:txBody>
@@ -7135,7 +7135,7 @@
                 </a:solidFill>
                 <a:latin typeface="Segoe UI"/>
               </a:rPr>
-              <a:t>Rs 229,026</a:t>
+              <a:t>Rs 200,919</a:t>
             </a:r>
           </a:p>
         </p:txBody>
@@ -7169,7 +7169,7 @@
                 </a:solidFill>
                 <a:latin typeface="Segoe UI"/>
               </a:rPr>
-              <a:t>+40.4%</a:t>
+              <a:t>+35.3%</a:t>
             </a:r>
           </a:p>
         </p:txBody>
@@ -7199,11 +7199,11 @@
             <a:r>
               <a:rPr sz="1000" b="0">
                 <a:solidFill>
-                  <a:srgbClr val="22C55E"/>
-                </a:solidFill>
-                <a:latin typeface="Segoe UI"/>
-              </a:rPr>
-              <a:t>+1.6%</a:t>
+                  <a:srgbClr val="EF4444"/>
+                </a:solidFill>
+                <a:latin typeface="Segoe UI"/>
+              </a:rPr>
+              <a:t>-3.4%</a:t>
             </a:r>
           </a:p>
         </p:txBody>
@@ -7339,7 +7339,7 @@
                 </a:solidFill>
                 <a:latin typeface="Segoe UI"/>
               </a:rPr>
-              <a:t>4,133</a:t>
+              <a:t>4,030</a:t>
             </a:r>
           </a:p>
         </p:txBody>
@@ -7373,7 +7373,7 @@
                 </a:solidFill>
                 <a:latin typeface="Segoe UI"/>
               </a:rPr>
-              <a:t>Rs 390,343</a:t>
+              <a:t>Rs 382,095</a:t>
             </a:r>
           </a:p>
         </p:txBody>
@@ -7407,7 +7407,7 @@
                 </a:solidFill>
                 <a:latin typeface="Segoe UI"/>
               </a:rPr>
-              <a:t>Rs 173,108</a:t>
+              <a:t>Rs 164,037</a:t>
             </a:r>
           </a:p>
         </p:txBody>
@@ -7441,7 +7441,7 @@
                 </a:solidFill>
                 <a:latin typeface="Segoe UI"/>
               </a:rPr>
-              <a:t>+79.7%</a:t>
+              <a:t>+75.2%</a:t>
             </a:r>
           </a:p>
         </p:txBody>
@@ -7611,7 +7611,7 @@
                 </a:solidFill>
                 <a:latin typeface="Segoe UI"/>
               </a:rPr>
-              <a:t>340</a:t>
+              <a:t>344</a:t>
             </a:r>
           </a:p>
         </p:txBody>
@@ -7645,7 +7645,7 @@
                 </a:solidFill>
                 <a:latin typeface="Segoe UI"/>
               </a:rPr>
-              <a:t>Rs 320,658</a:t>
+              <a:t>Rs 326,130</a:t>
             </a:r>
           </a:p>
         </p:txBody>
@@ -7679,7 +7679,7 @@
                 </a:solidFill>
                 <a:latin typeface="Segoe UI"/>
               </a:rPr>
-              <a:t>Rs 145,925</a:t>
+              <a:t>Rs 150,735</a:t>
             </a:r>
           </a:p>
         </p:txBody>
@@ -7713,7 +7713,7 @@
                 </a:solidFill>
                 <a:latin typeface="Segoe UI"/>
               </a:rPr>
-              <a:t>+83.5%</a:t>
+              <a:t>+85.9%</a:t>
             </a:r>
           </a:p>
         </p:txBody>
@@ -7883,7 +7883,7 @@
                 </a:solidFill>
                 <a:latin typeface="Segoe UI"/>
               </a:rPr>
-              <a:t>216</a:t>
+              <a:t>222</a:t>
             </a:r>
           </a:p>
         </p:txBody>
@@ -7917,7 +7917,7 @@
                 </a:solidFill>
                 <a:latin typeface="Segoe UI"/>
               </a:rPr>
-              <a:t>Rs 163,565</a:t>
+              <a:t>Rs 168,356</a:t>
             </a:r>
           </a:p>
         </p:txBody>
@@ -7951,7 +7951,7 @@
                 </a:solidFill>
                 <a:latin typeface="Segoe UI"/>
               </a:rPr>
-              <a:t>Rs -176,455</a:t>
+              <a:t>Rs -172,953</a:t>
             </a:r>
           </a:p>
         </p:txBody>
@@ -7985,7 +7985,7 @@
                 </a:solidFill>
                 <a:latin typeface="Segoe UI"/>
               </a:rPr>
-              <a:t>-51.9%</a:t>
+              <a:t>-50.7%</a:t>
             </a:r>
           </a:p>
         </p:txBody>
@@ -8155,7 +8155,7 @@
                 </a:solidFill>
                 <a:latin typeface="Segoe UI"/>
               </a:rPr>
-              <a:t>1,168</a:t>
+              <a:t>1,153</a:t>
             </a:r>
           </a:p>
         </p:txBody>
@@ -8189,7 +8189,7 @@
                 </a:solidFill>
                 <a:latin typeface="Segoe UI"/>
               </a:rPr>
-              <a:t>Rs 93,440</a:t>
+              <a:t>Rs 92,268</a:t>
             </a:r>
           </a:p>
         </p:txBody>
@@ -8223,7 +8223,7 @@
                 </a:solidFill>
                 <a:latin typeface="Segoe UI"/>
               </a:rPr>
-              <a:t>Rs -18,560</a:t>
+              <a:t>Rs -19,732</a:t>
             </a:r>
           </a:p>
         </p:txBody>
@@ -8257,7 +8257,7 @@
                 </a:solidFill>
                 <a:latin typeface="Segoe UI"/>
               </a:rPr>
-              <a:t>-16.6%</a:t>
+              <a:t>-17.6%</a:t>
             </a:r>
           </a:p>
         </p:txBody>
@@ -8699,7 +8699,7 @@
                 </a:solidFill>
                 <a:latin typeface="Segoe UI"/>
               </a:rPr>
-              <a:t>1,209</a:t>
+              <a:t>1,184</a:t>
             </a:r>
           </a:p>
         </p:txBody>
@@ -8733,7 +8733,7 @@
                 </a:solidFill>
                 <a:latin typeface="Segoe UI"/>
               </a:rPr>
-              <a:t>Rs 60,450</a:t>
+              <a:t>Rs 59,225</a:t>
             </a:r>
           </a:p>
         </p:txBody>
@@ -8767,7 +8767,7 @@
                 </a:solidFill>
                 <a:latin typeface="Segoe UI"/>
               </a:rPr>
-              <a:t>Rs -62,050</a:t>
+              <a:t>Rs -63,275</a:t>
             </a:r>
           </a:p>
         </p:txBody>
@@ -8801,7 +8801,7 @@
                 </a:solidFill>
                 <a:latin typeface="Segoe UI"/>
               </a:rPr>
-              <a:t>-50.6%</a:t>
+              <a:t>-51.6%</a:t>
             </a:r>
           </a:p>
         </p:txBody>
@@ -8971,7 +8971,7 @@
                 </a:solidFill>
                 <a:latin typeface="Segoe UI"/>
               </a:rPr>
-              <a:t>707</a:t>
+              <a:t>694</a:t>
             </a:r>
           </a:p>
         </p:txBody>
@@ -9005,7 +9005,7 @@
                 </a:solidFill>
                 <a:latin typeface="Segoe UI"/>
               </a:rPr>
-              <a:t>Rs 42,417</a:t>
+              <a:t>Rs 41,643</a:t>
             </a:r>
           </a:p>
         </p:txBody>
@@ -9039,7 +9039,7 @@
                 </a:solidFill>
                 <a:latin typeface="Segoe UI"/>
               </a:rPr>
-              <a:t>Rs -48,783</a:t>
+              <a:t>Rs -49,557</a:t>
             </a:r>
           </a:p>
         </p:txBody>
@@ -9073,7 +9073,7 @@
                 </a:solidFill>
                 <a:latin typeface="Segoe UI"/>
               </a:rPr>
-              <a:t>-53.5%</a:t>
+              <a:t>-54.3%</a:t>
             </a:r>
           </a:p>
         </p:txBody>
@@ -9141,7 +9141,7 @@
                 </a:solidFill>
                 <a:latin typeface="Segoe UI"/>
               </a:rPr>
-              <a:t>Total Rs 1,929,823 | P&amp;L Rs 215,436 (+12.6%) | Sharpe 0.8 | Vol 17.19% | VaR95 -1.65%/day</a:t>
+              <a:t>Total Rs 1,902,710 | P&amp;L Rs 183,400 (+10.7%) | Sharpe 0.63 | Vol 17.11% | VaR95 -1.62%/day</a:t>
             </a:r>
           </a:p>
         </p:txBody>

--- a/docs/pmr_daily.pptx
+++ b/docs/pmr_daily.pptx
@@ -3197,7 +3197,7 @@
                 </a:solidFill>
                 <a:latin typeface="Segoe UI"/>
               </a:rPr>
-              <a:t>Friday, 23 Oct 2026 09:17 SGT</a:t>
+              <a:t>Monday, 26 Oct 2026 09:00 SGT</a:t>
             </a:r>
           </a:p>
         </p:txBody>
@@ -3265,7 +3265,7 @@
                 </a:solidFill>
                 <a:latin typeface="Segoe UI"/>
               </a:rPr>
-              <a:t>RAG 11R / 17A / 18G   |   54.3% above 200DMA   |   Portfolio Rs 1,902,710 (+10.7%)</a:t>
+              <a:t>RAG 12R / 19A / 15G   |   50.0% above 200DMA   |   Portfolio Rs 1,886,896 (+9.6%)</a:t>
             </a:r>
           </a:p>
         </p:txBody>
@@ -3587,7 +3587,7 @@
                 </a:solidFill>
                 <a:latin typeface="Segoe UI"/>
               </a:rPr>
-              <a:t>NIFTY IT</a:t>
+              <a:t>Infosys</a:t>
             </a:r>
           </a:p>
         </p:txBody>
@@ -3617,11 +3617,11 @@
             <a:r>
               <a:rPr sz="900" b="0">
                 <a:solidFill>
-                  <a:srgbClr val="22C55E"/>
-                </a:solidFill>
-                <a:latin typeface="Segoe UI"/>
-              </a:rPr>
-              <a:t>^CNXIT · GREEN</a:t>
+                  <a:srgbClr val="F59E0B"/>
+                </a:solidFill>
+                <a:latin typeface="Segoe UI"/>
+              </a:rPr>
+              <a:t>INFY.NS · AMBER</a:t>
             </a:r>
           </a:p>
         </p:txBody>
@@ -3655,7 +3655,7 @@
                 </a:solidFill>
                 <a:latin typeface="Segoe UI"/>
               </a:rPr>
-              <a:t>+17.0%</a:t>
+              <a:t>+16.1%</a:t>
             </a:r>
           </a:p>
         </p:txBody>
@@ -3713,7 +3713,7 @@
                 </a:solidFill>
                 <a:latin typeface="Segoe UI"/>
               </a:rPr>
-              <a:t>Infosys</a:t>
+              <a:t>NIFTY IT</a:t>
             </a:r>
           </a:p>
         </p:txBody>
@@ -3743,11 +3743,11 @@
             <a:r>
               <a:rPr sz="900" b="0">
                 <a:solidFill>
-                  <a:srgbClr val="F59E0B"/>
-                </a:solidFill>
-                <a:latin typeface="Segoe UI"/>
-              </a:rPr>
-              <a:t>INFY.NS · AMBER</a:t>
+                  <a:srgbClr val="22C55E"/>
+                </a:solidFill>
+                <a:latin typeface="Segoe UI"/>
+              </a:rPr>
+              <a:t>^CNXIT · GREEN</a:t>
             </a:r>
           </a:p>
         </p:txBody>
@@ -3781,7 +3781,7 @@
                 </a:solidFill>
                 <a:latin typeface="Segoe UI"/>
               </a:rPr>
-              <a:t>+16.0%</a:t>
+              <a:t>+15.5%</a:t>
             </a:r>
           </a:p>
         </p:txBody>
@@ -3907,7 +3907,7 @@
                 </a:solidFill>
                 <a:latin typeface="Segoe UI"/>
               </a:rPr>
-              <a:t>+10.8%</a:t>
+              <a:t>+12.7%</a:t>
             </a:r>
           </a:p>
         </p:txBody>
@@ -4033,7 +4033,7 @@
                 </a:solidFill>
                 <a:latin typeface="Segoe UI"/>
               </a:rPr>
-              <a:t>+10.5%</a:t>
+              <a:t>+12.6%</a:t>
             </a:r>
           </a:p>
         </p:txBody>
@@ -4193,7 +4193,7 @@
                 </a:solidFill>
                 <a:latin typeface="Segoe UI"/>
               </a:rPr>
-              <a:t>-12.2%</a:t>
+              <a:t>-14.0%</a:t>
             </a:r>
           </a:p>
         </p:txBody>
@@ -4281,11 +4281,11 @@
             <a:r>
               <a:rPr sz="900" b="0">
                 <a:solidFill>
-                  <a:srgbClr val="22C55E"/>
-                </a:solidFill>
-                <a:latin typeface="Segoe UI"/>
-              </a:rPr>
-              <a:t>ETH-USD · GREEN</a:t>
+                  <a:srgbClr val="F59E0B"/>
+                </a:solidFill>
+                <a:latin typeface="Segoe UI"/>
+              </a:rPr>
+              <a:t>ETH-USD · AMBER</a:t>
             </a:r>
           </a:p>
         </p:txBody>
@@ -4319,7 +4319,7 @@
                 </a:solidFill>
                 <a:latin typeface="Segoe UI"/>
               </a:rPr>
-              <a:t>-11.3%</a:t>
+              <a:t>-13.3%</a:t>
             </a:r>
           </a:p>
         </p:txBody>
@@ -4445,7 +4445,7 @@
                 </a:solidFill>
                 <a:latin typeface="Segoe UI"/>
               </a:rPr>
-              <a:t>-9.8%</a:t>
+              <a:t>-10.2%</a:t>
             </a:r>
           </a:p>
         </p:txBody>
@@ -4503,7 +4503,7 @@
                 </a:solidFill>
                 <a:latin typeface="Segoe UI"/>
               </a:rPr>
-              <a:t>Natural Gas</a:t>
+              <a:t>Nvidia</a:t>
             </a:r>
           </a:p>
         </p:txBody>
@@ -4533,11 +4533,11 @@
             <a:r>
               <a:rPr sz="900" b="0">
                 <a:solidFill>
-                  <a:srgbClr val="EF4444"/>
-                </a:solidFill>
-                <a:latin typeface="Segoe UI"/>
-              </a:rPr>
-              <a:t>NG=F · RED</a:t>
+                  <a:srgbClr val="F59E0B"/>
+                </a:solidFill>
+                <a:latin typeface="Segoe UI"/>
+              </a:rPr>
+              <a:t>NVDA · AMBER</a:t>
             </a:r>
           </a:p>
         </p:txBody>
@@ -4571,7 +4571,7 @@
                 </a:solidFill>
                 <a:latin typeface="Segoe UI"/>
               </a:rPr>
-              <a:t>-8.6%</a:t>
+              <a:t>-7.6%</a:t>
             </a:r>
           </a:p>
         </p:txBody>
@@ -4629,7 +4629,7 @@
                 </a:solidFill>
                 <a:latin typeface="Segoe UI"/>
               </a:rPr>
-              <a:t>Nikkei 225</a:t>
+              <a:t>Alphabet</a:t>
             </a:r>
           </a:p>
         </p:txBody>
@@ -4663,7 +4663,7 @@
                 </a:solidFill>
                 <a:latin typeface="Segoe UI"/>
               </a:rPr>
-              <a:t>^N225 · RED</a:t>
+              <a:t>GOOGL · RED</a:t>
             </a:r>
           </a:p>
         </p:txBody>
@@ -4697,7 +4697,7 @@
                 </a:solidFill>
                 <a:latin typeface="Segoe UI"/>
               </a:rPr>
-              <a:t>-6.8%</a:t>
+              <a:t>-6.9%</a:t>
             </a:r>
           </a:p>
         </p:txBody>
@@ -5103,7 +5103,7 @@
                 </a:solidFill>
                 <a:latin typeface="Segoe UI"/>
               </a:rPr>
-              <a:t>US Energy</a:t>
+              <a:t>Crude Oil WTI</a:t>
             </a:r>
           </a:p>
         </p:txBody>
@@ -5171,7 +5171,7 @@
                 </a:solidFill>
                 <a:latin typeface="Segoe UI"/>
               </a:rPr>
-              <a:t>95%</a:t>
+              <a:t>91%</a:t>
             </a:r>
           </a:p>
         </p:txBody>
@@ -5307,7 +5307,7 @@
                 </a:solidFill>
                 <a:latin typeface="Segoe UI"/>
               </a:rPr>
-              <a:t>85%</a:t>
+              <a:t>84%</a:t>
             </a:r>
           </a:p>
         </p:txBody>
@@ -5375,7 +5375,7 @@
                 </a:solidFill>
                 <a:latin typeface="Segoe UI"/>
               </a:rPr>
-              <a:t>Crude Oil WTI</a:t>
+              <a:t>Dollar Index</a:t>
             </a:r>
           </a:p>
         </p:txBody>
@@ -5443,7 +5443,7 @@
                 </a:solidFill>
                 <a:latin typeface="Segoe UI"/>
               </a:rPr>
-              <a:t>90%</a:t>
+              <a:t>83%</a:t>
             </a:r>
           </a:p>
         </p:txBody>
@@ -5477,7 +5477,7 @@
                 </a:solidFill>
                 <a:latin typeface="Segoe UI"/>
               </a:rPr>
-              <a:t>above 200DMA · golden cross (50&gt;200) · MACD bullish</a:t>
+              <a:t>above 200DMA · golden cross (50&gt;200) · MACD bearish</a:t>
             </a:r>
           </a:p>
         </p:txBody>
@@ -5511,7 +5511,7 @@
                 </a:solidFill>
                 <a:latin typeface="Segoe UI"/>
               </a:rPr>
-              <a:t>Dollar Index</a:t>
+              <a:t>ICICI Bank</a:t>
             </a:r>
           </a:p>
         </p:txBody>
@@ -5613,7 +5613,7 @@
                 </a:solidFill>
                 <a:latin typeface="Segoe UI"/>
               </a:rPr>
-              <a:t>above 200DMA · golden cross (50&gt;200) · MACD bearish</a:t>
+              <a:t>above 200DMA · golden cross (50&gt;200) · MACD bullish</a:t>
             </a:r>
           </a:p>
         </p:txBody>
@@ -5647,7 +5647,7 @@
                 </a:solidFill>
                 <a:latin typeface="Segoe UI"/>
               </a:rPr>
-              <a:t>ICICI Bank</a:t>
+              <a:t>US Energy</a:t>
             </a:r>
           </a:p>
         </p:txBody>
@@ -5681,7 +5681,7 @@
                 </a:solidFill>
                 <a:latin typeface="Segoe UI"/>
               </a:rPr>
-              <a:t>STRONG BUY</a:t>
+              <a:t>BUY</a:t>
             </a:r>
           </a:p>
         </p:txBody>
@@ -5715,7 +5715,7 @@
                 </a:solidFill>
                 <a:latin typeface="Segoe UI"/>
               </a:rPr>
-              <a:t>82%</a:t>
+              <a:t>94%</a:t>
             </a:r>
           </a:p>
         </p:txBody>
@@ -5783,7 +5783,7 @@
                 </a:solidFill>
                 <a:latin typeface="Segoe UI"/>
               </a:rPr>
-              <a:t>Amazon</a:t>
+              <a:t>TCS</a:t>
             </a:r>
           </a:p>
         </p:txBody>
@@ -5817,7 +5817,7 @@
                 </a:solidFill>
                 <a:latin typeface="Segoe UI"/>
               </a:rPr>
-              <a:t>STRONG BUY</a:t>
+              <a:t>BUY</a:t>
             </a:r>
           </a:p>
         </p:txBody>
@@ -5851,7 +5851,7 @@
                 </a:solidFill>
                 <a:latin typeface="Segoe UI"/>
               </a:rPr>
-              <a:t>93%</a:t>
+              <a:t>80%</a:t>
             </a:r>
           </a:p>
         </p:txBody>
@@ -5885,7 +5885,7 @@
                 </a:solidFill>
                 <a:latin typeface="Segoe UI"/>
               </a:rPr>
-              <a:t>above 200DMA · golden cross (50&gt;200) · MACD bullish</a:t>
+              <a:t>above 200DMA · death cross (50&lt;200) · MACD bullish</a:t>
             </a:r>
           </a:p>
         </p:txBody>
@@ -5919,7 +5919,7 @@
                 </a:solidFill>
                 <a:latin typeface="Segoe UI"/>
               </a:rPr>
-              <a:t>TCS</a:t>
+              <a:t>NIFTY IT</a:t>
             </a:r>
           </a:p>
         </p:txBody>
@@ -5987,7 +5987,7 @@
                 </a:solidFill>
                 <a:latin typeface="Segoe UI"/>
               </a:rPr>
-              <a:t>80%</a:t>
+              <a:t>79%</a:t>
             </a:r>
           </a:p>
         </p:txBody>
@@ -6055,7 +6055,7 @@
                 </a:solidFill>
                 <a:latin typeface="Segoe UI"/>
               </a:rPr>
-              <a:t>NIFTY IT</a:t>
+              <a:t>Infosys</a:t>
             </a:r>
           </a:p>
         </p:txBody>
@@ -6123,7 +6123,7 @@
                 </a:solidFill>
                 <a:latin typeface="Segoe UI"/>
               </a:rPr>
-              <a:t>80%</a:t>
+              <a:t>76%</a:t>
             </a:r>
           </a:p>
         </p:txBody>
@@ -6191,7 +6191,7 @@
                 </a:solidFill>
                 <a:latin typeface="Segoe UI"/>
               </a:rPr>
-              <a:t>Infosys</a:t>
+              <a:t>US 1-3Y Treasury</a:t>
             </a:r>
           </a:p>
         </p:txBody>
@@ -6293,7 +6293,7 @@
                 </a:solidFill>
                 <a:latin typeface="Segoe UI"/>
               </a:rPr>
-              <a:t>above 200DMA · death cross (50&lt;200) · MACD bullish</a:t>
+              <a:t>above 200DMA · golden cross (50&gt;200) · MACD bullish</a:t>
             </a:r>
           </a:p>
         </p:txBody>
@@ -6327,7 +6327,7 @@
                 </a:solidFill>
                 <a:latin typeface="Segoe UI"/>
               </a:rPr>
-              <a:t>Tesla</a:t>
+              <a:t>Bharti Airtel</a:t>
             </a:r>
           </a:p>
         </p:txBody>
@@ -6395,7 +6395,7 @@
                 </a:solidFill>
                 <a:latin typeface="Segoe UI"/>
               </a:rPr>
-              <a:t>75%</a:t>
+              <a:t>69%</a:t>
             </a:r>
           </a:p>
         </p:txBody>
@@ -6463,7 +6463,7 @@
                 </a:solidFill>
                 <a:latin typeface="Segoe UI"/>
               </a:rPr>
-              <a:t>FTSE 100</a:t>
+              <a:t>Bitcoin</a:t>
             </a:r>
           </a:p>
         </p:txBody>
@@ -6531,7 +6531,7 @@
                 </a:solidFill>
                 <a:latin typeface="Segoe UI"/>
               </a:rPr>
-              <a:t>69%</a:t>
+              <a:t>78%</a:t>
             </a:r>
           </a:p>
         </p:txBody>
@@ -6565,7 +6565,7 @@
                 </a:solidFill>
                 <a:latin typeface="Segoe UI"/>
               </a:rPr>
-              <a:t>above 200DMA · golden cross (50&gt;200) · MACD bullish</a:t>
+              <a:t>above 200DMA · golden cross (50&gt;200) · MACD bearish</a:t>
             </a:r>
           </a:p>
         </p:txBody>
@@ -6659,7 +6659,7 @@
                 </a:solidFill>
                 <a:latin typeface="Segoe UI"/>
               </a:rPr>
-              <a:t>Base currency INR · USD/INR 94.81</a:t>
+              <a:t>Base currency INR · USD/INR 94.93</a:t>
             </a:r>
           </a:p>
         </p:txBody>
@@ -7067,7 +7067,7 @@
                 </a:solidFill>
                 <a:latin typeface="Segoe UI"/>
               </a:rPr>
-              <a:t>81,192</a:t>
+              <a:t>80,080</a:t>
             </a:r>
           </a:p>
         </p:txBody>
@@ -7101,7 +7101,7 @@
                 </a:solidFill>
                 <a:latin typeface="Segoe UI"/>
               </a:rPr>
-              <a:t>Rs 769,767</a:t>
+              <a:t>Rs 760,195</a:t>
             </a:r>
           </a:p>
         </p:txBody>
@@ -7135,7 +7135,7 @@
                 </a:solidFill>
                 <a:latin typeface="Segoe UI"/>
               </a:rPr>
-              <a:t>Rs 200,919</a:t>
+              <a:t>Rs 190,615</a:t>
             </a:r>
           </a:p>
         </p:txBody>
@@ -7169,7 +7169,7 @@
                 </a:solidFill>
                 <a:latin typeface="Segoe UI"/>
               </a:rPr>
-              <a:t>+35.3%</a:t>
+              <a:t>+33.5%</a:t>
             </a:r>
           </a:p>
         </p:txBody>
@@ -7203,7 +7203,7 @@
                 </a:solidFill>
                 <a:latin typeface="Segoe UI"/>
               </a:rPr>
-              <a:t>-3.4%</a:t>
+              <a:t>-0.9%</a:t>
             </a:r>
           </a:p>
         </p:txBody>
@@ -7339,7 +7339,7 @@
                 </a:solidFill>
                 <a:latin typeface="Segoe UI"/>
               </a:rPr>
-              <a:t>4,030</a:t>
+              <a:t>4,000</a:t>
             </a:r>
           </a:p>
         </p:txBody>
@@ -7373,7 +7373,7 @@
                 </a:solidFill>
                 <a:latin typeface="Segoe UI"/>
               </a:rPr>
-              <a:t>Rs 382,095</a:t>
+              <a:t>Rs 379,767</a:t>
             </a:r>
           </a:p>
         </p:txBody>
@@ -7407,7 +7407,7 @@
                 </a:solidFill>
                 <a:latin typeface="Segoe UI"/>
               </a:rPr>
-              <a:t>Rs 164,037</a:t>
+              <a:t>Rs 161,428</a:t>
             </a:r>
           </a:p>
         </p:txBody>
@@ -7441,7 +7441,7 @@
                 </a:solidFill>
                 <a:latin typeface="Segoe UI"/>
               </a:rPr>
-              <a:t>+75.2%</a:t>
+              <a:t>+73.9%</a:t>
             </a:r>
           </a:p>
         </p:txBody>
@@ -7611,7 +7611,7 @@
                 </a:solidFill>
                 <a:latin typeface="Segoe UI"/>
               </a:rPr>
-              <a:t>344</a:t>
+              <a:t>348</a:t>
             </a:r>
           </a:p>
         </p:txBody>
@@ -7645,7 +7645,7 @@
                 </a:solidFill>
                 <a:latin typeface="Segoe UI"/>
               </a:rPr>
-              <a:t>Rs 326,130</a:t>
+              <a:t>Rs 330,100</a:t>
             </a:r>
           </a:p>
         </p:txBody>
@@ -7679,7 +7679,7 @@
                 </a:solidFill>
                 <a:latin typeface="Segoe UI"/>
               </a:rPr>
-              <a:t>Rs 150,735</a:t>
+              <a:t>Rs 154,480</a:t>
             </a:r>
           </a:p>
         </p:txBody>
@@ -7713,7 +7713,7 @@
                 </a:solidFill>
                 <a:latin typeface="Segoe UI"/>
               </a:rPr>
-              <a:t>+85.9%</a:t>
+              <a:t>+88.0%</a:t>
             </a:r>
           </a:p>
         </p:txBody>
@@ -7883,7 +7883,7 @@
                 </a:solidFill>
                 <a:latin typeface="Segoe UI"/>
               </a:rPr>
-              <a:t>222</a:t>
+              <a:t>211</a:t>
             </a:r>
           </a:p>
         </p:txBody>
@@ -7917,7 +7917,7 @@
                 </a:solidFill>
                 <a:latin typeface="Segoe UI"/>
               </a:rPr>
-              <a:t>Rs 168,356</a:t>
+              <a:t>Rs 160,211</a:t>
             </a:r>
           </a:p>
         </p:txBody>
@@ -7951,7 +7951,7 @@
                 </a:solidFill>
                 <a:latin typeface="Segoe UI"/>
               </a:rPr>
-              <a:t>Rs -172,953</a:t>
+              <a:t>Rs -181,537</a:t>
             </a:r>
           </a:p>
         </p:txBody>
@@ -7985,7 +7985,7 @@
                 </a:solidFill>
                 <a:latin typeface="Segoe UI"/>
               </a:rPr>
-              <a:t>-50.7%</a:t>
+              <a:t>-53.1%</a:t>
             </a:r>
           </a:p>
         </p:txBody>
@@ -8155,7 +8155,7 @@
                 </a:solidFill>
                 <a:latin typeface="Segoe UI"/>
               </a:rPr>
-              <a:t>1,153</a:t>
+              <a:t>1,154</a:t>
             </a:r>
           </a:p>
         </p:txBody>
@@ -8189,7 +8189,7 @@
                 </a:solidFill>
                 <a:latin typeface="Segoe UI"/>
               </a:rPr>
-              <a:t>Rs 92,268</a:t>
+              <a:t>Rs 92,304</a:t>
             </a:r>
           </a:p>
         </p:txBody>
@@ -8223,7 +8223,7 @@
                 </a:solidFill>
                 <a:latin typeface="Segoe UI"/>
               </a:rPr>
-              <a:t>Rs -19,732</a:t>
+              <a:t>Rs -19,696</a:t>
             </a:r>
           </a:p>
         </p:txBody>
@@ -8427,7 +8427,7 @@
                 </a:solidFill>
                 <a:latin typeface="Segoe UI"/>
               </a:rPr>
-              <a:t>2,529</a:t>
+              <a:t>2,530</a:t>
             </a:r>
           </a:p>
         </p:txBody>
@@ -8461,7 +8461,7 @@
                 </a:solidFill>
                 <a:latin typeface="Segoe UI"/>
               </a:rPr>
-              <a:t>Rs 63,225</a:t>
+              <a:t>Rs 63,250</a:t>
             </a:r>
           </a:p>
         </p:txBody>
@@ -8495,7 +8495,7 @@
                 </a:solidFill>
                 <a:latin typeface="Segoe UI"/>
               </a:rPr>
-              <a:t>Rs -26,775</a:t>
+              <a:t>Rs -26,750</a:t>
             </a:r>
           </a:p>
         </p:txBody>
@@ -8529,7 +8529,7 @@
                 </a:solidFill>
                 <a:latin typeface="Segoe UI"/>
               </a:rPr>
-              <a:t>-29.8%</a:t>
+              <a:t>-29.7%</a:t>
             </a:r>
           </a:p>
         </p:txBody>
@@ -8699,7 +8699,7 @@
                 </a:solidFill>
                 <a:latin typeface="Segoe UI"/>
               </a:rPr>
-              <a:t>1,184</a:t>
+              <a:t>1,190</a:t>
             </a:r>
           </a:p>
         </p:txBody>
@@ -8733,7 +8733,7 @@
                 </a:solidFill>
                 <a:latin typeface="Segoe UI"/>
               </a:rPr>
-              <a:t>Rs 59,225</a:t>
+              <a:t>Rs 59,500</a:t>
             </a:r>
           </a:p>
         </p:txBody>
@@ -8767,7 +8767,7 @@
                 </a:solidFill>
                 <a:latin typeface="Segoe UI"/>
               </a:rPr>
-              <a:t>Rs -63,275</a:t>
+              <a:t>Rs -63,000</a:t>
             </a:r>
           </a:p>
         </p:txBody>
@@ -8801,7 +8801,7 @@
                 </a:solidFill>
                 <a:latin typeface="Segoe UI"/>
               </a:rPr>
-              <a:t>-51.6%</a:t>
+              <a:t>-51.4%</a:t>
             </a:r>
           </a:p>
         </p:txBody>
@@ -8971,7 +8971,7 @@
                 </a:solidFill>
                 <a:latin typeface="Segoe UI"/>
               </a:rPr>
-              <a:t>694</a:t>
+              <a:t>693</a:t>
             </a:r>
           </a:p>
         </p:txBody>
@@ -9005,7 +9005,7 @@
                 </a:solidFill>
                 <a:latin typeface="Segoe UI"/>
               </a:rPr>
-              <a:t>Rs 41,643</a:t>
+              <a:t>Rs 41,568</a:t>
             </a:r>
           </a:p>
         </p:txBody>
@@ -9039,7 +9039,7 @@
                 </a:solidFill>
                 <a:latin typeface="Segoe UI"/>
               </a:rPr>
-              <a:t>Rs -49,557</a:t>
+              <a:t>Rs -49,632</a:t>
             </a:r>
           </a:p>
         </p:txBody>
@@ -9073,7 +9073,7 @@
                 </a:solidFill>
                 <a:latin typeface="Segoe UI"/>
               </a:rPr>
-              <a:t>-54.3%</a:t>
+              <a:t>-54.4%</a:t>
             </a:r>
           </a:p>
         </p:txBody>
@@ -9141,7 +9141,7 @@
                 </a:solidFill>
                 <a:latin typeface="Segoe UI"/>
               </a:rPr>
-              <a:t>Total Rs 1,902,710 | P&amp;L Rs 183,400 (+10.7%) | Sharpe 0.63 | Vol 17.11% | VaR95 -1.62%/day</a:t>
+              <a:t>Total Rs 1,886,896 | P&amp;L Rs 165,909 (+9.6%) | Sharpe 0.57 | Vol 17.09% | VaR95 -1.64%/day</a:t>
             </a:r>
           </a:p>
         </p:txBody>

--- a/docs/pmr_daily.pptx
+++ b/docs/pmr_daily.pptx
@@ -3197,7 +3197,7 @@
                 </a:solidFill>
                 <a:latin typeface="Segoe UI"/>
               </a:rPr>
-              <a:t>Monday, 26 Oct 2026 09:00 SGT</a:t>
+              <a:t>Tuesday, 27 Oct 2026 09:51 SGT</a:t>
             </a:r>
           </a:p>
         </p:txBody>
@@ -3265,7 +3265,7 @@
                 </a:solidFill>
                 <a:latin typeface="Segoe UI"/>
               </a:rPr>
-              <a:t>RAG 12R / 19A / 15G   |   50.0% above 200DMA   |   Portfolio Rs 1,886,896 (+9.6%)</a:t>
+              <a:t>RAG 11R / 18A / 17G   |   56.5% above 200DMA   |   Portfolio Rs 1,893,325 (+9.8%)</a:t>
             </a:r>
           </a:p>
         </p:txBody>
@@ -3587,7 +3587,7 @@
                 </a:solidFill>
                 <a:latin typeface="Segoe UI"/>
               </a:rPr>
-              <a:t>Infosys</a:t>
+              <a:t>NIFTY IT</a:t>
             </a:r>
           </a:p>
         </p:txBody>
@@ -3617,11 +3617,11 @@
             <a:r>
               <a:rPr sz="900" b="0">
                 <a:solidFill>
-                  <a:srgbClr val="F59E0B"/>
-                </a:solidFill>
-                <a:latin typeface="Segoe UI"/>
-              </a:rPr>
-              <a:t>INFY.NS · AMBER</a:t>
+                  <a:srgbClr val="22C55E"/>
+                </a:solidFill>
+                <a:latin typeface="Segoe UI"/>
+              </a:rPr>
+              <a:t>^CNXIT · GREEN</a:t>
             </a:r>
           </a:p>
         </p:txBody>
@@ -3655,7 +3655,7 @@
                 </a:solidFill>
                 <a:latin typeface="Segoe UI"/>
               </a:rPr>
-              <a:t>+16.1%</a:t>
+              <a:t>+16.5%</a:t>
             </a:r>
           </a:p>
         </p:txBody>
@@ -3713,7 +3713,7 @@
                 </a:solidFill>
                 <a:latin typeface="Segoe UI"/>
               </a:rPr>
-              <a:t>NIFTY IT</a:t>
+              <a:t>Infosys</a:t>
             </a:r>
           </a:p>
         </p:txBody>
@@ -3743,11 +3743,11 @@
             <a:r>
               <a:rPr sz="900" b="0">
                 <a:solidFill>
-                  <a:srgbClr val="22C55E"/>
-                </a:solidFill>
-                <a:latin typeface="Segoe UI"/>
-              </a:rPr>
-              <a:t>^CNXIT · GREEN</a:t>
+                  <a:srgbClr val="F59E0B"/>
+                </a:solidFill>
+                <a:latin typeface="Segoe UI"/>
+              </a:rPr>
+              <a:t>INFY.NS · AMBER</a:t>
             </a:r>
           </a:p>
         </p:txBody>
@@ -3781,7 +3781,7 @@
                 </a:solidFill>
                 <a:latin typeface="Segoe UI"/>
               </a:rPr>
-              <a:t>+15.5%</a:t>
+              <a:t>+16.1%</a:t>
             </a:r>
           </a:p>
         </p:txBody>
@@ -3907,7 +3907,7 @@
                 </a:solidFill>
                 <a:latin typeface="Segoe UI"/>
               </a:rPr>
-              <a:t>+12.7%</a:t>
+              <a:t>+13.2%</a:t>
             </a:r>
           </a:p>
         </p:txBody>
@@ -4033,7 +4033,7 @@
                 </a:solidFill>
                 <a:latin typeface="Segoe UI"/>
               </a:rPr>
-              <a:t>+12.6%</a:t>
+              <a:t>+11.6%</a:t>
             </a:r>
           </a:p>
         </p:txBody>
@@ -4193,7 +4193,7 @@
                 </a:solidFill>
                 <a:latin typeface="Segoe UI"/>
               </a:rPr>
-              <a:t>-14.0%</a:t>
+              <a:t>-14.8%</a:t>
             </a:r>
           </a:p>
         </p:txBody>
@@ -4319,7 +4319,7 @@
                 </a:solidFill>
                 <a:latin typeface="Segoe UI"/>
               </a:rPr>
-              <a:t>-13.3%</a:t>
+              <a:t>-13.5%</a:t>
             </a:r>
           </a:p>
         </p:txBody>
@@ -4445,7 +4445,7 @@
                 </a:solidFill>
                 <a:latin typeface="Segoe UI"/>
               </a:rPr>
-              <a:t>-10.2%</a:t>
+              <a:t>-9.8%</a:t>
             </a:r>
           </a:p>
         </p:txBody>
@@ -4503,7 +4503,7 @@
                 </a:solidFill>
                 <a:latin typeface="Segoe UI"/>
               </a:rPr>
-              <a:t>Nvidia</a:t>
+              <a:t>Clean Energy</a:t>
             </a:r>
           </a:p>
         </p:txBody>
@@ -4533,11 +4533,11 @@
             <a:r>
               <a:rPr sz="900" b="0">
                 <a:solidFill>
-                  <a:srgbClr val="F59E0B"/>
-                </a:solidFill>
-                <a:latin typeface="Segoe UI"/>
-              </a:rPr>
-              <a:t>NVDA · AMBER</a:t>
+                  <a:srgbClr val="EF4444"/>
+                </a:solidFill>
+                <a:latin typeface="Segoe UI"/>
+              </a:rPr>
+              <a:t>ICLN · RED</a:t>
             </a:r>
           </a:p>
         </p:txBody>
@@ -4571,7 +4571,7 @@
                 </a:solidFill>
                 <a:latin typeface="Segoe UI"/>
               </a:rPr>
-              <a:t>-7.6%</a:t>
+              <a:t>-8.5%</a:t>
             </a:r>
           </a:p>
         </p:txBody>
@@ -4697,7 +4697,7 @@
                 </a:solidFill>
                 <a:latin typeface="Segoe UI"/>
               </a:rPr>
-              <a:t>-6.9%</a:t>
+              <a:t>-7.9%</a:t>
             </a:r>
           </a:p>
         </p:txBody>
@@ -4967,7 +4967,7 @@
                 </a:solidFill>
                 <a:latin typeface="Segoe UI"/>
               </a:rPr>
-              <a:t>Apple</a:t>
+              <a:t>Crude Oil WTI</a:t>
             </a:r>
           </a:p>
         </p:txBody>
@@ -5035,7 +5035,7 @@
                 </a:solidFill>
                 <a:latin typeface="Segoe UI"/>
               </a:rPr>
-              <a:t>95%</a:t>
+              <a:t>91%</a:t>
             </a:r>
           </a:p>
         </p:txBody>
@@ -5103,7 +5103,7 @@
                 </a:solidFill>
                 <a:latin typeface="Segoe UI"/>
               </a:rPr>
-              <a:t>Crude Oil WTI</a:t>
+              <a:t>Apple</a:t>
             </a:r>
           </a:p>
         </p:txBody>
@@ -5171,7 +5171,7 @@
                 </a:solidFill>
                 <a:latin typeface="Segoe UI"/>
               </a:rPr>
-              <a:t>91%</a:t>
+              <a:t>84%</a:t>
             </a:r>
           </a:p>
         </p:txBody>
@@ -5205,7 +5205,7 @@
                 </a:solidFill>
                 <a:latin typeface="Segoe UI"/>
               </a:rPr>
-              <a:t>above 200DMA · golden cross (50&gt;200) · MACD bullish</a:t>
+              <a:t>above 200DMA · golden cross (50&gt;200) · MACD bearish</a:t>
             </a:r>
           </a:p>
         </p:txBody>
@@ -5579,7 +5579,7 @@
                 </a:solidFill>
                 <a:latin typeface="Segoe UI"/>
               </a:rPr>
-              <a:t>82%</a:t>
+              <a:t>81%</a:t>
             </a:r>
           </a:p>
         </p:txBody>
@@ -5783,7 +5783,7 @@
                 </a:solidFill>
                 <a:latin typeface="Segoe UI"/>
               </a:rPr>
-              <a:t>TCS</a:t>
+              <a:t>NIFTY IT</a:t>
             </a:r>
           </a:p>
         </p:txBody>
@@ -5851,7 +5851,7 @@
                 </a:solidFill>
                 <a:latin typeface="Segoe UI"/>
               </a:rPr>
-              <a:t>80%</a:t>
+              <a:t>92%</a:t>
             </a:r>
           </a:p>
         </p:txBody>
@@ -5885,7 +5885,7 @@
                 </a:solidFill>
                 <a:latin typeface="Segoe UI"/>
               </a:rPr>
-              <a:t>above 200DMA · death cross (50&lt;200) · MACD bullish</a:t>
+              <a:t>above 200DMA · golden cross (50&gt;200) · MACD bullish</a:t>
             </a:r>
           </a:p>
         </p:txBody>
@@ -5919,7 +5919,7 @@
                 </a:solidFill>
                 <a:latin typeface="Segoe UI"/>
               </a:rPr>
-              <a:t>NIFTY IT</a:t>
+              <a:t>TCS</a:t>
             </a:r>
           </a:p>
         </p:txBody>
@@ -5987,7 +5987,7 @@
                 </a:solidFill>
                 <a:latin typeface="Segoe UI"/>
               </a:rPr>
-              <a:t>79%</a:t>
+              <a:t>80%</a:t>
             </a:r>
           </a:p>
         </p:txBody>
@@ -6055,7 +6055,7 @@
                 </a:solidFill>
                 <a:latin typeface="Segoe UI"/>
               </a:rPr>
-              <a:t>Infosys</a:t>
+              <a:t>Tesla</a:t>
             </a:r>
           </a:p>
         </p:txBody>
@@ -6123,7 +6123,7 @@
                 </a:solidFill>
                 <a:latin typeface="Segoe UI"/>
               </a:rPr>
-              <a:t>76%</a:t>
+              <a:t>77%</a:t>
             </a:r>
           </a:p>
         </p:txBody>
@@ -6191,7 +6191,7 @@
                 </a:solidFill>
                 <a:latin typeface="Segoe UI"/>
               </a:rPr>
-              <a:t>US 1-3Y Treasury</a:t>
+              <a:t>Infosys</a:t>
             </a:r>
           </a:p>
         </p:txBody>
@@ -6259,7 +6259,7 @@
                 </a:solidFill>
                 <a:latin typeface="Segoe UI"/>
               </a:rPr>
-              <a:t>76%</a:t>
+              <a:t>75%</a:t>
             </a:r>
           </a:p>
         </p:txBody>
@@ -6293,7 +6293,7 @@
                 </a:solidFill>
                 <a:latin typeface="Segoe UI"/>
               </a:rPr>
-              <a:t>above 200DMA · golden cross (50&gt;200) · MACD bullish</a:t>
+              <a:t>above 200DMA · death cross (50&lt;200) · MACD bullish</a:t>
             </a:r>
           </a:p>
         </p:txBody>
@@ -6327,7 +6327,7 @@
                 </a:solidFill>
                 <a:latin typeface="Segoe UI"/>
               </a:rPr>
-              <a:t>Bharti Airtel</a:t>
+              <a:t>US 1-3Y Treasury</a:t>
             </a:r>
           </a:p>
         </p:txBody>
@@ -6395,7 +6395,7 @@
                 </a:solidFill>
                 <a:latin typeface="Segoe UI"/>
               </a:rPr>
-              <a:t>69%</a:t>
+              <a:t>68%</a:t>
             </a:r>
           </a:p>
         </p:txBody>
@@ -6429,7 +6429,7 @@
                 </a:solidFill>
                 <a:latin typeface="Segoe UI"/>
               </a:rPr>
-              <a:t>above 200DMA · death cross (50&lt;200) · MACD bullish</a:t>
+              <a:t>above 200DMA · golden cross (50&gt;200) · MACD bullish</a:t>
             </a:r>
           </a:p>
         </p:txBody>
@@ -6463,7 +6463,7 @@
                 </a:solidFill>
                 <a:latin typeface="Segoe UI"/>
               </a:rPr>
-              <a:t>Bitcoin</a:t>
+              <a:t>Bharti Airtel</a:t>
             </a:r>
           </a:p>
         </p:txBody>
@@ -6531,7 +6531,7 @@
                 </a:solidFill>
                 <a:latin typeface="Segoe UI"/>
               </a:rPr>
-              <a:t>78%</a:t>
+              <a:t>68%</a:t>
             </a:r>
           </a:p>
         </p:txBody>
@@ -6565,7 +6565,7 @@
                 </a:solidFill>
                 <a:latin typeface="Segoe UI"/>
               </a:rPr>
-              <a:t>above 200DMA · golden cross (50&gt;200) · MACD bearish</a:t>
+              <a:t>above 200DMA · death cross (50&lt;200) · MACD bullish</a:t>
             </a:r>
           </a:p>
         </p:txBody>
@@ -6659,7 +6659,7 @@
                 </a:solidFill>
                 <a:latin typeface="Segoe UI"/>
               </a:rPr>
-              <a:t>Base currency INR · USD/INR 94.93</a:t>
+              <a:t>Base currency INR · USD/INR 95.18</a:t>
             </a:r>
           </a:p>
         </p:txBody>
@@ -7067,7 +7067,7 @@
                 </a:solidFill>
                 <a:latin typeface="Segoe UI"/>
               </a:rPr>
-              <a:t>80,080</a:t>
+              <a:t>80,005</a:t>
             </a:r>
           </a:p>
         </p:txBody>
@@ -7101,7 +7101,7 @@
                 </a:solidFill>
                 <a:latin typeface="Segoe UI"/>
               </a:rPr>
-              <a:t>Rs 760,195</a:t>
+              <a:t>Rs 761,445</a:t>
             </a:r>
           </a:p>
         </p:txBody>
@@ -7135,7 +7135,7 @@
                 </a:solidFill>
                 <a:latin typeface="Segoe UI"/>
               </a:rPr>
-              <a:t>Rs 190,615</a:t>
+              <a:t>Rs 190,395</a:t>
             </a:r>
           </a:p>
         </p:txBody>
@@ -7169,7 +7169,7 @@
                 </a:solidFill>
                 <a:latin typeface="Segoe UI"/>
               </a:rPr>
-              <a:t>+33.5%</a:t>
+              <a:t>+33.3%</a:t>
             </a:r>
           </a:p>
         </p:txBody>
@@ -7203,7 +7203,7 @@
                 </a:solidFill>
                 <a:latin typeface="Segoe UI"/>
               </a:rPr>
-              <a:t>-0.9%</a:t>
+              <a:t>-0.0%</a:t>
             </a:r>
           </a:p>
         </p:txBody>
@@ -7339,7 +7339,7 @@
                 </a:solidFill>
                 <a:latin typeface="Segoe UI"/>
               </a:rPr>
-              <a:t>4,000</a:t>
+              <a:t>4,029</a:t>
             </a:r>
           </a:p>
         </p:txBody>
@@ -7373,7 +7373,7 @@
                 </a:solidFill>
                 <a:latin typeface="Segoe UI"/>
               </a:rPr>
-              <a:t>Rs 379,767</a:t>
+              <a:t>Rs 383,479</a:t>
             </a:r>
           </a:p>
         </p:txBody>
@@ -7407,7 +7407,7 @@
                 </a:solidFill>
                 <a:latin typeface="Segoe UI"/>
               </a:rPr>
-              <a:t>Rs 161,428</a:t>
+              <a:t>Rs 164,577</a:t>
             </a:r>
           </a:p>
         </p:txBody>
@@ -7441,7 +7441,7 @@
                 </a:solidFill>
                 <a:latin typeface="Segoe UI"/>
               </a:rPr>
-              <a:t>+73.9%</a:t>
+              <a:t>+75.2%</a:t>
             </a:r>
           </a:p>
         </p:txBody>
@@ -7611,7 +7611,7 @@
                 </a:solidFill>
                 <a:latin typeface="Segoe UI"/>
               </a:rPr>
-              <a:t>348</a:t>
+              <a:t>344</a:t>
             </a:r>
           </a:p>
         </p:txBody>
@@ -7645,7 +7645,7 @@
                 </a:solidFill>
                 <a:latin typeface="Segoe UI"/>
               </a:rPr>
-              <a:t>Rs 330,100</a:t>
+              <a:t>Rs 327,316</a:t>
             </a:r>
           </a:p>
         </p:txBody>
@@ -7679,7 +7679,7 @@
                 </a:solidFill>
                 <a:latin typeface="Segoe UI"/>
               </a:rPr>
-              <a:t>Rs 154,480</a:t>
+              <a:t>Rs 151,243</a:t>
             </a:r>
           </a:p>
         </p:txBody>
@@ -7713,7 +7713,7 @@
                 </a:solidFill>
                 <a:latin typeface="Segoe UI"/>
               </a:rPr>
-              <a:t>+88.0%</a:t>
+              <a:t>+85.9%</a:t>
             </a:r>
           </a:p>
         </p:txBody>
@@ -7883,7 +7883,7 @@
                 </a:solidFill>
                 <a:latin typeface="Segoe UI"/>
               </a:rPr>
-              <a:t>211</a:t>
+              <a:t>216</a:t>
             </a:r>
           </a:p>
         </p:txBody>
@@ -7917,7 +7917,7 @@
                 </a:solidFill>
                 <a:latin typeface="Segoe UI"/>
               </a:rPr>
-              <a:t>Rs 160,211</a:t>
+              <a:t>Rs 164,462</a:t>
             </a:r>
           </a:p>
         </p:txBody>
@@ -7951,7 +7951,7 @@
                 </a:solidFill>
                 <a:latin typeface="Segoe UI"/>
               </a:rPr>
-              <a:t>Rs -181,537</a:t>
+              <a:t>Rs -178,168</a:t>
             </a:r>
           </a:p>
         </p:txBody>
@@ -7985,7 +7985,7 @@
                 </a:solidFill>
                 <a:latin typeface="Segoe UI"/>
               </a:rPr>
-              <a:t>-53.1%</a:t>
+              <a:t>-52.0%</a:t>
             </a:r>
           </a:p>
         </p:txBody>
@@ -9141,7 +9141,7 @@
                 </a:solidFill>
                 <a:latin typeface="Segoe UI"/>
               </a:rPr>
-              <a:t>Total Rs 1,886,896 | P&amp;L Rs 165,909 (+9.6%) | Sharpe 0.57 | Vol 17.09% | VaR95 -1.64%/day</a:t>
+              <a:t>Total Rs 1,893,325 | P&amp;L Rs 168,969 (+9.8%) | Sharpe 0.61 | Vol 17.08% | VaR95 -1.63%/day</a:t>
             </a:r>
           </a:p>
         </p:txBody>

--- a/docs/pmr_daily.pptx
+++ b/docs/pmr_daily.pptx
@@ -3197,7 +3197,7 @@
                 </a:solidFill>
                 <a:latin typeface="Segoe UI"/>
               </a:rPr>
-              <a:t>Tuesday, 27 Oct 2026 09:51 SGT</a:t>
+              <a:t>Wednesday, 28 Oct 2026 10:02 SGT</a:t>
             </a:r>
           </a:p>
         </p:txBody>
@@ -3265,7 +3265,7 @@
                 </a:solidFill>
                 <a:latin typeface="Segoe UI"/>
               </a:rPr>
-              <a:t>RAG 11R / 18A / 17G   |   56.5% above 200DMA   |   Portfolio Rs 1,893,325 (+9.8%)</a:t>
+              <a:t>RAG 8R / 21A / 17G   |   56.5% above 200DMA   |   Portfolio Rs 1,906,818 (+10.6%)</a:t>
             </a:r>
           </a:p>
         </p:txBody>
@@ -3529,7 +3529,7 @@
                 </a:solidFill>
                 <a:latin typeface="Segoe UI"/>
               </a:rPr>
-              <a:t>+24.0%</a:t>
+              <a:t>+22.4%</a:t>
             </a:r>
           </a:p>
         </p:txBody>
@@ -3587,7 +3587,7 @@
                 </a:solidFill>
                 <a:latin typeface="Segoe UI"/>
               </a:rPr>
-              <a:t>NIFTY IT</a:t>
+              <a:t>Infosys</a:t>
             </a:r>
           </a:p>
         </p:txBody>
@@ -3617,11 +3617,11 @@
             <a:r>
               <a:rPr sz="900" b="0">
                 <a:solidFill>
-                  <a:srgbClr val="22C55E"/>
-                </a:solidFill>
-                <a:latin typeface="Segoe UI"/>
-              </a:rPr>
-              <a:t>^CNXIT · GREEN</a:t>
+                  <a:srgbClr val="F59E0B"/>
+                </a:solidFill>
+                <a:latin typeface="Segoe UI"/>
+              </a:rPr>
+              <a:t>INFY.NS · AMBER</a:t>
             </a:r>
           </a:p>
         </p:txBody>
@@ -3655,7 +3655,7 @@
                 </a:solidFill>
                 <a:latin typeface="Segoe UI"/>
               </a:rPr>
-              <a:t>+16.5%</a:t>
+              <a:t>+17.0%</a:t>
             </a:r>
           </a:p>
         </p:txBody>
@@ -3713,7 +3713,7 @@
                 </a:solidFill>
                 <a:latin typeface="Segoe UI"/>
               </a:rPr>
-              <a:t>Infosys</a:t>
+              <a:t>NIFTY IT</a:t>
             </a:r>
           </a:p>
         </p:txBody>
@@ -3743,11 +3743,11 @@
             <a:r>
               <a:rPr sz="900" b="0">
                 <a:solidFill>
-                  <a:srgbClr val="F59E0B"/>
-                </a:solidFill>
-                <a:latin typeface="Segoe UI"/>
-              </a:rPr>
-              <a:t>INFY.NS · AMBER</a:t>
+                  <a:srgbClr val="22C55E"/>
+                </a:solidFill>
+                <a:latin typeface="Segoe UI"/>
+              </a:rPr>
+              <a:t>^CNXIT · GREEN</a:t>
             </a:r>
           </a:p>
         </p:txBody>
@@ -3781,7 +3781,7 @@
                 </a:solidFill>
                 <a:latin typeface="Segoe UI"/>
               </a:rPr>
-              <a:t>+16.1%</a:t>
+              <a:t>+16.2%</a:t>
             </a:r>
           </a:p>
         </p:txBody>
@@ -3839,7 +3839,7 @@
                 </a:solidFill>
                 <a:latin typeface="Segoe UI"/>
               </a:rPr>
-              <a:t>US Energy</a:t>
+              <a:t>Tesla</a:t>
             </a:r>
           </a:p>
         </p:txBody>
@@ -3869,11 +3869,11 @@
             <a:r>
               <a:rPr sz="900" b="0">
                 <a:solidFill>
-                  <a:srgbClr val="22C55E"/>
-                </a:solidFill>
-                <a:latin typeface="Segoe UI"/>
-              </a:rPr>
-              <a:t>XLE · GREEN</a:t>
+                  <a:srgbClr val="F59E0B"/>
+                </a:solidFill>
+                <a:latin typeface="Segoe UI"/>
+              </a:rPr>
+              <a:t>TSLA · AMBER</a:t>
             </a:r>
           </a:p>
         </p:txBody>
@@ -3907,7 +3907,7 @@
                 </a:solidFill>
                 <a:latin typeface="Segoe UI"/>
               </a:rPr>
-              <a:t>+13.2%</a:t>
+              <a:t>+14.8%</a:t>
             </a:r>
           </a:p>
         </p:txBody>
@@ -3965,7 +3965,7 @@
                 </a:solidFill>
                 <a:latin typeface="Segoe UI"/>
               </a:rPr>
-              <a:t>Crude Oil WTI</a:t>
+              <a:t>Bharti Airtel</a:t>
             </a:r>
           </a:p>
         </p:txBody>
@@ -3995,11 +3995,11 @@
             <a:r>
               <a:rPr sz="900" b="0">
                 <a:solidFill>
-                  <a:srgbClr val="F59E0B"/>
-                </a:solidFill>
-                <a:latin typeface="Segoe UI"/>
-              </a:rPr>
-              <a:t>CL=F · AMBER</a:t>
+                  <a:srgbClr val="22C55E"/>
+                </a:solidFill>
+                <a:latin typeface="Segoe UI"/>
+              </a:rPr>
+              <a:t>BHARTIARTL.NS · GREEN</a:t>
             </a:r>
           </a:p>
         </p:txBody>
@@ -4033,7 +4033,7 @@
                 </a:solidFill>
                 <a:latin typeface="Segoe UI"/>
               </a:rPr>
-              <a:t>+11.6%</a:t>
+              <a:t>+12.6%</a:t>
             </a:r>
           </a:p>
         </p:txBody>
@@ -4193,7 +4193,7 @@
                 </a:solidFill>
                 <a:latin typeface="Segoe UI"/>
               </a:rPr>
-              <a:t>-14.8%</a:t>
+              <a:t>-13.9%</a:t>
             </a:r>
           </a:p>
         </p:txBody>
@@ -4319,7 +4319,7 @@
                 </a:solidFill>
                 <a:latin typeface="Segoe UI"/>
               </a:rPr>
-              <a:t>-13.5%</a:t>
+              <a:t>-12.3%</a:t>
             </a:r>
           </a:p>
         </p:txBody>
@@ -4445,7 +4445,7 @@
                 </a:solidFill>
                 <a:latin typeface="Segoe UI"/>
               </a:rPr>
-              <a:t>-9.8%</a:t>
+              <a:t>-9.7%</a:t>
             </a:r>
           </a:p>
         </p:txBody>
@@ -4503,7 +4503,7 @@
                 </a:solidFill>
                 <a:latin typeface="Segoe UI"/>
               </a:rPr>
-              <a:t>Clean Energy</a:t>
+              <a:t>Alphabet</a:t>
             </a:r>
           </a:p>
         </p:txBody>
@@ -4537,7 +4537,7 @@
                 </a:solidFill>
                 <a:latin typeface="Segoe UI"/>
               </a:rPr>
-              <a:t>ICLN · RED</a:t>
+              <a:t>GOOGL · RED</a:t>
             </a:r>
           </a:p>
         </p:txBody>
@@ -4571,7 +4571,7 @@
                 </a:solidFill>
                 <a:latin typeface="Segoe UI"/>
               </a:rPr>
-              <a:t>-8.5%</a:t>
+              <a:t>-6.8%</a:t>
             </a:r>
           </a:p>
         </p:txBody>
@@ -4629,7 +4629,7 @@
                 </a:solidFill>
                 <a:latin typeface="Segoe UI"/>
               </a:rPr>
-              <a:t>Alphabet</a:t>
+              <a:t>Clean Energy</a:t>
             </a:r>
           </a:p>
         </p:txBody>
@@ -4663,7 +4663,7 @@
                 </a:solidFill>
                 <a:latin typeface="Segoe UI"/>
               </a:rPr>
-              <a:t>GOOGL · RED</a:t>
+              <a:t>ICLN · RED</a:t>
             </a:r>
           </a:p>
         </p:txBody>
@@ -4697,7 +4697,7 @@
                 </a:solidFill>
                 <a:latin typeface="Segoe UI"/>
               </a:rPr>
-              <a:t>-7.9%</a:t>
+              <a:t>-6.7%</a:t>
             </a:r>
           </a:p>
         </p:txBody>
@@ -4837,7 +4837,7 @@
         <p:spPr>
           <a:xfrm>
             <a:off x="457200" y="1188720"/>
-            <a:ext cx="11247120" cy="5513499"/>
+            <a:ext cx="11247120" cy="5544503"/>
           </a:xfrm>
           <a:prstGeom prst="rect">
             <a:avLst/>
@@ -5171,7 +5171,7 @@
                 </a:solidFill>
                 <a:latin typeface="Segoe UI"/>
               </a:rPr>
-              <a:t>84%</a:t>
+              <a:t>85%</a:t>
             </a:r>
           </a:p>
         </p:txBody>
@@ -5239,7 +5239,7 @@
                 </a:solidFill>
                 <a:latin typeface="Segoe UI"/>
               </a:rPr>
-              <a:t>Microsoft</a:t>
+              <a:t>US Energy</a:t>
             </a:r>
           </a:p>
         </p:txBody>
@@ -5375,7 +5375,7 @@
                 </a:solidFill>
                 <a:latin typeface="Segoe UI"/>
               </a:rPr>
-              <a:t>Dollar Index</a:t>
+              <a:t>Microsoft</a:t>
             </a:r>
           </a:p>
         </p:txBody>
@@ -5511,7 +5511,7 @@
                 </a:solidFill>
                 <a:latin typeface="Segoe UI"/>
               </a:rPr>
-              <a:t>ICICI Bank</a:t>
+              <a:t>Dollar Index</a:t>
             </a:r>
           </a:p>
         </p:txBody>
@@ -5579,7 +5579,7 @@
                 </a:solidFill>
                 <a:latin typeface="Segoe UI"/>
               </a:rPr>
-              <a:t>81%</a:t>
+              <a:t>83%</a:t>
             </a:r>
           </a:p>
         </p:txBody>
@@ -5613,7 +5613,7 @@
                 </a:solidFill>
                 <a:latin typeface="Segoe UI"/>
               </a:rPr>
-              <a:t>above 200DMA · golden cross (50&gt;200) · MACD bullish</a:t>
+              <a:t>above 200DMA · golden cross (50&gt;200) · MACD bearish</a:t>
             </a:r>
           </a:p>
         </p:txBody>
@@ -5647,7 +5647,7 @@
                 </a:solidFill>
                 <a:latin typeface="Segoe UI"/>
               </a:rPr>
-              <a:t>US Energy</a:t>
+              <a:t>Copper</a:t>
             </a:r>
           </a:p>
         </p:txBody>
@@ -5681,7 +5681,7 @@
                 </a:solidFill>
                 <a:latin typeface="Segoe UI"/>
               </a:rPr>
-              <a:t>BUY</a:t>
+              <a:t>STRONG BUY</a:t>
             </a:r>
           </a:p>
         </p:txBody>
@@ -5715,7 +5715,7 @@
                 </a:solidFill>
                 <a:latin typeface="Segoe UI"/>
               </a:rPr>
-              <a:t>94%</a:t>
+              <a:t>93%</a:t>
             </a:r>
           </a:p>
         </p:txBody>
@@ -5987,7 +5987,7 @@
                 </a:solidFill>
                 <a:latin typeface="Segoe UI"/>
               </a:rPr>
-              <a:t>80%</a:t>
+              <a:t>78%</a:t>
             </a:r>
           </a:p>
         </p:txBody>
@@ -6055,7 +6055,7 @@
                 </a:solidFill>
                 <a:latin typeface="Segoe UI"/>
               </a:rPr>
-              <a:t>Tesla</a:t>
+              <a:t>Bharti Airtel</a:t>
             </a:r>
           </a:p>
         </p:txBody>
@@ -6123,7 +6123,7 @@
                 </a:solidFill>
                 <a:latin typeface="Segoe UI"/>
               </a:rPr>
-              <a:t>77%</a:t>
+              <a:t>78%</a:t>
             </a:r>
           </a:p>
         </p:txBody>
@@ -6191,7 +6191,7 @@
                 </a:solidFill>
                 <a:latin typeface="Segoe UI"/>
               </a:rPr>
-              <a:t>Infosys</a:t>
+              <a:t>Tesla</a:t>
             </a:r>
           </a:p>
         </p:txBody>
@@ -6259,7 +6259,7 @@
                 </a:solidFill>
                 <a:latin typeface="Segoe UI"/>
               </a:rPr>
-              <a:t>75%</a:t>
+              <a:t>78%</a:t>
             </a:r>
           </a:p>
         </p:txBody>
@@ -6327,7 +6327,7 @@
                 </a:solidFill>
                 <a:latin typeface="Segoe UI"/>
               </a:rPr>
-              <a:t>US 1-3Y Treasury</a:t>
+              <a:t>Infosys</a:t>
             </a:r>
           </a:p>
         </p:txBody>
@@ -6395,7 +6395,7 @@
                 </a:solidFill>
                 <a:latin typeface="Segoe UI"/>
               </a:rPr>
-              <a:t>68%</a:t>
+              <a:t>76%</a:t>
             </a:r>
           </a:p>
         </p:txBody>
@@ -6429,7 +6429,7 @@
                 </a:solidFill>
                 <a:latin typeface="Segoe UI"/>
               </a:rPr>
-              <a:t>above 200DMA · golden cross (50&gt;200) · MACD bullish</a:t>
+              <a:t>above 200DMA · death cross (50&lt;200) · MACD bullish</a:t>
             </a:r>
           </a:p>
         </p:txBody>
@@ -6463,7 +6463,7 @@
                 </a:solidFill>
                 <a:latin typeface="Segoe UI"/>
               </a:rPr>
-              <a:t>Bharti Airtel</a:t>
+              <a:t>US 1-3Y Treasury</a:t>
             </a:r>
           </a:p>
         </p:txBody>
@@ -6565,7 +6565,7 @@
                 </a:solidFill>
                 <a:latin typeface="Segoe UI"/>
               </a:rPr>
-              <a:t>above 200DMA · death cross (50&lt;200) · MACD bullish</a:t>
+              <a:t>above 200DMA · golden cross (50&gt;200) · MACD bullish</a:t>
             </a:r>
           </a:p>
         </p:txBody>
@@ -6659,7 +6659,7 @@
                 </a:solidFill>
                 <a:latin typeface="Segoe UI"/>
               </a:rPr>
-              <a:t>Base currency INR · USD/INR 95.18</a:t>
+              <a:t>Base currency INR · USD/INR 95.11</a:t>
             </a:r>
           </a:p>
         </p:txBody>
@@ -7067,7 +7067,7 @@
                 </a:solidFill>
                 <a:latin typeface="Segoe UI"/>
               </a:rPr>
-              <a:t>80,005</a:t>
+              <a:t>80,795</a:t>
             </a:r>
           </a:p>
         </p:txBody>
@@ -7101,7 +7101,7 @@
                 </a:solidFill>
                 <a:latin typeface="Segoe UI"/>
               </a:rPr>
-              <a:t>Rs 761,445</a:t>
+              <a:t>Rs 768,404</a:t>
             </a:r>
           </a:p>
         </p:txBody>
@@ -7135,7 +7135,7 @@
                 </a:solidFill>
                 <a:latin typeface="Segoe UI"/>
               </a:rPr>
-              <a:t>Rs 190,395</a:t>
+              <a:t>Rs 197,774</a:t>
             </a:r>
           </a:p>
         </p:txBody>
@@ -7169,7 +7169,7 @@
                 </a:solidFill>
                 <a:latin typeface="Segoe UI"/>
               </a:rPr>
-              <a:t>+33.3%</a:t>
+              <a:t>+34.7%</a:t>
             </a:r>
           </a:p>
         </p:txBody>
@@ -7199,11 +7199,11 @@
             <a:r>
               <a:rPr sz="1000" b="0">
                 <a:solidFill>
-                  <a:srgbClr val="EF4444"/>
-                </a:solidFill>
-                <a:latin typeface="Segoe UI"/>
-              </a:rPr>
-              <a:t>-0.0%</a:t>
+                  <a:srgbClr val="22C55E"/>
+                </a:solidFill>
+                <a:latin typeface="Segoe UI"/>
+              </a:rPr>
+              <a:t>+1.0%</a:t>
             </a:r>
           </a:p>
         </p:txBody>
@@ -7339,7 +7339,7 @@
                 </a:solidFill>
                 <a:latin typeface="Segoe UI"/>
               </a:rPr>
-              <a:t>4,029</a:t>
+              <a:t>4,063</a:t>
             </a:r>
           </a:p>
         </p:txBody>
@@ -7373,7 +7373,7 @@
                 </a:solidFill>
                 <a:latin typeface="Segoe UI"/>
               </a:rPr>
-              <a:t>Rs 383,479</a:t>
+              <a:t>Rs 386,402</a:t>
             </a:r>
           </a:p>
         </p:txBody>
@@ -7407,7 +7407,7 @@
                 </a:solidFill>
                 <a:latin typeface="Segoe UI"/>
               </a:rPr>
-              <a:t>Rs 164,577</a:t>
+              <a:t>Rs 167,661</a:t>
             </a:r>
           </a:p>
         </p:txBody>
@@ -7441,7 +7441,7 @@
                 </a:solidFill>
                 <a:latin typeface="Segoe UI"/>
               </a:rPr>
-              <a:t>+75.2%</a:t>
+              <a:t>+76.7%</a:t>
             </a:r>
           </a:p>
         </p:txBody>
@@ -7611,7 +7611,7 @@
                 </a:solidFill>
                 <a:latin typeface="Segoe UI"/>
               </a:rPr>
-              <a:t>344</a:t>
+              <a:t>347</a:t>
             </a:r>
           </a:p>
         </p:txBody>
@@ -7645,7 +7645,7 @@
                 </a:solidFill>
                 <a:latin typeface="Segoe UI"/>
               </a:rPr>
-              <a:t>Rs 327,316</a:t>
+              <a:t>Rs 330,109</a:t>
             </a:r>
           </a:p>
         </p:txBody>
@@ -7679,7 +7679,7 @@
                 </a:solidFill>
                 <a:latin typeface="Segoe UI"/>
               </a:rPr>
-              <a:t>Rs 151,243</a:t>
+              <a:t>Rs 154,165</a:t>
             </a:r>
           </a:p>
         </p:txBody>
@@ -7713,7 +7713,7 @@
                 </a:solidFill>
                 <a:latin typeface="Segoe UI"/>
               </a:rPr>
-              <a:t>+85.9%</a:t>
+              <a:t>+87.6%</a:t>
             </a:r>
           </a:p>
         </p:txBody>
@@ -7883,7 +7883,7 @@
                 </a:solidFill>
                 <a:latin typeface="Segoe UI"/>
               </a:rPr>
-              <a:t>216</a:t>
+              <a:t>218</a:t>
             </a:r>
           </a:p>
         </p:txBody>
@@ -7917,7 +7917,7 @@
                 </a:solidFill>
                 <a:latin typeface="Segoe UI"/>
               </a:rPr>
-              <a:t>Rs 164,462</a:t>
+              <a:t>Rs 165,817</a:t>
             </a:r>
           </a:p>
         </p:txBody>
@@ -7951,7 +7951,7 @@
                 </a:solidFill>
                 <a:latin typeface="Segoe UI"/>
               </a:rPr>
-              <a:t>Rs -178,168</a:t>
+              <a:t>Rs -176,561</a:t>
             </a:r>
           </a:p>
         </p:txBody>
@@ -7985,7 +7985,7 @@
                 </a:solidFill>
                 <a:latin typeface="Segoe UI"/>
               </a:rPr>
-              <a:t>-52.0%</a:t>
+              <a:t>-51.6%</a:t>
             </a:r>
           </a:p>
         </p:txBody>
@@ -8155,7 +8155,7 @@
                 </a:solidFill>
                 <a:latin typeface="Segoe UI"/>
               </a:rPr>
-              <a:t>1,154</a:t>
+              <a:t>1,163</a:t>
             </a:r>
           </a:p>
         </p:txBody>
@@ -8189,7 +8189,7 @@
                 </a:solidFill>
                 <a:latin typeface="Segoe UI"/>
               </a:rPr>
-              <a:t>Rs 92,304</a:t>
+              <a:t>Rs 93,040</a:t>
             </a:r>
           </a:p>
         </p:txBody>
@@ -8223,7 +8223,7 @@
                 </a:solidFill>
                 <a:latin typeface="Segoe UI"/>
               </a:rPr>
-              <a:t>Rs -19,696</a:t>
+              <a:t>Rs -18,960</a:t>
             </a:r>
           </a:p>
         </p:txBody>
@@ -8257,7 +8257,7 @@
                 </a:solidFill>
                 <a:latin typeface="Segoe UI"/>
               </a:rPr>
-              <a:t>-17.6%</a:t>
+              <a:t>-16.9%</a:t>
             </a:r>
           </a:p>
         </p:txBody>
@@ -8427,7 +8427,7 @@
                 </a:solidFill>
                 <a:latin typeface="Segoe UI"/>
               </a:rPr>
-              <a:t>2,530</a:t>
+              <a:t>2,497</a:t>
             </a:r>
           </a:p>
         </p:txBody>
@@ -8461,7 +8461,7 @@
                 </a:solidFill>
                 <a:latin typeface="Segoe UI"/>
               </a:rPr>
-              <a:t>Rs 63,250</a:t>
+              <a:t>Rs 62,422</a:t>
             </a:r>
           </a:p>
         </p:txBody>
@@ -8495,7 +8495,7 @@
                 </a:solidFill>
                 <a:latin typeface="Segoe UI"/>
               </a:rPr>
-              <a:t>Rs -26,750</a:t>
+              <a:t>Rs -27,578</a:t>
             </a:r>
           </a:p>
         </p:txBody>
@@ -8529,7 +8529,7 @@
                 </a:solidFill>
                 <a:latin typeface="Segoe UI"/>
               </a:rPr>
-              <a:t>-29.7%</a:t>
+              <a:t>-30.6%</a:t>
             </a:r>
           </a:p>
         </p:txBody>
@@ -8699,7 +8699,7 @@
                 </a:solidFill>
                 <a:latin typeface="Segoe UI"/>
               </a:rPr>
-              <a:t>1,190</a:t>
+              <a:t>1,196</a:t>
             </a:r>
           </a:p>
         </p:txBody>
@@ -8733,7 +8733,7 @@
                 </a:solidFill>
                 <a:latin typeface="Segoe UI"/>
               </a:rPr>
-              <a:t>Rs 59,500</a:t>
+              <a:t>Rs 59,810</a:t>
             </a:r>
           </a:p>
         </p:txBody>
@@ -8767,7 +8767,7 @@
                 </a:solidFill>
                 <a:latin typeface="Segoe UI"/>
               </a:rPr>
-              <a:t>Rs -63,000</a:t>
+              <a:t>Rs -62,690</a:t>
             </a:r>
           </a:p>
         </p:txBody>
@@ -8801,7 +8801,7 @@
                 </a:solidFill>
                 <a:latin typeface="Segoe UI"/>
               </a:rPr>
-              <a:t>-51.4%</a:t>
+              <a:t>-51.2%</a:t>
             </a:r>
           </a:p>
         </p:txBody>
@@ -8971,7 +8971,7 @@
                 </a:solidFill>
                 <a:latin typeface="Segoe UI"/>
               </a:rPr>
-              <a:t>693</a:t>
+              <a:t>680</a:t>
             </a:r>
           </a:p>
         </p:txBody>
@@ -9005,7 +9005,7 @@
                 </a:solidFill>
                 <a:latin typeface="Segoe UI"/>
               </a:rPr>
-              <a:t>Rs 41,568</a:t>
+              <a:t>Rs 40,812</a:t>
             </a:r>
           </a:p>
         </p:txBody>
@@ -9039,7 +9039,7 @@
                 </a:solidFill>
                 <a:latin typeface="Segoe UI"/>
               </a:rPr>
-              <a:t>Rs -49,632</a:t>
+              <a:t>Rs -50,388</a:t>
             </a:r>
           </a:p>
         </p:txBody>
@@ -9073,7 +9073,7 @@
                 </a:solidFill>
                 <a:latin typeface="Segoe UI"/>
               </a:rPr>
-              <a:t>-54.4%</a:t>
+              <a:t>-55.2%</a:t>
             </a:r>
           </a:p>
         </p:txBody>
@@ -9141,7 +9141,7 @@
                 </a:solidFill>
                 <a:latin typeface="Segoe UI"/>
               </a:rPr>
-              <a:t>Total Rs 1,893,325 | P&amp;L Rs 168,969 (+9.8%) | Sharpe 0.61 | Vol 17.08% | VaR95 -1.63%/day</a:t>
+              <a:t>Total Rs 1,906,818 | P&amp;L Rs 183,424 (+10.6%) | Sharpe 0.67 | Vol 17.11% | VaR95 -1.64%/day</a:t>
             </a:r>
           </a:p>
         </p:txBody>

--- a/docs/pmr_daily.pptx
+++ b/docs/pmr_daily.pptx
@@ -3197,7 +3197,7 @@
                 </a:solidFill>
                 <a:latin typeface="Segoe UI"/>
               </a:rPr>
-              <a:t>Wednesday, 28 Oct 2026 10:02 SGT</a:t>
+              <a:t>Thursday, 29 Oct 2026 10:10 SGT</a:t>
             </a:r>
           </a:p>
         </p:txBody>
@@ -3265,7 +3265,7 @@
                 </a:solidFill>
                 <a:latin typeface="Segoe UI"/>
               </a:rPr>
-              <a:t>RAG 8R / 21A / 17G   |   56.5% above 200DMA   |   Portfolio Rs 1,906,818 (+10.6%)</a:t>
+              <a:t>RAG 11R / 16A / 19G   |   56.5% above 200DMA   |   Portfolio Rs 1,890,361 (+9.6%)</a:t>
             </a:r>
           </a:p>
         </p:txBody>
@@ -3529,7 +3529,7 @@
                 </a:solidFill>
                 <a:latin typeface="Segoe UI"/>
               </a:rPr>
-              <a:t>+22.4%</a:t>
+              <a:t>+20.6%</a:t>
             </a:r>
           </a:p>
         </p:txBody>
@@ -3587,7 +3587,7 @@
                 </a:solidFill>
                 <a:latin typeface="Segoe UI"/>
               </a:rPr>
-              <a:t>Infosys</a:t>
+              <a:t>Tesla</a:t>
             </a:r>
           </a:p>
         </p:txBody>
@@ -3621,7 +3621,7 @@
                 </a:solidFill>
                 <a:latin typeface="Segoe UI"/>
               </a:rPr>
-              <a:t>INFY.NS · AMBER</a:t>
+              <a:t>TSLA · AMBER</a:t>
             </a:r>
           </a:p>
         </p:txBody>
@@ -3655,7 +3655,7 @@
                 </a:solidFill>
                 <a:latin typeface="Segoe UI"/>
               </a:rPr>
-              <a:t>+17.0%</a:t>
+              <a:t>+13.9%</a:t>
             </a:r>
           </a:p>
         </p:txBody>
@@ -3781,7 +3781,7 @@
                 </a:solidFill>
                 <a:latin typeface="Segoe UI"/>
               </a:rPr>
-              <a:t>+16.2%</a:t>
+              <a:t>+13.9%</a:t>
             </a:r>
           </a:p>
         </p:txBody>
@@ -3839,7 +3839,7 @@
                 </a:solidFill>
                 <a:latin typeface="Segoe UI"/>
               </a:rPr>
-              <a:t>Tesla</a:t>
+              <a:t>Infosys</a:t>
             </a:r>
           </a:p>
         </p:txBody>
@@ -3873,7 +3873,7 @@
                 </a:solidFill>
                 <a:latin typeface="Segoe UI"/>
               </a:rPr>
-              <a:t>TSLA · AMBER</a:t>
+              <a:t>INFY.NS · AMBER</a:t>
             </a:r>
           </a:p>
         </p:txBody>
@@ -3907,7 +3907,7 @@
                 </a:solidFill>
                 <a:latin typeface="Segoe UI"/>
               </a:rPr>
-              <a:t>+14.8%</a:t>
+              <a:t>+13.0%</a:t>
             </a:r>
           </a:p>
         </p:txBody>
@@ -3965,7 +3965,7 @@
                 </a:solidFill>
                 <a:latin typeface="Segoe UI"/>
               </a:rPr>
-              <a:t>Bharti Airtel</a:t>
+              <a:t>Crude Oil WTI</a:t>
             </a:r>
           </a:p>
         </p:txBody>
@@ -3995,11 +3995,11 @@
             <a:r>
               <a:rPr sz="900" b="0">
                 <a:solidFill>
-                  <a:srgbClr val="22C55E"/>
-                </a:solidFill>
-                <a:latin typeface="Segoe UI"/>
-              </a:rPr>
-              <a:t>BHARTIARTL.NS · GREEN</a:t>
+                  <a:srgbClr val="F59E0B"/>
+                </a:solidFill>
+                <a:latin typeface="Segoe UI"/>
+              </a:rPr>
+              <a:t>CL=F · AMBER</a:t>
             </a:r>
           </a:p>
         </p:txBody>
@@ -4193,7 +4193,7 @@
                 </a:solidFill>
                 <a:latin typeface="Segoe UI"/>
               </a:rPr>
-              <a:t>-13.9%</a:t>
+              <a:t>-15.6%</a:t>
             </a:r>
           </a:p>
         </p:txBody>
@@ -4319,7 +4319,7 @@
                 </a:solidFill>
                 <a:latin typeface="Segoe UI"/>
               </a:rPr>
-              <a:t>-12.3%</a:t>
+              <a:t>-14.1%</a:t>
             </a:r>
           </a:p>
         </p:txBody>
@@ -4445,7 +4445,7 @@
                 </a:solidFill>
                 <a:latin typeface="Segoe UI"/>
               </a:rPr>
-              <a:t>-9.7%</a:t>
+              <a:t>-10.1%</a:t>
             </a:r>
           </a:p>
         </p:txBody>
@@ -4503,7 +4503,7 @@
                 </a:solidFill>
                 <a:latin typeface="Segoe UI"/>
               </a:rPr>
-              <a:t>Alphabet</a:t>
+              <a:t>Clean Energy</a:t>
             </a:r>
           </a:p>
         </p:txBody>
@@ -4537,7 +4537,7 @@
                 </a:solidFill>
                 <a:latin typeface="Segoe UI"/>
               </a:rPr>
-              <a:t>GOOGL · RED</a:t>
+              <a:t>ICLN · RED</a:t>
             </a:r>
           </a:p>
         </p:txBody>
@@ -4571,7 +4571,7 @@
                 </a:solidFill>
                 <a:latin typeface="Segoe UI"/>
               </a:rPr>
-              <a:t>-6.8%</a:t>
+              <a:t>-7.4%</a:t>
             </a:r>
           </a:p>
         </p:txBody>
@@ -4629,7 +4629,7 @@
                 </a:solidFill>
                 <a:latin typeface="Segoe UI"/>
               </a:rPr>
-              <a:t>Clean Energy</a:t>
+              <a:t>Hang Seng</a:t>
             </a:r>
           </a:p>
         </p:txBody>
@@ -4663,7 +4663,7 @@
                 </a:solidFill>
                 <a:latin typeface="Segoe UI"/>
               </a:rPr>
-              <a:t>ICLN · RED</a:t>
+              <a:t>^HSI · RED</a:t>
             </a:r>
           </a:p>
         </p:txBody>
@@ -4697,7 +4697,7 @@
                 </a:solidFill>
                 <a:latin typeface="Segoe UI"/>
               </a:rPr>
-              <a:t>-6.7%</a:t>
+              <a:t>-5.9%</a:t>
             </a:r>
           </a:p>
         </p:txBody>
@@ -4837,7 +4837,7 @@
         <p:spPr>
           <a:xfrm>
             <a:off x="457200" y="1188720"/>
-            <a:ext cx="11247120" cy="5544503"/>
+            <a:ext cx="11247120" cy="5513499"/>
           </a:xfrm>
           <a:prstGeom prst="rect">
             <a:avLst/>
@@ -5035,7 +5035,7 @@
                 </a:solidFill>
                 <a:latin typeface="Segoe UI"/>
               </a:rPr>
-              <a:t>91%</a:t>
+              <a:t>92%</a:t>
             </a:r>
           </a:p>
         </p:txBody>
@@ -5103,7 +5103,7 @@
                 </a:solidFill>
                 <a:latin typeface="Segoe UI"/>
               </a:rPr>
-              <a:t>Apple</a:t>
+              <a:t>US Energy</a:t>
             </a:r>
           </a:p>
         </p:txBody>
@@ -5239,7 +5239,7 @@
                 </a:solidFill>
                 <a:latin typeface="Segoe UI"/>
               </a:rPr>
-              <a:t>US Energy</a:t>
+              <a:t>Apple</a:t>
             </a:r>
           </a:p>
         </p:txBody>
@@ -5307,7 +5307,7 @@
                 </a:solidFill>
                 <a:latin typeface="Segoe UI"/>
               </a:rPr>
-              <a:t>84%</a:t>
+              <a:t>85%</a:t>
             </a:r>
           </a:p>
         </p:txBody>
@@ -5375,7 +5375,7 @@
                 </a:solidFill>
                 <a:latin typeface="Segoe UI"/>
               </a:rPr>
-              <a:t>Microsoft</a:t>
+              <a:t>NIFTY IT</a:t>
             </a:r>
           </a:p>
         </p:txBody>
@@ -5443,7 +5443,7 @@
                 </a:solidFill>
                 <a:latin typeface="Segoe UI"/>
               </a:rPr>
-              <a:t>83%</a:t>
+              <a:t>84%</a:t>
             </a:r>
           </a:p>
         </p:txBody>
@@ -5511,7 +5511,7 @@
                 </a:solidFill>
                 <a:latin typeface="Segoe UI"/>
               </a:rPr>
-              <a:t>Dollar Index</a:t>
+              <a:t>Microsoft</a:t>
             </a:r>
           </a:p>
         </p:txBody>
@@ -5579,7 +5579,7 @@
                 </a:solidFill>
                 <a:latin typeface="Segoe UI"/>
               </a:rPr>
-              <a:t>83%</a:t>
+              <a:t>84%</a:t>
             </a:r>
           </a:p>
         </p:txBody>
@@ -5647,7 +5647,7 @@
                 </a:solidFill>
                 <a:latin typeface="Segoe UI"/>
               </a:rPr>
-              <a:t>Copper</a:t>
+              <a:t>Bharti Airtel</a:t>
             </a:r>
           </a:p>
         </p:txBody>
@@ -5715,7 +5715,7 @@
                 </a:solidFill>
                 <a:latin typeface="Segoe UI"/>
               </a:rPr>
-              <a:t>93%</a:t>
+              <a:t>84%</a:t>
             </a:r>
           </a:p>
         </p:txBody>
@@ -5749,7 +5749,7 @@
                 </a:solidFill>
                 <a:latin typeface="Segoe UI"/>
               </a:rPr>
-              <a:t>above 200DMA · golden cross (50&gt;200) · MACD bullish</a:t>
+              <a:t>above 200DMA · death cross (50&lt;200) · MACD bullish</a:t>
             </a:r>
           </a:p>
         </p:txBody>
@@ -5783,7 +5783,7 @@
                 </a:solidFill>
                 <a:latin typeface="Segoe UI"/>
               </a:rPr>
-              <a:t>NIFTY IT</a:t>
+              <a:t>Dollar Index</a:t>
             </a:r>
           </a:p>
         </p:txBody>
@@ -5817,7 +5817,7 @@
                 </a:solidFill>
                 <a:latin typeface="Segoe UI"/>
               </a:rPr>
-              <a:t>BUY</a:t>
+              <a:t>STRONG BUY</a:t>
             </a:r>
           </a:p>
         </p:txBody>
@@ -5851,7 +5851,7 @@
                 </a:solidFill>
                 <a:latin typeface="Segoe UI"/>
               </a:rPr>
-              <a:t>92%</a:t>
+              <a:t>83%</a:t>
             </a:r>
           </a:p>
         </p:txBody>
@@ -5885,7 +5885,7 @@
                 </a:solidFill>
                 <a:latin typeface="Segoe UI"/>
               </a:rPr>
-              <a:t>above 200DMA · golden cross (50&gt;200) · MACD bullish</a:t>
+              <a:t>above 200DMA · golden cross (50&gt;200) · MACD bearish</a:t>
             </a:r>
           </a:p>
         </p:txBody>
@@ -5919,7 +5919,7 @@
                 </a:solidFill>
                 <a:latin typeface="Segoe UI"/>
               </a:rPr>
-              <a:t>TCS</a:t>
+              <a:t>Copper</a:t>
             </a:r>
           </a:p>
         </p:txBody>
@@ -5953,7 +5953,7 @@
                 </a:solidFill>
                 <a:latin typeface="Segoe UI"/>
               </a:rPr>
-              <a:t>BUY</a:t>
+              <a:t>STRONG BUY</a:t>
             </a:r>
           </a:p>
         </p:txBody>
@@ -5987,7 +5987,7 @@
                 </a:solidFill>
                 <a:latin typeface="Segoe UI"/>
               </a:rPr>
-              <a:t>78%</a:t>
+              <a:t>94%</a:t>
             </a:r>
           </a:p>
         </p:txBody>
@@ -6021,7 +6021,7 @@
                 </a:solidFill>
                 <a:latin typeface="Segoe UI"/>
               </a:rPr>
-              <a:t>above 200DMA · death cross (50&lt;200) · MACD bullish</a:t>
+              <a:t>above 200DMA · golden cross (50&gt;200) · MACD bullish</a:t>
             </a:r>
           </a:p>
         </p:txBody>
@@ -6055,7 +6055,7 @@
                 </a:solidFill>
                 <a:latin typeface="Segoe UI"/>
               </a:rPr>
-              <a:t>Bharti Airtel</a:t>
+              <a:t>S&amp;P 500</a:t>
             </a:r>
           </a:p>
         </p:txBody>
@@ -6089,7 +6089,7 @@
                 </a:solidFill>
                 <a:latin typeface="Segoe UI"/>
               </a:rPr>
-              <a:t>BUY</a:t>
+              <a:t>STRONG BUY</a:t>
             </a:r>
           </a:p>
         </p:txBody>
@@ -6123,7 +6123,7 @@
                 </a:solidFill>
                 <a:latin typeface="Segoe UI"/>
               </a:rPr>
-              <a:t>78%</a:t>
+              <a:t>81%</a:t>
             </a:r>
           </a:p>
         </p:txBody>
@@ -6157,7 +6157,7 @@
                 </a:solidFill>
                 <a:latin typeface="Segoe UI"/>
               </a:rPr>
-              <a:t>above 200DMA · death cross (50&lt;200) · MACD bullish</a:t>
+              <a:t>above 200DMA · golden cross (50&gt;200) · MACD bullish</a:t>
             </a:r>
           </a:p>
         </p:txBody>
@@ -6327,7 +6327,7 @@
                 </a:solidFill>
                 <a:latin typeface="Segoe UI"/>
               </a:rPr>
-              <a:t>Infosys</a:t>
+              <a:t>TCS</a:t>
             </a:r>
           </a:p>
         </p:txBody>
@@ -6395,7 +6395,7 @@
                 </a:solidFill>
                 <a:latin typeface="Segoe UI"/>
               </a:rPr>
-              <a:t>76%</a:t>
+              <a:t>70%</a:t>
             </a:r>
           </a:p>
         </p:txBody>
@@ -6429,7 +6429,7 @@
                 </a:solidFill>
                 <a:latin typeface="Segoe UI"/>
               </a:rPr>
-              <a:t>above 200DMA · death cross (50&lt;200) · MACD bullish</a:t>
+              <a:t>above 200DMA · death cross (50&lt;200) · MACD bearish</a:t>
             </a:r>
           </a:p>
         </p:txBody>
@@ -6463,7 +6463,7 @@
                 </a:solidFill>
                 <a:latin typeface="Segoe UI"/>
               </a:rPr>
-              <a:t>US 1-3Y Treasury</a:t>
+              <a:t>DAX</a:t>
             </a:r>
           </a:p>
         </p:txBody>
@@ -6531,7 +6531,7 @@
                 </a:solidFill>
                 <a:latin typeface="Segoe UI"/>
               </a:rPr>
-              <a:t>68%</a:t>
+              <a:t>66%</a:t>
             </a:r>
           </a:p>
         </p:txBody>
@@ -6659,7 +6659,7 @@
                 </a:solidFill>
                 <a:latin typeface="Segoe UI"/>
               </a:rPr>
-              <a:t>Base currency INR · USD/INR 95.11</a:t>
+              <a:t>Base currency INR · USD/INR 95.21</a:t>
             </a:r>
           </a:p>
         </p:txBody>
@@ -7067,7 +7067,7 @@
                 </a:solidFill>
                 <a:latin typeface="Segoe UI"/>
               </a:rPr>
-              <a:t>80,795</a:t>
+              <a:t>79,893</a:t>
             </a:r>
           </a:p>
         </p:txBody>
@@ -7101,7 +7101,7 @@
                 </a:solidFill>
                 <a:latin typeface="Segoe UI"/>
               </a:rPr>
-              <a:t>Rs 768,404</a:t>
+              <a:t>Rs 760,666</a:t>
             </a:r>
           </a:p>
         </p:txBody>
@@ -7135,7 +7135,7 @@
                 </a:solidFill>
                 <a:latin typeface="Segoe UI"/>
               </a:rPr>
-              <a:t>Rs 197,774</a:t>
+              <a:t>Rs 189,406</a:t>
             </a:r>
           </a:p>
         </p:txBody>
@@ -7169,7 +7169,7 @@
                 </a:solidFill>
                 <a:latin typeface="Segoe UI"/>
               </a:rPr>
-              <a:t>+34.7%</a:t>
+              <a:t>+33.2%</a:t>
             </a:r>
           </a:p>
         </p:txBody>
@@ -7199,11 +7199,11 @@
             <a:r>
               <a:rPr sz="1000" b="0">
                 <a:solidFill>
-                  <a:srgbClr val="22C55E"/>
-                </a:solidFill>
-                <a:latin typeface="Segoe UI"/>
-              </a:rPr>
-              <a:t>+1.0%</a:t>
+                  <a:srgbClr val="EF4444"/>
+                </a:solidFill>
+                <a:latin typeface="Segoe UI"/>
+              </a:rPr>
+              <a:t>-1.1%</a:t>
             </a:r>
           </a:p>
         </p:txBody>
@@ -7339,7 +7339,7 @@
                 </a:solidFill>
                 <a:latin typeface="Segoe UI"/>
               </a:rPr>
-              <a:t>4,063</a:t>
+              <a:t>4,074</a:t>
             </a:r>
           </a:p>
         </p:txBody>
@@ -7373,7 +7373,7 @@
                 </a:solidFill>
                 <a:latin typeface="Segoe UI"/>
               </a:rPr>
-              <a:t>Rs 386,402</a:t>
+              <a:t>Rs 387,914</a:t>
             </a:r>
           </a:p>
         </p:txBody>
@@ -7407,7 +7407,7 @@
                 </a:solidFill>
                 <a:latin typeface="Segoe UI"/>
               </a:rPr>
-              <a:t>Rs 167,661</a:t>
+              <a:t>Rs 168,931</a:t>
             </a:r>
           </a:p>
         </p:txBody>
@@ -7441,7 +7441,7 @@
                 </a:solidFill>
                 <a:latin typeface="Segoe UI"/>
               </a:rPr>
-              <a:t>+76.7%</a:t>
+              <a:t>+77.1%</a:t>
             </a:r>
           </a:p>
         </p:txBody>
@@ -7475,7 +7475,7 @@
                 </a:solidFill>
                 <a:latin typeface="Segoe UI"/>
               </a:rPr>
-              <a:t>+0.0%</a:t>
+              <a:t>+0.6%</a:t>
             </a:r>
           </a:p>
         </p:txBody>
@@ -7611,7 +7611,7 @@
                 </a:solidFill>
                 <a:latin typeface="Segoe UI"/>
               </a:rPr>
-              <a:t>347</a:t>
+              <a:t>344</a:t>
             </a:r>
           </a:p>
         </p:txBody>
@@ -7645,7 +7645,7 @@
                 </a:solidFill>
                 <a:latin typeface="Segoe UI"/>
               </a:rPr>
-              <a:t>Rs 330,109</a:t>
+              <a:t>Rs 327,361</a:t>
             </a:r>
           </a:p>
         </p:txBody>
@@ -7679,7 +7679,7 @@
                 </a:solidFill>
                 <a:latin typeface="Segoe UI"/>
               </a:rPr>
-              <a:t>Rs 154,165</a:t>
+              <a:t>Rs 151,222</a:t>
             </a:r>
           </a:p>
         </p:txBody>
@@ -7713,7 +7713,7 @@
                 </a:solidFill>
                 <a:latin typeface="Segoe UI"/>
               </a:rPr>
-              <a:t>+87.6%</a:t>
+              <a:t>+85.8%</a:t>
             </a:r>
           </a:p>
         </p:txBody>
@@ -7883,7 +7883,7 @@
                 </a:solidFill>
                 <a:latin typeface="Segoe UI"/>
               </a:rPr>
-              <a:t>218</a:t>
+              <a:t>215</a:t>
             </a:r>
           </a:p>
         </p:txBody>
@@ -7917,7 +7917,7 @@
                 </a:solidFill>
                 <a:latin typeface="Segoe UI"/>
               </a:rPr>
-              <a:t>Rs 165,817</a:t>
+              <a:t>Rs 164,051</a:t>
             </a:r>
           </a:p>
         </p:txBody>
@@ -7951,7 +7951,7 @@
                 </a:solidFill>
                 <a:latin typeface="Segoe UI"/>
               </a:rPr>
-              <a:t>Rs -176,561</a:t>
+              <a:t>Rs -178,705</a:t>
             </a:r>
           </a:p>
         </p:txBody>
@@ -7985,7 +7985,7 @@
                 </a:solidFill>
                 <a:latin typeface="Segoe UI"/>
               </a:rPr>
-              <a:t>-51.6%</a:t>
+              <a:t>-52.1%</a:t>
             </a:r>
           </a:p>
         </p:txBody>
@@ -8155,7 +8155,7 @@
                 </a:solidFill>
                 <a:latin typeface="Segoe UI"/>
               </a:rPr>
-              <a:t>1,163</a:t>
+              <a:t>1,123</a:t>
             </a:r>
           </a:p>
         </p:txBody>
@@ -8189,7 +8189,7 @@
                 </a:solidFill>
                 <a:latin typeface="Segoe UI"/>
               </a:rPr>
-              <a:t>Rs 93,040</a:t>
+              <a:t>Rs 89,852</a:t>
             </a:r>
           </a:p>
         </p:txBody>
@@ -8223,7 +8223,7 @@
                 </a:solidFill>
                 <a:latin typeface="Segoe UI"/>
               </a:rPr>
-              <a:t>Rs -18,960</a:t>
+              <a:t>Rs -22,148</a:t>
             </a:r>
           </a:p>
         </p:txBody>
@@ -8257,7 +8257,7 @@
                 </a:solidFill>
                 <a:latin typeface="Segoe UI"/>
               </a:rPr>
-              <a:t>-16.9%</a:t>
+              <a:t>-19.8%</a:t>
             </a:r>
           </a:p>
         </p:txBody>
@@ -8427,7 +8427,7 @@
                 </a:solidFill>
                 <a:latin typeface="Segoe UI"/>
               </a:rPr>
-              <a:t>2,497</a:t>
+              <a:t>2,460</a:t>
             </a:r>
           </a:p>
         </p:txBody>
@@ -8461,7 +8461,7 @@
                 </a:solidFill>
                 <a:latin typeface="Segoe UI"/>
               </a:rPr>
-              <a:t>Rs 62,422</a:t>
+              <a:t>Rs 61,500</a:t>
             </a:r>
           </a:p>
         </p:txBody>
@@ -8495,7 +8495,7 @@
                 </a:solidFill>
                 <a:latin typeface="Segoe UI"/>
               </a:rPr>
-              <a:t>Rs -27,578</a:t>
+              <a:t>Rs -28,500</a:t>
             </a:r>
           </a:p>
         </p:txBody>
@@ -8529,7 +8529,7 @@
                 </a:solidFill>
                 <a:latin typeface="Segoe UI"/>
               </a:rPr>
-              <a:t>-30.6%</a:t>
+              <a:t>-31.7%</a:t>
             </a:r>
           </a:p>
         </p:txBody>
@@ -8699,7 +8699,7 @@
                 </a:solidFill>
                 <a:latin typeface="Segoe UI"/>
               </a:rPr>
-              <a:t>1,196</a:t>
+              <a:t>1,158</a:t>
             </a:r>
           </a:p>
         </p:txBody>
@@ -8733,7 +8733,7 @@
                 </a:solidFill>
                 <a:latin typeface="Segoe UI"/>
               </a:rPr>
-              <a:t>Rs 59,810</a:t>
+              <a:t>Rs 57,900</a:t>
             </a:r>
           </a:p>
         </p:txBody>
@@ -8767,7 +8767,7 @@
                 </a:solidFill>
                 <a:latin typeface="Segoe UI"/>
               </a:rPr>
-              <a:t>Rs -62,690</a:t>
+              <a:t>Rs -64,600</a:t>
             </a:r>
           </a:p>
         </p:txBody>
@@ -8801,7 +8801,7 @@
                 </a:solidFill>
                 <a:latin typeface="Segoe UI"/>
               </a:rPr>
-              <a:t>-51.2%</a:t>
+              <a:t>-52.7%</a:t>
             </a:r>
           </a:p>
         </p:txBody>
@@ -8971,7 +8971,7 @@
                 </a:solidFill>
                 <a:latin typeface="Segoe UI"/>
               </a:rPr>
-              <a:t>680</a:t>
+              <a:t>685</a:t>
             </a:r>
           </a:p>
         </p:txBody>
@@ -9005,7 +9005,7 @@
                 </a:solidFill>
                 <a:latin typeface="Segoe UI"/>
               </a:rPr>
-              <a:t>Rs 40,812</a:t>
+              <a:t>Rs 41,118</a:t>
             </a:r>
           </a:p>
         </p:txBody>
@@ -9039,7 +9039,7 @@
                 </a:solidFill>
                 <a:latin typeface="Segoe UI"/>
               </a:rPr>
-              <a:t>Rs -50,388</a:t>
+              <a:t>Rs -50,082</a:t>
             </a:r>
           </a:p>
         </p:txBody>
@@ -9073,7 +9073,7 @@
                 </a:solidFill>
                 <a:latin typeface="Segoe UI"/>
               </a:rPr>
-              <a:t>-55.2%</a:t>
+              <a:t>-54.9%</a:t>
             </a:r>
           </a:p>
         </p:txBody>
@@ -9141,7 +9141,7 @@
                 </a:solidFill>
                 <a:latin typeface="Segoe UI"/>
               </a:rPr>
-              <a:t>Total Rs 1,906,818 | P&amp;L Rs 183,424 (+10.6%) | Sharpe 0.67 | Vol 17.11% | VaR95 -1.64%/day</a:t>
+              <a:t>Total Rs 1,890,361 | P&amp;L Rs 165,523 (+9.6%) | Sharpe 0.61 | Vol 17.15% | VaR95 -1.64%/day</a:t>
             </a:r>
           </a:p>
         </p:txBody>

--- a/docs/pmr_daily.pptx
+++ b/docs/pmr_daily.pptx
@@ -3197,7 +3197,7 @@
                 </a:solidFill>
                 <a:latin typeface="Segoe UI"/>
               </a:rPr>
-              <a:t>Thursday, 29 Oct 2026 10:10 SGT</a:t>
+              <a:t>Friday, 30 Oct 2026 10:26 SGT</a:t>
             </a:r>
           </a:p>
         </p:txBody>
@@ -3265,7 +3265,7 @@
                 </a:solidFill>
                 <a:latin typeface="Segoe UI"/>
               </a:rPr>
-              <a:t>RAG 11R / 16A / 19G   |   56.5% above 200DMA   |   Portfolio Rs 1,890,361 (+9.6%)</a:t>
+              <a:t>RAG 10R / 19A / 17G   |   54.3% above 200DMA   |   Portfolio Rs 1,861,632 (+8.0%)</a:t>
             </a:r>
           </a:p>
         </p:txBody>
@@ -3587,7 +3587,7 @@
                 </a:solidFill>
                 <a:latin typeface="Segoe UI"/>
               </a:rPr>
-              <a:t>Tesla</a:t>
+              <a:t>Crude Oil WTI</a:t>
             </a:r>
           </a:p>
         </p:txBody>
@@ -3621,7 +3621,7 @@
                 </a:solidFill>
                 <a:latin typeface="Segoe UI"/>
               </a:rPr>
-              <a:t>TSLA · AMBER</a:t>
+              <a:t>CL=F · AMBER</a:t>
             </a:r>
           </a:p>
         </p:txBody>
@@ -3655,7 +3655,7 @@
                 </a:solidFill>
                 <a:latin typeface="Segoe UI"/>
               </a:rPr>
-              <a:t>+13.9%</a:t>
+              <a:t>+15.2%</a:t>
             </a:r>
           </a:p>
         </p:txBody>
@@ -3781,7 +3781,7 @@
                 </a:solidFill>
                 <a:latin typeface="Segoe UI"/>
               </a:rPr>
-              <a:t>+13.9%</a:t>
+              <a:t>+15.0%</a:t>
             </a:r>
           </a:p>
         </p:txBody>
@@ -3839,7 +3839,7 @@
                 </a:solidFill>
                 <a:latin typeface="Segoe UI"/>
               </a:rPr>
-              <a:t>Infosys</a:t>
+              <a:t>Tesla</a:t>
             </a:r>
           </a:p>
         </p:txBody>
@@ -3873,7 +3873,7 @@
                 </a:solidFill>
                 <a:latin typeface="Segoe UI"/>
               </a:rPr>
-              <a:t>INFY.NS · AMBER</a:t>
+              <a:t>TSLA · AMBER</a:t>
             </a:r>
           </a:p>
         </p:txBody>
@@ -3907,7 +3907,7 @@
                 </a:solidFill>
                 <a:latin typeface="Segoe UI"/>
               </a:rPr>
-              <a:t>+13.0%</a:t>
+              <a:t>+13.7%</a:t>
             </a:r>
           </a:p>
         </p:txBody>
@@ -3965,7 +3965,7 @@
                 </a:solidFill>
                 <a:latin typeface="Segoe UI"/>
               </a:rPr>
-              <a:t>Crude Oil WTI</a:t>
+              <a:t>Infosys</a:t>
             </a:r>
           </a:p>
         </p:txBody>
@@ -3999,7 +3999,7 @@
                 </a:solidFill>
                 <a:latin typeface="Segoe UI"/>
               </a:rPr>
-              <a:t>CL=F · AMBER</a:t>
+              <a:t>INFY.NS · AMBER</a:t>
             </a:r>
           </a:p>
         </p:txBody>
@@ -4033,7 +4033,7 @@
                 </a:solidFill>
                 <a:latin typeface="Segoe UI"/>
               </a:rPr>
-              <a:t>+12.6%</a:t>
+              <a:t>+13.0%</a:t>
             </a:r>
           </a:p>
         </p:txBody>
@@ -4193,7 +4193,7 @@
                 </a:solidFill>
                 <a:latin typeface="Segoe UI"/>
               </a:rPr>
-              <a:t>-15.6%</a:t>
+              <a:t>-19.5%</a:t>
             </a:r>
           </a:p>
         </p:txBody>
@@ -4319,7 +4319,7 @@
                 </a:solidFill>
                 <a:latin typeface="Segoe UI"/>
               </a:rPr>
-              <a:t>-14.1%</a:t>
+              <a:t>-17.6%</a:t>
             </a:r>
           </a:p>
         </p:txBody>
@@ -4377,7 +4377,7 @@
                 </a:solidFill>
                 <a:latin typeface="Segoe UI"/>
               </a:rPr>
-              <a:t>Silver</a:t>
+              <a:t>Alphabet</a:t>
             </a:r>
           </a:p>
         </p:txBody>
@@ -4411,7 +4411,7 @@
                 </a:solidFill>
                 <a:latin typeface="Segoe UI"/>
               </a:rPr>
-              <a:t>SI=F · RED</a:t>
+              <a:t>GOOGL · RED</a:t>
             </a:r>
           </a:p>
         </p:txBody>
@@ -4445,7 +4445,7 @@
                 </a:solidFill>
                 <a:latin typeface="Segoe UI"/>
               </a:rPr>
-              <a:t>-10.1%</a:t>
+              <a:t>-17.5%</a:t>
             </a:r>
           </a:p>
         </p:txBody>
@@ -4503,7 +4503,7 @@
                 </a:solidFill>
                 <a:latin typeface="Segoe UI"/>
               </a:rPr>
-              <a:t>Clean Energy</a:t>
+              <a:t>Silver</a:t>
             </a:r>
           </a:p>
         </p:txBody>
@@ -4537,7 +4537,7 @@
                 </a:solidFill>
                 <a:latin typeface="Segoe UI"/>
               </a:rPr>
-              <a:t>ICLN · RED</a:t>
+              <a:t>SI=F · RED</a:t>
             </a:r>
           </a:p>
         </p:txBody>
@@ -4571,7 +4571,7 @@
                 </a:solidFill>
                 <a:latin typeface="Segoe UI"/>
               </a:rPr>
-              <a:t>-7.4%</a:t>
+              <a:t>-14.0%</a:t>
             </a:r>
           </a:p>
         </p:txBody>
@@ -4629,7 +4629,7 @@
                 </a:solidFill>
                 <a:latin typeface="Segoe UI"/>
               </a:rPr>
-              <a:t>Hang Seng</a:t>
+              <a:t>Bitcoin</a:t>
             </a:r>
           </a:p>
         </p:txBody>
@@ -4659,11 +4659,11 @@
             <a:r>
               <a:rPr sz="900" b="0">
                 <a:solidFill>
-                  <a:srgbClr val="EF4444"/>
-                </a:solidFill>
-                <a:latin typeface="Segoe UI"/>
-              </a:rPr>
-              <a:t>^HSI · RED</a:t>
+                  <a:srgbClr val="22C55E"/>
+                </a:solidFill>
+                <a:latin typeface="Segoe UI"/>
+              </a:rPr>
+              <a:t>BTC-USD · GREEN</a:t>
             </a:r>
           </a:p>
         </p:txBody>
@@ -4697,7 +4697,7 @@
                 </a:solidFill>
                 <a:latin typeface="Segoe UI"/>
               </a:rPr>
-              <a:t>-5.9%</a:t>
+              <a:t>-7.8%</a:t>
             </a:r>
           </a:p>
         </p:txBody>
@@ -4967,7 +4967,7 @@
                 </a:solidFill>
                 <a:latin typeface="Segoe UI"/>
               </a:rPr>
-              <a:t>Crude Oil WTI</a:t>
+              <a:t>Apple</a:t>
             </a:r>
           </a:p>
         </p:txBody>
@@ -5035,7 +5035,7 @@
                 </a:solidFill>
                 <a:latin typeface="Segoe UI"/>
               </a:rPr>
-              <a:t>92%</a:t>
+              <a:t>95%</a:t>
             </a:r>
           </a:p>
         </p:txBody>
@@ -5103,7 +5103,7 @@
                 </a:solidFill>
                 <a:latin typeface="Segoe UI"/>
               </a:rPr>
-              <a:t>US Energy</a:t>
+              <a:t>Crude Oil WTI</a:t>
             </a:r>
           </a:p>
         </p:txBody>
@@ -5171,7 +5171,7 @@
                 </a:solidFill>
                 <a:latin typeface="Segoe UI"/>
               </a:rPr>
-              <a:t>85%</a:t>
+              <a:t>92%</a:t>
             </a:r>
           </a:p>
         </p:txBody>
@@ -5205,7 +5205,7 @@
                 </a:solidFill>
                 <a:latin typeface="Segoe UI"/>
               </a:rPr>
-              <a:t>above 200DMA · golden cross (50&gt;200) · MACD bearish</a:t>
+              <a:t>above 200DMA · golden cross (50&gt;200) · MACD bullish</a:t>
             </a:r>
           </a:p>
         </p:txBody>
@@ -5239,7 +5239,7 @@
                 </a:solidFill>
                 <a:latin typeface="Segoe UI"/>
               </a:rPr>
-              <a:t>Apple</a:t>
+              <a:t>US Energy</a:t>
             </a:r>
           </a:p>
         </p:txBody>
@@ -5307,7 +5307,7 @@
                 </a:solidFill>
                 <a:latin typeface="Segoe UI"/>
               </a:rPr>
-              <a:t>85%</a:t>
+              <a:t>86%</a:t>
             </a:r>
           </a:p>
         </p:txBody>
@@ -5511,7 +5511,7 @@
                 </a:solidFill>
                 <a:latin typeface="Segoe UI"/>
               </a:rPr>
-              <a:t>Microsoft</a:t>
+              <a:t>Bharti Airtel</a:t>
             </a:r>
           </a:p>
         </p:txBody>
@@ -5579,7 +5579,7 @@
                 </a:solidFill>
                 <a:latin typeface="Segoe UI"/>
               </a:rPr>
-              <a:t>84%</a:t>
+              <a:t>83%</a:t>
             </a:r>
           </a:p>
         </p:txBody>
@@ -5613,7 +5613,7 @@
                 </a:solidFill>
                 <a:latin typeface="Segoe UI"/>
               </a:rPr>
-              <a:t>above 200DMA · golden cross (50&gt;200) · MACD bearish</a:t>
+              <a:t>above 200DMA · death cross (50&lt;200) · MACD bullish</a:t>
             </a:r>
           </a:p>
         </p:txBody>
@@ -5647,7 +5647,7 @@
                 </a:solidFill>
                 <a:latin typeface="Segoe UI"/>
               </a:rPr>
-              <a:t>Bharti Airtel</a:t>
+              <a:t>Microsoft</a:t>
             </a:r>
           </a:p>
         </p:txBody>
@@ -5715,7 +5715,7 @@
                 </a:solidFill>
                 <a:latin typeface="Segoe UI"/>
               </a:rPr>
-              <a:t>84%</a:t>
+              <a:t>83%</a:t>
             </a:r>
           </a:p>
         </p:txBody>
@@ -5749,7 +5749,7 @@
                 </a:solidFill>
                 <a:latin typeface="Segoe UI"/>
               </a:rPr>
-              <a:t>above 200DMA · death cross (50&lt;200) · MACD bullish</a:t>
+              <a:t>above 200DMA · golden cross (50&gt;200) · MACD bearish</a:t>
             </a:r>
           </a:p>
         </p:txBody>
@@ -5919,7 +5919,7 @@
                 </a:solidFill>
                 <a:latin typeface="Segoe UI"/>
               </a:rPr>
-              <a:t>Copper</a:t>
+              <a:t>S&amp;P 500</a:t>
             </a:r>
           </a:p>
         </p:txBody>
@@ -5987,7 +5987,7 @@
                 </a:solidFill>
                 <a:latin typeface="Segoe UI"/>
               </a:rPr>
-              <a:t>94%</a:t>
+              <a:t>82%</a:t>
             </a:r>
           </a:p>
         </p:txBody>
@@ -6055,7 +6055,7 @@
                 </a:solidFill>
                 <a:latin typeface="Segoe UI"/>
               </a:rPr>
-              <a:t>S&amp;P 500</a:t>
+              <a:t>Copper</a:t>
             </a:r>
           </a:p>
         </p:txBody>
@@ -6123,7 +6123,7 @@
                 </a:solidFill>
                 <a:latin typeface="Segoe UI"/>
               </a:rPr>
-              <a:t>81%</a:t>
+              <a:t>80%</a:t>
             </a:r>
           </a:p>
         </p:txBody>
@@ -6327,7 +6327,7 @@
                 </a:solidFill>
                 <a:latin typeface="Segoe UI"/>
               </a:rPr>
-              <a:t>TCS</a:t>
+              <a:t>US 1-3Y Treasury</a:t>
             </a:r>
           </a:p>
         </p:txBody>
@@ -6395,7 +6395,7 @@
                 </a:solidFill>
                 <a:latin typeface="Segoe UI"/>
               </a:rPr>
-              <a:t>70%</a:t>
+              <a:t>89%</a:t>
             </a:r>
           </a:p>
         </p:txBody>
@@ -6429,7 +6429,7 @@
                 </a:solidFill>
                 <a:latin typeface="Segoe UI"/>
               </a:rPr>
-              <a:t>above 200DMA · death cross (50&lt;200) · MACD bearish</a:t>
+              <a:t>above 200DMA · golden cross (50&gt;200) · MACD bullish</a:t>
             </a:r>
           </a:p>
         </p:txBody>
@@ -6463,7 +6463,7 @@
                 </a:solidFill>
                 <a:latin typeface="Segoe UI"/>
               </a:rPr>
-              <a:t>DAX</a:t>
+              <a:t>TCS</a:t>
             </a:r>
           </a:p>
         </p:txBody>
@@ -6531,7 +6531,7 @@
                 </a:solidFill>
                 <a:latin typeface="Segoe UI"/>
               </a:rPr>
-              <a:t>66%</a:t>
+              <a:t>70%</a:t>
             </a:r>
           </a:p>
         </p:txBody>
@@ -6565,7 +6565,7 @@
                 </a:solidFill>
                 <a:latin typeface="Segoe UI"/>
               </a:rPr>
-              <a:t>above 200DMA · golden cross (50&gt;200) · MACD bullish</a:t>
+              <a:t>above 200DMA · death cross (50&lt;200) · MACD bearish</a:t>
             </a:r>
           </a:p>
         </p:txBody>
@@ -6659,7 +6659,7 @@
                 </a:solidFill>
                 <a:latin typeface="Segoe UI"/>
               </a:rPr>
-              <a:t>Base currency INR · USD/INR 95.21</a:t>
+              <a:t>Base currency INR · USD/INR 95.18</a:t>
             </a:r>
           </a:p>
         </p:txBody>
@@ -7067,7 +7067,7 @@
                 </a:solidFill>
                 <a:latin typeface="Segoe UI"/>
               </a:rPr>
-              <a:t>79,893</a:t>
+              <a:t>77,077</a:t>
             </a:r>
           </a:p>
         </p:txBody>
@@ -7101,7 +7101,7 @@
                 </a:solidFill>
                 <a:latin typeface="Segoe UI"/>
               </a:rPr>
-              <a:t>Rs 760,666</a:t>
+              <a:t>Rs 733,619</a:t>
             </a:r>
           </a:p>
         </p:txBody>
@@ -7135,7 +7135,7 @@
                 </a:solidFill>
                 <a:latin typeface="Segoe UI"/>
               </a:rPr>
-              <a:t>Rs 189,406</a:t>
+              <a:t>Rs 162,539</a:t>
             </a:r>
           </a:p>
         </p:txBody>
@@ -7169,7 +7169,7 @@
                 </a:solidFill>
                 <a:latin typeface="Segoe UI"/>
               </a:rPr>
-              <a:t>+33.2%</a:t>
+              <a:t>+28.5%</a:t>
             </a:r>
           </a:p>
         </p:txBody>
@@ -7203,7 +7203,7 @@
                 </a:solidFill>
                 <a:latin typeface="Segoe UI"/>
               </a:rPr>
-              <a:t>-1.1%</a:t>
+              <a:t>-5.2%</a:t>
             </a:r>
           </a:p>
         </p:txBody>
@@ -7339,7 +7339,7 @@
                 </a:solidFill>
                 <a:latin typeface="Segoe UI"/>
               </a:rPr>
-              <a:t>4,074</a:t>
+              <a:t>4,022</a:t>
             </a:r>
           </a:p>
         </p:txBody>
@@ -7373,7 +7373,7 @@
                 </a:solidFill>
                 <a:latin typeface="Segoe UI"/>
               </a:rPr>
-              <a:t>Rs 387,914</a:t>
+              <a:t>Rs 382,862</a:t>
             </a:r>
           </a:p>
         </p:txBody>
@@ -7407,7 +7407,7 @@
                 </a:solidFill>
                 <a:latin typeface="Segoe UI"/>
               </a:rPr>
-              <a:t>Rs 168,931</a:t>
+              <a:t>Rs 163,948</a:t>
             </a:r>
           </a:p>
         </p:txBody>
@@ -7441,7 +7441,7 @@
                 </a:solidFill>
                 <a:latin typeface="Segoe UI"/>
               </a:rPr>
-              <a:t>+77.1%</a:t>
+              <a:t>+74.9%</a:t>
             </a:r>
           </a:p>
         </p:txBody>
@@ -7475,7 +7475,7 @@
                 </a:solidFill>
                 <a:latin typeface="Segoe UI"/>
               </a:rPr>
-              <a:t>+0.6%</a:t>
+              <a:t>+0.0%</a:t>
             </a:r>
           </a:p>
         </p:txBody>
@@ -7611,7 +7611,7 @@
                 </a:solidFill>
                 <a:latin typeface="Segoe UI"/>
               </a:rPr>
-              <a:t>344</a:t>
+              <a:t>349</a:t>
             </a:r>
           </a:p>
         </p:txBody>
@@ -7645,7 +7645,7 @@
                 </a:solidFill>
                 <a:latin typeface="Segoe UI"/>
               </a:rPr>
-              <a:t>Rs 327,361</a:t>
+              <a:t>Rs 332,093</a:t>
             </a:r>
           </a:p>
         </p:txBody>
@@ -7679,7 +7679,7 @@
                 </a:solidFill>
                 <a:latin typeface="Segoe UI"/>
               </a:rPr>
-              <a:t>Rs 151,222</a:t>
+              <a:t>Rs 156,010</a:t>
             </a:r>
           </a:p>
         </p:txBody>
@@ -7713,7 +7713,7 @@
                 </a:solidFill>
                 <a:latin typeface="Segoe UI"/>
               </a:rPr>
-              <a:t>+85.8%</a:t>
+              <a:t>+88.6%</a:t>
             </a:r>
           </a:p>
         </p:txBody>
@@ -7883,7 +7883,7 @@
                 </a:solidFill>
                 <a:latin typeface="Segoe UI"/>
               </a:rPr>
-              <a:t>215</a:t>
+              <a:t>214</a:t>
             </a:r>
           </a:p>
         </p:txBody>
@@ -7917,7 +7917,7 @@
                 </a:solidFill>
                 <a:latin typeface="Segoe UI"/>
               </a:rPr>
-              <a:t>Rs 164,051</a:t>
+              <a:t>Rs 162,689</a:t>
             </a:r>
           </a:p>
         </p:txBody>
@@ -7951,7 +7951,7 @@
                 </a:solidFill>
                 <a:latin typeface="Segoe UI"/>
               </a:rPr>
-              <a:t>Rs -178,705</a:t>
+              <a:t>Rs -179,959</a:t>
             </a:r>
           </a:p>
         </p:txBody>
@@ -7985,7 +7985,7 @@
                 </a:solidFill>
                 <a:latin typeface="Segoe UI"/>
               </a:rPr>
-              <a:t>-52.1%</a:t>
+              <a:t>-52.5%</a:t>
             </a:r>
           </a:p>
         </p:txBody>
@@ -9141,7 +9141,7 @@
                 </a:solidFill>
                 <a:latin typeface="Segoe UI"/>
               </a:rPr>
-              <a:t>Total Rs 1,890,361 | P&amp;L Rs 165,523 (+9.6%) | Sharpe 0.61 | Vol 17.15% | VaR95 -1.64%/day</a:t>
+              <a:t>Total Rs 1,861,632 | P&amp;L Rs 137,207 (+8.0%) | Sharpe 0.45 | Vol 17.03% | VaR95 -1.67%/day</a:t>
             </a:r>
           </a:p>
         </p:txBody>
